--- a/slides/2026-10-03_研究進捗報告_claude.pptx
+++ b/slides/2026-10-03_研究進捗報告_claude.pptx
@@ -5,61 +5,61 @@
     <p:sldMasterId id="2147483648" r:id="rId1"/>
   </p:sldMasterIdLst>
   <p:notesMasterIdLst>
-    <p:notesMasterId r:id="rId37"/>
+    <p:notesMasterId r:id="rId54"/>
   </p:notesMasterIdLst>
   <p:sldIdLst>
     <p:sldId id="256" r:id="rId2"/>
     <p:sldId id="257" r:id="rId3"/>
     <p:sldId id="258" r:id="rId4"/>
     <p:sldId id="259" r:id="rId5"/>
-    <p:sldId id="301" r:id="rId46"/>
-    <p:sldId id="302" r:id="rId45"/>
-    <p:sldId id="303" r:id="rId44"/>
-    <p:sldId id="304" r:id="rId54"/>
-    <p:sldId id="305" r:id="rId55"/>
-    <p:sldId id="306" r:id="rId56"/>
-    <p:sldId id="307" r:id="rId57"/>
-    <p:sldId id="308" r:id="rId58"/>
-    <p:sldId id="260" r:id="rId6"/>
-    <p:sldId id="294" r:id="rId47"/>
-    <p:sldId id="261" r:id="rId7"/>
-    <p:sldId id="262" r:id="rId8"/>
-    <p:sldId id="295" r:id="rId48"/>
-    <p:sldId id="296" r:id="rId49"/>
-    <p:sldId id="297" r:id="rId50"/>
-    <p:sldId id="298" r:id="rId51"/>
-    <p:sldId id="309" r:id="rId59"/>
-    <p:sldId id="299" r:id="rId52"/>
-    <p:sldId id="300" r:id="rId53"/>
-    <p:sldId id="263" r:id="rId9"/>
-    <p:sldId id="264" r:id="rId10"/>
-    <p:sldId id="310" r:id="rId16"/>
-    <p:sldId id="311" r:id="rId60"/>
-    <p:sldId id="265" r:id="rId11"/>
-    <p:sldId id="266" r:id="rId12"/>
-    <p:sldId id="267" r:id="rId13"/>
-    <p:sldId id="268" r:id="rId14"/>
-    <p:sldId id="269" r:id="rId15"/>
-    <p:sldId id="271" r:id="rId17"/>
-    <p:sldId id="272" r:id="rId18"/>
-    <p:sldId id="273" r:id="rId19"/>
-    <p:sldId id="274" r:id="rId20"/>
-    <p:sldId id="275" r:id="rId21"/>
-    <p:sldId id="276" r:id="rId22"/>
-    <p:sldId id="277" r:id="rId23"/>
-    <p:sldId id="278" r:id="rId24"/>
-    <p:sldId id="279" r:id="rId25"/>
-    <p:sldId id="280" r:id="rId26"/>
-    <p:sldId id="281" r:id="rId27"/>
-    <p:sldId id="282" r:id="rId28"/>
-    <p:sldId id="283" r:id="rId29"/>
-    <p:sldId id="284" r:id="rId30"/>
-    <p:sldId id="285" r:id="rId31"/>
-    <p:sldId id="286" r:id="rId32"/>
-    <p:sldId id="287" r:id="rId33"/>
-    <p:sldId id="288" r:id="rId34"/>
-    <p:sldId id="289" r:id="rId35"/>
-    <p:sldId id="290" r:id="rId36"/>
+    <p:sldId id="301" r:id="rId6"/>
+    <p:sldId id="302" r:id="rId7"/>
+    <p:sldId id="303" r:id="rId8"/>
+    <p:sldId id="304" r:id="rId9"/>
+    <p:sldId id="305" r:id="rId10"/>
+    <p:sldId id="306" r:id="rId11"/>
+    <p:sldId id="307" r:id="rId12"/>
+    <p:sldId id="308" r:id="rId13"/>
+    <p:sldId id="260" r:id="rId14"/>
+    <p:sldId id="294" r:id="rId15"/>
+    <p:sldId id="261" r:id="rId16"/>
+    <p:sldId id="262" r:id="rId17"/>
+    <p:sldId id="295" r:id="rId18"/>
+    <p:sldId id="296" r:id="rId19"/>
+    <p:sldId id="297" r:id="rId20"/>
+    <p:sldId id="298" r:id="rId21"/>
+    <p:sldId id="309" r:id="rId22"/>
+    <p:sldId id="299" r:id="rId23"/>
+    <p:sldId id="300" r:id="rId24"/>
+    <p:sldId id="263" r:id="rId25"/>
+    <p:sldId id="264" r:id="rId26"/>
+    <p:sldId id="310" r:id="rId27"/>
+    <p:sldId id="311" r:id="rId28"/>
+    <p:sldId id="265" r:id="rId29"/>
+    <p:sldId id="266" r:id="rId30"/>
+    <p:sldId id="267" r:id="rId31"/>
+    <p:sldId id="268" r:id="rId32"/>
+    <p:sldId id="269" r:id="rId33"/>
+    <p:sldId id="271" r:id="rId34"/>
+    <p:sldId id="272" r:id="rId35"/>
+    <p:sldId id="273" r:id="rId36"/>
+    <p:sldId id="274" r:id="rId37"/>
+    <p:sldId id="275" r:id="rId38"/>
+    <p:sldId id="276" r:id="rId39"/>
+    <p:sldId id="277" r:id="rId40"/>
+    <p:sldId id="278" r:id="rId41"/>
+    <p:sldId id="279" r:id="rId42"/>
+    <p:sldId id="280" r:id="rId43"/>
+    <p:sldId id="281" r:id="rId44"/>
+    <p:sldId id="282" r:id="rId45"/>
+    <p:sldId id="283" r:id="rId46"/>
+    <p:sldId id="284" r:id="rId47"/>
+    <p:sldId id="285" r:id="rId48"/>
+    <p:sldId id="286" r:id="rId49"/>
+    <p:sldId id="287" r:id="rId50"/>
+    <p:sldId id="288" r:id="rId51"/>
+    <p:sldId id="289" r:id="rId52"/>
+    <p:sldId id="290" r:id="rId53"/>
   </p:sldIdLst>
   <p:sldSz cx="12192000" cy="6858000"/>
   <p:notesSz cx="6858000" cy="9144000"/>
@@ -180,7 +180,7 @@
 <file path=ppt/revisionInfo.xml><?xml version="1.0" encoding="utf-8"?>
 <p1510:revInfo xmlns:a="http://schemas.openxmlformats.org/drawingml/2006/main" xmlns:r="http://schemas.openxmlformats.org/officeDocument/2006/relationships" xmlns:p1510="http://schemas.microsoft.com/office/powerpoint/2015/10/main">
   <p1510:revLst>
-    <p1510:client id="{0C18A6C4-2C47-4DAD-A1DF-DD0206B853E7}" v="2" dt="2026-10-02T01:15:06.370"/>
+    <p1510:client id="{C8631C4B-C2FB-4DFF-B7D9-28DD25A7F289}" v="1" dt="2026-10-03T03:36:53.521"/>
   </p1510:revLst>
 </p1510:revInfo>
 </file>
@@ -189,8 +189,8 @@
 <pc:chgInfo xmlns:a="http://schemas.openxmlformats.org/drawingml/2006/main" xmlns:r="http://schemas.openxmlformats.org/officeDocument/2006/relationships" xmlns:ac="http://schemas.microsoft.com/office/drawing/2013/main/command" xmlns:pc="http://schemas.microsoft.com/office/powerpoint/2013/main/command">
   <pc:docChgLst>
     <pc:chgData name="202304239" userId="ab1adf7a-b8eb-4038-b404-de23e20d8a3a" providerId="ADAL" clId="{6C0E59ED-D716-49AF-B2FA-B94E7B8E5A8C}"/>
-    <pc:docChg chg="modSld">
-      <pc:chgData name="202304239" userId="ab1adf7a-b8eb-4038-b404-de23e20d8a3a" providerId="ADAL" clId="{6C0E59ED-D716-49AF-B2FA-B94E7B8E5A8C}" dt="2026-10-02T01:41:32.636" v="29" actId="20577"/>
+    <pc:docChg chg="custSel modSld">
+      <pc:chgData name="202304239" userId="ab1adf7a-b8eb-4038-b404-de23e20d8a3a" providerId="ADAL" clId="{6C0E59ED-D716-49AF-B2FA-B94E7B8E5A8C}" dt="2026-10-03T03:37:00.554" v="38" actId="20577"/>
       <pc:docMkLst>
         <pc:docMk/>
       </pc:docMkLst>
@@ -239,6 +239,36 @@
           </ac:spMkLst>
         </pc:spChg>
       </pc:sldChg>
+      <pc:sldChg chg="delSp mod">
+        <pc:chgData name="202304239" userId="ab1adf7a-b8eb-4038-b404-de23e20d8a3a" providerId="ADAL" clId="{6C0E59ED-D716-49AF-B2FA-B94E7B8E5A8C}" dt="2026-10-03T03:36:34.391" v="30" actId="478"/>
+        <pc:sldMkLst>
+          <pc:docMk/>
+          <pc:sldMk cId="0" sldId="260"/>
+        </pc:sldMkLst>
+        <pc:picChg chg="del">
+          <ac:chgData name="202304239" userId="ab1adf7a-b8eb-4038-b404-de23e20d8a3a" providerId="ADAL" clId="{6C0E59ED-D716-49AF-B2FA-B94E7B8E5A8C}" dt="2026-10-03T03:36:34.391" v="30" actId="478"/>
+          <ac:picMkLst>
+            <pc:docMk/>
+            <pc:sldMk cId="0" sldId="260"/>
+            <ac:picMk id="6" creationId="{00000000-0000-0000-0000-000000000000}"/>
+          </ac:picMkLst>
+        </pc:picChg>
+      </pc:sldChg>
+      <pc:sldChg chg="modSp mod">
+        <pc:chgData name="202304239" userId="ab1adf7a-b8eb-4038-b404-de23e20d8a3a" providerId="ADAL" clId="{6C0E59ED-D716-49AF-B2FA-B94E7B8E5A8C}" dt="2026-10-03T03:37:00.554" v="38" actId="20577"/>
+        <pc:sldMkLst>
+          <pc:docMk/>
+          <pc:sldMk cId="0" sldId="308"/>
+        </pc:sldMkLst>
+        <pc:spChg chg="mod">
+          <ac:chgData name="202304239" userId="ab1adf7a-b8eb-4038-b404-de23e20d8a3a" providerId="ADAL" clId="{6C0E59ED-D716-49AF-B2FA-B94E7B8E5A8C}" dt="2026-10-03T03:37:00.554" v="38" actId="20577"/>
+          <ac:spMkLst>
+            <pc:docMk/>
+            <pc:sldMk cId="0" sldId="308"/>
+            <ac:spMk id="3" creationId="{00000000-0000-0000-0000-000000000000}"/>
+          </ac:spMkLst>
+        </pc:spChg>
+      </pc:sldChg>
     </pc:docChg>
   </pc:docChgLst>
 </pc:chgInfo>
@@ -326,7 +356,7 @@
           <a:p>
             <a:fld id="{B414FD46-9C41-4E77-8212-EE695A2FE528}" type="datetimeFigureOut">
               <a:rPr lang="en-US" smtClean="0"/>
-              <a:t>10/2/2026</a:t>
+              <a:t>10/3/2026</a:t>
             </a:fld>
             <a:endParaRPr lang="en-US"/>
           </a:p>
@@ -718,27 +748,22 @@
           <a:lstStyle/>
           <a:p>
             <a:r>
-              <a:t>フィッシャー情報: 尤度の山の鋭さ (2 階微分)。山が鋭いほどパラメータがよく決まる。</a:t>
-            </a:r>
-          </a:p>
-          <a:p>
-            <a:r>
-              <a:t>「ハローだけの手がかり」= 他の成分と区別できる部分の情報 (フィッシャー行列のシューア補行列)。有意度は、おおよそ「倍率の推定値 ÷ その誤差」で、誤差は情報の平方根に反比例する。</a:t>
-            </a:r>
-          </a:p>
-          <a:p>
-            <a:r>
-              <a:t>予測 6.6σ と実測 5.0σ の残りの差は、バブル外でハローの倍率が 0.77 倍と低いことで説明できる。この内外の差は約 1.5σ で、意味のある差ではない。</a:t>
-            </a:r>
-          </a:p>
-          <a:p>
-            <a:r>
-              <a:t>対照: 同じ形の矩形を経度方向に ±20°, ±30°, ±38° ずらして外すと 14.6〜16.4σ (Totani と同じやり方)。</a:t>
-            </a:r>
-          </a:p>
-          <a:p>
-            <a:r>
-              <a:t>たとえ: 写真の真ん中を隠すと自信が下がるが、それは見分けるヒントが真ん中に集まっていたから。</a:t>
+              <a:t>NFW: シミュレーションで得られる暗黒物質ハローの典型的な密度の形。中心付近では距離に反比例、外側では距離の 3 乗に反比例して薄くなる。</a:t>
+            </a:r>
+          </a:p>
+          <a:p>
+            <a:r>
+              <a:t>形はエネルギーで変わらない (どのエネルギーでも同じ地図)。明るさ (倍率) だけを各エネルギーで決める。だから「どのエネルギーでハローが必要か」が有意度のスペクトルになる。</a:t>
+            </a:r>
+          </a:p>
+          <a:p>
+            <a:r>
+              <a:t>ICS と同じく、なめらかで中心に向かって明るい。違いは、ハローのほうが中心に強く集まっていること。</a:t>
+            </a:r>
+          </a:p>
+          <a:p>
+            <a:r>
+              <a:t>右の地図: 20.8 GeV の型紙 (倍率は掛けていない。形だけを見る図)。cloud_reports/2026-10-02_plot_templates.py で作成。</a:t>
             </a:r>
           </a:p>
         </p:txBody>
@@ -808,22 +833,12 @@
           <a:lstStyle/>
           <a:p>
             <a:r>
-              <a:t>全体の明るさのずれ (ICS が GALPROP の 1.6 倍、など) は倍率が吸収するのでハローにはならない。ハローに化けるには「銀河中心寄りだけ明るい」という形のずれが必要。</a:t>
-            </a:r>
-          </a:p>
-          <a:p>
-            <a:r>
-              <a:t>等方近似: GALPROP の設定が IC_anisotropic = 0。Moskalenko &amp; Strong (2000) Fig. 6 では、非等方にすると 10 GeV 付近で 1.1〜1.3 倍、銀河中心の上より外側のほうが大きい。</a:t>
-            </a:r>
-          </a:p>
-          <a:p>
-            <a:r>
-              <a:t>3 分割 = 星の光・ちり・宇宙背景の光、の 3 種類の光を電子がはね上げたもの。19.5σ と 18.4σ はクラウドの計算機で、Totani と同じやり方で比べた値 (どちらも同じ条件なので、差で言う)。Totani §3.4.4 の同種の確認とも同じ結論。</a:t>
-            </a:r>
-          </a:p>
-          <a:p>
-            <a:r>
-              <a:t>残る可能性: GALPROP の ICS の「空間の形」が、銀河中心寄りで 2.3 倍ずれている場合。今の道具では確かめられない。</a:t>
+              <a:t>この後の尤度・有意度・MCMC のスライドは、全部「係数 9 個の決め方」の説明。難しい言葉が出てきたら、このスライドに戻って「今どの行の話か」を確認する。</a:t>
+            </a:r>
+          </a:p>
+          <a:p>
+            <a:r>
+              <a:t>型紙 = 前の 7 枚で見た地図。係数 = その地図を何倍して足すか。</a:t>
             </a:r>
           </a:p>
         </p:txBody>
@@ -893,22 +908,17 @@
           <a:lstStyle/>
           <a:p>
             <a:r>
-              <a:t>ばらつき = 0 からのずれの 2 乗平均の平方根。光子が十分あるビン 2–10 (2.6–169 GeV) の 207 個から計算。</a:t>
-            </a:r>
-          </a:p>
-          <a:p>
-            <a:r>
-              <a:t>95% 区間はブートストラップ (データを復元抽出し直して何度も計算) で付けた。同じ場所のビン同士は相関する (隣どうし +0.31) ので、場所ごとにまとめて引き直した。</a:t>
-            </a:r>
-          </a:p>
-          <a:p>
-            <a:r>
-              <a:t>較正の仮定: 背景モデル (型紙) の誤りで、σ の分散が一様に 1.26² 倍に膨らむ (統計でいう過分散)。19σ のような大きな値でも同じ倍率かは確かめていない。天の川は背景がもっと複雑なので、本当の倍率はもっと大きいかもしれない (15σ は楽観寄り)。</a:t>
-            </a:r>
-          </a:p>
-          <a:p>
-            <a:r>
-              <a:t>記録の「1.362 (250 個)」は今の結果ファイルからは再現できなかった。最大 4.50σ は最低エネルギー (1.5 GeV) のビン。</a:t>
+              <a:t>ポアソン分布: 平均 λ のとき、n 個来る確率は λ^n e^(−λ) / n!。その対数を全セルで足したものが ln L (n に依存する定数 ln n! は省略)。</a:t>
+            </a:r>
+          </a:p>
+          <a:p>
+            <a:r>
+              <a:t>銀河面を除いた有効なセルは 120 個。セルを 10° と大きくとるのは、望遠鏡のぼやけ (PSF) よりずっと大きく、PSF の畳み込みを省略できるため (Totani と同じ)。</a:t>
+            </a:r>
+          </a:p>
+          <a:p>
+            <a:r>
+              <a:t>最大化は Totani (2025) §2.2 と同じく MCMC (emcee) で行い、歩いた中で ln L が最大の点を最良値とする。</a:t>
             </a:r>
           </a:p>
         </p:txBody>
@@ -978,17 +988,27 @@
           <a:lstStyle/>
           <a:p>
             <a:r>
-              <a:t>黒の点: 各エネルギービンで 23 か所から測ったばらつきと 95% 区間。灰色の帯: ビン 2–10 をまとめた値 1.26 とその 95% 区間。</a:t>
-            </a:r>
-          </a:p>
-          <a:p>
-            <a:r>
-              <a:t>灰色の点: 1.5 GeV はばらつき 2.2 の外れ (望遠鏡のぼやけが大きく、背景モデルの誤りが効きやすい)。285 GeV 以上は光子が数個〜数十個で、Wilks の定理の前提 (データが多い) が崩れる。</a:t>
-            </a:r>
-          </a:p>
-          <a:p>
-            <a:r>
-              <a:t>図は slides/figs/plot_null_variance.py で作った。</a:t>
+              <a:t>たとえ: 霧で何も見えない山の上で、一番高い場所を探したい。手元には高度計 (尤度) しかない。</a:t>
+            </a:r>
+          </a:p>
+          <a:p>
+            <a:r>
+              <a:t>歩く人 (MCMC) は、一歩ずつ足を出して高度計を見る。上りなら必ずその方向へ進み、下りでもたまに進む。下りにも進むのは、山頂で止まらずに山の広がり (どこまでが十分高いか) も知るため。</a:t>
+            </a:r>
+          </a:p>
+          <a:p>
+            <a:r>
+              <a:t>歩き終わったら、記録の中で一番高かった地点が最良の倍率、よく歩き回った範囲の幅が誤差になる。</a:t>
+            </a:r>
+          </a:p>
+          <a:p>
+            <a:r>
+              <a:t>ここでの「山」は 9 次元 (倍率が 9 個)。紙に描けないので、歩いて調べるしかない。</a:t>
+            </a:r>
+          </a:p>
+          <a:p>
+            <a:r>
+              <a:t>Totani (2025) §2.2: 最良値と統計誤差を、尤度を MCMC で最大化して求める。本研究も同じ (10/2 に揃えた)。</a:t>
             </a:r>
           </a:p>
         </p:txBody>
@@ -1014,7 +1034,7 @@
 </file>
 
 <file path=ppt/notesSlides/notesSlide14.xml><?xml version="1.0" encoding="utf-8"?>
-<p:notes xmlns:a="http://schemas.openxmlformats.org/drawingml/2006/main" xmlns:p="http://schemas.openxmlformats.org/presentationml/2006/main" xmlns:r="http://schemas.openxmlformats.org/officeDocument/2006/relationships">
+<p:notes xmlns:a="http://schemas.openxmlformats.org/drawingml/2006/main" xmlns:r="http://schemas.openxmlformats.org/officeDocument/2006/relationships" xmlns:p="http://schemas.openxmlformats.org/presentationml/2006/main">
   <p:cSld>
     <p:spTree>
       <p:nvGrpSpPr>
@@ -1034,7 +1054,7 @@
         <p:nvSpPr>
           <p:cNvPr id="2" name="Slide Image Placeholder 1"/>
           <p:cNvSpPr>
-            <a:spLocks noGrp="1"/>
+            <a:spLocks noGrp="1" noRot="1" noChangeAspect="1"/>
           </p:cNvSpPr>
           <p:nvPr>
             <p:ph type="sldImg" idx="2"/>
@@ -1049,41 +1069,31 @@
             <a:spLocks noGrp="1"/>
           </p:cNvSpPr>
           <p:nvPr>
-            <p:ph type="body" idx="3" sz="quarter"/>
-          </p:nvPr>
-        </p:nvSpPr>
-        <p:spPr/>
-        <p:txBody>
-          <a:bodyPr/>
-          <a:lstStyle/>
-          <a:p>
-            <a:r>
-              <a:t>図は 20.8 GeV の型紙そのもの (倍率は掛けていない)。ICS は GALPROP (galdef SLZ6R30T150C2)、ハローは NFW (Via Lactea II)。</a:t>
-            </a:r>
-          </a:p>
-          <a:p>
-            <a:r>
-              <a:t>縦方向 (経度を全部平均、|b| 25°→55°): ハロー 2.70 倍、ICS 2.60 倍暗くなる → ほぼ同じ。</a:t>
-            </a:r>
-          </a:p>
-          <a:p>
-            <a:r>
-              <a:t>横方向 (|b| = 20〜40° の帯、|l| 0°→40°): ハロー 2.67 倍、ICS 1.18 倍 → ここが違う。</a:t>
-            </a:r>
-          </a:p>
-          <a:p>
-            <a:r>
-              <a:t>ICS が横に広いのは、星の光と電子が銀河の円盤 (横に広い) に沿って多いため。ハローは丸い玉なので、どの向きにも同じように中心へ集まる。</a:t>
-            </a:r>
-          </a:p>
-          <a:p>
-            <a:r>
-              <a:t>太陽は銀河中心から 8 kpc 離れているので、どちらも空いっぱいに広がったぼんやりした光に見える。</a:t>
-            </a:r>
-          </a:p>
-          <a:p>
-            <a:r>
-              <a:t>作図: /home/arsei/slidework/make_profiles.py (2026-10-03、ローカル)</a:t>
+            <p:ph type="body" sz="quarter" idx="3"/>
+          </p:nvPr>
+        </p:nvSpPr>
+        <p:spPr/>
+        <p:txBody>
+          <a:bodyPr/>
+          <a:lstStyle/>
+          <a:p>
+            <a:r>
+              <a:t>「なし」は「あり」の特別な場合 (ハローの倍率 = 0) なので、入れ子のモデル。入れ子なら Δln L ≥ 0。</a:t>
+            </a:r>
+          </a:p>
+          <a:p>
+            <a:r>
+              <a:t>Wilks の定理: 帰無仮説 (ハローなし) が正しいとき、2Δln L は自由度 1 の χ² 分布。だから √(2Δln L) が「標準正規分布で何σ」に対応する。</a:t>
+            </a:r>
+          </a:p>
+          <a:p>
+            <a:r>
+              <a:t>定理の前提: データが多い (漸近的)、モデルが正しい、など。モデル (型紙) が間違っていると成り立たない。</a:t>
+            </a:r>
+          </a:p>
+          <a:p>
+            <a:r>
+              <a:t>Totani との関係: Totani (2025) Fig. 9 はハローあり・なしの ln L の差 (Δln L) を示しており、本文の 13–19σ はそれを σ = √(2Δln L) で σ に直した値。Totani は「Wilks の定理」という言葉は書いていないが、この換算はガンマ線天文学で標準 (2Δln L は TS = test statistic と呼ばれ、EGRET の解析 Mattox et al. 1996, ApJ 461, 396 から使われている)。本研究は Totani と同じ換算を使っている。</a:t>
             </a:r>
           </a:p>
         </p:txBody>
@@ -1095,7 +1105,7 @@
             <a:spLocks noGrp="1"/>
           </p:cNvSpPr>
           <p:nvPr>
-            <p:ph type="sldNum" idx="5" sz="quarter"/>
+            <p:ph type="sldNum" sz="quarter" idx="5"/>
           </p:nvPr>
         </p:nvSpPr>
         <p:spPr/>
@@ -1153,7 +1163,22 @@
           <a:lstStyle/>
           <a:p>
             <a:r>
-              <a:t>言えるのは「既知の背景では説明しにくい超過がある」まで。それが暗黒物質かどうかは別の主張。</a:t>
+              <a:t>MCMC (マルコフ連鎖モンテカルロ): 「今いる点の近くに一歩動いてみて、尤度が上がれば進む、下がっても確率的に進む」を繰り返す。長く歩くと、歩いた場所の分布が事後分布になる。</a:t>
+            </a:r>
+          </a:p>
+          <a:p>
+            <a:r>
+              <a:t>事前分布は一様 (倍率の符号の制約と、広い範囲の制限だけ)。</a:t>
+            </a:r>
+          </a:p>
+          <a:p>
+            <a:r>
+              <a:t>emcee は、複数の歩行者が互いの位置を使って次の一歩を決める方式 (affine-invariant ensemble sampler)。</a:t>
+            </a:r>
+          </a:p>
+          <a:p>
+            <a:r>
+              <a:t>自己相関時間 τ: 何歩離れたら前の位置を「忘れる」か。50τ 以上の長さは emcee の推奨。</a:t>
             </a:r>
           </a:p>
         </p:txBody>
@@ -1223,17 +1248,17 @@
           <a:lstStyle/>
           <a:p>
             <a:r>
-              <a:t>矮小銀河 54 個は Local Volume Database (Pace 2025) の確認済みの銀河。何も無い空は |b| &gt; 20° で互いに 20° 以上離した場所。</a:t>
-            </a:r>
-          </a:p>
-          <a:p>
-            <a:r>
-              <a:t>成分は等方・ガス・ICS・点源・ハロー。バブルと Loop I は銀河中心の構造なので入れない。</a:t>
-            </a:r>
-          </a:p>
-          <a:p>
-            <a:r>
-              <a:t>たとえ: 天の川のハローは部屋全体を照らす光なので電球と見分けにくかった。矮小銀河は遠くの豆電球なので、半径 10° の中では電球 (ICS) は平らな背景にしか見えない。</a:t>
+              <a:t>このスライドが「対応表」。この後のスライドは全部この言葉で説明する。</a:t>
+            </a:r>
+          </a:p>
+          <a:p>
+            <a:r>
+              <a:t>9 次元の山は紙に描けない。だから地図全体を調べるのではなく、歩いて足あとを残し、足あとから山の形を知る。</a:t>
+            </a:r>
+          </a:p>
+          <a:p>
+            <a:r>
+              <a:t>スクショ候補: 点数 (高さ) を計算する関数 log_probability (653〜659 行)。コードは code/mcmc_fit_all_bins.py (Totani 方式の修正 cloud_reports/2026-10-02_totani_bestfit.patch を当てた後の行番号)。</a:t>
             </a:r>
           </a:p>
         </p:txBody>
@@ -1303,17 +1328,27 @@
           <a:lstStyle/>
           <a:p>
             <a:r>
-              <a:t>⟨σv⟩: 対消滅の起きやすさ、m: 粒子の質量、dN/dE: 1 回の対消滅で出る光のスペクトル。天の川と矮小銀河で同じエネルギービンを見るので、これらは全部共通。</a:t>
-            </a:r>
-          </a:p>
-          <a:p>
-            <a:r>
-              <a:t>矮小銀河の J は Pace &amp; Strigari (2019) の式: J(0.5°) = 10^17.72 (σ_los / 5 km/s)⁴ (d / 100 kpc)⁻² (r_1/2 / 100 pc)⁻¹ GeV² cm⁻⁵。σ_los は星の速度のばらつき。</a:t>
-            </a:r>
-          </a:p>
-          <a:p>
-            <a:r>
-              <a:t>「何σ見えるはずか」= 予測フラックス ÷ 各天体の測定誤差。</a:t>
+              <a:t>ベイズの定理の読み方: 「データを見る前の考え (π: どこに入ってよいか)」に「データの当てはまり (L: 高度計)」を掛けると「データを見た後の考え (高さ)」になる。</a:t>
+            </a:r>
+          </a:p>
+          <a:p>
+            <a:r>
+              <a:t>今回の π は一様: 入ってよい範囲 (ガス・ICS などは 0 以上、全部 |f| ≤ 10⁶) なら同じ値、外なら 0。だから高さの形は高度計の読み (尤度) と同じになる。</a:t>
+            </a:r>
+          </a:p>
+          <a:p>
+            <a:r>
+              <a:t>P(D) は「海抜何メートルから測るか」の基準のようなもの。2 地点の高さを比べるときは、どちらにも同じ基準が入っているので割り算で消える。MCMC は比べることしかしないので、P(D) を計算しなくてよい。</a:t>
+            </a:r>
+          </a:p>
+          <a:p>
+            <a:r>
+              <a:t>対数にするのは、数が大きすぎたり小さすぎたりしてコンピュータで扱えなくなるのを防ぐため。</a:t>
+            </a:r>
+          </a:p>
+          <a:p>
+            <a:r>
+              <a:t>スクショ候補: log_prior (630 行、立ち入り禁止のチェック)、log_likelihood (647〜650 行、高度計)、log_probability (653 行、両方を足す)。コードは code/mcmc_fit_all_bins.py (Totani 方式の修正 cloud_reports/2026-10-02_totani_bestfit.patch を当てた後の行番号)。</a:t>
             </a:r>
           </a:p>
         </p:txBody>
@@ -1383,22 +1418,22 @@
           <a:lstStyle/>
           <a:p>
             <a:r>
-              <a:t>黒: 矮小銀河 52 + M31・M33 の全 13 ビンの有意度 (702 個)。灰色: 何も無い空 23 か所 (299 個)。点線: 理論の分布。</a:t>
-            </a:r>
-          </a:p>
-          <a:p>
-            <a:r>
-              <a:t>2 つの分布はほぼ同じ形 = 矮小銀河は「何も無い空」と区別できない。0 付近が高いのは、光子が数個しか無い高エネルギーのビンで σ がほぼ 0 になるため。</a:t>
-            </a:r>
-          </a:p>
-          <a:p>
-            <a:r>
-              <a:t>SMC・LMC はそれ自体が広がったガンマ線源で、解析で中心がマスクされるため使えない (54 − 2 = 52)。</a:t>
-            </a:r>
-          </a:p>
-          <a:p>
-            <a:r>
-              <a:t>図は slides/figs/plot_dwarf_results.py で作った。</a:t>
+              <a:t>例: 今いる場所の高さが 100、足を出した先の高さが 80 なら r = 0.8。0〜1 の乱数を引いて 0.8 より小さければ (80% の確率で) 移る。高さが 10 なら r = 0.1 で、10% しか移らない。だから、低い場所にはめったに行かず、高い場所に長くいる。</a:t>
+            </a:r>
+          </a:p>
+          <a:p>
+            <a:r>
+              <a:t>長く歩くと「各場所にいた時間の割合」が「その場所の高さ」に比例するようになる (詳細つり合い)。だから足あとのヒストグラムが山の形 (事後分布) になる。</a:t>
+            </a:r>
+          </a:p>
+          <a:p>
+            <a:r>
+              <a:t>移らなかったときも今の場所をもう一度記録するのが大事。そうしないと、高い場所にとどまった回数が数えられない。</a:t>
+            </a:r>
+          </a:p>
+          <a:p>
+            <a:r>
+              <a:t>スクショ候補: 歩かせる部分 sampler.run_mcmc (877〜878 行)。メトロポリスの判定そのものは emcee の中にある。コードは code/mcmc_fit_all_bins.py (Totani 方式の修正 cloud_reports/2026-10-02_totani_bestfit.patch を当てた後の行番号)。</a:t>
             </a:r>
           </a:p>
         </p:txBody>
@@ -1468,22 +1503,22 @@
           <a:lstStyle/>
           <a:p>
             <a:r>
-              <a:t>予測が大きい天体ほど重く数える重み付き和。予測のパターンが分かっているときに、いちばん検出しやすいまとめ方。</a:t>
-            </a:r>
-          </a:p>
-          <a:p>
-            <a:r>
-              <a:t>43 天体 = 星の速度のばらつき σ_los が測られていて J が出せる矮小銀河 (SMC・LMC は除く)。</a:t>
-            </a:r>
-          </a:p>
-          <a:p>
-            <a:r>
-              <a:t>ずれ = (1.77 − 0.39) ÷ 1 = 1.4σ。天の川のハローの明るさは Totani と同じやり方の最良値。天の川側の局所密度 0.42 GeV/cm³ の場合。</a:t>
-            </a:r>
-          </a:p>
-          <a:p>
-            <a:r>
-              <a:t>注意: 9/28 の計算は SMC・LMC を誤って含めていた (予測 2.69σ のうち 2.06σ が SMC 1 天体)。</a:t>
+              <a:t>実データではない、説明用のおもちゃの例。倍率が 1 個だけの山 (1 次元) を、平均 1.48・幅 0.075 の形だと仮定して 3000 歩歩かせた。</a:t>
+            </a:r>
+          </a:p>
+          <a:p>
+            <a:r>
+              <a:t>わざと山から離れた 1.2 から出発させたので、最初はふもとから登っていく。この登っている途中 (最初の 200 歩) は山の形と関係ないので捨てる (バーンイン)。</a:t>
+            </a:r>
+          </a:p>
+          <a:p>
+            <a:r>
+              <a:t>そのあとは山の上を行ったり来たりしている。足あとのヒストグラム (右の灰色) が、本当の山の形 (点線) と重なっている = 足あとから山の形が分かる。</a:t>
+            </a:r>
+          </a:p>
+          <a:p>
+            <a:r>
+              <a:t>図は slides/figs/plot_mcmc_toy.py で作った (コメント付き)。</a:t>
             </a:r>
           </a:p>
         </p:txBody>
@@ -1633,27 +1668,32 @@
           <a:lstStyle/>
           <a:p>
             <a:r>
-              <a:t>Section II と Fig. 1 の内容。</a:t>
-            </a:r>
-          </a:p>
-          <a:p>
-            <a:r>
-              <a:t>dex = 対数で 1 桁。0.4 dex は約 2.5 倍、0.1 は約 1.26 倍、0.3 は約 2 倍。</a:t>
-            </a:r>
-          </a:p>
-          <a:p>
-            <a:r>
-              <a:t>非球対称: 楕円体の矮小銀河を球対称の NFW で解析すると、log10 J が最大 0.4 ずれる。</a:t>
-            </a:r>
-          </a:p>
-          <a:p>
-            <a:r>
-              <a:t>連星: 見分けられていない連星があると星の速度のばらつきが大きく見え、J を大きく見積もる (Reticulum II で約 0.3)。</a:t>
-            </a:r>
-          </a:p>
-          <a:p>
-            <a:r>
-              <a:t>誤差の分布: 多くの解析は log J の誤差を正規分布と仮定するが、本当の分布はすそが重い。</a:t>
+              <a:t>どの歩き方でも、正しく長く歩けば足あとの分布は同じ山の形 (事後分布) になる。違うのは、歩く速さ (効率) と、どんな山が得意か。</a:t>
+            </a:r>
+          </a:p>
+          <a:p>
+            <a:r>
+              <a:t>ギブス法: 9 個の倍率のうち 1 個だけを動かし、残り 8 個は止めておく。これを順番にくり返す。</a:t>
+            </a:r>
+          </a:p>
+          <a:p>
+            <a:r>
+              <a:t>ハミルトニアン MC (HMC): 山の傾き (尤度の微分) を使って、遠くまで一気に動く。パラメータが多いときに強い。</a:t>
+            </a:r>
+          </a:p>
+          <a:p>
+            <a:r>
+              <a:t>焼きなまし法: 金属をゆっくり冷やす「焼きなまし」が名前の由来。最初は下りにもよく進み、だんだん進みにくくして、最後は頂上で止まる。最良値を探す道具で、誤差は出ない。</a:t>
+            </a:r>
+          </a:p>
+          <a:p>
+            <a:r>
+              <a:t>歩けているかの確認 (歩き方の種類ではない): 受理率 (足を出したうち、実際に移った割合。emcee では 0.2〜0.5 くらいが目安。今回の 20.8 GeV は 0.42)、自己相関時間 τ (何歩で前の場所を忘れるか)。</a:t>
+            </a:r>
+          </a:p>
+          <a:p>
+            <a:r>
+              <a:t>emcee: Foreman-Mackey et al. (2013) の Python ライブラリ。中身は Goodman &amp; Weare (2010) のアンサンブル法 (ストレッチ移動)。歩く人数・歩数・捨てる歩数は Totani の論文に書かれていないので、本研究で決めた (32 人・6000 歩・最初の 2000 歩を捨てる)。</a:t>
             </a:r>
           </a:p>
         </p:txBody>
@@ -1723,22 +1763,22 @@
           <a:lstStyle/>
           <a:p>
             <a:r>
-              <a:t>Section III。FermiTools v2.5.1、fermipy v1.4.0。事象は P8R3 SOURCE V3、4 つの PSF クラス、エネルギーは 1 桁あたり 8 ビン。</a:t>
-            </a:r>
-          </a:p>
-          <a:p>
-            <a:r>
-              <a:t>背景の型紙: gll_iem_v07 (銀河拡散) と等方。点源カタログ (4FGL) の天体は簡単のため入れていない。</a:t>
-            </a:r>
-          </a:p>
-          <a:p>
-            <a:r>
-              <a:t>信号の空間の形: 古典的な矮小銀河は芯のある NFW (cNFW)、超微光の矮小銀河は切断した NFW。</a:t>
-            </a:r>
-          </a:p>
-          <a:p>
-            <a:r>
-              <a:t>本当の J (J_true) は Table I の中心値。</a:t>
+              <a:t>細長い山: 仲間たちの散らばり方自体が「山が細長い方向」を表している。仲間のいる方向に沿って一歩を出すので、細長い山でも効率よく歩ける。</a:t>
+            </a:r>
+          </a:p>
+          <a:p>
+            <a:r>
+              <a:t>Z⁸ の 8 は「倍率の数 9 − 1」。線の上で伸び縮みさせた分、足を出せる場所の広さが変わるので、それを補正する。Z の範囲 1/2〜2 は emcee の決まった値 (a = 2)。</a:t>
+            </a:r>
+          </a:p>
+          <a:p>
+            <a:r>
+              <a:t>Totani と同じ初期値: 点源・GALPROP (ガス・ICS) = 1 倍、等方 = E²dN/dE 1e-4 相当、Loop I・バブル・ハロー = 0 (Totani §2.3)。</a:t>
+            </a:r>
+          </a:p>
+          <a:p>
+            <a:r>
+              <a:t>スクショ候補: 出発点を決める行 (868 行)、32 人で歩かせる emcee.EnsembleSampler (877 行)。コードは code/mcmc_fit_all_bins.py (Totani 方式の修正 cloud_reports/2026-10-02_totani_bestfit.patch を当てた後の行番号)。</a:t>
             </a:r>
           </a:p>
         </p:txBody>
@@ -1808,22 +1848,37 @@
           <a:lstStyle/>
           <a:p>
             <a:r>
-              <a:t>式 (6)〜(10)。J_obs = 星の動きの解析で出た値 (観測値)、J_true = 本当の値。</a:t>
-            </a:r>
-          </a:p>
-          <a:p>
-            <a:r>
-              <a:t>σ_L が小さい = 解析ソフトが「J はほぼ分かっている」と自信を持ちすぎている状態。</a:t>
-            </a:r>
-          </a:p>
-          <a:p>
-            <a:r>
-              <a:t>J は「局外パラメータ」(知りたいのは ⟨σv⟩ だが、決めないといけない他のパラメータ) で、尤度を最大にする値に置き換えて (プロファイル) から ⟨σv⟩ を調べる。</a:t>
-            </a:r>
-          </a:p>
-          <a:p>
-            <a:r>
-              <a:t>TS = 2 ln [ L(⟨σv⟩) / L(0) ]。</a:t>
+              <a:t>ハローなしの山: ハローの倍率を 0 に固定した 8 次元の山。ハローありの山 (9 次元) より低いか同じ。2 つの頂上の高さの差が Δln L。</a:t>
+            </a:r>
+          </a:p>
+          <a:p>
+            <a:r>
+              <a:t>頂上に届いているかの確認: 坂を登る方法 (勾配法) で頂上を求めて、一番高い足あととの差を調べた。13 ビンすべてで ln L の差 0.6 以下、有意度の差 0.28σ 以下。確認のためだけで、結果には使っていない。</a:t>
+            </a:r>
+          </a:p>
+          <a:p>
+            <a:r>
+              <a:t>長さの目安: 自己相関時間 τ (何歩離れたら前の場所を忘れるか) の 50 倍以上が推奨。20.8 GeV で τ ≈ 650 歩なので 3 万歩以上が理想だが、6000 歩。</a:t>
+            </a:r>
+          </a:p>
+          <a:p>
+            <a:r>
+              <a:t>数字はクラウドの計算機で、Totani と同じやり方で出した値 (cloud_reports/2026-10-02_totani_mode/)。</a:t>
+            </a:r>
+          </a:p>
+          <a:p>
+            <a:r>
+              <a:t>スクショ候補: 一番高い足あとを探す行 (879〜880 行)、誤差の 16〜84% (926 行)、有意度 (910 行)。コードは code/mcmc_fit_all_bins.py (Totani 方式の修正 cloud_reports/2026-10-02_totani_bestfit.patch を当てた後の行番号)。</a:t>
+            </a:r>
+          </a:p>
+          <a:p>
+            <a:r>
+              <a:t>なぜ最初を捨てるか: 出発点は Totani と同じ初期値で、山のふもとにある。最初のうちは頂上へ登っている途中なので、その足あとは「山の形」を表していない。だから誤差の計算からは外す (バーンイン)。一番高い足あと (最良値) は、捨てた分も含めて全部の中から探している。</a:t>
+            </a:r>
+          </a:p>
+          <a:p>
+            <a:r>
+              <a:t>捨てる歩数は本研究で決めた値 (Totani の論文には書かれていない)。最初は 400 歩だったが、歩く人数 (20/32/64)・乱数の種 (3 通り)・歩数 (6000/20000) を変えて確かめたところ、400 歩では誤差の上端が乱数の種によって 1.59〜1.89 とぶれたので、2000 歩に変えた (2000 歩ではどれも 1.56〜1.57。この確認は型紙の作り方が少し違う確認用の計算で、本番の 2000 歩の誤差は 1.42〜1.58)。最良値 1.51 と有意度 19.5σ は捨てる歩数によらず同じ。400 歩のときの誤差は 1.43〜1.61。</a:t>
             </a:r>
           </a:p>
         </p:txBody>
@@ -1893,12 +1948,12 @@
           <a:lstStyle/>
           <a:p>
             <a:r>
-              <a:t>答えが分かっている仮想の宇宙で、解析が正しく答えを出せるかを試している。</a:t>
-            </a:r>
-          </a:p>
-          <a:p>
-            <a:r>
-              <a:t>カバレッジが足りない (アンダーカバレッジ) = 95% と言いながら、本物を 5% より多く除外してしまう。</a:t>
+              <a:t>青が本研究 (10/2 に Totani と同じやり方 = MCMC で最良値、で計算し直した。クラウドの計算機)、赤が Totani Fig. 9。本人 PC での確定値は後日。</a:t>
+            </a:r>
+          </a:p>
+          <a:p>
+            <a:r>
+              <a:t>ただしこの 19.5σ は Wilks の定理を信じた「名目の値」。後で較正する。</a:t>
             </a:r>
           </a:p>
         </p:txBody>
@@ -1968,22 +2023,17 @@
           <a:lstStyle/>
           <a:p>
             <a:r>
-              <a:t>誤差を「大きくする」は 2 乗和で足す: σ_L² = σ_cat² + 0.3² など。σ_cat はカタログに書かれた誤差。</a:t>
-            </a:r>
-          </a:p>
-          <a:p>
-            <a:r>
-              <a:t>Ursa Minor: 距離 76 kpc、log10 J_tot = 18.55 ± 0.05、見かけの広がり 0.59° (望遠鏡のぼやけより大きい)。</a:t>
-            </a:r>
-          </a:p>
-          <a:p>
-            <a:r>
-              <a:t>基準 (σ = σ_cat) では 1 万回中 0 回しか本物を除外しない (過大なカバレッジ)。J と ⟨σv⟩ の縮退で Wilks の定理が成り立たないため。</a:t>
-            </a:r>
-          </a:p>
-          <a:p>
-            <a:r>
-              <a:t>形: 本当は楕円の cNFW。楕円かどうかはあまり効かず、中心の尖り方と広がりが効く。</a:t>
+              <a:t>縮退: 2 つの成分の形が似ていて、どちらに光を割り振っても同じくらい合ってしまう状態。</a:t>
+            </a:r>
+          </a:p>
+          <a:p>
+            <a:r>
+              <a:t>たとえ: 部屋に電球 (ICS) がついていて、もう 1 つの光 (ハロー) を探している。写真では 2 つの光の形がほとんど同じなので、余った明るさが本当にもう 1 つの光なのか、電球が少し明るいだけなのか見分けにくい。</a:t>
+            </a:r>
+          </a:p>
+          <a:p>
+            <a:r>
+              <a:t>図: ICS の倍率 (GALPROP の予測の何倍か)。ハローなしでは全エネルギーで約 1.4〜1.6 倍でほぼ平ら (最良値)。ハローを入れると、ハローが効くビンでだけへこむ。</a:t>
             </a:r>
           </a:p>
         </p:txBody>
@@ -2053,27 +2103,32 @@
           <a:lstStyle/>
           <a:p>
             <a:r>
-              <a:t>Section V。上限が 1 個のときよりゆるくなりにくいのは、J が大きい天体ほどカタログの誤差が大きいので、同じ量を足しても割合が小さいため。</a:t>
-            </a:r>
-          </a:p>
-          <a:p>
-            <a:r>
-              <a:t>Wilks の定理は「局外パラメータの数が少ない」ことを前提にする。27 個まとめると J が 27 個あり、前提が崩れる。</a:t>
-            </a:r>
-          </a:p>
-          <a:p>
-            <a:r>
-              <a:t>J_obs は対数で正規分布 → J そのものでは上に長いすそ。上に振れた天体が上限を強く引っ張り、下に振れた天体では打ち消せない。27 個のうち 1 個以上が 1.5σ 以上上に振れる確率は約 0.85。</a:t>
-            </a:r>
-          </a:p>
-          <a:p>
-            <a:r>
-              <a:t>全部を点として扱うと 37%。</a:t>
-            </a:r>
-          </a:p>
-          <a:p>
-            <a:r>
-              <a:t>何も無い領域 (blank field) での較正は Ref. [76] の方法。</a:t>
+              <a:t>図は 20.8 GeV の型紙そのもの (倍率は掛けていない)。ICS は GALPROP (galdef SLZ6R30T150C2)、ハローは NFW (Via Lactea II)。</a:t>
+            </a:r>
+          </a:p>
+          <a:p>
+            <a:r>
+              <a:t>縦方向 (経度を全部平均、|b| 25°→55°): ハロー 2.70 倍、ICS 2.60 倍暗くなる → ほぼ同じ。</a:t>
+            </a:r>
+          </a:p>
+          <a:p>
+            <a:r>
+              <a:t>横方向 (|b| = 20〜40° の帯、|l| 0°→40°): ハロー 2.67 倍、ICS 1.18 倍 → ここが違う。</a:t>
+            </a:r>
+          </a:p>
+          <a:p>
+            <a:r>
+              <a:t>ICS が横に広いのは、星の光と電子が銀河の円盤 (横に広い) に沿って多いため。ハローは丸い玉なので、どの向きにも同じように中心へ集まる。</a:t>
+            </a:r>
+          </a:p>
+          <a:p>
+            <a:r>
+              <a:t>太陽は銀河中心から 8 kpc 離れているので、どちらも空いっぱいに広がったぼんやりした光に見える。</a:t>
+            </a:r>
+          </a:p>
+          <a:p>
+            <a:r>
+              <a:t>作図: /home/arsei/slidework/make_profiles.py (2026-10-03、ローカル)</a:t>
             </a:r>
           </a:p>
         </p:txBody>
@@ -2143,7 +2198,32 @@
           <a:lstStyle/>
           <a:p>
             <a:r>
-              <a:t>Section VI。「矮小銀河で信号が無くて当然」とまでは言っていない。「無いから暗黒物質ではない」と判断するのが早すぎるかもしれない、という主張。</a:t>
+              <a:t>等方背景の倍率 (本研究 / Totani): 20 GeV 付近で約 0.4 倍、一番低いエネルギー (1.5 GeV) では v20 で約 1/200。</a:t>
+            </a:r>
+          </a:p>
+          <a:p>
+            <a:r>
+              <a:t>Loop I の近い殻: 太陽が殻の壁の中 (半径 62〜81 pc、太陽から中心まで 78 pc) にいるので、ROI 全体を覆い、等方背景と数学的に区別できない (.dev/TOTANI_SPEC.md 3.7a)。</a:t>
+            </a:r>
+          </a:p>
+          <a:p>
+            <a:r>
+              <a:t>空の上の方だけで計算 (|b| ≥ 30°, 40°): 1.5 GeV の等方背景の倍率が 19 倍、55 倍に戻る。Totani 比 0.005 → 0.27 (2026-07-31、MCMC_BMIN)。</a:t>
+            </a:r>
+          </a:p>
+          <a:p>
+            <a:r>
+              <a:t>低いエネルギーでは、GALPROP の出力のスペクトルが Totani と違う (1.5 GeV で 0.56 倍) ことも効いている。</a:t>
+            </a:r>
+          </a:p>
+          <a:p>
+            <a:r>
+              <a:t>全成分の合計の明るさは Totani とほぼ同じ (0.96 倍)、ハロー単独も 1.16 倍。</a:t>
+            </a:r>
+          </a:p>
+          <a:p>
+            <a:r>
+              <a:t>図: 20.8 GeV の型紙、|b| = 20〜40° の帯での横方向の明るさ。作図 /home/arsei/slidework/make_profiles.py</a:t>
             </a:r>
           </a:p>
         </p:txBody>
@@ -2213,17 +2293,12 @@
           <a:lstStyle/>
           <a:p>
             <a:r>
-              <a:t>論文の Section IV で J_obs を J_true のまわりに対数正規でばらつかせたのと同じ考え方。幅 0.5 は論文の推奨値 (abstract)。</a:t>
-            </a:r>
-          </a:p>
-          <a:p>
-            <a:r>
-              <a:t>言い方: J がどれくらいずれているか分からないので、サイコロを振って J をずらして予測を出す、を 20 万回繰り返した。そうすると「予測はだいたいこの範囲」という幅が分かる。</a:t>
-            </a:r>
-          </a:p>
-          <a:p>
-            <a:r>
-              <a:t>スクリプト: cloud_reports/2026-10-02_dwarf_J_uncertainty.py。</a:t>
+              <a:t>① フェルミバブル = 銀河中心の上下に広がる、ガンマ線で明るい泡状の構造。その矩形 |l| &lt; 22°, 10° &lt; |b| &lt; 55° を当てはめから外した。</a:t>
+            </a:r>
+          </a:p>
+          <a:p>
+            <a:r>
+              <a:t>② 何も無い空 23 か所で同じ解析をした (2026-07-31)。</a:t>
             </a:r>
           </a:p>
         </p:txBody>
@@ -2293,17 +2368,27 @@
           <a:lstStyle/>
           <a:p>
             <a:r>
-              <a:t>重み w_i は今まで通り J の推定値から出した予測 pred_i のまま (解析する人は本当の J を知らないため)。</a:t>
-            </a:r>
-          </a:p>
-          <a:p>
-            <a:r>
-              <a:t>Φ = 標準正規分布の累積分布関数。p は片側。ずれ = 標準正規で p に対応する σ。</a:t>
-            </a:r>
-          </a:p>
-          <a:p>
-            <a:r>
-              <a:t>J の誤差は「期待の中央値」を少し上げる。対数正規は上に長いすそを持つので、合計が上に引っ張られる (論文 Section V と同じ現象)。</a:t>
+              <a:t>フィッシャー情報: 尤度の山の鋭さ (2 階微分)。山が鋭いほどパラメータがよく決まる。</a:t>
+            </a:r>
+          </a:p>
+          <a:p>
+            <a:r>
+              <a:t>「ハローだけの手がかり」= 他の成分と区別できる部分の情報 (フィッシャー行列のシューア補行列)。有意度は、おおよそ「倍率の推定値 ÷ その誤差」で、誤差は情報の平方根に反比例する。</a:t>
+            </a:r>
+          </a:p>
+          <a:p>
+            <a:r>
+              <a:t>予測 6.6σ と実測 5.0σ の残りの差は、バブル外でハローの倍率が 0.77 倍と低いことで説明できる。この内外の差は約 1.5σ で、意味のある差ではない。</a:t>
+            </a:r>
+          </a:p>
+          <a:p>
+            <a:r>
+              <a:t>対照: 同じ形の矩形を経度方向に ±20°, ±30°, ±38° ずらして外すと 14.6〜16.4σ (Totani と同じやり方)。</a:t>
+            </a:r>
+          </a:p>
+          <a:p>
+            <a:r>
+              <a:t>たとえ: 写真の真ん中を隠すと自信が下がるが、それは見分けるヒントが真ん中に集まっていたから。</a:t>
             </a:r>
           </a:p>
         </p:txBody>
@@ -2373,17 +2458,22 @@
           <a:lstStyle/>
           <a:p>
             <a:r>
-              <a:t>灰色の山: J の誤差を入れたときの予測の分布 (20 万回)。点線: J の誤差なしの予測 1.77。黒い点: 実測 0.39、横棒は測定の揺れ ±1.26。</a:t>
-            </a:r>
-          </a:p>
-          <a:p>
-            <a:r>
-              <a:t>点は山の左にあるが、横棒が山に届いているので、ずれは約 1.3σ で「たまたま」で起きる範囲。</a:t>
-            </a:r>
-          </a:p>
-          <a:p>
-            <a:r>
-              <a:t>図は slides/figs/plot_dwarf_J.py で作った。</a:t>
+              <a:t>全体の明るさのずれ (ICS が GALPROP の 1.6 倍、など) は倍率が吸収するのでハローにはならない。ハローに化けるには「銀河中心寄りだけ明るい」という形のずれが必要。</a:t>
+            </a:r>
+          </a:p>
+          <a:p>
+            <a:r>
+              <a:t>等方近似: GALPROP の設定が IC_anisotropic = 0。Moskalenko &amp; Strong (2000) Fig. 6 では、非等方にすると 10 GeV 付近で 1.1〜1.3 倍、銀河中心の上より外側のほうが大きい。</a:t>
+            </a:r>
+          </a:p>
+          <a:p>
+            <a:r>
+              <a:t>3 分割 = 星の光・ちり・宇宙背景の光、の 3 種類の光を電子がはね上げたもの。19.5σ と 18.4σ はクラウドの計算機で、Totani と同じやり方で比べた値 (どちらも同じ条件なので、差で言う)。Totani §3.4.4 の同種の確認とも同じ結論。</a:t>
+            </a:r>
+          </a:p>
+          <a:p>
+            <a:r>
+              <a:t>残る可能性: GALPROP の ICS の「空間の形」が、銀河中心寄りで 2.3 倍ずれている場合。今の道具では確かめられない。</a:t>
             </a:r>
           </a:p>
         </p:txBody>
@@ -2543,22 +2633,22 @@
           <a:lstStyle/>
           <a:p>
             <a:r>
-              <a:t>予測は天の川側の局所密度 ρ☉ の −2 乗に比例する (天の川の J が密度の 2 乗に比例し、天の川の実測の明るさは固定のため)。</a:t>
-            </a:r>
-          </a:p>
-          <a:p>
-            <a:r>
-              <a:t>ρ☉ = 0.3: 期待 3.46 (誤差なし) / 4.86 (誤差あり、68% 2.64–9.95)、ずれ 2.4σ / 2.1σ (s = 1.26)。</a:t>
-            </a:r>
-          </a:p>
-          <a:p>
-            <a:r>
-              <a:t>ρ☉ = 0.6: 期待 0.87 / 1.21 (0.66–2.49)、ずれ 0.4σ / 0.7σ。</a:t>
-            </a:r>
-          </a:p>
-          <a:p>
-            <a:r>
-              <a:t>J の誤差を入れると、期待の幅が大きく広がり、「判定できない」がより強くなる。</a:t>
+              <a:t>ばらつき = 0 からのずれの 2 乗平均の平方根。光子が十分あるビン 2–10 (2.6–169 GeV) の 207 個から計算。</a:t>
+            </a:r>
+          </a:p>
+          <a:p>
+            <a:r>
+              <a:t>95% 区間はブートストラップ (データを復元抽出し直して何度も計算) で付けた。同じ場所のビン同士は相関する (隣どうし +0.31) ので、場所ごとにまとめて引き直した。</a:t>
+            </a:r>
+          </a:p>
+          <a:p>
+            <a:r>
+              <a:t>較正の仮定: 背景モデル (型紙) の誤りで、σ の分散が一様に 1.26² 倍に膨らむ (統計でいう過分散)。19σ のような大きな値でも同じ倍率かは確かめていない。天の川は背景がもっと複雑なので、本当の倍率はもっと大きいかもしれない (15σ は楽観寄り)。</a:t>
+            </a:r>
+          </a:p>
+          <a:p>
+            <a:r>
+              <a:t>記録の「1.362 (250 個)」は今の結果ファイルからは再現できなかった。最大 4.50σ は最低エネルギー (1.5 GeV) のビン。</a:t>
             </a:r>
           </a:p>
         </p:txBody>
@@ -2628,12 +2718,17 @@
           <a:lstStyle/>
           <a:p>
             <a:r>
-              <a:t>15σ は「ハローがあるか」の強さ、1.3σ は「天の川と矮小銀河が食い違うか」の強さ。</a:t>
-            </a:r>
-          </a:p>
-          <a:p>
-            <a:r>
-              <a:t>どちらも Wilks の定理だけに頼らず、何も無い空で較正した値 (1.26) を使っている。</a:t>
+              <a:t>黒の点: 各エネルギービンで 23 か所から測ったばらつきと 95% 区間。灰色の帯: ビン 2–10 をまとめた値 1.26 とその 95% 区間。</a:t>
+            </a:r>
+          </a:p>
+          <a:p>
+            <a:r>
+              <a:t>灰色の点: 1.5 GeV はばらつき 2.2 の外れ (望遠鏡のぼやけが大きく、背景モデルの誤りが効きやすい)。285 GeV 以上は光子が数個〜数十個で、Wilks の定理の前提 (データが多い) が崩れる。</a:t>
+            </a:r>
+          </a:p>
+          <a:p>
+            <a:r>
+              <a:t>図は slides/figs/plot_null_variance.py で作った。</a:t>
             </a:r>
           </a:p>
         </p:txBody>
@@ -2703,7 +2798,7 @@
           <a:lstStyle/>
           <a:p>
             <a:r>
-              <a:t>流れ: 再現 → 縮退による 3 つの疑問 → 背景の間違い説を否定・σ を較正・記録を整備 → 矮小銀河は非検出 → 論文の J の誤差を入れて「判定できない」を定量化。</a:t>
+              <a:t>言えるのは「既知の背景では説明しにくい超過がある」まで。それが暗黒物質かどうかは別の主張。</a:t>
             </a:r>
           </a:p>
         </p:txBody>
@@ -2773,22 +2868,17 @@
           <a:lstStyle/>
           <a:p>
             <a:r>
-              <a:t>中村 (2017) 講究録 §2: 状態空間モデル。システムノイズ (シミュレーションの誤差) と観測ノイズ (観測の誤差) を分けて書く。</a:t>
-            </a:r>
-          </a:p>
-          <a:p>
-            <a:r>
-              <a:t>§2.3.3–2.3.4: アンサンブルカルマンフィルタ・粒子フィルタは、確率分布をたくさんのサンプル (アンサンブル) で近似する (式 11)。</a:t>
-            </a:r>
-          </a:p>
-          <a:p>
-            <a:r>
-              <a:t>§3.3: モデル化誤差と数値計算の誤差を、システムノイズとして統一的に扱えることがデータ同化の利点。</a:t>
-            </a:r>
-          </a:p>
-          <a:p>
-            <a:r>
-              <a:t>正直な位置づけ: この解析は講究録を読む前に行った。後から読んで、同じ発想だと分かった。データ同化の中心は時間とともに変わる現象で、1 枚の空の地図にそのまま使える手法ではない。</a:t>
+              <a:t>矮小銀河 54 個は Local Volume Database (Pace 2025) の確認済みの銀河。何も無い空は |b| &gt; 20° で互いに 20° 以上離した場所。</a:t>
+            </a:r>
+          </a:p>
+          <a:p>
+            <a:r>
+              <a:t>成分は等方・ガス・ICS・点源・ハロー。バブルと Loop I は銀河中心の構造なので入れない。</a:t>
+            </a:r>
+          </a:p>
+          <a:p>
+            <a:r>
+              <a:t>たとえ: 天の川のハローは部屋全体を照らす光なので電球と見分けにくかった。矮小銀河は遠くの豆電球なので、半径 10° の中では電球 (ICS) は平らな背景にしか見えない。</a:t>
             </a:r>
           </a:p>
         </p:txBody>
@@ -2857,7 +2947,19 @@
           <a:bodyPr/>
           <a:lstStyle/>
           <a:p>
-            <a:endParaRPr/>
+            <a:r>
+              <a:t>⟨σv⟩: 対消滅の起きやすさ、m: 粒子の質量、dN/dE: 1 回の対消滅で出る光のスペクトル。天の川と矮小銀河で同じエネルギービンを見るので、これらは全部共通。</a:t>
+            </a:r>
+          </a:p>
+          <a:p>
+            <a:r>
+              <a:t>矮小銀河の J は Pace &amp; Strigari (2019) の式: J(0.5°) = 10^17.72 (σ_los / 5 km/s)⁴ (d / 100 kpc)⁻² (r_1/2 / 100 pc)⁻¹ GeV² cm⁻⁵。σ_los は星の速度のばらつき。</a:t>
+            </a:r>
+          </a:p>
+          <a:p>
+            <a:r>
+              <a:t>「何σ見えるはずか」= 予測フラックス ÷ 各天体の測定誤差。</a:t>
+            </a:r>
           </a:p>
         </p:txBody>
       </p:sp>
@@ -2882,7 +2984,7 @@
 </file>
 
 <file path=ppt/notesSlides/notesSlide35.xml><?xml version="1.0" encoding="utf-8"?>
-<p:notes xmlns:a="http://schemas.openxmlformats.org/drawingml/2006/main" xmlns:p="http://schemas.openxmlformats.org/presentationml/2006/main" xmlns:r="http://schemas.openxmlformats.org/officeDocument/2006/relationships">
+<p:notes xmlns:a="http://schemas.openxmlformats.org/drawingml/2006/main" xmlns:r="http://schemas.openxmlformats.org/officeDocument/2006/relationships" xmlns:p="http://schemas.openxmlformats.org/presentationml/2006/main">
   <p:cSld>
     <p:spTree>
       <p:nvGrpSpPr>
@@ -2902,7 +3004,7 @@
         <p:nvSpPr>
           <p:cNvPr id="2" name="Slide Image Placeholder 1"/>
           <p:cNvSpPr>
-            <a:spLocks noGrp="1"/>
+            <a:spLocks noGrp="1" noRot="1" noChangeAspect="1"/>
           </p:cNvSpPr>
           <p:nvPr>
             <p:ph type="sldImg" idx="2"/>
@@ -2917,31 +3019,31 @@
             <a:spLocks noGrp="1"/>
           </p:cNvSpPr>
           <p:nvPr>
-            <p:ph type="body" idx="3" sz="quarter"/>
-          </p:nvPr>
-        </p:nvSpPr>
-        <p:spPr/>
-        <p:txBody>
-          <a:bodyPr/>
-          <a:lstStyle/>
-          <a:p>
-            <a:r>
-              <a:t>逆コンプトン散乱: 普通のコンプトン散乱は光が電子をはね飛ばす。ここでは逆で、とても速い電子が、低いエネルギーの光にエネルギーを渡して、ガンマ線にする。</a:t>
-            </a:r>
-          </a:p>
-          <a:p>
-            <a:r>
-              <a:t>ガスの型紙と違って雲の模様が無く、なめらか。ハローもなめらかで中心に向かって明るいので、2 つの形が似ている (問題のスライドで説明する縮退)。</a:t>
-            </a:r>
-          </a:p>
-          <a:p>
-            <a:r>
-              <a:t>GALPROP の設定は IC_anisotropic = 0 (等方近似)。</a:t>
-            </a:r>
-          </a:p>
-          <a:p>
-            <a:r>
-              <a:t>右の地図: 20.8 GeV の型紙 (倍率は掛けていない。形だけを見る図)。cloud_reports/2026-10-02_plot_templates.py で作成。</a:t>
+            <p:ph type="body" sz="quarter" idx="3"/>
+          </p:nvPr>
+        </p:nvSpPr>
+        <p:spPr/>
+        <p:txBody>
+          <a:bodyPr/>
+          <a:lstStyle/>
+          <a:p>
+            <a:r>
+              <a:t>黒: 矮小銀河 52 + M31・M33 の全 13 ビンの有意度 (702 個)。灰色: 何も無い空 23 か所 (299 個)。点線: 理論の分布。</a:t>
+            </a:r>
+          </a:p>
+          <a:p>
+            <a:r>
+              <a:t>2 つの分布はほぼ同じ形 = 矮小銀河は「何も無い空」と区別できない。0 付近が高いのは、光子が数個しか無い高エネルギーのビンで σ がほぼ 0 になるため。</a:t>
+            </a:r>
+          </a:p>
+          <a:p>
+            <a:r>
+              <a:t>SMC・LMC はそれ自体が広がったガンマ線源で、解析で中心がマスクされるため使えない (54 − 2 = 52)。</a:t>
+            </a:r>
+          </a:p>
+          <a:p>
+            <a:r>
+              <a:t>図は slides/figs/plot_dwarf_results.py で作った。</a:t>
             </a:r>
           </a:p>
         </p:txBody>
@@ -2953,7 +3055,7 @@
             <a:spLocks noGrp="1"/>
           </p:cNvSpPr>
           <p:nvPr>
-            <p:ph type="sldNum" idx="5" sz="quarter"/>
+            <p:ph type="sldNum" sz="quarter" idx="5"/>
           </p:nvPr>
         </p:nvSpPr>
         <p:spPr/>
@@ -2967,7 +3069,7 @@
 </file>
 
 <file path=ppt/notesSlides/notesSlide36.xml><?xml version="1.0" encoding="utf-8"?>
-<p:notes xmlns:a="http://schemas.openxmlformats.org/drawingml/2006/main" xmlns:p="http://schemas.openxmlformats.org/presentationml/2006/main" xmlns:r="http://schemas.openxmlformats.org/officeDocument/2006/relationships">
+<p:notes xmlns:a="http://schemas.openxmlformats.org/drawingml/2006/main" xmlns:r="http://schemas.openxmlformats.org/officeDocument/2006/relationships" xmlns:p="http://schemas.openxmlformats.org/presentationml/2006/main">
   <p:cSld>
     <p:spTree>
       <p:nvGrpSpPr>
@@ -2987,7 +3089,7 @@
         <p:nvSpPr>
           <p:cNvPr id="2" name="Slide Image Placeholder 1"/>
           <p:cNvSpPr>
-            <a:spLocks noGrp="1"/>
+            <a:spLocks noGrp="1" noRot="1" noChangeAspect="1"/>
           </p:cNvSpPr>
           <p:nvPr>
             <p:ph type="sldImg" idx="2"/>
@@ -3002,31 +3104,31 @@
             <a:spLocks noGrp="1"/>
           </p:cNvSpPr>
           <p:nvPr>
-            <p:ph type="body" idx="3" sz="quarter"/>
-          </p:nvPr>
-        </p:nvSpPr>
-        <p:spPr/>
-        <p:txBody>
-          <a:bodyPr/>
-          <a:lstStyle/>
-          <a:p>
-            <a:r>
-              <a:t>GALPROP: 宇宙線が銀河の中でどう生まれ、どう広がるかを計算し、そこから出るガンマ線の地図を作るシミュレーション (ver. 54、設定 SLZ6R30T150C2。Fermi-LAT チームの銀河拡散モデルでも使われている設定)。</a:t>
-            </a:r>
-          </a:p>
-          <a:p>
-            <a:r>
-              <a:t>π⁰ は電気を持たない中間子で、できるとすぐ (10⁻¹⁶ 秒ほど) 光子 2 個に壊れる。</a:t>
-            </a:r>
-          </a:p>
-          <a:p>
-            <a:r>
-              <a:t>ガス雲の模様は、電波 (水素の 21 cm 線) や、ちりによる星の光の赤み (E(B−V)) から作ったガスの地図に由来する。</a:t>
-            </a:r>
-          </a:p>
-          <a:p>
-            <a:r>
-              <a:t>右の地図: 20.8 GeV の型紙 (倍率は掛けていない。形だけを見る図)。cloud_reports/2026-10-02_plot_templates.py で作成。</a:t>
+            <p:ph type="body" sz="quarter" idx="3"/>
+          </p:nvPr>
+        </p:nvSpPr>
+        <p:spPr/>
+        <p:txBody>
+          <a:bodyPr/>
+          <a:lstStyle/>
+          <a:p>
+            <a:r>
+              <a:t>予測が大きい天体ほど重く数える重み付き和。予測のパターンが分かっているときに、いちばん検出しやすいまとめ方。</a:t>
+            </a:r>
+          </a:p>
+          <a:p>
+            <a:r>
+              <a:t>43 天体 = 星の速度のばらつき σ_los が測られていて J が出せる矮小銀河 (SMC・LMC は除く)。</a:t>
+            </a:r>
+          </a:p>
+          <a:p>
+            <a:r>
+              <a:t>ずれ = (1.77 − 0.39) ÷ 1 = 1.4σ。天の川のハローの明るさは Totani と同じやり方の最良値。天の川側の局所密度 0.42 GeV/cm³ の場合。</a:t>
+            </a:r>
+          </a:p>
+          <a:p>
+            <a:r>
+              <a:t>注意: 9/28 の計算は SMC・LMC を誤って含めていた (予測 2.69σ のうち 2.06σ が SMC 1 天体)。</a:t>
             </a:r>
           </a:p>
         </p:txBody>
@@ -3038,7 +3140,7 @@
             <a:spLocks noGrp="1"/>
           </p:cNvSpPr>
           <p:nvPr>
-            <p:ph type="sldNum" idx="5" sz="quarter"/>
+            <p:ph type="sldNum" sz="quarter" idx="5"/>
           </p:nvPr>
         </p:nvSpPr>
         <p:spPr/>
@@ -3052,7 +3154,7 @@
 </file>
 
 <file path=ppt/notesSlides/notesSlide37.xml><?xml version="1.0" encoding="utf-8"?>
-<p:notes xmlns:a="http://schemas.openxmlformats.org/drawingml/2006/main" xmlns:p="http://schemas.openxmlformats.org/presentationml/2006/main" xmlns:r="http://schemas.openxmlformats.org/officeDocument/2006/relationships">
+<p:notes xmlns:a="http://schemas.openxmlformats.org/drawingml/2006/main" xmlns:r="http://schemas.openxmlformats.org/officeDocument/2006/relationships" xmlns:p="http://schemas.openxmlformats.org/presentationml/2006/main">
   <p:cSld>
     <p:spTree>
       <p:nvGrpSpPr>
@@ -3072,7 +3174,7 @@
         <p:nvSpPr>
           <p:cNvPr id="2" name="Slide Image Placeholder 1"/>
           <p:cNvSpPr>
-            <a:spLocks noGrp="1"/>
+            <a:spLocks noGrp="1" noRot="1" noChangeAspect="1"/>
           </p:cNvSpPr>
           <p:nvPr>
             <p:ph type="sldImg" idx="2"/>
@@ -3087,31 +3189,36 @@
             <a:spLocks noGrp="1"/>
           </p:cNvSpPr>
           <p:nvPr>
-            <p:ph type="body" idx="3" sz="quarter"/>
-          </p:nvPr>
-        </p:nvSpPr>
-        <p:spPr/>
-        <p:txBody>
-          <a:bodyPr/>
-          <a:lstStyle/>
-          <a:p>
-            <a:r>
-              <a:t>たとえ: 部屋の壁全体がぼんやり同じ明るさで光っている、その「底上げ」の明るさ。</a:t>
-            </a:r>
-          </a:p>
-          <a:p>
-            <a:r>
-              <a:t>最初の値 10⁻⁴ は、これまでに測られた「銀河の外から来るガンマ線の背景」の典型的な明るさ (Totani §2.3)。</a:t>
-            </a:r>
-          </a:p>
-          <a:p>
-            <a:r>
-              <a:t>Loop I との区別: 殻 1 は太陽が殻の壁の中にあるため空のほぼ全体を覆い、明るさの変化が等方背景と同じくらい平ら。データからは 2 つの分け方が決まらず、合計だけが決まる (.dev/TOTANI_SPEC.md 3.7a)。</a:t>
-            </a:r>
-          </a:p>
-          <a:p>
-            <a:r>
-              <a:t>右の地図: 20.8 GeV の型紙 (倍率は掛けていない。形だけを見る図)。cloud_reports/2026-10-02_plot_templates.py で作成。</a:t>
+            <p:ph type="body" sz="quarter" idx="3"/>
+          </p:nvPr>
+        </p:nvSpPr>
+        <p:spPr/>
+        <p:txBody>
+          <a:bodyPr/>
+          <a:lstStyle/>
+          <a:p>
+            <a:r>
+              <a:t>Section II と Fig. 1 の内容。</a:t>
+            </a:r>
+          </a:p>
+          <a:p>
+            <a:r>
+              <a:t>dex = 対数で 1 桁。0.4 dex は約 2.5 倍、0.1 は約 1.26 倍、0.3 は約 2 倍。</a:t>
+            </a:r>
+          </a:p>
+          <a:p>
+            <a:r>
+              <a:t>非球対称: 楕円体の矮小銀河を球対称の NFW で解析すると、log10 J が最大 0.4 ずれる。</a:t>
+            </a:r>
+          </a:p>
+          <a:p>
+            <a:r>
+              <a:t>連星: 見分けられていない連星があると星の速度のばらつきが大きく見え、J を大きく見積もる (Reticulum II で約 0.3)。</a:t>
+            </a:r>
+          </a:p>
+          <a:p>
+            <a:r>
+              <a:t>誤差の分布: 多くの解析は log J の誤差を正規分布と仮定するが、本当の分布はすそが重い。</a:t>
             </a:r>
           </a:p>
         </p:txBody>
@@ -3123,7 +3230,7 @@
             <a:spLocks noGrp="1"/>
           </p:cNvSpPr>
           <p:nvPr>
-            <p:ph type="sldNum" idx="5" sz="quarter"/>
+            <p:ph type="sldNum" sz="quarter" idx="5"/>
           </p:nvPr>
         </p:nvSpPr>
         <p:spPr/>
@@ -3137,7 +3244,7 @@
 </file>
 
 <file path=ppt/notesSlides/notesSlide38.xml><?xml version="1.0" encoding="utf-8"?>
-<p:notes xmlns:a="http://schemas.openxmlformats.org/drawingml/2006/main" xmlns:p="http://schemas.openxmlformats.org/presentationml/2006/main" xmlns:r="http://schemas.openxmlformats.org/officeDocument/2006/relationships">
+<p:notes xmlns:a="http://schemas.openxmlformats.org/drawingml/2006/main" xmlns:r="http://schemas.openxmlformats.org/officeDocument/2006/relationships" xmlns:p="http://schemas.openxmlformats.org/presentationml/2006/main">
   <p:cSld>
     <p:spTree>
       <p:nvGrpSpPr>
@@ -3157,7 +3264,7 @@
         <p:nvSpPr>
           <p:cNvPr id="2" name="Slide Image Placeholder 1"/>
           <p:cNvSpPr>
-            <a:spLocks noGrp="1"/>
+            <a:spLocks noGrp="1" noRot="1" noChangeAspect="1"/>
           </p:cNvSpPr>
           <p:nvPr>
             <p:ph type="sldImg" idx="2"/>
@@ -3172,36 +3279,31 @@
             <a:spLocks noGrp="1"/>
           </p:cNvSpPr>
           <p:nvPr>
-            <p:ph type="body" idx="3" sz="quarter"/>
-          </p:nvPr>
-        </p:nvSpPr>
-        <p:spPr/>
-        <p:txBody>
-          <a:bodyPr/>
-          <a:lstStyle/>
-          <a:p>
-            <a:r>
-              <a:t>たとえ: 霧で何も見えない山の上で、一番高い場所を探したい。手元には高度計 (尤度) しかない。</a:t>
-            </a:r>
-          </a:p>
-          <a:p>
-            <a:r>
-              <a:t>歩く人 (MCMC) は、一歩ずつ足を出して高度計を見る。上りなら必ずその方向へ進み、下りでもたまに進む。下りにも進むのは、山頂で止まらずに山の広がり (どこまでが十分高いか) も知るため。</a:t>
-            </a:r>
-          </a:p>
-          <a:p>
-            <a:r>
-              <a:t>歩き終わったら、記録の中で一番高かった地点が最良の倍率、よく歩き回った範囲の幅が誤差になる。</a:t>
-            </a:r>
-          </a:p>
-          <a:p>
-            <a:r>
-              <a:t>ここでの「山」は 9 次元 (倍率が 9 個)。紙に描けないので、歩いて調べるしかない。</a:t>
-            </a:r>
-          </a:p>
-          <a:p>
-            <a:r>
-              <a:t>Totani (2025) §2.2: 最良値と統計誤差を、尤度を MCMC で最大化して求める。本研究も同じ (10/2 に揃えた)。</a:t>
+            <p:ph type="body" sz="quarter" idx="3"/>
+          </p:nvPr>
+        </p:nvSpPr>
+        <p:spPr/>
+        <p:txBody>
+          <a:bodyPr/>
+          <a:lstStyle/>
+          <a:p>
+            <a:r>
+              <a:t>Section III。FermiTools v2.5.1、fermipy v1.4.0。事象は P8R3 SOURCE V3、4 つの PSF クラス、エネルギーは 1 桁あたり 8 ビン。</a:t>
+            </a:r>
+          </a:p>
+          <a:p>
+            <a:r>
+              <a:t>背景の型紙: gll_iem_v07 (銀河拡散) と等方。点源カタログ (4FGL) の天体は簡単のため入れていない。</a:t>
+            </a:r>
+          </a:p>
+          <a:p>
+            <a:r>
+              <a:t>信号の空間の形: 古典的な矮小銀河は芯のある NFW (cNFW)、超微光の矮小銀河は切断した NFW。</a:t>
+            </a:r>
+          </a:p>
+          <a:p>
+            <a:r>
+              <a:t>本当の J (J_true) は Table I の中心値。</a:t>
             </a:r>
           </a:p>
         </p:txBody>
@@ -3213,7 +3315,7 @@
             <a:spLocks noGrp="1"/>
           </p:cNvSpPr>
           <p:nvPr>
-            <p:ph type="sldNum" idx="5" sz="quarter"/>
+            <p:ph type="sldNum" sz="quarter" idx="5"/>
           </p:nvPr>
         </p:nvSpPr>
         <p:spPr/>
@@ -3227,7 +3329,7 @@
 </file>
 
 <file path=ppt/notesSlides/notesSlide39.xml><?xml version="1.0" encoding="utf-8"?>
-<p:notes xmlns:a="http://schemas.openxmlformats.org/drawingml/2006/main" xmlns:p="http://schemas.openxmlformats.org/presentationml/2006/main" xmlns:r="http://schemas.openxmlformats.org/officeDocument/2006/relationships">
+<p:notes xmlns:a="http://schemas.openxmlformats.org/drawingml/2006/main" xmlns:r="http://schemas.openxmlformats.org/officeDocument/2006/relationships" xmlns:p="http://schemas.openxmlformats.org/presentationml/2006/main">
   <p:cSld>
     <p:spTree>
       <p:nvGrpSpPr>
@@ -3247,7 +3349,7 @@
         <p:nvSpPr>
           <p:cNvPr id="2" name="Slide Image Placeholder 1"/>
           <p:cNvSpPr>
-            <a:spLocks noGrp="1"/>
+            <a:spLocks noGrp="1" noRot="1" noChangeAspect="1"/>
           </p:cNvSpPr>
           <p:nvPr>
             <p:ph type="sldImg" idx="2"/>
@@ -3262,26 +3364,31 @@
             <a:spLocks noGrp="1"/>
           </p:cNvSpPr>
           <p:nvPr>
-            <p:ph type="body" idx="3" sz="quarter"/>
-          </p:nvPr>
-        </p:nvSpPr>
-        <p:spPr/>
-        <p:txBody>
-          <a:bodyPr/>
-          <a:lstStyle/>
-          <a:p>
-            <a:r>
-              <a:t>このスライドが「対応表」。この後のスライドは全部この言葉で説明する。</a:t>
-            </a:r>
-          </a:p>
-          <a:p>
-            <a:r>
-              <a:t>9 次元の山は紙に描けない。だから地図全体を調べるのではなく、歩いて足あとを残し、足あとから山の形を知る。</a:t>
-            </a:r>
-          </a:p>
-          <a:p>
-            <a:r>
-              <a:t>スクショ候補: 点数 (高さ) を計算する関数 log_probability (653〜659 行)。コードは code/mcmc_fit_all_bins.py (Totani 方式の修正 cloud_reports/2026-10-02_totani_bestfit.patch を当てた後の行番号)。</a:t>
+            <p:ph type="body" sz="quarter" idx="3"/>
+          </p:nvPr>
+        </p:nvSpPr>
+        <p:spPr/>
+        <p:txBody>
+          <a:bodyPr/>
+          <a:lstStyle/>
+          <a:p>
+            <a:r>
+              <a:t>式 (6)〜(10)。J_obs = 星の動きの解析で出た値 (観測値)、J_true = 本当の値。</a:t>
+            </a:r>
+          </a:p>
+          <a:p>
+            <a:r>
+              <a:t>σ_L が小さい = 解析ソフトが「J はほぼ分かっている」と自信を持ちすぎている状態。</a:t>
+            </a:r>
+          </a:p>
+          <a:p>
+            <a:r>
+              <a:t>J は「局外パラメータ」(知りたいのは ⟨σv⟩ だが、決めないといけない他のパラメータ) で、尤度を最大にする値に置き換えて (プロファイル) から ⟨σv⟩ を調べる。</a:t>
+            </a:r>
+          </a:p>
+          <a:p>
+            <a:r>
+              <a:t>TS = 2 ln [ L(⟨σv⟩) / L(0) ]。</a:t>
             </a:r>
           </a:p>
         </p:txBody>
@@ -3293,7 +3400,7 @@
             <a:spLocks noGrp="1"/>
           </p:cNvSpPr>
           <p:nvPr>
-            <p:ph type="sldNum" idx="5" sz="quarter"/>
+            <p:ph type="sldNum" sz="quarter" idx="5"/>
           </p:nvPr>
         </p:nvSpPr>
         <p:spPr/>
@@ -3351,17 +3458,22 @@
           <a:lstStyle/>
           <a:p>
             <a:r>
-              <a:t>ポアソン分布: 平均 λ のとき、n 個来る確率は λ^n e^(−λ) / n!。その対数を全セルで足したものが ln L (n に依存する定数 ln n! は省略)。</a:t>
-            </a:r>
-          </a:p>
-          <a:p>
-            <a:r>
-              <a:t>銀河面を除いた有効なセルは 120 個。セルを 10° と大きくとるのは、望遠鏡のぼやけ (PSF) よりずっと大きく、PSF の畳み込みを省略できるため (Totani と同じ)。</a:t>
-            </a:r>
-          </a:p>
-          <a:p>
-            <a:r>
-              <a:t>最大化は Totani (2025) §2.2 と同じく MCMC (emcee) で行い、歩いた中で ln L が最大の点を最良値とする。</a:t>
+              <a:t>たとえ: 部屋の壁全体がぼんやり同じ明るさで光っている、その「底上げ」の明るさ。</a:t>
+            </a:r>
+          </a:p>
+          <a:p>
+            <a:r>
+              <a:t>最初の値 10⁻⁴ は、これまでに測られた「銀河の外から来るガンマ線の背景」の典型的な明るさ (Totani §2.3)。</a:t>
+            </a:r>
+          </a:p>
+          <a:p>
+            <a:r>
+              <a:t>Loop I との区別: 殻 1 は太陽が殻の壁の中にあるため空のほぼ全体を覆い、明るさの変化が等方背景と同じくらい平ら。データからは 2 つの分け方が決まらず、合計だけが決まる (.dev/TOTANI_SPEC.md 3.7a)。</a:t>
+            </a:r>
+          </a:p>
+          <a:p>
+            <a:r>
+              <a:t>右の地図: 20.8 GeV の型紙 (倍率は掛けていない。形だけを見る図)。cloud_reports/2026-10-02_plot_templates.py で作成。</a:t>
             </a:r>
           </a:p>
         </p:txBody>
@@ -3387,7 +3499,7 @@
 </file>
 
 <file path=ppt/notesSlides/notesSlide40.xml><?xml version="1.0" encoding="utf-8"?>
-<p:notes xmlns:a="http://schemas.openxmlformats.org/drawingml/2006/main" xmlns:p="http://schemas.openxmlformats.org/presentationml/2006/main" xmlns:r="http://schemas.openxmlformats.org/officeDocument/2006/relationships">
+<p:notes xmlns:a="http://schemas.openxmlformats.org/drawingml/2006/main" xmlns:r="http://schemas.openxmlformats.org/officeDocument/2006/relationships" xmlns:p="http://schemas.openxmlformats.org/presentationml/2006/main">
   <p:cSld>
     <p:spTree>
       <p:nvGrpSpPr>
@@ -3407,7 +3519,7 @@
         <p:nvSpPr>
           <p:cNvPr id="2" name="Slide Image Placeholder 1"/>
           <p:cNvSpPr>
-            <a:spLocks noGrp="1"/>
+            <a:spLocks noGrp="1" noRot="1" noChangeAspect="1"/>
           </p:cNvSpPr>
           <p:nvPr>
             <p:ph type="sldImg" idx="2"/>
@@ -3422,36 +3534,21 @@
             <a:spLocks noGrp="1"/>
           </p:cNvSpPr>
           <p:nvPr>
-            <p:ph type="body" idx="3" sz="quarter"/>
-          </p:nvPr>
-        </p:nvSpPr>
-        <p:spPr/>
-        <p:txBody>
-          <a:bodyPr/>
-          <a:lstStyle/>
-          <a:p>
-            <a:r>
-              <a:t>ベイズの定理の読み方: 「データを見る前の考え (π: どこに入ってよいか)」に「データの当てはまり (L: 高度計)」を掛けると「データを見た後の考え (高さ)」になる。</a:t>
-            </a:r>
-          </a:p>
-          <a:p>
-            <a:r>
-              <a:t>今回の π は一様: 入ってよい範囲 (ガス・ICS などは 0 以上、全部 |f| ≤ 10⁶) なら同じ値、外なら 0。だから高さの形は高度計の読み (尤度) と同じになる。</a:t>
-            </a:r>
-          </a:p>
-          <a:p>
-            <a:r>
-              <a:t>P(D) は「海抜何メートルから測るか」の基準のようなもの。2 地点の高さを比べるときは、どちらにも同じ基準が入っているので割り算で消える。MCMC は比べることしかしないので、P(D) を計算しなくてよい。</a:t>
-            </a:r>
-          </a:p>
-          <a:p>
-            <a:r>
-              <a:t>対数にするのは、数が大きすぎたり小さすぎたりしてコンピュータで扱えなくなるのを防ぐため。</a:t>
-            </a:r>
-          </a:p>
-          <a:p>
-            <a:r>
-              <a:t>スクショ候補: log_prior (630 行、立ち入り禁止のチェック)、log_likelihood (647〜650 行、高度計)、log_probability (653 行、両方を足す)。コードは code/mcmc_fit_all_bins.py (Totani 方式の修正 cloud_reports/2026-10-02_totani_bestfit.patch を当てた後の行番号)。</a:t>
+            <p:ph type="body" sz="quarter" idx="3"/>
+          </p:nvPr>
+        </p:nvSpPr>
+        <p:spPr/>
+        <p:txBody>
+          <a:bodyPr/>
+          <a:lstStyle/>
+          <a:p>
+            <a:r>
+              <a:t>答えが分かっている仮想の宇宙で、解析が正しく答えを出せるかを試している。</a:t>
+            </a:r>
+          </a:p>
+          <a:p>
+            <a:r>
+              <a:t>カバレッジが足りない (アンダーカバレッジ) = 95% と言いながら、本物を 5% より多く除外してしまう。</a:t>
             </a:r>
           </a:p>
         </p:txBody>
@@ -3463,7 +3560,7 @@
             <a:spLocks noGrp="1"/>
           </p:cNvSpPr>
           <p:nvPr>
-            <p:ph type="sldNum" idx="5" sz="quarter"/>
+            <p:ph type="sldNum" sz="quarter" idx="5"/>
           </p:nvPr>
         </p:nvSpPr>
         <p:spPr/>
@@ -3477,7 +3574,7 @@
 </file>
 
 <file path=ppt/notesSlides/notesSlide41.xml><?xml version="1.0" encoding="utf-8"?>
-<p:notes xmlns:a="http://schemas.openxmlformats.org/drawingml/2006/main" xmlns:p="http://schemas.openxmlformats.org/presentationml/2006/main" xmlns:r="http://schemas.openxmlformats.org/officeDocument/2006/relationships">
+<p:notes xmlns:a="http://schemas.openxmlformats.org/drawingml/2006/main" xmlns:r="http://schemas.openxmlformats.org/officeDocument/2006/relationships" xmlns:p="http://schemas.openxmlformats.org/presentationml/2006/main">
   <p:cSld>
     <p:spTree>
       <p:nvGrpSpPr>
@@ -3497,7 +3594,7 @@
         <p:nvSpPr>
           <p:cNvPr id="2" name="Slide Image Placeholder 1"/>
           <p:cNvSpPr>
-            <a:spLocks noGrp="1"/>
+            <a:spLocks noGrp="1" noRot="1" noChangeAspect="1"/>
           </p:cNvSpPr>
           <p:nvPr>
             <p:ph type="sldImg" idx="2"/>
@@ -3512,31 +3609,31 @@
             <a:spLocks noGrp="1"/>
           </p:cNvSpPr>
           <p:nvPr>
-            <p:ph type="body" idx="3" sz="quarter"/>
-          </p:nvPr>
-        </p:nvSpPr>
-        <p:spPr/>
-        <p:txBody>
-          <a:bodyPr/>
-          <a:lstStyle/>
-          <a:p>
-            <a:r>
-              <a:t>例: 今いる場所の高さが 100、足を出した先の高さが 80 なら r = 0.8。0〜1 の乱数を引いて 0.8 より小さければ (80% の確率で) 移る。高さが 10 なら r = 0.1 で、10% しか移らない。だから、低い場所にはめったに行かず、高い場所に長くいる。</a:t>
-            </a:r>
-          </a:p>
-          <a:p>
-            <a:r>
-              <a:t>長く歩くと「各場所にいた時間の割合」が「その場所の高さ」に比例するようになる (詳細つり合い)。だから足あとのヒストグラムが山の形 (事後分布) になる。</a:t>
-            </a:r>
-          </a:p>
-          <a:p>
-            <a:r>
-              <a:t>移らなかったときも今の場所をもう一度記録するのが大事。そうしないと、高い場所にとどまった回数が数えられない。</a:t>
-            </a:r>
-          </a:p>
-          <a:p>
-            <a:r>
-              <a:t>スクショ候補: 歩かせる部分 sampler.run_mcmc (877〜878 行)。メトロポリスの判定そのものは emcee の中にある。コードは code/mcmc_fit_all_bins.py (Totani 方式の修正 cloud_reports/2026-10-02_totani_bestfit.patch を当てた後の行番号)。</a:t>
+            <p:ph type="body" sz="quarter" idx="3"/>
+          </p:nvPr>
+        </p:nvSpPr>
+        <p:spPr/>
+        <p:txBody>
+          <a:bodyPr/>
+          <a:lstStyle/>
+          <a:p>
+            <a:r>
+              <a:t>誤差を「大きくする」は 2 乗和で足す: σ_L² = σ_cat² + 0.3² など。σ_cat はカタログに書かれた誤差。</a:t>
+            </a:r>
+          </a:p>
+          <a:p>
+            <a:r>
+              <a:t>Ursa Minor: 距離 76 kpc、log10 J_tot = 18.55 ± 0.05、見かけの広がり 0.59° (望遠鏡のぼやけより大きい)。</a:t>
+            </a:r>
+          </a:p>
+          <a:p>
+            <a:r>
+              <a:t>基準 (σ = σ_cat) では 1 万回中 0 回しか本物を除外しない (過大なカバレッジ)。J と ⟨σv⟩ の縮退で Wilks の定理が成り立たないため。</a:t>
+            </a:r>
+          </a:p>
+          <a:p>
+            <a:r>
+              <a:t>形: 本当は楕円の cNFW。楕円かどうかはあまり効かず、中心の尖り方と広がりが効く。</a:t>
             </a:r>
           </a:p>
         </p:txBody>
@@ -3548,7 +3645,7 @@
             <a:spLocks noGrp="1"/>
           </p:cNvSpPr>
           <p:nvPr>
-            <p:ph type="sldNum" idx="5" sz="quarter"/>
+            <p:ph type="sldNum" sz="quarter" idx="5"/>
           </p:nvPr>
         </p:nvSpPr>
         <p:spPr/>
@@ -3562,7 +3659,7 @@
 </file>
 
 <file path=ppt/notesSlides/notesSlide42.xml><?xml version="1.0" encoding="utf-8"?>
-<p:notes xmlns:a="http://schemas.openxmlformats.org/drawingml/2006/main" xmlns:p="http://schemas.openxmlformats.org/presentationml/2006/main" xmlns:r="http://schemas.openxmlformats.org/officeDocument/2006/relationships">
+<p:notes xmlns:a="http://schemas.openxmlformats.org/drawingml/2006/main" xmlns:r="http://schemas.openxmlformats.org/officeDocument/2006/relationships" xmlns:p="http://schemas.openxmlformats.org/presentationml/2006/main">
   <p:cSld>
     <p:spTree>
       <p:nvGrpSpPr>
@@ -3582,7 +3679,7 @@
         <p:nvSpPr>
           <p:cNvPr id="2" name="Slide Image Placeholder 1"/>
           <p:cNvSpPr>
-            <a:spLocks noGrp="1"/>
+            <a:spLocks noGrp="1" noRot="1" noChangeAspect="1"/>
           </p:cNvSpPr>
           <p:nvPr>
             <p:ph type="sldImg" idx="2"/>
@@ -3597,31 +3694,36 @@
             <a:spLocks noGrp="1"/>
           </p:cNvSpPr>
           <p:nvPr>
-            <p:ph type="body" idx="3" sz="quarter"/>
-          </p:nvPr>
-        </p:nvSpPr>
-        <p:spPr/>
-        <p:txBody>
-          <a:bodyPr/>
-          <a:lstStyle/>
-          <a:p>
-            <a:r>
-              <a:t>実データではない、説明用のおもちゃの例。倍率が 1 個だけの山 (1 次元) を、平均 1.48・幅 0.075 の形だと仮定して 3000 歩歩かせた。</a:t>
-            </a:r>
-          </a:p>
-          <a:p>
-            <a:r>
-              <a:t>わざと山から離れた 1.2 から出発させたので、最初はふもとから登っていく。この登っている途中 (最初の 200 歩) は山の形と関係ないので捨てる (バーンイン)。</a:t>
-            </a:r>
-          </a:p>
-          <a:p>
-            <a:r>
-              <a:t>そのあとは山の上を行ったり来たりしている。足あとのヒストグラム (右の灰色) が、本当の山の形 (点線) と重なっている = 足あとから山の形が分かる。</a:t>
-            </a:r>
-          </a:p>
-          <a:p>
-            <a:r>
-              <a:t>図は slides/figs/plot_mcmc_toy.py で作った (コメント付き)。</a:t>
+            <p:ph type="body" sz="quarter" idx="3"/>
+          </p:nvPr>
+        </p:nvSpPr>
+        <p:spPr/>
+        <p:txBody>
+          <a:bodyPr/>
+          <a:lstStyle/>
+          <a:p>
+            <a:r>
+              <a:t>Section V。上限が 1 個のときよりゆるくなりにくいのは、J が大きい天体ほどカタログの誤差が大きいので、同じ量を足しても割合が小さいため。</a:t>
+            </a:r>
+          </a:p>
+          <a:p>
+            <a:r>
+              <a:t>Wilks の定理は「局外パラメータの数が少ない」ことを前提にする。27 個まとめると J が 27 個あり、前提が崩れる。</a:t>
+            </a:r>
+          </a:p>
+          <a:p>
+            <a:r>
+              <a:t>J_obs は対数で正規分布 → J そのものでは上に長いすそ。上に振れた天体が上限を強く引っ張り、下に振れた天体では打ち消せない。27 個のうち 1 個以上が 1.5σ 以上上に振れる確率は約 0.85。</a:t>
+            </a:r>
+          </a:p>
+          <a:p>
+            <a:r>
+              <a:t>全部を点として扱うと 37%。</a:t>
+            </a:r>
+          </a:p>
+          <a:p>
+            <a:r>
+              <a:t>何も無い領域 (blank field) での較正は Ref. [76] の方法。</a:t>
             </a:r>
           </a:p>
         </p:txBody>
@@ -3633,7 +3735,7 @@
             <a:spLocks noGrp="1"/>
           </p:cNvSpPr>
           <p:nvPr>
-            <p:ph type="sldNum" idx="5" sz="quarter"/>
+            <p:ph type="sldNum" sz="quarter" idx="5"/>
           </p:nvPr>
         </p:nvSpPr>
         <p:spPr/>
@@ -3647,7 +3749,7 @@
 </file>
 
 <file path=ppt/notesSlides/notesSlide43.xml><?xml version="1.0" encoding="utf-8"?>
-<p:notes xmlns:a="http://schemas.openxmlformats.org/drawingml/2006/main" xmlns:p="http://schemas.openxmlformats.org/presentationml/2006/main" xmlns:r="http://schemas.openxmlformats.org/officeDocument/2006/relationships">
+<p:notes xmlns:a="http://schemas.openxmlformats.org/drawingml/2006/main" xmlns:r="http://schemas.openxmlformats.org/officeDocument/2006/relationships" xmlns:p="http://schemas.openxmlformats.org/presentationml/2006/main">
   <p:cSld>
     <p:spTree>
       <p:nvGrpSpPr>
@@ -3667,7 +3769,7 @@
         <p:nvSpPr>
           <p:cNvPr id="2" name="Slide Image Placeholder 1"/>
           <p:cNvSpPr>
-            <a:spLocks noGrp="1"/>
+            <a:spLocks noGrp="1" noRot="1" noChangeAspect="1"/>
           </p:cNvSpPr>
           <p:nvPr>
             <p:ph type="sldImg" idx="2"/>
@@ -3682,31 +3784,16 @@
             <a:spLocks noGrp="1"/>
           </p:cNvSpPr>
           <p:nvPr>
-            <p:ph type="body" idx="3" sz="quarter"/>
-          </p:nvPr>
-        </p:nvSpPr>
-        <p:spPr/>
-        <p:txBody>
-          <a:bodyPr/>
-          <a:lstStyle/>
-          <a:p>
-            <a:r>
-              <a:t>細長い山: 仲間たちの散らばり方自体が「山が細長い方向」を表している。仲間のいる方向に沿って一歩を出すので、細長い山でも効率よく歩ける。</a:t>
-            </a:r>
-          </a:p>
-          <a:p>
-            <a:r>
-              <a:t>Z⁸ の 8 は「倍率の数 9 − 1」。線の上で伸び縮みさせた分、足を出せる場所の広さが変わるので、それを補正する。Z の範囲 1/2〜2 は emcee の決まった値 (a = 2)。</a:t>
-            </a:r>
-          </a:p>
-          <a:p>
-            <a:r>
-              <a:t>Totani と同じ初期値: 点源・GALPROP (ガス・ICS) = 1 倍、等方 = E²dN/dE 1e-4 相当、Loop I・バブル・ハロー = 0 (Totani §2.3)。</a:t>
-            </a:r>
-          </a:p>
-          <a:p>
-            <a:r>
-              <a:t>スクショ候補: 出発点を決める行 (868 行)、32 人で歩かせる emcee.EnsembleSampler (877 行)。コードは code/mcmc_fit_all_bins.py (Totani 方式の修正 cloud_reports/2026-10-02_totani_bestfit.patch を当てた後の行番号)。</a:t>
+            <p:ph type="body" sz="quarter" idx="3"/>
+          </p:nvPr>
+        </p:nvSpPr>
+        <p:spPr/>
+        <p:txBody>
+          <a:bodyPr/>
+          <a:lstStyle/>
+          <a:p>
+            <a:r>
+              <a:t>Section VI。「矮小銀河で信号が無くて当然」とまでは言っていない。「無いから暗黒物質ではない」と判断するのが早すぎるかもしれない、という主張。</a:t>
             </a:r>
           </a:p>
         </p:txBody>
@@ -3718,7 +3805,7 @@
             <a:spLocks noGrp="1"/>
           </p:cNvSpPr>
           <p:nvPr>
-            <p:ph type="sldNum" idx="5" sz="quarter"/>
+            <p:ph type="sldNum" sz="quarter" idx="5"/>
           </p:nvPr>
         </p:nvSpPr>
         <p:spPr/>
@@ -3732,7 +3819,7 @@
 </file>
 
 <file path=ppt/notesSlides/notesSlide44.xml><?xml version="1.0" encoding="utf-8"?>
-<p:notes xmlns:a="http://schemas.openxmlformats.org/drawingml/2006/main" xmlns:p="http://schemas.openxmlformats.org/presentationml/2006/main" xmlns:r="http://schemas.openxmlformats.org/officeDocument/2006/relationships">
+<p:notes xmlns:a="http://schemas.openxmlformats.org/drawingml/2006/main" xmlns:r="http://schemas.openxmlformats.org/officeDocument/2006/relationships" xmlns:p="http://schemas.openxmlformats.org/presentationml/2006/main">
   <p:cSld>
     <p:spTree>
       <p:nvGrpSpPr>
@@ -3752,7 +3839,7 @@
         <p:nvSpPr>
           <p:cNvPr id="2" name="Slide Image Placeholder 1"/>
           <p:cNvSpPr>
-            <a:spLocks noGrp="1"/>
+            <a:spLocks noGrp="1" noRot="1" noChangeAspect="1"/>
           </p:cNvSpPr>
           <p:nvPr>
             <p:ph type="sldImg" idx="2"/>
@@ -3767,46 +3854,26 @@
             <a:spLocks noGrp="1"/>
           </p:cNvSpPr>
           <p:nvPr>
-            <p:ph type="body" idx="3" sz="quarter"/>
-          </p:nvPr>
-        </p:nvSpPr>
-        <p:spPr/>
-        <p:txBody>
-          <a:bodyPr/>
-          <a:lstStyle/>
-          <a:p>
-            <a:r>
-              <a:t>ハローなしの山: ハローの倍率を 0 に固定した 8 次元の山。ハローありの山 (9 次元) より低いか同じ。2 つの頂上の高さの差が Δln L。</a:t>
-            </a:r>
-          </a:p>
-          <a:p>
-            <a:r>
-              <a:t>頂上に届いているかの確認: 坂を登る方法 (勾配法) で頂上を求めて、一番高い足あととの差を調べた。13 ビンすべてで ln L の差 0.6 以下、有意度の差 0.28σ 以下。確認のためだけで、結果には使っていない。</a:t>
-            </a:r>
-          </a:p>
-          <a:p>
-            <a:r>
-              <a:t>長さの目安: 自己相関時間 τ (何歩離れたら前の場所を忘れるか) の 50 倍以上が推奨。20.8 GeV で τ ≈ 650 歩なので 3 万歩以上が理想だが、6000 歩。</a:t>
-            </a:r>
-          </a:p>
-          <a:p>
-            <a:r>
-              <a:t>数字はクラウドの計算機で、Totani と同じやり方で出した値 (cloud_reports/2026-10-02_totani_mode/)。</a:t>
-            </a:r>
-          </a:p>
-          <a:p>
-            <a:r>
-              <a:t>スクショ候補: 一番高い足あとを探す行 (879〜880 行)、誤差の 16〜84% (926 行)、有意度 (910 行)。コードは code/mcmc_fit_all_bins.py (Totani 方式の修正 cloud_reports/2026-10-02_totani_bestfit.patch を当てた後の行番号)。</a:t>
-            </a:r>
-          </a:p>
-          <a:p>
-            <a:r>
-              <a:t>なぜ最初を捨てるか: 出発点は Totani と同じ初期値で、山のふもとにある。最初のうちは頂上へ登っている途中なので、その足あとは「山の形」を表していない。だから誤差の計算からは外す (バーンイン)。一番高い足あと (最良値) は、捨てた分も含めて全部の中から探している。</a:t>
-            </a:r>
-          </a:p>
-          <a:p>
-            <a:r>
-              <a:t>捨てる歩数は本研究で決めた値 (Totani の論文には書かれていない)。最初は 400 歩だったが、歩く人数 (20/32/64)・乱数の種 (3 通り)・歩数 (6000/20000) を変えて確かめたところ、400 歩では誤差の上端が乱数の種によって 1.59〜1.89 とぶれたので、2000 歩に変えた (2000 歩ではどれも 1.56〜1.57。この確認は型紙の作り方が少し違う確認用の計算で、本番の 2000 歩の誤差は 1.42〜1.58)。最良値 1.51 と有意度 19.5σ は捨てる歩数によらず同じ。400 歩のときの誤差は 1.43〜1.61。</a:t>
+            <p:ph type="body" sz="quarter" idx="3"/>
+          </p:nvPr>
+        </p:nvSpPr>
+        <p:spPr/>
+        <p:txBody>
+          <a:bodyPr/>
+          <a:lstStyle/>
+          <a:p>
+            <a:r>
+              <a:t>論文の Section IV で J_obs を J_true のまわりに対数正規でばらつかせたのと同じ考え方。幅 0.5 は論文の推奨値 (abstract)。</a:t>
+            </a:r>
+          </a:p>
+          <a:p>
+            <a:r>
+              <a:t>言い方: J がどれくらいずれているか分からないので、サイコロを振って J をずらして予測を出す、を 20 万回繰り返した。そうすると「予測はだいたいこの範囲」という幅が分かる。</a:t>
+            </a:r>
+          </a:p>
+          <a:p>
+            <a:r>
+              <a:t>スクリプト: cloud_reports/2026-10-02_dwarf_J_uncertainty.py。</a:t>
             </a:r>
           </a:p>
         </p:txBody>
@@ -3818,7 +3885,7 @@
             <a:spLocks noGrp="1"/>
           </p:cNvSpPr>
           <p:nvPr>
-            <p:ph type="sldNum" idx="5" sz="quarter"/>
+            <p:ph type="sldNum" sz="quarter" idx="5"/>
           </p:nvPr>
         </p:nvSpPr>
         <p:spPr/>
@@ -3832,7 +3899,7 @@
 </file>
 
 <file path=ppt/notesSlides/notesSlide45.xml><?xml version="1.0" encoding="utf-8"?>
-<p:notes xmlns:a="http://schemas.openxmlformats.org/drawingml/2006/main" xmlns:p="http://schemas.openxmlformats.org/presentationml/2006/main" xmlns:r="http://schemas.openxmlformats.org/officeDocument/2006/relationships">
+<p:notes xmlns:a="http://schemas.openxmlformats.org/drawingml/2006/main" xmlns:r="http://schemas.openxmlformats.org/officeDocument/2006/relationships" xmlns:p="http://schemas.openxmlformats.org/presentationml/2006/main">
   <p:cSld>
     <p:spTree>
       <p:nvGrpSpPr>
@@ -3852,7 +3919,7 @@
         <p:nvSpPr>
           <p:cNvPr id="2" name="Slide Image Placeholder 1"/>
           <p:cNvSpPr>
-            <a:spLocks noGrp="1"/>
+            <a:spLocks noGrp="1" noRot="1" noChangeAspect="1"/>
           </p:cNvSpPr>
           <p:nvPr>
             <p:ph type="sldImg" idx="2"/>
@@ -3867,31 +3934,26 @@
             <a:spLocks noGrp="1"/>
           </p:cNvSpPr>
           <p:nvPr>
-            <p:ph type="body" idx="3" sz="quarter"/>
-          </p:nvPr>
-        </p:nvSpPr>
-        <p:spPr/>
-        <p:txBody>
-          <a:bodyPr/>
-          <a:lstStyle/>
-          <a:p>
-            <a:r>
-              <a:t>4FGL-DR4: Fermi-LAT の 14 年分のデータで見つかった天体のカタログ (gll_psc_v35.fit)。</a:t>
-            </a:r>
-          </a:p>
-          <a:p>
-            <a:r>
-              <a:t>PSF (点広がり関数): 望遠鏡で点を撮っても少しぼやけて写る、そのぼやけ方。エネルギーが低いほど大きくぼやける (1 GeV で約 0.85°、10 GeV で約 0.16°)。</a:t>
-            </a:r>
-          </a:p>
-          <a:p>
-            <a:r>
-              <a:t>拡張源: 大マゼラン雲や Cen A のローブのように、点ではなく広がって見える天体。Totani §2.3 と同じく、長半径の 2 倍の円を外す。</a:t>
-            </a:r>
-          </a:p>
-          <a:p>
-            <a:r>
-              <a:t>右の地図: 20.8 GeV の型紙 (倍率は掛けていない。形だけを見る図)。cloud_reports/2026-10-02_plot_templates.py で作成。</a:t>
+            <p:ph type="body" sz="quarter" idx="3"/>
+          </p:nvPr>
+        </p:nvSpPr>
+        <p:spPr/>
+        <p:txBody>
+          <a:bodyPr/>
+          <a:lstStyle/>
+          <a:p>
+            <a:r>
+              <a:t>重み w_i は今まで通り J の推定値から出した予測 pred_i のまま (解析する人は本当の J を知らないため)。</a:t>
+            </a:r>
+          </a:p>
+          <a:p>
+            <a:r>
+              <a:t>Φ = 標準正規分布の累積分布関数。p は片側。ずれ = 標準正規で p に対応する σ。</a:t>
+            </a:r>
+          </a:p>
+          <a:p>
+            <a:r>
+              <a:t>J の誤差は「期待の中央値」を少し上げる。対数正規は上に長いすそを持つので、合計が上に引っ張られる (論文 Section V と同じ現象)。</a:t>
             </a:r>
           </a:p>
         </p:txBody>
@@ -3903,7 +3965,7 @@
             <a:spLocks noGrp="1"/>
           </p:cNvSpPr>
           <p:nvPr>
-            <p:ph type="sldNum" idx="5" sz="quarter"/>
+            <p:ph type="sldNum" sz="quarter" idx="5"/>
           </p:nvPr>
         </p:nvSpPr>
         <p:spPr/>
@@ -3917,7 +3979,7 @@
 </file>
 
 <file path=ppt/notesSlides/notesSlide46.xml><?xml version="1.0" encoding="utf-8"?>
-<p:notes xmlns:a="http://schemas.openxmlformats.org/drawingml/2006/main" xmlns:p="http://schemas.openxmlformats.org/presentationml/2006/main" xmlns:r="http://schemas.openxmlformats.org/officeDocument/2006/relationships">
+<p:notes xmlns:a="http://schemas.openxmlformats.org/drawingml/2006/main" xmlns:r="http://schemas.openxmlformats.org/officeDocument/2006/relationships" xmlns:p="http://schemas.openxmlformats.org/presentationml/2006/main">
   <p:cSld>
     <p:spTree>
       <p:nvGrpSpPr>
@@ -3937,7 +3999,7 @@
         <p:nvSpPr>
           <p:cNvPr id="2" name="Slide Image Placeholder 1"/>
           <p:cNvSpPr>
-            <a:spLocks noGrp="1"/>
+            <a:spLocks noGrp="1" noRot="1" noChangeAspect="1"/>
           </p:cNvSpPr>
           <p:nvPr>
             <p:ph type="sldImg" idx="2"/>
@@ -3952,31 +4014,26 @@
             <a:spLocks noGrp="1"/>
           </p:cNvSpPr>
           <p:nvPr>
-            <p:ph type="body" idx="3" sz="quarter"/>
-          </p:nvPr>
-        </p:nvSpPr>
-        <p:spPr/>
-        <p:txBody>
-          <a:bodyPr/>
-          <a:lstStyle/>
-          <a:p>
-            <a:r>
-              <a:t>pc (パーセク) は距離の単位で、1 pc ≈ 3.26 光年。太陽から殻の中心までは 78 pc と 95 pc。</a:t>
-            </a:r>
-          </a:p>
-          <a:p>
-            <a:r>
-              <a:t>殻 1 は太陽が殻の壁の中にあるので、空のほぼ全体を覆う (左の地図)。そのため等方背景と区別しにくい。</a:t>
-            </a:r>
-          </a:p>
-          <a:p>
-            <a:r>
-              <a:t>超新星の残骸: 星が爆発したときに吹き飛んだガスが、泡のように広がったもの。</a:t>
-            </a:r>
-          </a:p>
-          <a:p>
-            <a:r>
-              <a:t>右の地図: 20.8 GeV の型紙 (倍率は掛けていない。形だけを見る図)。cloud_reports/2026-10-02_plot_templates.py で作成。</a:t>
+            <p:ph type="body" sz="quarter" idx="3"/>
+          </p:nvPr>
+        </p:nvSpPr>
+        <p:spPr/>
+        <p:txBody>
+          <a:bodyPr/>
+          <a:lstStyle/>
+          <a:p>
+            <a:r>
+              <a:t>灰色の山: J の誤差を入れたときの予測の分布 (20 万回)。点線: J の誤差なしの予測 1.77。黒い点: 実測 0.39、横棒は測定の揺れ ±1.26。</a:t>
+            </a:r>
+          </a:p>
+          <a:p>
+            <a:r>
+              <a:t>点は山の左にあるが、横棒が山に届いているので、ずれは約 1.3σ で「たまたま」で起きる範囲。</a:t>
+            </a:r>
+          </a:p>
+          <a:p>
+            <a:r>
+              <a:t>図は slides/figs/plot_dwarf_J.py で作った。</a:t>
             </a:r>
           </a:p>
         </p:txBody>
@@ -3988,7 +4045,7 @@
             <a:spLocks noGrp="1"/>
           </p:cNvSpPr>
           <p:nvPr>
-            <p:ph type="sldNum" idx="5" sz="quarter"/>
+            <p:ph type="sldNum" sz="quarter" idx="5"/>
           </p:nvPr>
         </p:nvSpPr>
         <p:spPr/>
@@ -4002,7 +4059,7 @@
 </file>
 
 <file path=ppt/notesSlides/notesSlide47.xml><?xml version="1.0" encoding="utf-8"?>
-<p:notes xmlns:a="http://schemas.openxmlformats.org/drawingml/2006/main" xmlns:p="http://schemas.openxmlformats.org/presentationml/2006/main" xmlns:r="http://schemas.openxmlformats.org/officeDocument/2006/relationships">
+<p:notes xmlns:a="http://schemas.openxmlformats.org/drawingml/2006/main" xmlns:r="http://schemas.openxmlformats.org/officeDocument/2006/relationships" xmlns:p="http://schemas.openxmlformats.org/presentationml/2006/main">
   <p:cSld>
     <p:spTree>
       <p:nvGrpSpPr>
@@ -4022,7 +4079,7 @@
         <p:nvSpPr>
           <p:cNvPr id="2" name="Slide Image Placeholder 1"/>
           <p:cNvSpPr>
-            <a:spLocks noGrp="1"/>
+            <a:spLocks noGrp="1" noRot="1" noChangeAspect="1"/>
           </p:cNvSpPr>
           <p:nvPr>
             <p:ph type="sldImg" idx="2"/>
@@ -4037,36 +4094,31 @@
             <a:spLocks noGrp="1"/>
           </p:cNvSpPr>
           <p:nvPr>
-            <p:ph type="body" idx="3" sz="quarter"/>
-          </p:nvPr>
-        </p:nvSpPr>
-        <p:spPr/>
-        <p:txBody>
-          <a:bodyPr/>
-          <a:lstStyle/>
-          <a:p>
-            <a:r>
-              <a:t>なぜデータから作るか: バブルの正確な形を予言する理論が無いため。Totani は Fermi-LAT チームのやり方にならい、当てはめの残りから形を作った。</a:t>
-            </a:r>
-          </a:p>
-          <a:p>
-            <a:r>
-              <a:t>4.3 GeV の地図を使うのは、バブルがはっきり見えるため (Totani §3.1)。形はエネルギーで変えず、明るさ (倍率) だけを各エネルギーで決める。</a:t>
-            </a:r>
-          </a:p>
-          <a:p>
-            <a:r>
-              <a:t>負の型紙: 当てはめで光が余らなかった (予測が多すぎた) 場所。主に GALPROP の予測とデータのずれ。符号自由の倍率を掛けて補正に使う。</a:t>
-            </a:r>
-          </a:p>
-          <a:p>
-            <a:r>
-              <a:t>左の地図が正、右が負 (負の残差の大きさ)。</a:t>
-            </a:r>
-          </a:p>
-          <a:p>
-            <a:r>
-              <a:t>右の地図: 20.8 GeV の型紙 (倍率は掛けていない。形だけを見る図)。cloud_reports/2026-10-02_plot_templates.py で作成。</a:t>
+            <p:ph type="body" sz="quarter" idx="3"/>
+          </p:nvPr>
+        </p:nvSpPr>
+        <p:spPr/>
+        <p:txBody>
+          <a:bodyPr/>
+          <a:lstStyle/>
+          <a:p>
+            <a:r>
+              <a:t>予測は天の川側の局所密度 ρ☉ の −2 乗に比例する (天の川の J が密度の 2 乗に比例し、天の川の実測の明るさは固定のため)。</a:t>
+            </a:r>
+          </a:p>
+          <a:p>
+            <a:r>
+              <a:t>ρ☉ = 0.3: 期待 3.46 (誤差なし) / 4.86 (誤差あり、68% 2.64–9.95)、ずれ 2.4σ / 2.1σ (s = 1.26)。</a:t>
+            </a:r>
+          </a:p>
+          <a:p>
+            <a:r>
+              <a:t>ρ☉ = 0.6: 期待 0.87 / 1.21 (0.66–2.49)、ずれ 0.4σ / 0.7σ。</a:t>
+            </a:r>
+          </a:p>
+          <a:p>
+            <a:r>
+              <a:t>J の誤差を入れると、期待の幅が大きく広がり、「判定できない」がより強くなる。</a:t>
             </a:r>
           </a:p>
         </p:txBody>
@@ -4078,7 +4130,7 @@
             <a:spLocks noGrp="1"/>
           </p:cNvSpPr>
           <p:nvPr>
-            <p:ph type="sldNum" idx="5" sz="quarter"/>
+            <p:ph type="sldNum" sz="quarter" idx="5"/>
           </p:nvPr>
         </p:nvSpPr>
         <p:spPr/>
@@ -4092,7 +4144,7 @@
 </file>
 
 <file path=ppt/notesSlides/notesSlide48.xml><?xml version="1.0" encoding="utf-8"?>
-<p:notes xmlns:a="http://schemas.openxmlformats.org/drawingml/2006/main" xmlns:p="http://schemas.openxmlformats.org/presentationml/2006/main" xmlns:r="http://schemas.openxmlformats.org/officeDocument/2006/relationships">
+<p:notes xmlns:a="http://schemas.openxmlformats.org/drawingml/2006/main" xmlns:r="http://schemas.openxmlformats.org/officeDocument/2006/relationships" xmlns:p="http://schemas.openxmlformats.org/presentationml/2006/main">
   <p:cSld>
     <p:spTree>
       <p:nvGrpSpPr>
@@ -4112,7 +4164,7 @@
         <p:nvSpPr>
           <p:cNvPr id="2" name="Slide Image Placeholder 1"/>
           <p:cNvSpPr>
-            <a:spLocks noGrp="1"/>
+            <a:spLocks noGrp="1" noRot="1" noChangeAspect="1"/>
           </p:cNvSpPr>
           <p:nvPr>
             <p:ph type="sldImg" idx="2"/>
@@ -4127,31 +4179,21 @@
             <a:spLocks noGrp="1"/>
           </p:cNvSpPr>
           <p:nvPr>
-            <p:ph type="body" idx="3" sz="quarter"/>
-          </p:nvPr>
-        </p:nvSpPr>
-        <p:spPr/>
-        <p:txBody>
-          <a:bodyPr/>
-          <a:lstStyle/>
-          <a:p>
-            <a:r>
-              <a:t>NFW: シミュレーションで得られる暗黒物質ハローの典型的な密度の形。中心付近では距離に反比例、外側では距離の 3 乗に反比例して薄くなる。</a:t>
-            </a:r>
-          </a:p>
-          <a:p>
-            <a:r>
-              <a:t>形はエネルギーで変わらない (どのエネルギーでも同じ地図)。明るさ (倍率) だけを各エネルギーで決める。だから「どのエネルギーでハローが必要か」が有意度のスペクトルになる。</a:t>
-            </a:r>
-          </a:p>
-          <a:p>
-            <a:r>
-              <a:t>ICS と同じく、なめらかで中心に向かって明るい。違いは、ハローのほうが中心に強く集まっていること。</a:t>
-            </a:r>
-          </a:p>
-          <a:p>
-            <a:r>
-              <a:t>右の地図: 20.8 GeV の型紙 (倍率は掛けていない。形だけを見る図)。cloud_reports/2026-10-02_plot_templates.py で作成。</a:t>
+            <p:ph type="body" sz="quarter" idx="3"/>
+          </p:nvPr>
+        </p:nvSpPr>
+        <p:spPr/>
+        <p:txBody>
+          <a:bodyPr/>
+          <a:lstStyle/>
+          <a:p>
+            <a:r>
+              <a:t>15σ は「ハローがあるか」の強さ、1.3σ は「天の川と矮小銀河が食い違うか」の強さ。</a:t>
+            </a:r>
+          </a:p>
+          <a:p>
+            <a:r>
+              <a:t>どちらも Wilks の定理だけに頼らず、何も無い空で較正した値 (1.26) を使っている。</a:t>
             </a:r>
           </a:p>
         </p:txBody>
@@ -4163,7 +4205,7 @@
             <a:spLocks noGrp="1"/>
           </p:cNvSpPr>
           <p:nvPr>
-            <p:ph type="sldNum" idx="5" sz="quarter"/>
+            <p:ph type="sldNum" sz="quarter" idx="5"/>
           </p:nvPr>
         </p:nvSpPr>
         <p:spPr/>
@@ -4177,7 +4219,7 @@
 </file>
 
 <file path=ppt/notesSlides/notesSlide49.xml><?xml version="1.0" encoding="utf-8"?>
-<p:notes xmlns:a="http://schemas.openxmlformats.org/drawingml/2006/main" xmlns:p="http://schemas.openxmlformats.org/presentationml/2006/main" xmlns:r="http://schemas.openxmlformats.org/officeDocument/2006/relationships">
+<p:notes xmlns:a="http://schemas.openxmlformats.org/drawingml/2006/main" xmlns:r="http://schemas.openxmlformats.org/officeDocument/2006/relationships" xmlns:p="http://schemas.openxmlformats.org/presentationml/2006/main">
   <p:cSld>
     <p:spTree>
       <p:nvGrpSpPr>
@@ -4197,7 +4239,7 @@
         <p:nvSpPr>
           <p:cNvPr id="2" name="Slide Image Placeholder 1"/>
           <p:cNvSpPr>
-            <a:spLocks noGrp="1"/>
+            <a:spLocks noGrp="1" noRot="1" noChangeAspect="1"/>
           </p:cNvSpPr>
           <p:nvPr>
             <p:ph type="sldImg" idx="2"/>
@@ -4212,21 +4254,16 @@
             <a:spLocks noGrp="1"/>
           </p:cNvSpPr>
           <p:nvPr>
-            <p:ph type="body" idx="3" sz="quarter"/>
-          </p:nvPr>
-        </p:nvSpPr>
-        <p:spPr/>
-        <p:txBody>
-          <a:bodyPr/>
-          <a:lstStyle/>
-          <a:p>
-            <a:r>
-              <a:t>この後の尤度・有意度・MCMC のスライドは、全部「係数 9 個の決め方」の説明。難しい言葉が出てきたら、このスライドに戻って「今どの行の話か」を確認する。</a:t>
-            </a:r>
-          </a:p>
-          <a:p>
-            <a:r>
-              <a:t>型紙 = 前の 7 枚で見た地図。係数 = その地図を何倍して足すか。</a:t>
+            <p:ph type="body" sz="quarter" idx="3"/>
+          </p:nvPr>
+        </p:nvSpPr>
+        <p:spPr/>
+        <p:txBody>
+          <a:bodyPr/>
+          <a:lstStyle/>
+          <a:p>
+            <a:r>
+              <a:t>流れ: 再現 → 縮退による 3 つの疑問 → 背景の間違い説を否定・σ を較正・記録を整備 → 矮小銀河は非検出 → 論文の J の誤差を入れて「判定できない」を定量化。</a:t>
             </a:r>
           </a:p>
         </p:txBody>
@@ -4238,7 +4275,7 @@
             <a:spLocks noGrp="1"/>
           </p:cNvSpPr>
           <p:nvPr>
-            <p:ph type="sldNum" idx="5" sz="quarter"/>
+            <p:ph type="sldNum" sz="quarter" idx="5"/>
           </p:nvPr>
         </p:nvSpPr>
         <p:spPr/>
@@ -4296,22 +4333,22 @@
           <a:lstStyle/>
           <a:p>
             <a:r>
-              <a:t>「なし」は「あり」の特別な場合 (ハローの倍率 = 0) なので、入れ子のモデル。入れ子なら Δln L ≥ 0。</a:t>
-            </a:r>
-          </a:p>
-          <a:p>
-            <a:r>
-              <a:t>Wilks の定理: 帰無仮説 (ハローなし) が正しいとき、2Δln L は自由度 1 の χ² 分布。だから √(2Δln L) が「標準正規分布で何σ」に対応する。</a:t>
-            </a:r>
-          </a:p>
-          <a:p>
-            <a:r>
-              <a:t>定理の前提: データが多い (漸近的)、モデルが正しい、など。モデル (型紙) が間違っていると成り立たない。</a:t>
-            </a:r>
-          </a:p>
-          <a:p>
-            <a:r>
-              <a:t>Totani との関係: Totani (2025) Fig. 9 はハローあり・なしの ln L の差 (Δln L) を示しており、本文の 13–19σ はそれを σ = √(2Δln L) で σ に直した値。Totani は「Wilks の定理」という言葉は書いていないが、この換算はガンマ線天文学で標準 (2Δln L は TS = test statistic と呼ばれ、EGRET の解析 Mattox et al. 1996, ApJ 461, 396 から使われている)。本研究は Totani と同じ換算を使っている。</a:t>
+              <a:t>GALPROP: 宇宙線が銀河の中でどう生まれ、どう広がるかを計算し、そこから出るガンマ線の地図を作るシミュレーション (ver. 54、設定 SLZ6R30T150C2。Fermi-LAT チームの銀河拡散モデルでも使われている設定)。</a:t>
+            </a:r>
+          </a:p>
+          <a:p>
+            <a:r>
+              <a:t>π⁰ は電気を持たない中間子で、できるとすぐ (10⁻¹⁶ 秒ほど) 光子 2 個に壊れる。</a:t>
+            </a:r>
+          </a:p>
+          <a:p>
+            <a:r>
+              <a:t>ガス雲の模様は、電波 (水素の 21 cm 線) や、ちりによる星の光の赤み (E(B−V)) から作ったガスの地図に由来する。</a:t>
+            </a:r>
+          </a:p>
+          <a:p>
+            <a:r>
+              <a:t>右の地図: 20.8 GeV の型紙 (倍率は掛けていない。形だけを見る図)。cloud_reports/2026-10-02_plot_templates.py で作成。</a:t>
             </a:r>
           </a:p>
         </p:txBody>
@@ -4337,7 +4374,7 @@
 </file>
 
 <file path=ppt/notesSlides/notesSlide50.xml><?xml version="1.0" encoding="utf-8"?>
-<p:notes xmlns:a="http://schemas.openxmlformats.org/drawingml/2006/main" xmlns:p="http://schemas.openxmlformats.org/presentationml/2006/main" xmlns:r="http://schemas.openxmlformats.org/officeDocument/2006/relationships">
+<p:notes xmlns:a="http://schemas.openxmlformats.org/drawingml/2006/main" xmlns:r="http://schemas.openxmlformats.org/officeDocument/2006/relationships" xmlns:p="http://schemas.openxmlformats.org/presentationml/2006/main">
   <p:cSld>
     <p:spTree>
       <p:nvGrpSpPr>
@@ -4357,7 +4394,7 @@
         <p:nvSpPr>
           <p:cNvPr id="2" name="Slide Image Placeholder 1"/>
           <p:cNvSpPr>
-            <a:spLocks noGrp="1"/>
+            <a:spLocks noGrp="1" noRot="1" noChangeAspect="1"/>
           </p:cNvSpPr>
           <p:nvPr>
             <p:ph type="sldImg" idx="2"/>
@@ -4372,41 +4409,31 @@
             <a:spLocks noGrp="1"/>
           </p:cNvSpPr>
           <p:nvPr>
-            <p:ph type="body" idx="3" sz="quarter"/>
-          </p:nvPr>
-        </p:nvSpPr>
-        <p:spPr/>
-        <p:txBody>
-          <a:bodyPr/>
-          <a:lstStyle/>
-          <a:p>
-            <a:r>
-              <a:t>どの歩き方でも、正しく長く歩けば足あとの分布は同じ山の形 (事後分布) になる。違うのは、歩く速さ (効率) と、どんな山が得意か。</a:t>
-            </a:r>
-          </a:p>
-          <a:p>
-            <a:r>
-              <a:t>ギブス法: 9 個の倍率のうち 1 個だけを動かし、残り 8 個は止めておく。これを順番にくり返す。</a:t>
-            </a:r>
-          </a:p>
-          <a:p>
-            <a:r>
-              <a:t>ハミルトニアン MC (HMC): 山の傾き (尤度の微分) を使って、遠くまで一気に動く。パラメータが多いときに強い。</a:t>
-            </a:r>
-          </a:p>
-          <a:p>
-            <a:r>
-              <a:t>焼きなまし法: 金属をゆっくり冷やす「焼きなまし」が名前の由来。最初は下りにもよく進み、だんだん進みにくくして、最後は頂上で止まる。最良値を探す道具で、誤差は出ない。</a:t>
-            </a:r>
-          </a:p>
-          <a:p>
-            <a:r>
-              <a:t>歩けているかの確認 (歩き方の種類ではない): 受理率 (足を出したうち、実際に移った割合。emcee では 0.2〜0.5 くらいが目安。今回の 20.8 GeV は 0.42)、自己相関時間 τ (何歩で前の場所を忘れるか)。</a:t>
-            </a:r>
-          </a:p>
-          <a:p>
-            <a:r>
-              <a:t>emcee: Foreman-Mackey et al. (2013) の Python ライブラリ。中身は Goodman &amp; Weare (2010) のアンサンブル法 (ストレッチ移動)。歩く人数・歩数・捨てる歩数は Totani の論文に書かれていないので、本研究で決めた (32 人・6000 歩・最初の 2000 歩を捨てる)。</a:t>
+            <p:ph type="body" sz="quarter" idx="3"/>
+          </p:nvPr>
+        </p:nvSpPr>
+        <p:spPr/>
+        <p:txBody>
+          <a:bodyPr/>
+          <a:lstStyle/>
+          <a:p>
+            <a:r>
+              <a:t>中村 (2017) 講究録 §2: 状態空間モデル。システムノイズ (シミュレーションの誤差) と観測ノイズ (観測の誤差) を分けて書く。</a:t>
+            </a:r>
+          </a:p>
+          <a:p>
+            <a:r>
+              <a:t>§2.3.3–2.3.4: アンサンブルカルマンフィルタ・粒子フィルタは、確率分布をたくさんのサンプル (アンサンブル) で近似する (式 11)。</a:t>
+            </a:r>
+          </a:p>
+          <a:p>
+            <a:r>
+              <a:t>§3.3: モデル化誤差と数値計算の誤差を、システムノイズとして統一的に扱えることがデータ同化の利点。</a:t>
+            </a:r>
+          </a:p>
+          <a:p>
+            <a:r>
+              <a:t>正直な位置づけ: この解析は講究録を読む前に行った。後から読んで、同じ発想だと分かった。データ同化の中心は時間とともに変わる現象で、1 枚の空の地図にそのまま使える手法ではない。</a:t>
             </a:r>
           </a:p>
         </p:txBody>
@@ -4418,7 +4445,7 @@
             <a:spLocks noGrp="1"/>
           </p:cNvSpPr>
           <p:nvPr>
-            <p:ph type="sldNum" idx="5" sz="quarter"/>
+            <p:ph type="sldNum" sz="quarter" idx="5"/>
           </p:nvPr>
         </p:nvSpPr>
         <p:spPr/>
@@ -4432,7 +4459,7 @@
 </file>
 
 <file path=ppt/notesSlides/notesSlide51.xml><?xml version="1.0" encoding="utf-8"?>
-<p:notes xmlns:a="http://schemas.openxmlformats.org/drawingml/2006/main" xmlns:p="http://schemas.openxmlformats.org/presentationml/2006/main" xmlns:r="http://schemas.openxmlformats.org/officeDocument/2006/relationships">
+<p:notes xmlns:a="http://schemas.openxmlformats.org/drawingml/2006/main" xmlns:r="http://schemas.openxmlformats.org/officeDocument/2006/relationships" xmlns:p="http://schemas.openxmlformats.org/presentationml/2006/main">
   <p:cSld>
     <p:spTree>
       <p:nvGrpSpPr>
@@ -4452,7 +4479,7 @@
         <p:nvSpPr>
           <p:cNvPr id="2" name="Slide Image Placeholder 1"/>
           <p:cNvSpPr>
-            <a:spLocks noGrp="1"/>
+            <a:spLocks noGrp="1" noRot="1" noChangeAspect="1"/>
           </p:cNvSpPr>
           <p:nvPr>
             <p:ph type="sldImg" idx="2"/>
@@ -4467,42 +4494,15 @@
             <a:spLocks noGrp="1"/>
           </p:cNvSpPr>
           <p:nvPr>
-            <p:ph type="body" idx="3" sz="quarter"/>
-          </p:nvPr>
-        </p:nvSpPr>
-        <p:spPr/>
-        <p:txBody>
-          <a:bodyPr/>
-          <a:lstStyle/>
-          <a:p>
-            <a:r>
-              <a:t>等方背景の倍率 (本研究 / Totani): 20 GeV 付近で約 0.4 倍、一番低いエネルギー (1.5 GeV) では v20 で約 1/200。</a:t>
-            </a:r>
-          </a:p>
-          <a:p>
-            <a:r>
-              <a:t>Loop I の近い殻: 太陽が殻の壁の中 (半径 62〜81 pc、太陽から中心まで 78 pc) にいるので、ROI 全体を覆い、等方背景と数学的に区別できない (.dev/TOTANI_SPEC.md 3.7a)。</a:t>
-            </a:r>
-          </a:p>
-          <a:p>
-            <a:r>
-              <a:t>空の上の方だけで計算 (|b| ≥ 30°, 40°): 1.5 GeV の等方背景の倍率が 19 倍、55 倍に戻る。Totani 比 0.005 → 0.27 (2026-07-31、MCMC_BMIN)。</a:t>
-            </a:r>
-          </a:p>
-          <a:p>
-            <a:r>
-              <a:t>低いエネルギーでは、GALPROP の出力のスペクトルが Totani と違う (1.5 GeV で 0.56 倍) ことも効いている。</a:t>
-            </a:r>
-          </a:p>
-          <a:p>
-            <a:r>
-              <a:t>全成分の合計の明るさは Totani とほぼ同じ (0.96 倍)、ハロー単独も 1.16 倍。</a:t>
-            </a:r>
-          </a:p>
-          <a:p>
-            <a:r>
-              <a:t>図: 20.8 GeV の型紙、|b| = 20〜40° の帯での横方向の明るさ。作図 /home/arsei/slidework/make_profiles.py</a:t>
-            </a:r>
+            <p:ph type="body" sz="quarter" idx="3"/>
+          </p:nvPr>
+        </p:nvSpPr>
+        <p:spPr/>
+        <p:txBody>
+          <a:bodyPr/>
+          <a:lstStyle/>
+          <a:p>
+            <a:endParaRPr/>
           </a:p>
         </p:txBody>
       </p:sp>
@@ -4513,7 +4513,7 @@
             <a:spLocks noGrp="1"/>
           </p:cNvSpPr>
           <p:nvPr>
-            <p:ph type="sldNum" idx="5" sz="quarter"/>
+            <p:ph type="sldNum" sz="quarter" idx="5"/>
           </p:nvPr>
         </p:nvSpPr>
         <p:spPr/>
@@ -4571,22 +4571,22 @@
           <a:lstStyle/>
           <a:p>
             <a:r>
-              <a:t>MCMC (マルコフ連鎖モンテカルロ): 「今いる点の近くに一歩動いてみて、尤度が上がれば進む、下がっても確率的に進む」を繰り返す。長く歩くと、歩いた場所の分布が事後分布になる。</a:t>
-            </a:r>
-          </a:p>
-          <a:p>
-            <a:r>
-              <a:t>事前分布は一様 (倍率の符号の制約と、広い範囲の制限だけ)。</a:t>
-            </a:r>
-          </a:p>
-          <a:p>
-            <a:r>
-              <a:t>emcee は、複数の歩行者が互いの位置を使って次の一歩を決める方式 (affine-invariant ensemble sampler)。</a:t>
-            </a:r>
-          </a:p>
-          <a:p>
-            <a:r>
-              <a:t>自己相関時間 τ: 何歩離れたら前の位置を「忘れる」か。50τ 以上の長さは emcee の推奨。</a:t>
+              <a:t>逆コンプトン散乱: 普通のコンプトン散乱は光が電子をはね飛ばす。ここでは逆で、とても速い電子が、低いエネルギーの光にエネルギーを渡して、ガンマ線にする。</a:t>
+            </a:r>
+          </a:p>
+          <a:p>
+            <a:r>
+              <a:t>ガスの型紙と違って雲の模様が無く、なめらか。ハローもなめらかで中心に向かって明るいので、2 つの形が似ている (問題のスライドで説明する縮退)。</a:t>
+            </a:r>
+          </a:p>
+          <a:p>
+            <a:r>
+              <a:t>GALPROP の設定は IC_anisotropic = 0 (等方近似)。</a:t>
+            </a:r>
+          </a:p>
+          <a:p>
+            <a:r>
+              <a:t>右の地図: 20.8 GeV の型紙 (倍率は掛けていない。形だけを見る図)。cloud_reports/2026-10-02_plot_templates.py で作成。</a:t>
             </a:r>
           </a:p>
         </p:txBody>
@@ -4656,12 +4656,22 @@
           <a:lstStyle/>
           <a:p>
             <a:r>
-              <a:t>青が本研究 (10/2 に Totani と同じやり方 = MCMC で最良値、で計算し直した。クラウドの計算機)、赤が Totani Fig. 9。本人 PC での確定値は後日。</a:t>
-            </a:r>
-          </a:p>
-          <a:p>
-            <a:r>
-              <a:t>ただしこの 19.5σ は Wilks の定理を信じた「名目の値」。後で較正する。</a:t>
+              <a:t>4FGL-DR4: Fermi-LAT の 14 年分のデータで見つかった天体のカタログ (gll_psc_v35.fit)。</a:t>
+            </a:r>
+          </a:p>
+          <a:p>
+            <a:r>
+              <a:t>PSF (点広がり関数): 望遠鏡で点を撮っても少しぼやけて写る、そのぼやけ方。エネルギーが低いほど大きくぼやける (1 GeV で約 0.85°、10 GeV で約 0.16°)。</a:t>
+            </a:r>
+          </a:p>
+          <a:p>
+            <a:r>
+              <a:t>拡張源: 大マゼラン雲や Cen A のローブのように、点ではなく広がって見える天体。Totani §2.3 と同じく、長半径の 2 倍の円を外す。</a:t>
+            </a:r>
+          </a:p>
+          <a:p>
+            <a:r>
+              <a:t>右の地図: 20.8 GeV の型紙 (倍率は掛けていない。形だけを見る図)。cloud_reports/2026-10-02_plot_templates.py で作成。</a:t>
             </a:r>
           </a:p>
         </p:txBody>
@@ -4731,17 +4741,22 @@
           <a:lstStyle/>
           <a:p>
             <a:r>
-              <a:t>縮退: 2 つの成分の形が似ていて、どちらに光を割り振っても同じくらい合ってしまう状態。</a:t>
-            </a:r>
-          </a:p>
-          <a:p>
-            <a:r>
-              <a:t>たとえ: 部屋に電球 (ICS) がついていて、もう 1 つの光 (ハロー) を探している。写真では 2 つの光の形がほとんど同じなので、余った明るさが本当にもう 1 つの光なのか、電球が少し明るいだけなのか見分けにくい。</a:t>
-            </a:r>
-          </a:p>
-          <a:p>
-            <a:r>
-              <a:t>図: ICS の倍率 (GALPROP の予測の何倍か)。ハローなしでは全エネルギーで約 1.4〜1.6 倍でほぼ平ら (最良値)。ハローを入れると、ハローが効くビンでだけへこむ。</a:t>
+              <a:t>pc (パーセク) は距離の単位で、1 pc ≈ 3.26 光年。太陽から殻の中心までは 78 pc と 95 pc。</a:t>
+            </a:r>
+          </a:p>
+          <a:p>
+            <a:r>
+              <a:t>殻 1 は太陽が殻の壁の中にあるので、空のほぼ全体を覆う (左の地図)。そのため等方背景と区別しにくい。</a:t>
+            </a:r>
+          </a:p>
+          <a:p>
+            <a:r>
+              <a:t>超新星の残骸: 星が爆発したときに吹き飛んだガスが、泡のように広がったもの。</a:t>
+            </a:r>
+          </a:p>
+          <a:p>
+            <a:r>
+              <a:t>右の地図: 20.8 GeV の型紙 (倍率は掛けていない。形だけを見る図)。cloud_reports/2026-10-02_plot_templates.py で作成。</a:t>
             </a:r>
           </a:p>
         </p:txBody>
@@ -4811,12 +4826,27 @@
           <a:lstStyle/>
           <a:p>
             <a:r>
-              <a:t>① フェルミバブル = 銀河中心の上下に広がる、ガンマ線で明るい泡状の構造。その矩形 |l| &lt; 22°, 10° &lt; |b| &lt; 55° を当てはめから外した。</a:t>
-            </a:r>
-          </a:p>
-          <a:p>
-            <a:r>
-              <a:t>② 何も無い空 23 か所で同じ解析をした (2026-07-31)。</a:t>
+              <a:t>なぜデータから作るか: バブルの正確な形を予言する理論が無いため。Totani は Fermi-LAT チームのやり方にならい、当てはめの残りから形を作った。</a:t>
+            </a:r>
+          </a:p>
+          <a:p>
+            <a:r>
+              <a:t>4.3 GeV の地図を使うのは、バブルがはっきり見えるため (Totani §3.1)。形はエネルギーで変えず、明るさ (倍率) だけを各エネルギーで決める。</a:t>
+            </a:r>
+          </a:p>
+          <a:p>
+            <a:r>
+              <a:t>負の型紙: 当てはめで光が余らなかった (予測が多すぎた) 場所。主に GALPROP の予測とデータのずれ。符号自由の倍率を掛けて補正に使う。</a:t>
+            </a:r>
+          </a:p>
+          <a:p>
+            <a:r>
+              <a:t>左の地図が正、右が負 (負の残差の大きさ)。</a:t>
+            </a:r>
+          </a:p>
+          <a:p>
+            <a:r>
+              <a:t>右の地図: 20.8 GeV の型紙 (倍率は掛けていない。形だけを見る図)。cloud_reports/2026-10-02_plot_templates.py で作成。</a:t>
             </a:r>
           </a:p>
         </p:txBody>
@@ -4988,7 +5018,7 @@
           <a:p>
             <a:fld id="{030FFF5C-2D96-4D39-AE5C-E4AC30C80AB5}" type="datetimeFigureOut">
               <a:rPr lang="en-US" smtClean="0"/>
-              <a:t>10/2/2026</a:t>
+              <a:t>10/3/2026</a:t>
             </a:fld>
             <a:endParaRPr lang="en-US"/>
           </a:p>
@@ -5186,7 +5216,7 @@
           <a:p>
             <a:fld id="{030FFF5C-2D96-4D39-AE5C-E4AC30C80AB5}" type="datetimeFigureOut">
               <a:rPr lang="en-US" smtClean="0"/>
-              <a:t>10/2/2026</a:t>
+              <a:t>10/3/2026</a:t>
             </a:fld>
             <a:endParaRPr lang="en-US"/>
           </a:p>
@@ -5394,7 +5424,7 @@
           <a:p>
             <a:fld id="{030FFF5C-2D96-4D39-AE5C-E4AC30C80AB5}" type="datetimeFigureOut">
               <a:rPr lang="en-US" smtClean="0"/>
-              <a:t>10/2/2026</a:t>
+              <a:t>10/3/2026</a:t>
             </a:fld>
             <a:endParaRPr lang="en-US"/>
           </a:p>
@@ -5592,7 +5622,7 @@
           <a:p>
             <a:fld id="{030FFF5C-2D96-4D39-AE5C-E4AC30C80AB5}" type="datetimeFigureOut">
               <a:rPr lang="en-US" smtClean="0"/>
-              <a:t>10/2/2026</a:t>
+              <a:t>10/3/2026</a:t>
             </a:fld>
             <a:endParaRPr lang="en-US"/>
           </a:p>
@@ -5867,7 +5897,7 @@
           <a:p>
             <a:fld id="{030FFF5C-2D96-4D39-AE5C-E4AC30C80AB5}" type="datetimeFigureOut">
               <a:rPr lang="en-US" smtClean="0"/>
-              <a:t>10/2/2026</a:t>
+              <a:t>10/3/2026</a:t>
             </a:fld>
             <a:endParaRPr lang="en-US"/>
           </a:p>
@@ -6132,7 +6162,7 @@
           <a:p>
             <a:fld id="{030FFF5C-2D96-4D39-AE5C-E4AC30C80AB5}" type="datetimeFigureOut">
               <a:rPr lang="en-US" smtClean="0"/>
-              <a:t>10/2/2026</a:t>
+              <a:t>10/3/2026</a:t>
             </a:fld>
             <a:endParaRPr lang="en-US"/>
           </a:p>
@@ -6544,7 +6574,7 @@
           <a:p>
             <a:fld id="{030FFF5C-2D96-4D39-AE5C-E4AC30C80AB5}" type="datetimeFigureOut">
               <a:rPr lang="en-US" smtClean="0"/>
-              <a:t>10/2/2026</a:t>
+              <a:t>10/3/2026</a:t>
             </a:fld>
             <a:endParaRPr lang="en-US"/>
           </a:p>
@@ -6685,7 +6715,7 @@
           <a:p>
             <a:fld id="{030FFF5C-2D96-4D39-AE5C-E4AC30C80AB5}" type="datetimeFigureOut">
               <a:rPr lang="en-US" smtClean="0"/>
-              <a:t>10/2/2026</a:t>
+              <a:t>10/3/2026</a:t>
             </a:fld>
             <a:endParaRPr lang="en-US"/>
           </a:p>
@@ -6798,7 +6828,7 @@
           <a:p>
             <a:fld id="{030FFF5C-2D96-4D39-AE5C-E4AC30C80AB5}" type="datetimeFigureOut">
               <a:rPr lang="en-US" smtClean="0"/>
-              <a:t>10/2/2026</a:t>
+              <a:t>10/3/2026</a:t>
             </a:fld>
             <a:endParaRPr lang="en-US"/>
           </a:p>
@@ -7109,7 +7139,7 @@
           <a:p>
             <a:fld id="{030FFF5C-2D96-4D39-AE5C-E4AC30C80AB5}" type="datetimeFigureOut">
               <a:rPr lang="en-US" smtClean="0"/>
-              <a:t>10/2/2026</a:t>
+              <a:t>10/3/2026</a:t>
             </a:fld>
             <a:endParaRPr lang="en-US"/>
           </a:p>
@@ -7397,7 +7427,7 @@
           <a:p>
             <a:fld id="{030FFF5C-2D96-4D39-AE5C-E4AC30C80AB5}" type="datetimeFigureOut">
               <a:rPr lang="en-US" smtClean="0"/>
-              <a:t>10/2/2026</a:t>
+              <a:t>10/3/2026</a:t>
             </a:fld>
             <a:endParaRPr lang="en-US"/>
           </a:p>
@@ -7638,7 +7668,7 @@
           <a:p>
             <a:fld id="{030FFF5C-2D96-4D39-AE5C-E4AC30C80AB5}" type="datetimeFigureOut">
               <a:rPr lang="en-US" smtClean="0"/>
-              <a:t>10/2/2026</a:t>
+              <a:t>10/3/2026</a:t>
             </a:fld>
             <a:endParaRPr lang="en-US"/>
           </a:p>
@@ -8160,7 +8190,7 @@
 </file>
 
 <file path=ppt/slides/slide10.xml><?xml version="1.0" encoding="utf-8"?>
-<p:sld xmlns:a="http://schemas.openxmlformats.org/drawingml/2006/main" xmlns:p="http://schemas.openxmlformats.org/presentationml/2006/main" xmlns:r="http://schemas.openxmlformats.org/officeDocument/2006/relationships">
+<p:sld xmlns:a="http://schemas.openxmlformats.org/drawingml/2006/main" xmlns:r="http://schemas.openxmlformats.org/officeDocument/2006/relationships" xmlns:p="http://schemas.openxmlformats.org/presentationml/2006/main">
   <p:cSld>
     <p:spTree>
       <p:nvGrpSpPr>
@@ -8168,7 +8198,14 @@
         <p:cNvGrpSpPr/>
         <p:nvPr/>
       </p:nvGrpSpPr>
-      <p:grpSpPr/>
+      <p:grpSpPr>
+        <a:xfrm>
+          <a:off x="0" y="0"/>
+          <a:ext cx="0" cy="0"/>
+          <a:chOff x="0" y="0"/>
+          <a:chExt cx="0" cy="0"/>
+        </a:xfrm>
+      </p:grpSpPr>
       <p:sp>
         <p:nvSpPr>
           <p:cNvPr id="2" name="Title 1"/>
@@ -8211,7 +8248,6 @@
           <a:bodyPr/>
           <a:lstStyle/>
           <a:p>
-            <a:pPr/>
             <a:r>
               <a:rPr sz="1800"/>
               <a:t>銀河中心の上下に、それぞれ約 50° 広がる巨大な泡</a:t>
@@ -8225,7 +8261,6 @@
             </a:r>
           </a:p>
           <a:p>
-            <a:pPr/>
             <a:r>
               <a:rPr sz="1800"/>
               <a:t>型紙はデータから作る（Totani §3.1）</a:t>
@@ -8253,7 +8288,6 @@
             </a:r>
           </a:p>
           <a:p>
-            <a:pPr/>
             <a:r>
               <a:rPr sz="1800"/>
               <a:t>倍率：正は 0 以上、負は符号自由。最初は 0</a:t>
@@ -8270,7 +8304,7 @@
           <p:nvPr/>
         </p:nvPicPr>
         <p:blipFill>
-          <a:blip r:embed="rId2"/>
+          <a:blip r:embed="rId3"/>
           <a:stretch>
             <a:fillRect/>
           </a:stretch>
@@ -8294,7 +8328,7 @@
           <p:nvPr/>
         </p:nvPicPr>
         <p:blipFill>
-          <a:blip r:embed="rId3"/>
+          <a:blip r:embed="rId4"/>
           <a:stretch>
             <a:fillRect/>
           </a:stretch>
@@ -8358,7 +8392,7 @@
 </file>
 
 <file path=ppt/slides/slide11.xml><?xml version="1.0" encoding="utf-8"?>
-<p:sld xmlns:a="http://schemas.openxmlformats.org/drawingml/2006/main" xmlns:p="http://schemas.openxmlformats.org/presentationml/2006/main" xmlns:r="http://schemas.openxmlformats.org/officeDocument/2006/relationships">
+<p:sld xmlns:a="http://schemas.openxmlformats.org/drawingml/2006/main" xmlns:r="http://schemas.openxmlformats.org/officeDocument/2006/relationships" xmlns:p="http://schemas.openxmlformats.org/presentationml/2006/main">
   <p:cSld>
     <p:spTree>
       <p:nvGrpSpPr>
@@ -8366,7 +8400,14 @@
         <p:cNvGrpSpPr/>
         <p:nvPr/>
       </p:nvGrpSpPr>
-      <p:grpSpPr/>
+      <p:grpSpPr>
+        <a:xfrm>
+          <a:off x="0" y="0"/>
+          <a:ext cx="0" cy="0"/>
+          <a:chOff x="0" y="0"/>
+          <a:chExt cx="0" cy="0"/>
+        </a:xfrm>
+      </p:grpSpPr>
       <p:sp>
         <p:nvSpPr>
           <p:cNvPr id="2" name="Title 1"/>
@@ -8409,14 +8450,12 @@
           <a:bodyPr/>
           <a:lstStyle/>
           <a:p>
-            <a:pPr/>
             <a:r>
               <a:rPr sz="1800"/>
               <a:t>暗黒物質の粒子どうしがぶつかって消え（対消滅）、ガンマ線を出す</a:t>
             </a:r>
           </a:p>
           <a:p>
-            <a:pPr/>
             <a:r>
               <a:rPr sz="1800"/>
               <a:t>明るさ ∝ 密度の 2 乗（粒子が 2 つ要るため）</a:t>
@@ -8430,7 +8469,6 @@
             </a:r>
           </a:p>
           <a:p>
-            <a:pPr/>
             <a:r>
               <a:rPr sz="1800"/>
               <a:t>密度の形：NFW（Via Lactea II のシミュレーション）</a:t>
@@ -8444,14 +8482,12 @@
             </a:r>
           </a:p>
           <a:p>
-            <a:pPr/>
             <a:r>
               <a:rPr sz="1800"/>
               <a:t>形：銀河中心に向かって明るく、なめらかに広がる</a:t>
             </a:r>
           </a:p>
           <a:p>
-            <a:pPr/>
             <a:r>
               <a:rPr sz="1800"/>
               <a:t>倍率：符号自由（負も許す）、最初は 0</a:t>
@@ -8475,7 +8511,7 @@
           <p:nvPr/>
         </p:nvPicPr>
         <p:blipFill>
-          <a:blip r:embed="rId2"/>
+          <a:blip r:embed="rId3"/>
           <a:stretch>
             <a:fillRect/>
           </a:stretch>
@@ -8539,7 +8575,7 @@
 </file>
 
 <file path=ppt/slides/slide12.xml><?xml version="1.0" encoding="utf-8"?>
-<p:sld xmlns:a="http://schemas.openxmlformats.org/drawingml/2006/main" xmlns:p="http://schemas.openxmlformats.org/presentationml/2006/main" xmlns:r="http://schemas.openxmlformats.org/officeDocument/2006/relationships">
+<p:sld xmlns:a="http://schemas.openxmlformats.org/drawingml/2006/main" xmlns:r="http://schemas.openxmlformats.org/officeDocument/2006/relationships" xmlns:p="http://schemas.openxmlformats.org/presentationml/2006/main">
   <p:cSld>
     <p:spTree>
       <p:nvGrpSpPr>
@@ -8547,7 +8583,14 @@
         <p:cNvGrpSpPr/>
         <p:nvPr/>
       </p:nvGrpSpPr>
-      <p:grpSpPr/>
+      <p:grpSpPr>
+        <a:xfrm>
+          <a:off x="0" y="0"/>
+          <a:ext cx="0" cy="0"/>
+          <a:chOff x="0" y="0"/>
+          <a:chExt cx="0" cy="0"/>
+        </a:xfrm>
+      </p:grpSpPr>
       <p:sp>
         <p:nvSpPr>
           <p:cNvPr id="2" name="Title 1"/>
@@ -8587,10 +8630,11 @@
           </a:xfrm>
         </p:spPr>
         <p:txBody>
-          <a:bodyPr/>
-          <a:lstStyle/>
-          <a:p>
-            <a:pPr/>
+          <a:bodyPr>
+            <a:normAutofit fontScale="92500" lnSpcReduction="10000"/>
+          </a:bodyPr>
+          <a:lstStyle/>
+          <a:p>
             <a:r>
               <a:rPr sz="2600"/>
               <a:t>予測 ＝ f₁ × 型紙₁ ＋ f₂ × 型紙₂ ＋ … ＋ f₉ × 型紙₉</a:t>
@@ -8604,28 +8648,93 @@
             </a:r>
           </a:p>
           <a:p>
-            <a:pPr/>
             <a:r>
               <a:rPr sz="2600"/>
               <a:t>尤度：その係数 9 個が「どれだけ良いか」の点数</a:t>
             </a:r>
-          </a:p>
-          <a:p>
-            <a:pPr/>
+            <a:endParaRPr lang="en-US" sz="2600"/>
+          </a:p>
+          <a:p>
+            <a:pPr marL="0" indent="0">
+              <a:buNone/>
+            </a:pPr>
+            <a:r>
+              <a:rPr lang="en-US" altLang="ja-JP" sz="2400"/>
+              <a:t>	ln L = Σ_i [ C_obs,i ln C_exp,i − C_exp,i ]</a:t>
+            </a:r>
+          </a:p>
+          <a:p>
+            <a:pPr lvl="1"/>
+            <a:r>
+              <a:rPr lang="en-US" altLang="ja-JP" sz="2000"/>
+              <a:t>C_obs</a:t>
+            </a:r>
+            <a:r>
+              <a:rPr lang="ja-JP" altLang="en-US" sz="2000"/>
+              <a:t>：観測した光子数、</a:t>
+            </a:r>
+            <a:r>
+              <a:rPr lang="en-US" altLang="ja-JP" sz="2000"/>
+              <a:t>C_exp</a:t>
+            </a:r>
+            <a:r>
+              <a:rPr lang="ja-JP" altLang="en-US" sz="2000"/>
+              <a:t>：予測した光子数</a:t>
+            </a:r>
+          </a:p>
+          <a:p>
+            <a:pPr lvl="1"/>
+            <a:r>
+              <a:rPr lang="en-US" altLang="ja-JP" sz="2000"/>
+              <a:t>i</a:t>
+            </a:r>
+            <a:r>
+              <a:rPr lang="ja-JP" altLang="en-US" sz="2000"/>
+              <a:t>：</a:t>
+            </a:r>
+            <a:r>
+              <a:rPr lang="en-US" altLang="ja-JP" sz="2000"/>
+              <a:t>10° × 10° </a:t>
+            </a:r>
+            <a:r>
+              <a:rPr lang="ja-JP" altLang="en-US" sz="2000"/>
+              <a:t>のセル（空をマス目に分ける）</a:t>
+            </a:r>
+          </a:p>
+          <a:p>
+            <a:r>
+              <a:rPr lang="en-US" altLang="ja-JP" sz="2400"/>
+              <a:t>ln L </a:t>
+            </a:r>
+            <a:r>
+              <a:rPr lang="ja-JP" altLang="en-US" sz="2400"/>
+              <a:t>が最大になる倍率 </a:t>
+            </a:r>
+            <a:r>
+              <a:rPr lang="en-US" altLang="ja-JP" sz="2400"/>
+              <a:t>f </a:t>
+            </a:r>
+            <a:r>
+              <a:rPr lang="ja-JP" altLang="en-US" sz="2400"/>
+              <a:t>を探す（最尤推定）</a:t>
+            </a:r>
+          </a:p>
+          <a:p>
+            <a:endParaRPr sz="2600"/>
+          </a:p>
+          <a:p>
             <a:r>
               <a:rPr sz="2600"/>
               <a:t>MCMC：良い係数 9 個を探す方法</a:t>
             </a:r>
           </a:p>
           <a:p>
-            <a:pPr/>
             <a:r>
               <a:rPr sz="2600"/>
               <a:t>最良値：見つかった一番良い係数 9 個</a:t>
             </a:r>
           </a:p>
           <a:p>
-            <a:pPr/>
             <a:r>
               <a:rPr sz="2600"/>
               <a:t>誤差：その係数が「どこまでずれても十分良いか」</a:t>
@@ -8733,31 +8842,6 @@
           </a:p>
         </p:txBody>
       </p:sp>
-      <p:pic>
-        <p:nvPicPr>
-          <p:cNvPr id="6" name="Picture 5" descr="fig_bin6_before_after_totani.png"/>
-          <p:cNvPicPr>
-            <a:picLocks noChangeAspect="1"/>
-          </p:cNvPicPr>
-          <p:nvPr/>
-        </p:nvPicPr>
-        <p:blipFill>
-          <a:blip r:embed="rId4"/>
-          <a:srcRect/>
-          <a:stretch>
-            <a:fillRect/>
-          </a:stretch>
-        </p:blipFill>
-        <p:spPr>
-          <a:xfrm>
-            <a:off x="2551565" y="3749403"/>
-            <a:ext cx="5751094" cy="3014367"/>
-          </a:xfrm>
-          <a:prstGeom prst="rect">
-            <a:avLst/>
-          </a:prstGeom>
-        </p:spPr>
-      </p:pic>
     </p:spTree>
   </p:cSld>
   <p:clrMapOvr>
@@ -8767,7 +8851,7 @@
 </file>
 
 <file path=ppt/slides/slide14.xml><?xml version="1.0" encoding="utf-8"?>
-<p:sld xmlns:a="http://schemas.openxmlformats.org/drawingml/2006/main" xmlns:p="http://schemas.openxmlformats.org/presentationml/2006/main" xmlns:r="http://schemas.openxmlformats.org/officeDocument/2006/relationships">
+<p:sld xmlns:a="http://schemas.openxmlformats.org/drawingml/2006/main" xmlns:r="http://schemas.openxmlformats.org/officeDocument/2006/relationships" xmlns:p="http://schemas.openxmlformats.org/presentationml/2006/main">
   <p:cSld>
     <p:spTree>
       <p:nvGrpSpPr>
@@ -8775,7 +8859,14 @@
         <p:cNvGrpSpPr/>
         <p:nvPr/>
       </p:nvGrpSpPr>
-      <p:grpSpPr/>
+      <p:grpSpPr>
+        <a:xfrm>
+          <a:off x="0" y="0"/>
+          <a:ext cx="0" cy="0"/>
+          <a:chOff x="0" y="0"/>
+          <a:chExt cx="0" cy="0"/>
+        </a:xfrm>
+      </p:grpSpPr>
       <p:sp>
         <p:nvSpPr>
           <p:cNvPr id="2" name="Title 1"/>
@@ -8818,7 +8909,6 @@
           <a:bodyPr/>
           <a:lstStyle/>
           <a:p>
-            <a:pPr/>
             <a:r>
               <a:rPr sz="2400"/>
               <a:t>尤度 ＝ 点数をつける係（たとえ：高度計）</a:t>
@@ -8832,7 +8922,6 @@
             </a:r>
           </a:p>
           <a:p>
-            <a:pPr/>
             <a:r>
               <a:rPr sz="2400"/>
               <a:t>MCMC ＝ 倍率を探す係（たとえ：霧の山を歩く人）</a:t>
@@ -8853,7 +8942,6 @@
             </a:r>
           </a:p>
           <a:p>
-            <a:pPr/>
             <a:r>
               <a:rPr sz="2400"/>
               <a:t>歩き終わったら</a:t>
@@ -9215,7 +9303,7 @@
 </file>
 
 <file path=ppt/slides/slide17.xml><?xml version="1.0" encoding="utf-8"?>
-<p:sld xmlns:a="http://schemas.openxmlformats.org/drawingml/2006/main" xmlns:p="http://schemas.openxmlformats.org/presentationml/2006/main" xmlns:r="http://schemas.openxmlformats.org/officeDocument/2006/relationships">
+<p:sld xmlns:a="http://schemas.openxmlformats.org/drawingml/2006/main" xmlns:r="http://schemas.openxmlformats.org/officeDocument/2006/relationships" xmlns:p="http://schemas.openxmlformats.org/presentationml/2006/main">
   <p:cSld>
     <p:spTree>
       <p:nvGrpSpPr>
@@ -9223,7 +9311,14 @@
         <p:cNvGrpSpPr/>
         <p:nvPr/>
       </p:nvGrpSpPr>
-      <p:grpSpPr/>
+      <p:grpSpPr>
+        <a:xfrm>
+          <a:off x="0" y="0"/>
+          <a:ext cx="0" cy="0"/>
+          <a:chOff x="0" y="0"/>
+          <a:chExt cx="0" cy="0"/>
+        </a:xfrm>
+      </p:grpSpPr>
       <p:sp>
         <p:nvSpPr>
           <p:cNvPr id="2" name="Title 1"/>
@@ -9266,7 +9361,6 @@
           <a:bodyPr/>
           <a:lstStyle/>
           <a:p>
-            <a:pPr/>
             <a:r>
               <a:rPr sz="1800"/>
               <a:t>山の上の「場所」 → 倍率の組 θ</a:t>
@@ -9280,21 +9374,18 @@
             </a:r>
           </a:p>
           <a:p>
-            <a:pPr/>
             <a:r>
               <a:rPr sz="1800"/>
               <a:t>その場所の「高さ」 → 点数（事後分布）</a:t>
             </a:r>
           </a:p>
           <a:p>
-            <a:pPr/>
             <a:r>
               <a:rPr sz="1800"/>
               <a:t>「高度計」 → 尤度の計算（手法② の ln L）</a:t>
             </a:r>
           </a:p>
           <a:p>
-            <a:pPr/>
             <a:r>
               <a:rPr sz="1800"/>
               <a:t>「立ち入り禁止の場所」 → 事前分布</a:t>
@@ -9308,28 +9399,24 @@
             </a:r>
           </a:p>
           <a:p>
-            <a:pPr/>
             <a:r>
               <a:rPr sz="1800"/>
               <a:t>「歩く人」 → 歩行者（walker）。今回は 32 人</a:t>
             </a:r>
           </a:p>
           <a:p>
-            <a:pPr/>
             <a:r>
               <a:rPr sz="1800"/>
               <a:t>「足あとの記録」 → チェーン（サンプル）</a:t>
             </a:r>
           </a:p>
           <a:p>
-            <a:pPr/>
             <a:r>
               <a:rPr sz="1800"/>
               <a:t>「一番高い足あと」 → 最良値</a:t>
             </a:r>
           </a:p>
           <a:p>
-            <a:pPr/>
             <a:r>
               <a:rPr sz="1800"/>
               <a:t>「足あとの広がり」 → 誤差</a:t>
@@ -9346,7 +9433,7 @@
 </file>
 
 <file path=ppt/slides/slide18.xml><?xml version="1.0" encoding="utf-8"?>
-<p:sld xmlns:a="http://schemas.openxmlformats.org/drawingml/2006/main" xmlns:p="http://schemas.openxmlformats.org/presentationml/2006/main" xmlns:r="http://schemas.openxmlformats.org/officeDocument/2006/relationships">
+<p:sld xmlns:a="http://schemas.openxmlformats.org/drawingml/2006/main" xmlns:r="http://schemas.openxmlformats.org/officeDocument/2006/relationships" xmlns:p="http://schemas.openxmlformats.org/presentationml/2006/main">
   <p:cSld>
     <p:spTree>
       <p:nvGrpSpPr>
@@ -9354,7 +9441,14 @@
         <p:cNvGrpSpPr/>
         <p:nvPr/>
       </p:nvGrpSpPr>
-      <p:grpSpPr/>
+      <p:grpSpPr>
+        <a:xfrm>
+          <a:off x="0" y="0"/>
+          <a:ext cx="0" cy="0"/>
+          <a:chOff x="0" y="0"/>
+          <a:chExt cx="0" cy="0"/>
+        </a:xfrm>
+      </p:grpSpPr>
       <p:sp>
         <p:nvSpPr>
           <p:cNvPr id="2" name="Title 1"/>
@@ -9397,14 +9491,12 @@
           <a:bodyPr/>
           <a:lstStyle/>
           <a:p>
-            <a:pPr/>
             <a:r>
               <a:rPr sz="1800"/>
               <a:t>P(θ | D) = L(D | θ) × π(θ) ÷ P(D)</a:t>
             </a:r>
           </a:p>
           <a:p>
-            <a:pPr/>
             <a:r>
               <a:rPr sz="1800"/>
               <a:t>P(θ | D)：場所 θ の「高さ」（＝点数）</a:t>
@@ -9418,7 +9510,6 @@
             </a:r>
           </a:p>
           <a:p>
-            <a:pPr/>
             <a:r>
               <a:rPr sz="1800"/>
               <a:t>L(D | θ)：「高度計」の読み（尤度）</a:t>
@@ -9432,7 +9523,6 @@
             </a:r>
           </a:p>
           <a:p>
-            <a:pPr/>
             <a:r>
               <a:rPr sz="1800"/>
               <a:t>π(θ)：入ってよい場所か（事前分布）</a:t>
@@ -9446,7 +9536,6 @@
             </a:r>
           </a:p>
           <a:p>
-            <a:pPr/>
             <a:r>
               <a:rPr sz="1800"/>
               <a:t>P(D)：海抜の基準。どの場所でも同じ数</a:t>
@@ -9460,7 +9549,6 @@
             </a:r>
           </a:p>
           <a:p>
-            <a:pPr/>
             <a:r>
               <a:rPr sz="1800"/>
               <a:t>計算では対数で：ln(高さ) = ln L + ln π</a:t>
@@ -9517,7 +9605,7 @@
 </file>
 
 <file path=ppt/slides/slide19.xml><?xml version="1.0" encoding="utf-8"?>
-<p:sld xmlns:a="http://schemas.openxmlformats.org/drawingml/2006/main" xmlns:p="http://schemas.openxmlformats.org/presentationml/2006/main" xmlns:r="http://schemas.openxmlformats.org/officeDocument/2006/relationships">
+<p:sld xmlns:a="http://schemas.openxmlformats.org/drawingml/2006/main" xmlns:r="http://schemas.openxmlformats.org/officeDocument/2006/relationships" xmlns:p="http://schemas.openxmlformats.org/presentationml/2006/main">
   <p:cSld>
     <p:spTree>
       <p:nvGrpSpPr>
@@ -9525,7 +9613,14 @@
         <p:cNvGrpSpPr/>
         <p:nvPr/>
       </p:nvGrpSpPr>
-      <p:grpSpPr/>
+      <p:grpSpPr>
+        <a:xfrm>
+          <a:off x="0" y="0"/>
+          <a:ext cx="0" cy="0"/>
+          <a:chOff x="0" y="0"/>
+          <a:chExt cx="0" cy="0"/>
+        </a:xfrm>
+      </p:grpSpPr>
       <p:sp>
         <p:nvSpPr>
           <p:cNvPr id="2" name="Title 1"/>
@@ -9568,7 +9663,6 @@
           <a:bodyPr/>
           <a:lstStyle/>
           <a:p>
-            <a:pPr/>
             <a:r>
               <a:rPr sz="1800"/>
               <a:t>1. 今いる場所 θ から、少しずれた場所 θ′ に足を出す</a:t>
@@ -9582,21 +9676,18 @@
             </a:r>
           </a:p>
           <a:p>
-            <a:pPr/>
             <a:r>
               <a:rPr sz="1800"/>
               <a:t>2. 高度計で両方を読み、比 r = 高さ(θ′) ÷ 高さ(θ)</a:t>
             </a:r>
           </a:p>
           <a:p>
-            <a:pPr/>
             <a:r>
               <a:rPr sz="1800"/>
               <a:t>3. r ≥ 1（上り）なら、必ず θ′ に移る</a:t>
             </a:r>
           </a:p>
           <a:p>
-            <a:pPr/>
             <a:r>
               <a:rPr sz="1800"/>
               <a:t>4. r &lt; 1（下り）なら、確率 r で移る</a:t>
@@ -9610,21 +9701,18 @@
             </a:r>
           </a:p>
           <a:p>
-            <a:pPr/>
             <a:r>
               <a:rPr sz="1800"/>
               <a:t>5. 移っても移らなくても、今いる場所を足あとに記録</a:t>
             </a:r>
           </a:p>
           <a:p>
-            <a:pPr/>
             <a:r>
               <a:rPr sz="1800"/>
               <a:t>6. 1〜5 を何千回もくり返す</a:t>
             </a:r>
           </a:p>
           <a:p>
-            <a:pPr/>
             <a:r>
               <a:rPr sz="1800"/>
               <a:t>なぜ下りにも進む？</a:t>
@@ -9865,7 +9953,7 @@
 </file>
 
 <file path=ppt/slides/slide20.xml><?xml version="1.0" encoding="utf-8"?>
-<p:sld xmlns:a="http://schemas.openxmlformats.org/drawingml/2006/main" xmlns:p="http://schemas.openxmlformats.org/presentationml/2006/main" xmlns:r="http://schemas.openxmlformats.org/officeDocument/2006/relationships">
+<p:sld xmlns:a="http://schemas.openxmlformats.org/drawingml/2006/main" xmlns:r="http://schemas.openxmlformats.org/officeDocument/2006/relationships" xmlns:p="http://schemas.openxmlformats.org/presentationml/2006/main">
   <p:cSld>
     <p:spTree>
       <p:nvGrpSpPr>
@@ -9873,7 +9961,14 @@
         <p:cNvGrpSpPr/>
         <p:nvPr/>
       </p:nvGrpSpPr>
-      <p:grpSpPr/>
+      <p:grpSpPr>
+        <a:xfrm>
+          <a:off x="0" y="0"/>
+          <a:ext cx="0" cy="0"/>
+          <a:chOff x="0" y="0"/>
+          <a:chExt cx="0" cy="0"/>
+        </a:xfrm>
+      </p:grpSpPr>
       <p:sp>
         <p:nvSpPr>
           <p:cNvPr id="2" name="Title 1"/>
@@ -9905,7 +10000,7 @@
           <p:nvPr/>
         </p:nvPicPr>
         <p:blipFill>
-          <a:blip r:embed="rId2"/>
+          <a:blip r:embed="rId3"/>
           <a:stretch>
             <a:fillRect/>
           </a:stretch>
@@ -9958,7 +10053,7 @@
 </file>
 
 <file path=ppt/slides/slide21.xml><?xml version="1.0" encoding="utf-8"?>
-<p:sld xmlns:a="http://schemas.openxmlformats.org/drawingml/2006/main" xmlns:p="http://schemas.openxmlformats.org/presentationml/2006/main" xmlns:r="http://schemas.openxmlformats.org/officeDocument/2006/relationships">
+<p:sld xmlns:a="http://schemas.openxmlformats.org/drawingml/2006/main" xmlns:r="http://schemas.openxmlformats.org/officeDocument/2006/relationships" xmlns:p="http://schemas.openxmlformats.org/presentationml/2006/main">
   <p:cSld>
     <p:spTree>
       <p:nvGrpSpPr>
@@ -9966,7 +10061,14 @@
         <p:cNvGrpSpPr/>
         <p:nvPr/>
       </p:nvGrpSpPr>
-      <p:grpSpPr/>
+      <p:grpSpPr>
+        <a:xfrm>
+          <a:off x="0" y="0"/>
+          <a:ext cx="0" cy="0"/>
+          <a:chOff x="0" y="0"/>
+          <a:chExt cx="0" cy="0"/>
+        </a:xfrm>
+      </p:grpSpPr>
       <p:sp>
         <p:nvSpPr>
           <p:cNvPr id="2" name="Title 1"/>
@@ -10009,28 +10111,24 @@
           <a:bodyPr/>
           <a:lstStyle/>
           <a:p>
-            <a:pPr/>
             <a:r>
               <a:rPr sz="2000"/>
               <a:t>メトロポリス法（1953）：一番基本。少しずらして、比 r で移るか決める（②）</a:t>
             </a:r>
           </a:p>
           <a:p>
-            <a:pPr/>
             <a:r>
               <a:rPr sz="2000"/>
               <a:t>ギブス法：倍率を 1 個ずつ順番に動かす</a:t>
             </a:r>
           </a:p>
           <a:p>
-            <a:pPr/>
             <a:r>
               <a:rPr sz="2000"/>
               <a:t>ハミルトニアン MC：坂の傾きを使って、ボールを転がすように大きく動く</a:t>
             </a:r>
           </a:p>
           <a:p>
-            <a:pPr/>
             <a:r>
               <a:rPr sz="2000"/>
               <a:t>アンサンブル法（2010）：何人も同時に歩き、仲間の位置で一歩を決める（④）</a:t>
@@ -10044,7 +10142,6 @@
             </a:r>
           </a:p>
           <a:p>
-            <a:pPr/>
             <a:r>
               <a:rPr sz="2000"/>
               <a:t>似ているが別物：焼きなまし法</a:t>
@@ -10058,7 +10155,6 @@
             </a:r>
           </a:p>
           <a:p>
-            <a:pPr/>
             <a:r>
               <a:rPr sz="2000"/>
               <a:t>Totani は「MCMC」とだけ書いていて、どの歩き方かは書いていない</a:t>
@@ -10122,7 +10218,7 @@
 </file>
 
 <file path=ppt/slides/slide22.xml><?xml version="1.0" encoding="utf-8"?>
-<p:sld xmlns:a="http://schemas.openxmlformats.org/drawingml/2006/main" xmlns:p="http://schemas.openxmlformats.org/presentationml/2006/main" xmlns:r="http://schemas.openxmlformats.org/officeDocument/2006/relationships">
+<p:sld xmlns:a="http://schemas.openxmlformats.org/drawingml/2006/main" xmlns:r="http://schemas.openxmlformats.org/officeDocument/2006/relationships" xmlns:p="http://schemas.openxmlformats.org/presentationml/2006/main">
   <p:cSld>
     <p:spTree>
       <p:nvGrpSpPr>
@@ -10130,7 +10226,14 @@
         <p:cNvGrpSpPr/>
         <p:nvPr/>
       </p:nvGrpSpPr>
-      <p:grpSpPr/>
+      <p:grpSpPr>
+        <a:xfrm>
+          <a:off x="0" y="0"/>
+          <a:ext cx="0" cy="0"/>
+          <a:chOff x="0" y="0"/>
+          <a:chExt cx="0" cy="0"/>
+        </a:xfrm>
+      </p:grpSpPr>
       <p:sp>
         <p:nvSpPr>
           <p:cNvPr id="2" name="Title 1"/>
@@ -10173,7 +10276,6 @@
           <a:bodyPr/>
           <a:lstStyle/>
           <a:p>
-            <a:pPr/>
             <a:r>
               <a:rPr sz="1600"/>
               <a:t>1 人だと、細長い山で迷いやすい</a:t>
@@ -10187,14 +10289,12 @@
             </a:r>
           </a:p>
           <a:p>
-            <a:pPr/>
             <a:r>
               <a:rPr sz="1600"/>
               <a:t>そこで 32 人が同時に歩き、仲間の位置を見て一歩を決める</a:t>
             </a:r>
           </a:p>
           <a:p>
-            <a:pPr/>
             <a:r>
               <a:rPr sz="1600"/>
               <a:t>一歩の出し方（ストレッチ移動）</a:t>
@@ -10222,21 +10322,18 @@
             </a:r>
           </a:p>
           <a:p>
-            <a:pPr/>
             <a:r>
               <a:rPr sz="1600"/>
               <a:t>移るかどうかは ② と同じ考え（Z⁸ を掛けて補正）</a:t>
             </a:r>
           </a:p>
           <a:p>
-            <a:pPr/>
             <a:r>
               <a:rPr sz="1600"/>
               <a:t>出発点：全員、Totani と同じ初期値の近く。6000 歩</a:t>
             </a:r>
           </a:p>
           <a:p>
-            <a:pPr/>
             <a:r>
               <a:rPr sz="1600"/>
               <a:t>emcee はこの歩き方の Python の道具の名前。32 人・6000 歩は本研究の設定</a:t>
@@ -10293,7 +10390,7 @@
 </file>
 
 <file path=ppt/slides/slide23.xml><?xml version="1.0" encoding="utf-8"?>
-<p:sld xmlns:a="http://schemas.openxmlformats.org/drawingml/2006/main" xmlns:p="http://schemas.openxmlformats.org/presentationml/2006/main" xmlns:r="http://schemas.openxmlformats.org/officeDocument/2006/relationships">
+<p:sld xmlns:a="http://schemas.openxmlformats.org/drawingml/2006/main" xmlns:r="http://schemas.openxmlformats.org/officeDocument/2006/relationships" xmlns:p="http://schemas.openxmlformats.org/presentationml/2006/main">
   <p:cSld>
     <p:spTree>
       <p:nvGrpSpPr>
@@ -10301,7 +10398,14 @@
         <p:cNvGrpSpPr/>
         <p:nvPr/>
       </p:nvGrpSpPr>
-      <p:grpSpPr/>
+      <p:grpSpPr>
+        <a:xfrm>
+          <a:off x="0" y="0"/>
+          <a:ext cx="0" cy="0"/>
+          <a:chOff x="0" y="0"/>
+          <a:chExt cx="0" cy="0"/>
+        </a:xfrm>
+      </p:grpSpPr>
       <p:sp>
         <p:nvSpPr>
           <p:cNvPr id="2" name="Title 1"/>
@@ -10344,7 +10448,6 @@
           <a:bodyPr/>
           <a:lstStyle/>
           <a:p>
-            <a:pPr/>
             <a:r>
               <a:rPr sz="1800"/>
               <a:t>一番高い足あと → 最良の倍率（Totani と同じ）</a:t>
@@ -10358,7 +10461,6 @@
             </a:r>
           </a:p>
           <a:p>
-            <a:pPr/>
             <a:r>
               <a:rPr sz="1800"/>
               <a:t>足あとの広がり → 誤差</a:t>
@@ -10379,7 +10481,6 @@
             </a:r>
           </a:p>
           <a:p>
-            <a:pPr/>
             <a:r>
               <a:rPr sz="1800"/>
               <a:t>有意度：ハローあり・なしの山を別々に歩く</a:t>
@@ -10400,7 +10501,6 @@
             </a:r>
           </a:p>
           <a:p>
-            <a:pPr/>
             <a:r>
               <a:rPr sz="1800"/>
               <a:t>注意：山の端まで歩き回るには、もっと長く歩くのが理想</a:t>
@@ -10511,7 +10611,7 @@
           <p:nvPr/>
         </p:nvPicPr>
         <p:blipFill>
-          <a:blip r:embed="rId4"/>
+          <a:blip r:embed="rId3"/>
           <a:srcRect/>
           <a:stretch>
             <a:fillRect/>
@@ -10695,7 +10795,6 @@
             </a:r>
           </a:p>
           <a:p>
-            <a:pPr/>
             <a:r>
               <a:rPr sz="1800"/>
               <a:t>たとえ：部屋の電球（ICS）と探している光（ハロー）が、写真ではほぼ同じ形 → 余った明るさがどちらのものか決めにくい</a:t>
@@ -10712,7 +10811,7 @@
           <p:nvPr/>
         </p:nvPicPr>
         <p:blipFill>
-          <a:blip r:embed="rId4"/>
+          <a:blip r:embed="rId3"/>
           <a:srcRect/>
           <a:stretch>
             <a:fillRect/>
@@ -10770,7 +10869,7 @@
           <a:p>
             <a:r>
               <a:rPr sz="3000"/>
-              <a:t>縮退が引き起こした 2 つの疑問</a:t>
+              <a:t>なぜ ICS とハローは形が似ているのか</a:t>
             </a:r>
           </a:p>
         </p:txBody>
@@ -10787,8 +10886,8 @@
         </p:nvSpPr>
         <p:spPr>
           <a:xfrm>
-            <a:off x="841248" y="1463040"/>
-            <a:ext cx="10515600" cy="4937760"/>
+            <a:off x="841248" y="1325880"/>
+            <a:ext cx="10515600" cy="1828800"/>
           </a:xfrm>
         </p:spPr>
         <p:txBody>
@@ -10796,38 +10895,48 @@
           <a:lstStyle/>
           <a:p>
             <a:r>
-              <a:rPr sz="2400"/>
-              <a:t>① バブル領域を外すと 19.5σ → 5.0σ に落ちる</a:t>
-            </a:r>
-          </a:p>
-          <a:p>
-            <a:pPr lvl="1"/>
-            <a:r>
-              <a:rPr sz="2000"/>
-              <a:t>ハローは、本当は ICS やバブルの間違いでは？</a:t>
-            </a:r>
-          </a:p>
-          <a:p>
-            <a:r>
-              <a:rPr sz="2400"/>
-              <a:t>② 何も無い空でも、最大 4.5σ が出る</a:t>
-            </a:r>
-          </a:p>
-          <a:p>
-            <a:pPr lvl="1"/>
-            <a:r>
-              <a:rPr sz="2000"/>
-              <a:t>σ をそのまま信じてよいのか？</a:t>
-            </a:r>
-          </a:p>
-          <a:p>
-            <a:r>
-              <a:rPr sz="2400"/>
-              <a:t>→ 次から、1 つずつ調べた結果</a:t>
-            </a:r>
-          </a:p>
-        </p:txBody>
-      </p:sp>
+              <a:rPr sz="1900"/>
+              <a:t>ハロー：暗黒物質は銀河の中心ほど濃い → 中心から外へ、なだらかに暗くなる</a:t>
+            </a:r>
+          </a:p>
+          <a:p>
+            <a:r>
+              <a:rPr sz="1900"/>
+              <a:t>ICS：光を出す電子も、電子がぶつかる星の光も、銀河の中心ほど多い → こちらも中心から外へ暗くなる</a:t>
+            </a:r>
+          </a:p>
+          <a:p>
+            <a:r>
+              <a:rPr sz="1900"/>
+              <a:t>違うのは横方向だけ：ICS は銀河面に沿って横に広い。ハローは中心に集まる（下の図）→ 見分ける手がかりはここ</a:t>
+            </a:r>
+          </a:p>
+        </p:txBody>
+      </p:sp>
+      <p:pic>
+        <p:nvPicPr>
+          <p:cNvPr id="4" name="Picture 3" descr="fig_ics_vs_halo_profile.png"/>
+          <p:cNvPicPr>
+            <a:picLocks noChangeAspect="1"/>
+          </p:cNvPicPr>
+          <p:nvPr/>
+        </p:nvPicPr>
+        <p:blipFill>
+          <a:blip r:embed="rId3"/>
+          <a:stretch>
+            <a:fillRect/>
+          </a:stretch>
+        </p:blipFill>
+        <p:spPr>
+          <a:xfrm>
+            <a:off x="2194560" y="3200400"/>
+            <a:ext cx="7347005" cy="3520440"/>
+          </a:xfrm>
+          <a:prstGeom prst="rect">
+            <a:avLst/>
+          </a:prstGeom>
+        </p:spPr>
+      </p:pic>
     </p:spTree>
   </p:cSld>
   <p:clrMapOvr>
@@ -10869,8 +10978,8 @@
           <a:lstStyle/>
           <a:p>
             <a:r>
-              <a:rPr sz="3400"/>
-              <a:t>① を調べる：手がかりはどこにあるか</a:t>
+              <a:rPr sz="2600"/>
+              <a:t>等方背景が小さく出る理由：なだらかな光の分け方が決まらない</a:t>
             </a:r>
           </a:p>
         </p:txBody>
@@ -10888,7 +10997,7 @@
         <p:spPr>
           <a:xfrm>
             <a:off x="841248" y="1463040"/>
-            <a:ext cx="10515600" cy="4937760"/>
+            <a:ext cx="5852160" cy="5120640"/>
           </a:xfrm>
         </p:spPr>
         <p:txBody>
@@ -10896,50 +11005,89 @@
           <a:lstStyle/>
           <a:p>
             <a:r>
-              <a:rPr sz="2200"/>
-              <a:t>フィッシャー情報：データがパラメータをどれだけ決められるか</a:t>
-            </a:r>
-          </a:p>
-          <a:p>
-            <a:r>
-              <a:rPr sz="2200"/>
-              <a:t>ICS など他の成分では説明できない「ハローだけの手がかり」を、空の場所ごとに計算</a:t>
+              <a:rPr sz="1900"/>
+              <a:t>模様がなく、中心にも集まらない光が 3 つある</a:t>
             </a:r>
           </a:p>
           <a:p>
             <a:pPr lvl="1"/>
             <a:r>
-              <a:rPr sz="1800"/>
-              <a:t>その 54% がバブル領域（面積は 34%）に集中</a:t>
-            </a:r>
-          </a:p>
-          <a:p>
-            <a:r>
-              <a:rPr sz="2200"/>
-              <a:t>手がかりの減り方だけで予測すると 6.6σ、実測 5.0σ</a:t>
-            </a:r>
-          </a:p>
-          <a:p>
-            <a:r>
-              <a:rPr sz="2200"/>
-              <a:t>同じ形の領域を横にずらして外すと 15〜16σ</a:t>
-            </a:r>
-          </a:p>
-          <a:p>
-            <a:r>
-              <a:rPr sz="2200"/>
-              <a:t>→ 19 → 5σ は「手がかりを捨てた」から。汚染の証拠ではない</a:t>
-            </a:r>
-          </a:p>
-          <a:p>
-            <a:pPr/>
-            <a:r>
-              <a:rPr sz="2000"/>
-              <a:t>たとえ：写真の真ん中を隠すと、2 つの光を見分けるヒントが減って自信が下がる</a:t>
-            </a:r>
-          </a:p>
-        </p:txBody>
-      </p:sp>
+              <a:rPr sz="1600"/>
+              <a:t>等方背景：どこを見ても同じ明るさ</a:t>
+            </a:r>
+          </a:p>
+          <a:p>
+            <a:pPr lvl="1"/>
+            <a:r>
+              <a:rPr sz="1600"/>
+              <a:t>Loop I（近い殻）：太陽が殻の中にいるので、空全体をゆるやかに照らす</a:t>
+            </a:r>
+          </a:p>
+          <a:p>
+            <a:pPr lvl="1"/>
+            <a:r>
+              <a:rPr sz="1600"/>
+              <a:t>ICS：横方向にはほとんど暗くならない</a:t>
+            </a:r>
+          </a:p>
+          <a:p>
+            <a:r>
+              <a:rPr sz="1900"/>
+              <a:t>形が似ているので、なだらかな光を 3 つにどう分けるかが写真から決まらない</a:t>
+            </a:r>
+          </a:p>
+          <a:p>
+            <a:pPr lvl="1"/>
+            <a:r>
+              <a:rPr sz="1600"/>
+              <a:t>決まるのは 3 つの合計だけ。たとえ：3 つのコップの水は、合計は量れても、どれに何杯かは分からない</a:t>
+            </a:r>
+          </a:p>
+          <a:p>
+            <a:r>
+              <a:rPr sz="1900"/>
+              <a:t>等方背景が Totani より小さいのは、分け方がたまたまそうなったため</a:t>
+            </a:r>
+          </a:p>
+          <a:p>
+            <a:pPr lvl="1"/>
+            <a:r>
+              <a:rPr sz="1600"/>
+              <a:t>空の上の方だけで計算すると、等方背景が戻る（7 月に確認）</a:t>
+            </a:r>
+          </a:p>
+          <a:p>
+            <a:r>
+              <a:rPr sz="1900"/>
+              <a:t>ハローだけは中心に集まるので、この分け方の問題とは別</a:t>
+            </a:r>
+          </a:p>
+        </p:txBody>
+      </p:sp>
+      <p:pic>
+        <p:nvPicPr>
+          <p:cNvPr id="4" name="Picture 3" descr="fig_smooth_lamps.png"/>
+          <p:cNvPicPr>
+            <a:picLocks noChangeAspect="1"/>
+          </p:cNvPicPr>
+          <p:nvPr/>
+        </p:nvPicPr>
+        <p:blipFill>
+          <a:blip r:embed="rId3"/>
+          <a:stretch>
+            <a:fillRect/>
+          </a:stretch>
+        </p:blipFill>
+        <p:spPr>
+          <a:xfrm>
+            <a:off x="6812280" y="1828800"/>
+            <a:ext cx="5120640" cy="3840480"/>
+          </a:xfrm>
+          <a:prstGeom prst="rect">
+            <a:avLst/>
+          </a:prstGeom>
+        </p:spPr>
+      </p:pic>
     </p:spTree>
   </p:cSld>
   <p:clrMapOvr>
@@ -10981,8 +11129,8 @@
           <a:lstStyle/>
           <a:p>
             <a:r>
-              <a:rPr sz="3400"/>
-              <a:t>① を調べる：ICS が犯人なら</a:t>
+              <a:rPr sz="3000"/>
+              <a:t>縮退が引き起こした 2 つの疑問</a:t>
             </a:r>
           </a:p>
         </p:txBody>
@@ -11000,7 +11148,7 @@
         <p:spPr>
           <a:xfrm>
             <a:off x="841248" y="1463040"/>
-            <a:ext cx="10515600" cy="4114800"/>
+            <a:ext cx="10515600" cy="4937760"/>
           </a:xfrm>
         </p:spPr>
         <p:txBody>
@@ -11008,88 +11156,35 @@
           <a:lstStyle/>
           <a:p>
             <a:r>
-              <a:rPr sz="2200"/>
-              <a:t>ICS をバブルの内と外で別々の明るさにして当てはめた</a:t>
+              <a:rPr sz="2400"/>
+              <a:t>① バブル領域を外すと 19.5σ → 5.0σ に落ちる</a:t>
             </a:r>
           </a:p>
           <a:p>
             <a:pPr lvl="1"/>
             <a:r>
-              <a:rPr sz="1800"/>
-              <a:t>内側が約 2.3 倍明るければ、ハローの改善の 92% を ICS が説明</a:t>
-            </a:r>
-          </a:p>
-          <a:p>
-            <a:r>
-              <a:rPr sz="2200"/>
-              <a:t>ICS の計算の近似（等方近似）を直しても 1.1〜1.3 倍</a:t>
+              <a:rPr sz="2000"/>
+              <a:t>ハローは、本当は ICS やバブルの間違いでは？</a:t>
+            </a:r>
+          </a:p>
+          <a:p>
+            <a:r>
+              <a:rPr sz="2400"/>
+              <a:t>② 何も無い空でも、最大 4.5σ が出る</a:t>
             </a:r>
           </a:p>
           <a:p>
             <a:pPr lvl="1"/>
             <a:r>
-              <a:rPr sz="1800"/>
-              <a:t>しかも外側のほうが大きくなる → 2.3 倍には届かない</a:t>
-            </a:r>
-          </a:p>
-          <a:p>
-            <a:r>
-              <a:rPr sz="2200"/>
-              <a:t>ICS を 3 種類に分けて、それぞれ自由に動かしても</a:t>
-            </a:r>
-          </a:p>
-          <a:p>
-            <a:pPr lvl="1"/>
-            <a:r>
-              <a:rPr sz="1800"/>
-              <a:t>19.5σ → 18.4σ（約 1σ しか下がらない）</a:t>
-            </a:r>
-          </a:p>
-          <a:p>
-            <a:r>
-              <a:rPr sz="2200"/>
-              <a:t>→ ICS の「明るさ」の間違いでは、ハローを説明できない</a:t>
-            </a:r>
-          </a:p>
-        </p:txBody>
-      </p:sp>
-      <p:sp>
-        <p:nvSpPr>
-          <p:cNvPr id="8" name="TextBox 7">
-            <a:extLst>
-              <a:ext uri="{FF2B5EF4-FFF2-40B4-BE49-F238E27FC236}">
-                <a16:creationId xmlns:a16="http://schemas.microsoft.com/office/drawing/2014/main" id="{F85CD606-E3CE-F314-B3EE-F3D7028115CB}"/>
-              </a:ext>
-            </a:extLst>
-          </p:cNvPr>
-          <p:cNvSpPr txBox="1"/>
-          <p:nvPr/>
-        </p:nvSpPr>
-        <p:spPr>
-          <a:xfrm>
-            <a:off x="5837182" y="5663239"/>
-            <a:ext cx="6093372" cy="923330"/>
-          </a:xfrm>
-          <a:prstGeom prst="rect">
-            <a:avLst/>
-          </a:prstGeom>
-          <a:noFill/>
-        </p:spPr>
-        <p:txBody>
-          <a:bodyPr wrap="square">
-            <a:spAutoFit/>
-          </a:bodyPr>
-          <a:lstStyle/>
-          <a:p>
-            <a:r>
-              <a:rPr lang="en-US" sz="1400" b="1"/>
-              <a:t>Reference:</a:t>
-            </a:r>
-            <a:r>
-              <a:rPr lang="en-US" sz="1400"/>
-              <a:t> I. V. Moskalenko &amp; A. W. Strong (2000), ApJ 528, 357</a:t>
-            </a:r>
-            <a:endParaRPr lang="en-US"/>
+              <a:rPr sz="2000"/>
+              <a:t>σ をそのまま信じてよいのか？</a:t>
+            </a:r>
+          </a:p>
+          <a:p>
+            <a:r>
+              <a:rPr sz="2400"/>
+              <a:t>→ 次から、1 つずつ調べた結果</a:t>
+            </a:r>
           </a:p>
         </p:txBody>
       </p:sp>
@@ -11135,7 +11230,7 @@
           <a:p>
             <a:r>
               <a:rPr sz="3400"/>
-              <a:t>② を調べる：σ を信じてよいか</a:t>
+              <a:t>① を調べる：手がかりはどこにあるか</a:t>
             </a:r>
           </a:p>
         </p:txBody>
@@ -11153,7 +11248,7 @@
         <p:spPr>
           <a:xfrm>
             <a:off x="841248" y="1463040"/>
-            <a:ext cx="10515600" cy="4114800"/>
+            <a:ext cx="10515600" cy="4937760"/>
           </a:xfrm>
         </p:spPr>
         <p:txBody>
@@ -11162,87 +11257,45 @@
           <a:p>
             <a:r>
               <a:rPr sz="2200"/>
-              <a:t>何も無い空 23 か所で、天の川と同じ解析をした</a:t>
+              <a:t>フィッシャー情報：データがパラメータをどれだけ決められるか</a:t>
+            </a:r>
+          </a:p>
+          <a:p>
+            <a:r>
+              <a:rPr sz="2200"/>
+              <a:t>ICS など他の成分では説明できない「ハローだけの手がかり」を、空の場所ごとに計算</a:t>
             </a:r>
           </a:p>
           <a:p>
             <a:pPr lvl="1"/>
             <a:r>
-              <a:rPr sz="1700"/>
-              <a:t>たとえ：真っ暗な所を写したのに「明かりがある」と出てしまう（誤検出）が、どれくらい起きるか</a:t>
+              <a:rPr sz="1800"/>
+              <a:t>その 54% がバブル領域（面積は 34%）に集中</a:t>
             </a:r>
           </a:p>
           <a:p>
             <a:r>
               <a:rPr sz="2200"/>
-              <a:t>本物の信号が無ければ、σ は「平均 0、ばらつき 1」になるはず</a:t>
-            </a:r>
-          </a:p>
-          <a:p>
-            <a:pPr lvl="1"/>
-            <a:r>
-              <a:rPr sz="1800"/>
-              <a:t>Wilks の定理が成り立っていれば</a:t>
+              <a:t>手がかりの減り方だけで予測すると 6.6σ、実測 5.0σ</a:t>
             </a:r>
           </a:p>
           <a:p>
             <a:r>
               <a:rPr sz="2200"/>
-              <a:t>実際のばらつき：1.26（95% 区間 1.14–1.39）</a:t>
-            </a:r>
-          </a:p>
-          <a:p>
-            <a:pPr lvl="1"/>
-            <a:r>
-              <a:rPr sz="1800"/>
-              <a:t>σ は 1.26 倍大きく出ている</a:t>
+              <a:t>同じ形の領域を横にずらして外すと 15〜16σ</a:t>
             </a:r>
           </a:p>
           <a:p>
             <a:r>
               <a:rPr sz="2200"/>
-              <a:t>19.5σ を較正すると 19.5 ÷ 1.26 ≈ 15σ（14.0–17.0σ）</a:t>
-            </a:r>
-          </a:p>
-        </p:txBody>
-      </p:sp>
-      <p:sp>
-        <p:nvSpPr>
-          <p:cNvPr id="8" name="TextBox 7">
-            <a:extLst>
-              <a:ext uri="{FF2B5EF4-FFF2-40B4-BE49-F238E27FC236}">
-                <a16:creationId xmlns:a16="http://schemas.microsoft.com/office/drawing/2014/main" id="{F85CD606-E3CE-F314-B3EE-F3D7028115CB}"/>
-              </a:ext>
-            </a:extLst>
-          </p:cNvPr>
-          <p:cNvSpPr txBox="1"/>
-          <p:nvPr/>
-        </p:nvSpPr>
-        <p:spPr>
-          <a:xfrm>
-            <a:off x="5837182" y="5663239"/>
-            <a:ext cx="6093372" cy="923330"/>
-          </a:xfrm>
-          <a:prstGeom prst="rect">
-            <a:avLst/>
-          </a:prstGeom>
-          <a:noFill/>
-        </p:spPr>
-        <p:txBody>
-          <a:bodyPr wrap="square">
-            <a:spAutoFit/>
-          </a:bodyPr>
-          <a:lstStyle/>
-          <a:p>
-            <a:r>
-              <a:rPr lang="en-US" sz="1400" b="1"/>
-              <a:t>Reference:</a:t>
-            </a:r>
-            <a:r>
-              <a:rPr lang="en-US" sz="1400"/>
-              <a:t> B. Efron &amp; R. J. Tibshirani (1993), An Introduction to the Bootstrap</a:t>
-            </a:r>
-            <a:endParaRPr lang="en-US"/>
+              <a:t>→ 19 → 5σ は「手がかりを捨てた」から。汚染の証拠ではない</a:t>
+            </a:r>
+          </a:p>
+          <a:p>
+            <a:r>
+              <a:rPr sz="2000"/>
+              <a:t>たとえ：写真の真ん中を隠すと、2 つの光を見分けるヒントが減って自信が下がる</a:t>
+            </a:r>
           </a:p>
         </p:txBody>
       </p:sp>
@@ -11359,7 +11412,7 @@
           <p:nvPr/>
         </p:nvPicPr>
         <p:blipFill>
-          <a:blip r:embed="rId4"/>
+          <a:blip r:embed="rId3"/>
           <a:srcRect r="49322"/>
           <a:stretch>
             <a:fillRect/>
@@ -11524,45 +11577,93 @@
           <a:p>
             <a:r>
               <a:rPr sz="3400"/>
-              <a:t>② の結果：エネルギーごとのばらつき</a:t>
-            </a:r>
-          </a:p>
-        </p:txBody>
-      </p:sp>
-      <p:pic>
-        <p:nvPicPr>
-          <p:cNvPr id="3" name="Picture 2" descr="fig_null_variance.png"/>
-          <p:cNvPicPr>
-            <a:picLocks noChangeAspect="1"/>
-          </p:cNvPicPr>
-          <p:nvPr/>
-        </p:nvPicPr>
-        <p:blipFill>
-          <a:blip r:embed="rId3"/>
-          <a:stretch>
-            <a:fillRect/>
-          </a:stretch>
-        </p:blipFill>
+              <a:t>① を調べる：ICS が犯人なら</a:t>
+            </a:r>
+          </a:p>
+        </p:txBody>
+      </p:sp>
+      <p:sp>
+        <p:nvSpPr>
+          <p:cNvPr id="3" name="Content Placeholder 2"/>
+          <p:cNvSpPr>
+            <a:spLocks noGrp="1"/>
+          </p:cNvSpPr>
+          <p:nvPr>
+            <p:ph idx="1"/>
+          </p:nvPr>
+        </p:nvSpPr>
         <p:spPr>
           <a:xfrm>
-            <a:off x="2103120" y="1234440"/>
-            <a:ext cx="7156174" cy="4114800"/>
+            <a:off x="841248" y="1463040"/>
+            <a:ext cx="10515600" cy="4114800"/>
           </a:xfrm>
-          <a:prstGeom prst="rect">
-            <a:avLst/>
-          </a:prstGeom>
         </p:spPr>
-      </p:pic>
-      <p:sp>
-        <p:nvSpPr>
-          <p:cNvPr id="4" name="TextBox 3"/>
+        <p:txBody>
+          <a:bodyPr/>
+          <a:lstStyle/>
+          <a:p>
+            <a:r>
+              <a:rPr sz="2200"/>
+              <a:t>ICS をバブルの内と外で別々の明るさにして当てはめた</a:t>
+            </a:r>
+          </a:p>
+          <a:p>
+            <a:pPr lvl="1"/>
+            <a:r>
+              <a:rPr sz="1800"/>
+              <a:t>内側が約 2.3 倍明るければ、ハローの改善の 92% を ICS が説明</a:t>
+            </a:r>
+          </a:p>
+          <a:p>
+            <a:r>
+              <a:rPr sz="2200"/>
+              <a:t>ICS の計算の近似（等方近似）を直しても 1.1〜1.3 倍</a:t>
+            </a:r>
+          </a:p>
+          <a:p>
+            <a:pPr lvl="1"/>
+            <a:r>
+              <a:rPr sz="1800"/>
+              <a:t>しかも外側のほうが大きくなる → 2.3 倍には届かない</a:t>
+            </a:r>
+          </a:p>
+          <a:p>
+            <a:r>
+              <a:rPr sz="2200"/>
+              <a:t>ICS を 3 種類に分けて、それぞれ自由に動かしても</a:t>
+            </a:r>
+          </a:p>
+          <a:p>
+            <a:pPr lvl="1"/>
+            <a:r>
+              <a:rPr sz="1800"/>
+              <a:t>19.5σ → 18.4σ（約 1σ しか下がらない）</a:t>
+            </a:r>
+          </a:p>
+          <a:p>
+            <a:r>
+              <a:rPr sz="2200"/>
+              <a:t>→ ICS の「明るさ」の間違いでは、ハローを説明できない</a:t>
+            </a:r>
+          </a:p>
+        </p:txBody>
+      </p:sp>
+      <p:sp>
+        <p:nvSpPr>
+          <p:cNvPr id="8" name="TextBox 7">
+            <a:extLst>
+              <a:ext uri="{FF2B5EF4-FFF2-40B4-BE49-F238E27FC236}">
+                <a16:creationId xmlns:a16="http://schemas.microsoft.com/office/drawing/2014/main" id="{F85CD606-E3CE-F314-B3EE-F3D7028115CB}"/>
+              </a:ext>
+            </a:extLst>
+          </p:cNvPr>
           <p:cNvSpPr txBox="1"/>
           <p:nvPr/>
         </p:nvSpPr>
         <p:spPr>
           <a:xfrm>
-            <a:off x="457200" y="5486400"/>
-            <a:ext cx="11247120" cy="457200"/>
+            <a:off x="5837182" y="5663239"/>
+            <a:ext cx="6093372" cy="923330"/>
           </a:xfrm>
           <a:prstGeom prst="rect">
             <a:avLst/>
@@ -11576,9 +11677,14 @@
           <a:lstStyle/>
           <a:p>
             <a:r>
-              <a:rPr sz="2000"/>
-              <a:t>どのエネルギーでもばらつきは 1 より大きい（光子が十分ある範囲）</a:t>
-            </a:r>
+              <a:rPr lang="en-US" sz="1400" b="1"/>
+              <a:t>Reference:</a:t>
+            </a:r>
+            <a:r>
+              <a:rPr lang="en-US" sz="1400"/>
+              <a:t> I. V. Moskalenko &amp; A. W. Strong (2000), ApJ 528, 357</a:t>
+            </a:r>
+            <a:endParaRPr lang="en-US"/>
           </a:p>
         </p:txBody>
       </p:sp>
@@ -11624,7 +11730,7 @@
           <a:p>
             <a:r>
               <a:rPr sz="3400"/>
-              <a:t>ここまでのまとめ</a:t>
+              <a:t>② を調べる：σ を信じてよいか</a:t>
             </a:r>
           </a:p>
         </p:txBody>
@@ -11642,7 +11748,7 @@
         <p:spPr>
           <a:xfrm>
             <a:off x="841248" y="1463040"/>
-            <a:ext cx="10515600" cy="4937760"/>
+            <a:ext cx="10515600" cy="4114800"/>
           </a:xfrm>
         </p:spPr>
         <p:txBody>
@@ -11650,34 +11756,88 @@
           <a:lstStyle/>
           <a:p>
             <a:r>
-              <a:rPr sz="2400"/>
-              <a:t>ICS の明るさ・バブル・計算の近似の間違いでは、超過を説明できない</a:t>
-            </a:r>
-          </a:p>
-          <a:p>
-            <a:r>
-              <a:rPr sz="2400"/>
-              <a:t>σ は 1.26 倍の過大評価 → 較正すると約 15σ</a:t>
-            </a:r>
-          </a:p>
-          <a:p>
-            <a:r>
-              <a:rPr sz="2400"/>
-              <a:t>ただし、暗黒物質の証拠ではない</a:t>
+              <a:rPr sz="2200"/>
+              <a:t>何も無い空 23 か所で、天の川と同じ解析をした</a:t>
             </a:r>
           </a:p>
           <a:p>
             <a:pPr lvl="1"/>
             <a:r>
-              <a:rPr sz="2000"/>
-              <a:t>ICS の「空間の形」の間違いは否定できていない</a:t>
-            </a:r>
-          </a:p>
-          <a:p>
-            <a:r>
-              <a:rPr sz="2400"/>
-              <a:t>→ 独立な確認として、矮小銀河を見る</a:t>
-            </a:r>
+              <a:rPr sz="1700"/>
+              <a:t>たとえ：真っ暗な所を写したのに「明かりがある」と出てしまう（誤検出）が、どれくらい起きるか</a:t>
+            </a:r>
+          </a:p>
+          <a:p>
+            <a:r>
+              <a:rPr sz="2200"/>
+              <a:t>本物の信号が無ければ、σ は「平均 0、ばらつき 1」になるはず</a:t>
+            </a:r>
+          </a:p>
+          <a:p>
+            <a:pPr lvl="1"/>
+            <a:r>
+              <a:rPr sz="1800"/>
+              <a:t>Wilks の定理が成り立っていれば</a:t>
+            </a:r>
+          </a:p>
+          <a:p>
+            <a:r>
+              <a:rPr sz="2200"/>
+              <a:t>実際のばらつき：1.26（95% 区間 1.14–1.39）</a:t>
+            </a:r>
+          </a:p>
+          <a:p>
+            <a:pPr lvl="1"/>
+            <a:r>
+              <a:rPr sz="1800"/>
+              <a:t>σ は 1.26 倍大きく出ている</a:t>
+            </a:r>
+          </a:p>
+          <a:p>
+            <a:r>
+              <a:rPr sz="2200"/>
+              <a:t>19.5σ を較正すると 19.5 ÷ 1.26 ≈ 15σ（14.0–17.0σ）</a:t>
+            </a:r>
+          </a:p>
+        </p:txBody>
+      </p:sp>
+      <p:sp>
+        <p:nvSpPr>
+          <p:cNvPr id="8" name="TextBox 7">
+            <a:extLst>
+              <a:ext uri="{FF2B5EF4-FFF2-40B4-BE49-F238E27FC236}">
+                <a16:creationId xmlns:a16="http://schemas.microsoft.com/office/drawing/2014/main" id="{F85CD606-E3CE-F314-B3EE-F3D7028115CB}"/>
+              </a:ext>
+            </a:extLst>
+          </p:cNvPr>
+          <p:cNvSpPr txBox="1"/>
+          <p:nvPr/>
+        </p:nvSpPr>
+        <p:spPr>
+          <a:xfrm>
+            <a:off x="5837182" y="5663239"/>
+            <a:ext cx="6093372" cy="923330"/>
+          </a:xfrm>
+          <a:prstGeom prst="rect">
+            <a:avLst/>
+          </a:prstGeom>
+          <a:noFill/>
+        </p:spPr>
+        <p:txBody>
+          <a:bodyPr wrap="square">
+            <a:spAutoFit/>
+          </a:bodyPr>
+          <a:lstStyle/>
+          <a:p>
+            <a:r>
+              <a:rPr lang="en-US" sz="1400" b="1"/>
+              <a:t>Reference:</a:t>
+            </a:r>
+            <a:r>
+              <a:rPr lang="en-US" sz="1400"/>
+              <a:t> B. Efron &amp; R. J. Tibshirani (1993), An Introduction to the Bootstrap</a:t>
+            </a:r>
+            <a:endParaRPr lang="en-US"/>
           </a:p>
         </p:txBody>
       </p:sp>
@@ -11723,86 +11883,45 @@
           <a:p>
             <a:r>
               <a:rPr sz="3400"/>
-              <a:t>矮小銀河で確かめる</a:t>
-            </a:r>
-          </a:p>
-        </p:txBody>
-      </p:sp>
-      <p:sp>
-        <p:nvSpPr>
-          <p:cNvPr id="3" name="Content Placeholder 2"/>
-          <p:cNvSpPr>
-            <a:spLocks noGrp="1"/>
-          </p:cNvSpPr>
-          <p:nvPr>
-            <p:ph idx="1"/>
-          </p:nvPr>
-        </p:nvSpPr>
+              <a:t>② の結果：エネルギーごとのばらつき</a:t>
+            </a:r>
+          </a:p>
+        </p:txBody>
+      </p:sp>
+      <p:pic>
+        <p:nvPicPr>
+          <p:cNvPr id="3" name="Picture 2" descr="fig_null_variance.png"/>
+          <p:cNvPicPr>
+            <a:picLocks noChangeAspect="1"/>
+          </p:cNvPicPr>
+          <p:nvPr/>
+        </p:nvPicPr>
+        <p:blipFill>
+          <a:blip r:embed="rId3"/>
+          <a:stretch>
+            <a:fillRect/>
+          </a:stretch>
+        </p:blipFill>
         <p:spPr>
           <a:xfrm>
-            <a:off x="841248" y="1463040"/>
-            <a:ext cx="10515600" cy="4114800"/>
+            <a:off x="2103120" y="1234440"/>
+            <a:ext cx="7156174" cy="4114800"/>
           </a:xfrm>
+          <a:prstGeom prst="rect">
+            <a:avLst/>
+          </a:prstGeom>
         </p:spPr>
-        <p:txBody>
-          <a:bodyPr/>
-          <a:lstStyle/>
-          <a:p>
-            <a:r>
-              <a:rPr sz="2400"/>
-              <a:t>矮小銀河：天の川のまわりの小さな銀河</a:t>
-            </a:r>
-          </a:p>
-          <a:p>
-            <a:pPr lvl="1"/>
-            <a:r>
-              <a:rPr sz="2000"/>
-              <a:t>暗黒物質が多く、ガスや星形成が少ない（雑音が少ない）</a:t>
-            </a:r>
-          </a:p>
-          <a:p>
-            <a:r>
-              <a:rPr sz="2400"/>
-              <a:t>暗黒物質なら、矮小銀河からも同じ 20 GeV の光が来るはず</a:t>
-            </a:r>
-          </a:p>
-          <a:p>
-            <a:r>
-              <a:rPr sz="2400"/>
-              <a:t>同じ手法を、各天体のまわり半径 10° に使った</a:t>
-            </a:r>
-          </a:p>
-          <a:p>
-            <a:pPr lvl="1"/>
-            <a:r>
-              <a:rPr sz="2000"/>
-              <a:t>矮小銀河 54 ＋ M31・M33 ＋ 何も無い空 23 か所</a:t>
-            </a:r>
-          </a:p>
-          <a:p>
-            <a:r>
-              <a:rPr sz="2400"/>
-              <a:t>矮小銀河は小さい（0.2〜0.4°）ので、広がった ICS とは縮退しない</a:t>
-            </a:r>
-          </a:p>
-        </p:txBody>
-      </p:sp>
-      <p:sp>
-        <p:nvSpPr>
-          <p:cNvPr id="8" name="TextBox 7">
-            <a:extLst>
-              <a:ext uri="{FF2B5EF4-FFF2-40B4-BE49-F238E27FC236}">
-                <a16:creationId xmlns:a16="http://schemas.microsoft.com/office/drawing/2014/main" id="{F85CD606-E3CE-F314-B3EE-F3D7028115CB}"/>
-              </a:ext>
-            </a:extLst>
-          </p:cNvPr>
+      </p:pic>
+      <p:sp>
+        <p:nvSpPr>
+          <p:cNvPr id="4" name="TextBox 3"/>
           <p:cNvSpPr txBox="1"/>
           <p:nvPr/>
         </p:nvSpPr>
         <p:spPr>
           <a:xfrm>
-            <a:off x="5837182" y="5663239"/>
-            <a:ext cx="6093372" cy="923330"/>
+            <a:off x="457200" y="5486400"/>
+            <a:ext cx="11247120" cy="457200"/>
           </a:xfrm>
           <a:prstGeom prst="rect">
             <a:avLst/>
@@ -11816,14 +11935,9 @@
           <a:lstStyle/>
           <a:p>
             <a:r>
-              <a:rPr lang="en-US" sz="1400" b="1"/>
-              <a:t>Reference:</a:t>
-            </a:r>
-            <a:r>
-              <a:rPr lang="en-US" sz="1400"/>
-              <a:t> A. B. Pace (2025), Open J. Astrophys. 8, 142</a:t>
-            </a:r>
-            <a:endParaRPr lang="en-US"/>
+              <a:rPr sz="2000"/>
+              <a:t>どのエネルギーでもばらつきは 1 より大きい（光子が十分ある範囲）</a:t>
+            </a:r>
           </a:p>
         </p:txBody>
       </p:sp>
@@ -11869,7 +11983,7 @@
           <a:p>
             <a:r>
               <a:rPr sz="3400"/>
-              <a:t>予測の立て方：J ファクター</a:t>
+              <a:t>ここまでのまとめ</a:t>
             </a:r>
           </a:p>
         </p:txBody>
@@ -11887,7 +12001,7 @@
         <p:spPr>
           <a:xfrm>
             <a:off x="841248" y="1463040"/>
-            <a:ext cx="10515600" cy="4114800"/>
+            <a:ext cx="10515600" cy="4937760"/>
           </a:xfrm>
         </p:spPr>
         <p:txBody>
@@ -11896,79 +12010,33 @@
           <a:p>
             <a:r>
               <a:rPr sz="2400"/>
-              <a:t>対消滅の明るさ：F = ⟨σv⟩ / (8π m²) × dN/dE × J</a:t>
+              <a:t>ICS の明るさ・バブル・計算の近似の間違いでは、超過を説明できない</a:t>
             </a:r>
           </a:p>
           <a:p>
             <a:r>
               <a:rPr sz="2400"/>
-              <a:t>J ファクター = 暗黒物質の密度の 2 乗を、視線方向に足し合わせた量</a:t>
+              <a:t>σ は 1.26 倍の過大評価 → 較正すると約 15σ</a:t>
             </a:r>
           </a:p>
           <a:p>
             <a:r>
               <a:rPr sz="2400"/>
-              <a:t>天の川と矮小銀河で粒子は同じ → 比をとると J の比だけが残る</a:t>
+              <a:t>ただし、暗黒物質の証拠ではない</a:t>
             </a:r>
           </a:p>
           <a:p>
             <a:pPr lvl="1"/>
             <a:r>
               <a:rPr sz="2000"/>
-              <a:t>F_矮小 = F_天の川 × J_矮小 / J_天の川</a:t>
+              <a:t>ICS の「空間の形」の間違いは否定できていない</a:t>
             </a:r>
           </a:p>
           <a:p>
             <a:r>
               <a:rPr sz="2400"/>
-              <a:t>粒子の質量などを仮定せずに「何σ見えるはずか」が出る</a:t>
-            </a:r>
-          </a:p>
-          <a:p>
-            <a:r>
-              <a:rPr sz="2400"/>
-              <a:t>矮小銀河の J は、星の動きから推定する</a:t>
-            </a:r>
-          </a:p>
-        </p:txBody>
-      </p:sp>
-      <p:sp>
-        <p:nvSpPr>
-          <p:cNvPr id="8" name="TextBox 7">
-            <a:extLst>
-              <a:ext uri="{FF2B5EF4-FFF2-40B4-BE49-F238E27FC236}">
-                <a16:creationId xmlns:a16="http://schemas.microsoft.com/office/drawing/2014/main" id="{F85CD606-E3CE-F314-B3EE-F3D7028115CB}"/>
-              </a:ext>
-            </a:extLst>
-          </p:cNvPr>
-          <p:cNvSpPr txBox="1"/>
-          <p:nvPr/>
-        </p:nvSpPr>
-        <p:spPr>
-          <a:xfrm>
-            <a:off x="5837182" y="5663239"/>
-            <a:ext cx="6093372" cy="923330"/>
-          </a:xfrm>
-          <a:prstGeom prst="rect">
-            <a:avLst/>
-          </a:prstGeom>
-          <a:noFill/>
-        </p:spPr>
-        <p:txBody>
-          <a:bodyPr wrap="square">
-            <a:spAutoFit/>
-          </a:bodyPr>
-          <a:lstStyle/>
-          <a:p>
-            <a:r>
-              <a:rPr lang="en-US" sz="1400" b="1"/>
-              <a:t>Reference:</a:t>
-            </a:r>
-            <a:r>
-              <a:rPr lang="en-US" sz="1400"/>
-              <a:t> A. B. Pace &amp; L. E. Strigari (2019), MNRAS 482, 3480</a:t>
-            </a:r>
-            <a:endParaRPr lang="en-US"/>
+              <a:t>→ 独立な確認として、矮小銀河を見る</a:t>
+            </a:r>
           </a:p>
         </p:txBody>
       </p:sp>
@@ -12014,45 +12082,86 @@
           <a:p>
             <a:r>
               <a:rPr sz="3400"/>
-              <a:t>結果：どこにも信号は見えなかった</a:t>
-            </a:r>
-          </a:p>
-        </p:txBody>
-      </p:sp>
-      <p:pic>
-        <p:nvPicPr>
-          <p:cNvPr id="3" name="Picture 2" descr="fig_dwarf_results.png"/>
-          <p:cNvPicPr>
-            <a:picLocks noChangeAspect="1"/>
-          </p:cNvPicPr>
-          <p:nvPr/>
-        </p:nvPicPr>
-        <p:blipFill>
-          <a:blip r:embed="rId3"/>
-          <a:stretch>
-            <a:fillRect/>
-          </a:stretch>
-        </p:blipFill>
+              <a:t>矮小銀河で確かめる</a:t>
+            </a:r>
+          </a:p>
+        </p:txBody>
+      </p:sp>
+      <p:sp>
+        <p:nvSpPr>
+          <p:cNvPr id="3" name="Content Placeholder 2"/>
+          <p:cNvSpPr>
+            <a:spLocks noGrp="1"/>
+          </p:cNvSpPr>
+          <p:nvPr>
+            <p:ph idx="1"/>
+          </p:nvPr>
+        </p:nvSpPr>
         <p:spPr>
           <a:xfrm>
-            <a:off x="2194560" y="1234440"/>
-            <a:ext cx="7156174" cy="4114800"/>
+            <a:off x="841248" y="1463040"/>
+            <a:ext cx="10515600" cy="4114800"/>
           </a:xfrm>
-          <a:prstGeom prst="rect">
-            <a:avLst/>
-          </a:prstGeom>
         </p:spPr>
-      </p:pic>
-      <p:sp>
-        <p:nvSpPr>
-          <p:cNvPr id="4" name="TextBox 3"/>
+        <p:txBody>
+          <a:bodyPr/>
+          <a:lstStyle/>
+          <a:p>
+            <a:r>
+              <a:rPr sz="2400"/>
+              <a:t>矮小銀河：天の川のまわりの小さな銀河</a:t>
+            </a:r>
+          </a:p>
+          <a:p>
+            <a:pPr lvl="1"/>
+            <a:r>
+              <a:rPr sz="2000"/>
+              <a:t>暗黒物質が多く、ガスや星形成が少ない（雑音が少ない）</a:t>
+            </a:r>
+          </a:p>
+          <a:p>
+            <a:r>
+              <a:rPr sz="2400"/>
+              <a:t>暗黒物質なら、矮小銀河からも同じ 20 GeV の光が来るはず</a:t>
+            </a:r>
+          </a:p>
+          <a:p>
+            <a:r>
+              <a:rPr sz="2400"/>
+              <a:t>同じ手法を、各天体のまわり半径 10° に使った</a:t>
+            </a:r>
+          </a:p>
+          <a:p>
+            <a:pPr lvl="1"/>
+            <a:r>
+              <a:rPr sz="2000"/>
+              <a:t>矮小銀河 54 ＋ M31・M33 ＋ 何も無い空 23 か所</a:t>
+            </a:r>
+          </a:p>
+          <a:p>
+            <a:r>
+              <a:rPr sz="2400"/>
+              <a:t>矮小銀河は小さい（0.2〜0.4°）ので、広がった ICS とは縮退しない</a:t>
+            </a:r>
+          </a:p>
+        </p:txBody>
+      </p:sp>
+      <p:sp>
+        <p:nvSpPr>
+          <p:cNvPr id="8" name="TextBox 7">
+            <a:extLst>
+              <a:ext uri="{FF2B5EF4-FFF2-40B4-BE49-F238E27FC236}">
+                <a16:creationId xmlns:a16="http://schemas.microsoft.com/office/drawing/2014/main" id="{F85CD606-E3CE-F314-B3EE-F3D7028115CB}"/>
+              </a:ext>
+            </a:extLst>
+          </p:cNvPr>
           <p:cNvSpPr txBox="1"/>
           <p:nvPr/>
         </p:nvSpPr>
         <p:spPr>
           <a:xfrm>
-            <a:off x="457200" y="5486400"/>
-            <a:ext cx="11247120" cy="457200"/>
+            <a:off x="5837182" y="5663239"/>
+            <a:ext cx="6093372" cy="923330"/>
           </a:xfrm>
           <a:prstGeom prst="rect">
             <a:avLst/>
@@ -12066,9 +12175,14 @@
           <a:lstStyle/>
           <a:p>
             <a:r>
-              <a:rPr sz="2000"/>
-              <a:t>どの天体・どのエネルギーでも最大 +3.46σ（何も無い空でも 4.50σ）</a:t>
-            </a:r>
+              <a:rPr lang="en-US" sz="1400" b="1"/>
+              <a:t>Reference:</a:t>
+            </a:r>
+            <a:r>
+              <a:rPr lang="en-US" sz="1400"/>
+              <a:t> A. B. Pace (2025), Open J. Astrophys. 8, 142</a:t>
+            </a:r>
+            <a:endParaRPr lang="en-US"/>
           </a:p>
         </p:txBody>
       </p:sp>
@@ -12114,7 +12228,7 @@
           <a:p>
             <a:r>
               <a:rPr sz="3400"/>
-              <a:t>天体をまとめて比べる</a:t>
+              <a:t>予測の立て方：J ファクター</a:t>
             </a:r>
           </a:p>
         </p:txBody>
@@ -12132,7 +12246,7 @@
         <p:spPr>
           <a:xfrm>
             <a:off x="841248" y="1463040"/>
-            <a:ext cx="10515600" cy="4937760"/>
+            <a:ext cx="10515600" cy="4114800"/>
           </a:xfrm>
         </p:spPr>
         <p:txBody>
@@ -12141,45 +12255,79 @@
           <a:p>
             <a:r>
               <a:rPr sz="2400"/>
-              <a:t>1 個ずつでは弱いので、J が求まる 43 天体をまとめる</a:t>
+              <a:t>対消滅の明るさ：F = ⟨σv⟩ / (8π m²) × dN/dE × J</a:t>
             </a:r>
           </a:p>
           <a:p>
             <a:r>
               <a:rPr sz="2400"/>
-              <a:t>T = Σ w_i z_i / √( Σ w_i² )、重み w_i = 天体 i の予測 σ</a:t>
+              <a:t>J ファクター = 暗黒物質の密度の 2 乗を、視線方向に足し合わせた量</a:t>
+            </a:r>
+          </a:p>
+          <a:p>
+            <a:r>
+              <a:rPr sz="2400"/>
+              <a:t>天の川と矮小銀河で粒子は同じ → 比をとると J の比だけが残る</a:t>
             </a:r>
           </a:p>
           <a:p>
             <a:pPr lvl="1"/>
             <a:r>
               <a:rPr sz="2000"/>
-              <a:t>z_i：天体 i の実測の σ（20 GeV）</a:t>
+              <a:t>F_矮小 = F_天の川 × J_矮小 / J_天の川</a:t>
             </a:r>
           </a:p>
           <a:p>
             <a:r>
               <a:rPr sz="2400"/>
-              <a:t>暗黒物質が無ければ：T は平均 0、ばらつき 1</a:t>
+              <a:t>粒子の質量などを仮定せずに「何σ見えるはずか」が出る</a:t>
             </a:r>
           </a:p>
           <a:p>
             <a:r>
               <a:rPr sz="2400"/>
-              <a:t>暗黒物質があれば：T の平均 = √( Σ pred_i² ) = 1.77</a:t>
-            </a:r>
-          </a:p>
-          <a:p>
-            <a:r>
-              <a:rPr sz="2400"/>
-              <a:t>実測 T = 0.39 → ずれ 1.4σ</a:t>
-            </a:r>
-          </a:p>
-          <a:p>
-            <a:r>
-              <a:rPr sz="2400"/>
-              <a:t>ただし、ここでは J に誤差は無いとしていた</a:t>
-            </a:r>
+              <a:t>矮小銀河の J は、星の動きから推定する</a:t>
+            </a:r>
+          </a:p>
+        </p:txBody>
+      </p:sp>
+      <p:sp>
+        <p:nvSpPr>
+          <p:cNvPr id="8" name="TextBox 7">
+            <a:extLst>
+              <a:ext uri="{FF2B5EF4-FFF2-40B4-BE49-F238E27FC236}">
+                <a16:creationId xmlns:a16="http://schemas.microsoft.com/office/drawing/2014/main" id="{F85CD606-E3CE-F314-B3EE-F3D7028115CB}"/>
+              </a:ext>
+            </a:extLst>
+          </p:cNvPr>
+          <p:cNvSpPr txBox="1"/>
+          <p:nvPr/>
+        </p:nvSpPr>
+        <p:spPr>
+          <a:xfrm>
+            <a:off x="5837182" y="5663239"/>
+            <a:ext cx="6093372" cy="923330"/>
+          </a:xfrm>
+          <a:prstGeom prst="rect">
+            <a:avLst/>
+          </a:prstGeom>
+          <a:noFill/>
+        </p:spPr>
+        <p:txBody>
+          <a:bodyPr wrap="square">
+            <a:spAutoFit/>
+          </a:bodyPr>
+          <a:lstStyle/>
+          <a:p>
+            <a:r>
+              <a:rPr lang="en-US" sz="1400" b="1"/>
+              <a:t>Reference:</a:t>
+            </a:r>
+            <a:r>
+              <a:rPr lang="en-US" sz="1400"/>
+              <a:t> A. B. Pace &amp; L. E. Strigari (2019), MNRAS 482, 3480</a:t>
+            </a:r>
+            <a:endParaRPr lang="en-US"/>
           </a:p>
         </p:txBody>
       </p:sp>
@@ -12225,87 +12373,45 @@
           <a:p>
             <a:r>
               <a:rPr sz="3400"/>
-              <a:t>ここで論文：J の誤差は小さく見積もられている</a:t>
-            </a:r>
-          </a:p>
-        </p:txBody>
-      </p:sp>
-      <p:sp>
-        <p:nvSpPr>
-          <p:cNvPr id="3" name="Content Placeholder 2"/>
-          <p:cNvSpPr>
-            <a:spLocks noGrp="1"/>
-          </p:cNvSpPr>
-          <p:nvPr>
-            <p:ph idx="1"/>
-          </p:nvPr>
-        </p:nvSpPr>
+              <a:t>結果：どこにも信号は見えなかった</a:t>
+            </a:r>
+          </a:p>
+        </p:txBody>
+      </p:sp>
+      <p:pic>
+        <p:nvPicPr>
+          <p:cNvPr id="3" name="Picture 2" descr="fig_dwarf_results.png"/>
+          <p:cNvPicPr>
+            <a:picLocks noChangeAspect="1"/>
+          </p:cNvPicPr>
+          <p:nvPr/>
+        </p:nvPicPr>
+        <p:blipFill>
+          <a:blip r:embed="rId3"/>
+          <a:stretch>
+            <a:fillRect/>
+          </a:stretch>
+        </p:blipFill>
         <p:spPr>
           <a:xfrm>
-            <a:off x="841248" y="1463040"/>
-            <a:ext cx="10515600" cy="4114800"/>
+            <a:off x="2194560" y="1234440"/>
+            <a:ext cx="7156174" cy="4114800"/>
           </a:xfrm>
+          <a:prstGeom prst="rect">
+            <a:avLst/>
+          </a:prstGeom>
         </p:spPr>
-        <p:txBody>
-          <a:bodyPr/>
-          <a:lstStyle/>
-          <a:p>
-            <a:r>
-              <a:rPr sz="2400"/>
-              <a:t>文献ごとの J の値は、書かれた誤差よりも大きくばらつく</a:t>
-            </a:r>
-          </a:p>
-          <a:p>
-            <a:r>
-              <a:rPr sz="2400"/>
-              <a:t>見落とされがちな誤差の原因（8 つ）</a:t>
-            </a:r>
-          </a:p>
-          <a:p>
-            <a:pPr lvl="1"/>
-            <a:r>
-              <a:rPr sz="2000"/>
-              <a:t>点として扱う・ハローの形・星の分布の形の仮定</a:t>
-            </a:r>
-          </a:p>
-          <a:p>
-            <a:pPr lvl="1"/>
-            <a:r>
-              <a:rPr sz="2000"/>
-              <a:t>非球対称（最大 0.4 dex）・非平衡（〜0.1）・連星（Ret II で〜0.3）</a:t>
-            </a:r>
-          </a:p>
-          <a:p>
-            <a:pPr lvl="1"/>
-            <a:r>
-              <a:rPr sz="2000"/>
-              <a:t>前景の星の混入・誤差の分布が正規分布でない</a:t>
-            </a:r>
-          </a:p>
-          <a:p>
-            <a:r>
-              <a:rPr sz="2400"/>
-              <a:t>Δlog₁₀J ≈ 0.5（約 3 倍）以上の誤差を見込むべき</a:t>
-            </a:r>
-          </a:p>
-        </p:txBody>
-      </p:sp>
-      <p:sp>
-        <p:nvSpPr>
-          <p:cNvPr id="8" name="TextBox 7">
-            <a:extLst>
-              <a:ext uri="{FF2B5EF4-FFF2-40B4-BE49-F238E27FC236}">
-                <a16:creationId xmlns:a16="http://schemas.microsoft.com/office/drawing/2014/main" id="{F85CD606-E3CE-F314-B3EE-F3D7028115CB}"/>
-              </a:ext>
-            </a:extLst>
-          </p:cNvPr>
+      </p:pic>
+      <p:sp>
+        <p:nvSpPr>
+          <p:cNvPr id="4" name="TextBox 3"/>
           <p:cNvSpPr txBox="1"/>
           <p:nvPr/>
         </p:nvSpPr>
         <p:spPr>
           <a:xfrm>
-            <a:off x="5837182" y="5663239"/>
-            <a:ext cx="6093372" cy="923330"/>
+            <a:off x="457200" y="5486400"/>
+            <a:ext cx="11247120" cy="457200"/>
           </a:xfrm>
           <a:prstGeom prst="rect">
             <a:avLst/>
@@ -12319,14 +12425,9 @@
           <a:lstStyle/>
           <a:p>
             <a:r>
-              <a:rPr lang="en-US" sz="1400" b="1"/>
-              <a:t>Reference:</a:t>
-            </a:r>
-            <a:r>
-              <a:rPr lang="en-US" sz="1400"/>
-              <a:t> Bertólez-Martínez, Hooper &amp; Khatee Zathul (2026), arXiv:2609.20944 §II</a:t>
-            </a:r>
-            <a:endParaRPr lang="en-US"/>
+              <a:rPr sz="2000"/>
+              <a:t>どの天体・どのエネルギーでも最大 +3.46σ（何も無い空でも 4.50σ）</a:t>
+            </a:r>
           </a:p>
         </p:txBody>
       </p:sp>
@@ -12372,7 +12473,7 @@
           <a:p>
             <a:r>
               <a:rPr sz="3400"/>
-              <a:t>詳細なmethodについて①：仮想データの作り方</a:t>
+              <a:t>天体をまとめて比べる</a:t>
             </a:r>
           </a:p>
         </p:txBody>
@@ -12390,7 +12491,7 @@
         <p:spPr>
           <a:xfrm>
             <a:off x="841248" y="1463040"/>
-            <a:ext cx="10515600" cy="4114800"/>
+            <a:ext cx="10515600" cy="4937760"/>
           </a:xfrm>
         </p:spPr>
         <p:txBody>
@@ -12398,88 +12499,46 @@
           <a:lstStyle/>
           <a:p>
             <a:r>
-              <a:rPr sz="2200"/>
-              <a:t>Fermi-LAT の観測を計算機の中で作る（FermiTools、fermipy）</a:t>
+              <a:rPr sz="2400"/>
+              <a:t>1 個ずつでは弱いので、J が求まる 43 天体をまとめる</a:t>
+            </a:r>
+          </a:p>
+          <a:p>
+            <a:r>
+              <a:rPr sz="2400"/>
+              <a:t>T = Σ w_i z_i / √( Σ w_i² )、重み w_i = 天体 i の予測 σ</a:t>
             </a:r>
           </a:p>
           <a:p>
             <a:pPr lvl="1"/>
             <a:r>
-              <a:rPr sz="1800"/>
-              <a:t>17.4 年分、0.5 GeV〜1 TeV、10° × 10° の領域、0.08° の画素</a:t>
-            </a:r>
-          </a:p>
-          <a:p>
-            <a:r>
-              <a:rPr sz="2200"/>
-              <a:t>背景：銀河の拡散光＋等方の光から、ポアソン乱数で光子を作る</a:t>
-            </a:r>
-          </a:p>
-          <a:p>
-            <a:r>
-              <a:rPr sz="2200"/>
-              <a:t>暗黒物質の信号を入れる</a:t>
-            </a:r>
-          </a:p>
-          <a:p>
-            <a:pPr lvl="1"/>
-            <a:r>
-              <a:rPr sz="1800"/>
-              <a:t>質量 42 GeV、b クォーク対、⟨σv⟩ = 1.4 × 10⁻²⁶ cm³/s</a:t>
-            </a:r>
-          </a:p>
-          <a:p>
-            <a:pPr lvl="1"/>
-            <a:r>
-              <a:rPr sz="1800"/>
-              <a:t>銀河中心 GeV 超過（GCE）に合う値</a:t>
-            </a:r>
-          </a:p>
-          <a:p>
-            <a:r>
-              <a:rPr sz="2200"/>
-              <a:t>対象：Ursa Minor 1 個と、27 個の矮小銀河</a:t>
-            </a:r>
-          </a:p>
-        </p:txBody>
-      </p:sp>
-      <p:sp>
-        <p:nvSpPr>
-          <p:cNvPr id="8" name="TextBox 7">
-            <a:extLst>
-              <a:ext uri="{FF2B5EF4-FFF2-40B4-BE49-F238E27FC236}">
-                <a16:creationId xmlns:a16="http://schemas.microsoft.com/office/drawing/2014/main" id="{F85CD606-E3CE-F314-B3EE-F3D7028115CB}"/>
-              </a:ext>
-            </a:extLst>
-          </p:cNvPr>
-          <p:cNvSpPr txBox="1"/>
-          <p:nvPr/>
-        </p:nvSpPr>
-        <p:spPr>
-          <a:xfrm>
-            <a:off x="5837182" y="5663239"/>
-            <a:ext cx="6093372" cy="923330"/>
-          </a:xfrm>
-          <a:prstGeom prst="rect">
-            <a:avLst/>
-          </a:prstGeom>
-          <a:noFill/>
-        </p:spPr>
-        <p:txBody>
-          <a:bodyPr wrap="square">
-            <a:spAutoFit/>
-          </a:bodyPr>
-          <a:lstStyle/>
-          <a:p>
-            <a:r>
-              <a:rPr lang="en-US" sz="1400" b="1"/>
-              <a:t>Reference:</a:t>
-            </a:r>
-            <a:r>
-              <a:rPr lang="en-US" sz="1400"/>
-              <a:t> Bertólez-Martínez, Hooper &amp; Khatee Zathul (2026), arXiv:2609.20944 §III</a:t>
-            </a:r>
-            <a:endParaRPr lang="en-US"/>
+              <a:rPr sz="2000"/>
+              <a:t>z_i：天体 i の実測の σ（20 GeV）</a:t>
+            </a:r>
+          </a:p>
+          <a:p>
+            <a:r>
+              <a:rPr sz="2400"/>
+              <a:t>暗黒物質が無ければ：T は平均 0、ばらつき 1</a:t>
+            </a:r>
+          </a:p>
+          <a:p>
+            <a:r>
+              <a:rPr sz="2400"/>
+              <a:t>暗黒物質があれば：T の平均 = √( Σ pred_i² ) = 1.77</a:t>
+            </a:r>
+          </a:p>
+          <a:p>
+            <a:r>
+              <a:rPr sz="2400"/>
+              <a:t>実測 T = 0.39 → ずれ 1.4σ</a:t>
+            </a:r>
+          </a:p>
+          <a:p>
+            <a:r>
+              <a:rPr sz="2400"/>
+              <a:t>ただし、ここでは J に誤差は無いとしていた</a:t>
+            </a:r>
           </a:p>
         </p:txBody>
       </p:sp>
@@ -12525,7 +12584,7 @@
           <a:p>
             <a:r>
               <a:rPr sz="3400"/>
-              <a:t>詳細なmethodについて②：尤度と 2 つの誤差</a:t>
+              <a:t>ここで論文：J の誤差は小さく見積もられている</a:t>
             </a:r>
           </a:p>
         </p:txBody>
@@ -12551,47 +12610,41 @@
           <a:lstStyle/>
           <a:p>
             <a:r>
-              <a:rPr sz="2200"/>
-              <a:t>各天体の尤度 = 光子のポアソン尤度 × J の尤度</a:t>
+              <a:rPr sz="2400"/>
+              <a:t>文献ごとの J の値は、書かれた誤差よりも大きくばらつく</a:t>
+            </a:r>
+          </a:p>
+          <a:p>
+            <a:r>
+              <a:rPr sz="2400"/>
+              <a:t>見落とされがちな誤差の原因（8 つ）</a:t>
             </a:r>
           </a:p>
           <a:p>
             <a:pPr lvl="1"/>
             <a:r>
-              <a:rPr sz="1800"/>
-              <a:t>L_J ∝ exp[ −(log₁₀J − log₁₀J_obs)² / 2σ_L² ]</a:t>
-            </a:r>
-          </a:p>
-          <a:p>
-            <a:r>
-              <a:rPr sz="2200"/>
-              <a:t>27 個は尤度の積でまとめる（⟨σv⟩ は共通、J は天体ごと）</a:t>
-            </a:r>
-          </a:p>
-          <a:p>
-            <a:r>
-              <a:rPr sz="2200"/>
-              <a:t>2 つの誤差を分けて動かす</a:t>
+              <a:rPr sz="2000"/>
+              <a:t>点として扱う・ハローの形・星の分布の形の仮定</a:t>
             </a:r>
           </a:p>
           <a:p>
             <a:pPr lvl="1"/>
             <a:r>
-              <a:rPr sz="1800"/>
-              <a:t>σ：J の本当のばらつき（J_obs を J_true のまわりに σ でばらつかせる）</a:t>
+              <a:rPr sz="2000"/>
+              <a:t>非球対称（最大 0.4 dex）・非平衡（〜0.1）・連星（Ret II で〜0.3）</a:t>
             </a:r>
           </a:p>
           <a:p>
             <a:pPr lvl="1"/>
             <a:r>
-              <a:rPr sz="1800"/>
-              <a:t>σ_L：解析で仮定する幅</a:t>
-            </a:r>
-          </a:p>
-          <a:p>
-            <a:r>
-              <a:rPr sz="2200"/>
-              <a:t>95% 上限：TS が最大値から 2.71 下がる点（Wilks の定理を仮定）</a:t>
+              <a:rPr sz="2000"/>
+              <a:t>前景の星の混入・誤差の分布が正規分布でない</a:t>
+            </a:r>
+          </a:p>
+          <a:p>
+            <a:r>
+              <a:rPr sz="2400"/>
+              <a:t>Δlog₁₀J ≈ 0.5（約 3 倍）以上の誤差を見込むべき</a:t>
             </a:r>
           </a:p>
         </p:txBody>
@@ -12630,7 +12683,7 @@
             </a:r>
             <a:r>
               <a:rPr lang="en-US" sz="1400"/>
-              <a:t> Bertólez-Martínez, Hooper &amp; Khatee Zathul (2026), arXiv:2609.20944 式 (6)–(10)</a:t>
+              <a:t> Bertólez-Martínez, Hooper &amp; Khatee Zathul (2026), arXiv:2609.20944 §II</a:t>
             </a:r>
             <a:endParaRPr lang="en-US"/>
           </a:p>
@@ -12678,7 +12731,7 @@
           <a:p>
             <a:r>
               <a:rPr sz="3400"/>
-              <a:t>詳細なmethodについて③：何を数えたか</a:t>
+              <a:t>詳細なmethodについて①：仮想データの作り方</a:t>
             </a:r>
           </a:p>
         </p:txBody>
@@ -12704,40 +12757,47 @@
           <a:lstStyle/>
           <a:p>
             <a:r>
-              <a:rPr sz="2400"/>
-              <a:t>本物の信号を入れた仮想データを何度も作る</a:t>
+              <a:rPr sz="2200"/>
+              <a:t>Fermi-LAT の観測を計算機の中で作る（FermiTools、fermipy）</a:t>
             </a:r>
           </a:p>
           <a:p>
             <a:pPr lvl="1"/>
             <a:r>
-              <a:rPr sz="2000"/>
-              <a:t>Ursa Minor で 1000 回（基準の設定では 1 万回）</a:t>
-            </a:r>
-          </a:p>
-          <a:p>
-            <a:r>
-              <a:rPr sz="2400"/>
-              <a:t>それぞれで 95% 上限を出す</a:t>
-            </a:r>
-          </a:p>
-          <a:p>
-            <a:r>
-              <a:rPr sz="2400"/>
-              <a:t>上限が本物の ⟨σv⟩ より下 =「本物を無いと間違えた」</a:t>
-            </a:r>
-          </a:p>
-          <a:p>
-            <a:r>
-              <a:rPr sz="2400"/>
-              <a:t>95% 上限なら、間違いは 5% 以下のはず</a:t>
+              <a:rPr sz="1800"/>
+              <a:t>17.4 年分、0.5 GeV〜1 TeV、10° × 10° の領域、0.08° の画素</a:t>
+            </a:r>
+          </a:p>
+          <a:p>
+            <a:r>
+              <a:rPr sz="2200"/>
+              <a:t>背景：銀河の拡散光＋等方の光から、ポアソン乱数で光子を作る</a:t>
+            </a:r>
+          </a:p>
+          <a:p>
+            <a:r>
+              <a:rPr sz="2200"/>
+              <a:t>暗黒物質の信号を入れる</a:t>
             </a:r>
           </a:p>
           <a:p>
             <a:pPr lvl="1"/>
             <a:r>
-              <a:rPr sz="2000"/>
-              <a:t>これが守られているか（カバレッジ）を調べる</a:t>
+              <a:rPr sz="1800"/>
+              <a:t>質量 42 GeV、b クォーク対、⟨σv⟩ = 1.4 × 10⁻²⁶ cm³/s</a:t>
+            </a:r>
+          </a:p>
+          <a:p>
+            <a:pPr lvl="1"/>
+            <a:r>
+              <a:rPr sz="1800"/>
+              <a:t>銀河中心 GeV 超過（GCE）に合う値</a:t>
+            </a:r>
+          </a:p>
+          <a:p>
+            <a:r>
+              <a:rPr sz="2200"/>
+              <a:t>対象：Ursa Minor 1 個と、27 個の矮小銀河</a:t>
             </a:r>
           </a:p>
         </p:txBody>
@@ -12776,7 +12836,7 @@
             </a:r>
             <a:r>
               <a:rPr lang="en-US" sz="1400"/>
-              <a:t> Bertólez-Martínez, Hooper &amp; Khatee Zathul (2026), arXiv:2609.20944 §IV</a:t>
+              <a:t> Bertólez-Martínez, Hooper &amp; Khatee Zathul (2026), arXiv:2609.20944 §III</a:t>
             </a:r>
             <a:endParaRPr lang="en-US"/>
           </a:p>
@@ -12990,7 +13050,7 @@
           <a:p>
             <a:r>
               <a:rPr sz="3400"/>
-              <a:t>論文の結果①：Ursa Minor 1 個</a:t>
+              <a:t>詳細なmethodについて②：尤度と 2 つの誤差</a:t>
             </a:r>
           </a:p>
         </p:txBody>
@@ -13016,48 +13076,47 @@
           <a:lstStyle/>
           <a:p>
             <a:r>
-              <a:rPr sz="2400"/>
-              <a:t>σ_L を 0.3 / 0.5 / 1.0 だけ大きくすると</a:t>
+              <a:rPr sz="2200"/>
+              <a:t>各天体の尤度 = 光子のポアソン尤度 × J の尤度</a:t>
             </a:r>
           </a:p>
           <a:p>
             <a:pPr lvl="1"/>
             <a:r>
-              <a:rPr sz="2000"/>
-              <a:t>上限が 1.5 / 2.5 / 11 倍ゆるくなる</a:t>
-            </a:r>
-          </a:p>
-          <a:p>
-            <a:r>
-              <a:rPr sz="2400"/>
-              <a:t>本当の誤差 σ だけ大きく、σ_L は小さいままだと</a:t>
+              <a:rPr sz="1800"/>
+              <a:t>L_J ∝ exp[ −(log₁₀J − log₁₀J_obs)² / 2σ_L² ]</a:t>
+            </a:r>
+          </a:p>
+          <a:p>
+            <a:r>
+              <a:rPr sz="2200"/>
+              <a:t>27 個は尤度の積でまとめる（⟨σv⟩ は共通、J は天体ごと）</a:t>
+            </a:r>
+          </a:p>
+          <a:p>
+            <a:r>
+              <a:rPr sz="2200"/>
+              <a:t>2 つの誤差を分けて動かす</a:t>
             </a:r>
           </a:p>
           <a:p>
             <a:pPr lvl="1"/>
             <a:r>
-              <a:rPr sz="2000"/>
-              <a:t>本物を除外する割合 1.7% / 8.0% / 22%</a:t>
+              <a:rPr sz="1800"/>
+              <a:t>σ：J の本当のばらつき（J_obs を J_true のまわりに σ でばらつかせる）</a:t>
             </a:r>
           </a:p>
           <a:p>
             <a:pPr lvl="1"/>
             <a:r>
-              <a:rPr sz="2000"/>
-              <a:t>σ_L を σ に合わせれば 5% 以下に戻る</a:t>
-            </a:r>
-          </a:p>
-          <a:p>
-            <a:r>
-              <a:rPr sz="2400"/>
-              <a:t>形の間違い：球対称 NFW で解析 → 上限 2.4 倍厳しく</a:t>
-            </a:r>
-          </a:p>
-          <a:p>
-            <a:pPr lvl="1"/>
-            <a:r>
-              <a:rPr sz="2000"/>
-              <a:t>点として扱う → 1.4 倍厳しく</a:t>
+              <a:rPr sz="1800"/>
+              <a:t>σ_L：解析で仮定する幅</a:t>
+            </a:r>
+          </a:p>
+          <a:p>
+            <a:r>
+              <a:rPr sz="2200"/>
+              <a:t>95% 上限：TS が最大値から 2.71 下がる点（Wilks の定理を仮定）</a:t>
             </a:r>
           </a:p>
         </p:txBody>
@@ -13096,7 +13155,7 @@
             </a:r>
             <a:r>
               <a:rPr lang="en-US" sz="1400"/>
-              <a:t> Bertólez-Martínez, Hooper &amp; Khatee Zathul (2026), arXiv:2609.20944 §IV, Fig. 2–4</a:t>
+              <a:t> Bertólez-Martínez, Hooper &amp; Khatee Zathul (2026), arXiv:2609.20944 式 (6)–(10)</a:t>
             </a:r>
             <a:endParaRPr lang="en-US"/>
           </a:p>
@@ -13144,7 +13203,7 @@
           <a:p>
             <a:r>
               <a:rPr sz="3400"/>
-              <a:t>論文の結果②：27 個をまとめると</a:t>
+              <a:t>詳細なmethodについて③：何を数えたか</a:t>
             </a:r>
           </a:p>
         </p:txBody>
@@ -13170,46 +13229,40 @@
           <a:lstStyle/>
           <a:p>
             <a:r>
-              <a:rPr sz="2200"/>
-              <a:t>σ_L を 0.3 / 0.5 / 1.0 → 上限 1.14 / 1.44 / 3.23 倍ゆるく</a:t>
-            </a:r>
-          </a:p>
-          <a:p>
-            <a:r>
-              <a:rPr sz="2200"/>
-              <a:t>誤差を正しく入れても、本物を除外する割合 21%（5% のはず）</a:t>
+              <a:rPr sz="2400"/>
+              <a:t>本物の信号を入れた仮想データを何度も作る</a:t>
             </a:r>
           </a:p>
           <a:p>
             <a:pPr lvl="1"/>
             <a:r>
-              <a:rPr sz="1800"/>
-              <a:t>J の数が天体の数と一緒に増え、Wilks の定理の前提が崩れる</a:t>
-            </a:r>
-          </a:p>
-          <a:p>
-            <a:r>
-              <a:rPr sz="2200"/>
-              <a:t>本当の誤差を 0.3 / 0.5 / 1.0 大きくすると 31% / 49% / 88%</a:t>
+              <a:rPr sz="2000"/>
+              <a:t>Ursa Minor で 1000 回（基準の設定では 1 万回）</a:t>
+            </a:r>
+          </a:p>
+          <a:p>
+            <a:r>
+              <a:rPr sz="2400"/>
+              <a:t>それぞれで 95% 上限を出す</a:t>
+            </a:r>
+          </a:p>
+          <a:p>
+            <a:r>
+              <a:rPr sz="2400"/>
+              <a:t>上限が本物の ⟨σv⟩ より下 =「本物を無いと間違えた」</a:t>
+            </a:r>
+          </a:p>
+          <a:p>
+            <a:r>
+              <a:rPr sz="2400"/>
+              <a:t>95% 上限なら、間違いは 5% 以下のはず</a:t>
             </a:r>
           </a:p>
           <a:p>
             <a:pPr lvl="1"/>
             <a:r>
-              <a:rPr sz="1800"/>
-              <a:t>σ_L を合わせても 23% / 28% / 38%</a:t>
-            </a:r>
-          </a:p>
-          <a:p>
-            <a:r>
-              <a:rPr sz="2200"/>
-              <a:t>原因：J が上に振れた天体が、上限を決めてしまう</a:t>
-            </a:r>
-          </a:p>
-          <a:p>
-            <a:r>
-              <a:rPr sz="2200"/>
-              <a:t>対策の一つ：何も無い領域で較正する</a:t>
+              <a:rPr sz="2000"/>
+              <a:t>これが守られているか（カバレッジ）を調べる</a:t>
             </a:r>
           </a:p>
         </p:txBody>
@@ -13248,7 +13301,7 @@
             </a:r>
             <a:r>
               <a:rPr lang="en-US" sz="1400"/>
-              <a:t> Bertólez-Martínez, Hooper &amp; Khatee Zathul (2026), arXiv:2609.20944 §V, Fig. 5–7</a:t>
+              <a:t> Bertólez-Martínez, Hooper &amp; Khatee Zathul (2026), arXiv:2609.20944 §IV</a:t>
             </a:r>
             <a:endParaRPr lang="en-US"/>
           </a:p>
@@ -13296,7 +13349,7 @@
           <a:p>
             <a:r>
               <a:rPr sz="3400"/>
-              <a:t>論文のまとめ</a:t>
+              <a:t>論文の結果①：Ursa Minor 1 個</a:t>
             </a:r>
           </a:p>
         </p:txBody>
@@ -13323,19 +13376,47 @@
           <a:p>
             <a:r>
               <a:rPr sz="2400"/>
-              <a:t>J の誤差や形を雑に扱うと、上限は厳しく出すぎ、本物の信号を除外しやすい</a:t>
+              <a:t>σ_L を 0.3 / 0.5 / 1.0 だけ大きくすると</a:t>
+            </a:r>
+          </a:p>
+          <a:p>
+            <a:pPr lvl="1"/>
+            <a:r>
+              <a:rPr sz="2000"/>
+              <a:t>上限が 1.5 / 2.5 / 11 倍ゆるくなる</a:t>
             </a:r>
           </a:p>
           <a:p>
             <a:r>
               <a:rPr sz="2400"/>
-              <a:t>「銀河中心と矮小銀河が矛盾する」とは、まだ言えない</a:t>
+              <a:t>本当の誤差 σ だけ大きく、σ_L は小さいままだと</a:t>
+            </a:r>
+          </a:p>
+          <a:p>
+            <a:pPr lvl="1"/>
+            <a:r>
+              <a:rPr sz="2000"/>
+              <a:t>本物を除外する割合 1.7% / 8.0% / 22%</a:t>
+            </a:r>
+          </a:p>
+          <a:p>
+            <a:pPr lvl="1"/>
+            <a:r>
+              <a:rPr sz="2000"/>
+              <a:t>σ_L を σ に合わせれば 5% 以下に戻る</a:t>
             </a:r>
           </a:p>
           <a:p>
             <a:r>
               <a:rPr sz="2400"/>
-              <a:t>Δlog₁₀J ≈ 0.5 程度の誤差を見込むべき</a:t>
+              <a:t>形の間違い：球対称 NFW で解析 → 上限 2.4 倍厳しく</a:t>
+            </a:r>
+          </a:p>
+          <a:p>
+            <a:pPr lvl="1"/>
+            <a:r>
+              <a:rPr sz="2000"/>
+              <a:t>点として扱う → 1.4 倍厳しく</a:t>
             </a:r>
           </a:p>
         </p:txBody>
@@ -13374,7 +13455,7 @@
             </a:r>
             <a:r>
               <a:rPr lang="en-US" sz="1400"/>
-              <a:t> Bertólez-Martínez, Hooper &amp; Khatee Zathul (2026), arXiv:2609.20944 §VI</a:t>
+              <a:t> Bertólez-Martínez, Hooper &amp; Khatee Zathul (2026), arXiv:2609.20944 §IV, Fig. 2–4</a:t>
             </a:r>
             <a:endParaRPr lang="en-US"/>
           </a:p>
@@ -13422,7 +13503,7 @@
           <a:p>
             <a:r>
               <a:rPr sz="3400"/>
-              <a:t>論文の考え方を、僕の結果に当てはめる</a:t>
+              <a:t>論文の結果②：27 個をまとめると</a:t>
             </a:r>
           </a:p>
         </p:txBody>
@@ -13448,40 +13529,46 @@
           <a:lstStyle/>
           <a:p>
             <a:r>
-              <a:rPr sz="2400"/>
-              <a:t>これまで：J の誤差 = 0（J は推定値そのまま）</a:t>
-            </a:r>
-          </a:p>
-          <a:p>
-            <a:r>
-              <a:rPr sz="2400"/>
-              <a:t>今回：各天体の本当の J = 推定値 × 10^δ_i</a:t>
+              <a:rPr sz="2200"/>
+              <a:t>σ_L を 0.3 / 0.5 / 1.0 → 上限 1.14 / 1.44 / 3.23 倍ゆるく</a:t>
+            </a:r>
+          </a:p>
+          <a:p>
+            <a:r>
+              <a:rPr sz="2200"/>
+              <a:t>誤差を正しく入れても、本物を除外する割合 21%（5% のはず）</a:t>
             </a:r>
           </a:p>
           <a:p>
             <a:pPr lvl="1"/>
             <a:r>
-              <a:rPr sz="2000"/>
-              <a:t>δ_i は平均 0、幅 0.5 の正規分布（天体ごとに独立）</a:t>
+              <a:rPr sz="1800"/>
+              <a:t>J の数が天体の数と一緒に増え、Wilks の定理の前提が崩れる</a:t>
+            </a:r>
+          </a:p>
+          <a:p>
+            <a:r>
+              <a:rPr sz="2200"/>
+              <a:t>本当の誤差を 0.3 / 0.5 / 1.0 大きくすると 31% / 49% / 88%</a:t>
             </a:r>
           </a:p>
           <a:p>
             <a:pPr lvl="1"/>
             <a:r>
-              <a:rPr sz="2000"/>
-              <a:t>→ J がおよそ 1/3 倍〜3 倍の範囲でずれる</a:t>
-            </a:r>
-          </a:p>
-          <a:p>
-            <a:r>
-              <a:rPr sz="2400"/>
-              <a:t>予測 σ は J に比例 → pred_i × 10^δ_i</a:t>
-            </a:r>
-          </a:p>
-          <a:p>
-            <a:r>
-              <a:rPr sz="2400"/>
-              <a:t>論文と同じく「J をずらした世界」をたくさん作る（20 万回）</a:t>
+              <a:rPr sz="1800"/>
+              <a:t>σ_L を合わせても 23% / 28% / 38%</a:t>
+            </a:r>
+          </a:p>
+          <a:p>
+            <a:r>
+              <a:rPr sz="2200"/>
+              <a:t>原因：J が上に振れた天体が、上限を決めてしまう</a:t>
+            </a:r>
+          </a:p>
+          <a:p>
+            <a:r>
+              <a:rPr sz="2200"/>
+              <a:t>対策の一つ：何も無い領域で較正する</a:t>
             </a:r>
           </a:p>
         </p:txBody>
@@ -13520,7 +13607,7 @@
             </a:r>
             <a:r>
               <a:rPr lang="en-US" sz="1400"/>
-              <a:t> Bertólez-Martínez, Hooper &amp; Khatee Zathul (2026), arXiv:2609.20944 §IV</a:t>
+              <a:t> Bertólez-Martínez, Hooper &amp; Khatee Zathul (2026), arXiv:2609.20944 §V, Fig. 5–7</a:t>
             </a:r>
             <a:endParaRPr lang="en-US"/>
           </a:p>
@@ -13568,7 +13655,7 @@
           <a:p>
             <a:r>
               <a:rPr sz="3400"/>
-              <a:t>有意度の計算式のどこに誤差が入るか</a:t>
+              <a:t>論文のまとめ</a:t>
             </a:r>
           </a:p>
         </p:txBody>
@@ -13586,7 +13673,7 @@
         <p:spPr>
           <a:xfrm>
             <a:off x="841248" y="1463040"/>
-            <a:ext cx="10515600" cy="4937760"/>
+            <a:ext cx="10515600" cy="4114800"/>
           </a:xfrm>
         </p:spPr>
         <p:txBody>
@@ -13595,47 +13682,60 @@
           <a:p>
             <a:r>
               <a:rPr sz="2400"/>
-              <a:t>暗黒物質ありで期待される T</a:t>
-            </a:r>
-          </a:p>
-          <a:p>
-            <a:pPr lvl="1"/>
-            <a:r>
-              <a:rPr sz="2000"/>
-              <a:t>誤差なし：E[T] = Σ w_i pred_i / √Σ w_i² = 1.77</a:t>
-            </a:r>
-          </a:p>
-          <a:p>
-            <a:pPr lvl="1"/>
-            <a:r>
-              <a:rPr sz="2000"/>
-              <a:t>誤差あり：E[T] = Σ w_i pred_i 10^δ_i / √Σ w_i²  ← δ でばらつく</a:t>
+              <a:t>J の誤差や形を雑に扱うと、上限は厳しく出すぎ、本物の信号を除外しやすい</a:t>
             </a:r>
           </a:p>
           <a:p>
             <a:r>
               <a:rPr sz="2400"/>
-              <a:t>実測 T にも測定の揺れ s がある（s = 1、または空で測った 1.26）</a:t>
+              <a:t>「銀河中心と矮小銀河が矛盾する」とは、まだ言えない</a:t>
             </a:r>
           </a:p>
           <a:p>
             <a:r>
               <a:rPr sz="2400"/>
-              <a:t>暗黒物質ありで、実測 0.39 以下になる確率</a:t>
-            </a:r>
-          </a:p>
-          <a:p>
-            <a:pPr lvl="1"/>
-            <a:r>
-              <a:rPr sz="2000"/>
-              <a:t>p = （δ について平均）Φ( (0.39 − E[T]) / s )</a:t>
-            </a:r>
-          </a:p>
-          <a:p>
-            <a:r>
-              <a:rPr sz="2400"/>
-              <a:t>p を σ に直したもの =「ずれ」</a:t>
-            </a:r>
+              <a:t>Δlog₁₀J ≈ 0.5 程度の誤差を見込むべき</a:t>
+            </a:r>
+          </a:p>
+        </p:txBody>
+      </p:sp>
+      <p:sp>
+        <p:nvSpPr>
+          <p:cNvPr id="8" name="TextBox 7">
+            <a:extLst>
+              <a:ext uri="{FF2B5EF4-FFF2-40B4-BE49-F238E27FC236}">
+                <a16:creationId xmlns:a16="http://schemas.microsoft.com/office/drawing/2014/main" id="{F85CD606-E3CE-F314-B3EE-F3D7028115CB}"/>
+              </a:ext>
+            </a:extLst>
+          </p:cNvPr>
+          <p:cNvSpPr txBox="1"/>
+          <p:nvPr/>
+        </p:nvSpPr>
+        <p:spPr>
+          <a:xfrm>
+            <a:off x="5837182" y="5663239"/>
+            <a:ext cx="6093372" cy="923330"/>
+          </a:xfrm>
+          <a:prstGeom prst="rect">
+            <a:avLst/>
+          </a:prstGeom>
+          <a:noFill/>
+        </p:spPr>
+        <p:txBody>
+          <a:bodyPr wrap="square">
+            <a:spAutoFit/>
+          </a:bodyPr>
+          <a:lstStyle/>
+          <a:p>
+            <a:r>
+              <a:rPr lang="en-US" sz="1400" b="1"/>
+              <a:t>Reference:</a:t>
+            </a:r>
+            <a:r>
+              <a:rPr lang="en-US" sz="1400"/>
+              <a:t> Bertólez-Martínez, Hooper &amp; Khatee Zathul (2026), arXiv:2609.20944 §VI</a:t>
+            </a:r>
+            <a:endParaRPr lang="en-US"/>
           </a:p>
         </p:txBody>
       </p:sp>
@@ -13681,46 +13781,86 @@
           <a:p>
             <a:r>
               <a:rPr sz="3400"/>
-              <a:t>結果：予測の幅と実測</a:t>
-            </a:r>
-          </a:p>
-        </p:txBody>
-      </p:sp>
-      <p:pic>
-        <p:nvPicPr>
-          <p:cNvPr id="5" name="Picture 4" descr="fig_dwarf_J_uncertainty_totani.png"/>
-          <p:cNvPicPr>
-            <a:picLocks noChangeAspect="1"/>
-          </p:cNvPicPr>
-          <p:nvPr/>
-        </p:nvPicPr>
-        <p:blipFill>
-          <a:blip r:embed="rId4"/>
-          <a:srcRect/>
-          <a:stretch>
-            <a:fillRect/>
-          </a:stretch>
-        </p:blipFill>
+              <a:t>論文の考え方を、僕の結果に当てはめる</a:t>
+            </a:r>
+          </a:p>
+        </p:txBody>
+      </p:sp>
+      <p:sp>
+        <p:nvSpPr>
+          <p:cNvPr id="3" name="Content Placeholder 2"/>
+          <p:cNvSpPr>
+            <a:spLocks noGrp="1"/>
+          </p:cNvSpPr>
+          <p:nvPr>
+            <p:ph idx="1"/>
+          </p:nvPr>
+        </p:nvSpPr>
         <p:spPr>
           <a:xfrm>
-            <a:off x="2194560" y="1234440"/>
-            <a:ext cx="6858000" cy="4114800"/>
+            <a:off x="841248" y="1463040"/>
+            <a:ext cx="10515600" cy="4114800"/>
           </a:xfrm>
-          <a:prstGeom prst="rect">
-            <a:avLst/>
-          </a:prstGeom>
         </p:spPr>
-      </p:pic>
-      <p:sp>
-        <p:nvSpPr>
-          <p:cNvPr id="4" name="TextBox 3"/>
+        <p:txBody>
+          <a:bodyPr/>
+          <a:lstStyle/>
+          <a:p>
+            <a:r>
+              <a:rPr sz="2400"/>
+              <a:t>これまで：J の誤差 = 0（J は推定値そのまま）</a:t>
+            </a:r>
+          </a:p>
+          <a:p>
+            <a:r>
+              <a:rPr sz="2400"/>
+              <a:t>今回：各天体の本当の J = 推定値 × 10^δ_i</a:t>
+            </a:r>
+          </a:p>
+          <a:p>
+            <a:pPr lvl="1"/>
+            <a:r>
+              <a:rPr sz="2000"/>
+              <a:t>δ_i は平均 0、幅 0.5 の正規分布（天体ごとに独立）</a:t>
+            </a:r>
+          </a:p>
+          <a:p>
+            <a:pPr lvl="1"/>
+            <a:r>
+              <a:rPr sz="2000"/>
+              <a:t>→ J がおよそ 1/3 倍〜3 倍の範囲でずれる</a:t>
+            </a:r>
+          </a:p>
+          <a:p>
+            <a:r>
+              <a:rPr sz="2400"/>
+              <a:t>予測 σ は J に比例 → pred_i × 10^δ_i</a:t>
+            </a:r>
+          </a:p>
+          <a:p>
+            <a:r>
+              <a:rPr sz="2400"/>
+              <a:t>論文と同じく「J をずらした世界」をたくさん作る（20 万回）</a:t>
+            </a:r>
+          </a:p>
+        </p:txBody>
+      </p:sp>
+      <p:sp>
+        <p:nvSpPr>
+          <p:cNvPr id="8" name="TextBox 7">
+            <a:extLst>
+              <a:ext uri="{FF2B5EF4-FFF2-40B4-BE49-F238E27FC236}">
+                <a16:creationId xmlns:a16="http://schemas.microsoft.com/office/drawing/2014/main" id="{F85CD606-E3CE-F314-B3EE-F3D7028115CB}"/>
+              </a:ext>
+            </a:extLst>
+          </p:cNvPr>
           <p:cNvSpPr txBox="1"/>
           <p:nvPr/>
         </p:nvSpPr>
         <p:spPr>
           <a:xfrm>
-            <a:off x="457200" y="5486400"/>
-            <a:ext cx="11247120" cy="457200"/>
+            <a:off x="5837182" y="5663239"/>
+            <a:ext cx="6093372" cy="923330"/>
           </a:xfrm>
           <a:prstGeom prst="rect">
             <a:avLst/>
@@ -13734,9 +13874,14 @@
           <a:lstStyle/>
           <a:p>
             <a:r>
-              <a:rPr sz="2000"/>
-              <a:t>期待 1.8σ → J の誤差で 1.4〜5.1σ に広がる。実測 0.4σ ± 1.26。ずれ 1.3σ</a:t>
-            </a:r>
+              <a:rPr lang="en-US" sz="1400" b="1"/>
+              <a:t>Reference:</a:t>
+            </a:r>
+            <a:r>
+              <a:rPr lang="en-US" sz="1400"/>
+              <a:t> Bertólez-Martínez, Hooper &amp; Khatee Zathul (2026), arXiv:2609.20944 §IV</a:t>
+            </a:r>
+            <a:endParaRPr lang="en-US"/>
           </a:p>
         </p:txBody>
       </p:sp>
@@ -13782,7 +13927,7 @@
           <a:p>
             <a:r>
               <a:rPr sz="3400"/>
-              <a:t>結果の数字</a:t>
+              <a:t>有意度の計算式のどこに誤差が入るか</a:t>
             </a:r>
           </a:p>
         </p:txBody>
@@ -13809,40 +13954,46 @@
           <a:p>
             <a:r>
               <a:rPr sz="2400"/>
-              <a:t>局所密度 0.42 GeV/cm³ の場合（43 天体、20 GeV）</a:t>
+              <a:t>暗黒物質ありで期待される T</a:t>
             </a:r>
           </a:p>
           <a:p>
             <a:pPr lvl="1"/>
             <a:r>
               <a:rPr sz="2000"/>
-              <a:t>J の誤差なし：期待 1.77、ずれ 1.4σ（s = 1.26 なら 1.1σ）</a:t>
+              <a:t>誤差なし：E[T] = Σ w_i pred_i / √Σ w_i² = 1.77</a:t>
             </a:r>
           </a:p>
           <a:p>
             <a:pPr lvl="1"/>
             <a:r>
               <a:rPr sz="2000"/>
-              <a:t>J の誤差あり：期待 2.5（68% で 1.4–5.1）、ずれ 1.5σ（1.3σ）</a:t>
+              <a:t>誤差あり：E[T] = Σ w_i pred_i 10^δ_i / √Σ w_i²  ← δ でばらつく</a:t>
             </a:r>
           </a:p>
           <a:p>
             <a:r>
               <a:rPr sz="2400"/>
-              <a:t>天の川側の局所密度を 0.3〜0.6 GeV/cm³ で動かしても</a:t>
+              <a:t>実測 T にも測定の揺れ s がある（s = 1、または空で測った 1.26）</a:t>
+            </a:r>
+          </a:p>
+          <a:p>
+            <a:r>
+              <a:rPr sz="2400"/>
+              <a:t>暗黒物質ありで、実測 0.39 以下になる確率</a:t>
             </a:r>
           </a:p>
           <a:p>
             <a:pPr lvl="1"/>
             <a:r>
               <a:rPr sz="2000"/>
-              <a:t>ずれは較正後 2.4σ 以下</a:t>
+              <a:t>p = （δ について平均）Φ( (0.39 − E[T]) / s )</a:t>
             </a:r>
           </a:p>
           <a:p>
             <a:r>
               <a:rPr sz="2400"/>
-              <a:t>→ 暗黒物質と矛盾はしないが、確認もできない（判定できない）</a:t>
+              <a:t>p を σ に直したもの =「ずれ」</a:t>
             </a:r>
           </a:p>
         </p:txBody>
@@ -13889,67 +14040,61 @@
           <a:p>
             <a:r>
               <a:rPr sz="3400"/>
-              <a:t>2 つの数字の違い：15σ と 1.3σ</a:t>
-            </a:r>
-          </a:p>
-        </p:txBody>
-      </p:sp>
-      <p:sp>
-        <p:nvSpPr>
-          <p:cNvPr id="3" name="Content Placeholder 2"/>
-          <p:cNvSpPr>
-            <a:spLocks noGrp="1"/>
-          </p:cNvSpPr>
-          <p:nvPr>
-            <p:ph idx="1"/>
-          </p:nvPr>
-        </p:nvSpPr>
+              <a:t>結果：予測の幅と実測</a:t>
+            </a:r>
+          </a:p>
+        </p:txBody>
+      </p:sp>
+      <p:pic>
+        <p:nvPicPr>
+          <p:cNvPr id="5" name="Picture 4" descr="fig_dwarf_J_uncertainty_totani.png"/>
+          <p:cNvPicPr>
+            <a:picLocks noChangeAspect="1"/>
+          </p:cNvPicPr>
+          <p:nvPr/>
+        </p:nvPicPr>
+        <p:blipFill>
+          <a:blip r:embed="rId3"/>
+          <a:srcRect/>
+          <a:stretch>
+            <a:fillRect/>
+          </a:stretch>
+        </p:blipFill>
         <p:spPr>
           <a:xfrm>
-            <a:off x="841248" y="1463040"/>
-            <a:ext cx="10515600" cy="4937760"/>
+            <a:off x="2194560" y="1234440"/>
+            <a:ext cx="6858000" cy="4114800"/>
           </a:xfrm>
+          <a:prstGeom prst="rect">
+            <a:avLst/>
+          </a:prstGeom>
         </p:spPr>
-        <p:txBody>
-          <a:bodyPr/>
-          <a:lstStyle/>
-          <a:p>
-            <a:r>
-              <a:rPr sz="2400"/>
-              <a:t>約 15σ：天の川のハロー超過の強さ</a:t>
-            </a:r>
-          </a:p>
-          <a:p>
-            <a:pPr lvl="1"/>
+      </p:pic>
+      <p:sp>
+        <p:nvSpPr>
+          <p:cNvPr id="4" name="TextBox 3"/>
+          <p:cNvSpPr txBox="1"/>
+          <p:nvPr/>
+        </p:nvSpPr>
+        <p:spPr>
+          <a:xfrm>
+            <a:off x="457200" y="5486400"/>
+            <a:ext cx="11247120" cy="457200"/>
+          </a:xfrm>
+          <a:prstGeom prst="rect">
+            <a:avLst/>
+          </a:prstGeom>
+          <a:noFill/>
+        </p:spPr>
+        <p:txBody>
+          <a:bodyPr wrap="square">
+            <a:spAutoFit/>
+          </a:bodyPr>
+          <a:lstStyle/>
+          <a:p>
             <a:r>
               <a:rPr sz="2000"/>
-              <a:t>19.5σ を、何も無い空でのばらつき 1.26 で割ったもの</a:t>
-            </a:r>
-          </a:p>
-          <a:p>
-            <a:pPr lvl="1"/>
-            <a:r>
-              <a:rPr sz="2000"/>
-              <a:t>「天の川に、背景では説明しにくい何かがある」</a:t>
-            </a:r>
-          </a:p>
-          <a:p>
-            <a:r>
-              <a:rPr sz="2400"/>
-              <a:t>1.3σ：矮小銀河での「予測と実測のずれ」</a:t>
-            </a:r>
-          </a:p>
-          <a:p>
-            <a:pPr lvl="1"/>
-            <a:r>
-              <a:rPr sz="2000"/>
-              <a:t>「天の川の超過が暗黒物質だとしても、矮小銀河の結果と矛盾しない」</a:t>
-            </a:r>
-          </a:p>
-          <a:p>
-            <a:r>
-              <a:rPr sz="2400"/>
-              <a:t>別のものを測った、別の数字</a:t>
+              <a:t>期待 1.8σ → J の誤差で 1.4〜5.1σ に広がる。実測 0.4σ ± 1.26。ずれ 1.3σ</a:t>
             </a:r>
           </a:p>
         </p:txBody>
@@ -13996,7 +14141,7 @@
           <a:p>
             <a:r>
               <a:rPr sz="3400"/>
-              <a:t>結論</a:t>
+              <a:t>結果の数字</a:t>
             </a:r>
           </a:p>
         </p:txBody>
@@ -14023,33 +14168,40 @@
           <a:p>
             <a:r>
               <a:rPr sz="2400"/>
-              <a:t>Totani の超過を再現（名目 19.5σ、較正後 約 15σ）</a:t>
+              <a:t>局所密度 0.42 GeV/cm³ の場合（43 天体、20 GeV）</a:t>
+            </a:r>
+          </a:p>
+          <a:p>
+            <a:pPr lvl="1"/>
+            <a:r>
+              <a:rPr sz="2000"/>
+              <a:t>J の誤差なし：期待 1.77、ずれ 1.4σ（s = 1.26 なら 1.1σ）</a:t>
+            </a:r>
+          </a:p>
+          <a:p>
+            <a:pPr lvl="1"/>
+            <a:r>
+              <a:rPr sz="2000"/>
+              <a:t>J の誤差あり：期待 2.5（68% で 1.4–5.1）、ずれ 1.5σ（1.3σ）</a:t>
             </a:r>
           </a:p>
           <a:p>
             <a:r>
               <a:rPr sz="2400"/>
-              <a:t>ICS の明るさ・バブル・計算の近似の間違いでは説明できない</a:t>
+              <a:t>天の川側の局所密度を 0.3〜0.6 GeV/cm³ で動かしても</a:t>
             </a:r>
           </a:p>
           <a:p>
             <a:pPr lvl="1"/>
             <a:r>
               <a:rPr sz="2000"/>
-              <a:t>暗黒物質の証拠ではない（ICS の空間の形は未確認）</a:t>
+              <a:t>ずれは較正後 2.4σ 以下</a:t>
             </a:r>
           </a:p>
           <a:p>
             <a:r>
               <a:rPr sz="2400"/>
-              <a:t>矮小銀河では非検出</a:t>
-            </a:r>
-          </a:p>
-          <a:p>
-            <a:pPr lvl="1"/>
-            <a:r>
-              <a:rPr sz="2000"/>
-              <a:t>J の誤差（約 3 倍）を入れると、予測とのずれは 1.3σ → 判定できない</a:t>
+              <a:t>→ 暗黒物質と矛盾はしないが、確認もできない（判定できない）</a:t>
             </a:r>
           </a:p>
         </p:txBody>
@@ -14096,7 +14248,7 @@
           <a:p>
             <a:r>
               <a:rPr sz="3400"/>
-              <a:t>統計の視点から：この研究に足りなかったもの</a:t>
+              <a:t>2 つの数字の違い：15σ と 1.3σ</a:t>
             </a:r>
           </a:p>
         </p:txBody>
@@ -14114,7 +14266,7 @@
         <p:spPr>
           <a:xfrm>
             <a:off x="841248" y="1463040"/>
-            <a:ext cx="10515600" cy="4114800"/>
+            <a:ext cx="10515600" cy="4937760"/>
           </a:xfrm>
         </p:spPr>
         <p:txBody>
@@ -14123,81 +14275,41 @@
           <a:p>
             <a:r>
               <a:rPr sz="2400"/>
-              <a:t>σ が 1.26 倍に膨らんだ原因</a:t>
+              <a:t>約 15σ：天の川のハロー超過の強さ</a:t>
             </a:r>
           </a:p>
           <a:p>
             <a:pPr lvl="1"/>
             <a:r>
               <a:rPr sz="2000"/>
-              <a:t>尤度は「型紙（GALPROP）は完璧、誤差は光子の数のばらつきだけ」と仮定</a:t>
+              <a:t>19.5σ を、何も無い空でのばらつき 1.26 で割ったもの</a:t>
             </a:r>
           </a:p>
           <a:p>
             <a:pPr lvl="1"/>
             <a:r>
               <a:rPr sz="2000"/>
-              <a:t>型紙そのものの誤差が、統計モデルに入っていない</a:t>
+              <a:t>「天の川に、背景では説明しにくい何かがある」</a:t>
             </a:r>
           </a:p>
           <a:p>
             <a:r>
               <a:rPr sz="2400"/>
-              <a:t>データ同化：シミュレーションの誤差と観測の誤差を分けて、統計モデルに入れる枠組み</a:t>
+              <a:t>1.3σ：矮小銀河での「予測と実測のずれ」</a:t>
+            </a:r>
+          </a:p>
+          <a:p>
+            <a:pPr lvl="1"/>
+            <a:r>
+              <a:rPr sz="2000"/>
+              <a:t>「天の川の超過が暗黒物質だとしても、矮小銀河の結果と矛盾しない」</a:t>
             </a:r>
           </a:p>
           <a:p>
             <a:r>
               <a:rPr sz="2400"/>
-              <a:t>J をずらして何度も計算したのも、分布をたくさんのサンプルで表すという同じ発想</a:t>
-            </a:r>
-          </a:p>
-          <a:p>
-            <a:pPr lvl="1"/>
-            <a:r>
-              <a:rPr sz="2000"/>
-              <a:t>（アンサンブル・粒子フィルタ）</a:t>
-            </a:r>
-          </a:p>
-        </p:txBody>
-      </p:sp>
-      <p:sp>
-        <p:nvSpPr>
-          <p:cNvPr id="8" name="TextBox 7">
-            <a:extLst>
-              <a:ext uri="{FF2B5EF4-FFF2-40B4-BE49-F238E27FC236}">
-                <a16:creationId xmlns:a16="http://schemas.microsoft.com/office/drawing/2014/main" id="{F85CD606-E3CE-F314-B3EE-F3D7028115CB}"/>
-              </a:ext>
-            </a:extLst>
-          </p:cNvPr>
-          <p:cNvSpPr txBox="1"/>
-          <p:nvPr/>
-        </p:nvSpPr>
-        <p:spPr>
-          <a:xfrm>
-            <a:off x="5837182" y="5663239"/>
-            <a:ext cx="6093372" cy="923330"/>
-          </a:xfrm>
-          <a:prstGeom prst="rect">
-            <a:avLst/>
-          </a:prstGeom>
-          <a:noFill/>
-        </p:spPr>
-        <p:txBody>
-          <a:bodyPr wrap="square">
-            <a:spAutoFit/>
-          </a:bodyPr>
-          <a:lstStyle/>
-          <a:p>
-            <a:r>
-              <a:rPr lang="en-US" sz="1400" b="1"/>
-              <a:t>Reference:</a:t>
-            </a:r>
-            <a:r>
-              <a:rPr lang="en-US" sz="1400"/>
-              <a:t> 中村和幸 (2017), 数理解析研究所講究録 2057, 59–66</a:t>
-            </a:r>
-            <a:endParaRPr lang="en-US"/>
+              <a:t>別のものを測った、別の数字</a:t>
+            </a:r>
           </a:p>
         </p:txBody>
       </p:sp>
@@ -14210,7 +14322,7 @@
 </file>
 
 <file path=ppt/slides/slide5.xml><?xml version="1.0" encoding="utf-8"?>
-<p:sld xmlns:a="http://schemas.openxmlformats.org/drawingml/2006/main" xmlns:p="http://schemas.openxmlformats.org/presentationml/2006/main" xmlns:r="http://schemas.openxmlformats.org/officeDocument/2006/relationships">
+<p:sld xmlns:a="http://schemas.openxmlformats.org/drawingml/2006/main" xmlns:r="http://schemas.openxmlformats.org/officeDocument/2006/relationships" xmlns:p="http://schemas.openxmlformats.org/presentationml/2006/main">
   <p:cSld>
     <p:spTree>
       <p:nvGrpSpPr>
@@ -14218,7 +14330,14 @@
         <p:cNvGrpSpPr/>
         <p:nvPr/>
       </p:nvGrpSpPr>
-      <p:grpSpPr/>
+      <p:grpSpPr>
+        <a:xfrm>
+          <a:off x="0" y="0"/>
+          <a:ext cx="0" cy="0"/>
+          <a:chOff x="0" y="0"/>
+          <a:chExt cx="0" cy="0"/>
+        </a:xfrm>
+      </p:grpSpPr>
       <p:sp>
         <p:nvSpPr>
           <p:cNvPr id="2" name="Title 1"/>
@@ -14261,14 +14380,12 @@
           <a:bodyPr/>
           <a:lstStyle/>
           <a:p>
-            <a:pPr/>
             <a:r>
               <a:rPr sz="1800"/>
               <a:t>空のどの方向からも、同じ明るさで来るガンマ線</a:t>
             </a:r>
           </a:p>
           <a:p>
-            <a:pPr/>
             <a:r>
               <a:rPr sz="1800"/>
               <a:t>出どころ：天の川の外の遠い銀河（ブレーザーなど）</a:t>
@@ -14282,14 +14399,12 @@
             </a:r>
           </a:p>
           <a:p>
-            <a:pPr/>
             <a:r>
               <a:rPr sz="1800"/>
               <a:t>型紙：空全体で一様（どこも同じ明るさ）</a:t>
             </a:r>
           </a:p>
           <a:p>
-            <a:pPr/>
             <a:r>
               <a:rPr sz="1800"/>
               <a:t>倍率：0 以上</a:t>
@@ -14303,7 +14418,6 @@
             </a:r>
           </a:p>
           <a:p>
-            <a:pPr/>
             <a:r>
               <a:rPr sz="1800"/>
               <a:t>注意：Loop I の殻 1 と形がほぼ同じで、区別しにくい</a:t>
@@ -14320,7 +14434,7 @@
           <p:nvPr/>
         </p:nvPicPr>
         <p:blipFill>
-          <a:blip r:embed="rId2"/>
+          <a:blip r:embed="rId3"/>
           <a:stretch>
             <a:fillRect/>
           </a:stretch>
@@ -14417,7 +14531,7 @@
           <a:p>
             <a:r>
               <a:rPr sz="3400"/>
-              <a:t>参考文献</a:t>
+              <a:t>結論</a:t>
             </a:r>
           </a:p>
         </p:txBody>
@@ -14443,56 +14557,34 @@
           <a:lstStyle/>
           <a:p>
             <a:r>
-              <a:rPr sz="1800"/>
-              <a:t>T. Totani (2025), arXiv:2507.07209</a:t>
-            </a:r>
-          </a:p>
-          <a:p>
-            <a:r>
-              <a:rPr sz="1800"/>
-              <a:t>Bertólez-Martínez, Hooper &amp; Khatee Zathul (2026), arXiv:2609.20944</a:t>
-            </a:r>
-          </a:p>
-          <a:p>
-            <a:r>
-              <a:rPr sz="1800"/>
-              <a:t>S. S. Wilks (1938), Ann. Math. Stat. 9, 60</a:t>
-            </a:r>
-          </a:p>
-          <a:p>
-            <a:r>
-              <a:rPr sz="1800"/>
-              <a:t>D. Foreman-Mackey et al. (2013), PASP 125, 306</a:t>
-            </a:r>
-          </a:p>
-          <a:p>
-            <a:r>
-              <a:rPr sz="1800"/>
-              <a:t>I. V. Moskalenko &amp; A. W. Strong (2000), ApJ 528, 357</a:t>
-            </a:r>
-          </a:p>
-          <a:p>
-            <a:r>
-              <a:rPr sz="1800"/>
-              <a:t>B. Efron &amp; R. J. Tibshirani (1993), An Introduction to the Bootstrap</a:t>
-            </a:r>
-          </a:p>
-          <a:p>
-            <a:r>
-              <a:rPr sz="1800"/>
-              <a:t>A. B. Pace (2025), Open J. Astrophys. 8, 142</a:t>
-            </a:r>
-          </a:p>
-          <a:p>
-            <a:r>
-              <a:rPr sz="1800"/>
-              <a:t>A. B. Pace &amp; L. E. Strigari (2019), MNRAS 482, 3480</a:t>
-            </a:r>
-          </a:p>
-          <a:p>
-            <a:r>
-              <a:rPr sz="1800"/>
-              <a:t>中村和幸 (2017), 数理解析研究所講究録 2057, 59–66</a:t>
+              <a:rPr sz="2400"/>
+              <a:t>Totani の超過を再現（名目 19.5σ、較正後 約 15σ）</a:t>
+            </a:r>
+          </a:p>
+          <a:p>
+            <a:r>
+              <a:rPr sz="2400"/>
+              <a:t>ICS の明るさ・バブル・計算の近似の間違いでは説明できない</a:t>
+            </a:r>
+          </a:p>
+          <a:p>
+            <a:pPr lvl="1"/>
+            <a:r>
+              <a:rPr sz="2000"/>
+              <a:t>暗黒物質の証拠ではない（ICS の空間の形は未確認）</a:t>
+            </a:r>
+          </a:p>
+          <a:p>
+            <a:r>
+              <a:rPr sz="2400"/>
+              <a:t>矮小銀河では非検出</a:t>
+            </a:r>
+          </a:p>
+          <a:p>
+            <a:pPr lvl="1"/>
+            <a:r>
+              <a:rPr sz="2000"/>
+              <a:t>J の誤差（約 3 倍）を入れると、予測とのずれは 1.3σ → 判定できない</a:t>
             </a:r>
           </a:p>
         </p:txBody>
@@ -14506,7 +14598,7 @@
 </file>
 
 <file path=ppt/slides/slide51.xml><?xml version="1.0" encoding="utf-8"?>
-<p:sld xmlns:a="http://schemas.openxmlformats.org/drawingml/2006/main" xmlns:p="http://schemas.openxmlformats.org/presentationml/2006/main" xmlns:r="http://schemas.openxmlformats.org/officeDocument/2006/relationships">
+<p:sld xmlns:a="http://schemas.openxmlformats.org/drawingml/2006/main" xmlns:r="http://schemas.openxmlformats.org/officeDocument/2006/relationships" xmlns:p="http://schemas.openxmlformats.org/presentationml/2006/main">
   <p:cSld>
     <p:spTree>
       <p:nvGrpSpPr>
@@ -14514,7 +14606,14 @@
         <p:cNvGrpSpPr/>
         <p:nvPr/>
       </p:nvGrpSpPr>
-      <p:grpSpPr/>
+      <p:grpSpPr>
+        <a:xfrm>
+          <a:off x="0" y="0"/>
+          <a:ext cx="0" cy="0"/>
+          <a:chOff x="0" y="0"/>
+          <a:chExt cx="0" cy="0"/>
+        </a:xfrm>
+      </p:grpSpPr>
       <p:sp>
         <p:nvSpPr>
           <p:cNvPr id="2" name="Title 1"/>
@@ -14531,8 +14630,8 @@
           <a:lstStyle/>
           <a:p>
             <a:r>
-              <a:rPr sz="3000"/>
-              <a:t>なぜ ICS とハローは形が似ているのか</a:t>
+              <a:rPr sz="3400"/>
+              <a:t>統計の視点から：この研究に足りなかったもの</a:t>
             </a:r>
           </a:p>
         </p:txBody>
@@ -14549,60 +14648,94 @@
         </p:nvSpPr>
         <p:spPr>
           <a:xfrm>
-            <a:off x="841248" y="1325880"/>
-            <a:ext cx="10515600" cy="1828800"/>
+            <a:off x="841248" y="1463040"/>
+            <a:ext cx="10515600" cy="4114800"/>
           </a:xfrm>
         </p:spPr>
         <p:txBody>
           <a:bodyPr/>
           <a:lstStyle/>
           <a:p>
-            <a:pPr/>
-            <a:r>
-              <a:rPr sz="1900"/>
-              <a:t>ハロー：暗黒物質は銀河の中心ほど濃い → 中心から外へ、なだらかに暗くなる</a:t>
-            </a:r>
-          </a:p>
-          <a:p>
-            <a:pPr/>
-            <a:r>
-              <a:rPr sz="1900"/>
-              <a:t>ICS：光を出す電子も、電子がぶつかる星の光も、銀河の中心ほど多い → こちらも中心から外へ暗くなる</a:t>
-            </a:r>
-          </a:p>
-          <a:p>
-            <a:pPr/>
-            <a:r>
-              <a:rPr sz="1900"/>
-              <a:t>違うのは横方向だけ：ICS は銀河面に沿って横に広い。ハローは中心に集まる（下の図）→ 見分ける手がかりはここ</a:t>
-            </a:r>
-          </a:p>
-        </p:txBody>
-      </p:sp>
-      <p:pic>
-        <p:nvPicPr>
-          <p:cNvPr id="4" name="Picture 3" descr="fig_ics_vs_halo_profile.png"/>
-          <p:cNvPicPr>
-            <a:picLocks noChangeAspect="1"/>
-          </p:cNvPicPr>
+            <a:r>
+              <a:rPr sz="2400"/>
+              <a:t>σ が 1.26 倍に膨らんだ原因</a:t>
+            </a:r>
+          </a:p>
+          <a:p>
+            <a:pPr lvl="1"/>
+            <a:r>
+              <a:rPr sz="2000"/>
+              <a:t>尤度は「型紙（GALPROP）は完璧、誤差は光子の数のばらつきだけ」と仮定</a:t>
+            </a:r>
+          </a:p>
+          <a:p>
+            <a:pPr lvl="1"/>
+            <a:r>
+              <a:rPr sz="2000"/>
+              <a:t>型紙そのものの誤差が、統計モデルに入っていない</a:t>
+            </a:r>
+          </a:p>
+          <a:p>
+            <a:r>
+              <a:rPr sz="2400"/>
+              <a:t>データ同化：シミュレーションの誤差と観測の誤差を分けて、統計モデルに入れる枠組み</a:t>
+            </a:r>
+          </a:p>
+          <a:p>
+            <a:r>
+              <a:rPr sz="2400"/>
+              <a:t>J をずらして何度も計算したのも、分布をたくさんのサンプルで表すという同じ発想</a:t>
+            </a:r>
+          </a:p>
+          <a:p>
+            <a:pPr lvl="1"/>
+            <a:r>
+              <a:rPr sz="2000"/>
+              <a:t>（アンサンブル・粒子フィルタ）</a:t>
+            </a:r>
+          </a:p>
+        </p:txBody>
+      </p:sp>
+      <p:sp>
+        <p:nvSpPr>
+          <p:cNvPr id="8" name="TextBox 7">
+            <a:extLst>
+              <a:ext uri="{FF2B5EF4-FFF2-40B4-BE49-F238E27FC236}">
+                <a16:creationId xmlns:a16="http://schemas.microsoft.com/office/drawing/2014/main" id="{F85CD606-E3CE-F314-B3EE-F3D7028115CB}"/>
+              </a:ext>
+            </a:extLst>
+          </p:cNvPr>
+          <p:cNvSpPr txBox="1"/>
           <p:nvPr/>
-        </p:nvPicPr>
-        <p:blipFill>
-          <a:blip r:embed="rId2"/>
-          <a:stretch>
-            <a:fillRect/>
-          </a:stretch>
-        </p:blipFill>
+        </p:nvSpPr>
         <p:spPr>
           <a:xfrm>
-            <a:off x="2194560" y="3200400"/>
-            <a:ext cx="7347005" cy="3520440"/>
+            <a:off x="5837182" y="5663239"/>
+            <a:ext cx="6093372" cy="923330"/>
           </a:xfrm>
           <a:prstGeom prst="rect">
             <a:avLst/>
           </a:prstGeom>
+          <a:noFill/>
         </p:spPr>
-      </p:pic>
+        <p:txBody>
+          <a:bodyPr wrap="square">
+            <a:spAutoFit/>
+          </a:bodyPr>
+          <a:lstStyle/>
+          <a:p>
+            <a:r>
+              <a:rPr lang="en-US" sz="1400" b="1"/>
+              <a:t>Reference:</a:t>
+            </a:r>
+            <a:r>
+              <a:rPr lang="en-US" sz="1400"/>
+              <a:t> 中村和幸 (2017), 数理解析研究所講究録 2057, 59–66</a:t>
+            </a:r>
+            <a:endParaRPr lang="en-US"/>
+          </a:p>
+        </p:txBody>
+      </p:sp>
     </p:spTree>
   </p:cSld>
   <p:clrMapOvr>
@@ -14612,7 +14745,7 @@
 </file>
 
 <file path=ppt/slides/slide52.xml><?xml version="1.0" encoding="utf-8"?>
-<p:sld xmlns:a="http://schemas.openxmlformats.org/drawingml/2006/main" xmlns:p="http://schemas.openxmlformats.org/presentationml/2006/main" xmlns:r="http://schemas.openxmlformats.org/officeDocument/2006/relationships">
+<p:sld xmlns:a="http://schemas.openxmlformats.org/drawingml/2006/main" xmlns:r="http://schemas.openxmlformats.org/officeDocument/2006/relationships" xmlns:p="http://schemas.openxmlformats.org/presentationml/2006/main">
   <p:cSld>
     <p:spTree>
       <p:nvGrpSpPr>
@@ -14620,7 +14753,14 @@
         <p:cNvGrpSpPr/>
         <p:nvPr/>
       </p:nvGrpSpPr>
-      <p:grpSpPr/>
+      <p:grpSpPr>
+        <a:xfrm>
+          <a:off x="0" y="0"/>
+          <a:ext cx="0" cy="0"/>
+          <a:chOff x="0" y="0"/>
+          <a:chExt cx="0" cy="0"/>
+        </a:xfrm>
+      </p:grpSpPr>
       <p:sp>
         <p:nvSpPr>
           <p:cNvPr id="2" name="Title 1"/>
@@ -14637,8 +14777,8 @@
           <a:lstStyle/>
           <a:p>
             <a:r>
-              <a:rPr sz="2600"/>
-              <a:t>等方背景が小さく出る理由：なだらかな光の分け方が決まらない</a:t>
+              <a:rPr sz="3400"/>
+              <a:t>参考文献</a:t>
             </a:r>
           </a:p>
         </p:txBody>
@@ -14656,101 +14796,68 @@
         <p:spPr>
           <a:xfrm>
             <a:off x="841248" y="1463040"/>
-            <a:ext cx="5852160" cy="5120640"/>
+            <a:ext cx="10515600" cy="4937760"/>
           </a:xfrm>
         </p:spPr>
         <p:txBody>
           <a:bodyPr/>
           <a:lstStyle/>
           <a:p>
-            <a:pPr/>
-            <a:r>
-              <a:rPr sz="1900"/>
-              <a:t>模様がなく、中心にも集まらない光が 3 つある</a:t>
-            </a:r>
-          </a:p>
-          <a:p>
-            <a:pPr lvl="1"/>
-            <a:r>
-              <a:rPr sz="1600"/>
-              <a:t>等方背景：どこを見ても同じ明るさ</a:t>
-            </a:r>
-          </a:p>
-          <a:p>
-            <a:pPr lvl="1"/>
-            <a:r>
-              <a:rPr sz="1600"/>
-              <a:t>Loop I（近い殻）：太陽が殻の中にいるので、空全体をゆるやかに照らす</a:t>
-            </a:r>
-          </a:p>
-          <a:p>
-            <a:pPr lvl="1"/>
-            <a:r>
-              <a:rPr sz="1600"/>
-              <a:t>ICS：横方向にはほとんど暗くならない</a:t>
-            </a:r>
-          </a:p>
-          <a:p>
-            <a:pPr/>
-            <a:r>
-              <a:rPr sz="1900"/>
-              <a:t>形が似ているので、なだらかな光を 3 つにどう分けるかが写真から決まらない</a:t>
-            </a:r>
-          </a:p>
-          <a:p>
-            <a:pPr lvl="1"/>
-            <a:r>
-              <a:rPr sz="1600"/>
-              <a:t>決まるのは 3 つの合計だけ。たとえ：3 つのコップの水は、合計は量れても、どれに何杯かは分からない</a:t>
-            </a:r>
-          </a:p>
-          <a:p>
-            <a:pPr/>
-            <a:r>
-              <a:rPr sz="1900"/>
-              <a:t>等方背景が Totani より小さいのは、分け方がたまたまそうなったため</a:t>
-            </a:r>
-          </a:p>
-          <a:p>
-            <a:pPr lvl="1"/>
-            <a:r>
-              <a:rPr sz="1600"/>
-              <a:t>空の上の方だけで計算すると、等方背景が戻る（7 月に確認）</a:t>
-            </a:r>
-          </a:p>
-          <a:p>
-            <a:pPr/>
-            <a:r>
-              <a:rPr sz="1900"/>
-              <a:t>ハローだけは中心に集まるので、この分け方の問題とは別</a:t>
-            </a:r>
-          </a:p>
-        </p:txBody>
-      </p:sp>
-      <p:pic>
-        <p:nvPicPr>
-          <p:cNvPr id="4" name="Picture 3" descr="fig_smooth_lamps.png"/>
-          <p:cNvPicPr>
-            <a:picLocks noChangeAspect="1"/>
-          </p:cNvPicPr>
-          <p:nvPr/>
-        </p:nvPicPr>
-        <p:blipFill>
-          <a:blip r:embed="rId2"/>
-          <a:stretch>
-            <a:fillRect/>
-          </a:stretch>
-        </p:blipFill>
-        <p:spPr>
-          <a:xfrm>
-            <a:off x="6812280" y="1828800"/>
-            <a:ext cx="5120640" cy="3840480"/>
-          </a:xfrm>
-          <a:prstGeom prst="rect">
-            <a:avLst/>
-          </a:prstGeom>
-        </p:spPr>
-      </p:pic>
+            <a:r>
+              <a:rPr sz="1800"/>
+              <a:t>T. Totani (2025), arXiv:2507.07209</a:t>
+            </a:r>
+          </a:p>
+          <a:p>
+            <a:r>
+              <a:rPr sz="1800"/>
+              <a:t>Bertólez-Martínez, Hooper &amp; Khatee Zathul (2026), arXiv:2609.20944</a:t>
+            </a:r>
+          </a:p>
+          <a:p>
+            <a:r>
+              <a:rPr sz="1800"/>
+              <a:t>S. S. Wilks (1938), Ann. Math. Stat. 9, 60</a:t>
+            </a:r>
+          </a:p>
+          <a:p>
+            <a:r>
+              <a:rPr sz="1800"/>
+              <a:t>D. Foreman-Mackey et al. (2013), PASP 125, 306</a:t>
+            </a:r>
+          </a:p>
+          <a:p>
+            <a:r>
+              <a:rPr sz="1800"/>
+              <a:t>I. V. Moskalenko &amp; A. W. Strong (2000), ApJ 528, 357</a:t>
+            </a:r>
+          </a:p>
+          <a:p>
+            <a:r>
+              <a:rPr sz="1800"/>
+              <a:t>B. Efron &amp; R. J. Tibshirani (1993), An Introduction to the Bootstrap</a:t>
+            </a:r>
+          </a:p>
+          <a:p>
+            <a:r>
+              <a:rPr sz="1800"/>
+              <a:t>A. B. Pace (2025), Open J. Astrophys. 8, 142</a:t>
+            </a:r>
+          </a:p>
+          <a:p>
+            <a:r>
+              <a:rPr sz="1800"/>
+              <a:t>A. B. Pace &amp; L. E. Strigari (2019), MNRAS 482, 3480</a:t>
+            </a:r>
+          </a:p>
+          <a:p>
+            <a:r>
+              <a:rPr sz="1800"/>
+              <a:t>中村和幸 (2017), 数理解析研究所講究録 2057, 59–66</a:t>
+            </a:r>
+          </a:p>
+        </p:txBody>
+      </p:sp>
     </p:spTree>
   </p:cSld>
   <p:clrMapOvr>
@@ -14760,7 +14867,7 @@
 </file>
 
 <file path=ppt/slides/slide6.xml><?xml version="1.0" encoding="utf-8"?>
-<p:sld xmlns:a="http://schemas.openxmlformats.org/drawingml/2006/main" xmlns:p="http://schemas.openxmlformats.org/presentationml/2006/main" xmlns:r="http://schemas.openxmlformats.org/officeDocument/2006/relationships">
+<p:sld xmlns:a="http://schemas.openxmlformats.org/drawingml/2006/main" xmlns:r="http://schemas.openxmlformats.org/officeDocument/2006/relationships" xmlns:p="http://schemas.openxmlformats.org/presentationml/2006/main">
   <p:cSld>
     <p:spTree>
       <p:nvGrpSpPr>
@@ -14768,7 +14875,14 @@
         <p:cNvGrpSpPr/>
         <p:nvPr/>
       </p:nvGrpSpPr>
-      <p:grpSpPr/>
+      <p:grpSpPr>
+        <a:xfrm>
+          <a:off x="0" y="0"/>
+          <a:ext cx="0" cy="0"/>
+          <a:chOff x="0" y="0"/>
+          <a:chExt cx="0" cy="0"/>
+        </a:xfrm>
+      </p:grpSpPr>
       <p:sp>
         <p:nvSpPr>
           <p:cNvPr id="2" name="Title 1"/>
@@ -14811,14 +14925,12 @@
           <a:bodyPr/>
           <a:lstStyle/>
           <a:p>
-            <a:pPr/>
             <a:r>
               <a:rPr sz="1800"/>
               <a:t>宇宙線が、星と星の間のガス（主に水素）にぶつかって出すガンマ線</a:t>
             </a:r>
           </a:p>
           <a:p>
-            <a:pPr/>
             <a:r>
               <a:rPr sz="1800"/>
               <a:t>π⁰ 崩壊</a:t>
@@ -14832,7 +14944,6 @@
             </a:r>
           </a:p>
           <a:p>
-            <a:pPr/>
             <a:r>
               <a:rPr sz="1800"/>
               <a:t>制動放射</a:t>
@@ -14846,7 +14957,6 @@
             </a:r>
           </a:p>
           <a:p>
-            <a:pPr/>
             <a:r>
               <a:rPr sz="1800"/>
               <a:t>型紙：GALPROP で計算。2 つの比は GALPROP の値に固定して 1 枚</a:t>
@@ -14860,7 +14970,6 @@
             </a:r>
           </a:p>
           <a:p>
-            <a:pPr/>
             <a:r>
               <a:rPr sz="1800"/>
               <a:t>倍率：0 以上、最初は 1</a:t>
@@ -14877,7 +14986,7 @@
           <p:nvPr/>
         </p:nvPicPr>
         <p:blipFill>
-          <a:blip r:embed="rId2"/>
+          <a:blip r:embed="rId3"/>
           <a:stretch>
             <a:fillRect/>
           </a:stretch>
@@ -14941,7 +15050,7 @@
 </file>
 
 <file path=ppt/slides/slide7.xml><?xml version="1.0" encoding="utf-8"?>
-<p:sld xmlns:a="http://schemas.openxmlformats.org/drawingml/2006/main" xmlns:p="http://schemas.openxmlformats.org/presentationml/2006/main" xmlns:r="http://schemas.openxmlformats.org/officeDocument/2006/relationships">
+<p:sld xmlns:a="http://schemas.openxmlformats.org/drawingml/2006/main" xmlns:r="http://schemas.openxmlformats.org/officeDocument/2006/relationships" xmlns:p="http://schemas.openxmlformats.org/presentationml/2006/main">
   <p:cSld>
     <p:spTree>
       <p:nvGrpSpPr>
@@ -14949,7 +15058,14 @@
         <p:cNvGrpSpPr/>
         <p:nvPr/>
       </p:nvGrpSpPr>
-      <p:grpSpPr/>
+      <p:grpSpPr>
+        <a:xfrm>
+          <a:off x="0" y="0"/>
+          <a:ext cx="0" cy="0"/>
+          <a:chOff x="0" y="0"/>
+          <a:chExt cx="0" cy="0"/>
+        </a:xfrm>
+      </p:grpSpPr>
       <p:sp>
         <p:nvSpPr>
           <p:cNvPr id="2" name="Title 1"/>
@@ -14992,7 +15108,6 @@
           <a:bodyPr/>
           <a:lstStyle/>
           <a:p>
-            <a:pPr/>
             <a:r>
               <a:rPr sz="1800"/>
               <a:t>宇宙線の電子が、まわりの光にぶつかってガンマ線に変える</a:t>
@@ -15006,7 +15121,6 @@
             </a:r>
           </a:p>
           <a:p>
-            <a:pPr/>
             <a:r>
               <a:rPr sz="1800"/>
               <a:t>たとえ：速いボール（電子）が軽いピンポン玉（光）をはね飛ばす</a:t>
@@ -15020,7 +15134,6 @@
             </a:r>
           </a:p>
           <a:p>
-            <a:pPr/>
             <a:r>
               <a:rPr sz="1800"/>
               <a:t>星の光は銀河の中心ほど多い</a:t>
@@ -15034,21 +15147,18 @@
             </a:r>
           </a:p>
           <a:p>
-            <a:pPr/>
             <a:r>
               <a:rPr sz="1800"/>
               <a:t>型紙：GALPROP で計算</a:t>
             </a:r>
           </a:p>
           <a:p>
-            <a:pPr/>
             <a:r>
               <a:rPr sz="1800"/>
               <a:t>倍率：0 以上、最初は 1</a:t>
             </a:r>
           </a:p>
           <a:p>
-            <a:pPr/>
             <a:r>
               <a:rPr sz="1800"/>
               <a:t>ハローと形が似ている（縮退の原因）</a:t>
@@ -15065,7 +15175,7 @@
           <p:nvPr/>
         </p:nvPicPr>
         <p:blipFill>
-          <a:blip r:embed="rId2"/>
+          <a:blip r:embed="rId3"/>
           <a:stretch>
             <a:fillRect/>
           </a:stretch>
@@ -15129,7 +15239,7 @@
 </file>
 
 <file path=ppt/slides/slide8.xml><?xml version="1.0" encoding="utf-8"?>
-<p:sld xmlns:a="http://schemas.openxmlformats.org/drawingml/2006/main" xmlns:p="http://schemas.openxmlformats.org/presentationml/2006/main" xmlns:r="http://schemas.openxmlformats.org/officeDocument/2006/relationships">
+<p:sld xmlns:a="http://schemas.openxmlformats.org/drawingml/2006/main" xmlns:r="http://schemas.openxmlformats.org/officeDocument/2006/relationships" xmlns:p="http://schemas.openxmlformats.org/presentationml/2006/main">
   <p:cSld>
     <p:spTree>
       <p:nvGrpSpPr>
@@ -15137,7 +15247,14 @@
         <p:cNvGrpSpPr/>
         <p:nvPr/>
       </p:nvGrpSpPr>
-      <p:grpSpPr/>
+      <p:grpSpPr>
+        <a:xfrm>
+          <a:off x="0" y="0"/>
+          <a:ext cx="0" cy="0"/>
+          <a:chOff x="0" y="0"/>
+          <a:chExt cx="0" cy="0"/>
+        </a:xfrm>
+      </p:grpSpPr>
       <p:sp>
         <p:nvSpPr>
           <p:cNvPr id="2" name="Title 1"/>
@@ -15180,7 +15297,6 @@
           <a:bodyPr/>
           <a:lstStyle/>
           <a:p>
-            <a:pPr/>
             <a:r>
               <a:rPr sz="1800"/>
               <a:t>一つ一つ位置が分かっている天体</a:t>
@@ -15194,7 +15310,6 @@
             </a:r>
           </a:p>
           <a:p>
-            <a:pPr/>
             <a:r>
               <a:rPr sz="1800"/>
               <a:t>型紙：Fermi-LAT の天体カタログ（4FGL-DR4）から作る</a:t>
@@ -15215,21 +15330,18 @@
             </a:r>
           </a:p>
           <a:p>
-            <a:pPr/>
             <a:r>
               <a:rPr sz="1800"/>
               <a:t>全部の点源をまとめて 1 枚、倍率 1 個</a:t>
             </a:r>
           </a:p>
           <a:p>
-            <a:pPr/>
             <a:r>
               <a:rPr sz="1800"/>
               <a:t>倍率：0 以上、最初は 1</a:t>
             </a:r>
           </a:p>
           <a:p>
-            <a:pPr/>
             <a:r>
               <a:rPr sz="1800"/>
               <a:t>大きく広がった天体（拡張源）は解析から外す</a:t>
@@ -15253,7 +15365,7 @@
           <p:nvPr/>
         </p:nvPicPr>
         <p:blipFill>
-          <a:blip r:embed="rId2"/>
+          <a:blip r:embed="rId3"/>
           <a:stretch>
             <a:fillRect/>
           </a:stretch>
@@ -15317,7 +15429,7 @@
 </file>
 
 <file path=ppt/slides/slide9.xml><?xml version="1.0" encoding="utf-8"?>
-<p:sld xmlns:a="http://schemas.openxmlformats.org/drawingml/2006/main" xmlns:p="http://schemas.openxmlformats.org/presentationml/2006/main" xmlns:r="http://schemas.openxmlformats.org/officeDocument/2006/relationships">
+<p:sld xmlns:a="http://schemas.openxmlformats.org/drawingml/2006/main" xmlns:r="http://schemas.openxmlformats.org/officeDocument/2006/relationships" xmlns:p="http://schemas.openxmlformats.org/presentationml/2006/main">
   <p:cSld>
     <p:spTree>
       <p:nvGrpSpPr>
@@ -15325,7 +15437,14 @@
         <p:cNvGrpSpPr/>
         <p:nvPr/>
       </p:nvGrpSpPr>
-      <p:grpSpPr/>
+      <p:grpSpPr>
+        <a:xfrm>
+          <a:off x="0" y="0"/>
+          <a:ext cx="0" cy="0"/>
+          <a:chOff x="0" y="0"/>
+          <a:chExt cx="0" cy="0"/>
+        </a:xfrm>
+      </p:grpSpPr>
       <p:sp>
         <p:nvSpPr>
           <p:cNvPr id="2" name="Title 1"/>
@@ -15368,7 +15487,6 @@
           <a:bodyPr/>
           <a:lstStyle/>
           <a:p>
-            <a:pPr/>
             <a:r>
               <a:rPr sz="1800"/>
               <a:t>電波で見える、空の 100° 以上に広がる巨大な輪っか</a:t>
@@ -15382,7 +15500,6 @@
             </a:r>
           </a:p>
           <a:p>
-            <a:pPr/>
             <a:r>
               <a:rPr sz="1800"/>
               <a:t>正体は未確定</a:t>
@@ -15396,7 +15513,6 @@
             </a:r>
           </a:p>
           <a:p>
-            <a:pPr/>
             <a:r>
               <a:rPr sz="1800"/>
               <a:t>型紙：近くの超新星の残骸とみなした形</a:t>
@@ -15417,7 +15533,6 @@
             </a:r>
           </a:p>
           <a:p>
-            <a:pPr/>
             <a:r>
               <a:rPr sz="1800"/>
               <a:t>2 つの殻に、別々の倍率（0 以上、最初は 0）</a:t>
@@ -15434,7 +15549,7 @@
           <p:nvPr/>
         </p:nvPicPr>
         <p:blipFill>
-          <a:blip r:embed="rId2"/>
+          <a:blip r:embed="rId3"/>
           <a:stretch>
             <a:fillRect/>
           </a:stretch>
@@ -15458,7 +15573,7 @@
           <p:nvPr/>
         </p:nvPicPr>
         <p:blipFill>
-          <a:blip r:embed="rId3"/>
+          <a:blip r:embed="rId4"/>
           <a:stretch>
             <a:fillRect/>
           </a:stretch>

--- a/slides/2026-10-03_研究進捗報告_claude.pptx
+++ b/slides/2026-10-03_研究進捗報告_claude.pptx
@@ -190,7 +190,7 @@
   <pc:docChgLst>
     <pc:chgData name="202304239" userId="ab1adf7a-b8eb-4038-b404-de23e20d8a3a" providerId="ADAL" clId="{6C0E59ED-D716-49AF-B2FA-B94E7B8E5A8C}"/>
     <pc:docChg chg="custSel modSld">
-      <pc:chgData name="202304239" userId="ab1adf7a-b8eb-4038-b404-de23e20d8a3a" providerId="ADAL" clId="{6C0E59ED-D716-49AF-B2FA-B94E7B8E5A8C}" dt="2026-10-03T03:37:00.554" v="38" actId="20577"/>
+      <pc:chgData name="202304239" userId="ab1adf7a-b8eb-4038-b404-de23e20d8a3a" providerId="ADAL" clId="{6C0E59ED-D716-49AF-B2FA-B94E7B8E5A8C}" dt="2026-10-03T03:37:06.765" v="53" actId="20577"/>
       <pc:docMkLst>
         <pc:docMk/>
       </pc:docMkLst>
@@ -255,13 +255,13 @@
         </pc:picChg>
       </pc:sldChg>
       <pc:sldChg chg="modSp mod">
-        <pc:chgData name="202304239" userId="ab1adf7a-b8eb-4038-b404-de23e20d8a3a" providerId="ADAL" clId="{6C0E59ED-D716-49AF-B2FA-B94E7B8E5A8C}" dt="2026-10-03T03:37:00.554" v="38" actId="20577"/>
+        <pc:chgData name="202304239" userId="ab1adf7a-b8eb-4038-b404-de23e20d8a3a" providerId="ADAL" clId="{6C0E59ED-D716-49AF-B2FA-B94E7B8E5A8C}" dt="2026-10-03T03:37:06.765" v="53" actId="20577"/>
         <pc:sldMkLst>
           <pc:docMk/>
           <pc:sldMk cId="0" sldId="308"/>
         </pc:sldMkLst>
         <pc:spChg chg="mod">
-          <ac:chgData name="202304239" userId="ab1adf7a-b8eb-4038-b404-de23e20d8a3a" providerId="ADAL" clId="{6C0E59ED-D716-49AF-B2FA-B94E7B8E5A8C}" dt="2026-10-03T03:37:00.554" v="38" actId="20577"/>
+          <ac:chgData name="202304239" userId="ab1adf7a-b8eb-4038-b404-de23e20d8a3a" providerId="ADAL" clId="{6C0E59ED-D716-49AF-B2FA-B94E7B8E5A8C}" dt="2026-10-03T03:37:06.765" v="53" actId="20577"/>
           <ac:spMkLst>
             <pc:docMk/>
             <pc:sldMk cId="0" sldId="308"/>
@@ -8655,12 +8655,9 @@
             <a:endParaRPr lang="en-US" sz="2600"/>
           </a:p>
           <a:p>
-            <a:pPr marL="0" indent="0">
-              <a:buNone/>
-            </a:pPr>
             <a:r>
               <a:rPr lang="en-US" altLang="ja-JP" sz="2400"/>
-              <a:t>	ln L = Σ_i [ C_obs,i ln C_exp,i − C_exp,i ]</a:t>
+              <a:t>ln L = Σ_i [ C_obs,i ln C_exp,i − C_exp,i ]</a:t>
             </a:r>
           </a:p>
           <a:p>

--- a/slides/2026-10-03_研究進捗報告_claude.pptx
+++ b/slides/2026-10-03_研究進捗報告_claude.pptx
@@ -5,7 +5,7 @@
     <p:sldMasterId id="2147483648" r:id="rId1"/>
   </p:sldMasterIdLst>
   <p:notesMasterIdLst>
-    <p:notesMasterId r:id="rId54"/>
+    <p:notesMasterId r:id="rId53"/>
   </p:notesMasterIdLst>
   <p:sldIdLst>
     <p:sldId id="256" r:id="rId2"/>
@@ -20,46 +20,45 @@
     <p:sldId id="306" r:id="rId11"/>
     <p:sldId id="307" r:id="rId12"/>
     <p:sldId id="308" r:id="rId13"/>
-    <p:sldId id="260" r:id="rId14"/>
-    <p:sldId id="294" r:id="rId15"/>
-    <p:sldId id="261" r:id="rId16"/>
-    <p:sldId id="262" r:id="rId17"/>
-    <p:sldId id="295" r:id="rId18"/>
-    <p:sldId id="296" r:id="rId19"/>
-    <p:sldId id="297" r:id="rId20"/>
-    <p:sldId id="298" r:id="rId21"/>
-    <p:sldId id="309" r:id="rId22"/>
-    <p:sldId id="299" r:id="rId23"/>
-    <p:sldId id="300" r:id="rId24"/>
-    <p:sldId id="263" r:id="rId25"/>
-    <p:sldId id="264" r:id="rId26"/>
-    <p:sldId id="310" r:id="rId27"/>
-    <p:sldId id="311" r:id="rId28"/>
-    <p:sldId id="265" r:id="rId29"/>
-    <p:sldId id="266" r:id="rId30"/>
-    <p:sldId id="267" r:id="rId31"/>
-    <p:sldId id="268" r:id="rId32"/>
-    <p:sldId id="269" r:id="rId33"/>
-    <p:sldId id="271" r:id="rId34"/>
-    <p:sldId id="272" r:id="rId35"/>
-    <p:sldId id="273" r:id="rId36"/>
-    <p:sldId id="274" r:id="rId37"/>
-    <p:sldId id="275" r:id="rId38"/>
-    <p:sldId id="276" r:id="rId39"/>
-    <p:sldId id="277" r:id="rId40"/>
-    <p:sldId id="278" r:id="rId41"/>
-    <p:sldId id="279" r:id="rId42"/>
-    <p:sldId id="280" r:id="rId43"/>
-    <p:sldId id="281" r:id="rId44"/>
-    <p:sldId id="282" r:id="rId45"/>
-    <p:sldId id="283" r:id="rId46"/>
-    <p:sldId id="284" r:id="rId47"/>
-    <p:sldId id="285" r:id="rId48"/>
-    <p:sldId id="286" r:id="rId49"/>
-    <p:sldId id="287" r:id="rId50"/>
-    <p:sldId id="288" r:id="rId51"/>
-    <p:sldId id="289" r:id="rId52"/>
-    <p:sldId id="290" r:id="rId53"/>
+    <p:sldId id="294" r:id="rId14"/>
+    <p:sldId id="261" r:id="rId15"/>
+    <p:sldId id="262" r:id="rId16"/>
+    <p:sldId id="295" r:id="rId17"/>
+    <p:sldId id="296" r:id="rId18"/>
+    <p:sldId id="297" r:id="rId19"/>
+    <p:sldId id="298" r:id="rId20"/>
+    <p:sldId id="309" r:id="rId21"/>
+    <p:sldId id="299" r:id="rId22"/>
+    <p:sldId id="300" r:id="rId23"/>
+    <p:sldId id="263" r:id="rId24"/>
+    <p:sldId id="264" r:id="rId25"/>
+    <p:sldId id="310" r:id="rId26"/>
+    <p:sldId id="311" r:id="rId27"/>
+    <p:sldId id="265" r:id="rId28"/>
+    <p:sldId id="266" r:id="rId29"/>
+    <p:sldId id="267" r:id="rId30"/>
+    <p:sldId id="268" r:id="rId31"/>
+    <p:sldId id="269" r:id="rId32"/>
+    <p:sldId id="271" r:id="rId33"/>
+    <p:sldId id="272" r:id="rId34"/>
+    <p:sldId id="273" r:id="rId35"/>
+    <p:sldId id="274" r:id="rId36"/>
+    <p:sldId id="275" r:id="rId37"/>
+    <p:sldId id="276" r:id="rId38"/>
+    <p:sldId id="277" r:id="rId39"/>
+    <p:sldId id="278" r:id="rId40"/>
+    <p:sldId id="279" r:id="rId41"/>
+    <p:sldId id="280" r:id="rId42"/>
+    <p:sldId id="281" r:id="rId43"/>
+    <p:sldId id="282" r:id="rId44"/>
+    <p:sldId id="283" r:id="rId45"/>
+    <p:sldId id="284" r:id="rId46"/>
+    <p:sldId id="285" r:id="rId47"/>
+    <p:sldId id="286" r:id="rId48"/>
+    <p:sldId id="287" r:id="rId49"/>
+    <p:sldId id="288" r:id="rId50"/>
+    <p:sldId id="289" r:id="rId51"/>
+    <p:sldId id="290" r:id="rId52"/>
   </p:sldIdLst>
   <p:sldSz cx="12192000" cy="6858000"/>
   <p:notesSz cx="6858000" cy="9144000"/>
@@ -189,8 +188,8 @@
 <pc:chgInfo xmlns:a="http://schemas.openxmlformats.org/drawingml/2006/main" xmlns:r="http://schemas.openxmlformats.org/officeDocument/2006/relationships" xmlns:ac="http://schemas.microsoft.com/office/drawing/2013/main/command" xmlns:pc="http://schemas.microsoft.com/office/powerpoint/2013/main/command">
   <pc:docChgLst>
     <pc:chgData name="202304239" userId="ab1adf7a-b8eb-4038-b404-de23e20d8a3a" providerId="ADAL" clId="{6C0E59ED-D716-49AF-B2FA-B94E7B8E5A8C}"/>
-    <pc:docChg chg="custSel modSld">
-      <pc:chgData name="202304239" userId="ab1adf7a-b8eb-4038-b404-de23e20d8a3a" providerId="ADAL" clId="{6C0E59ED-D716-49AF-B2FA-B94E7B8E5A8C}" dt="2026-10-03T03:37:06.765" v="53" actId="20577"/>
+    <pc:docChg chg="custSel delSld modSld">
+      <pc:chgData name="202304239" userId="ab1adf7a-b8eb-4038-b404-de23e20d8a3a" providerId="ADAL" clId="{6C0E59ED-D716-49AF-B2FA-B94E7B8E5A8C}" dt="2026-10-03T03:37:35.283" v="54" actId="47"/>
       <pc:docMkLst>
         <pc:docMk/>
       </pc:docMkLst>
@@ -239,8 +238,8 @@
           </ac:spMkLst>
         </pc:spChg>
       </pc:sldChg>
-      <pc:sldChg chg="delSp mod">
-        <pc:chgData name="202304239" userId="ab1adf7a-b8eb-4038-b404-de23e20d8a3a" providerId="ADAL" clId="{6C0E59ED-D716-49AF-B2FA-B94E7B8E5A8C}" dt="2026-10-03T03:36:34.391" v="30" actId="478"/>
+      <pc:sldChg chg="delSp del mod">
+        <pc:chgData name="202304239" userId="ab1adf7a-b8eb-4038-b404-de23e20d8a3a" providerId="ADAL" clId="{6C0E59ED-D716-49AF-B2FA-B94E7B8E5A8C}" dt="2026-10-03T03:37:35.283" v="54" actId="47"/>
         <pc:sldMkLst>
           <pc:docMk/>
           <pc:sldMk cId="0" sldId="260"/>
@@ -908,17 +907,27 @@
           <a:lstStyle/>
           <a:p>
             <a:r>
-              <a:t>ポアソン分布: 平均 λ のとき、n 個来る確率は λ^n e^(−λ) / n!。その対数を全セルで足したものが ln L (n に依存する定数 ln n! は省略)。</a:t>
-            </a:r>
-          </a:p>
-          <a:p>
-            <a:r>
-              <a:t>銀河面を除いた有効なセルは 120 個。セルを 10° と大きくとるのは、望遠鏡のぼやけ (PSF) よりずっと大きく、PSF の畳み込みを省略できるため (Totani と同じ)。</a:t>
-            </a:r>
-          </a:p>
-          <a:p>
-            <a:r>
-              <a:t>最大化は Totani (2025) §2.2 と同じく MCMC (emcee) で行い、歩いた中で ln L が最大の点を最良値とする。</a:t>
+              <a:t>たとえ: 霧で何も見えない山の上で、一番高い場所を探したい。手元には高度計 (尤度) しかない。</a:t>
+            </a:r>
+          </a:p>
+          <a:p>
+            <a:r>
+              <a:t>歩く人 (MCMC) は、一歩ずつ足を出して高度計を見る。上りなら必ずその方向へ進み、下りでもたまに進む。下りにも進むのは、山頂で止まらずに山の広がり (どこまでが十分高いか) も知るため。</a:t>
+            </a:r>
+          </a:p>
+          <a:p>
+            <a:r>
+              <a:t>歩き終わったら、記録の中で一番高かった地点が最良の倍率、よく歩き回った範囲の幅が誤差になる。</a:t>
+            </a:r>
+          </a:p>
+          <a:p>
+            <a:r>
+              <a:t>ここでの「山」は 9 次元 (倍率が 9 個)。紙に描けないので、歩いて調べるしかない。</a:t>
+            </a:r>
+          </a:p>
+          <a:p>
+            <a:r>
+              <a:t>Totani (2025) §2.2: 最良値と統計誤差を、尤度を MCMC で最大化して求める。本研究も同じ (10/2 に揃えた)。</a:t>
             </a:r>
           </a:p>
         </p:txBody>
@@ -988,27 +997,22 @@
           <a:lstStyle/>
           <a:p>
             <a:r>
-              <a:t>たとえ: 霧で何も見えない山の上で、一番高い場所を探したい。手元には高度計 (尤度) しかない。</a:t>
-            </a:r>
-          </a:p>
-          <a:p>
-            <a:r>
-              <a:t>歩く人 (MCMC) は、一歩ずつ足を出して高度計を見る。上りなら必ずその方向へ進み、下りでもたまに進む。下りにも進むのは、山頂で止まらずに山の広がり (どこまでが十分高いか) も知るため。</a:t>
-            </a:r>
-          </a:p>
-          <a:p>
-            <a:r>
-              <a:t>歩き終わったら、記録の中で一番高かった地点が最良の倍率、よく歩き回った範囲の幅が誤差になる。</a:t>
-            </a:r>
-          </a:p>
-          <a:p>
-            <a:r>
-              <a:t>ここでの「山」は 9 次元 (倍率が 9 個)。紙に描けないので、歩いて調べるしかない。</a:t>
-            </a:r>
-          </a:p>
-          <a:p>
-            <a:r>
-              <a:t>Totani (2025) §2.2: 最良値と統計誤差を、尤度を MCMC で最大化して求める。本研究も同じ (10/2 に揃えた)。</a:t>
+              <a:t>「なし」は「あり」の特別な場合 (ハローの倍率 = 0) なので、入れ子のモデル。入れ子なら Δln L ≥ 0。</a:t>
+            </a:r>
+          </a:p>
+          <a:p>
+            <a:r>
+              <a:t>Wilks の定理: 帰無仮説 (ハローなし) が正しいとき、2Δln L は自由度 1 の χ² 分布。だから √(2Δln L) が「標準正規分布で何σ」に対応する。</a:t>
+            </a:r>
+          </a:p>
+          <a:p>
+            <a:r>
+              <a:t>定理の前提: データが多い (漸近的)、モデルが正しい、など。モデル (型紙) が間違っていると成り立たない。</a:t>
+            </a:r>
+          </a:p>
+          <a:p>
+            <a:r>
+              <a:t>Totani との関係: Totani (2025) Fig. 9 はハローあり・なしの ln L の差 (Δln L) を示しており、本文の 13–19σ はそれを σ = √(2Δln L) で σ に直した値。Totani は「Wilks の定理」という言葉は書いていないが、この換算はガンマ線天文学で標準 (2Δln L は TS = test statistic と呼ばれ、EGRET の解析 Mattox et al. 1996, ApJ 461, 396 から使われている)。本研究は Totani と同じ換算を使っている。</a:t>
             </a:r>
           </a:p>
         </p:txBody>
@@ -1078,22 +1082,22 @@
           <a:lstStyle/>
           <a:p>
             <a:r>
-              <a:t>「なし」は「あり」の特別な場合 (ハローの倍率 = 0) なので、入れ子のモデル。入れ子なら Δln L ≥ 0。</a:t>
-            </a:r>
-          </a:p>
-          <a:p>
-            <a:r>
-              <a:t>Wilks の定理: 帰無仮説 (ハローなし) が正しいとき、2Δln L は自由度 1 の χ² 分布。だから √(2Δln L) が「標準正規分布で何σ」に対応する。</a:t>
-            </a:r>
-          </a:p>
-          <a:p>
-            <a:r>
-              <a:t>定理の前提: データが多い (漸近的)、モデルが正しい、など。モデル (型紙) が間違っていると成り立たない。</a:t>
-            </a:r>
-          </a:p>
-          <a:p>
-            <a:r>
-              <a:t>Totani との関係: Totani (2025) Fig. 9 はハローあり・なしの ln L の差 (Δln L) を示しており、本文の 13–19σ はそれを σ = √(2Δln L) で σ に直した値。Totani は「Wilks の定理」という言葉は書いていないが、この換算はガンマ線天文学で標準 (2Δln L は TS = test statistic と呼ばれ、EGRET の解析 Mattox et al. 1996, ApJ 461, 396 から使われている)。本研究は Totani と同じ換算を使っている。</a:t>
+              <a:t>MCMC (マルコフ連鎖モンテカルロ): 「今いる点の近くに一歩動いてみて、尤度が上がれば進む、下がっても確率的に進む」を繰り返す。長く歩くと、歩いた場所の分布が事後分布になる。</a:t>
+            </a:r>
+          </a:p>
+          <a:p>
+            <a:r>
+              <a:t>事前分布は一様 (倍率の符号の制約と、広い範囲の制限だけ)。</a:t>
+            </a:r>
+          </a:p>
+          <a:p>
+            <a:r>
+              <a:t>emcee は、複数の歩行者が互いの位置を使って次の一歩を決める方式 (affine-invariant ensemble sampler)。</a:t>
+            </a:r>
+          </a:p>
+          <a:p>
+            <a:r>
+              <a:t>自己相関時間 τ: 何歩離れたら前の位置を「忘れる」か。50τ 以上の長さは emcee の推奨。</a:t>
             </a:r>
           </a:p>
         </p:txBody>
@@ -1163,22 +1167,17 @@
           <a:lstStyle/>
           <a:p>
             <a:r>
-              <a:t>MCMC (マルコフ連鎖モンテカルロ): 「今いる点の近くに一歩動いてみて、尤度が上がれば進む、下がっても確率的に進む」を繰り返す。長く歩くと、歩いた場所の分布が事後分布になる。</a:t>
-            </a:r>
-          </a:p>
-          <a:p>
-            <a:r>
-              <a:t>事前分布は一様 (倍率の符号の制約と、広い範囲の制限だけ)。</a:t>
-            </a:r>
-          </a:p>
-          <a:p>
-            <a:r>
-              <a:t>emcee は、複数の歩行者が互いの位置を使って次の一歩を決める方式 (affine-invariant ensemble sampler)。</a:t>
-            </a:r>
-          </a:p>
-          <a:p>
-            <a:r>
-              <a:t>自己相関時間 τ: 何歩離れたら前の位置を「忘れる」か。50τ 以上の長さは emcee の推奨。</a:t>
+              <a:t>このスライドが「対応表」。この後のスライドは全部この言葉で説明する。</a:t>
+            </a:r>
+          </a:p>
+          <a:p>
+            <a:r>
+              <a:t>9 次元の山は紙に描けない。だから地図全体を調べるのではなく、歩いて足あとを残し、足あとから山の形を知る。</a:t>
+            </a:r>
+          </a:p>
+          <a:p>
+            <a:r>
+              <a:t>スクショ候補: 点数 (高さ) を計算する関数 log_probability (653〜659 行)。コードは code/mcmc_fit_all_bins.py (Totani 方式の修正 cloud_reports/2026-10-02_totani_bestfit.patch を当てた後の行番号)。</a:t>
             </a:r>
           </a:p>
         </p:txBody>
@@ -1248,17 +1247,27 @@
           <a:lstStyle/>
           <a:p>
             <a:r>
-              <a:t>このスライドが「対応表」。この後のスライドは全部この言葉で説明する。</a:t>
-            </a:r>
-          </a:p>
-          <a:p>
-            <a:r>
-              <a:t>9 次元の山は紙に描けない。だから地図全体を調べるのではなく、歩いて足あとを残し、足あとから山の形を知る。</a:t>
-            </a:r>
-          </a:p>
-          <a:p>
-            <a:r>
-              <a:t>スクショ候補: 点数 (高さ) を計算する関数 log_probability (653〜659 行)。コードは code/mcmc_fit_all_bins.py (Totani 方式の修正 cloud_reports/2026-10-02_totani_bestfit.patch を当てた後の行番号)。</a:t>
+              <a:t>ベイズの定理の読み方: 「データを見る前の考え (π: どこに入ってよいか)」に「データの当てはまり (L: 高度計)」を掛けると「データを見た後の考え (高さ)」になる。</a:t>
+            </a:r>
+          </a:p>
+          <a:p>
+            <a:r>
+              <a:t>今回の π は一様: 入ってよい範囲 (ガス・ICS などは 0 以上、全部 |f| ≤ 10⁶) なら同じ値、外なら 0。だから高さの形は高度計の読み (尤度) と同じになる。</a:t>
+            </a:r>
+          </a:p>
+          <a:p>
+            <a:r>
+              <a:t>P(D) は「海抜何メートルから測るか」の基準のようなもの。2 地点の高さを比べるときは、どちらにも同じ基準が入っているので割り算で消える。MCMC は比べることしかしないので、P(D) を計算しなくてよい。</a:t>
+            </a:r>
+          </a:p>
+          <a:p>
+            <a:r>
+              <a:t>対数にするのは、数が大きすぎたり小さすぎたりしてコンピュータで扱えなくなるのを防ぐため。</a:t>
+            </a:r>
+          </a:p>
+          <a:p>
+            <a:r>
+              <a:t>スクショ候補: log_prior (630 行、立ち入り禁止のチェック)、log_likelihood (647〜650 行、高度計)、log_probability (653 行、両方を足す)。コードは code/mcmc_fit_all_bins.py (Totani 方式の修正 cloud_reports/2026-10-02_totani_bestfit.patch を当てた後の行番号)。</a:t>
             </a:r>
           </a:p>
         </p:txBody>
@@ -1328,27 +1337,22 @@
           <a:lstStyle/>
           <a:p>
             <a:r>
-              <a:t>ベイズの定理の読み方: 「データを見る前の考え (π: どこに入ってよいか)」に「データの当てはまり (L: 高度計)」を掛けると「データを見た後の考え (高さ)」になる。</a:t>
-            </a:r>
-          </a:p>
-          <a:p>
-            <a:r>
-              <a:t>今回の π は一様: 入ってよい範囲 (ガス・ICS などは 0 以上、全部 |f| ≤ 10⁶) なら同じ値、外なら 0。だから高さの形は高度計の読み (尤度) と同じになる。</a:t>
-            </a:r>
-          </a:p>
-          <a:p>
-            <a:r>
-              <a:t>P(D) は「海抜何メートルから測るか」の基準のようなもの。2 地点の高さを比べるときは、どちらにも同じ基準が入っているので割り算で消える。MCMC は比べることしかしないので、P(D) を計算しなくてよい。</a:t>
-            </a:r>
-          </a:p>
-          <a:p>
-            <a:r>
-              <a:t>対数にするのは、数が大きすぎたり小さすぎたりしてコンピュータで扱えなくなるのを防ぐため。</a:t>
-            </a:r>
-          </a:p>
-          <a:p>
-            <a:r>
-              <a:t>スクショ候補: log_prior (630 行、立ち入り禁止のチェック)、log_likelihood (647〜650 行、高度計)、log_probability (653 行、両方を足す)。コードは code/mcmc_fit_all_bins.py (Totani 方式の修正 cloud_reports/2026-10-02_totani_bestfit.patch を当てた後の行番号)。</a:t>
+              <a:t>例: 今いる場所の高さが 100、足を出した先の高さが 80 なら r = 0.8。0〜1 の乱数を引いて 0.8 より小さければ (80% の確率で) 移る。高さが 10 なら r = 0.1 で、10% しか移らない。だから、低い場所にはめったに行かず、高い場所に長くいる。</a:t>
+            </a:r>
+          </a:p>
+          <a:p>
+            <a:r>
+              <a:t>長く歩くと「各場所にいた時間の割合」が「その場所の高さ」に比例するようになる (詳細つり合い)。だから足あとのヒストグラムが山の形 (事後分布) になる。</a:t>
+            </a:r>
+          </a:p>
+          <a:p>
+            <a:r>
+              <a:t>移らなかったときも今の場所をもう一度記録するのが大事。そうしないと、高い場所にとどまった回数が数えられない。</a:t>
+            </a:r>
+          </a:p>
+          <a:p>
+            <a:r>
+              <a:t>スクショ候補: 歩かせる部分 sampler.run_mcmc (877〜878 行)。メトロポリスの判定そのものは emcee の中にある。コードは code/mcmc_fit_all_bins.py (Totani 方式の修正 cloud_reports/2026-10-02_totani_bestfit.patch を当てた後の行番号)。</a:t>
             </a:r>
           </a:p>
         </p:txBody>
@@ -1418,22 +1422,22 @@
           <a:lstStyle/>
           <a:p>
             <a:r>
-              <a:t>例: 今いる場所の高さが 100、足を出した先の高さが 80 なら r = 0.8。0〜1 の乱数を引いて 0.8 より小さければ (80% の確率で) 移る。高さが 10 なら r = 0.1 で、10% しか移らない。だから、低い場所にはめったに行かず、高い場所に長くいる。</a:t>
-            </a:r>
-          </a:p>
-          <a:p>
-            <a:r>
-              <a:t>長く歩くと「各場所にいた時間の割合」が「その場所の高さ」に比例するようになる (詳細つり合い)。だから足あとのヒストグラムが山の形 (事後分布) になる。</a:t>
-            </a:r>
-          </a:p>
-          <a:p>
-            <a:r>
-              <a:t>移らなかったときも今の場所をもう一度記録するのが大事。そうしないと、高い場所にとどまった回数が数えられない。</a:t>
-            </a:r>
-          </a:p>
-          <a:p>
-            <a:r>
-              <a:t>スクショ候補: 歩かせる部分 sampler.run_mcmc (877〜878 行)。メトロポリスの判定そのものは emcee の中にある。コードは code/mcmc_fit_all_bins.py (Totani 方式の修正 cloud_reports/2026-10-02_totani_bestfit.patch を当てた後の行番号)。</a:t>
+              <a:t>実データではない、説明用のおもちゃの例。倍率が 1 個だけの山 (1 次元) を、平均 1.48・幅 0.075 の形だと仮定して 3000 歩歩かせた。</a:t>
+            </a:r>
+          </a:p>
+          <a:p>
+            <a:r>
+              <a:t>わざと山から離れた 1.2 から出発させたので、最初はふもとから登っていく。この登っている途中 (最初の 200 歩) は山の形と関係ないので捨てる (バーンイン)。</a:t>
+            </a:r>
+          </a:p>
+          <a:p>
+            <a:r>
+              <a:t>そのあとは山の上を行ったり来たりしている。足あとのヒストグラム (右の灰色) が、本当の山の形 (点線) と重なっている = 足あとから山の形が分かる。</a:t>
+            </a:r>
+          </a:p>
+          <a:p>
+            <a:r>
+              <a:t>図は slides/figs/plot_mcmc_toy.py で作った (コメント付き)。</a:t>
             </a:r>
           </a:p>
         </p:txBody>
@@ -1503,22 +1507,32 @@
           <a:lstStyle/>
           <a:p>
             <a:r>
-              <a:t>実データではない、説明用のおもちゃの例。倍率が 1 個だけの山 (1 次元) を、平均 1.48・幅 0.075 の形だと仮定して 3000 歩歩かせた。</a:t>
-            </a:r>
-          </a:p>
-          <a:p>
-            <a:r>
-              <a:t>わざと山から離れた 1.2 から出発させたので、最初はふもとから登っていく。この登っている途中 (最初の 200 歩) は山の形と関係ないので捨てる (バーンイン)。</a:t>
-            </a:r>
-          </a:p>
-          <a:p>
-            <a:r>
-              <a:t>そのあとは山の上を行ったり来たりしている。足あとのヒストグラム (右の灰色) が、本当の山の形 (点線) と重なっている = 足あとから山の形が分かる。</a:t>
-            </a:r>
-          </a:p>
-          <a:p>
-            <a:r>
-              <a:t>図は slides/figs/plot_mcmc_toy.py で作った (コメント付き)。</a:t>
+              <a:t>どの歩き方でも、正しく長く歩けば足あとの分布は同じ山の形 (事後分布) になる。違うのは、歩く速さ (効率) と、どんな山が得意か。</a:t>
+            </a:r>
+          </a:p>
+          <a:p>
+            <a:r>
+              <a:t>ギブス法: 9 個の倍率のうち 1 個だけを動かし、残り 8 個は止めておく。これを順番にくり返す。</a:t>
+            </a:r>
+          </a:p>
+          <a:p>
+            <a:r>
+              <a:t>ハミルトニアン MC (HMC): 山の傾き (尤度の微分) を使って、遠くまで一気に動く。パラメータが多いときに強い。</a:t>
+            </a:r>
+          </a:p>
+          <a:p>
+            <a:r>
+              <a:t>焼きなまし法: 金属をゆっくり冷やす「焼きなまし」が名前の由来。最初は下りにもよく進み、だんだん進みにくくして、最後は頂上で止まる。最良値を探す道具で、誤差は出ない。</a:t>
+            </a:r>
+          </a:p>
+          <a:p>
+            <a:r>
+              <a:t>歩けているかの確認 (歩き方の種類ではない): 受理率 (足を出したうち、実際に移った割合。emcee では 0.2〜0.5 くらいが目安。今回の 20.8 GeV は 0.42)、自己相関時間 τ (何歩で前の場所を忘れるか)。</a:t>
+            </a:r>
+          </a:p>
+          <a:p>
+            <a:r>
+              <a:t>emcee: Foreman-Mackey et al. (2013) の Python ライブラリ。中身は Goodman &amp; Weare (2010) のアンサンブル法 (ストレッチ移動)。歩く人数・歩数・捨てる歩数は Totani の論文に書かれていないので、本研究で決めた (32 人・6000 歩・最初の 2000 歩を捨てる)。</a:t>
             </a:r>
           </a:p>
         </p:txBody>
@@ -1668,32 +1682,22 @@
           <a:lstStyle/>
           <a:p>
             <a:r>
-              <a:t>どの歩き方でも、正しく長く歩けば足あとの分布は同じ山の形 (事後分布) になる。違うのは、歩く速さ (効率) と、どんな山が得意か。</a:t>
-            </a:r>
-          </a:p>
-          <a:p>
-            <a:r>
-              <a:t>ギブス法: 9 個の倍率のうち 1 個だけを動かし、残り 8 個は止めておく。これを順番にくり返す。</a:t>
-            </a:r>
-          </a:p>
-          <a:p>
-            <a:r>
-              <a:t>ハミルトニアン MC (HMC): 山の傾き (尤度の微分) を使って、遠くまで一気に動く。パラメータが多いときに強い。</a:t>
-            </a:r>
-          </a:p>
-          <a:p>
-            <a:r>
-              <a:t>焼きなまし法: 金属をゆっくり冷やす「焼きなまし」が名前の由来。最初は下りにもよく進み、だんだん進みにくくして、最後は頂上で止まる。最良値を探す道具で、誤差は出ない。</a:t>
-            </a:r>
-          </a:p>
-          <a:p>
-            <a:r>
-              <a:t>歩けているかの確認 (歩き方の種類ではない): 受理率 (足を出したうち、実際に移った割合。emcee では 0.2〜0.5 くらいが目安。今回の 20.8 GeV は 0.42)、自己相関時間 τ (何歩で前の場所を忘れるか)。</a:t>
-            </a:r>
-          </a:p>
-          <a:p>
-            <a:r>
-              <a:t>emcee: Foreman-Mackey et al. (2013) の Python ライブラリ。中身は Goodman &amp; Weare (2010) のアンサンブル法 (ストレッチ移動)。歩く人数・歩数・捨てる歩数は Totani の論文に書かれていないので、本研究で決めた (32 人・6000 歩・最初の 2000 歩を捨てる)。</a:t>
+              <a:t>細長い山: 仲間たちの散らばり方自体が「山が細長い方向」を表している。仲間のいる方向に沿って一歩を出すので、細長い山でも効率よく歩ける。</a:t>
+            </a:r>
+          </a:p>
+          <a:p>
+            <a:r>
+              <a:t>Z⁸ の 8 は「倍率の数 9 − 1」。線の上で伸び縮みさせた分、足を出せる場所の広さが変わるので、それを補正する。Z の範囲 1/2〜2 は emcee の決まった値 (a = 2)。</a:t>
+            </a:r>
+          </a:p>
+          <a:p>
+            <a:r>
+              <a:t>Totani と同じ初期値: 点源・GALPROP (ガス・ICS) = 1 倍、等方 = E²dN/dE 1e-4 相当、Loop I・バブル・ハロー = 0 (Totani §2.3)。</a:t>
+            </a:r>
+          </a:p>
+          <a:p>
+            <a:r>
+              <a:t>スクショ候補: 出発点を決める行 (868 行)、32 人で歩かせる emcee.EnsembleSampler (877 行)。コードは code/mcmc_fit_all_bins.py (Totani 方式の修正 cloud_reports/2026-10-02_totani_bestfit.patch を当てた後の行番号)。</a:t>
             </a:r>
           </a:p>
         </p:txBody>
@@ -1763,22 +1767,37 @@
           <a:lstStyle/>
           <a:p>
             <a:r>
-              <a:t>細長い山: 仲間たちの散らばり方自体が「山が細長い方向」を表している。仲間のいる方向に沿って一歩を出すので、細長い山でも効率よく歩ける。</a:t>
-            </a:r>
-          </a:p>
-          <a:p>
-            <a:r>
-              <a:t>Z⁸ の 8 は「倍率の数 9 − 1」。線の上で伸び縮みさせた分、足を出せる場所の広さが変わるので、それを補正する。Z の範囲 1/2〜2 は emcee の決まった値 (a = 2)。</a:t>
-            </a:r>
-          </a:p>
-          <a:p>
-            <a:r>
-              <a:t>Totani と同じ初期値: 点源・GALPROP (ガス・ICS) = 1 倍、等方 = E²dN/dE 1e-4 相当、Loop I・バブル・ハロー = 0 (Totani §2.3)。</a:t>
-            </a:r>
-          </a:p>
-          <a:p>
-            <a:r>
-              <a:t>スクショ候補: 出発点を決める行 (868 行)、32 人で歩かせる emcee.EnsembleSampler (877 行)。コードは code/mcmc_fit_all_bins.py (Totani 方式の修正 cloud_reports/2026-10-02_totani_bestfit.patch を当てた後の行番号)。</a:t>
+              <a:t>ハローなしの山: ハローの倍率を 0 に固定した 8 次元の山。ハローありの山 (9 次元) より低いか同じ。2 つの頂上の高さの差が Δln L。</a:t>
+            </a:r>
+          </a:p>
+          <a:p>
+            <a:r>
+              <a:t>頂上に届いているかの確認: 坂を登る方法 (勾配法) で頂上を求めて、一番高い足あととの差を調べた。13 ビンすべてで ln L の差 0.6 以下、有意度の差 0.28σ 以下。確認のためだけで、結果には使っていない。</a:t>
+            </a:r>
+          </a:p>
+          <a:p>
+            <a:r>
+              <a:t>長さの目安: 自己相関時間 τ (何歩離れたら前の場所を忘れるか) の 50 倍以上が推奨。20.8 GeV で τ ≈ 650 歩なので 3 万歩以上が理想だが、6000 歩。</a:t>
+            </a:r>
+          </a:p>
+          <a:p>
+            <a:r>
+              <a:t>数字はクラウドの計算機で、Totani と同じやり方で出した値 (cloud_reports/2026-10-02_totani_mode/)。</a:t>
+            </a:r>
+          </a:p>
+          <a:p>
+            <a:r>
+              <a:t>スクショ候補: 一番高い足あとを探す行 (879〜880 行)、誤差の 16〜84% (926 行)、有意度 (910 行)。コードは code/mcmc_fit_all_bins.py (Totani 方式の修正 cloud_reports/2026-10-02_totani_bestfit.patch を当てた後の行番号)。</a:t>
+            </a:r>
+          </a:p>
+          <a:p>
+            <a:r>
+              <a:t>なぜ最初を捨てるか: 出発点は Totani と同じ初期値で、山のふもとにある。最初のうちは頂上へ登っている途中なので、その足あとは「山の形」を表していない。だから誤差の計算からは外す (バーンイン)。一番高い足あと (最良値) は、捨てた分も含めて全部の中から探している。</a:t>
+            </a:r>
+          </a:p>
+          <a:p>
+            <a:r>
+              <a:t>捨てる歩数は本研究で決めた値 (Totani の論文には書かれていない)。最初は 400 歩だったが、歩く人数 (20/32/64)・乱数の種 (3 通り)・歩数 (6000/20000) を変えて確かめたところ、400 歩では誤差の上端が乱数の種によって 1.59〜1.89 とぶれたので、2000 歩に変えた (2000 歩ではどれも 1.56〜1.57。この確認は型紙の作り方が少し違う確認用の計算で、本番の 2000 歩の誤差は 1.42〜1.58)。最良値 1.51 と有意度 19.5σ は捨てる歩数によらず同じ。400 歩のときの誤差は 1.43〜1.61。</a:t>
             </a:r>
           </a:p>
         </p:txBody>
@@ -1848,37 +1867,12 @@
           <a:lstStyle/>
           <a:p>
             <a:r>
-              <a:t>ハローなしの山: ハローの倍率を 0 に固定した 8 次元の山。ハローありの山 (9 次元) より低いか同じ。2 つの頂上の高さの差が Δln L。</a:t>
-            </a:r>
-          </a:p>
-          <a:p>
-            <a:r>
-              <a:t>頂上に届いているかの確認: 坂を登る方法 (勾配法) で頂上を求めて、一番高い足あととの差を調べた。13 ビンすべてで ln L の差 0.6 以下、有意度の差 0.28σ 以下。確認のためだけで、結果には使っていない。</a:t>
-            </a:r>
-          </a:p>
-          <a:p>
-            <a:r>
-              <a:t>長さの目安: 自己相関時間 τ (何歩離れたら前の場所を忘れるか) の 50 倍以上が推奨。20.8 GeV で τ ≈ 650 歩なので 3 万歩以上が理想だが、6000 歩。</a:t>
-            </a:r>
-          </a:p>
-          <a:p>
-            <a:r>
-              <a:t>数字はクラウドの計算機で、Totani と同じやり方で出した値 (cloud_reports/2026-10-02_totani_mode/)。</a:t>
-            </a:r>
-          </a:p>
-          <a:p>
-            <a:r>
-              <a:t>スクショ候補: 一番高い足あとを探す行 (879〜880 行)、誤差の 16〜84% (926 行)、有意度 (910 行)。コードは code/mcmc_fit_all_bins.py (Totani 方式の修正 cloud_reports/2026-10-02_totani_bestfit.patch を当てた後の行番号)。</a:t>
-            </a:r>
-          </a:p>
-          <a:p>
-            <a:r>
-              <a:t>なぜ最初を捨てるか: 出発点は Totani と同じ初期値で、山のふもとにある。最初のうちは頂上へ登っている途中なので、その足あとは「山の形」を表していない。だから誤差の計算からは外す (バーンイン)。一番高い足あと (最良値) は、捨てた分も含めて全部の中から探している。</a:t>
-            </a:r>
-          </a:p>
-          <a:p>
-            <a:r>
-              <a:t>捨てる歩数は本研究で決めた値 (Totani の論文には書かれていない)。最初は 400 歩だったが、歩く人数 (20/32/64)・乱数の種 (3 通り)・歩数 (6000/20000) を変えて確かめたところ、400 歩では誤差の上端が乱数の種によって 1.59〜1.89 とぶれたので、2000 歩に変えた (2000 歩ではどれも 1.56〜1.57。この確認は型紙の作り方が少し違う確認用の計算で、本番の 2000 歩の誤差は 1.42〜1.58)。最良値 1.51 と有意度 19.5σ は捨てる歩数によらず同じ。400 歩のときの誤差は 1.43〜1.61。</a:t>
+              <a:t>青が本研究 (10/2 に Totani と同じやり方 = MCMC で最良値、で計算し直した。クラウドの計算機)、赤が Totani Fig. 9。本人 PC での確定値は後日。</a:t>
+            </a:r>
+          </a:p>
+          <a:p>
+            <a:r>
+              <a:t>ただしこの 19.5σ は Wilks の定理を信じた「名目の値」。後で較正する。</a:t>
             </a:r>
           </a:p>
         </p:txBody>
@@ -1948,12 +1942,17 @@
           <a:lstStyle/>
           <a:p>
             <a:r>
-              <a:t>青が本研究 (10/2 に Totani と同じやり方 = MCMC で最良値、で計算し直した。クラウドの計算機)、赤が Totani Fig. 9。本人 PC での確定値は後日。</a:t>
-            </a:r>
-          </a:p>
-          <a:p>
-            <a:r>
-              <a:t>ただしこの 19.5σ は Wilks の定理を信じた「名目の値」。後で較正する。</a:t>
+              <a:t>縮退: 2 つの成分の形が似ていて、どちらに光を割り振っても同じくらい合ってしまう状態。</a:t>
+            </a:r>
+          </a:p>
+          <a:p>
+            <a:r>
+              <a:t>たとえ: 部屋に電球 (ICS) がついていて、もう 1 つの光 (ハロー) を探している。写真では 2 つの光の形がほとんど同じなので、余った明るさが本当にもう 1 つの光なのか、電球が少し明るいだけなのか見分けにくい。</a:t>
+            </a:r>
+          </a:p>
+          <a:p>
+            <a:r>
+              <a:t>図: ICS の倍率 (GALPROP の予測の何倍か)。ハローなしでは全エネルギーで約 1.4〜1.6 倍でほぼ平ら (最良値)。ハローを入れると、ハローが効くビンでだけへこむ。</a:t>
             </a:r>
           </a:p>
         </p:txBody>
@@ -2023,17 +2022,32 @@
           <a:lstStyle/>
           <a:p>
             <a:r>
-              <a:t>縮退: 2 つの成分の形が似ていて、どちらに光を割り振っても同じくらい合ってしまう状態。</a:t>
-            </a:r>
-          </a:p>
-          <a:p>
-            <a:r>
-              <a:t>たとえ: 部屋に電球 (ICS) がついていて、もう 1 つの光 (ハロー) を探している。写真では 2 つの光の形がほとんど同じなので、余った明るさが本当にもう 1 つの光なのか、電球が少し明るいだけなのか見分けにくい。</a:t>
-            </a:r>
-          </a:p>
-          <a:p>
-            <a:r>
-              <a:t>図: ICS の倍率 (GALPROP の予測の何倍か)。ハローなしでは全エネルギーで約 1.4〜1.6 倍でほぼ平ら (最良値)。ハローを入れると、ハローが効くビンでだけへこむ。</a:t>
+              <a:t>図は 20.8 GeV の型紙そのもの (倍率は掛けていない)。ICS は GALPROP (galdef SLZ6R30T150C2)、ハローは NFW (Via Lactea II)。</a:t>
+            </a:r>
+          </a:p>
+          <a:p>
+            <a:r>
+              <a:t>縦方向 (経度を全部平均、|b| 25°→55°): ハロー 2.70 倍、ICS 2.60 倍暗くなる → ほぼ同じ。</a:t>
+            </a:r>
+          </a:p>
+          <a:p>
+            <a:r>
+              <a:t>横方向 (|b| = 20〜40° の帯、|l| 0°→40°): ハロー 2.67 倍、ICS 1.18 倍 → ここが違う。</a:t>
+            </a:r>
+          </a:p>
+          <a:p>
+            <a:r>
+              <a:t>ICS が横に広いのは、星の光と電子が銀河の円盤 (横に広い) に沿って多いため。ハローは丸い玉なので、どの向きにも同じように中心へ集まる。</a:t>
+            </a:r>
+          </a:p>
+          <a:p>
+            <a:r>
+              <a:t>太陽は銀河中心から 8 kpc 離れているので、どちらも空いっぱいに広がったぼんやりした光に見える。</a:t>
+            </a:r>
+          </a:p>
+          <a:p>
+            <a:r>
+              <a:t>作図: /home/arsei/slidework/make_profiles.py (2026-10-03、ローカル)</a:t>
             </a:r>
           </a:p>
         </p:txBody>
@@ -2103,32 +2117,32 @@
           <a:lstStyle/>
           <a:p>
             <a:r>
-              <a:t>図は 20.8 GeV の型紙そのもの (倍率は掛けていない)。ICS は GALPROP (galdef SLZ6R30T150C2)、ハローは NFW (Via Lactea II)。</a:t>
-            </a:r>
-          </a:p>
-          <a:p>
-            <a:r>
-              <a:t>縦方向 (経度を全部平均、|b| 25°→55°): ハロー 2.70 倍、ICS 2.60 倍暗くなる → ほぼ同じ。</a:t>
-            </a:r>
-          </a:p>
-          <a:p>
-            <a:r>
-              <a:t>横方向 (|b| = 20〜40° の帯、|l| 0°→40°): ハロー 2.67 倍、ICS 1.18 倍 → ここが違う。</a:t>
-            </a:r>
-          </a:p>
-          <a:p>
-            <a:r>
-              <a:t>ICS が横に広いのは、星の光と電子が銀河の円盤 (横に広い) に沿って多いため。ハローは丸い玉なので、どの向きにも同じように中心へ集まる。</a:t>
-            </a:r>
-          </a:p>
-          <a:p>
-            <a:r>
-              <a:t>太陽は銀河中心から 8 kpc 離れているので、どちらも空いっぱいに広がったぼんやりした光に見える。</a:t>
-            </a:r>
-          </a:p>
-          <a:p>
-            <a:r>
-              <a:t>作図: /home/arsei/slidework/make_profiles.py (2026-10-03、ローカル)</a:t>
+              <a:t>等方背景の倍率 (本研究 / Totani): 20 GeV 付近で約 0.4 倍、一番低いエネルギー (1.5 GeV) では v20 で約 1/200。</a:t>
+            </a:r>
+          </a:p>
+          <a:p>
+            <a:r>
+              <a:t>Loop I の近い殻: 太陽が殻の壁の中 (半径 62〜81 pc、太陽から中心まで 78 pc) にいるので、ROI 全体を覆い、等方背景と数学的に区別できない (.dev/TOTANI_SPEC.md 3.7a)。</a:t>
+            </a:r>
+          </a:p>
+          <a:p>
+            <a:r>
+              <a:t>空の上の方だけで計算 (|b| ≥ 30°, 40°): 1.5 GeV の等方背景の倍率が 19 倍、55 倍に戻る。Totani 比 0.005 → 0.27 (2026-07-31、MCMC_BMIN)。</a:t>
+            </a:r>
+          </a:p>
+          <a:p>
+            <a:r>
+              <a:t>低いエネルギーでは、GALPROP の出力のスペクトルが Totani と違う (1.5 GeV で 0.56 倍) ことも効いている。</a:t>
+            </a:r>
+          </a:p>
+          <a:p>
+            <a:r>
+              <a:t>全成分の合計の明るさは Totani とほぼ同じ (0.96 倍)、ハロー単独も 1.16 倍。</a:t>
+            </a:r>
+          </a:p>
+          <a:p>
+            <a:r>
+              <a:t>図: 20.8 GeV の型紙、|b| = 20〜40° の帯での横方向の明るさ。作図 /home/arsei/slidework/make_profiles.py</a:t>
             </a:r>
           </a:p>
         </p:txBody>
@@ -2198,32 +2212,12 @@
           <a:lstStyle/>
           <a:p>
             <a:r>
-              <a:t>等方背景の倍率 (本研究 / Totani): 20 GeV 付近で約 0.4 倍、一番低いエネルギー (1.5 GeV) では v20 で約 1/200。</a:t>
-            </a:r>
-          </a:p>
-          <a:p>
-            <a:r>
-              <a:t>Loop I の近い殻: 太陽が殻の壁の中 (半径 62〜81 pc、太陽から中心まで 78 pc) にいるので、ROI 全体を覆い、等方背景と数学的に区別できない (.dev/TOTANI_SPEC.md 3.7a)。</a:t>
-            </a:r>
-          </a:p>
-          <a:p>
-            <a:r>
-              <a:t>空の上の方だけで計算 (|b| ≥ 30°, 40°): 1.5 GeV の等方背景の倍率が 19 倍、55 倍に戻る。Totani 比 0.005 → 0.27 (2026-07-31、MCMC_BMIN)。</a:t>
-            </a:r>
-          </a:p>
-          <a:p>
-            <a:r>
-              <a:t>低いエネルギーでは、GALPROP の出力のスペクトルが Totani と違う (1.5 GeV で 0.56 倍) ことも効いている。</a:t>
-            </a:r>
-          </a:p>
-          <a:p>
-            <a:r>
-              <a:t>全成分の合計の明るさは Totani とほぼ同じ (0.96 倍)、ハロー単独も 1.16 倍。</a:t>
-            </a:r>
-          </a:p>
-          <a:p>
-            <a:r>
-              <a:t>図: 20.8 GeV の型紙、|b| = 20〜40° の帯での横方向の明るさ。作図 /home/arsei/slidework/make_profiles.py</a:t>
+              <a:t>① フェルミバブル = 銀河中心の上下に広がる、ガンマ線で明るい泡状の構造。その矩形 |l| &lt; 22°, 10° &lt; |b| &lt; 55° を当てはめから外した。</a:t>
+            </a:r>
+          </a:p>
+          <a:p>
+            <a:r>
+              <a:t>② 何も無い空 23 か所で同じ解析をした (2026-07-31)。</a:t>
             </a:r>
           </a:p>
         </p:txBody>
@@ -2293,12 +2287,27 @@
           <a:lstStyle/>
           <a:p>
             <a:r>
-              <a:t>① フェルミバブル = 銀河中心の上下に広がる、ガンマ線で明るい泡状の構造。その矩形 |l| &lt; 22°, 10° &lt; |b| &lt; 55° を当てはめから外した。</a:t>
-            </a:r>
-          </a:p>
-          <a:p>
-            <a:r>
-              <a:t>② 何も無い空 23 か所で同じ解析をした (2026-07-31)。</a:t>
+              <a:t>フィッシャー情報: 尤度の山の鋭さ (2 階微分)。山が鋭いほどパラメータがよく決まる。</a:t>
+            </a:r>
+          </a:p>
+          <a:p>
+            <a:r>
+              <a:t>「ハローだけの手がかり」= 他の成分と区別できる部分の情報 (フィッシャー行列のシューア補行列)。有意度は、おおよそ「倍率の推定値 ÷ その誤差」で、誤差は情報の平方根に反比例する。</a:t>
+            </a:r>
+          </a:p>
+          <a:p>
+            <a:r>
+              <a:t>予測 6.6σ と実測 5.0σ の残りの差は、バブル外でハローの倍率が 0.77 倍と低いことで説明できる。この内外の差は約 1.5σ で、意味のある差ではない。</a:t>
+            </a:r>
+          </a:p>
+          <a:p>
+            <a:r>
+              <a:t>対照: 同じ形の矩形を経度方向に ±20°, ±30°, ±38° ずらして外すと 14.6〜16.4σ (Totani と同じやり方)。</a:t>
+            </a:r>
+          </a:p>
+          <a:p>
+            <a:r>
+              <a:t>たとえ: 写真の真ん中を隠すと自信が下がるが、それは見分けるヒントが真ん中に集まっていたから。</a:t>
             </a:r>
           </a:p>
         </p:txBody>
@@ -2368,27 +2377,22 @@
           <a:lstStyle/>
           <a:p>
             <a:r>
-              <a:t>フィッシャー情報: 尤度の山の鋭さ (2 階微分)。山が鋭いほどパラメータがよく決まる。</a:t>
-            </a:r>
-          </a:p>
-          <a:p>
-            <a:r>
-              <a:t>「ハローだけの手がかり」= 他の成分と区別できる部分の情報 (フィッシャー行列のシューア補行列)。有意度は、おおよそ「倍率の推定値 ÷ その誤差」で、誤差は情報の平方根に反比例する。</a:t>
-            </a:r>
-          </a:p>
-          <a:p>
-            <a:r>
-              <a:t>予測 6.6σ と実測 5.0σ の残りの差は、バブル外でハローの倍率が 0.77 倍と低いことで説明できる。この内外の差は約 1.5σ で、意味のある差ではない。</a:t>
-            </a:r>
-          </a:p>
-          <a:p>
-            <a:r>
-              <a:t>対照: 同じ形の矩形を経度方向に ±20°, ±30°, ±38° ずらして外すと 14.6〜16.4σ (Totani と同じやり方)。</a:t>
-            </a:r>
-          </a:p>
-          <a:p>
-            <a:r>
-              <a:t>たとえ: 写真の真ん中を隠すと自信が下がるが、それは見分けるヒントが真ん中に集まっていたから。</a:t>
+              <a:t>全体の明るさのずれ (ICS が GALPROP の 1.6 倍、など) は倍率が吸収するのでハローにはならない。ハローに化けるには「銀河中心寄りだけ明るい」という形のずれが必要。</a:t>
+            </a:r>
+          </a:p>
+          <a:p>
+            <a:r>
+              <a:t>等方近似: GALPROP の設定が IC_anisotropic = 0。Moskalenko &amp; Strong (2000) Fig. 6 では、非等方にすると 10 GeV 付近で 1.1〜1.3 倍、銀河中心の上より外側のほうが大きい。</a:t>
+            </a:r>
+          </a:p>
+          <a:p>
+            <a:r>
+              <a:t>3 分割 = 星の光・ちり・宇宙背景の光、の 3 種類の光を電子がはね上げたもの。19.5σ と 18.4σ はクラウドの計算機で、Totani と同じやり方で比べた値 (どちらも同じ条件なので、差で言う)。Totani §3.4.4 の同種の確認とも同じ結論。</a:t>
+            </a:r>
+          </a:p>
+          <a:p>
+            <a:r>
+              <a:t>残る可能性: GALPROP の ICS の「空間の形」が、銀河中心寄りで 2.3 倍ずれている場合。今の道具では確かめられない。</a:t>
             </a:r>
           </a:p>
         </p:txBody>
@@ -2458,22 +2462,22 @@
           <a:lstStyle/>
           <a:p>
             <a:r>
-              <a:t>全体の明るさのずれ (ICS が GALPROP の 1.6 倍、など) は倍率が吸収するのでハローにはならない。ハローに化けるには「銀河中心寄りだけ明るい」という形のずれが必要。</a:t>
-            </a:r>
-          </a:p>
-          <a:p>
-            <a:r>
-              <a:t>等方近似: GALPROP の設定が IC_anisotropic = 0。Moskalenko &amp; Strong (2000) Fig. 6 では、非等方にすると 10 GeV 付近で 1.1〜1.3 倍、銀河中心の上より外側のほうが大きい。</a:t>
-            </a:r>
-          </a:p>
-          <a:p>
-            <a:r>
-              <a:t>3 分割 = 星の光・ちり・宇宙背景の光、の 3 種類の光を電子がはね上げたもの。19.5σ と 18.4σ はクラウドの計算機で、Totani と同じやり方で比べた値 (どちらも同じ条件なので、差で言う)。Totani §3.4.4 の同種の確認とも同じ結論。</a:t>
-            </a:r>
-          </a:p>
-          <a:p>
-            <a:r>
-              <a:t>残る可能性: GALPROP の ICS の「空間の形」が、銀河中心寄りで 2.3 倍ずれている場合。今の道具では確かめられない。</a:t>
+              <a:t>ばらつき = 0 からのずれの 2 乗平均の平方根。光子が十分あるビン 2–10 (2.6–169 GeV) の 207 個から計算。</a:t>
+            </a:r>
+          </a:p>
+          <a:p>
+            <a:r>
+              <a:t>95% 区間はブートストラップ (データを復元抽出し直して何度も計算) で付けた。同じ場所のビン同士は相関する (隣どうし +0.31) ので、場所ごとにまとめて引き直した。</a:t>
+            </a:r>
+          </a:p>
+          <a:p>
+            <a:r>
+              <a:t>較正の仮定: 背景モデル (型紙) の誤りで、σ の分散が一様に 1.26² 倍に膨らむ (統計でいう過分散)。19σ のような大きな値でも同じ倍率かは確かめていない。天の川は背景がもっと複雑なので、本当の倍率はもっと大きいかもしれない (15σ は楽観寄り)。</a:t>
+            </a:r>
+          </a:p>
+          <a:p>
+            <a:r>
+              <a:t>記録の「1.362 (250 個)」は今の結果ファイルからは再現できなかった。最大 4.50σ は最低エネルギー (1.5 GeV) のビン。</a:t>
             </a:r>
           </a:p>
         </p:txBody>
@@ -2633,22 +2637,17 @@
           <a:lstStyle/>
           <a:p>
             <a:r>
-              <a:t>ばらつき = 0 からのずれの 2 乗平均の平方根。光子が十分あるビン 2–10 (2.6–169 GeV) の 207 個から計算。</a:t>
-            </a:r>
-          </a:p>
-          <a:p>
-            <a:r>
-              <a:t>95% 区間はブートストラップ (データを復元抽出し直して何度も計算) で付けた。同じ場所のビン同士は相関する (隣どうし +0.31) ので、場所ごとにまとめて引き直した。</a:t>
-            </a:r>
-          </a:p>
-          <a:p>
-            <a:r>
-              <a:t>較正の仮定: 背景モデル (型紙) の誤りで、σ の分散が一様に 1.26² 倍に膨らむ (統計でいう過分散)。19σ のような大きな値でも同じ倍率かは確かめていない。天の川は背景がもっと複雑なので、本当の倍率はもっと大きいかもしれない (15σ は楽観寄り)。</a:t>
-            </a:r>
-          </a:p>
-          <a:p>
-            <a:r>
-              <a:t>記録の「1.362 (250 個)」は今の結果ファイルからは再現できなかった。最大 4.50σ は最低エネルギー (1.5 GeV) のビン。</a:t>
+              <a:t>黒の点: 各エネルギービンで 23 か所から測ったばらつきと 95% 区間。灰色の帯: ビン 2–10 をまとめた値 1.26 とその 95% 区間。</a:t>
+            </a:r>
+          </a:p>
+          <a:p>
+            <a:r>
+              <a:t>灰色の点: 1.5 GeV はばらつき 2.2 の外れ (望遠鏡のぼやけが大きく、背景モデルの誤りが効きやすい)。285 GeV 以上は光子が数個〜数十個で、Wilks の定理の前提 (データが多い) が崩れる。</a:t>
+            </a:r>
+          </a:p>
+          <a:p>
+            <a:r>
+              <a:t>図は slides/figs/plot_null_variance.py で作った。</a:t>
             </a:r>
           </a:p>
         </p:txBody>
@@ -2718,17 +2717,7 @@
           <a:lstStyle/>
           <a:p>
             <a:r>
-              <a:t>黒の点: 各エネルギービンで 23 か所から測ったばらつきと 95% 区間。灰色の帯: ビン 2–10 をまとめた値 1.26 とその 95% 区間。</a:t>
-            </a:r>
-          </a:p>
-          <a:p>
-            <a:r>
-              <a:t>灰色の点: 1.5 GeV はばらつき 2.2 の外れ (望遠鏡のぼやけが大きく、背景モデルの誤りが効きやすい)。285 GeV 以上は光子が数個〜数十個で、Wilks の定理の前提 (データが多い) が崩れる。</a:t>
-            </a:r>
-          </a:p>
-          <a:p>
-            <a:r>
-              <a:t>図は slides/figs/plot_null_variance.py で作った。</a:t>
+              <a:t>言えるのは「既知の背景では説明しにくい超過がある」まで。それが暗黒物質かどうかは別の主張。</a:t>
             </a:r>
           </a:p>
         </p:txBody>
@@ -2798,7 +2787,17 @@
           <a:lstStyle/>
           <a:p>
             <a:r>
-              <a:t>言えるのは「既知の背景では説明しにくい超過がある」まで。それが暗黒物質かどうかは別の主張。</a:t>
+              <a:t>矮小銀河 54 個は Local Volume Database (Pace 2025) の確認済みの銀河。何も無い空は |b| &gt; 20° で互いに 20° 以上離した場所。</a:t>
+            </a:r>
+          </a:p>
+          <a:p>
+            <a:r>
+              <a:t>成分は等方・ガス・ICS・点源・ハロー。バブルと Loop I は銀河中心の構造なので入れない。</a:t>
+            </a:r>
+          </a:p>
+          <a:p>
+            <a:r>
+              <a:t>たとえ: 天の川のハローは部屋全体を照らす光なので電球と見分けにくかった。矮小銀河は遠くの豆電球なので、半径 10° の中では電球 (ICS) は平らな背景にしか見えない。</a:t>
             </a:r>
           </a:p>
         </p:txBody>
@@ -2868,17 +2867,17 @@
           <a:lstStyle/>
           <a:p>
             <a:r>
-              <a:t>矮小銀河 54 個は Local Volume Database (Pace 2025) の確認済みの銀河。何も無い空は |b| &gt; 20° で互いに 20° 以上離した場所。</a:t>
-            </a:r>
-          </a:p>
-          <a:p>
-            <a:r>
-              <a:t>成分は等方・ガス・ICS・点源・ハロー。バブルと Loop I は銀河中心の構造なので入れない。</a:t>
-            </a:r>
-          </a:p>
-          <a:p>
-            <a:r>
-              <a:t>たとえ: 天の川のハローは部屋全体を照らす光なので電球と見分けにくかった。矮小銀河は遠くの豆電球なので、半径 10° の中では電球 (ICS) は平らな背景にしか見えない。</a:t>
+              <a:t>⟨σv⟩: 対消滅の起きやすさ、m: 粒子の質量、dN/dE: 1 回の対消滅で出る光のスペクトル。天の川と矮小銀河で同じエネルギービンを見るので、これらは全部共通。</a:t>
+            </a:r>
+          </a:p>
+          <a:p>
+            <a:r>
+              <a:t>矮小銀河の J は Pace &amp; Strigari (2019) の式: J(0.5°) = 10^17.72 (σ_los / 5 km/s)⁴ (d / 100 kpc)⁻² (r_1/2 / 100 pc)⁻¹ GeV² cm⁻⁵。σ_los は星の速度のばらつき。</a:t>
+            </a:r>
+          </a:p>
+          <a:p>
+            <a:r>
+              <a:t>「何σ見えるはずか」= 予測フラックス ÷ 各天体の測定誤差。</a:t>
             </a:r>
           </a:p>
         </p:txBody>
@@ -2948,17 +2947,22 @@
           <a:lstStyle/>
           <a:p>
             <a:r>
-              <a:t>⟨σv⟩: 対消滅の起きやすさ、m: 粒子の質量、dN/dE: 1 回の対消滅で出る光のスペクトル。天の川と矮小銀河で同じエネルギービンを見るので、これらは全部共通。</a:t>
-            </a:r>
-          </a:p>
-          <a:p>
-            <a:r>
-              <a:t>矮小銀河の J は Pace &amp; Strigari (2019) の式: J(0.5°) = 10^17.72 (σ_los / 5 km/s)⁴ (d / 100 kpc)⁻² (r_1/2 / 100 pc)⁻¹ GeV² cm⁻⁵。σ_los は星の速度のばらつき。</a:t>
-            </a:r>
-          </a:p>
-          <a:p>
-            <a:r>
-              <a:t>「何σ見えるはずか」= 予測フラックス ÷ 各天体の測定誤差。</a:t>
+              <a:t>黒: 矮小銀河 52 + M31・M33 の全 13 ビンの有意度 (702 個)。灰色: 何も無い空 23 か所 (299 個)。点線: 理論の分布。</a:t>
+            </a:r>
+          </a:p>
+          <a:p>
+            <a:r>
+              <a:t>2 つの分布はほぼ同じ形 = 矮小銀河は「何も無い空」と区別できない。0 付近が高いのは、光子が数個しか無い高エネルギーのビンで σ がほぼ 0 になるため。</a:t>
+            </a:r>
+          </a:p>
+          <a:p>
+            <a:r>
+              <a:t>SMC・LMC はそれ自体が広がったガンマ線源で、解析で中心がマスクされるため使えない (54 − 2 = 52)。</a:t>
+            </a:r>
+          </a:p>
+          <a:p>
+            <a:r>
+              <a:t>図は slides/figs/plot_dwarf_results.py で作った。</a:t>
             </a:r>
           </a:p>
         </p:txBody>
@@ -3028,22 +3032,22 @@
           <a:lstStyle/>
           <a:p>
             <a:r>
-              <a:t>黒: 矮小銀河 52 + M31・M33 の全 13 ビンの有意度 (702 個)。灰色: 何も無い空 23 か所 (299 個)。点線: 理論の分布。</a:t>
-            </a:r>
-          </a:p>
-          <a:p>
-            <a:r>
-              <a:t>2 つの分布はほぼ同じ形 = 矮小銀河は「何も無い空」と区別できない。0 付近が高いのは、光子が数個しか無い高エネルギーのビンで σ がほぼ 0 になるため。</a:t>
-            </a:r>
-          </a:p>
-          <a:p>
-            <a:r>
-              <a:t>SMC・LMC はそれ自体が広がったガンマ線源で、解析で中心がマスクされるため使えない (54 − 2 = 52)。</a:t>
-            </a:r>
-          </a:p>
-          <a:p>
-            <a:r>
-              <a:t>図は slides/figs/plot_dwarf_results.py で作った。</a:t>
+              <a:t>予測が大きい天体ほど重く数える重み付き和。予測のパターンが分かっているときに、いちばん検出しやすいまとめ方。</a:t>
+            </a:r>
+          </a:p>
+          <a:p>
+            <a:r>
+              <a:t>43 天体 = 星の速度のばらつき σ_los が測られていて J が出せる矮小銀河 (SMC・LMC は除く)。</a:t>
+            </a:r>
+          </a:p>
+          <a:p>
+            <a:r>
+              <a:t>ずれ = (1.77 − 0.39) ÷ 1 = 1.4σ。天の川のハローの明るさは Totani と同じやり方の最良値。天の川側の局所密度 0.42 GeV/cm³ の場合。</a:t>
+            </a:r>
+          </a:p>
+          <a:p>
+            <a:r>
+              <a:t>注意: 9/28 の計算は SMC・LMC を誤って含めていた (予測 2.69σ のうち 2.06σ が SMC 1 天体)。</a:t>
             </a:r>
           </a:p>
         </p:txBody>
@@ -3113,22 +3117,27 @@
           <a:lstStyle/>
           <a:p>
             <a:r>
-              <a:t>予測が大きい天体ほど重く数える重み付き和。予測のパターンが分かっているときに、いちばん検出しやすいまとめ方。</a:t>
-            </a:r>
-          </a:p>
-          <a:p>
-            <a:r>
-              <a:t>43 天体 = 星の速度のばらつき σ_los が測られていて J が出せる矮小銀河 (SMC・LMC は除く)。</a:t>
-            </a:r>
-          </a:p>
-          <a:p>
-            <a:r>
-              <a:t>ずれ = (1.77 − 0.39) ÷ 1 = 1.4σ。天の川のハローの明るさは Totani と同じやり方の最良値。天の川側の局所密度 0.42 GeV/cm³ の場合。</a:t>
-            </a:r>
-          </a:p>
-          <a:p>
-            <a:r>
-              <a:t>注意: 9/28 の計算は SMC・LMC を誤って含めていた (予測 2.69σ のうち 2.06σ が SMC 1 天体)。</a:t>
+              <a:t>Section II と Fig. 1 の内容。</a:t>
+            </a:r>
+          </a:p>
+          <a:p>
+            <a:r>
+              <a:t>dex = 対数で 1 桁。0.4 dex は約 2.5 倍、0.1 は約 1.26 倍、0.3 は約 2 倍。</a:t>
+            </a:r>
+          </a:p>
+          <a:p>
+            <a:r>
+              <a:t>非球対称: 楕円体の矮小銀河を球対称の NFW で解析すると、log10 J が最大 0.4 ずれる。</a:t>
+            </a:r>
+          </a:p>
+          <a:p>
+            <a:r>
+              <a:t>連星: 見分けられていない連星があると星の速度のばらつきが大きく見え、J を大きく見積もる (Reticulum II で約 0.3)。</a:t>
+            </a:r>
+          </a:p>
+          <a:p>
+            <a:r>
+              <a:t>誤差の分布: 多くの解析は log J の誤差を正規分布と仮定するが、本当の分布はすそが重い。</a:t>
             </a:r>
           </a:p>
         </p:txBody>
@@ -3198,27 +3207,22 @@
           <a:lstStyle/>
           <a:p>
             <a:r>
-              <a:t>Section II と Fig. 1 の内容。</a:t>
-            </a:r>
-          </a:p>
-          <a:p>
-            <a:r>
-              <a:t>dex = 対数で 1 桁。0.4 dex は約 2.5 倍、0.1 は約 1.26 倍、0.3 は約 2 倍。</a:t>
-            </a:r>
-          </a:p>
-          <a:p>
-            <a:r>
-              <a:t>非球対称: 楕円体の矮小銀河を球対称の NFW で解析すると、log10 J が最大 0.4 ずれる。</a:t>
-            </a:r>
-          </a:p>
-          <a:p>
-            <a:r>
-              <a:t>連星: 見分けられていない連星があると星の速度のばらつきが大きく見え、J を大きく見積もる (Reticulum II で約 0.3)。</a:t>
-            </a:r>
-          </a:p>
-          <a:p>
-            <a:r>
-              <a:t>誤差の分布: 多くの解析は log J の誤差を正規分布と仮定するが、本当の分布はすそが重い。</a:t>
+              <a:t>Section III。FermiTools v2.5.1、fermipy v1.4.0。事象は P8R3 SOURCE V3、4 つの PSF クラス、エネルギーは 1 桁あたり 8 ビン。</a:t>
+            </a:r>
+          </a:p>
+          <a:p>
+            <a:r>
+              <a:t>背景の型紙: gll_iem_v07 (銀河拡散) と等方。点源カタログ (4FGL) の天体は簡単のため入れていない。</a:t>
+            </a:r>
+          </a:p>
+          <a:p>
+            <a:r>
+              <a:t>信号の空間の形: 古典的な矮小銀河は芯のある NFW (cNFW)、超微光の矮小銀河は切断した NFW。</a:t>
+            </a:r>
+          </a:p>
+          <a:p>
+            <a:r>
+              <a:t>本当の J (J_true) は Table I の中心値。</a:t>
             </a:r>
           </a:p>
         </p:txBody>
@@ -3288,22 +3292,22 @@
           <a:lstStyle/>
           <a:p>
             <a:r>
-              <a:t>Section III。FermiTools v2.5.1、fermipy v1.4.0。事象は P8R3 SOURCE V3、4 つの PSF クラス、エネルギーは 1 桁あたり 8 ビン。</a:t>
-            </a:r>
-          </a:p>
-          <a:p>
-            <a:r>
-              <a:t>背景の型紙: gll_iem_v07 (銀河拡散) と等方。点源カタログ (4FGL) の天体は簡単のため入れていない。</a:t>
-            </a:r>
-          </a:p>
-          <a:p>
-            <a:r>
-              <a:t>信号の空間の形: 古典的な矮小銀河は芯のある NFW (cNFW)、超微光の矮小銀河は切断した NFW。</a:t>
-            </a:r>
-          </a:p>
-          <a:p>
-            <a:r>
-              <a:t>本当の J (J_true) は Table I の中心値。</a:t>
+              <a:t>式 (6)〜(10)。J_obs = 星の動きの解析で出た値 (観測値)、J_true = 本当の値。</a:t>
+            </a:r>
+          </a:p>
+          <a:p>
+            <a:r>
+              <a:t>σ_L が小さい = 解析ソフトが「J はほぼ分かっている」と自信を持ちすぎている状態。</a:t>
+            </a:r>
+          </a:p>
+          <a:p>
+            <a:r>
+              <a:t>J は「局外パラメータ」(知りたいのは ⟨σv⟩ だが、決めないといけない他のパラメータ) で、尤度を最大にする値に置き換えて (プロファイル) から ⟨σv⟩ を調べる。</a:t>
+            </a:r>
+          </a:p>
+          <a:p>
+            <a:r>
+              <a:t>TS = 2 ln [ L(⟨σv⟩) / L(0) ]。</a:t>
             </a:r>
           </a:p>
         </p:txBody>
@@ -3373,22 +3377,12 @@
           <a:lstStyle/>
           <a:p>
             <a:r>
-              <a:t>式 (6)〜(10)。J_obs = 星の動きの解析で出た値 (観測値)、J_true = 本当の値。</a:t>
-            </a:r>
-          </a:p>
-          <a:p>
-            <a:r>
-              <a:t>σ_L が小さい = 解析ソフトが「J はほぼ分かっている」と自信を持ちすぎている状態。</a:t>
-            </a:r>
-          </a:p>
-          <a:p>
-            <a:r>
-              <a:t>J は「局外パラメータ」(知りたいのは ⟨σv⟩ だが、決めないといけない他のパラメータ) で、尤度を最大にする値に置き換えて (プロファイル) から ⟨σv⟩ を調べる。</a:t>
-            </a:r>
-          </a:p>
-          <a:p>
-            <a:r>
-              <a:t>TS = 2 ln [ L(⟨σv⟩) / L(0) ]。</a:t>
+              <a:t>答えが分かっている仮想の宇宙で、解析が正しく答えを出せるかを試している。</a:t>
+            </a:r>
+          </a:p>
+          <a:p>
+            <a:r>
+              <a:t>カバレッジが足りない (アンダーカバレッジ) = 95% と言いながら、本物を 5% より多く除外してしまう。</a:t>
             </a:r>
           </a:p>
         </p:txBody>
@@ -3543,12 +3537,22 @@
           <a:lstStyle/>
           <a:p>
             <a:r>
-              <a:t>答えが分かっている仮想の宇宙で、解析が正しく答えを出せるかを試している。</a:t>
-            </a:r>
-          </a:p>
-          <a:p>
-            <a:r>
-              <a:t>カバレッジが足りない (アンダーカバレッジ) = 95% と言いながら、本物を 5% より多く除外してしまう。</a:t>
+              <a:t>誤差を「大きくする」は 2 乗和で足す: σ_L² = σ_cat² + 0.3² など。σ_cat はカタログに書かれた誤差。</a:t>
+            </a:r>
+          </a:p>
+          <a:p>
+            <a:r>
+              <a:t>Ursa Minor: 距離 76 kpc、log10 J_tot = 18.55 ± 0.05、見かけの広がり 0.59° (望遠鏡のぼやけより大きい)。</a:t>
+            </a:r>
+          </a:p>
+          <a:p>
+            <a:r>
+              <a:t>基準 (σ = σ_cat) では 1 万回中 0 回しか本物を除外しない (過大なカバレッジ)。J と ⟨σv⟩ の縮退で Wilks の定理が成り立たないため。</a:t>
+            </a:r>
+          </a:p>
+          <a:p>
+            <a:r>
+              <a:t>形: 本当は楕円の cNFW。楕円かどうかはあまり効かず、中心の尖り方と広がりが効く。</a:t>
             </a:r>
           </a:p>
         </p:txBody>
@@ -3618,22 +3622,27 @@
           <a:lstStyle/>
           <a:p>
             <a:r>
-              <a:t>誤差を「大きくする」は 2 乗和で足す: σ_L² = σ_cat² + 0.3² など。σ_cat はカタログに書かれた誤差。</a:t>
-            </a:r>
-          </a:p>
-          <a:p>
-            <a:r>
-              <a:t>Ursa Minor: 距離 76 kpc、log10 J_tot = 18.55 ± 0.05、見かけの広がり 0.59° (望遠鏡のぼやけより大きい)。</a:t>
-            </a:r>
-          </a:p>
-          <a:p>
-            <a:r>
-              <a:t>基準 (σ = σ_cat) では 1 万回中 0 回しか本物を除外しない (過大なカバレッジ)。J と ⟨σv⟩ の縮退で Wilks の定理が成り立たないため。</a:t>
-            </a:r>
-          </a:p>
-          <a:p>
-            <a:r>
-              <a:t>形: 本当は楕円の cNFW。楕円かどうかはあまり効かず、中心の尖り方と広がりが効く。</a:t>
+              <a:t>Section V。上限が 1 個のときよりゆるくなりにくいのは、J が大きい天体ほどカタログの誤差が大きいので、同じ量を足しても割合が小さいため。</a:t>
+            </a:r>
+          </a:p>
+          <a:p>
+            <a:r>
+              <a:t>Wilks の定理は「局外パラメータの数が少ない」ことを前提にする。27 個まとめると J が 27 個あり、前提が崩れる。</a:t>
+            </a:r>
+          </a:p>
+          <a:p>
+            <a:r>
+              <a:t>J_obs は対数で正規分布 → J そのものでは上に長いすそ。上に振れた天体が上限を強く引っ張り、下に振れた天体では打ち消せない。27 個のうち 1 個以上が 1.5σ 以上上に振れる確率は約 0.85。</a:t>
+            </a:r>
+          </a:p>
+          <a:p>
+            <a:r>
+              <a:t>全部を点として扱うと 37%。</a:t>
+            </a:r>
+          </a:p>
+          <a:p>
+            <a:r>
+              <a:t>何も無い領域 (blank field) での較正は Ref. [76] の方法。</a:t>
             </a:r>
           </a:p>
         </p:txBody>
@@ -3703,27 +3712,7 @@
           <a:lstStyle/>
           <a:p>
             <a:r>
-              <a:t>Section V。上限が 1 個のときよりゆるくなりにくいのは、J が大きい天体ほどカタログの誤差が大きいので、同じ量を足しても割合が小さいため。</a:t>
-            </a:r>
-          </a:p>
-          <a:p>
-            <a:r>
-              <a:t>Wilks の定理は「局外パラメータの数が少ない」ことを前提にする。27 個まとめると J が 27 個あり、前提が崩れる。</a:t>
-            </a:r>
-          </a:p>
-          <a:p>
-            <a:r>
-              <a:t>J_obs は対数で正規分布 → J そのものでは上に長いすそ。上に振れた天体が上限を強く引っ張り、下に振れた天体では打ち消せない。27 個のうち 1 個以上が 1.5σ 以上上に振れる確率は約 0.85。</a:t>
-            </a:r>
-          </a:p>
-          <a:p>
-            <a:r>
-              <a:t>全部を点として扱うと 37%。</a:t>
-            </a:r>
-          </a:p>
-          <a:p>
-            <a:r>
-              <a:t>何も無い領域 (blank field) での較正は Ref. [76] の方法。</a:t>
+              <a:t>Section VI。「矮小銀河で信号が無くて当然」とまでは言っていない。「無いから暗黒物質ではない」と判断するのが早すぎるかもしれない、という主張。</a:t>
             </a:r>
           </a:p>
         </p:txBody>
@@ -3793,7 +3782,17 @@
           <a:lstStyle/>
           <a:p>
             <a:r>
-              <a:t>Section VI。「矮小銀河で信号が無くて当然」とまでは言っていない。「無いから暗黒物質ではない」と判断するのが早すぎるかもしれない、という主張。</a:t>
+              <a:t>論文の Section IV で J_obs を J_true のまわりに対数正規でばらつかせたのと同じ考え方。幅 0.5 は論文の推奨値 (abstract)。</a:t>
+            </a:r>
+          </a:p>
+          <a:p>
+            <a:r>
+              <a:t>言い方: J がどれくらいずれているか分からないので、サイコロを振って J をずらして予測を出す、を 20 万回繰り返した。そうすると「予測はだいたいこの範囲」という幅が分かる。</a:t>
+            </a:r>
+          </a:p>
+          <a:p>
+            <a:r>
+              <a:t>スクリプト: cloud_reports/2026-10-02_dwarf_J_uncertainty.py。</a:t>
             </a:r>
           </a:p>
         </p:txBody>
@@ -3863,17 +3862,17 @@
           <a:lstStyle/>
           <a:p>
             <a:r>
-              <a:t>論文の Section IV で J_obs を J_true のまわりに対数正規でばらつかせたのと同じ考え方。幅 0.5 は論文の推奨値 (abstract)。</a:t>
-            </a:r>
-          </a:p>
-          <a:p>
-            <a:r>
-              <a:t>言い方: J がどれくらいずれているか分からないので、サイコロを振って J をずらして予測を出す、を 20 万回繰り返した。そうすると「予測はだいたいこの範囲」という幅が分かる。</a:t>
-            </a:r>
-          </a:p>
-          <a:p>
-            <a:r>
-              <a:t>スクリプト: cloud_reports/2026-10-02_dwarf_J_uncertainty.py。</a:t>
+              <a:t>重み w_i は今まで通り J の推定値から出した予測 pred_i のまま (解析する人は本当の J を知らないため)。</a:t>
+            </a:r>
+          </a:p>
+          <a:p>
+            <a:r>
+              <a:t>Φ = 標準正規分布の累積分布関数。p は片側。ずれ = 標準正規で p に対応する σ。</a:t>
+            </a:r>
+          </a:p>
+          <a:p>
+            <a:r>
+              <a:t>J の誤差は「期待の中央値」を少し上げる。対数正規は上に長いすそを持つので、合計が上に引っ張られる (論文 Section V と同じ現象)。</a:t>
             </a:r>
           </a:p>
         </p:txBody>
@@ -3943,17 +3942,17 @@
           <a:lstStyle/>
           <a:p>
             <a:r>
-              <a:t>重み w_i は今まで通り J の推定値から出した予測 pred_i のまま (解析する人は本当の J を知らないため)。</a:t>
-            </a:r>
-          </a:p>
-          <a:p>
-            <a:r>
-              <a:t>Φ = 標準正規分布の累積分布関数。p は片側。ずれ = 標準正規で p に対応する σ。</a:t>
-            </a:r>
-          </a:p>
-          <a:p>
-            <a:r>
-              <a:t>J の誤差は「期待の中央値」を少し上げる。対数正規は上に長いすそを持つので、合計が上に引っ張られる (論文 Section V と同じ現象)。</a:t>
+              <a:t>灰色の山: J の誤差を入れたときの予測の分布 (20 万回)。点線: J の誤差なしの予測 1.77。黒い点: 実測 0.39、横棒は測定の揺れ ±1.26。</a:t>
+            </a:r>
+          </a:p>
+          <a:p>
+            <a:r>
+              <a:t>点は山の左にあるが、横棒が山に届いているので、ずれは約 1.3σ で「たまたま」で起きる範囲。</a:t>
+            </a:r>
+          </a:p>
+          <a:p>
+            <a:r>
+              <a:t>図は slides/figs/plot_dwarf_J.py で作った。</a:t>
             </a:r>
           </a:p>
         </p:txBody>
@@ -4023,17 +4022,22 @@
           <a:lstStyle/>
           <a:p>
             <a:r>
-              <a:t>灰色の山: J の誤差を入れたときの予測の分布 (20 万回)。点線: J の誤差なしの予測 1.77。黒い点: 実測 0.39、横棒は測定の揺れ ±1.26。</a:t>
-            </a:r>
-          </a:p>
-          <a:p>
-            <a:r>
-              <a:t>点は山の左にあるが、横棒が山に届いているので、ずれは約 1.3σ で「たまたま」で起きる範囲。</a:t>
-            </a:r>
-          </a:p>
-          <a:p>
-            <a:r>
-              <a:t>図は slides/figs/plot_dwarf_J.py で作った。</a:t>
+              <a:t>予測は天の川側の局所密度 ρ☉ の −2 乗に比例する (天の川の J が密度の 2 乗に比例し、天の川の実測の明るさは固定のため)。</a:t>
+            </a:r>
+          </a:p>
+          <a:p>
+            <a:r>
+              <a:t>ρ☉ = 0.3: 期待 3.46 (誤差なし) / 4.86 (誤差あり、68% 2.64–9.95)、ずれ 2.4σ / 2.1σ (s = 1.26)。</a:t>
+            </a:r>
+          </a:p>
+          <a:p>
+            <a:r>
+              <a:t>ρ☉ = 0.6: 期待 0.87 / 1.21 (0.66–2.49)、ずれ 0.4σ / 0.7σ。</a:t>
+            </a:r>
+          </a:p>
+          <a:p>
+            <a:r>
+              <a:t>J の誤差を入れると、期待の幅が大きく広がり、「判定できない」がより強くなる。</a:t>
             </a:r>
           </a:p>
         </p:txBody>
@@ -4103,22 +4107,12 @@
           <a:lstStyle/>
           <a:p>
             <a:r>
-              <a:t>予測は天の川側の局所密度 ρ☉ の −2 乗に比例する (天の川の J が密度の 2 乗に比例し、天の川の実測の明るさは固定のため)。</a:t>
-            </a:r>
-          </a:p>
-          <a:p>
-            <a:r>
-              <a:t>ρ☉ = 0.3: 期待 3.46 (誤差なし) / 4.86 (誤差あり、68% 2.64–9.95)、ずれ 2.4σ / 2.1σ (s = 1.26)。</a:t>
-            </a:r>
-          </a:p>
-          <a:p>
-            <a:r>
-              <a:t>ρ☉ = 0.6: 期待 0.87 / 1.21 (0.66–2.49)、ずれ 0.4σ / 0.7σ。</a:t>
-            </a:r>
-          </a:p>
-          <a:p>
-            <a:r>
-              <a:t>J の誤差を入れると、期待の幅が大きく広がり、「判定できない」がより強くなる。</a:t>
+              <a:t>15σ は「ハローがあるか」の強さ、1.3σ は「天の川と矮小銀河が食い違うか」の強さ。</a:t>
+            </a:r>
+          </a:p>
+          <a:p>
+            <a:r>
+              <a:t>どちらも Wilks の定理だけに頼らず、何も無い空で較正した値 (1.26) を使っている。</a:t>
             </a:r>
           </a:p>
         </p:txBody>
@@ -4188,12 +4182,7 @@
           <a:lstStyle/>
           <a:p>
             <a:r>
-              <a:t>15σ は「ハローがあるか」の強さ、1.3σ は「天の川と矮小銀河が食い違うか」の強さ。</a:t>
-            </a:r>
-          </a:p>
-          <a:p>
-            <a:r>
-              <a:t>どちらも Wilks の定理だけに頼らず、何も無い空で較正した値 (1.26) を使っている。</a:t>
+              <a:t>流れ: 再現 → 縮退による 3 つの疑問 → 背景の間違い説を否定・σ を較正・記録を整備 → 矮小銀河は非検出 → 論文の J の誤差を入れて「判定できない」を定量化。</a:t>
             </a:r>
           </a:p>
         </p:txBody>
@@ -4263,7 +4252,22 @@
           <a:lstStyle/>
           <a:p>
             <a:r>
-              <a:t>流れ: 再現 → 縮退による 3 つの疑問 → 背景の間違い説を否定・σ を較正・記録を整備 → 矮小銀河は非検出 → 論文の J の誤差を入れて「判定できない」を定量化。</a:t>
+              <a:t>中村 (2017) 講究録 §2: 状態空間モデル。システムノイズ (シミュレーションの誤差) と観測ノイズ (観測の誤差) を分けて書く。</a:t>
+            </a:r>
+          </a:p>
+          <a:p>
+            <a:r>
+              <a:t>§2.3.3–2.3.4: アンサンブルカルマンフィルタ・粒子フィルタは、確率分布をたくさんのサンプル (アンサンブル) で近似する (式 11)。</a:t>
+            </a:r>
+          </a:p>
+          <a:p>
+            <a:r>
+              <a:t>§3.3: モデル化誤差と数値計算の誤差を、システムノイズとして統一的に扱えることがデータ同化の利点。</a:t>
+            </a:r>
+          </a:p>
+          <a:p>
+            <a:r>
+              <a:t>正直な位置づけ: この解析は講究録を読む前に行った。後から読んで、同じ発想だと分かった。データ同化の中心は時間とともに変わる現象で、1 枚の空の地図にそのまま使える手法ではない。</a:t>
             </a:r>
           </a:p>
         </p:txBody>
@@ -4374,91 +4378,6 @@
 </file>
 
 <file path=ppt/notesSlides/notesSlide50.xml><?xml version="1.0" encoding="utf-8"?>
-<p:notes xmlns:a="http://schemas.openxmlformats.org/drawingml/2006/main" xmlns:r="http://schemas.openxmlformats.org/officeDocument/2006/relationships" xmlns:p="http://schemas.openxmlformats.org/presentationml/2006/main">
-  <p:cSld>
-    <p:spTree>
-      <p:nvGrpSpPr>
-        <p:cNvPr id="1" name=""/>
-        <p:cNvGrpSpPr/>
-        <p:nvPr/>
-      </p:nvGrpSpPr>
-      <p:grpSpPr>
-        <a:xfrm>
-          <a:off x="0" y="0"/>
-          <a:ext cx="0" cy="0"/>
-          <a:chOff x="0" y="0"/>
-          <a:chExt cx="0" cy="0"/>
-        </a:xfrm>
-      </p:grpSpPr>
-      <p:sp>
-        <p:nvSpPr>
-          <p:cNvPr id="2" name="Slide Image Placeholder 1"/>
-          <p:cNvSpPr>
-            <a:spLocks noGrp="1" noRot="1" noChangeAspect="1"/>
-          </p:cNvSpPr>
-          <p:nvPr>
-            <p:ph type="sldImg" idx="2"/>
-          </p:nvPr>
-        </p:nvSpPr>
-        <p:spPr/>
-      </p:sp>
-      <p:sp>
-        <p:nvSpPr>
-          <p:cNvPr id="3" name="Notes Placeholder 2"/>
-          <p:cNvSpPr>
-            <a:spLocks noGrp="1"/>
-          </p:cNvSpPr>
-          <p:nvPr>
-            <p:ph type="body" sz="quarter" idx="3"/>
-          </p:nvPr>
-        </p:nvSpPr>
-        <p:spPr/>
-        <p:txBody>
-          <a:bodyPr/>
-          <a:lstStyle/>
-          <a:p>
-            <a:r>
-              <a:t>中村 (2017) 講究録 §2: 状態空間モデル。システムノイズ (シミュレーションの誤差) と観測ノイズ (観測の誤差) を分けて書く。</a:t>
-            </a:r>
-          </a:p>
-          <a:p>
-            <a:r>
-              <a:t>§2.3.3–2.3.4: アンサンブルカルマンフィルタ・粒子フィルタは、確率分布をたくさんのサンプル (アンサンブル) で近似する (式 11)。</a:t>
-            </a:r>
-          </a:p>
-          <a:p>
-            <a:r>
-              <a:t>§3.3: モデル化誤差と数値計算の誤差を、システムノイズとして統一的に扱えることがデータ同化の利点。</a:t>
-            </a:r>
-          </a:p>
-          <a:p>
-            <a:r>
-              <a:t>正直な位置づけ: この解析は講究録を読む前に行った。後から読んで、同じ発想だと分かった。データ同化の中心は時間とともに変わる現象で、1 枚の空の地図にそのまま使える手法ではない。</a:t>
-            </a:r>
-          </a:p>
-        </p:txBody>
-      </p:sp>
-      <p:sp>
-        <p:nvSpPr>
-          <p:cNvPr id="4" name="Slide Number Placeholder 3"/>
-          <p:cNvSpPr>
-            <a:spLocks noGrp="1"/>
-          </p:cNvSpPr>
-          <p:nvPr>
-            <p:ph type="sldNum" sz="quarter" idx="5"/>
-          </p:nvPr>
-        </p:nvSpPr>
-        <p:spPr/>
-      </p:sp>
-    </p:spTree>
-  </p:cSld>
-  <p:clrMapOvr>
-    <a:masterClrMapping/>
-  </p:clrMapOvr>
-</p:notes>
-</file>
-
-<file path=ppt/notesSlides/notesSlide51.xml><?xml version="1.0" encoding="utf-8"?>
 <p:notes xmlns:a="http://schemas.openxmlformats.org/drawingml/2006/main" xmlns:r="http://schemas.openxmlformats.org/officeDocument/2006/relationships" xmlns:p="http://schemas.openxmlformats.org/presentationml/2006/main">
   <p:cSld>
     <p:spTree>
@@ -8781,7 +8700,7 @@
           <a:p>
             <a:r>
               <a:rPr sz="3400"/>
-              <a:t>手法②：尤度（どれだけ合っているか）</a:t>
+              <a:t>尤度と MCMC の役割分担</a:t>
             </a:r>
           </a:p>
         </p:txBody>
@@ -8808,34 +8727,95 @@
           <a:p>
             <a:r>
               <a:rPr sz="2400"/>
-              <a:t>光子の数はポアソン分布でばらつく</a:t>
+              <a:t>尤度 ＝ 点数をつける係（たとえ：高度計）</a:t>
+            </a:r>
+          </a:p>
+          <a:p>
+            <a:pPr lvl="1"/>
+            <a:r>
+              <a:rPr sz="2000"/>
+              <a:t>倍率の組（f_gas, f_ics, …, f_halo）を入れると、予測と観測の合い具合 ln L を返す</a:t>
             </a:r>
           </a:p>
           <a:p>
             <a:r>
               <a:rPr sz="2400"/>
-              <a:t>尤度：ln L = Σ_i [ C_obs,i ln C_exp,i − C_exp,i ]</a:t>
+              <a:t>MCMC ＝ 倍率を探す係（たとえ：霧の山を歩く人）</a:t>
             </a:r>
           </a:p>
           <a:p>
             <a:pPr lvl="1"/>
             <a:r>
               <a:rPr sz="2000"/>
-              <a:t>C_obs：観測した光子数、C_exp：予測した光子数</a:t>
+              <a:t>倍率の組を少しずつ変えながら歩き、そのたびに尤度で点数をつける</a:t>
             </a:r>
           </a:p>
           <a:p>
             <a:pPr lvl="1"/>
             <a:r>
               <a:rPr sz="2000"/>
-              <a:t>i：10° × 10° のセル（空をマス目に分ける）</a:t>
+              <a:t>点数が上がる方へは必ず進み、下がる方へもたまに進む</a:t>
             </a:r>
           </a:p>
           <a:p>
             <a:r>
               <a:rPr sz="2400"/>
-              <a:t>ln L が最大になる倍率 f を探す（最尤推定）</a:t>
-            </a:r>
+              <a:t>歩き終わったら</a:t>
+            </a:r>
+          </a:p>
+          <a:p>
+            <a:pPr lvl="1"/>
+            <a:r>
+              <a:rPr sz="2000"/>
+              <a:t>歩いた中で点数が一番高かった組 → 最良の倍率（Totani と同じ）</a:t>
+            </a:r>
+          </a:p>
+          <a:p>
+            <a:pPr lvl="1"/>
+            <a:r>
+              <a:rPr sz="2000"/>
+              <a:t>歩いた範囲の広さ → 倍率の誤差</a:t>
+            </a:r>
+          </a:p>
+        </p:txBody>
+      </p:sp>
+      <p:sp>
+        <p:nvSpPr>
+          <p:cNvPr id="8" name="TextBox 7">
+            <a:extLst>
+              <a:ext uri="{FF2B5EF4-FFF2-40B4-BE49-F238E27FC236}">
+                <a16:creationId xmlns:a16="http://schemas.microsoft.com/office/drawing/2014/main" id="{F85CD606-E3CE-F314-B3EE-F3D7028115CB}"/>
+              </a:ext>
+            </a:extLst>
+          </p:cNvPr>
+          <p:cNvSpPr txBox="1"/>
+          <p:nvPr/>
+        </p:nvSpPr>
+        <p:spPr>
+          <a:xfrm>
+            <a:off x="5837182" y="5663239"/>
+            <a:ext cx="6093372" cy="923330"/>
+          </a:xfrm>
+          <a:prstGeom prst="rect">
+            <a:avLst/>
+          </a:prstGeom>
+          <a:noFill/>
+        </p:spPr>
+        <p:txBody>
+          <a:bodyPr wrap="square">
+            <a:spAutoFit/>
+          </a:bodyPr>
+          <a:lstStyle/>
+          <a:p>
+            <a:r>
+              <a:rPr lang="en-US" sz="1400" b="1"/>
+              <a:t>Reference:</a:t>
+            </a:r>
+            <a:r>
+              <a:rPr lang="en-US" sz="1400"/>
+              <a:t> T. Totani (2025), arXiv:2507.07209 §2.2</a:t>
+            </a:r>
+            <a:endParaRPr lang="en-US"/>
           </a:p>
         </p:txBody>
       </p:sp>
@@ -8881,7 +8861,7 @@
           <a:p>
             <a:r>
               <a:rPr sz="3400"/>
-              <a:t>尤度と MCMC の役割分担</a:t>
+              <a:t>手法③：有意度 σ の出し方</a:t>
             </a:r>
           </a:p>
         </p:txBody>
@@ -8908,54 +8888,38 @@
           <a:p>
             <a:r>
               <a:rPr sz="2400"/>
-              <a:t>尤度 ＝ 点数をつける係（たとえ：高度計）</a:t>
+              <a:t>ハロー「あり」と「なし」の 2 通りで当てはめる</a:t>
+            </a:r>
+          </a:p>
+          <a:p>
+            <a:r>
+              <a:rPr sz="2400"/>
+              <a:t>差 Δln L = ln L(あり) − ln L(なし)</a:t>
+            </a:r>
+          </a:p>
+          <a:p>
+            <a:r>
+              <a:rPr sz="2400"/>
+              <a:t>有意度 σ = √( 2 Δln L )</a:t>
+            </a:r>
+          </a:p>
+          <a:p>
+            <a:r>
+              <a:rPr sz="2400"/>
+              <a:t>根拠：Wilks の定理（ガンマ線天文学の標準の換算。Totani の 13–19σ も同じ）</a:t>
             </a:r>
           </a:p>
           <a:p>
             <a:pPr lvl="1"/>
             <a:r>
               <a:rPr sz="2000"/>
-              <a:t>倍率の組（f_gas, f_ics, …, f_halo）を入れると、予測と観測の合い具合 ln L を返す</a:t>
+              <a:t>データが十分多いと、2Δln L は自由度 1 の χ² 分布に従う</a:t>
             </a:r>
           </a:p>
           <a:p>
             <a:r>
               <a:rPr sz="2400"/>
-              <a:t>MCMC ＝ 倍率を探す係（たとえ：霧の山を歩く人）</a:t>
-            </a:r>
-          </a:p>
-          <a:p>
-            <a:pPr lvl="1"/>
-            <a:r>
-              <a:rPr sz="2000"/>
-              <a:t>倍率の組を少しずつ変えながら歩き、そのたびに尤度で点数をつける</a:t>
-            </a:r>
-          </a:p>
-          <a:p>
-            <a:pPr lvl="1"/>
-            <a:r>
-              <a:rPr sz="2000"/>
-              <a:t>点数が上がる方へは必ず進み、下がる方へもたまに進む</a:t>
-            </a:r>
-          </a:p>
-          <a:p>
-            <a:r>
-              <a:rPr sz="2400"/>
-              <a:t>歩き終わったら</a:t>
-            </a:r>
-          </a:p>
-          <a:p>
-            <a:pPr lvl="1"/>
-            <a:r>
-              <a:rPr sz="2000"/>
-              <a:t>歩いた中で点数が一番高かった組 → 最良の倍率（Totani と同じ）</a:t>
-            </a:r>
-          </a:p>
-          <a:p>
-            <a:pPr lvl="1"/>
-            <a:r>
-              <a:rPr sz="2000"/>
-              <a:t>歩いた範囲の広さ → 倍率の誤差</a:t>
+              <a:t>→ この定理が本当に成り立つかが、後で問題になる</a:t>
             </a:r>
           </a:p>
         </p:txBody>
@@ -8994,7 +8958,7 @@
             </a:r>
             <a:r>
               <a:rPr lang="en-US" sz="1400"/>
-              <a:t> T. Totani (2025), arXiv:2507.07209 §2.2</a:t>
+              <a:t> S. S. Wilks (1938), Ann. Math. Stat. 9, 60</a:t>
             </a:r>
             <a:endParaRPr lang="en-US"/>
           </a:p>
@@ -9042,7 +9006,7 @@
           <a:p>
             <a:r>
               <a:rPr sz="3400"/>
-              <a:t>手法③：有意度 σ の出し方</a:t>
+              <a:t>手法④：MCMC（最良値と誤差）</a:t>
             </a:r>
           </a:p>
         </p:txBody>
@@ -9069,38 +9033,39 @@
           <a:p>
             <a:r>
               <a:rPr sz="2400"/>
-              <a:t>ハロー「あり」と「なし」の 2 通りで当てはめる</a:t>
+              <a:t>MCMC で、最良の倍率 f と、その誤差の両方を求める（Totani と同じ）</a:t>
             </a:r>
           </a:p>
           <a:p>
             <a:r>
               <a:rPr sz="2400"/>
-              <a:t>差 Δln L = ln L(あり) − ln L(なし)</a:t>
+              <a:t>MCMC：尤度に比例する確率で、パラメータの空間を歩き回る</a:t>
+            </a:r>
+          </a:p>
+          <a:p>
+            <a:pPr lvl="1"/>
+            <a:r>
+              <a:rPr sz="2000"/>
+              <a:t>歩いた中で尤度が最大の点 = 最良値、歩いた跡の分布 → 誤差棒</a:t>
             </a:r>
           </a:p>
           <a:p>
             <a:r>
               <a:rPr sz="2400"/>
-              <a:t>有意度 σ = √( 2 Δln L )</a:t>
+              <a:t>emcee を使用：32 本の歩行者 × 6000 歩</a:t>
+            </a:r>
+          </a:p>
+          <a:p>
+            <a:pPr lvl="1"/>
+            <a:r>
+              <a:rPr sz="2000"/>
+              <a:t>出発点は Totani と同じ初期値（点源・GALPROP = 1、他 = 0 など）</a:t>
             </a:r>
           </a:p>
           <a:p>
             <a:r>
               <a:rPr sz="2400"/>
-              <a:t>根拠：Wilks の定理（ガンマ線天文学の標準の換算。Totani の 13–19σ も同じ）</a:t>
-            </a:r>
-          </a:p>
-          <a:p>
-            <a:pPr lvl="1"/>
-            <a:r>
-              <a:rPr sz="2000"/>
-              <a:t>データが十分多いと、2Δln L は自由度 1 の χ² 分布に従う</a:t>
-            </a:r>
-          </a:p>
-          <a:p>
-            <a:r>
-              <a:rPr sz="2400"/>
-              <a:t>→ この定理が本当に成り立つかが、後で問題になる</a:t>
+              <a:t>有意度 σ も、ハローあり・なしそれぞれの MCMC で見つけた最大 ln L の差から出す</a:t>
             </a:r>
           </a:p>
         </p:txBody>
@@ -9139,7 +9104,7 @@
             </a:r>
             <a:r>
               <a:rPr lang="en-US" sz="1400"/>
-              <a:t> S. S. Wilks (1938), Ann. Math. Stat. 9, 60</a:t>
+              <a:t> D. Foreman-Mackey et al. (2013), PASP 125, 306</a:t>
             </a:r>
             <a:endParaRPr lang="en-US"/>
           </a:p>
@@ -9186,8 +9151,8 @@
           <a:lstStyle/>
           <a:p>
             <a:r>
-              <a:rPr sz="3400"/>
-              <a:t>手法④：MCMC（最良値と誤差）</a:t>
+              <a:rPr sz="3000"/>
+              <a:t>MCMC をたとえで見る：霧の山を歩く</a:t>
             </a:r>
           </a:p>
         </p:txBody>
@@ -9204,8 +9169,8 @@
         </p:nvSpPr>
         <p:spPr>
           <a:xfrm>
-            <a:off x="841248" y="1463040"/>
-            <a:ext cx="10515600" cy="4114800"/>
+            <a:off x="548640" y="1371600"/>
+            <a:ext cx="5669280" cy="4297680"/>
           </a:xfrm>
         </p:spPr>
         <p:txBody>
@@ -9213,81 +9178,65 @@
           <a:lstStyle/>
           <a:p>
             <a:r>
-              <a:rPr sz="2400"/>
-              <a:t>MCMC で、最良の倍率 f と、その誤差の両方を求める（Totani と同じ）</a:t>
-            </a:r>
-          </a:p>
-          <a:p>
-            <a:r>
-              <a:rPr sz="2400"/>
-              <a:t>MCMC：尤度に比例する確率で、パラメータの空間を歩き回る</a:t>
+              <a:rPr sz="1800"/>
+              <a:t>山の上の「場所」 → 倍率の組 θ</a:t>
             </a:r>
           </a:p>
           <a:p>
             <a:pPr lvl="1"/>
             <a:r>
-              <a:rPr sz="2000"/>
-              <a:t>歩いた中で尤度が最大の点 = 最良値、歩いた跡の分布 → 誤差棒</a:t>
-            </a:r>
-          </a:p>
-          <a:p>
-            <a:r>
-              <a:rPr sz="2400"/>
-              <a:t>emcee を使用：32 本の歩行者 × 6000 歩</a:t>
+              <a:rPr sz="1500"/>
+              <a:t>θ = (f_iso, f_gas, f_ics, …, f_halo)。9 個あるので 9 次元の山</a:t>
+            </a:r>
+          </a:p>
+          <a:p>
+            <a:r>
+              <a:rPr sz="1800"/>
+              <a:t>その場所の「高さ」 → 点数（事後分布）</a:t>
+            </a:r>
+          </a:p>
+          <a:p>
+            <a:r>
+              <a:rPr sz="1800"/>
+              <a:t>「高度計」 → 尤度の計算（手法② の ln L）</a:t>
+            </a:r>
+          </a:p>
+          <a:p>
+            <a:r>
+              <a:rPr sz="1800"/>
+              <a:t>「立ち入り禁止の場所」 → 事前分布</a:t>
             </a:r>
           </a:p>
           <a:p>
             <a:pPr lvl="1"/>
             <a:r>
-              <a:rPr sz="2000"/>
-              <a:t>出発点は Totani と同じ初期値（点源・GALPROP = 1、他 = 0 など）</a:t>
-            </a:r>
-          </a:p>
-          <a:p>
-            <a:r>
-              <a:rPr sz="2400"/>
-              <a:t>有意度 σ も、ハローあり・なしそれぞれの MCMC で見つけた最大 ln L の差から出す</a:t>
-            </a:r>
-          </a:p>
-        </p:txBody>
-      </p:sp>
-      <p:sp>
-        <p:nvSpPr>
-          <p:cNvPr id="8" name="TextBox 7">
-            <a:extLst>
-              <a:ext uri="{FF2B5EF4-FFF2-40B4-BE49-F238E27FC236}">
-                <a16:creationId xmlns:a16="http://schemas.microsoft.com/office/drawing/2014/main" id="{F85CD606-E3CE-F314-B3EE-F3D7028115CB}"/>
-              </a:ext>
-            </a:extLst>
-          </p:cNvPr>
-          <p:cNvSpPr txBox="1"/>
-          <p:nvPr/>
-        </p:nvSpPr>
-        <p:spPr>
-          <a:xfrm>
-            <a:off x="5837182" y="5663239"/>
-            <a:ext cx="6093372" cy="923330"/>
-          </a:xfrm>
-          <a:prstGeom prst="rect">
-            <a:avLst/>
-          </a:prstGeom>
-          <a:noFill/>
-        </p:spPr>
-        <p:txBody>
-          <a:bodyPr wrap="square">
-            <a:spAutoFit/>
-          </a:bodyPr>
-          <a:lstStyle/>
-          <a:p>
-            <a:r>
-              <a:rPr lang="en-US" sz="1400" b="1"/>
-              <a:t>Reference:</a:t>
-            </a:r>
-            <a:r>
-              <a:rPr lang="en-US" sz="1400"/>
-              <a:t> D. Foreman-Mackey et al. (2013), PASP 125, 306</a:t>
-            </a:r>
-            <a:endParaRPr lang="en-US"/>
+              <a:rPr sz="1500"/>
+              <a:t>例：ガスや ICS の倍率は負にならない</a:t>
+            </a:r>
+          </a:p>
+          <a:p>
+            <a:r>
+              <a:rPr sz="1800"/>
+              <a:t>「歩く人」 → 歩行者（walker）。今回は 32 人</a:t>
+            </a:r>
+          </a:p>
+          <a:p>
+            <a:r>
+              <a:rPr sz="1800"/>
+              <a:t>「足あとの記録」 → チェーン（サンプル）</a:t>
+            </a:r>
+          </a:p>
+          <a:p>
+            <a:r>
+              <a:rPr sz="1800"/>
+              <a:t>「一番高い足あと」 → 最良値</a:t>
+            </a:r>
+          </a:p>
+          <a:p>
+            <a:r>
+              <a:rPr sz="1800"/>
+              <a:t>「足あとの広がり」 → 誤差</a:t>
+            </a:r>
           </a:p>
         </p:txBody>
       </p:sp>
@@ -9333,7 +9282,7 @@
           <a:p>
             <a:r>
               <a:rPr sz="3000"/>
-              <a:t>MCMC をたとえで見る：霧の山を歩く</a:t>
+              <a:t>① 高さ＝点数の決め方（ベイズの定理）</a:t>
             </a:r>
           </a:p>
         </p:txBody>
@@ -9360,64 +9309,106 @@
           <a:p>
             <a:r>
               <a:rPr sz="1800"/>
-              <a:t>山の上の「場所」 → 倍率の組 θ</a:t>
+              <a:t>P(θ | D) = L(D | θ) × π(θ) ÷ P(D)</a:t>
+            </a:r>
+          </a:p>
+          <a:p>
+            <a:r>
+              <a:rPr sz="1800"/>
+              <a:t>P(θ | D)：場所 θ の「高さ」（＝点数）</a:t>
             </a:r>
           </a:p>
           <a:p>
             <a:pPr lvl="1"/>
             <a:r>
               <a:rPr sz="1500"/>
-              <a:t>θ = (f_iso, f_gas, f_ics, …, f_halo)。9 個あるので 9 次元の山</a:t>
+              <a:t>データ D を見た後で、θ がどれくらいもっともらしいか</a:t>
             </a:r>
           </a:p>
           <a:p>
             <a:r>
               <a:rPr sz="1800"/>
-              <a:t>その場所の「高さ」 → 点数（事後分布）</a:t>
+              <a:t>L(D | θ)：「高度計」の読み（尤度）</a:t>
+            </a:r>
+          </a:p>
+          <a:p>
+            <a:pPr lvl="1"/>
+            <a:r>
+              <a:rPr sz="1500"/>
+              <a:t>倍率が θ のとき、観測した光子の地図 D がどれくらい出やすいか</a:t>
             </a:r>
           </a:p>
           <a:p>
             <a:r>
               <a:rPr sz="1800"/>
-              <a:t>「高度計」 → 尤度の計算（手法② の ln L）</a:t>
+              <a:t>π(θ)：入ってよい場所か（事前分布）</a:t>
+            </a:r>
+          </a:p>
+          <a:p>
+            <a:pPr lvl="1"/>
+            <a:r>
+              <a:rPr sz="1500"/>
+              <a:t>入れる場所は全部同じ値、立ち入り禁止なら 0</a:t>
             </a:r>
           </a:p>
           <a:p>
             <a:r>
               <a:rPr sz="1800"/>
-              <a:t>「立ち入り禁止の場所」 → 事前分布</a:t>
+              <a:t>P(D)：海抜の基準。どの場所でも同じ数</a:t>
             </a:r>
           </a:p>
           <a:p>
             <a:pPr lvl="1"/>
             <a:r>
               <a:rPr sz="1500"/>
-              <a:t>例：ガスや ICS の倍率は負にならない</a:t>
+              <a:t>「どちらが高いか」を比べるだけなら消える → 計算しなくてよい</a:t>
             </a:r>
           </a:p>
           <a:p>
             <a:r>
               <a:rPr sz="1800"/>
-              <a:t>「歩く人」 → 歩行者（walker）。今回は 32 人</a:t>
-            </a:r>
-          </a:p>
-          <a:p>
-            <a:r>
-              <a:rPr sz="1800"/>
-              <a:t>「足あとの記録」 → チェーン（サンプル）</a:t>
-            </a:r>
-          </a:p>
-          <a:p>
-            <a:r>
-              <a:rPr sz="1800"/>
-              <a:t>「一番高い足あと」 → 最良値</a:t>
-            </a:r>
-          </a:p>
-          <a:p>
-            <a:r>
-              <a:rPr sz="1800"/>
-              <a:t>「足あとの広がり」 → 誤差</a:t>
-            </a:r>
+              <a:t>計算では対数で：ln(高さ) = ln L + ln π</a:t>
+            </a:r>
+          </a:p>
+        </p:txBody>
+      </p:sp>
+      <p:sp>
+        <p:nvSpPr>
+          <p:cNvPr id="8" name="TextBox 7">
+            <a:extLst>
+              <a:ext uri="{FF2B5EF4-FFF2-40B4-BE49-F238E27FC236}">
+                <a16:creationId xmlns:a16="http://schemas.microsoft.com/office/drawing/2014/main" id="{F85CD606-E3CE-F314-B3EE-F3D7028115CB}"/>
+              </a:ext>
+            </a:extLst>
+          </p:cNvPr>
+          <p:cNvSpPr txBox="1"/>
+          <p:nvPr/>
+        </p:nvSpPr>
+        <p:spPr>
+          <a:xfrm>
+            <a:off x="5837182" y="5663239"/>
+            <a:ext cx="6093372" cy="923330"/>
+          </a:xfrm>
+          <a:prstGeom prst="rect">
+            <a:avLst/>
+          </a:prstGeom>
+          <a:noFill/>
+        </p:spPr>
+        <p:txBody>
+          <a:bodyPr wrap="square">
+            <a:spAutoFit/>
+          </a:bodyPr>
+          <a:lstStyle/>
+          <a:p>
+            <a:r>
+              <a:rPr lang="en-US" sz="1400" b="1"/>
+              <a:t>Reference:</a:t>
+            </a:r>
+            <a:r>
+              <a:rPr lang="en-US" sz="1400"/>
+              <a:t> D. Foreman-Mackey et al. (2013), PASP 125, 306</a:t>
+            </a:r>
+            <a:endParaRPr lang="en-US"/>
           </a:p>
         </p:txBody>
       </p:sp>
@@ -9463,7 +9454,7 @@
           <a:p>
             <a:r>
               <a:rPr sz="3000"/>
-              <a:t>① 高さ＝点数の決め方（ベイズの定理）</a:t>
+              <a:t>② 一歩の進み方（メトロポリス法）</a:t>
             </a:r>
           </a:p>
         </p:txBody>
@@ -9490,65 +9481,64 @@
           <a:p>
             <a:r>
               <a:rPr sz="1800"/>
-              <a:t>P(θ | D) = L(D | θ) × π(θ) ÷ P(D)</a:t>
+              <a:t>1. 今いる場所 θ から、少しずれた場所 θ′ に足を出す</a:t>
+            </a:r>
+          </a:p>
+          <a:p>
+            <a:pPr lvl="1"/>
+            <a:r>
+              <a:rPr sz="1500"/>
+              <a:t>どれだけずらすかは乱数で決める</a:t>
             </a:r>
           </a:p>
           <a:p>
             <a:r>
               <a:rPr sz="1800"/>
-              <a:t>P(θ | D)：場所 θ の「高さ」（＝点数）</a:t>
+              <a:t>2. 高度計で両方を読み、比 r = 高さ(θ′) ÷ 高さ(θ)</a:t>
+            </a:r>
+          </a:p>
+          <a:p>
+            <a:r>
+              <a:rPr sz="1800"/>
+              <a:t>3. r ≥ 1（上り）なら、必ず θ′ に移る</a:t>
+            </a:r>
+          </a:p>
+          <a:p>
+            <a:r>
+              <a:rPr sz="1800"/>
+              <a:t>4. r &lt; 1（下り）なら、確率 r で移る</a:t>
             </a:r>
           </a:p>
           <a:p>
             <a:pPr lvl="1"/>
             <a:r>
               <a:rPr sz="1500"/>
-              <a:t>データ D を見た後で、θ がどれくらいもっともらしいか</a:t>
+              <a:t>0〜1 の乱数を引き、r より小さければ移る</a:t>
             </a:r>
           </a:p>
           <a:p>
             <a:r>
               <a:rPr sz="1800"/>
-              <a:t>L(D | θ)：「高度計」の読み（尤度）</a:t>
+              <a:t>5. 移っても移らなくても、今いる場所を足あとに記録</a:t>
+            </a:r>
+          </a:p>
+          <a:p>
+            <a:r>
+              <a:rPr sz="1800"/>
+              <a:t>6. 1〜5 を何千回もくり返す</a:t>
+            </a:r>
+          </a:p>
+          <a:p>
+            <a:r>
+              <a:rPr sz="1800"/>
+              <a:t>なぜ下りにも進む？</a:t>
             </a:r>
           </a:p>
           <a:p>
             <a:pPr lvl="1"/>
             <a:r>
               <a:rPr sz="1500"/>
-              <a:t>倍率が θ のとき、観測した光子の地図 D がどれくらい出やすいか</a:t>
-            </a:r>
-          </a:p>
-          <a:p>
-            <a:r>
-              <a:rPr sz="1800"/>
-              <a:t>π(θ)：入ってよい場所か（事前分布）</a:t>
-            </a:r>
-          </a:p>
-          <a:p>
-            <a:pPr lvl="1"/>
-            <a:r>
-              <a:rPr sz="1500"/>
-              <a:t>入れる場所は全部同じ値、立ち入り禁止なら 0</a:t>
-            </a:r>
-          </a:p>
-          <a:p>
-            <a:r>
-              <a:rPr sz="1800"/>
-              <a:t>P(D)：海抜の基準。どの場所でも同じ数</a:t>
-            </a:r>
-          </a:p>
-          <a:p>
-            <a:pPr lvl="1"/>
-            <a:r>
-              <a:rPr sz="1500"/>
-              <a:t>「どちらが高いか」を比べるだけなら消える → 計算しなくてよい</a:t>
-            </a:r>
-          </a:p>
-          <a:p>
-            <a:r>
-              <a:rPr sz="1800"/>
-              <a:t>計算では対数で：ln(高さ) = ln L + ln π</a:t>
+              <a:t>上りだけだと頂上で止まり、山の広がり（誤差）が分からないから</a:t>
             </a:r>
           </a:p>
         </p:txBody>
@@ -9587,7 +9577,7 @@
             </a:r>
             <a:r>
               <a:rPr lang="en-US" sz="1400"/>
-              <a:t> D. Foreman-Mackey et al. (2013), PASP 125, 306</a:t>
+              <a:t> N. Metropolis et al. (1953), J. Chem. Phys. 21, 1087</a:t>
             </a:r>
             <a:endParaRPr lang="en-US"/>
           </a:p>
@@ -9635,111 +9625,45 @@
           <a:p>
             <a:r>
               <a:rPr sz="3000"/>
-              <a:t>② 一歩の進み方（メトロポリス法）</a:t>
-            </a:r>
-          </a:p>
-        </p:txBody>
-      </p:sp>
-      <p:sp>
-        <p:nvSpPr>
-          <p:cNvPr id="3" name="Content Placeholder 2"/>
-          <p:cNvSpPr>
-            <a:spLocks noGrp="1"/>
-          </p:cNvSpPr>
-          <p:nvPr>
-            <p:ph idx="1"/>
-          </p:nvPr>
-        </p:nvSpPr>
+              <a:t>③ 足あとはこうなる（説明用の例）</a:t>
+            </a:r>
+          </a:p>
+        </p:txBody>
+      </p:sp>
+      <p:pic>
+        <p:nvPicPr>
+          <p:cNvPr id="3" name="Picture 2" descr="image.png"/>
+          <p:cNvPicPr>
+            <a:picLocks noChangeAspect="1"/>
+          </p:cNvPicPr>
+          <p:nvPr/>
+        </p:nvPicPr>
+        <p:blipFill>
+          <a:blip r:embed="rId3"/>
+          <a:stretch>
+            <a:fillRect/>
+          </a:stretch>
+        </p:blipFill>
         <p:spPr>
           <a:xfrm>
-            <a:off x="548640" y="1371600"/>
-            <a:ext cx="5669280" cy="4297680"/>
+            <a:off x="731520" y="1280160"/>
+            <a:ext cx="10698480" cy="4279392"/>
           </a:xfrm>
+          <a:prstGeom prst="rect">
+            <a:avLst/>
+          </a:prstGeom>
         </p:spPr>
-        <p:txBody>
-          <a:bodyPr/>
-          <a:lstStyle/>
-          <a:p>
-            <a:r>
-              <a:rPr sz="1800"/>
-              <a:t>1. 今いる場所 θ から、少しずれた場所 θ′ に足を出す</a:t>
-            </a:r>
-          </a:p>
-          <a:p>
-            <a:pPr lvl="1"/>
-            <a:r>
-              <a:rPr sz="1500"/>
-              <a:t>どれだけずらすかは乱数で決める</a:t>
-            </a:r>
-          </a:p>
-          <a:p>
-            <a:r>
-              <a:rPr sz="1800"/>
-              <a:t>2. 高度計で両方を読み、比 r = 高さ(θ′) ÷ 高さ(θ)</a:t>
-            </a:r>
-          </a:p>
-          <a:p>
-            <a:r>
-              <a:rPr sz="1800"/>
-              <a:t>3. r ≥ 1（上り）なら、必ず θ′ に移る</a:t>
-            </a:r>
-          </a:p>
-          <a:p>
-            <a:r>
-              <a:rPr sz="1800"/>
-              <a:t>4. r &lt; 1（下り）なら、確率 r で移る</a:t>
-            </a:r>
-          </a:p>
-          <a:p>
-            <a:pPr lvl="1"/>
-            <a:r>
-              <a:rPr sz="1500"/>
-              <a:t>0〜1 の乱数を引き、r より小さければ移る</a:t>
-            </a:r>
-          </a:p>
-          <a:p>
-            <a:r>
-              <a:rPr sz="1800"/>
-              <a:t>5. 移っても移らなくても、今いる場所を足あとに記録</a:t>
-            </a:r>
-          </a:p>
-          <a:p>
-            <a:r>
-              <a:rPr sz="1800"/>
-              <a:t>6. 1〜5 を何千回もくり返す</a:t>
-            </a:r>
-          </a:p>
-          <a:p>
-            <a:r>
-              <a:rPr sz="1800"/>
-              <a:t>なぜ下りにも進む？</a:t>
-            </a:r>
-          </a:p>
-          <a:p>
-            <a:pPr lvl="1"/>
-            <a:r>
-              <a:rPr sz="1500"/>
-              <a:t>上りだけだと頂上で止まり、山の広がり（誤差）が分からないから</a:t>
-            </a:r>
-          </a:p>
-        </p:txBody>
-      </p:sp>
-      <p:sp>
-        <p:nvSpPr>
-          <p:cNvPr id="8" name="TextBox 7">
-            <a:extLst>
-              <a:ext uri="{FF2B5EF4-FFF2-40B4-BE49-F238E27FC236}">
-                <a16:creationId xmlns:a16="http://schemas.microsoft.com/office/drawing/2014/main" id="{F85CD606-E3CE-F314-B3EE-F3D7028115CB}"/>
-              </a:ext>
-            </a:extLst>
-          </p:cNvPr>
+      </p:pic>
+      <p:sp>
+        <p:nvSpPr>
+          <p:cNvPr id="4" name="TextBox 3"/>
           <p:cNvSpPr txBox="1"/>
           <p:nvPr/>
         </p:nvSpPr>
         <p:spPr>
           <a:xfrm>
-            <a:off x="5837182" y="5663239"/>
-            <a:ext cx="6093372" cy="923330"/>
+            <a:off x="548640" y="5669280"/>
+            <a:ext cx="11155680" cy="822960"/>
           </a:xfrm>
           <a:prstGeom prst="rect">
             <a:avLst/>
@@ -9753,14 +9677,9 @@
           <a:lstStyle/>
           <a:p>
             <a:r>
-              <a:rPr lang="en-US" sz="1400" b="1"/>
-              <a:t>Reference:</a:t>
-            </a:r>
-            <a:r>
-              <a:rPr lang="en-US" sz="1400"/>
-              <a:t> N. Metropolis et al. (1953), J. Chem. Phys. 21, 1087</a:t>
-            </a:r>
-            <a:endParaRPr lang="en-US"/>
+              <a:rPr sz="1800"/>
+              <a:t>左：足あと（縦＝倍率、横＝歩数）。最初の 200 歩は山にたどり着く途中なので捨てる。右：足あとのヒストグラム ＝ 山の形</a:t>
+            </a:r>
           </a:p>
         </p:txBody>
       </p:sp>
@@ -9983,45 +9902,105 @@
           <a:p>
             <a:r>
               <a:rPr sz="3000"/>
-              <a:t>③ 足あとはこうなる（説明用の例）</a:t>
-            </a:r>
-          </a:p>
-        </p:txBody>
-      </p:sp>
-      <p:pic>
-        <p:nvPicPr>
-          <p:cNvPr id="3" name="Picture 2" descr="image.png"/>
-          <p:cNvPicPr>
-            <a:picLocks noChangeAspect="1"/>
-          </p:cNvPicPr>
-          <p:nvPr/>
-        </p:nvPicPr>
-        <p:blipFill>
-          <a:blip r:embed="rId3"/>
-          <a:stretch>
-            <a:fillRect/>
-          </a:stretch>
-        </p:blipFill>
+              <a:t>MCMC の歩き方はいろいろある</a:t>
+            </a:r>
+          </a:p>
+        </p:txBody>
+      </p:sp>
+      <p:sp>
+        <p:nvSpPr>
+          <p:cNvPr id="3" name="Content Placeholder 2"/>
+          <p:cNvSpPr>
+            <a:spLocks noGrp="1"/>
+          </p:cNvSpPr>
+          <p:nvPr>
+            <p:ph idx="1"/>
+          </p:nvPr>
+        </p:nvSpPr>
         <p:spPr>
           <a:xfrm>
-            <a:off x="731520" y="1280160"/>
-            <a:ext cx="10698480" cy="4279392"/>
+            <a:off x="548640" y="1371600"/>
+            <a:ext cx="10789920" cy="4297680"/>
           </a:xfrm>
-          <a:prstGeom prst="rect">
-            <a:avLst/>
-          </a:prstGeom>
         </p:spPr>
-      </p:pic>
-      <p:sp>
-        <p:nvSpPr>
-          <p:cNvPr id="4" name="TextBox 3"/>
+        <p:txBody>
+          <a:bodyPr/>
+          <a:lstStyle/>
+          <a:p>
+            <a:r>
+              <a:rPr sz="2000"/>
+              <a:t>メトロポリス法（1953）：一番基本。少しずらして、比 r で移るか決める（②）</a:t>
+            </a:r>
+          </a:p>
+          <a:p>
+            <a:r>
+              <a:rPr sz="2000"/>
+              <a:t>ギブス法：倍率を 1 個ずつ順番に動かす</a:t>
+            </a:r>
+          </a:p>
+          <a:p>
+            <a:r>
+              <a:rPr sz="2000"/>
+              <a:t>ハミルトニアン MC：坂の傾きを使って、ボールを転がすように大きく動く</a:t>
+            </a:r>
+          </a:p>
+          <a:p>
+            <a:r>
+              <a:rPr sz="2000"/>
+              <a:t>アンサンブル法（2010）：何人も同時に歩き、仲間の位置で一歩を決める（④）</a:t>
+            </a:r>
+          </a:p>
+          <a:p>
+            <a:pPr lvl="1"/>
+            <a:r>
+              <a:rPr sz="1600"/>
+              <a:t>Python の道具 emcee がこれ。本研究はこれを使った</a:t>
+            </a:r>
+          </a:p>
+          <a:p>
+            <a:r>
+              <a:rPr sz="2000"/>
+              <a:t>似ているが別物：焼きなまし法</a:t>
+            </a:r>
+          </a:p>
+          <a:p>
+            <a:pPr lvl="1"/>
+            <a:r>
+              <a:rPr sz="1600"/>
+              <a:t>下りに進む確率をだんだん小さくして、頂上だけを探す。誤差は出ない</a:t>
+            </a:r>
+          </a:p>
+          <a:p>
+            <a:r>
+              <a:rPr sz="2000"/>
+              <a:t>Totani は「MCMC」とだけ書いていて、どの歩き方かは書いていない</a:t>
+            </a:r>
+          </a:p>
+          <a:p>
+            <a:pPr lvl="1"/>
+            <a:r>
+              <a:rPr sz="1600"/>
+              <a:t>本研究は、天文学で広く使われ、細長い山（ガスと ICS の縮退）に強い emcee を選んだ</a:t>
+            </a:r>
+          </a:p>
+        </p:txBody>
+      </p:sp>
+      <p:sp>
+        <p:nvSpPr>
+          <p:cNvPr id="8" name="TextBox 7">
+            <a:extLst>
+              <a:ext uri="{FF2B5EF4-FFF2-40B4-BE49-F238E27FC236}">
+                <a16:creationId xmlns:a16="http://schemas.microsoft.com/office/drawing/2014/main" id="{F85CD606-E3CE-F314-B3EE-F3D7028115CB}"/>
+              </a:ext>
+            </a:extLst>
+          </p:cNvPr>
           <p:cNvSpPr txBox="1"/>
           <p:nvPr/>
         </p:nvSpPr>
         <p:spPr>
           <a:xfrm>
-            <a:off x="548640" y="5669280"/>
-            <a:ext cx="11155680" cy="822960"/>
+            <a:off x="5837182" y="5663239"/>
+            <a:ext cx="6093372" cy="923330"/>
           </a:xfrm>
           <a:prstGeom prst="rect">
             <a:avLst/>
@@ -10035,9 +10014,14 @@
           <a:lstStyle/>
           <a:p>
             <a:r>
-              <a:rPr sz="1800"/>
-              <a:t>左：足あと（縦＝倍率、横＝歩数）。最初の 200 歩は山にたどり着く途中なので捨てる。右：足あとのヒストグラム ＝ 山の形</a:t>
-            </a:r>
+              <a:rPr lang="en-US" sz="1400" b="1"/>
+              <a:t>Reference:</a:t>
+            </a:r>
+            <a:r>
+              <a:rPr lang="en-US" sz="1400"/>
+              <a:t> D. Foreman-Mackey et al. (2013), PASP 125, 306</a:t>
+            </a:r>
+            <a:endParaRPr lang="en-US"/>
           </a:p>
         </p:txBody>
       </p:sp>
@@ -10083,7 +10067,7 @@
           <a:p>
             <a:r>
               <a:rPr sz="3000"/>
-              <a:t>MCMC の歩き方はいろいろある</a:t>
+              <a:t>④ 32 人で歩く（emcee）</a:t>
             </a:r>
           </a:p>
         </p:txBody>
@@ -10101,7 +10085,7 @@
         <p:spPr>
           <a:xfrm>
             <a:off x="548640" y="1371600"/>
-            <a:ext cx="10789920" cy="4297680"/>
+            <a:ext cx="5669280" cy="4297680"/>
           </a:xfrm>
         </p:spPr>
         <p:txBody>
@@ -10109,59 +10093,66 @@
           <a:lstStyle/>
           <a:p>
             <a:r>
-              <a:rPr sz="2000"/>
-              <a:t>メトロポリス法（1953）：一番基本。少しずらして、比 r で移るか決める（②）</a:t>
-            </a:r>
-          </a:p>
-          <a:p>
-            <a:r>
-              <a:rPr sz="2000"/>
-              <a:t>ギブス法：倍率を 1 個ずつ順番に動かす</a:t>
-            </a:r>
-          </a:p>
-          <a:p>
-            <a:r>
-              <a:rPr sz="2000"/>
-              <a:t>ハミルトニアン MC：坂の傾きを使って、ボールを転がすように大きく動く</a:t>
-            </a:r>
-          </a:p>
-          <a:p>
-            <a:r>
-              <a:rPr sz="2000"/>
-              <a:t>アンサンブル法（2010）：何人も同時に歩き、仲間の位置で一歩を決める（④）</a:t>
+              <a:rPr sz="1600"/>
+              <a:t>1 人だと、細長い山で迷いやすい</a:t>
             </a:r>
           </a:p>
           <a:p>
             <a:pPr lvl="1"/>
             <a:r>
+              <a:rPr sz="1400"/>
+              <a:t>例：ガスと ICS の縮退。片方を上げて片方を下げても高さがほぼ同じ</a:t>
+            </a:r>
+          </a:p>
+          <a:p>
+            <a:r>
               <a:rPr sz="1600"/>
-              <a:t>Python の道具 emcee がこれ。本研究はこれを使った</a:t>
-            </a:r>
-          </a:p>
-          <a:p>
-            <a:r>
-              <a:rPr sz="2000"/>
-              <a:t>似ているが別物：焼きなまし法</a:t>
+              <a:t>そこで 32 人が同時に歩き、仲間の位置を見て一歩を決める</a:t>
+            </a:r>
+          </a:p>
+          <a:p>
+            <a:r>
+              <a:rPr sz="1600"/>
+              <a:t>一歩の出し方（ストレッチ移動）</a:t>
             </a:r>
           </a:p>
           <a:p>
             <a:pPr lvl="1"/>
             <a:r>
+              <a:rPr sz="1400"/>
+              <a:t>自分 X_k から、ランダムに選んだ仲間 X_j への線を引く</a:t>
+            </a:r>
+          </a:p>
+          <a:p>
+            <a:pPr lvl="1"/>
+            <a:r>
+              <a:rPr sz="1400"/>
+              <a:t>その線の上で、Z 倍（1/2〜2 の乱数）伸ばした点に足を出す</a:t>
+            </a:r>
+          </a:p>
+          <a:p>
+            <a:pPr lvl="1"/>
+            <a:r>
+              <a:rPr sz="1400"/>
+              <a:t>Y = X_j + Z (X_k − X_j)</a:t>
+            </a:r>
+          </a:p>
+          <a:p>
+            <a:r>
               <a:rPr sz="1600"/>
-              <a:t>下りに進む確率をだんだん小さくして、頂上だけを探す。誤差は出ない</a:t>
-            </a:r>
-          </a:p>
-          <a:p>
-            <a:r>
-              <a:rPr sz="2000"/>
-              <a:t>Totani は「MCMC」とだけ書いていて、どの歩き方かは書いていない</a:t>
-            </a:r>
-          </a:p>
-          <a:p>
-            <a:pPr lvl="1"/>
+              <a:t>移るかどうかは ② と同じ考え（Z⁸ を掛けて補正）</a:t>
+            </a:r>
+          </a:p>
+          <a:p>
             <a:r>
               <a:rPr sz="1600"/>
-              <a:t>本研究は、天文学で広く使われ、細長い山（ガスと ICS の縮退）に強い emcee を選んだ</a:t>
+              <a:t>出発点：全員、Totani と同じ初期値の近く。6000 歩</a:t>
+            </a:r>
+          </a:p>
+          <a:p>
+            <a:r>
+              <a:rPr sz="1600"/>
+              <a:t>emcee はこの歩き方の Python の道具の名前。32 人・6000 歩は本研究の設定</a:t>
             </a:r>
           </a:p>
         </p:txBody>
@@ -10200,7 +10191,7 @@
             </a:r>
             <a:r>
               <a:rPr lang="en-US" sz="1400"/>
-              <a:t> D. Foreman-Mackey et al. (2013), PASP 125, 306</a:t>
+              <a:t> J. Goodman &amp; J. Weare (2010), Comm. App. Math. Comp. Sci. 5, 65</a:t>
             </a:r>
             <a:endParaRPr lang="en-US"/>
           </a:p>
@@ -10248,7 +10239,7 @@
           <a:p>
             <a:r>
               <a:rPr sz="3000"/>
-              <a:t>④ 32 人で歩く（emcee）</a:t>
+              <a:t>⑤ 歩き終わったら：最良値と誤差</a:t>
             </a:r>
           </a:p>
         </p:txBody>
@@ -10274,66 +10265,68 @@
           <a:lstStyle/>
           <a:p>
             <a:r>
-              <a:rPr sz="1600"/>
-              <a:t>1 人だと、細長い山で迷いやすい</a:t>
+              <a:rPr sz="1800"/>
+              <a:t>一番高い足あと → 最良の倍率（Totani と同じ）</a:t>
             </a:r>
           </a:p>
           <a:p>
             <a:pPr lvl="1"/>
             <a:r>
-              <a:rPr sz="1400"/>
-              <a:t>例：ガスと ICS の縮退。片方を上げて片方を下げても高さがほぼ同じ</a:t>
-            </a:r>
-          </a:p>
-          <a:p>
-            <a:r>
-              <a:rPr sz="1600"/>
-              <a:t>そこで 32 人が同時に歩き、仲間の位置を見て一歩を決める</a:t>
-            </a:r>
-          </a:p>
-          <a:p>
-            <a:r>
-              <a:rPr sz="1600"/>
-              <a:t>一歩の出し方（ストレッチ移動）</a:t>
+              <a:rPr sz="1500"/>
+              <a:t>20.8 GeV：ハローの倍率 1.51</a:t>
+            </a:r>
+          </a:p>
+          <a:p>
+            <a:r>
+              <a:rPr sz="1800"/>
+              <a:t>足あとの広がり → 誤差</a:t>
             </a:r>
           </a:p>
           <a:p>
             <a:pPr lvl="1"/>
             <a:r>
-              <a:rPr sz="1400"/>
-              <a:t>自分 X_k から、ランダムに選んだ仲間 X_j への線を引く</a:t>
+              <a:rPr sz="1500"/>
+              <a:t>最初の 2000 歩（ふもとから登っている途中）は捨て、残りの下から 16%〜84%</a:t>
             </a:r>
           </a:p>
           <a:p>
             <a:pPr lvl="1"/>
             <a:r>
-              <a:rPr sz="1400"/>
-              <a:t>その線の上で、Z 倍（1/2〜2 の乱数）伸ばした点に足を出す</a:t>
+              <a:rPr sz="1500"/>
+              <a:t>20.8 GeV：1.42〜1.58</a:t>
+            </a:r>
+          </a:p>
+          <a:p>
+            <a:r>
+              <a:rPr sz="1800"/>
+              <a:t>有意度：ハローあり・なしの山を別々に歩く</a:t>
             </a:r>
           </a:p>
           <a:p>
             <a:pPr lvl="1"/>
             <a:r>
-              <a:rPr sz="1400"/>
-              <a:t>Y = X_j + Z (X_k − X_j)</a:t>
-            </a:r>
-          </a:p>
-          <a:p>
-            <a:r>
-              <a:rPr sz="1600"/>
-              <a:t>移るかどうかは ② と同じ考え（Z⁸ を掛けて補正）</a:t>
-            </a:r>
-          </a:p>
-          <a:p>
-            <a:r>
-              <a:rPr sz="1600"/>
-              <a:t>出発点：全員、Totani と同じ初期値の近く。6000 歩</a:t>
-            </a:r>
-          </a:p>
-          <a:p>
-            <a:r>
-              <a:rPr sz="1600"/>
-              <a:t>emcee はこの歩き方の Python の道具の名前。32 人・6000 歩は本研究の設定</a:t>
+              <a:rPr sz="1500"/>
+              <a:t>それぞれの一番高い足あとの高さの差 Δln L → σ = √(2Δln L)</a:t>
+            </a:r>
+          </a:p>
+          <a:p>
+            <a:pPr lvl="1"/>
+            <a:r>
+              <a:rPr sz="1500"/>
+              <a:t>20.8 GeV：19.5σ</a:t>
+            </a:r>
+          </a:p>
+          <a:p>
+            <a:r>
+              <a:rPr sz="1800"/>
+              <a:t>注意：山の端まで歩き回るには、もっと長く歩くのが理想</a:t>
+            </a:r>
+          </a:p>
+          <a:p>
+            <a:pPr lvl="1"/>
+            <a:r>
+              <a:rPr sz="1500"/>
+              <a:t>誤差は目安。一番高い足あとは頂上に届いている</a:t>
             </a:r>
           </a:p>
         </p:txBody>
@@ -10372,7 +10365,7 @@
             </a:r>
             <a:r>
               <a:rPr lang="en-US" sz="1400"/>
-              <a:t> J. Goodman &amp; J. Weare (2010), Comm. App. Math. Comp. Sci. 5, 65</a:t>
+              <a:t> T. Totani (2025), arXiv:2507.07209 §2.2</a:t>
             </a:r>
             <a:endParaRPr lang="en-US"/>
           </a:p>
@@ -10419,180 +10412,6 @@
           <a:lstStyle/>
           <a:p>
             <a:r>
-              <a:rPr sz="3000"/>
-              <a:t>⑤ 歩き終わったら：最良値と誤差</a:t>
-            </a:r>
-          </a:p>
-        </p:txBody>
-      </p:sp>
-      <p:sp>
-        <p:nvSpPr>
-          <p:cNvPr id="3" name="Content Placeholder 2"/>
-          <p:cNvSpPr>
-            <a:spLocks noGrp="1"/>
-          </p:cNvSpPr>
-          <p:nvPr>
-            <p:ph idx="1"/>
-          </p:nvPr>
-        </p:nvSpPr>
-        <p:spPr>
-          <a:xfrm>
-            <a:off x="548640" y="1371600"/>
-            <a:ext cx="5669280" cy="4297680"/>
-          </a:xfrm>
-        </p:spPr>
-        <p:txBody>
-          <a:bodyPr/>
-          <a:lstStyle/>
-          <a:p>
-            <a:r>
-              <a:rPr sz="1800"/>
-              <a:t>一番高い足あと → 最良の倍率（Totani と同じ）</a:t>
-            </a:r>
-          </a:p>
-          <a:p>
-            <a:pPr lvl="1"/>
-            <a:r>
-              <a:rPr sz="1500"/>
-              <a:t>20.8 GeV：ハローの倍率 1.51</a:t>
-            </a:r>
-          </a:p>
-          <a:p>
-            <a:r>
-              <a:rPr sz="1800"/>
-              <a:t>足あとの広がり → 誤差</a:t>
-            </a:r>
-          </a:p>
-          <a:p>
-            <a:pPr lvl="1"/>
-            <a:r>
-              <a:rPr sz="1500"/>
-              <a:t>最初の 2000 歩（ふもとから登っている途中）は捨て、残りの下から 16%〜84%</a:t>
-            </a:r>
-          </a:p>
-          <a:p>
-            <a:pPr lvl="1"/>
-            <a:r>
-              <a:rPr sz="1500"/>
-              <a:t>20.8 GeV：1.42〜1.58</a:t>
-            </a:r>
-          </a:p>
-          <a:p>
-            <a:r>
-              <a:rPr sz="1800"/>
-              <a:t>有意度：ハローあり・なしの山を別々に歩く</a:t>
-            </a:r>
-          </a:p>
-          <a:p>
-            <a:pPr lvl="1"/>
-            <a:r>
-              <a:rPr sz="1500"/>
-              <a:t>それぞれの一番高い足あとの高さの差 Δln L → σ = √(2Δln L)</a:t>
-            </a:r>
-          </a:p>
-          <a:p>
-            <a:pPr lvl="1"/>
-            <a:r>
-              <a:rPr sz="1500"/>
-              <a:t>20.8 GeV：19.5σ</a:t>
-            </a:r>
-          </a:p>
-          <a:p>
-            <a:r>
-              <a:rPr sz="1800"/>
-              <a:t>注意：山の端まで歩き回るには、もっと長く歩くのが理想</a:t>
-            </a:r>
-          </a:p>
-          <a:p>
-            <a:pPr lvl="1"/>
-            <a:r>
-              <a:rPr sz="1500"/>
-              <a:t>誤差は目安。一番高い足あとは頂上に届いている</a:t>
-            </a:r>
-          </a:p>
-        </p:txBody>
-      </p:sp>
-      <p:sp>
-        <p:nvSpPr>
-          <p:cNvPr id="8" name="TextBox 7">
-            <a:extLst>
-              <a:ext uri="{FF2B5EF4-FFF2-40B4-BE49-F238E27FC236}">
-                <a16:creationId xmlns:a16="http://schemas.microsoft.com/office/drawing/2014/main" id="{F85CD606-E3CE-F314-B3EE-F3D7028115CB}"/>
-              </a:ext>
-            </a:extLst>
-          </p:cNvPr>
-          <p:cNvSpPr txBox="1"/>
-          <p:nvPr/>
-        </p:nvSpPr>
-        <p:spPr>
-          <a:xfrm>
-            <a:off x="5837182" y="5663239"/>
-            <a:ext cx="6093372" cy="923330"/>
-          </a:xfrm>
-          <a:prstGeom prst="rect">
-            <a:avLst/>
-          </a:prstGeom>
-          <a:noFill/>
-        </p:spPr>
-        <p:txBody>
-          <a:bodyPr wrap="square">
-            <a:spAutoFit/>
-          </a:bodyPr>
-          <a:lstStyle/>
-          <a:p>
-            <a:r>
-              <a:rPr lang="en-US" sz="1400" b="1"/>
-              <a:t>Reference:</a:t>
-            </a:r>
-            <a:r>
-              <a:rPr lang="en-US" sz="1400"/>
-              <a:t> T. Totani (2025), arXiv:2507.07209 §2.2</a:t>
-            </a:r>
-            <a:endParaRPr lang="en-US"/>
-          </a:p>
-        </p:txBody>
-      </p:sp>
-    </p:spTree>
-  </p:cSld>
-  <p:clrMapOvr>
-    <a:masterClrMapping/>
-  </p:clrMapOvr>
-</p:sld>
-</file>
-
-<file path=ppt/slides/slide24.xml><?xml version="1.0" encoding="utf-8"?>
-<p:sld xmlns:a="http://schemas.openxmlformats.org/drawingml/2006/main" xmlns:r="http://schemas.openxmlformats.org/officeDocument/2006/relationships" xmlns:p="http://schemas.openxmlformats.org/presentationml/2006/main">
-  <p:cSld>
-    <p:spTree>
-      <p:nvGrpSpPr>
-        <p:cNvPr id="1" name=""/>
-        <p:cNvGrpSpPr/>
-        <p:nvPr/>
-      </p:nvGrpSpPr>
-      <p:grpSpPr>
-        <a:xfrm>
-          <a:off x="0" y="0"/>
-          <a:ext cx="0" cy="0"/>
-          <a:chOff x="0" y="0"/>
-          <a:chExt cx="0" cy="0"/>
-        </a:xfrm>
-      </p:grpSpPr>
-      <p:sp>
-        <p:nvSpPr>
-          <p:cNvPr id="2" name="Title 1"/>
-          <p:cNvSpPr>
-            <a:spLocks noGrp="1"/>
-          </p:cNvSpPr>
-          <p:nvPr>
-            <p:ph type="title"/>
-          </p:nvPr>
-        </p:nvSpPr>
-        <p:spPr/>
-        <p:txBody>
-          <a:bodyPr/>
-          <a:lstStyle/>
-          <a:p>
-            <a:r>
               <a:rPr sz="3400"/>
               <a:t>結果：Totani の超過を再現</a:t>
             </a:r>
@@ -10701,7 +10520,7 @@
 </p:sld>
 </file>
 
-<file path=ppt/slides/slide25.xml><?xml version="1.0" encoding="utf-8"?>
+<file path=ppt/slides/slide24.xml><?xml version="1.0" encoding="utf-8"?>
 <p:sld xmlns:a="http://schemas.openxmlformats.org/drawingml/2006/main" xmlns:r="http://schemas.openxmlformats.org/officeDocument/2006/relationships" xmlns:p="http://schemas.openxmlformats.org/presentationml/2006/main">
   <p:cSld>
     <p:spTree>
@@ -10832,7 +10651,7 @@
 </p:sld>
 </file>
 
-<file path=ppt/slides/slide26.xml><?xml version="1.0" encoding="utf-8"?>
+<file path=ppt/slides/slide25.xml><?xml version="1.0" encoding="utf-8"?>
 <p:sld xmlns:a="http://schemas.openxmlformats.org/drawingml/2006/main" xmlns:r="http://schemas.openxmlformats.org/officeDocument/2006/relationships" xmlns:p="http://schemas.openxmlformats.org/presentationml/2006/main">
   <p:cSld>
     <p:spTree>
@@ -10942,7 +10761,7 @@
 </p:sld>
 </file>
 
-<file path=ppt/slides/slide27.xml><?xml version="1.0" encoding="utf-8"?>
+<file path=ppt/slides/slide26.xml><?xml version="1.0" encoding="utf-8"?>
 <p:sld xmlns:a="http://schemas.openxmlformats.org/drawingml/2006/main" xmlns:r="http://schemas.openxmlformats.org/officeDocument/2006/relationships" xmlns:p="http://schemas.openxmlformats.org/presentationml/2006/main">
   <p:cSld>
     <p:spTree>
@@ -11093,6 +10912,106 @@
 </p:sld>
 </file>
 
+<file path=ppt/slides/slide27.xml><?xml version="1.0" encoding="utf-8"?>
+<p:sld xmlns:a="http://schemas.openxmlformats.org/drawingml/2006/main" xmlns:r="http://schemas.openxmlformats.org/officeDocument/2006/relationships" xmlns:p="http://schemas.openxmlformats.org/presentationml/2006/main">
+  <p:cSld>
+    <p:spTree>
+      <p:nvGrpSpPr>
+        <p:cNvPr id="1" name=""/>
+        <p:cNvGrpSpPr/>
+        <p:nvPr/>
+      </p:nvGrpSpPr>
+      <p:grpSpPr>
+        <a:xfrm>
+          <a:off x="0" y="0"/>
+          <a:ext cx="0" cy="0"/>
+          <a:chOff x="0" y="0"/>
+          <a:chExt cx="0" cy="0"/>
+        </a:xfrm>
+      </p:grpSpPr>
+      <p:sp>
+        <p:nvSpPr>
+          <p:cNvPr id="2" name="Title 1"/>
+          <p:cNvSpPr>
+            <a:spLocks noGrp="1"/>
+          </p:cNvSpPr>
+          <p:nvPr>
+            <p:ph type="title"/>
+          </p:nvPr>
+        </p:nvSpPr>
+        <p:spPr/>
+        <p:txBody>
+          <a:bodyPr/>
+          <a:lstStyle/>
+          <a:p>
+            <a:r>
+              <a:rPr sz="3000"/>
+              <a:t>縮退が引き起こした 2 つの疑問</a:t>
+            </a:r>
+          </a:p>
+        </p:txBody>
+      </p:sp>
+      <p:sp>
+        <p:nvSpPr>
+          <p:cNvPr id="3" name="Content Placeholder 2"/>
+          <p:cNvSpPr>
+            <a:spLocks noGrp="1"/>
+          </p:cNvSpPr>
+          <p:nvPr>
+            <p:ph idx="1"/>
+          </p:nvPr>
+        </p:nvSpPr>
+        <p:spPr>
+          <a:xfrm>
+            <a:off x="841248" y="1463040"/>
+            <a:ext cx="10515600" cy="4937760"/>
+          </a:xfrm>
+        </p:spPr>
+        <p:txBody>
+          <a:bodyPr/>
+          <a:lstStyle/>
+          <a:p>
+            <a:r>
+              <a:rPr sz="2400"/>
+              <a:t>① バブル領域を外すと 19.5σ → 5.0σ に落ちる</a:t>
+            </a:r>
+          </a:p>
+          <a:p>
+            <a:pPr lvl="1"/>
+            <a:r>
+              <a:rPr sz="2000"/>
+              <a:t>ハローは、本当は ICS やバブルの間違いでは？</a:t>
+            </a:r>
+          </a:p>
+          <a:p>
+            <a:r>
+              <a:rPr sz="2400"/>
+              <a:t>② 何も無い空でも、最大 4.5σ が出る</a:t>
+            </a:r>
+          </a:p>
+          <a:p>
+            <a:pPr lvl="1"/>
+            <a:r>
+              <a:rPr sz="2000"/>
+              <a:t>σ をそのまま信じてよいのか？</a:t>
+            </a:r>
+          </a:p>
+          <a:p>
+            <a:r>
+              <a:rPr sz="2400"/>
+              <a:t>→ 次から、1 つずつ調べた結果</a:t>
+            </a:r>
+          </a:p>
+        </p:txBody>
+      </p:sp>
+    </p:spTree>
+  </p:cSld>
+  <p:clrMapOvr>
+    <a:masterClrMapping/>
+  </p:clrMapOvr>
+</p:sld>
+</file>
+
 <file path=ppt/slides/slide28.xml><?xml version="1.0" encoding="utf-8"?>
 <p:sld xmlns:a="http://schemas.openxmlformats.org/drawingml/2006/main" xmlns:r="http://schemas.openxmlformats.org/officeDocument/2006/relationships" xmlns:p="http://schemas.openxmlformats.org/presentationml/2006/main">
   <p:cSld>
@@ -11126,8 +11045,8 @@
           <a:lstStyle/>
           <a:p>
             <a:r>
-              <a:rPr sz="3000"/>
-              <a:t>縮退が引き起こした 2 つの疑問</a:t>
+              <a:rPr sz="3400"/>
+              <a:t>① を調べる：手がかりはどこにあるか</a:t>
             </a:r>
           </a:p>
         </p:txBody>
@@ -11153,34 +11072,45 @@
           <a:lstStyle/>
           <a:p>
             <a:r>
-              <a:rPr sz="2400"/>
-              <a:t>① バブル領域を外すと 19.5σ → 5.0σ に落ちる</a:t>
+              <a:rPr sz="2200"/>
+              <a:t>フィッシャー情報：データがパラメータをどれだけ決められるか</a:t>
+            </a:r>
+          </a:p>
+          <a:p>
+            <a:r>
+              <a:rPr sz="2200"/>
+              <a:t>ICS など他の成分では説明できない「ハローだけの手がかり」を、空の場所ごとに計算</a:t>
             </a:r>
           </a:p>
           <a:p>
             <a:pPr lvl="1"/>
             <a:r>
+              <a:rPr sz="1800"/>
+              <a:t>その 54% がバブル領域（面積は 34%）に集中</a:t>
+            </a:r>
+          </a:p>
+          <a:p>
+            <a:r>
+              <a:rPr sz="2200"/>
+              <a:t>手がかりの減り方だけで予測すると 6.6σ、実測 5.0σ</a:t>
+            </a:r>
+          </a:p>
+          <a:p>
+            <a:r>
+              <a:rPr sz="2200"/>
+              <a:t>同じ形の領域を横にずらして外すと 15〜16σ</a:t>
+            </a:r>
+          </a:p>
+          <a:p>
+            <a:r>
+              <a:rPr sz="2200"/>
+              <a:t>→ 19 → 5σ は「手がかりを捨てた」から。汚染の証拠ではない</a:t>
+            </a:r>
+          </a:p>
+          <a:p>
+            <a:r>
               <a:rPr sz="2000"/>
-              <a:t>ハローは、本当は ICS やバブルの間違いでは？</a:t>
-            </a:r>
-          </a:p>
-          <a:p>
-            <a:r>
-              <a:rPr sz="2400"/>
-              <a:t>② 何も無い空でも、最大 4.5σ が出る</a:t>
-            </a:r>
-          </a:p>
-          <a:p>
-            <a:pPr lvl="1"/>
-            <a:r>
-              <a:rPr sz="2000"/>
-              <a:t>σ をそのまま信じてよいのか？</a:t>
-            </a:r>
-          </a:p>
-          <a:p>
-            <a:r>
-              <a:rPr sz="2400"/>
-              <a:t>→ 次から、1 つずつ調べた結果</a:t>
+              <a:t>たとえ：写真の真ん中を隠すと、2 つの光を見分けるヒントが減って自信が下がる</a:t>
             </a:r>
           </a:p>
         </p:txBody>
@@ -11227,7 +11157,7 @@
           <a:p>
             <a:r>
               <a:rPr sz="3400"/>
-              <a:t>① を調べる：手がかりはどこにあるか</a:t>
+              <a:t>① を調べる：ICS が犯人なら</a:t>
             </a:r>
           </a:p>
         </p:txBody>
@@ -11245,7 +11175,7 @@
         <p:spPr>
           <a:xfrm>
             <a:off x="841248" y="1463040"/>
-            <a:ext cx="10515600" cy="4937760"/>
+            <a:ext cx="10515600" cy="4114800"/>
           </a:xfrm>
         </p:spPr>
         <p:txBody>
@@ -11254,45 +11184,87 @@
           <a:p>
             <a:r>
               <a:rPr sz="2200"/>
-              <a:t>フィッシャー情報：データがパラメータをどれだけ決められるか</a:t>
+              <a:t>ICS をバブルの内と外で別々の明るさにして当てはめた</a:t>
+            </a:r>
+          </a:p>
+          <a:p>
+            <a:pPr lvl="1"/>
+            <a:r>
+              <a:rPr sz="1800"/>
+              <a:t>内側が約 2.3 倍明るければ、ハローの改善の 92% を ICS が説明</a:t>
             </a:r>
           </a:p>
           <a:p>
             <a:r>
               <a:rPr sz="2200"/>
-              <a:t>ICS など他の成分では説明できない「ハローだけの手がかり」を、空の場所ごとに計算</a:t>
+              <a:t>ICS の計算の近似（等方近似）を直しても 1.1〜1.3 倍</a:t>
             </a:r>
           </a:p>
           <a:p>
             <a:pPr lvl="1"/>
             <a:r>
               <a:rPr sz="1800"/>
-              <a:t>その 54% がバブル領域（面積は 34%）に集中</a:t>
+              <a:t>しかも外側のほうが大きくなる → 2.3 倍には届かない</a:t>
             </a:r>
           </a:p>
           <a:p>
             <a:r>
               <a:rPr sz="2200"/>
-              <a:t>手がかりの減り方だけで予測すると 6.6σ、実測 5.0σ</a:t>
+              <a:t>ICS を 3 種類に分けて、それぞれ自由に動かしても</a:t>
+            </a:r>
+          </a:p>
+          <a:p>
+            <a:pPr lvl="1"/>
+            <a:r>
+              <a:rPr sz="1800"/>
+              <a:t>19.5σ → 18.4σ（約 1σ しか下がらない）</a:t>
             </a:r>
           </a:p>
           <a:p>
             <a:r>
               <a:rPr sz="2200"/>
-              <a:t>同じ形の領域を横にずらして外すと 15〜16σ</a:t>
-            </a:r>
-          </a:p>
-          <a:p>
-            <a:r>
-              <a:rPr sz="2200"/>
-              <a:t>→ 19 → 5σ は「手がかりを捨てた」から。汚染の証拠ではない</a:t>
-            </a:r>
-          </a:p>
-          <a:p>
-            <a:r>
-              <a:rPr sz="2000"/>
-              <a:t>たとえ：写真の真ん中を隠すと、2 つの光を見分けるヒントが減って自信が下がる</a:t>
-            </a:r>
+              <a:t>→ ICS の「明るさ」の間違いでは、ハローを説明できない</a:t>
+            </a:r>
+          </a:p>
+        </p:txBody>
+      </p:sp>
+      <p:sp>
+        <p:nvSpPr>
+          <p:cNvPr id="8" name="TextBox 7">
+            <a:extLst>
+              <a:ext uri="{FF2B5EF4-FFF2-40B4-BE49-F238E27FC236}">
+                <a16:creationId xmlns:a16="http://schemas.microsoft.com/office/drawing/2014/main" id="{F85CD606-E3CE-F314-B3EE-F3D7028115CB}"/>
+              </a:ext>
+            </a:extLst>
+          </p:cNvPr>
+          <p:cNvSpPr txBox="1"/>
+          <p:nvPr/>
+        </p:nvSpPr>
+        <p:spPr>
+          <a:xfrm>
+            <a:off x="5837182" y="5663239"/>
+            <a:ext cx="6093372" cy="923330"/>
+          </a:xfrm>
+          <a:prstGeom prst="rect">
+            <a:avLst/>
+          </a:prstGeom>
+          <a:noFill/>
+        </p:spPr>
+        <p:txBody>
+          <a:bodyPr wrap="square">
+            <a:spAutoFit/>
+          </a:bodyPr>
+          <a:lstStyle/>
+          <a:p>
+            <a:r>
+              <a:rPr lang="en-US" sz="1400" b="1"/>
+              <a:t>Reference:</a:t>
+            </a:r>
+            <a:r>
+              <a:rPr lang="en-US" sz="1400"/>
+              <a:t> I. V. Moskalenko &amp; A. W. Strong (2000), ApJ 528, 357</a:t>
+            </a:r>
+            <a:endParaRPr lang="en-US"/>
           </a:p>
         </p:txBody>
       </p:sp>
@@ -11574,7 +11546,7 @@
           <a:p>
             <a:r>
               <a:rPr sz="3400"/>
-              <a:t>① を調べる：ICS が犯人なら</a:t>
+              <a:t>② を調べる：σ を信じてよいか</a:t>
             </a:r>
           </a:p>
         </p:txBody>
@@ -11601,46 +11573,46 @@
           <a:p>
             <a:r>
               <a:rPr sz="2200"/>
-              <a:t>ICS をバブルの内と外で別々の明るさにして当てはめた</a:t>
+              <a:t>何も無い空 23 か所で、天の川と同じ解析をした</a:t>
             </a:r>
           </a:p>
           <a:p>
             <a:pPr lvl="1"/>
             <a:r>
+              <a:rPr sz="1700"/>
+              <a:t>たとえ：真っ暗な所を写したのに「明かりがある」と出てしまう（誤検出）が、どれくらい起きるか</a:t>
+            </a:r>
+          </a:p>
+          <a:p>
+            <a:r>
+              <a:rPr sz="2200"/>
+              <a:t>本物の信号が無ければ、σ は「平均 0、ばらつき 1」になるはず</a:t>
+            </a:r>
+          </a:p>
+          <a:p>
+            <a:pPr lvl="1"/>
+            <a:r>
               <a:rPr sz="1800"/>
-              <a:t>内側が約 2.3 倍明るければ、ハローの改善の 92% を ICS が説明</a:t>
+              <a:t>Wilks の定理が成り立っていれば</a:t>
             </a:r>
           </a:p>
           <a:p>
             <a:r>
               <a:rPr sz="2200"/>
-              <a:t>ICS の計算の近似（等方近似）を直しても 1.1〜1.3 倍</a:t>
+              <a:t>実際のばらつき：1.26（95% 区間 1.14–1.39）</a:t>
             </a:r>
           </a:p>
           <a:p>
             <a:pPr lvl="1"/>
             <a:r>
               <a:rPr sz="1800"/>
-              <a:t>しかも外側のほうが大きくなる → 2.3 倍には届かない</a:t>
+              <a:t>σ は 1.26 倍大きく出ている</a:t>
             </a:r>
           </a:p>
           <a:p>
             <a:r>
               <a:rPr sz="2200"/>
-              <a:t>ICS を 3 種類に分けて、それぞれ自由に動かしても</a:t>
-            </a:r>
-          </a:p>
-          <a:p>
-            <a:pPr lvl="1"/>
-            <a:r>
-              <a:rPr sz="1800"/>
-              <a:t>19.5σ → 18.4σ（約 1σ しか下がらない）</a:t>
-            </a:r>
-          </a:p>
-          <a:p>
-            <a:r>
-              <a:rPr sz="2200"/>
-              <a:t>→ ICS の「明るさ」の間違いでは、ハローを説明できない</a:t>
+              <a:t>19.5σ を較正すると 19.5 ÷ 1.26 ≈ 15σ（14.0–17.0σ）</a:t>
             </a:r>
           </a:p>
         </p:txBody>
@@ -11679,7 +11651,7 @@
             </a:r>
             <a:r>
               <a:rPr lang="en-US" sz="1400"/>
-              <a:t> I. V. Moskalenko &amp; A. W. Strong (2000), ApJ 528, 357</a:t>
+              <a:t> B. Efron &amp; R. J. Tibshirani (1993), An Introduction to the Bootstrap</a:t>
             </a:r>
             <a:endParaRPr lang="en-US"/>
           </a:p>
@@ -11727,93 +11699,45 @@
           <a:p>
             <a:r>
               <a:rPr sz="3400"/>
-              <a:t>② を調べる：σ を信じてよいか</a:t>
-            </a:r>
-          </a:p>
-        </p:txBody>
-      </p:sp>
-      <p:sp>
-        <p:nvSpPr>
-          <p:cNvPr id="3" name="Content Placeholder 2"/>
-          <p:cNvSpPr>
-            <a:spLocks noGrp="1"/>
-          </p:cNvSpPr>
-          <p:nvPr>
-            <p:ph idx="1"/>
-          </p:nvPr>
-        </p:nvSpPr>
+              <a:t>② の結果：エネルギーごとのばらつき</a:t>
+            </a:r>
+          </a:p>
+        </p:txBody>
+      </p:sp>
+      <p:pic>
+        <p:nvPicPr>
+          <p:cNvPr id="3" name="Picture 2" descr="fig_null_variance.png"/>
+          <p:cNvPicPr>
+            <a:picLocks noChangeAspect="1"/>
+          </p:cNvPicPr>
+          <p:nvPr/>
+        </p:nvPicPr>
+        <p:blipFill>
+          <a:blip r:embed="rId3"/>
+          <a:stretch>
+            <a:fillRect/>
+          </a:stretch>
+        </p:blipFill>
         <p:spPr>
           <a:xfrm>
-            <a:off x="841248" y="1463040"/>
-            <a:ext cx="10515600" cy="4114800"/>
+            <a:off x="2103120" y="1234440"/>
+            <a:ext cx="7156174" cy="4114800"/>
           </a:xfrm>
+          <a:prstGeom prst="rect">
+            <a:avLst/>
+          </a:prstGeom>
         </p:spPr>
-        <p:txBody>
-          <a:bodyPr/>
-          <a:lstStyle/>
-          <a:p>
-            <a:r>
-              <a:rPr sz="2200"/>
-              <a:t>何も無い空 23 か所で、天の川と同じ解析をした</a:t>
-            </a:r>
-          </a:p>
-          <a:p>
-            <a:pPr lvl="1"/>
-            <a:r>
-              <a:rPr sz="1700"/>
-              <a:t>たとえ：真っ暗な所を写したのに「明かりがある」と出てしまう（誤検出）が、どれくらい起きるか</a:t>
-            </a:r>
-          </a:p>
-          <a:p>
-            <a:r>
-              <a:rPr sz="2200"/>
-              <a:t>本物の信号が無ければ、σ は「平均 0、ばらつき 1」になるはず</a:t>
-            </a:r>
-          </a:p>
-          <a:p>
-            <a:pPr lvl="1"/>
-            <a:r>
-              <a:rPr sz="1800"/>
-              <a:t>Wilks の定理が成り立っていれば</a:t>
-            </a:r>
-          </a:p>
-          <a:p>
-            <a:r>
-              <a:rPr sz="2200"/>
-              <a:t>実際のばらつき：1.26（95% 区間 1.14–1.39）</a:t>
-            </a:r>
-          </a:p>
-          <a:p>
-            <a:pPr lvl="1"/>
-            <a:r>
-              <a:rPr sz="1800"/>
-              <a:t>σ は 1.26 倍大きく出ている</a:t>
-            </a:r>
-          </a:p>
-          <a:p>
-            <a:r>
-              <a:rPr sz="2200"/>
-              <a:t>19.5σ を較正すると 19.5 ÷ 1.26 ≈ 15σ（14.0–17.0σ）</a:t>
-            </a:r>
-          </a:p>
-        </p:txBody>
-      </p:sp>
-      <p:sp>
-        <p:nvSpPr>
-          <p:cNvPr id="8" name="TextBox 7">
-            <a:extLst>
-              <a:ext uri="{FF2B5EF4-FFF2-40B4-BE49-F238E27FC236}">
-                <a16:creationId xmlns:a16="http://schemas.microsoft.com/office/drawing/2014/main" id="{F85CD606-E3CE-F314-B3EE-F3D7028115CB}"/>
-              </a:ext>
-            </a:extLst>
-          </p:cNvPr>
+      </p:pic>
+      <p:sp>
+        <p:nvSpPr>
+          <p:cNvPr id="4" name="TextBox 3"/>
           <p:cNvSpPr txBox="1"/>
           <p:nvPr/>
         </p:nvSpPr>
         <p:spPr>
           <a:xfrm>
-            <a:off x="5837182" y="5663239"/>
-            <a:ext cx="6093372" cy="923330"/>
+            <a:off x="457200" y="5486400"/>
+            <a:ext cx="11247120" cy="457200"/>
           </a:xfrm>
           <a:prstGeom prst="rect">
             <a:avLst/>
@@ -11827,14 +11751,9 @@
           <a:lstStyle/>
           <a:p>
             <a:r>
-              <a:rPr lang="en-US" sz="1400" b="1"/>
-              <a:t>Reference:</a:t>
-            </a:r>
-            <a:r>
-              <a:rPr lang="en-US" sz="1400"/>
-              <a:t> B. Efron &amp; R. J. Tibshirani (1993), An Introduction to the Bootstrap</a:t>
-            </a:r>
-            <a:endParaRPr lang="en-US"/>
+              <a:rPr sz="2000"/>
+              <a:t>どのエネルギーでもばらつきは 1 より大きい（光子が十分ある範囲）</a:t>
+            </a:r>
           </a:p>
         </p:txBody>
       </p:sp>
@@ -11880,60 +11799,59 @@
           <a:p>
             <a:r>
               <a:rPr sz="3400"/>
-              <a:t>② の結果：エネルギーごとのばらつき</a:t>
-            </a:r>
-          </a:p>
-        </p:txBody>
-      </p:sp>
-      <p:pic>
-        <p:nvPicPr>
-          <p:cNvPr id="3" name="Picture 2" descr="fig_null_variance.png"/>
-          <p:cNvPicPr>
-            <a:picLocks noChangeAspect="1"/>
-          </p:cNvPicPr>
-          <p:nvPr/>
-        </p:nvPicPr>
-        <p:blipFill>
-          <a:blip r:embed="rId3"/>
-          <a:stretch>
-            <a:fillRect/>
-          </a:stretch>
-        </p:blipFill>
+              <a:t>ここまでのまとめ</a:t>
+            </a:r>
+          </a:p>
+        </p:txBody>
+      </p:sp>
+      <p:sp>
+        <p:nvSpPr>
+          <p:cNvPr id="3" name="Content Placeholder 2"/>
+          <p:cNvSpPr>
+            <a:spLocks noGrp="1"/>
+          </p:cNvSpPr>
+          <p:nvPr>
+            <p:ph idx="1"/>
+          </p:nvPr>
+        </p:nvSpPr>
         <p:spPr>
           <a:xfrm>
-            <a:off x="2103120" y="1234440"/>
-            <a:ext cx="7156174" cy="4114800"/>
+            <a:off x="841248" y="1463040"/>
+            <a:ext cx="10515600" cy="4937760"/>
           </a:xfrm>
-          <a:prstGeom prst="rect">
-            <a:avLst/>
-          </a:prstGeom>
         </p:spPr>
-      </p:pic>
-      <p:sp>
-        <p:nvSpPr>
-          <p:cNvPr id="4" name="TextBox 3"/>
-          <p:cNvSpPr txBox="1"/>
-          <p:nvPr/>
-        </p:nvSpPr>
-        <p:spPr>
-          <a:xfrm>
-            <a:off x="457200" y="5486400"/>
-            <a:ext cx="11247120" cy="457200"/>
-          </a:xfrm>
-          <a:prstGeom prst="rect">
-            <a:avLst/>
-          </a:prstGeom>
-          <a:noFill/>
-        </p:spPr>
-        <p:txBody>
-          <a:bodyPr wrap="square">
-            <a:spAutoFit/>
-          </a:bodyPr>
-          <a:lstStyle/>
-          <a:p>
+        <p:txBody>
+          <a:bodyPr/>
+          <a:lstStyle/>
+          <a:p>
+            <a:r>
+              <a:rPr sz="2400"/>
+              <a:t>ICS の明るさ・バブル・計算の近似の間違いでは、超過を説明できない</a:t>
+            </a:r>
+          </a:p>
+          <a:p>
+            <a:r>
+              <a:rPr sz="2400"/>
+              <a:t>σ は 1.26 倍の過大評価 → 較正すると約 15σ</a:t>
+            </a:r>
+          </a:p>
+          <a:p>
+            <a:r>
+              <a:rPr sz="2400"/>
+              <a:t>ただし、暗黒物質の証拠ではない</a:t>
+            </a:r>
+          </a:p>
+          <a:p>
+            <a:pPr lvl="1"/>
             <a:r>
               <a:rPr sz="2000"/>
-              <a:t>どのエネルギーでもばらつきは 1 より大きい（光子が十分ある範囲）</a:t>
+              <a:t>ICS の「空間の形」の間違いは否定できていない</a:t>
+            </a:r>
+          </a:p>
+          <a:p>
+            <a:r>
+              <a:rPr sz="2400"/>
+              <a:t>→ 独立な確認として、矮小銀河を見る</a:t>
             </a:r>
           </a:p>
         </p:txBody>
@@ -11980,7 +11898,7 @@
           <a:p>
             <a:r>
               <a:rPr sz="3400"/>
-              <a:t>ここまでのまとめ</a:t>
+              <a:t>矮小銀河で確かめる</a:t>
             </a:r>
           </a:p>
         </p:txBody>
@@ -11998,7 +11916,7 @@
         <p:spPr>
           <a:xfrm>
             <a:off x="841248" y="1463040"/>
-            <a:ext cx="10515600" cy="4937760"/>
+            <a:ext cx="10515600" cy="4114800"/>
           </a:xfrm>
         </p:spPr>
         <p:txBody>
@@ -12007,33 +11925,80 @@
           <a:p>
             <a:r>
               <a:rPr sz="2400"/>
-              <a:t>ICS の明るさ・バブル・計算の近似の間違いでは、超過を説明できない</a:t>
+              <a:t>矮小銀河：天の川のまわりの小さな銀河</a:t>
+            </a:r>
+          </a:p>
+          <a:p>
+            <a:pPr lvl="1"/>
+            <a:r>
+              <a:rPr sz="2000"/>
+              <a:t>暗黒物質が多く、ガスや星形成が少ない（雑音が少ない）</a:t>
             </a:r>
           </a:p>
           <a:p>
             <a:r>
               <a:rPr sz="2400"/>
-              <a:t>σ は 1.26 倍の過大評価 → 較正すると約 15σ</a:t>
+              <a:t>暗黒物質なら、矮小銀河からも同じ 20 GeV の光が来るはず</a:t>
             </a:r>
           </a:p>
           <a:p>
             <a:r>
               <a:rPr sz="2400"/>
-              <a:t>ただし、暗黒物質の証拠ではない</a:t>
+              <a:t>同じ手法を、各天体のまわり半径 10° に使った</a:t>
             </a:r>
           </a:p>
           <a:p>
             <a:pPr lvl="1"/>
             <a:r>
               <a:rPr sz="2000"/>
-              <a:t>ICS の「空間の形」の間違いは否定できていない</a:t>
+              <a:t>矮小銀河 54 ＋ M31・M33 ＋ 何も無い空 23 か所</a:t>
             </a:r>
           </a:p>
           <a:p>
             <a:r>
               <a:rPr sz="2400"/>
-              <a:t>→ 独立な確認として、矮小銀河を見る</a:t>
-            </a:r>
+              <a:t>矮小銀河は小さい（0.2〜0.4°）ので、広がった ICS とは縮退しない</a:t>
+            </a:r>
+          </a:p>
+        </p:txBody>
+      </p:sp>
+      <p:sp>
+        <p:nvSpPr>
+          <p:cNvPr id="8" name="TextBox 7">
+            <a:extLst>
+              <a:ext uri="{FF2B5EF4-FFF2-40B4-BE49-F238E27FC236}">
+                <a16:creationId xmlns:a16="http://schemas.microsoft.com/office/drawing/2014/main" id="{F85CD606-E3CE-F314-B3EE-F3D7028115CB}"/>
+              </a:ext>
+            </a:extLst>
+          </p:cNvPr>
+          <p:cNvSpPr txBox="1"/>
+          <p:nvPr/>
+        </p:nvSpPr>
+        <p:spPr>
+          <a:xfrm>
+            <a:off x="5837182" y="5663239"/>
+            <a:ext cx="6093372" cy="923330"/>
+          </a:xfrm>
+          <a:prstGeom prst="rect">
+            <a:avLst/>
+          </a:prstGeom>
+          <a:noFill/>
+        </p:spPr>
+        <p:txBody>
+          <a:bodyPr wrap="square">
+            <a:spAutoFit/>
+          </a:bodyPr>
+          <a:lstStyle/>
+          <a:p>
+            <a:r>
+              <a:rPr lang="en-US" sz="1400" b="1"/>
+              <a:t>Reference:</a:t>
+            </a:r>
+            <a:r>
+              <a:rPr lang="en-US" sz="1400"/>
+              <a:t> A. B. Pace (2025), Open J. Astrophys. 8, 142</a:t>
+            </a:r>
+            <a:endParaRPr lang="en-US"/>
           </a:p>
         </p:txBody>
       </p:sp>
@@ -12079,7 +12044,7 @@
           <a:p>
             <a:r>
               <a:rPr sz="3400"/>
-              <a:t>矮小銀河で確かめる</a:t>
+              <a:t>予測の立て方：J ファクター</a:t>
             </a:r>
           </a:p>
         </p:txBody>
@@ -12106,39 +12071,38 @@
           <a:p>
             <a:r>
               <a:rPr sz="2400"/>
-              <a:t>矮小銀河：天の川のまわりの小さな銀河</a:t>
+              <a:t>対消滅の明るさ：F = ⟨σv⟩ / (8π m²) × dN/dE × J</a:t>
+            </a:r>
+          </a:p>
+          <a:p>
+            <a:r>
+              <a:rPr sz="2400"/>
+              <a:t>J ファクター = 暗黒物質の密度の 2 乗を、視線方向に足し合わせた量</a:t>
+            </a:r>
+          </a:p>
+          <a:p>
+            <a:r>
+              <a:rPr sz="2400"/>
+              <a:t>天の川と矮小銀河で粒子は同じ → 比をとると J の比だけが残る</a:t>
             </a:r>
           </a:p>
           <a:p>
             <a:pPr lvl="1"/>
             <a:r>
               <a:rPr sz="2000"/>
-              <a:t>暗黒物質が多く、ガスや星形成が少ない（雑音が少ない）</a:t>
+              <a:t>F_矮小 = F_天の川 × J_矮小 / J_天の川</a:t>
             </a:r>
           </a:p>
           <a:p>
             <a:r>
               <a:rPr sz="2400"/>
-              <a:t>暗黒物質なら、矮小銀河からも同じ 20 GeV の光が来るはず</a:t>
+              <a:t>粒子の質量などを仮定せずに「何σ見えるはずか」が出る</a:t>
             </a:r>
           </a:p>
           <a:p>
             <a:r>
               <a:rPr sz="2400"/>
-              <a:t>同じ手法を、各天体のまわり半径 10° に使った</a:t>
-            </a:r>
-          </a:p>
-          <a:p>
-            <a:pPr lvl="1"/>
-            <a:r>
-              <a:rPr sz="2000"/>
-              <a:t>矮小銀河 54 ＋ M31・M33 ＋ 何も無い空 23 か所</a:t>
-            </a:r>
-          </a:p>
-          <a:p>
-            <a:r>
-              <a:rPr sz="2400"/>
-              <a:t>矮小銀河は小さい（0.2〜0.4°）ので、広がった ICS とは縮退しない</a:t>
+              <a:t>矮小銀河の J は、星の動きから推定する</a:t>
             </a:r>
           </a:p>
         </p:txBody>
@@ -12177,7 +12141,7 @@
             </a:r>
             <a:r>
               <a:rPr lang="en-US" sz="1400"/>
-              <a:t> A. B. Pace (2025), Open J. Astrophys. 8, 142</a:t>
+              <a:t> A. B. Pace &amp; L. E. Strigari (2019), MNRAS 482, 3480</a:t>
             </a:r>
             <a:endParaRPr lang="en-US"/>
           </a:p>
@@ -12225,85 +12189,45 @@
           <a:p>
             <a:r>
               <a:rPr sz="3400"/>
-              <a:t>予測の立て方：J ファクター</a:t>
-            </a:r>
-          </a:p>
-        </p:txBody>
-      </p:sp>
-      <p:sp>
-        <p:nvSpPr>
-          <p:cNvPr id="3" name="Content Placeholder 2"/>
-          <p:cNvSpPr>
-            <a:spLocks noGrp="1"/>
-          </p:cNvSpPr>
-          <p:nvPr>
-            <p:ph idx="1"/>
-          </p:nvPr>
-        </p:nvSpPr>
+              <a:t>結果：どこにも信号は見えなかった</a:t>
+            </a:r>
+          </a:p>
+        </p:txBody>
+      </p:sp>
+      <p:pic>
+        <p:nvPicPr>
+          <p:cNvPr id="3" name="Picture 2" descr="fig_dwarf_results.png"/>
+          <p:cNvPicPr>
+            <a:picLocks noChangeAspect="1"/>
+          </p:cNvPicPr>
+          <p:nvPr/>
+        </p:nvPicPr>
+        <p:blipFill>
+          <a:blip r:embed="rId3"/>
+          <a:stretch>
+            <a:fillRect/>
+          </a:stretch>
+        </p:blipFill>
         <p:spPr>
           <a:xfrm>
-            <a:off x="841248" y="1463040"/>
-            <a:ext cx="10515600" cy="4114800"/>
+            <a:off x="2194560" y="1234440"/>
+            <a:ext cx="7156174" cy="4114800"/>
           </a:xfrm>
+          <a:prstGeom prst="rect">
+            <a:avLst/>
+          </a:prstGeom>
         </p:spPr>
-        <p:txBody>
-          <a:bodyPr/>
-          <a:lstStyle/>
-          <a:p>
-            <a:r>
-              <a:rPr sz="2400"/>
-              <a:t>対消滅の明るさ：F = ⟨σv⟩ / (8π m²) × dN/dE × J</a:t>
-            </a:r>
-          </a:p>
-          <a:p>
-            <a:r>
-              <a:rPr sz="2400"/>
-              <a:t>J ファクター = 暗黒物質の密度の 2 乗を、視線方向に足し合わせた量</a:t>
-            </a:r>
-          </a:p>
-          <a:p>
-            <a:r>
-              <a:rPr sz="2400"/>
-              <a:t>天の川と矮小銀河で粒子は同じ → 比をとると J の比だけが残る</a:t>
-            </a:r>
-          </a:p>
-          <a:p>
-            <a:pPr lvl="1"/>
-            <a:r>
-              <a:rPr sz="2000"/>
-              <a:t>F_矮小 = F_天の川 × J_矮小 / J_天の川</a:t>
-            </a:r>
-          </a:p>
-          <a:p>
-            <a:r>
-              <a:rPr sz="2400"/>
-              <a:t>粒子の質量などを仮定せずに「何σ見えるはずか」が出る</a:t>
-            </a:r>
-          </a:p>
-          <a:p>
-            <a:r>
-              <a:rPr sz="2400"/>
-              <a:t>矮小銀河の J は、星の動きから推定する</a:t>
-            </a:r>
-          </a:p>
-        </p:txBody>
-      </p:sp>
-      <p:sp>
-        <p:nvSpPr>
-          <p:cNvPr id="8" name="TextBox 7">
-            <a:extLst>
-              <a:ext uri="{FF2B5EF4-FFF2-40B4-BE49-F238E27FC236}">
-                <a16:creationId xmlns:a16="http://schemas.microsoft.com/office/drawing/2014/main" id="{F85CD606-E3CE-F314-B3EE-F3D7028115CB}"/>
-              </a:ext>
-            </a:extLst>
-          </p:cNvPr>
+      </p:pic>
+      <p:sp>
+        <p:nvSpPr>
+          <p:cNvPr id="4" name="TextBox 3"/>
           <p:cNvSpPr txBox="1"/>
           <p:nvPr/>
         </p:nvSpPr>
         <p:spPr>
           <a:xfrm>
-            <a:off x="5837182" y="5663239"/>
-            <a:ext cx="6093372" cy="923330"/>
+            <a:off x="457200" y="5486400"/>
+            <a:ext cx="11247120" cy="457200"/>
           </a:xfrm>
           <a:prstGeom prst="rect">
             <a:avLst/>
@@ -12317,14 +12241,9 @@
           <a:lstStyle/>
           <a:p>
             <a:r>
-              <a:rPr lang="en-US" sz="1400" b="1"/>
-              <a:t>Reference:</a:t>
-            </a:r>
-            <a:r>
-              <a:rPr lang="en-US" sz="1400"/>
-              <a:t> A. B. Pace &amp; L. E. Strigari (2019), MNRAS 482, 3480</a:t>
-            </a:r>
-            <a:endParaRPr lang="en-US"/>
+              <a:rPr sz="2000"/>
+              <a:t>どの天体・どのエネルギーでも最大 +3.46σ（何も無い空でも 4.50σ）</a:t>
+            </a:r>
           </a:p>
         </p:txBody>
       </p:sp>
@@ -12370,60 +12289,71 @@
           <a:p>
             <a:r>
               <a:rPr sz="3400"/>
-              <a:t>結果：どこにも信号は見えなかった</a:t>
-            </a:r>
-          </a:p>
-        </p:txBody>
-      </p:sp>
-      <p:pic>
-        <p:nvPicPr>
-          <p:cNvPr id="3" name="Picture 2" descr="fig_dwarf_results.png"/>
-          <p:cNvPicPr>
-            <a:picLocks noChangeAspect="1"/>
-          </p:cNvPicPr>
-          <p:nvPr/>
-        </p:nvPicPr>
-        <p:blipFill>
-          <a:blip r:embed="rId3"/>
-          <a:stretch>
-            <a:fillRect/>
-          </a:stretch>
-        </p:blipFill>
+              <a:t>天体をまとめて比べる</a:t>
+            </a:r>
+          </a:p>
+        </p:txBody>
+      </p:sp>
+      <p:sp>
+        <p:nvSpPr>
+          <p:cNvPr id="3" name="Content Placeholder 2"/>
+          <p:cNvSpPr>
+            <a:spLocks noGrp="1"/>
+          </p:cNvSpPr>
+          <p:nvPr>
+            <p:ph idx="1"/>
+          </p:nvPr>
+        </p:nvSpPr>
         <p:spPr>
           <a:xfrm>
-            <a:off x="2194560" y="1234440"/>
-            <a:ext cx="7156174" cy="4114800"/>
+            <a:off x="841248" y="1463040"/>
+            <a:ext cx="10515600" cy="4937760"/>
           </a:xfrm>
-          <a:prstGeom prst="rect">
-            <a:avLst/>
-          </a:prstGeom>
         </p:spPr>
-      </p:pic>
-      <p:sp>
-        <p:nvSpPr>
-          <p:cNvPr id="4" name="TextBox 3"/>
-          <p:cNvSpPr txBox="1"/>
-          <p:nvPr/>
-        </p:nvSpPr>
-        <p:spPr>
-          <a:xfrm>
-            <a:off x="457200" y="5486400"/>
-            <a:ext cx="11247120" cy="457200"/>
-          </a:xfrm>
-          <a:prstGeom prst="rect">
-            <a:avLst/>
-          </a:prstGeom>
-          <a:noFill/>
-        </p:spPr>
-        <p:txBody>
-          <a:bodyPr wrap="square">
-            <a:spAutoFit/>
-          </a:bodyPr>
-          <a:lstStyle/>
-          <a:p>
+        <p:txBody>
+          <a:bodyPr/>
+          <a:lstStyle/>
+          <a:p>
+            <a:r>
+              <a:rPr sz="2400"/>
+              <a:t>1 個ずつでは弱いので、J が求まる 43 天体をまとめる</a:t>
+            </a:r>
+          </a:p>
+          <a:p>
+            <a:r>
+              <a:rPr sz="2400"/>
+              <a:t>T = Σ w_i z_i / √( Σ w_i² )、重み w_i = 天体 i の予測 σ</a:t>
+            </a:r>
+          </a:p>
+          <a:p>
+            <a:pPr lvl="1"/>
             <a:r>
               <a:rPr sz="2000"/>
-              <a:t>どの天体・どのエネルギーでも最大 +3.46σ（何も無い空でも 4.50σ）</a:t>
+              <a:t>z_i：天体 i の実測の σ（20 GeV）</a:t>
+            </a:r>
+          </a:p>
+          <a:p>
+            <a:r>
+              <a:rPr sz="2400"/>
+              <a:t>暗黒物質が無ければ：T は平均 0、ばらつき 1</a:t>
+            </a:r>
+          </a:p>
+          <a:p>
+            <a:r>
+              <a:rPr sz="2400"/>
+              <a:t>暗黒物質があれば：T の平均 = √( Σ pred_i² ) = 1.77</a:t>
+            </a:r>
+          </a:p>
+          <a:p>
+            <a:r>
+              <a:rPr sz="2400"/>
+              <a:t>実測 T = 0.39 → ずれ 1.4σ</a:t>
+            </a:r>
+          </a:p>
+          <a:p>
+            <a:r>
+              <a:rPr sz="2400"/>
+              <a:t>ただし、ここでは J に誤差は無いとしていた</a:t>
             </a:r>
           </a:p>
         </p:txBody>
@@ -12470,7 +12400,7 @@
           <a:p>
             <a:r>
               <a:rPr sz="3400"/>
-              <a:t>天体をまとめて比べる</a:t>
+              <a:t>ここで論文：J の誤差は小さく見積もられている</a:t>
             </a:r>
           </a:p>
         </p:txBody>
@@ -12488,7 +12418,7 @@
         <p:spPr>
           <a:xfrm>
             <a:off x="841248" y="1463040"/>
-            <a:ext cx="10515600" cy="4937760"/>
+            <a:ext cx="10515600" cy="4114800"/>
           </a:xfrm>
         </p:spPr>
         <p:txBody>
@@ -12497,45 +12427,81 @@
           <a:p>
             <a:r>
               <a:rPr sz="2400"/>
-              <a:t>1 個ずつでは弱いので、J が求まる 43 天体をまとめる</a:t>
+              <a:t>文献ごとの J の値は、書かれた誤差よりも大きくばらつく</a:t>
             </a:r>
           </a:p>
           <a:p>
             <a:r>
               <a:rPr sz="2400"/>
-              <a:t>T = Σ w_i z_i / √( Σ w_i² )、重み w_i = 天体 i の予測 σ</a:t>
+              <a:t>見落とされがちな誤差の原因（8 つ）</a:t>
             </a:r>
           </a:p>
           <a:p>
             <a:pPr lvl="1"/>
             <a:r>
               <a:rPr sz="2000"/>
-              <a:t>z_i：天体 i の実測の σ（20 GeV）</a:t>
+              <a:t>点として扱う・ハローの形・星の分布の形の仮定</a:t>
+            </a:r>
+          </a:p>
+          <a:p>
+            <a:pPr lvl="1"/>
+            <a:r>
+              <a:rPr sz="2000"/>
+              <a:t>非球対称（最大 0.4 dex）・非平衡（〜0.1）・連星（Ret II で〜0.3）</a:t>
+            </a:r>
+          </a:p>
+          <a:p>
+            <a:pPr lvl="1"/>
+            <a:r>
+              <a:rPr sz="2000"/>
+              <a:t>前景の星の混入・誤差の分布が正規分布でない</a:t>
             </a:r>
           </a:p>
           <a:p>
             <a:r>
               <a:rPr sz="2400"/>
-              <a:t>暗黒物質が無ければ：T は平均 0、ばらつき 1</a:t>
-            </a:r>
-          </a:p>
-          <a:p>
-            <a:r>
-              <a:rPr sz="2400"/>
-              <a:t>暗黒物質があれば：T の平均 = √( Σ pred_i² ) = 1.77</a:t>
-            </a:r>
-          </a:p>
-          <a:p>
-            <a:r>
-              <a:rPr sz="2400"/>
-              <a:t>実測 T = 0.39 → ずれ 1.4σ</a:t>
-            </a:r>
-          </a:p>
-          <a:p>
-            <a:r>
-              <a:rPr sz="2400"/>
-              <a:t>ただし、ここでは J に誤差は無いとしていた</a:t>
-            </a:r>
+              <a:t>Δlog₁₀J ≈ 0.5（約 3 倍）以上の誤差を見込むべき</a:t>
+            </a:r>
+          </a:p>
+        </p:txBody>
+      </p:sp>
+      <p:sp>
+        <p:nvSpPr>
+          <p:cNvPr id="8" name="TextBox 7">
+            <a:extLst>
+              <a:ext uri="{FF2B5EF4-FFF2-40B4-BE49-F238E27FC236}">
+                <a16:creationId xmlns:a16="http://schemas.microsoft.com/office/drawing/2014/main" id="{F85CD606-E3CE-F314-B3EE-F3D7028115CB}"/>
+              </a:ext>
+            </a:extLst>
+          </p:cNvPr>
+          <p:cNvSpPr txBox="1"/>
+          <p:nvPr/>
+        </p:nvSpPr>
+        <p:spPr>
+          <a:xfrm>
+            <a:off x="5837182" y="5663239"/>
+            <a:ext cx="6093372" cy="923330"/>
+          </a:xfrm>
+          <a:prstGeom prst="rect">
+            <a:avLst/>
+          </a:prstGeom>
+          <a:noFill/>
+        </p:spPr>
+        <p:txBody>
+          <a:bodyPr wrap="square">
+            <a:spAutoFit/>
+          </a:bodyPr>
+          <a:lstStyle/>
+          <a:p>
+            <a:r>
+              <a:rPr lang="en-US" sz="1400" b="1"/>
+              <a:t>Reference:</a:t>
+            </a:r>
+            <a:r>
+              <a:rPr lang="en-US" sz="1400"/>
+              <a:t> Bertólez-Martínez, Hooper &amp; Khatee Zathul (2026), arXiv:2609.20944 §II</a:t>
+            </a:r>
+            <a:endParaRPr lang="en-US"/>
           </a:p>
         </p:txBody>
       </p:sp>
@@ -12581,7 +12547,7 @@
           <a:p>
             <a:r>
               <a:rPr sz="3400"/>
-              <a:t>ここで論文：J の誤差は小さく見積もられている</a:t>
+              <a:t>詳細なmethodについて①：仮想データの作り方</a:t>
             </a:r>
           </a:p>
         </p:txBody>
@@ -12607,41 +12573,47 @@
           <a:lstStyle/>
           <a:p>
             <a:r>
-              <a:rPr sz="2400"/>
-              <a:t>文献ごとの J の値は、書かれた誤差よりも大きくばらつく</a:t>
-            </a:r>
-          </a:p>
-          <a:p>
-            <a:r>
-              <a:rPr sz="2400"/>
-              <a:t>見落とされがちな誤差の原因（8 つ）</a:t>
+              <a:rPr sz="2200"/>
+              <a:t>Fermi-LAT の観測を計算機の中で作る（FermiTools、fermipy）</a:t>
             </a:r>
           </a:p>
           <a:p>
             <a:pPr lvl="1"/>
             <a:r>
-              <a:rPr sz="2000"/>
-              <a:t>点として扱う・ハローの形・星の分布の形の仮定</a:t>
+              <a:rPr sz="1800"/>
+              <a:t>17.4 年分、0.5 GeV〜1 TeV、10° × 10° の領域、0.08° の画素</a:t>
+            </a:r>
+          </a:p>
+          <a:p>
+            <a:r>
+              <a:rPr sz="2200"/>
+              <a:t>背景：銀河の拡散光＋等方の光から、ポアソン乱数で光子を作る</a:t>
+            </a:r>
+          </a:p>
+          <a:p>
+            <a:r>
+              <a:rPr sz="2200"/>
+              <a:t>暗黒物質の信号を入れる</a:t>
             </a:r>
           </a:p>
           <a:p>
             <a:pPr lvl="1"/>
             <a:r>
-              <a:rPr sz="2000"/>
-              <a:t>非球対称（最大 0.4 dex）・非平衡（〜0.1）・連星（Ret II で〜0.3）</a:t>
+              <a:rPr sz="1800"/>
+              <a:t>質量 42 GeV、b クォーク対、⟨σv⟩ = 1.4 × 10⁻²⁶ cm³/s</a:t>
             </a:r>
           </a:p>
           <a:p>
             <a:pPr lvl="1"/>
             <a:r>
-              <a:rPr sz="2000"/>
-              <a:t>前景の星の混入・誤差の分布が正規分布でない</a:t>
-            </a:r>
-          </a:p>
-          <a:p>
-            <a:r>
-              <a:rPr sz="2400"/>
-              <a:t>Δlog₁₀J ≈ 0.5（約 3 倍）以上の誤差を見込むべき</a:t>
+              <a:rPr sz="1800"/>
+              <a:t>銀河中心 GeV 超過（GCE）に合う値</a:t>
+            </a:r>
+          </a:p>
+          <a:p>
+            <a:r>
+              <a:rPr sz="2200"/>
+              <a:t>対象：Ursa Minor 1 個と、27 個の矮小銀河</a:t>
             </a:r>
           </a:p>
         </p:txBody>
@@ -12680,7 +12652,7 @@
             </a:r>
             <a:r>
               <a:rPr lang="en-US" sz="1400"/>
-              <a:t> Bertólez-Martínez, Hooper &amp; Khatee Zathul (2026), arXiv:2609.20944 §II</a:t>
+              <a:t> Bertólez-Martínez, Hooper &amp; Khatee Zathul (2026), arXiv:2609.20944 §III</a:t>
             </a:r>
             <a:endParaRPr lang="en-US"/>
           </a:p>
@@ -12728,7 +12700,7 @@
           <a:p>
             <a:r>
               <a:rPr sz="3400"/>
-              <a:t>詳細なmethodについて①：仮想データの作り方</a:t>
+              <a:t>詳細なmethodについて②：尤度と 2 つの誤差</a:t>
             </a:r>
           </a:p>
         </p:txBody>
@@ -12755,46 +12727,46 @@
           <a:p>
             <a:r>
               <a:rPr sz="2200"/>
-              <a:t>Fermi-LAT の観測を計算機の中で作る（FermiTools、fermipy）</a:t>
+              <a:t>各天体の尤度 = 光子のポアソン尤度 × J の尤度</a:t>
             </a:r>
           </a:p>
           <a:p>
             <a:pPr lvl="1"/>
             <a:r>
               <a:rPr sz="1800"/>
-              <a:t>17.4 年分、0.5 GeV〜1 TeV、10° × 10° の領域、0.08° の画素</a:t>
+              <a:t>L_J ∝ exp[ −(log₁₀J − log₁₀J_obs)² / 2σ_L² ]</a:t>
             </a:r>
           </a:p>
           <a:p>
             <a:r>
               <a:rPr sz="2200"/>
-              <a:t>背景：銀河の拡散光＋等方の光から、ポアソン乱数で光子を作る</a:t>
+              <a:t>27 個は尤度の積でまとめる（⟨σv⟩ は共通、J は天体ごと）</a:t>
             </a:r>
           </a:p>
           <a:p>
             <a:r>
               <a:rPr sz="2200"/>
-              <a:t>暗黒物質の信号を入れる</a:t>
+              <a:t>2 つの誤差を分けて動かす</a:t>
             </a:r>
           </a:p>
           <a:p>
             <a:pPr lvl="1"/>
             <a:r>
               <a:rPr sz="1800"/>
-              <a:t>質量 42 GeV、b クォーク対、⟨σv⟩ = 1.4 × 10⁻²⁶ cm³/s</a:t>
+              <a:t>σ：J の本当のばらつき（J_obs を J_true のまわりに σ でばらつかせる）</a:t>
             </a:r>
           </a:p>
           <a:p>
             <a:pPr lvl="1"/>
             <a:r>
               <a:rPr sz="1800"/>
-              <a:t>銀河中心 GeV 超過（GCE）に合う値</a:t>
+              <a:t>σ_L：解析で仮定する幅</a:t>
             </a:r>
           </a:p>
           <a:p>
             <a:r>
               <a:rPr sz="2200"/>
-              <a:t>対象：Ursa Minor 1 個と、27 個の矮小銀河</a:t>
+              <a:t>95% 上限：TS が最大値から 2.71 下がる点（Wilks の定理を仮定）</a:t>
             </a:r>
           </a:p>
         </p:txBody>
@@ -12833,7 +12805,7 @@
             </a:r>
             <a:r>
               <a:rPr lang="en-US" sz="1400"/>
-              <a:t> Bertólez-Martínez, Hooper &amp; Khatee Zathul (2026), arXiv:2609.20944 §III</a:t>
+              <a:t> Bertólez-Martínez, Hooper &amp; Khatee Zathul (2026), arXiv:2609.20944 式 (6)–(10)</a:t>
             </a:r>
             <a:endParaRPr lang="en-US"/>
           </a:p>
@@ -13047,7 +13019,7 @@
           <a:p>
             <a:r>
               <a:rPr sz="3400"/>
-              <a:t>詳細なmethodについて②：尤度と 2 つの誤差</a:t>
+              <a:t>詳細なmethodについて③：何を数えたか</a:t>
             </a:r>
           </a:p>
         </p:txBody>
@@ -13073,47 +13045,40 @@
           <a:lstStyle/>
           <a:p>
             <a:r>
-              <a:rPr sz="2200"/>
-              <a:t>各天体の尤度 = 光子のポアソン尤度 × J の尤度</a:t>
+              <a:rPr sz="2400"/>
+              <a:t>本物の信号を入れた仮想データを何度も作る</a:t>
             </a:r>
           </a:p>
           <a:p>
             <a:pPr lvl="1"/>
             <a:r>
-              <a:rPr sz="1800"/>
-              <a:t>L_J ∝ exp[ −(log₁₀J − log₁₀J_obs)² / 2σ_L² ]</a:t>
-            </a:r>
-          </a:p>
-          <a:p>
-            <a:r>
-              <a:rPr sz="2200"/>
-              <a:t>27 個は尤度の積でまとめる（⟨σv⟩ は共通、J は天体ごと）</a:t>
-            </a:r>
-          </a:p>
-          <a:p>
-            <a:r>
-              <a:rPr sz="2200"/>
-              <a:t>2 つの誤差を分けて動かす</a:t>
+              <a:rPr sz="2000"/>
+              <a:t>Ursa Minor で 1000 回（基準の設定では 1 万回）</a:t>
+            </a:r>
+          </a:p>
+          <a:p>
+            <a:r>
+              <a:rPr sz="2400"/>
+              <a:t>それぞれで 95% 上限を出す</a:t>
+            </a:r>
+          </a:p>
+          <a:p>
+            <a:r>
+              <a:rPr sz="2400"/>
+              <a:t>上限が本物の ⟨σv⟩ より下 =「本物を無いと間違えた」</a:t>
+            </a:r>
+          </a:p>
+          <a:p>
+            <a:r>
+              <a:rPr sz="2400"/>
+              <a:t>95% 上限なら、間違いは 5% 以下のはず</a:t>
             </a:r>
           </a:p>
           <a:p>
             <a:pPr lvl="1"/>
             <a:r>
-              <a:rPr sz="1800"/>
-              <a:t>σ：J の本当のばらつき（J_obs を J_true のまわりに σ でばらつかせる）</a:t>
-            </a:r>
-          </a:p>
-          <a:p>
-            <a:pPr lvl="1"/>
-            <a:r>
-              <a:rPr sz="1800"/>
-              <a:t>σ_L：解析で仮定する幅</a:t>
-            </a:r>
-          </a:p>
-          <a:p>
-            <a:r>
-              <a:rPr sz="2200"/>
-              <a:t>95% 上限：TS が最大値から 2.71 下がる点（Wilks の定理を仮定）</a:t>
+              <a:rPr sz="2000"/>
+              <a:t>これが守られているか（カバレッジ）を調べる</a:t>
             </a:r>
           </a:p>
         </p:txBody>
@@ -13152,7 +13117,7 @@
             </a:r>
             <a:r>
               <a:rPr lang="en-US" sz="1400"/>
-              <a:t> Bertólez-Martínez, Hooper &amp; Khatee Zathul (2026), arXiv:2609.20944 式 (6)–(10)</a:t>
+              <a:t> Bertólez-Martínez, Hooper &amp; Khatee Zathul (2026), arXiv:2609.20944 §IV</a:t>
             </a:r>
             <a:endParaRPr lang="en-US"/>
           </a:p>
@@ -13200,7 +13165,7 @@
           <a:p>
             <a:r>
               <a:rPr sz="3400"/>
-              <a:t>詳細なmethodについて③：何を数えたか</a:t>
+              <a:t>論文の結果①：Ursa Minor 1 個</a:t>
             </a:r>
           </a:p>
         </p:txBody>
@@ -13227,39 +13192,47 @@
           <a:p>
             <a:r>
               <a:rPr sz="2400"/>
-              <a:t>本物の信号を入れた仮想データを何度も作る</a:t>
+              <a:t>σ_L を 0.3 / 0.5 / 1.0 だけ大きくすると</a:t>
             </a:r>
           </a:p>
           <a:p>
             <a:pPr lvl="1"/>
             <a:r>
               <a:rPr sz="2000"/>
-              <a:t>Ursa Minor で 1000 回（基準の設定では 1 万回）</a:t>
+              <a:t>上限が 1.5 / 2.5 / 11 倍ゆるくなる</a:t>
             </a:r>
           </a:p>
           <a:p>
             <a:r>
               <a:rPr sz="2400"/>
-              <a:t>それぞれで 95% 上限を出す</a:t>
+              <a:t>本当の誤差 σ だけ大きく、σ_L は小さいままだと</a:t>
+            </a:r>
+          </a:p>
+          <a:p>
+            <a:pPr lvl="1"/>
+            <a:r>
+              <a:rPr sz="2000"/>
+              <a:t>本物を除外する割合 1.7% / 8.0% / 22%</a:t>
+            </a:r>
+          </a:p>
+          <a:p>
+            <a:pPr lvl="1"/>
+            <a:r>
+              <a:rPr sz="2000"/>
+              <a:t>σ_L を σ に合わせれば 5% 以下に戻る</a:t>
             </a:r>
           </a:p>
           <a:p>
             <a:r>
               <a:rPr sz="2400"/>
-              <a:t>上限が本物の ⟨σv⟩ より下 =「本物を無いと間違えた」</a:t>
-            </a:r>
-          </a:p>
-          <a:p>
-            <a:r>
-              <a:rPr sz="2400"/>
-              <a:t>95% 上限なら、間違いは 5% 以下のはず</a:t>
+              <a:t>形の間違い：球対称 NFW で解析 → 上限 2.4 倍厳しく</a:t>
             </a:r>
           </a:p>
           <a:p>
             <a:pPr lvl="1"/>
             <a:r>
               <a:rPr sz="2000"/>
-              <a:t>これが守られているか（カバレッジ）を調べる</a:t>
+              <a:t>点として扱う → 1.4 倍厳しく</a:t>
             </a:r>
           </a:p>
         </p:txBody>
@@ -13298,7 +13271,7 @@
             </a:r>
             <a:r>
               <a:rPr lang="en-US" sz="1400"/>
-              <a:t> Bertólez-Martínez, Hooper &amp; Khatee Zathul (2026), arXiv:2609.20944 §IV</a:t>
+              <a:t> Bertólez-Martínez, Hooper &amp; Khatee Zathul (2026), arXiv:2609.20944 §IV, Fig. 2–4</a:t>
             </a:r>
             <a:endParaRPr lang="en-US"/>
           </a:p>
@@ -13346,7 +13319,7 @@
           <a:p>
             <a:r>
               <a:rPr sz="3400"/>
-              <a:t>論文の結果①：Ursa Minor 1 個</a:t>
+              <a:t>論文の結果②：27 個をまとめると</a:t>
             </a:r>
           </a:p>
         </p:txBody>
@@ -13372,48 +13345,46 @@
           <a:lstStyle/>
           <a:p>
             <a:r>
-              <a:rPr sz="2400"/>
-              <a:t>σ_L を 0.3 / 0.5 / 1.0 だけ大きくすると</a:t>
+              <a:rPr sz="2200"/>
+              <a:t>σ_L を 0.3 / 0.5 / 1.0 → 上限 1.14 / 1.44 / 3.23 倍ゆるく</a:t>
+            </a:r>
+          </a:p>
+          <a:p>
+            <a:r>
+              <a:rPr sz="2200"/>
+              <a:t>誤差を正しく入れても、本物を除外する割合 21%（5% のはず）</a:t>
             </a:r>
           </a:p>
           <a:p>
             <a:pPr lvl="1"/>
             <a:r>
-              <a:rPr sz="2000"/>
-              <a:t>上限が 1.5 / 2.5 / 11 倍ゆるくなる</a:t>
-            </a:r>
-          </a:p>
-          <a:p>
-            <a:r>
-              <a:rPr sz="2400"/>
-              <a:t>本当の誤差 σ だけ大きく、σ_L は小さいままだと</a:t>
+              <a:rPr sz="1800"/>
+              <a:t>J の数が天体の数と一緒に増え、Wilks の定理の前提が崩れる</a:t>
+            </a:r>
+          </a:p>
+          <a:p>
+            <a:r>
+              <a:rPr sz="2200"/>
+              <a:t>本当の誤差を 0.3 / 0.5 / 1.0 大きくすると 31% / 49% / 88%</a:t>
             </a:r>
           </a:p>
           <a:p>
             <a:pPr lvl="1"/>
             <a:r>
-              <a:rPr sz="2000"/>
-              <a:t>本物を除外する割合 1.7% / 8.0% / 22%</a:t>
-            </a:r>
-          </a:p>
-          <a:p>
-            <a:pPr lvl="1"/>
-            <a:r>
-              <a:rPr sz="2000"/>
-              <a:t>σ_L を σ に合わせれば 5% 以下に戻る</a:t>
-            </a:r>
-          </a:p>
-          <a:p>
-            <a:r>
-              <a:rPr sz="2400"/>
-              <a:t>形の間違い：球対称 NFW で解析 → 上限 2.4 倍厳しく</a:t>
-            </a:r>
-          </a:p>
-          <a:p>
-            <a:pPr lvl="1"/>
-            <a:r>
-              <a:rPr sz="2000"/>
-              <a:t>点として扱う → 1.4 倍厳しく</a:t>
+              <a:rPr sz="1800"/>
+              <a:t>σ_L を合わせても 23% / 28% / 38%</a:t>
+            </a:r>
+          </a:p>
+          <a:p>
+            <a:r>
+              <a:rPr sz="2200"/>
+              <a:t>原因：J が上に振れた天体が、上限を決めてしまう</a:t>
+            </a:r>
+          </a:p>
+          <a:p>
+            <a:r>
+              <a:rPr sz="2200"/>
+              <a:t>対策の一つ：何も無い領域で較正する</a:t>
             </a:r>
           </a:p>
         </p:txBody>
@@ -13452,7 +13423,7 @@
             </a:r>
             <a:r>
               <a:rPr lang="en-US" sz="1400"/>
-              <a:t> Bertólez-Martínez, Hooper &amp; Khatee Zathul (2026), arXiv:2609.20944 §IV, Fig. 2–4</a:t>
+              <a:t> Bertólez-Martínez, Hooper &amp; Khatee Zathul (2026), arXiv:2609.20944 §V, Fig. 5–7</a:t>
             </a:r>
             <a:endParaRPr lang="en-US"/>
           </a:p>
@@ -13500,7 +13471,7 @@
           <a:p>
             <a:r>
               <a:rPr sz="3400"/>
-              <a:t>論文の結果②：27 個をまとめると</a:t>
+              <a:t>論文のまとめ</a:t>
             </a:r>
           </a:p>
         </p:txBody>
@@ -13526,46 +13497,20 @@
           <a:lstStyle/>
           <a:p>
             <a:r>
-              <a:rPr sz="2200"/>
-              <a:t>σ_L を 0.3 / 0.5 / 1.0 → 上限 1.14 / 1.44 / 3.23 倍ゆるく</a:t>
-            </a:r>
-          </a:p>
-          <a:p>
-            <a:r>
-              <a:rPr sz="2200"/>
-              <a:t>誤差を正しく入れても、本物を除外する割合 21%（5% のはず）</a:t>
-            </a:r>
-          </a:p>
-          <a:p>
-            <a:pPr lvl="1"/>
-            <a:r>
-              <a:rPr sz="1800"/>
-              <a:t>J の数が天体の数と一緒に増え、Wilks の定理の前提が崩れる</a:t>
-            </a:r>
-          </a:p>
-          <a:p>
-            <a:r>
-              <a:rPr sz="2200"/>
-              <a:t>本当の誤差を 0.3 / 0.5 / 1.0 大きくすると 31% / 49% / 88%</a:t>
-            </a:r>
-          </a:p>
-          <a:p>
-            <a:pPr lvl="1"/>
-            <a:r>
-              <a:rPr sz="1800"/>
-              <a:t>σ_L を合わせても 23% / 28% / 38%</a:t>
-            </a:r>
-          </a:p>
-          <a:p>
-            <a:r>
-              <a:rPr sz="2200"/>
-              <a:t>原因：J が上に振れた天体が、上限を決めてしまう</a:t>
-            </a:r>
-          </a:p>
-          <a:p>
-            <a:r>
-              <a:rPr sz="2200"/>
-              <a:t>対策の一つ：何も無い領域で較正する</a:t>
+              <a:rPr sz="2400"/>
+              <a:t>J の誤差や形を雑に扱うと、上限は厳しく出すぎ、本物の信号を除外しやすい</a:t>
+            </a:r>
+          </a:p>
+          <a:p>
+            <a:r>
+              <a:rPr sz="2400"/>
+              <a:t>「銀河中心と矮小銀河が矛盾する」とは、まだ言えない</a:t>
+            </a:r>
+          </a:p>
+          <a:p>
+            <a:r>
+              <a:rPr sz="2400"/>
+              <a:t>Δlog₁₀J ≈ 0.5 程度の誤差を見込むべき</a:t>
             </a:r>
           </a:p>
         </p:txBody>
@@ -13604,7 +13549,7 @@
             </a:r>
             <a:r>
               <a:rPr lang="en-US" sz="1400"/>
-              <a:t> Bertólez-Martínez, Hooper &amp; Khatee Zathul (2026), arXiv:2609.20944 §V, Fig. 5–7</a:t>
+              <a:t> Bertólez-Martínez, Hooper &amp; Khatee Zathul (2026), arXiv:2609.20944 §VI</a:t>
             </a:r>
             <a:endParaRPr lang="en-US"/>
           </a:p>
@@ -13652,7 +13597,7 @@
           <a:p>
             <a:r>
               <a:rPr sz="3400"/>
-              <a:t>論文のまとめ</a:t>
+              <a:t>論文の考え方を、僕の結果に当てはめる</a:t>
             </a:r>
           </a:p>
         </p:txBody>
@@ -13679,19 +13624,39 @@
           <a:p>
             <a:r>
               <a:rPr sz="2400"/>
-              <a:t>J の誤差や形を雑に扱うと、上限は厳しく出すぎ、本物の信号を除外しやすい</a:t>
+              <a:t>これまで：J の誤差 = 0（J は推定値そのまま）</a:t>
             </a:r>
           </a:p>
           <a:p>
             <a:r>
               <a:rPr sz="2400"/>
-              <a:t>「銀河中心と矮小銀河が矛盾する」とは、まだ言えない</a:t>
+              <a:t>今回：各天体の本当の J = 推定値 × 10^δ_i</a:t>
+            </a:r>
+          </a:p>
+          <a:p>
+            <a:pPr lvl="1"/>
+            <a:r>
+              <a:rPr sz="2000"/>
+              <a:t>δ_i は平均 0、幅 0.5 の正規分布（天体ごとに独立）</a:t>
+            </a:r>
+          </a:p>
+          <a:p>
+            <a:pPr lvl="1"/>
+            <a:r>
+              <a:rPr sz="2000"/>
+              <a:t>→ J がおよそ 1/3 倍〜3 倍の範囲でずれる</a:t>
             </a:r>
           </a:p>
           <a:p>
             <a:r>
               <a:rPr sz="2400"/>
-              <a:t>Δlog₁₀J ≈ 0.5 程度の誤差を見込むべき</a:t>
+              <a:t>予測 σ は J に比例 → pred_i × 10^δ_i</a:t>
+            </a:r>
+          </a:p>
+          <a:p>
+            <a:r>
+              <a:rPr sz="2400"/>
+              <a:t>論文と同じく「J をずらした世界」をたくさん作る（20 万回）</a:t>
             </a:r>
           </a:p>
         </p:txBody>
@@ -13730,7 +13695,7 @@
             </a:r>
             <a:r>
               <a:rPr lang="en-US" sz="1400"/>
-              <a:t> Bertólez-Martínez, Hooper &amp; Khatee Zathul (2026), arXiv:2609.20944 §VI</a:t>
+              <a:t> Bertólez-Martínez, Hooper &amp; Khatee Zathul (2026), arXiv:2609.20944 §IV</a:t>
             </a:r>
             <a:endParaRPr lang="en-US"/>
           </a:p>
@@ -13778,7 +13743,7 @@
           <a:p>
             <a:r>
               <a:rPr sz="3400"/>
-              <a:t>論文の考え方を、僕の結果に当てはめる</a:t>
+              <a:t>有意度の計算式のどこに誤差が入るか</a:t>
             </a:r>
           </a:p>
         </p:txBody>
@@ -13796,7 +13761,7 @@
         <p:spPr>
           <a:xfrm>
             <a:off x="841248" y="1463040"/>
-            <a:ext cx="10515600" cy="4114800"/>
+            <a:ext cx="10515600" cy="4937760"/>
           </a:xfrm>
         </p:spPr>
         <p:txBody>
@@ -13805,80 +13770,47 @@
           <a:p>
             <a:r>
               <a:rPr sz="2400"/>
-              <a:t>これまで：J の誤差 = 0（J は推定値そのまま）</a:t>
+              <a:t>暗黒物質ありで期待される T</a:t>
+            </a:r>
+          </a:p>
+          <a:p>
+            <a:pPr lvl="1"/>
+            <a:r>
+              <a:rPr sz="2000"/>
+              <a:t>誤差なし：E[T] = Σ w_i pred_i / √Σ w_i² = 1.77</a:t>
+            </a:r>
+          </a:p>
+          <a:p>
+            <a:pPr lvl="1"/>
+            <a:r>
+              <a:rPr sz="2000"/>
+              <a:t>誤差あり：E[T] = Σ w_i pred_i 10^δ_i / √Σ w_i²  ← δ でばらつく</a:t>
             </a:r>
           </a:p>
           <a:p>
             <a:r>
               <a:rPr sz="2400"/>
-              <a:t>今回：各天体の本当の J = 推定値 × 10^δ_i</a:t>
+              <a:t>実測 T にも測定の揺れ s がある（s = 1、または空で測った 1.26）</a:t>
+            </a:r>
+          </a:p>
+          <a:p>
+            <a:r>
+              <a:rPr sz="2400"/>
+              <a:t>暗黒物質ありで、実測 0.39 以下になる確率</a:t>
             </a:r>
           </a:p>
           <a:p>
             <a:pPr lvl="1"/>
             <a:r>
               <a:rPr sz="2000"/>
-              <a:t>δ_i は平均 0、幅 0.5 の正規分布（天体ごとに独立）</a:t>
-            </a:r>
-          </a:p>
-          <a:p>
-            <a:pPr lvl="1"/>
-            <a:r>
-              <a:rPr sz="2000"/>
-              <a:t>→ J がおよそ 1/3 倍〜3 倍の範囲でずれる</a:t>
+              <a:t>p = （δ について平均）Φ( (0.39 − E[T]) / s )</a:t>
             </a:r>
           </a:p>
           <a:p>
             <a:r>
               <a:rPr sz="2400"/>
-              <a:t>予測 σ は J に比例 → pred_i × 10^δ_i</a:t>
-            </a:r>
-          </a:p>
-          <a:p>
-            <a:r>
-              <a:rPr sz="2400"/>
-              <a:t>論文と同じく「J をずらした世界」をたくさん作る（20 万回）</a:t>
-            </a:r>
-          </a:p>
-        </p:txBody>
-      </p:sp>
-      <p:sp>
-        <p:nvSpPr>
-          <p:cNvPr id="8" name="TextBox 7">
-            <a:extLst>
-              <a:ext uri="{FF2B5EF4-FFF2-40B4-BE49-F238E27FC236}">
-                <a16:creationId xmlns:a16="http://schemas.microsoft.com/office/drawing/2014/main" id="{F85CD606-E3CE-F314-B3EE-F3D7028115CB}"/>
-              </a:ext>
-            </a:extLst>
-          </p:cNvPr>
-          <p:cNvSpPr txBox="1"/>
-          <p:nvPr/>
-        </p:nvSpPr>
-        <p:spPr>
-          <a:xfrm>
-            <a:off x="5837182" y="5663239"/>
-            <a:ext cx="6093372" cy="923330"/>
-          </a:xfrm>
-          <a:prstGeom prst="rect">
-            <a:avLst/>
-          </a:prstGeom>
-          <a:noFill/>
-        </p:spPr>
-        <p:txBody>
-          <a:bodyPr wrap="square">
-            <a:spAutoFit/>
-          </a:bodyPr>
-          <a:lstStyle/>
-          <a:p>
-            <a:r>
-              <a:rPr lang="en-US" sz="1400" b="1"/>
-              <a:t>Reference:</a:t>
-            </a:r>
-            <a:r>
-              <a:rPr lang="en-US" sz="1400"/>
-              <a:t> Bertólez-Martínez, Hooper &amp; Khatee Zathul (2026), arXiv:2609.20944 §IV</a:t>
-            </a:r>
-            <a:endParaRPr lang="en-US"/>
+              <a:t>p を σ に直したもの =「ずれ」</a:t>
+            </a:r>
           </a:p>
         </p:txBody>
       </p:sp>
@@ -13924,73 +13856,61 @@
           <a:p>
             <a:r>
               <a:rPr sz="3400"/>
-              <a:t>有意度の計算式のどこに誤差が入るか</a:t>
-            </a:r>
-          </a:p>
-        </p:txBody>
-      </p:sp>
-      <p:sp>
-        <p:nvSpPr>
-          <p:cNvPr id="3" name="Content Placeholder 2"/>
-          <p:cNvSpPr>
-            <a:spLocks noGrp="1"/>
-          </p:cNvSpPr>
-          <p:nvPr>
-            <p:ph idx="1"/>
-          </p:nvPr>
-        </p:nvSpPr>
+              <a:t>結果：予測の幅と実測</a:t>
+            </a:r>
+          </a:p>
+        </p:txBody>
+      </p:sp>
+      <p:pic>
+        <p:nvPicPr>
+          <p:cNvPr id="5" name="Picture 4" descr="fig_dwarf_J_uncertainty_totani.png"/>
+          <p:cNvPicPr>
+            <a:picLocks noChangeAspect="1"/>
+          </p:cNvPicPr>
+          <p:nvPr/>
+        </p:nvPicPr>
+        <p:blipFill>
+          <a:blip r:embed="rId3"/>
+          <a:srcRect/>
+          <a:stretch>
+            <a:fillRect/>
+          </a:stretch>
+        </p:blipFill>
         <p:spPr>
           <a:xfrm>
-            <a:off x="841248" y="1463040"/>
-            <a:ext cx="10515600" cy="4937760"/>
+            <a:off x="2194560" y="1234440"/>
+            <a:ext cx="6858000" cy="4114800"/>
           </a:xfrm>
+          <a:prstGeom prst="rect">
+            <a:avLst/>
+          </a:prstGeom>
         </p:spPr>
-        <p:txBody>
-          <a:bodyPr/>
-          <a:lstStyle/>
-          <a:p>
-            <a:r>
-              <a:rPr sz="2400"/>
-              <a:t>暗黒物質ありで期待される T</a:t>
-            </a:r>
-          </a:p>
-          <a:p>
-            <a:pPr lvl="1"/>
+      </p:pic>
+      <p:sp>
+        <p:nvSpPr>
+          <p:cNvPr id="4" name="TextBox 3"/>
+          <p:cNvSpPr txBox="1"/>
+          <p:nvPr/>
+        </p:nvSpPr>
+        <p:spPr>
+          <a:xfrm>
+            <a:off x="457200" y="5486400"/>
+            <a:ext cx="11247120" cy="457200"/>
+          </a:xfrm>
+          <a:prstGeom prst="rect">
+            <a:avLst/>
+          </a:prstGeom>
+          <a:noFill/>
+        </p:spPr>
+        <p:txBody>
+          <a:bodyPr wrap="square">
+            <a:spAutoFit/>
+          </a:bodyPr>
+          <a:lstStyle/>
+          <a:p>
             <a:r>
               <a:rPr sz="2000"/>
-              <a:t>誤差なし：E[T] = Σ w_i pred_i / √Σ w_i² = 1.77</a:t>
-            </a:r>
-          </a:p>
-          <a:p>
-            <a:pPr lvl="1"/>
-            <a:r>
-              <a:rPr sz="2000"/>
-              <a:t>誤差あり：E[T] = Σ w_i pred_i 10^δ_i / √Σ w_i²  ← δ でばらつく</a:t>
-            </a:r>
-          </a:p>
-          <a:p>
-            <a:r>
-              <a:rPr sz="2400"/>
-              <a:t>実測 T にも測定の揺れ s がある（s = 1、または空で測った 1.26）</a:t>
-            </a:r>
-          </a:p>
-          <a:p>
-            <a:r>
-              <a:rPr sz="2400"/>
-              <a:t>暗黒物質ありで、実測 0.39 以下になる確率</a:t>
-            </a:r>
-          </a:p>
-          <a:p>
-            <a:pPr lvl="1"/>
-            <a:r>
-              <a:rPr sz="2000"/>
-              <a:t>p = （δ について平均）Φ( (0.39 − E[T]) / s )</a:t>
-            </a:r>
-          </a:p>
-          <a:p>
-            <a:r>
-              <a:rPr sz="2400"/>
-              <a:t>p を σ に直したもの =「ずれ」</a:t>
+              <a:t>期待 1.8σ → J の誤差で 1.4〜5.1σ に広がる。実測 0.4σ ± 1.26。ずれ 1.3σ</a:t>
             </a:r>
           </a:p>
         </p:txBody>
@@ -14037,61 +13957,67 @@
           <a:p>
             <a:r>
               <a:rPr sz="3400"/>
-              <a:t>結果：予測の幅と実測</a:t>
-            </a:r>
-          </a:p>
-        </p:txBody>
-      </p:sp>
-      <p:pic>
-        <p:nvPicPr>
-          <p:cNvPr id="5" name="Picture 4" descr="fig_dwarf_J_uncertainty_totani.png"/>
-          <p:cNvPicPr>
-            <a:picLocks noChangeAspect="1"/>
-          </p:cNvPicPr>
-          <p:nvPr/>
-        </p:nvPicPr>
-        <p:blipFill>
-          <a:blip r:embed="rId3"/>
-          <a:srcRect/>
-          <a:stretch>
-            <a:fillRect/>
-          </a:stretch>
-        </p:blipFill>
+              <a:t>結果の数字</a:t>
+            </a:r>
+          </a:p>
+        </p:txBody>
+      </p:sp>
+      <p:sp>
+        <p:nvSpPr>
+          <p:cNvPr id="3" name="Content Placeholder 2"/>
+          <p:cNvSpPr>
+            <a:spLocks noGrp="1"/>
+          </p:cNvSpPr>
+          <p:nvPr>
+            <p:ph idx="1"/>
+          </p:nvPr>
+        </p:nvSpPr>
         <p:spPr>
           <a:xfrm>
-            <a:off x="2194560" y="1234440"/>
-            <a:ext cx="6858000" cy="4114800"/>
+            <a:off x="841248" y="1463040"/>
+            <a:ext cx="10515600" cy="4937760"/>
           </a:xfrm>
-          <a:prstGeom prst="rect">
-            <a:avLst/>
-          </a:prstGeom>
         </p:spPr>
-      </p:pic>
-      <p:sp>
-        <p:nvSpPr>
-          <p:cNvPr id="4" name="TextBox 3"/>
-          <p:cNvSpPr txBox="1"/>
-          <p:nvPr/>
-        </p:nvSpPr>
-        <p:spPr>
-          <a:xfrm>
-            <a:off x="457200" y="5486400"/>
-            <a:ext cx="11247120" cy="457200"/>
-          </a:xfrm>
-          <a:prstGeom prst="rect">
-            <a:avLst/>
-          </a:prstGeom>
-          <a:noFill/>
-        </p:spPr>
-        <p:txBody>
-          <a:bodyPr wrap="square">
-            <a:spAutoFit/>
-          </a:bodyPr>
-          <a:lstStyle/>
-          <a:p>
+        <p:txBody>
+          <a:bodyPr/>
+          <a:lstStyle/>
+          <a:p>
+            <a:r>
+              <a:rPr sz="2400"/>
+              <a:t>局所密度 0.42 GeV/cm³ の場合（43 天体、20 GeV）</a:t>
+            </a:r>
+          </a:p>
+          <a:p>
+            <a:pPr lvl="1"/>
             <a:r>
               <a:rPr sz="2000"/>
-              <a:t>期待 1.8σ → J の誤差で 1.4〜5.1σ に広がる。実測 0.4σ ± 1.26。ずれ 1.3σ</a:t>
+              <a:t>J の誤差なし：期待 1.77、ずれ 1.4σ（s = 1.26 なら 1.1σ）</a:t>
+            </a:r>
+          </a:p>
+          <a:p>
+            <a:pPr lvl="1"/>
+            <a:r>
+              <a:rPr sz="2000"/>
+              <a:t>J の誤差あり：期待 2.5（68% で 1.4–5.1）、ずれ 1.5σ（1.3σ）</a:t>
+            </a:r>
+          </a:p>
+          <a:p>
+            <a:r>
+              <a:rPr sz="2400"/>
+              <a:t>天の川側の局所密度を 0.3〜0.6 GeV/cm³ で動かしても</a:t>
+            </a:r>
+          </a:p>
+          <a:p>
+            <a:pPr lvl="1"/>
+            <a:r>
+              <a:rPr sz="2000"/>
+              <a:t>ずれは較正後 2.4σ 以下</a:t>
+            </a:r>
+          </a:p>
+          <a:p>
+            <a:r>
+              <a:rPr sz="2400"/>
+              <a:t>→ 暗黒物質と矛盾はしないが、確認もできない（判定できない）</a:t>
             </a:r>
           </a:p>
         </p:txBody>
@@ -14138,7 +14064,7 @@
           <a:p>
             <a:r>
               <a:rPr sz="3400"/>
-              <a:t>結果の数字</a:t>
+              <a:t>2 つの数字の違い：15σ と 1.3σ</a:t>
             </a:r>
           </a:p>
         </p:txBody>
@@ -14165,40 +14091,40 @@
           <a:p>
             <a:r>
               <a:rPr sz="2400"/>
-              <a:t>局所密度 0.42 GeV/cm³ の場合（43 天体、20 GeV）</a:t>
+              <a:t>約 15σ：天の川のハロー超過の強さ</a:t>
             </a:r>
           </a:p>
           <a:p>
             <a:pPr lvl="1"/>
             <a:r>
               <a:rPr sz="2000"/>
-              <a:t>J の誤差なし：期待 1.77、ずれ 1.4σ（s = 1.26 なら 1.1σ）</a:t>
+              <a:t>19.5σ を、何も無い空でのばらつき 1.26 で割ったもの</a:t>
             </a:r>
           </a:p>
           <a:p>
             <a:pPr lvl="1"/>
             <a:r>
               <a:rPr sz="2000"/>
-              <a:t>J の誤差あり：期待 2.5（68% で 1.4–5.1）、ずれ 1.5σ（1.3σ）</a:t>
+              <a:t>「天の川に、背景では説明しにくい何かがある」</a:t>
             </a:r>
           </a:p>
           <a:p>
             <a:r>
               <a:rPr sz="2400"/>
-              <a:t>天の川側の局所密度を 0.3〜0.6 GeV/cm³ で動かしても</a:t>
+              <a:t>1.3σ：矮小銀河での「予測と実測のずれ」</a:t>
             </a:r>
           </a:p>
           <a:p>
             <a:pPr lvl="1"/>
             <a:r>
               <a:rPr sz="2000"/>
-              <a:t>ずれは較正後 2.4σ 以下</a:t>
+              <a:t>「天の川の超過が暗黒物質だとしても、矮小銀河の結果と矛盾しない」</a:t>
             </a:r>
           </a:p>
           <a:p>
             <a:r>
               <a:rPr sz="2400"/>
-              <a:t>→ 暗黒物質と矛盾はしないが、確認もできない（判定できない）</a:t>
+              <a:t>別のものを測った、別の数字</a:t>
             </a:r>
           </a:p>
         </p:txBody>
@@ -14245,7 +14171,7 @@
           <a:p>
             <a:r>
               <a:rPr sz="3400"/>
-              <a:t>2 つの数字の違い：15σ と 1.3σ</a:t>
+              <a:t>結論</a:t>
             </a:r>
           </a:p>
         </p:txBody>
@@ -14272,40 +14198,33 @@
           <a:p>
             <a:r>
               <a:rPr sz="2400"/>
-              <a:t>約 15σ：天の川のハロー超過の強さ</a:t>
+              <a:t>Totani の超過を再現（名目 19.5σ、較正後 約 15σ）</a:t>
+            </a:r>
+          </a:p>
+          <a:p>
+            <a:r>
+              <a:rPr sz="2400"/>
+              <a:t>ICS の明るさ・バブル・計算の近似の間違いでは説明できない</a:t>
             </a:r>
           </a:p>
           <a:p>
             <a:pPr lvl="1"/>
             <a:r>
               <a:rPr sz="2000"/>
-              <a:t>19.5σ を、何も無い空でのばらつき 1.26 で割ったもの</a:t>
+              <a:t>暗黒物質の証拠ではない（ICS の空間の形は未確認）</a:t>
+            </a:r>
+          </a:p>
+          <a:p>
+            <a:r>
+              <a:rPr sz="2400"/>
+              <a:t>矮小銀河では非検出</a:t>
             </a:r>
           </a:p>
           <a:p>
             <a:pPr lvl="1"/>
             <a:r>
               <a:rPr sz="2000"/>
-              <a:t>「天の川に、背景では説明しにくい何かがある」</a:t>
-            </a:r>
-          </a:p>
-          <a:p>
-            <a:r>
-              <a:rPr sz="2400"/>
-              <a:t>1.3σ：矮小銀河での「予測と実測のずれ」</a:t>
-            </a:r>
-          </a:p>
-          <a:p>
-            <a:pPr lvl="1"/>
-            <a:r>
-              <a:rPr sz="2000"/>
-              <a:t>「天の川の超過が暗黒物質だとしても、矮小銀河の結果と矛盾しない」</a:t>
-            </a:r>
-          </a:p>
-          <a:p>
-            <a:r>
-              <a:rPr sz="2400"/>
-              <a:t>別のものを測った、別の数字</a:t>
+              <a:t>J の誤差（約 3 倍）を入れると、予測とのずれは 1.3σ → 判定できない</a:t>
             </a:r>
           </a:p>
         </p:txBody>
@@ -14528,106 +14447,6 @@
           <a:p>
             <a:r>
               <a:rPr sz="3400"/>
-              <a:t>結論</a:t>
-            </a:r>
-          </a:p>
-        </p:txBody>
-      </p:sp>
-      <p:sp>
-        <p:nvSpPr>
-          <p:cNvPr id="3" name="Content Placeholder 2"/>
-          <p:cNvSpPr>
-            <a:spLocks noGrp="1"/>
-          </p:cNvSpPr>
-          <p:nvPr>
-            <p:ph idx="1"/>
-          </p:nvPr>
-        </p:nvSpPr>
-        <p:spPr>
-          <a:xfrm>
-            <a:off x="841248" y="1463040"/>
-            <a:ext cx="10515600" cy="4937760"/>
-          </a:xfrm>
-        </p:spPr>
-        <p:txBody>
-          <a:bodyPr/>
-          <a:lstStyle/>
-          <a:p>
-            <a:r>
-              <a:rPr sz="2400"/>
-              <a:t>Totani の超過を再現（名目 19.5σ、較正後 約 15σ）</a:t>
-            </a:r>
-          </a:p>
-          <a:p>
-            <a:r>
-              <a:rPr sz="2400"/>
-              <a:t>ICS の明るさ・バブル・計算の近似の間違いでは説明できない</a:t>
-            </a:r>
-          </a:p>
-          <a:p>
-            <a:pPr lvl="1"/>
-            <a:r>
-              <a:rPr sz="2000"/>
-              <a:t>暗黒物質の証拠ではない（ICS の空間の形は未確認）</a:t>
-            </a:r>
-          </a:p>
-          <a:p>
-            <a:r>
-              <a:rPr sz="2400"/>
-              <a:t>矮小銀河では非検出</a:t>
-            </a:r>
-          </a:p>
-          <a:p>
-            <a:pPr lvl="1"/>
-            <a:r>
-              <a:rPr sz="2000"/>
-              <a:t>J の誤差（約 3 倍）を入れると、予測とのずれは 1.3σ → 判定できない</a:t>
-            </a:r>
-          </a:p>
-        </p:txBody>
-      </p:sp>
-    </p:spTree>
-  </p:cSld>
-  <p:clrMapOvr>
-    <a:masterClrMapping/>
-  </p:clrMapOvr>
-</p:sld>
-</file>
-
-<file path=ppt/slides/slide51.xml><?xml version="1.0" encoding="utf-8"?>
-<p:sld xmlns:a="http://schemas.openxmlformats.org/drawingml/2006/main" xmlns:r="http://schemas.openxmlformats.org/officeDocument/2006/relationships" xmlns:p="http://schemas.openxmlformats.org/presentationml/2006/main">
-  <p:cSld>
-    <p:spTree>
-      <p:nvGrpSpPr>
-        <p:cNvPr id="1" name=""/>
-        <p:cNvGrpSpPr/>
-        <p:nvPr/>
-      </p:nvGrpSpPr>
-      <p:grpSpPr>
-        <a:xfrm>
-          <a:off x="0" y="0"/>
-          <a:ext cx="0" cy="0"/>
-          <a:chOff x="0" y="0"/>
-          <a:chExt cx="0" cy="0"/>
-        </a:xfrm>
-      </p:grpSpPr>
-      <p:sp>
-        <p:nvSpPr>
-          <p:cNvPr id="2" name="Title 1"/>
-          <p:cNvSpPr>
-            <a:spLocks noGrp="1"/>
-          </p:cNvSpPr>
-          <p:nvPr>
-            <p:ph type="title"/>
-          </p:nvPr>
-        </p:nvSpPr>
-        <p:spPr/>
-        <p:txBody>
-          <a:bodyPr/>
-          <a:lstStyle/>
-          <a:p>
-            <a:r>
-              <a:rPr sz="3400"/>
               <a:t>統計の視点から：この研究に足りなかったもの</a:t>
             </a:r>
           </a:p>
@@ -14741,7 +14560,7 @@
 </p:sld>
 </file>
 
-<file path=ppt/slides/slide52.xml><?xml version="1.0" encoding="utf-8"?>
+<file path=ppt/slides/slide51.xml><?xml version="1.0" encoding="utf-8"?>
 <p:sld xmlns:a="http://schemas.openxmlformats.org/drawingml/2006/main" xmlns:r="http://schemas.openxmlformats.org/officeDocument/2006/relationships" xmlns:p="http://schemas.openxmlformats.org/presentationml/2006/main">
   <p:cSld>
     <p:spTree>

--- a/slides/2026-10-03_研究進捗報告_claude.pptx
+++ b/slides/2026-10-03_研究進捗報告_claude.pptx
@@ -12,12 +12,7 @@
     <p:sldId id="257" r:id="rId3"/>
     <p:sldId id="258" r:id="rId4"/>
     <p:sldId id="259" r:id="rId5"/>
-    <p:sldId id="301" r:id="rId6"/>
-    <p:sldId id="302" r:id="rId7"/>
-    <p:sldId id="303" r:id="rId8"/>
-    <p:sldId id="304" r:id="rId9"/>
-    <p:sldId id="305" r:id="rId10"/>
-    <p:sldId id="306" r:id="rId11"/>
+    <p:sldId id="312" r:id="rId60"/>
     <p:sldId id="307" r:id="rId12"/>
     <p:sldId id="308" r:id="rId13"/>
     <p:sldId id="294" r:id="rId14"/>
@@ -1177,7 +1172,7 @@
           </a:p>
           <a:p>
             <a:r>
-              <a:t>スクショ候補: 点数 (高さ) を計算する関数 log_probability (653〜659 行)。コードは code/mcmc_fit_all_bins.py (Totani 方式の修正 cloud_reports/2026-10-02_totani_bestfit.patch を当てた後の行番号)。</a:t>
+              <a:t>スクショ候補: 点数 (高さ) を計算する関数 log_probability (658〜663 行)。コードは code/mcmc_fit_all_bins.py (10/3 にローカルで修正を当てた今のファイルの行番号。コミット 880fbdb)。</a:t>
             </a:r>
           </a:p>
         </p:txBody>
@@ -1267,7 +1262,7 @@
           </a:p>
           <a:p>
             <a:r>
-              <a:t>スクショ候補: log_prior (630 行、立ち入り禁止のチェック)、log_likelihood (647〜650 行、高度計)、log_probability (653 行、両方を足す)。コードは code/mcmc_fit_all_bins.py (Totani 方式の修正 cloud_reports/2026-10-02_totani_bestfit.patch を当てた後の行番号)。</a:t>
+              <a:t>スクショ候補: log_prior (635〜649 行、立ち入り禁止のチェック)、log_likelihood (652〜655 行、高度計)、log_probability (658〜663 行、両方を足す)。コードは code/mcmc_fit_all_bins.py (10/3 にローカルで修正を当てた今のファイルの行番号。コミット 880fbdb)。</a:t>
             </a:r>
           </a:p>
         </p:txBody>
@@ -1352,7 +1347,7 @@
           </a:p>
           <a:p>
             <a:r>
-              <a:t>スクショ候補: 歩かせる部分 sampler.run_mcmc (877〜878 行)。メトロポリスの判定そのものは emcee の中にある。コードは code/mcmc_fit_all_bins.py (Totani 方式の修正 cloud_reports/2026-10-02_totani_bestfit.patch を当てた後の行番号)。</a:t>
+              <a:t>スクショ候補: 歩かせる部分 sampler.run_mcmc (882〜883 行)。メトロポリスの判定そのものは emcee の中にある。コードは code/mcmc_fit_all_bins.py (10/3 にローカルで修正を当てた今のファイルの行番号。コミット 880fbdb)。</a:t>
             </a:r>
           </a:p>
         </p:txBody>
@@ -1697,7 +1692,7 @@
           </a:p>
           <a:p>
             <a:r>
-              <a:t>スクショ候補: 出発点を決める行 (868 行)、32 人で歩かせる emcee.EnsembleSampler (877 行)。コードは code/mcmc_fit_all_bins.py (Totani 方式の修正 cloud_reports/2026-10-02_totani_bestfit.patch を当てた後の行番号)。</a:t>
+              <a:t>スクショ候補: 出発点を決める行 (871〜875 行)、32 人で歩かせる emcee.EnsembleSampler (882 行)。コードは code/mcmc_fit_all_bins.py (10/3 にローカルで修正を当てた今のファイルの行番号。コミット 880fbdb)。</a:t>
             </a:r>
           </a:p>
         </p:txBody>
@@ -1782,12 +1777,12 @@
           </a:p>
           <a:p>
             <a:r>
-              <a:t>数字はクラウドの計算機で、Totani と同じやり方で出した値 (cloud_reports/2026-10-02_totani_mode/)。</a:t>
-            </a:r>
-          </a:p>
-          <a:p>
-            <a:r>
-              <a:t>スクショ候補: 一番高い足あとを探す行 (879〜880 行)、誤差の 16〜84% (926 行)、有意度 (910 行)。コードは code/mcmc_fit_all_bins.py (Totani 方式の修正 cloud_reports/2026-10-02_totani_bestfit.patch を当てた後の行番号)。</a:t>
+              <a:t>数字は本人 PC で、Totani と同じやり方で出した値 (10/3、results/mcmc_allbins_gasICS_v20t/)。</a:t>
+            </a:r>
+          </a:p>
+          <a:p>
+            <a:r>
+              <a:t>スクショ候補: 一番高い足あとを探す行 (884〜886 行)、有意度 (924〜925 行)、誤差の 16〜84% (941 行)。コードは code/mcmc_fit_all_bins.py (10/3 にローカルで修正を当てた今のファイルの行番号。コミット 880fbdb)。</a:t>
             </a:r>
           </a:p>
           <a:p>
@@ -1797,7 +1792,7 @@
           </a:p>
           <a:p>
             <a:r>
-              <a:t>捨てる歩数は本研究で決めた値 (Totani の論文には書かれていない)。最初は 400 歩だったが、歩く人数 (20/32/64)・乱数の種 (3 通り)・歩数 (6000/20000) を変えて確かめたところ、400 歩では誤差の上端が乱数の種によって 1.59〜1.89 とぶれたので、2000 歩に変えた (2000 歩ではどれも 1.56〜1.57。この確認は型紙の作り方が少し違う確認用の計算で、本番の 2000 歩の誤差は 1.42〜1.58)。最良値 1.51 と有意度 19.5σ は捨てる歩数によらず同じ。400 歩のときの誤差は 1.43〜1.61。</a:t>
+              <a:t>捨てる歩数は本研究で決めた値 (Totani の論文には書かれていない)。最初は 400 歩だったが、歩く人数 (20/32/64)・乱数の種 (3 通り)・歩数 (6000/20000) を変えて確かめたところ、400 歩では誤差の上端が乱数の種によって 1.59〜1.89 とぶれたので、2000 歩に変えた (2000 歩ではどれも 1.56〜1.57。この確認は型紙の作り方が少し違う確認用の計算で、本番の 2000 歩の誤差は 1.40〜1.56)。最良値 1.48 と有意度 19.0σ (本人 PC) は捨てる歩数によらず同じ。</a:t>
             </a:r>
           </a:p>
         </p:txBody>
@@ -1867,12 +1862,22 @@
           <a:lstStyle/>
           <a:p>
             <a:r>
-              <a:t>青が本研究 (10/2 に Totani と同じやり方 = MCMC で最良値、で計算し直した。クラウドの計算機)、赤が Totani Fig. 9。本人 PC での確定値は後日。</a:t>
-            </a:r>
-          </a:p>
-          <a:p>
-            <a:r>
-              <a:t>ただしこの 19.5σ は Wilks の定理を信じた「名目の値」。後で較正する。</a:t>
+              <a:t>青が本研究 (10/3、本人 PC で Totani と同じやり方 = MCMC で最良値。results/mcmc_allbins_gasICS_v20t/)、赤が Totani Fig. 9。</a:t>
+            </a:r>
+          </a:p>
+          <a:p>
+            <a:r>
+              <a:t>緑は青を 1.26 で割ったもの。1.26 = 何も無い空 23 か所で同じ解析をしたときの σ のばらつき (本当は 1 になるはず)。薄い緑の帯は 1.26 の 95% 区間 (1.14–1.39) で割った範囲。20.8 GeV で 15.1σ (13.7–16.7σ)。</a:t>
+            </a:r>
+          </a:p>
+          <a:p>
+            <a:r>
+              <a:t>注意: 赤 (Totani) は較正していない名目の値。緑と赤が近いのは、定義の違う値どうしの比較なので、「Totani の値が正しく較正されている」という意味ではない。同じ定義で比べるのは青と赤。</a:t>
+            </a:r>
+          </a:p>
+          <a:p>
+            <a:r>
+              <a:t>較正の仮定: 19σ のような大きな値でも同じ 1.26 倍かは確かめていない。</a:t>
             </a:r>
           </a:p>
         </p:txBody>
@@ -1952,7 +1957,8 @@
           </a:p>
           <a:p>
             <a:r>
-              <a:t>図: ICS の倍率 (GALPROP の予測の何倍か)。ハローなしでは全エネルギーで約 1.4〜1.6 倍でほぼ平ら (最良値)。ハローを入れると、ハローが効くビンでだけへこむ。</a:t>
+              <a:t>図: 20.8 GeV の型紙そのもの (倍率は掛けていない)。横軸は銀河面からの角度、縦軸は明るさ (|b| = 25° を 1 にそろえた。経度は ROI 全体で平均)。2 本の線がほぼ重なる = 緯度方向の暗くなり方が同じ。作図 /home/arsei/slidework/make_lat_profile.py。
+(前の図: ICS の倍率。ハローなしでは全エネルギーで約 1.4〜1.6 倍でほぼ平ら。ハローを入れると、ハローが効くビンでだけへこむ。slides/figs/fig_ics_norm_totani.png)</a:t>
             </a:r>
           </a:p>
         </p:txBody>
@@ -2297,7 +2303,7 @@
           </a:p>
           <a:p>
             <a:r>
-              <a:t>予測 6.6σ と実測 5.0σ の残りの差は、バブル外でハローの倍率が 0.77 倍と低いことで説明できる。この内外の差は約 1.5σ で、意味のある差ではない。</a:t>
+              <a:t>予測 6.4σ と実測 5.0σ の残りの差は、バブル外でハローの倍率が 0.77 倍と低いことで説明できる (予測 6.4σ は 10/1 の v20r で計算したフィッシャー情報から。実測と倍率は 10/3 本人 PC、Totani 方式)。この内外の差は約 1.5σ で、意味のある差ではない。</a:t>
             </a:r>
           </a:p>
           <a:p>
@@ -2387,7 +2393,7 @@
           </a:p>
           <a:p>
             <a:r>
-              <a:t>3 分割 = 星の光・ちり・宇宙背景の光、の 3 種類の光を電子がはね上げたもの。19.5σ と 18.4σ はクラウドの計算機で、Totani と同じやり方で比べた値 (どちらも同じ条件なので、差で言う)。Totani §3.4.4 の同種の確認とも同じ結論。</a:t>
+              <a:t>3 分割 = 星の光・ちり・宇宙背景の光、の 3 種類の光を電子がはね上げたもの。19.0σ と 17.8σ は本人 PC で、Totani と同じやり方で出した値 (10/3、results/mcmc_allbins_gasICS_v20t_icssplit/)。Totani §3.4.4 の同種の確認とも同じ結論。</a:t>
             </a:r>
           </a:p>
           <a:p>
@@ -3407,91 +3413,6 @@
 </p:notes>
 </file>
 
-<file path=ppt/notesSlides/notesSlide4.xml><?xml version="1.0" encoding="utf-8"?>
-<p:notes xmlns:a="http://schemas.openxmlformats.org/drawingml/2006/main" xmlns:r="http://schemas.openxmlformats.org/officeDocument/2006/relationships" xmlns:p="http://schemas.openxmlformats.org/presentationml/2006/main">
-  <p:cSld>
-    <p:spTree>
-      <p:nvGrpSpPr>
-        <p:cNvPr id="1" name=""/>
-        <p:cNvGrpSpPr/>
-        <p:nvPr/>
-      </p:nvGrpSpPr>
-      <p:grpSpPr>
-        <a:xfrm>
-          <a:off x="0" y="0"/>
-          <a:ext cx="0" cy="0"/>
-          <a:chOff x="0" y="0"/>
-          <a:chExt cx="0" cy="0"/>
-        </a:xfrm>
-      </p:grpSpPr>
-      <p:sp>
-        <p:nvSpPr>
-          <p:cNvPr id="2" name="Slide Image Placeholder 1"/>
-          <p:cNvSpPr>
-            <a:spLocks noGrp="1" noRot="1" noChangeAspect="1"/>
-          </p:cNvSpPr>
-          <p:nvPr>
-            <p:ph type="sldImg" idx="2"/>
-          </p:nvPr>
-        </p:nvSpPr>
-        <p:spPr/>
-      </p:sp>
-      <p:sp>
-        <p:nvSpPr>
-          <p:cNvPr id="3" name="Notes Placeholder 2"/>
-          <p:cNvSpPr>
-            <a:spLocks noGrp="1"/>
-          </p:cNvSpPr>
-          <p:nvPr>
-            <p:ph type="body" sz="quarter" idx="3"/>
-          </p:nvPr>
-        </p:nvSpPr>
-        <p:spPr/>
-        <p:txBody>
-          <a:bodyPr/>
-          <a:lstStyle/>
-          <a:p>
-            <a:r>
-              <a:t>たとえ: 部屋の壁全体がぼんやり同じ明るさで光っている、その「底上げ」の明るさ。</a:t>
-            </a:r>
-          </a:p>
-          <a:p>
-            <a:r>
-              <a:t>最初の値 10⁻⁴ は、これまでに測られた「銀河の外から来るガンマ線の背景」の典型的な明るさ (Totani §2.3)。</a:t>
-            </a:r>
-          </a:p>
-          <a:p>
-            <a:r>
-              <a:t>Loop I との区別: 殻 1 は太陽が殻の壁の中にあるため空のほぼ全体を覆い、明るさの変化が等方背景と同じくらい平ら。データからは 2 つの分け方が決まらず、合計だけが決まる (.dev/TOTANI_SPEC.md 3.7a)。</a:t>
-            </a:r>
-          </a:p>
-          <a:p>
-            <a:r>
-              <a:t>右の地図: 20.8 GeV の型紙 (倍率は掛けていない。形だけを見る図)。cloud_reports/2026-10-02_plot_templates.py で作成。</a:t>
-            </a:r>
-          </a:p>
-        </p:txBody>
-      </p:sp>
-      <p:sp>
-        <p:nvSpPr>
-          <p:cNvPr id="4" name="Slide Number Placeholder 3"/>
-          <p:cNvSpPr>
-            <a:spLocks noGrp="1"/>
-          </p:cNvSpPr>
-          <p:nvPr>
-            <p:ph type="sldNum" sz="quarter" idx="5"/>
-          </p:nvPr>
-        </p:nvSpPr>
-        <p:spPr/>
-      </p:sp>
-    </p:spTree>
-  </p:cSld>
-  <p:clrMapOvr>
-    <a:masterClrMapping/>
-  </p:clrMapOvr>
-</p:notes>
-</file>
-
 <file path=ppt/notesSlides/notesSlide40.xml><?xml version="1.0" encoding="utf-8"?>
 <p:notes xmlns:a="http://schemas.openxmlformats.org/drawingml/2006/main" xmlns:r="http://schemas.openxmlformats.org/officeDocument/2006/relationships" xmlns:p="http://schemas.openxmlformats.org/presentationml/2006/main">
   <p:cSld>
@@ -4292,91 +4213,6 @@
 </p:notes>
 </file>
 
-<file path=ppt/notesSlides/notesSlide5.xml><?xml version="1.0" encoding="utf-8"?>
-<p:notes xmlns:a="http://schemas.openxmlformats.org/drawingml/2006/main" xmlns:r="http://schemas.openxmlformats.org/officeDocument/2006/relationships" xmlns:p="http://schemas.openxmlformats.org/presentationml/2006/main">
-  <p:cSld>
-    <p:spTree>
-      <p:nvGrpSpPr>
-        <p:cNvPr id="1" name=""/>
-        <p:cNvGrpSpPr/>
-        <p:nvPr/>
-      </p:nvGrpSpPr>
-      <p:grpSpPr>
-        <a:xfrm>
-          <a:off x="0" y="0"/>
-          <a:ext cx="0" cy="0"/>
-          <a:chOff x="0" y="0"/>
-          <a:chExt cx="0" cy="0"/>
-        </a:xfrm>
-      </p:grpSpPr>
-      <p:sp>
-        <p:nvSpPr>
-          <p:cNvPr id="2" name="Slide Image Placeholder 1"/>
-          <p:cNvSpPr>
-            <a:spLocks noGrp="1" noRot="1" noChangeAspect="1"/>
-          </p:cNvSpPr>
-          <p:nvPr>
-            <p:ph type="sldImg" idx="2"/>
-          </p:nvPr>
-        </p:nvSpPr>
-        <p:spPr/>
-      </p:sp>
-      <p:sp>
-        <p:nvSpPr>
-          <p:cNvPr id="3" name="Notes Placeholder 2"/>
-          <p:cNvSpPr>
-            <a:spLocks noGrp="1"/>
-          </p:cNvSpPr>
-          <p:nvPr>
-            <p:ph type="body" sz="quarter" idx="3"/>
-          </p:nvPr>
-        </p:nvSpPr>
-        <p:spPr/>
-        <p:txBody>
-          <a:bodyPr/>
-          <a:lstStyle/>
-          <a:p>
-            <a:r>
-              <a:t>GALPROP: 宇宙線が銀河の中でどう生まれ、どう広がるかを計算し、そこから出るガンマ線の地図を作るシミュレーション (ver. 54、設定 SLZ6R30T150C2。Fermi-LAT チームの銀河拡散モデルでも使われている設定)。</a:t>
-            </a:r>
-          </a:p>
-          <a:p>
-            <a:r>
-              <a:t>π⁰ は電気を持たない中間子で、できるとすぐ (10⁻¹⁶ 秒ほど) 光子 2 個に壊れる。</a:t>
-            </a:r>
-          </a:p>
-          <a:p>
-            <a:r>
-              <a:t>ガス雲の模様は、電波 (水素の 21 cm 線) や、ちりによる星の光の赤み (E(B−V)) から作ったガスの地図に由来する。</a:t>
-            </a:r>
-          </a:p>
-          <a:p>
-            <a:r>
-              <a:t>右の地図: 20.8 GeV の型紙 (倍率は掛けていない。形だけを見る図)。cloud_reports/2026-10-02_plot_templates.py で作成。</a:t>
-            </a:r>
-          </a:p>
-        </p:txBody>
-      </p:sp>
-      <p:sp>
-        <p:nvSpPr>
-          <p:cNvPr id="4" name="Slide Number Placeholder 3"/>
-          <p:cNvSpPr>
-            <a:spLocks noGrp="1"/>
-          </p:cNvSpPr>
-          <p:nvPr>
-            <p:ph type="sldNum" sz="quarter" idx="5"/>
-          </p:nvPr>
-        </p:nvSpPr>
-        <p:spPr/>
-      </p:sp>
-    </p:spTree>
-  </p:cSld>
-  <p:clrMapOvr>
-    <a:masterClrMapping/>
-  </p:clrMapOvr>
-</p:notes>
-</file>
-
 <file path=ppt/notesSlides/notesSlide50.xml><?xml version="1.0" encoding="utf-8"?>
 <p:notes xmlns:a="http://schemas.openxmlformats.org/drawingml/2006/main" xmlns:r="http://schemas.openxmlformats.org/officeDocument/2006/relationships" xmlns:p="http://schemas.openxmlformats.org/presentationml/2006/main">
   <p:cSld>
@@ -4445,8 +4281,8 @@
 </p:notes>
 </file>
 
-<file path=ppt/notesSlides/notesSlide6.xml><?xml version="1.0" encoding="utf-8"?>
-<p:notes xmlns:a="http://schemas.openxmlformats.org/drawingml/2006/main" xmlns:r="http://schemas.openxmlformats.org/officeDocument/2006/relationships" xmlns:p="http://schemas.openxmlformats.org/presentationml/2006/main">
+<file path=ppt/notesSlides/notesSlide51.xml><?xml version="1.0" encoding="utf-8"?>
+<p:notes xmlns:a="http://schemas.openxmlformats.org/drawingml/2006/main" xmlns:p="http://schemas.openxmlformats.org/presentationml/2006/main" xmlns:r="http://schemas.openxmlformats.org/officeDocument/2006/relationships">
   <p:cSld>
     <p:spTree>
       <p:nvGrpSpPr>
@@ -4466,7 +4302,7 @@
         <p:nvSpPr>
           <p:cNvPr id="2" name="Slide Image Placeholder 1"/>
           <p:cNvSpPr>
-            <a:spLocks noGrp="1" noRot="1" noChangeAspect="1"/>
+            <a:spLocks noGrp="1"/>
           </p:cNvSpPr>
           <p:nvPr>
             <p:ph type="sldImg" idx="2"/>
@@ -4481,16 +4317,66 @@
             <a:spLocks noGrp="1"/>
           </p:cNvSpPr>
           <p:nvPr>
-            <p:ph type="body" sz="quarter" idx="3"/>
-          </p:nvPr>
-        </p:nvSpPr>
-        <p:spPr/>
-        <p:txBody>
-          <a:bodyPr/>
-          <a:lstStyle/>
-          <a:p>
-            <a:r>
-              <a:t>逆コンプトン散乱: 普通のコンプトン散乱は光が電子をはね飛ばす。ここでは逆で、とても速い電子が、低いエネルギーの光にエネルギーを渡して、ガンマ線にする。</a:t>
+            <p:ph type="body" idx="3" sz="quarter"/>
+          </p:nvPr>
+        </p:nvSpPr>
+        <p:spPr/>
+        <p:txBody>
+          <a:bodyPr/>
+          <a:lstStyle/>
+          <a:p>
+            <a:r>
+              <a:t>地図はどれも 20.8 GeV の型紙 (倍率は掛けていない。形だけを見る図)。Loop I は殻 1、バブルは正の型紙。</a:t>
+            </a:r>
+          </a:p>
+          <a:p>
+            <a:r>
+              <a:t>以下は、まとめる前の 6 枚のノート (詳しい説明)。</a:t>
+            </a:r>
+          </a:p>
+          <a:p>
+            <a:r>
+              <a:t>【① 等方背景】たとえ: 部屋の壁全体がぼんやり同じ明るさで光っている、その「底上げ」の明るさ。</a:t>
+            </a:r>
+          </a:p>
+          <a:p>
+            <a:r>
+              <a:t>最初の値 10⁻⁴ は、これまでに測られた「銀河の外から来るガンマ線の背景」の典型的な明るさ (Totani §2.3)。</a:t>
+            </a:r>
+          </a:p>
+          <a:p>
+            <a:r>
+              <a:t>Loop I との区別: 殻 1 は太陽が殻の壁の中にあるため空のほぼ全体を覆い、明るさの変化が等方背景と同じくらい平ら。データからは 2 つの分け方が決まらず、合計だけが決まる (.dev/TOTANI_SPEC.md 3.7a)。</a:t>
+            </a:r>
+          </a:p>
+          <a:p>
+            <a:r>
+              <a:t>右の地図: 20.8 GeV の型紙 (倍率は掛けていない。形だけを見る図)。cloud_reports/2026-10-02_plot_templates.py で作成。</a:t>
+            </a:r>
+          </a:p>
+          <a:p>
+            <a:r>
+              <a:t>【② ガス】GALPROP: 宇宙線が銀河の中でどう生まれ、どう広がるかを計算し、そこから出るガンマ線の地図を作るシミュレーション (ver. 54、設定 SLZ6R30T150C2。Fermi-LAT チームの銀河拡散モデルでも使われている設定)。</a:t>
+            </a:r>
+          </a:p>
+          <a:p>
+            <a:r>
+              <a:t>π⁰ は電気を持たない中間子で、できるとすぐ (10⁻¹⁶ 秒ほど) 光子 2 個に壊れる。</a:t>
+            </a:r>
+          </a:p>
+          <a:p>
+            <a:r>
+              <a:t>ガス雲の模様は、電波 (水素の 21 cm 線) や、ちりによる星の光の赤み (E(B−V)) から作ったガスの地図に由来する。</a:t>
+            </a:r>
+          </a:p>
+          <a:p>
+            <a:r>
+              <a:t>右の地図: 20.8 GeV の型紙 (倍率は掛けていない。形だけを見る図)。cloud_reports/2026-10-02_plot_templates.py で作成。</a:t>
+            </a:r>
+          </a:p>
+          <a:p>
+            <a:r>
+              <a:t>【③ ICS】逆コンプトン散乱: 普通のコンプトン散乱は光が電子をはね飛ばす。ここでは逆で、とても速い電子が、低いエネルギーの光にエネルギーを渡して、ガンマ線にする。</a:t>
             </a:r>
           </a:p>
           <a:p>
@@ -4508,6 +4394,71 @@
               <a:t>右の地図: 20.8 GeV の型紙 (倍率は掛けていない。形だけを見る図)。cloud_reports/2026-10-02_plot_templates.py で作成。</a:t>
             </a:r>
           </a:p>
+          <a:p>
+            <a:r>
+              <a:t>【④ 点源】4FGL-DR4: Fermi-LAT の 14 年分のデータで見つかった天体のカタログ (gll_psc_v35.fit)。</a:t>
+            </a:r>
+          </a:p>
+          <a:p>
+            <a:r>
+              <a:t>PSF (点広がり関数): 望遠鏡で点を撮っても少しぼやけて写る、そのぼやけ方。エネルギーが低いほど大きくぼやける (1 GeV で約 0.85°、10 GeV で約 0.16°)。</a:t>
+            </a:r>
+          </a:p>
+          <a:p>
+            <a:r>
+              <a:t>拡張源: 大マゼラン雲や Cen A のローブのように、点ではなく広がって見える天体。Totani §2.3 と同じく、長半径の 2 倍の円を外す。</a:t>
+            </a:r>
+          </a:p>
+          <a:p>
+            <a:r>
+              <a:t>右の地図: 20.8 GeV の型紙 (倍率は掛けていない。形だけを見る図)。cloud_reports/2026-10-02_plot_templates.py で作成。</a:t>
+            </a:r>
+          </a:p>
+          <a:p>
+            <a:r>
+              <a:t>【⑤ Loop I】pc (パーセク) は距離の単位で、1 pc ≈ 3.26 光年。太陽から殻の中心までは 78 pc と 95 pc。</a:t>
+            </a:r>
+          </a:p>
+          <a:p>
+            <a:r>
+              <a:t>殻 1 は太陽が殻の壁の中にあるので、空のほぼ全体を覆う (左の地図)。そのため等方背景と区別しにくい。</a:t>
+            </a:r>
+          </a:p>
+          <a:p>
+            <a:r>
+              <a:t>超新星の残骸: 星が爆発したときに吹き飛んだガスが、泡のように広がったもの。</a:t>
+            </a:r>
+          </a:p>
+          <a:p>
+            <a:r>
+              <a:t>右の地図: 20.8 GeV の型紙 (倍率は掛けていない。形だけを見る図)。cloud_reports/2026-10-02_plot_templates.py で作成。</a:t>
+            </a:r>
+          </a:p>
+          <a:p>
+            <a:r>
+              <a:t>【⑥ フェルミバブル】なぜデータから作るか: バブルの正確な形を予言する理論が無いため。Totani は Fermi-LAT チームのやり方にならい、当てはめの残りから形を作った。</a:t>
+            </a:r>
+          </a:p>
+          <a:p>
+            <a:r>
+              <a:t>4.3 GeV の地図を使うのは、バブルがはっきり見えるため (Totani §3.1)。形はエネルギーで変えず、明るさ (倍率) だけを各エネルギーで決める。</a:t>
+            </a:r>
+          </a:p>
+          <a:p>
+            <a:r>
+              <a:t>負の型紙: 当てはめで光が余らなかった (予測が多すぎた) 場所。主に GALPROP の予測とデータのずれ。符号自由の倍率を掛けて補正に使う。</a:t>
+            </a:r>
+          </a:p>
+          <a:p>
+            <a:r>
+              <a:t>左の地図が正、右が負 (負の残差の大きさ)。</a:t>
+            </a:r>
+          </a:p>
+          <a:p>
+            <a:r>
+              <a:t>右の地図: 20.8 GeV の型紙 (倍率は掛けていない。形だけを見る図)。cloud_reports/2026-10-02_plot_templates.py で作成。</a:t>
+            </a:r>
+          </a:p>
         </p:txBody>
       </p:sp>
       <p:sp>
@@ -4517,7 +4468,7 @@
             <a:spLocks noGrp="1"/>
           </p:cNvSpPr>
           <p:nvPr>
-            <p:ph type="sldNum" sz="quarter" idx="5"/>
+            <p:ph type="sldNum" idx="5" sz="quarter"/>
           </p:nvPr>
         </p:nvSpPr>
         <p:spPr/>
@@ -4530,8 +4481,8 @@
 </p:notes>
 </file>
 
-<file path=ppt/notesSlides/notesSlide7.xml><?xml version="1.0" encoding="utf-8"?>
-<p:notes xmlns:a="http://schemas.openxmlformats.org/drawingml/2006/main" xmlns:r="http://schemas.openxmlformats.org/officeDocument/2006/relationships" xmlns:p="http://schemas.openxmlformats.org/presentationml/2006/main">
+<file path=ppt/notesSlides/notesSlide9.xml><?xml version="1.0" encoding="utf-8"?>
+<p:notes xmlns:a="http://schemas.openxmlformats.org/drawingml/2006/main" xmlns:p="http://schemas.openxmlformats.org/presentationml/2006/main" xmlns:r="http://schemas.openxmlformats.org/officeDocument/2006/relationships">
   <p:cSld>
     <p:spTree>
       <p:nvGrpSpPr>
@@ -4551,7 +4502,7 @@
         <p:nvSpPr>
           <p:cNvPr id="2" name="Slide Image Placeholder 1"/>
           <p:cNvSpPr>
-            <a:spLocks noGrp="1" noRot="1" noChangeAspect="1"/>
+            <a:spLocks noGrp="1"/>
           </p:cNvSpPr>
           <p:nvPr>
             <p:ph type="sldImg" idx="2"/>
@@ -4566,33 +4517,14 @@
             <a:spLocks noGrp="1"/>
           </p:cNvSpPr>
           <p:nvPr>
-            <p:ph type="body" sz="quarter" idx="3"/>
-          </p:nvPr>
-        </p:nvSpPr>
-        <p:spPr/>
-        <p:txBody>
-          <a:bodyPr/>
-          <a:lstStyle/>
-          <a:p>
-            <a:r>
-              <a:t>4FGL-DR4: Fermi-LAT の 14 年分のデータで見つかった天体のカタログ (gll_psc_v35.fit)。</a:t>
-            </a:r>
-          </a:p>
-          <a:p>
-            <a:r>
-              <a:t>PSF (点広がり関数): 望遠鏡で点を撮っても少しぼやけて写る、そのぼやけ方。エネルギーが低いほど大きくぼやける (1 GeV で約 0.85°、10 GeV で約 0.16°)。</a:t>
-            </a:r>
-          </a:p>
-          <a:p>
-            <a:r>
-              <a:t>拡張源: 大マゼラン雲や Cen A のローブのように、点ではなく広がって見える天体。Totani §2.3 と同じく、長半径の 2 倍の円を外す。</a:t>
-            </a:r>
-          </a:p>
-          <a:p>
-            <a:r>
-              <a:t>右の地図: 20.8 GeV の型紙 (倍率は掛けていない。形だけを見る図)。cloud_reports/2026-10-02_plot_templates.py で作成。</a:t>
-            </a:r>
-          </a:p>
+            <p:ph type="body" idx="3" sz="quarter"/>
+          </p:nvPr>
+        </p:nvSpPr>
+        <p:spPr/>
+        <p:txBody>
+          <a:bodyPr/>
+          <a:lstStyle/>
+          <a:p/>
         </p:txBody>
       </p:sp>
       <p:sp>
@@ -4602,182 +4534,7 @@
             <a:spLocks noGrp="1"/>
           </p:cNvSpPr>
           <p:nvPr>
-            <p:ph type="sldNum" sz="quarter" idx="5"/>
-          </p:nvPr>
-        </p:nvSpPr>
-        <p:spPr/>
-      </p:sp>
-    </p:spTree>
-  </p:cSld>
-  <p:clrMapOvr>
-    <a:masterClrMapping/>
-  </p:clrMapOvr>
-</p:notes>
-</file>
-
-<file path=ppt/notesSlides/notesSlide8.xml><?xml version="1.0" encoding="utf-8"?>
-<p:notes xmlns:a="http://schemas.openxmlformats.org/drawingml/2006/main" xmlns:r="http://schemas.openxmlformats.org/officeDocument/2006/relationships" xmlns:p="http://schemas.openxmlformats.org/presentationml/2006/main">
-  <p:cSld>
-    <p:spTree>
-      <p:nvGrpSpPr>
-        <p:cNvPr id="1" name=""/>
-        <p:cNvGrpSpPr/>
-        <p:nvPr/>
-      </p:nvGrpSpPr>
-      <p:grpSpPr>
-        <a:xfrm>
-          <a:off x="0" y="0"/>
-          <a:ext cx="0" cy="0"/>
-          <a:chOff x="0" y="0"/>
-          <a:chExt cx="0" cy="0"/>
-        </a:xfrm>
-      </p:grpSpPr>
-      <p:sp>
-        <p:nvSpPr>
-          <p:cNvPr id="2" name="Slide Image Placeholder 1"/>
-          <p:cNvSpPr>
-            <a:spLocks noGrp="1" noRot="1" noChangeAspect="1"/>
-          </p:cNvSpPr>
-          <p:nvPr>
-            <p:ph type="sldImg" idx="2"/>
-          </p:nvPr>
-        </p:nvSpPr>
-        <p:spPr/>
-      </p:sp>
-      <p:sp>
-        <p:nvSpPr>
-          <p:cNvPr id="3" name="Notes Placeholder 2"/>
-          <p:cNvSpPr>
-            <a:spLocks noGrp="1"/>
-          </p:cNvSpPr>
-          <p:nvPr>
-            <p:ph type="body" sz="quarter" idx="3"/>
-          </p:nvPr>
-        </p:nvSpPr>
-        <p:spPr/>
-        <p:txBody>
-          <a:bodyPr/>
-          <a:lstStyle/>
-          <a:p>
-            <a:r>
-              <a:t>pc (パーセク) は距離の単位で、1 pc ≈ 3.26 光年。太陽から殻の中心までは 78 pc と 95 pc。</a:t>
-            </a:r>
-          </a:p>
-          <a:p>
-            <a:r>
-              <a:t>殻 1 は太陽が殻の壁の中にあるので、空のほぼ全体を覆う (左の地図)。そのため等方背景と区別しにくい。</a:t>
-            </a:r>
-          </a:p>
-          <a:p>
-            <a:r>
-              <a:t>超新星の残骸: 星が爆発したときに吹き飛んだガスが、泡のように広がったもの。</a:t>
-            </a:r>
-          </a:p>
-          <a:p>
-            <a:r>
-              <a:t>右の地図: 20.8 GeV の型紙 (倍率は掛けていない。形だけを見る図)。cloud_reports/2026-10-02_plot_templates.py で作成。</a:t>
-            </a:r>
-          </a:p>
-        </p:txBody>
-      </p:sp>
-      <p:sp>
-        <p:nvSpPr>
-          <p:cNvPr id="4" name="Slide Number Placeholder 3"/>
-          <p:cNvSpPr>
-            <a:spLocks noGrp="1"/>
-          </p:cNvSpPr>
-          <p:nvPr>
-            <p:ph type="sldNum" sz="quarter" idx="5"/>
-          </p:nvPr>
-        </p:nvSpPr>
-        <p:spPr/>
-      </p:sp>
-    </p:spTree>
-  </p:cSld>
-  <p:clrMapOvr>
-    <a:masterClrMapping/>
-  </p:clrMapOvr>
-</p:notes>
-</file>
-
-<file path=ppt/notesSlides/notesSlide9.xml><?xml version="1.0" encoding="utf-8"?>
-<p:notes xmlns:a="http://schemas.openxmlformats.org/drawingml/2006/main" xmlns:r="http://schemas.openxmlformats.org/officeDocument/2006/relationships" xmlns:p="http://schemas.openxmlformats.org/presentationml/2006/main">
-  <p:cSld>
-    <p:spTree>
-      <p:nvGrpSpPr>
-        <p:cNvPr id="1" name=""/>
-        <p:cNvGrpSpPr/>
-        <p:nvPr/>
-      </p:nvGrpSpPr>
-      <p:grpSpPr>
-        <a:xfrm>
-          <a:off x="0" y="0"/>
-          <a:ext cx="0" cy="0"/>
-          <a:chOff x="0" y="0"/>
-          <a:chExt cx="0" cy="0"/>
-        </a:xfrm>
-      </p:grpSpPr>
-      <p:sp>
-        <p:nvSpPr>
-          <p:cNvPr id="2" name="Slide Image Placeholder 1"/>
-          <p:cNvSpPr>
-            <a:spLocks noGrp="1" noRot="1" noChangeAspect="1"/>
-          </p:cNvSpPr>
-          <p:nvPr>
-            <p:ph type="sldImg" idx="2"/>
-          </p:nvPr>
-        </p:nvSpPr>
-        <p:spPr/>
-      </p:sp>
-      <p:sp>
-        <p:nvSpPr>
-          <p:cNvPr id="3" name="Notes Placeholder 2"/>
-          <p:cNvSpPr>
-            <a:spLocks noGrp="1"/>
-          </p:cNvSpPr>
-          <p:nvPr>
-            <p:ph type="body" sz="quarter" idx="3"/>
-          </p:nvPr>
-        </p:nvSpPr>
-        <p:spPr/>
-        <p:txBody>
-          <a:bodyPr/>
-          <a:lstStyle/>
-          <a:p>
-            <a:r>
-              <a:t>なぜデータから作るか: バブルの正確な形を予言する理論が無いため。Totani は Fermi-LAT チームのやり方にならい、当てはめの残りから形を作った。</a:t>
-            </a:r>
-          </a:p>
-          <a:p>
-            <a:r>
-              <a:t>4.3 GeV の地図を使うのは、バブルがはっきり見えるため (Totani §3.1)。形はエネルギーで変えず、明るさ (倍率) だけを各エネルギーで決める。</a:t>
-            </a:r>
-          </a:p>
-          <a:p>
-            <a:r>
-              <a:t>負の型紙: 当てはめで光が余らなかった (予測が多すぎた) 場所。主に GALPROP の予測とデータのずれ。符号自由の倍率を掛けて補正に使う。</a:t>
-            </a:r>
-          </a:p>
-          <a:p>
-            <a:r>
-              <a:t>左の地図が正、右が負 (負の残差の大きさ)。</a:t>
-            </a:r>
-          </a:p>
-          <a:p>
-            <a:r>
-              <a:t>右の地図: 20.8 GeV の型紙 (倍率は掛けていない。形だけを見る図)。cloud_reports/2026-10-02_plot_templates.py で作成。</a:t>
-            </a:r>
-          </a:p>
-        </p:txBody>
-      </p:sp>
-      <p:sp>
-        <p:nvSpPr>
-          <p:cNvPr id="4" name="Slide Number Placeholder 3"/>
-          <p:cNvSpPr>
-            <a:spLocks noGrp="1"/>
-          </p:cNvSpPr>
-          <p:nvPr>
-            <p:ph type="sldNum" sz="quarter" idx="5"/>
+            <p:ph type="sldNum" idx="5" sz="quarter"/>
           </p:nvPr>
         </p:nvSpPr>
         <p:spPr/>
@@ -8141,8 +7898,8 @@
           <a:lstStyle/>
           <a:p>
             <a:r>
-              <a:rPr sz="3000"/>
-              <a:t>成分⑥：フェルミバブル（正・負）</a:t>
+              <a:rPr sz="3400"/>
+              <a:t>手法④：MCMC（最良値と誤差）</a:t>
             </a:r>
           </a:p>
         </p:txBody>
@@ -8159,8 +7916,8 @@
         </p:nvSpPr>
         <p:spPr>
           <a:xfrm>
-            <a:off x="548640" y="1371600"/>
-            <a:ext cx="6400800" cy="4297680"/>
+            <a:off x="841248" y="1463040"/>
+            <a:ext cx="10515600" cy="4114800"/>
           </a:xfrm>
         </p:spPr>
         <p:txBody>
@@ -8168,100 +7925,44 @@
           <a:lstStyle/>
           <a:p>
             <a:r>
-              <a:rPr sz="1800"/>
-              <a:t>銀河中心の上下に、それぞれ約 50° 広がる巨大な泡</a:t>
+              <a:rPr sz="2400"/>
+              <a:t>MCMC で、最良の倍率 f と、その誤差の両方を求める（Totani と同じ）</a:t>
+            </a:r>
+          </a:p>
+          <a:p>
+            <a:r>
+              <a:rPr sz="2400"/>
+              <a:t>MCMC：尤度に比例する確率で、パラメータの空間を歩き回る</a:t>
             </a:r>
           </a:p>
           <a:p>
             <a:pPr lvl="1"/>
             <a:r>
-              <a:rPr sz="1500"/>
-              <a:t>過去の銀河中心の活動（ブラックホールや爆発的な星形成）の名残と考えられている</a:t>
-            </a:r>
-          </a:p>
-          <a:p>
-            <a:r>
-              <a:rPr sz="1800"/>
-              <a:t>型紙はデータから作る（Totani §3.1）</a:t>
+              <a:rPr sz="2000"/>
+              <a:t>歩いた中で尤度が最大の点 = 最良値、歩いた跡の分布 → 誤差棒</a:t>
+            </a:r>
+          </a:p>
+          <a:p>
+            <a:r>
+              <a:rPr sz="2400"/>
+              <a:t>emcee を使用：32 本の歩行者 × 6000 歩</a:t>
             </a:r>
           </a:p>
           <a:p>
             <a:pPr lvl="1"/>
             <a:r>
-              <a:rPr sz="1500"/>
-              <a:t>まず平らな泡の形で当てはめ、残った光（4.3 GeV）を 1° でぼかす</a:t>
-            </a:r>
-          </a:p>
-          <a:p>
-            <a:pPr lvl="1"/>
-            <a:r>
-              <a:rPr sz="1500"/>
-              <a:t>残りが正の所 → 正の型紙（バブル本体）</a:t>
-            </a:r>
-          </a:p>
-          <a:p>
-            <a:pPr lvl="1"/>
-            <a:r>
-              <a:rPr sz="1500"/>
-              <a:t>残りが負の所 → 負の型紙（GALPROP とデータのずれの補正）</a:t>
-            </a:r>
-          </a:p>
-          <a:p>
-            <a:r>
-              <a:rPr sz="1800"/>
-              <a:t>倍率：正は 0 以上、負は符号自由。最初は 0</a:t>
-            </a:r>
-          </a:p>
-        </p:txBody>
-      </p:sp>
-      <p:pic>
-        <p:nvPicPr>
-          <p:cNvPr id="4" name="Picture 3" descr="template_fb.png"/>
-          <p:cNvPicPr>
-            <a:picLocks noChangeAspect="1"/>
-          </p:cNvPicPr>
-          <p:nvPr/>
-        </p:nvPicPr>
-        <p:blipFill>
-          <a:blip r:embed="rId3"/>
-          <a:stretch>
-            <a:fillRect/>
-          </a:stretch>
-        </p:blipFill>
-        <p:spPr>
-          <a:xfrm>
-            <a:off x="7086600" y="1828800"/>
-            <a:ext cx="2468880" cy="2563837"/>
-          </a:xfrm>
-          <a:prstGeom prst="rect">
-            <a:avLst/>
-          </a:prstGeom>
-        </p:spPr>
-      </p:pic>
-      <p:pic>
-        <p:nvPicPr>
-          <p:cNvPr id="5" name="Picture 4" descr="template_fb_neg.png"/>
-          <p:cNvPicPr>
-            <a:picLocks noChangeAspect="1"/>
-          </p:cNvPicPr>
-          <p:nvPr/>
-        </p:nvPicPr>
-        <p:blipFill>
-          <a:blip r:embed="rId4"/>
-          <a:stretch>
-            <a:fillRect/>
-          </a:stretch>
-        </p:blipFill>
-        <p:spPr>
-          <a:xfrm>
-            <a:off x="9601200" y="1828800"/>
-            <a:ext cx="2468880" cy="2563837"/>
-          </a:xfrm>
-          <a:prstGeom prst="rect">
-            <a:avLst/>
-          </a:prstGeom>
-        </p:spPr>
-      </p:pic>
+              <a:rPr sz="2000"/>
+              <a:t>出発点は Totani と同じ初期値（点源・GALPROP = 1、他 = 0 など）</a:t>
+            </a:r>
+          </a:p>
+          <a:p>
+            <a:r>
+              <a:rPr sz="2400"/>
+              <a:t>有意度 σ も、ハローあり・なしそれぞれの MCMC で見つけた最大 ln L の差から出す</a:t>
+            </a:r>
+          </a:p>
+        </p:txBody>
+      </p:sp>
       <p:sp>
         <p:nvSpPr>
           <p:cNvPr id="8" name="TextBox 7">
@@ -8296,7 +7997,7 @@
             </a:r>
             <a:r>
               <a:rPr lang="en-US" sz="1400"/>
-              <a:t> T. Totani (2025), arXiv:2507.07209 §3.1</a:t>
+              <a:t> D. Foreman-Mackey et al. (2013), PASP 125, 306</a:t>
             </a:r>
             <a:endParaRPr lang="en-US"/>
           </a:p>
@@ -8344,7 +8045,7 @@
           <a:p>
             <a:r>
               <a:rPr sz="3000"/>
-              <a:t>成分⑦：ハロー（探しているもの）</a:t>
+              <a:t>MCMC をたとえで見る：霧の山を歩く</a:t>
             </a:r>
           </a:p>
         </p:txBody>
@@ -8362,7 +8063,7 @@
         <p:spPr>
           <a:xfrm>
             <a:off x="548640" y="1371600"/>
-            <a:ext cx="6400800" cy="4297680"/>
+            <a:ext cx="5669280" cy="4297680"/>
           </a:xfrm>
         </p:spPr>
         <p:txBody>
@@ -8371,117 +8072,64 @@
           <a:p>
             <a:r>
               <a:rPr sz="1800"/>
-              <a:t>暗黒物質の粒子どうしがぶつかって消え（対消滅）、ガンマ線を出す</a:t>
+              <a:t>山の上の「場所」 → 倍率の組 θ</a:t>
+            </a:r>
+          </a:p>
+          <a:p>
+            <a:pPr lvl="1"/>
+            <a:r>
+              <a:rPr sz="1500"/>
+              <a:t>θ = (f_iso, f_gas, f_ics, …, f_halo)。9 個あるので 9 次元の山</a:t>
             </a:r>
           </a:p>
           <a:p>
             <a:r>
               <a:rPr sz="1800"/>
-              <a:t>明るさ ∝ 密度の 2 乗（粒子が 2 つ要るため）</a:t>
+              <a:t>その場所の「高さ」 → 点数（事後分布）</a:t>
+            </a:r>
+          </a:p>
+          <a:p>
+            <a:r>
+              <a:rPr sz="1800"/>
+              <a:t>「高度計」 → 尤度の計算（手法② の ln L）</a:t>
+            </a:r>
+          </a:p>
+          <a:p>
+            <a:r>
+              <a:rPr sz="1800"/>
+              <a:t>「立ち入り禁止の場所」 → 事前分布</a:t>
             </a:r>
           </a:p>
           <a:p>
             <a:pPr lvl="1"/>
             <a:r>
               <a:rPr sz="1500"/>
-              <a:t>それを視線方向に足し合わせたもの = J ファクター</a:t>
+              <a:t>例：ガスや ICS の倍率は負にならない</a:t>
             </a:r>
           </a:p>
           <a:p>
             <a:r>
               <a:rPr sz="1800"/>
-              <a:t>密度の形：NFW（Via Lactea II のシミュレーション）</a:t>
-            </a:r>
-          </a:p>
-          <a:p>
-            <a:pPr lvl="1"/>
-            <a:r>
-              <a:rPr sz="1500"/>
-              <a:t>rs = 21 kpc、太陽の位置で 0.42 GeV/cm³</a:t>
+              <a:t>「歩く人」 → 歩行者（walker）。今回は 32 人</a:t>
             </a:r>
           </a:p>
           <a:p>
             <a:r>
               <a:rPr sz="1800"/>
-              <a:t>形：銀河中心に向かって明るく、なめらかに広がる</a:t>
+              <a:t>「足あとの記録」 → チェーン（サンプル）</a:t>
             </a:r>
           </a:p>
           <a:p>
             <a:r>
               <a:rPr sz="1800"/>
-              <a:t>倍率：符号自由（負も許す）、最初は 0</a:t>
-            </a:r>
-          </a:p>
-          <a:p>
-            <a:pPr lvl="1"/>
-            <a:r>
-              <a:rPr sz="1500"/>
-              <a:t>あるか分からないものを探すので、偏りを作らないため</a:t>
-            </a:r>
-          </a:p>
-        </p:txBody>
-      </p:sp>
-      <p:pic>
-        <p:nvPicPr>
-          <p:cNvPr id="4" name="Picture 3" descr="template_halo.png"/>
-          <p:cNvPicPr>
-            <a:picLocks noChangeAspect="1"/>
-          </p:cNvPicPr>
-          <p:nvPr/>
-        </p:nvPicPr>
-        <p:blipFill>
-          <a:blip r:embed="rId3"/>
-          <a:stretch>
-            <a:fillRect/>
-          </a:stretch>
-        </p:blipFill>
-        <p:spPr>
-          <a:xfrm>
-            <a:off x="7223760" y="1188720"/>
-            <a:ext cx="4314613" cy="4480560"/>
-          </a:xfrm>
-          <a:prstGeom prst="rect">
-            <a:avLst/>
-          </a:prstGeom>
-        </p:spPr>
-      </p:pic>
-      <p:sp>
-        <p:nvSpPr>
-          <p:cNvPr id="8" name="TextBox 7">
-            <a:extLst>
-              <a:ext uri="{FF2B5EF4-FFF2-40B4-BE49-F238E27FC236}">
-                <a16:creationId xmlns:a16="http://schemas.microsoft.com/office/drawing/2014/main" id="{F85CD606-E3CE-F314-B3EE-F3D7028115CB}"/>
-              </a:ext>
-            </a:extLst>
-          </p:cNvPr>
-          <p:cNvSpPr txBox="1"/>
-          <p:nvPr/>
-        </p:nvSpPr>
-        <p:spPr>
-          <a:xfrm>
-            <a:off x="5837182" y="5663239"/>
-            <a:ext cx="6093372" cy="923330"/>
-          </a:xfrm>
-          <a:prstGeom prst="rect">
-            <a:avLst/>
-          </a:prstGeom>
-          <a:noFill/>
-        </p:spPr>
-        <p:txBody>
-          <a:bodyPr wrap="square">
-            <a:spAutoFit/>
-          </a:bodyPr>
-          <a:lstStyle/>
-          <a:p>
-            <a:r>
-              <a:rPr lang="en-US" sz="1400" b="1"/>
-              <a:t>Reference:</a:t>
-            </a:r>
-            <a:r>
-              <a:rPr lang="en-US" sz="1400"/>
-              <a:t> T. Totani (2025), arXiv:2507.07209 §2.3</a:t>
-            </a:r>
-            <a:endParaRPr lang="en-US"/>
+              <a:t>「一番高い足あと」 → 最良値</a:t>
+            </a:r>
+          </a:p>
+          <a:p>
+            <a:r>
+              <a:rPr sz="1800"/>
+              <a:t>「足あとの広がり」 → 誤差</a:t>
+            </a:r>
           </a:p>
         </p:txBody>
       </p:sp>
@@ -8527,7 +8175,7 @@
           <a:p>
             <a:r>
               <a:rPr sz="3000"/>
-              <a:t>ここからやること：係数 9 個を決めるだけ</a:t>
+              <a:t>① 高さ＝点数の決め方（ベイズの定理）</a:t>
             </a:r>
           </a:p>
         </p:txBody>
@@ -8545,116 +8193,115 @@
         <p:spPr>
           <a:xfrm>
             <a:off x="548640" y="1371600"/>
-            <a:ext cx="10789920" cy="4297680"/>
+            <a:ext cx="5669280" cy="4297680"/>
           </a:xfrm>
         </p:spPr>
         <p:txBody>
-          <a:bodyPr>
-            <a:normAutofit fontScale="92500" lnSpcReduction="10000"/>
+          <a:bodyPr/>
+          <a:lstStyle/>
+          <a:p>
+            <a:r>
+              <a:rPr sz="1800"/>
+              <a:t>P(θ | D) = L(D | θ) × π(θ) ÷ P(D)</a:t>
+            </a:r>
+          </a:p>
+          <a:p>
+            <a:r>
+              <a:rPr sz="1800"/>
+              <a:t>P(θ | D)：場所 θ の「高さ」（＝点数）</a:t>
+            </a:r>
+          </a:p>
+          <a:p>
+            <a:pPr lvl="1"/>
+            <a:r>
+              <a:rPr sz="1500"/>
+              <a:t>データ D を見た後で、θ がどれくらいもっともらしいか</a:t>
+            </a:r>
+          </a:p>
+          <a:p>
+            <a:r>
+              <a:rPr sz="1800"/>
+              <a:t>L(D | θ)：「高度計」の読み（尤度）</a:t>
+            </a:r>
+          </a:p>
+          <a:p>
+            <a:pPr lvl="1"/>
+            <a:r>
+              <a:rPr sz="1500"/>
+              <a:t>倍率が θ のとき、観測した光子の地図 D がどれくらい出やすいか</a:t>
+            </a:r>
+          </a:p>
+          <a:p>
+            <a:r>
+              <a:rPr sz="1800"/>
+              <a:t>π(θ)：入ってよい場所か（事前分布）</a:t>
+            </a:r>
+          </a:p>
+          <a:p>
+            <a:pPr lvl="1"/>
+            <a:r>
+              <a:rPr sz="1500"/>
+              <a:t>入れる場所は全部同じ値、立ち入り禁止なら 0</a:t>
+            </a:r>
+          </a:p>
+          <a:p>
+            <a:r>
+              <a:rPr sz="1800"/>
+              <a:t>P(D)：海抜の基準。どの場所でも同じ数</a:t>
+            </a:r>
+          </a:p>
+          <a:p>
+            <a:pPr lvl="1"/>
+            <a:r>
+              <a:rPr sz="1500"/>
+              <a:t>「どちらが高いか」を比べるだけなら消える → 計算しなくてよい</a:t>
+            </a:r>
+          </a:p>
+          <a:p>
+            <a:r>
+              <a:rPr sz="1800"/>
+              <a:t>計算では対数で：ln(高さ) = ln L + ln π</a:t>
+            </a:r>
+          </a:p>
+        </p:txBody>
+      </p:sp>
+      <p:sp>
+        <p:nvSpPr>
+          <p:cNvPr id="8" name="TextBox 7">
+            <a:extLst>
+              <a:ext uri="{FF2B5EF4-FFF2-40B4-BE49-F238E27FC236}">
+                <a16:creationId xmlns:a16="http://schemas.microsoft.com/office/drawing/2014/main" id="{F85CD606-E3CE-F314-B3EE-F3D7028115CB}"/>
+              </a:ext>
+            </a:extLst>
+          </p:cNvPr>
+          <p:cNvSpPr txBox="1"/>
+          <p:nvPr/>
+        </p:nvSpPr>
+        <p:spPr>
+          <a:xfrm>
+            <a:off x="5837182" y="5663239"/>
+            <a:ext cx="6093372" cy="923330"/>
+          </a:xfrm>
+          <a:prstGeom prst="rect">
+            <a:avLst/>
+          </a:prstGeom>
+          <a:noFill/>
+        </p:spPr>
+        <p:txBody>
+          <a:bodyPr wrap="square">
+            <a:spAutoFit/>
           </a:bodyPr>
           <a:lstStyle/>
           <a:p>
             <a:r>
-              <a:rPr sz="2600"/>
-              <a:t>予測 ＝ f₁ × 型紙₁ ＋ f₂ × 型紙₂ ＋ … ＋ f₉ × 型紙₉</a:t>
-            </a:r>
-          </a:p>
-          <a:p>
-            <a:pPr lvl="1"/>
-            <a:r>
-              <a:rPr sz="2200"/>
-              <a:t>型紙は固定。動かすのは係数（倍率）9 個だけ</a:t>
-            </a:r>
-          </a:p>
-          <a:p>
-            <a:r>
-              <a:rPr sz="2600"/>
-              <a:t>尤度：その係数 9 個が「どれだけ良いか」の点数</a:t>
-            </a:r>
-            <a:endParaRPr lang="en-US" sz="2600"/>
-          </a:p>
-          <a:p>
-            <a:r>
-              <a:rPr lang="en-US" altLang="ja-JP" sz="2400"/>
-              <a:t>ln L = Σ_i [ C_obs,i ln C_exp,i − C_exp,i ]</a:t>
-            </a:r>
-          </a:p>
-          <a:p>
-            <a:pPr lvl="1"/>
-            <a:r>
-              <a:rPr lang="en-US" altLang="ja-JP" sz="2000"/>
-              <a:t>C_obs</a:t>
-            </a:r>
-            <a:r>
-              <a:rPr lang="ja-JP" altLang="en-US" sz="2000"/>
-              <a:t>：観測した光子数、</a:t>
-            </a:r>
-            <a:r>
-              <a:rPr lang="en-US" altLang="ja-JP" sz="2000"/>
-              <a:t>C_exp</a:t>
-            </a:r>
-            <a:r>
-              <a:rPr lang="ja-JP" altLang="en-US" sz="2000"/>
-              <a:t>：予測した光子数</a:t>
-            </a:r>
-          </a:p>
-          <a:p>
-            <a:pPr lvl="1"/>
-            <a:r>
-              <a:rPr lang="en-US" altLang="ja-JP" sz="2000"/>
-              <a:t>i</a:t>
-            </a:r>
-            <a:r>
-              <a:rPr lang="ja-JP" altLang="en-US" sz="2000"/>
-              <a:t>：</a:t>
-            </a:r>
-            <a:r>
-              <a:rPr lang="en-US" altLang="ja-JP" sz="2000"/>
-              <a:t>10° × 10° </a:t>
-            </a:r>
-            <a:r>
-              <a:rPr lang="ja-JP" altLang="en-US" sz="2000"/>
-              <a:t>のセル（空をマス目に分ける）</a:t>
-            </a:r>
-          </a:p>
-          <a:p>
-            <a:r>
-              <a:rPr lang="en-US" altLang="ja-JP" sz="2400"/>
-              <a:t>ln L </a:t>
-            </a:r>
-            <a:r>
-              <a:rPr lang="ja-JP" altLang="en-US" sz="2400"/>
-              <a:t>が最大になる倍率 </a:t>
-            </a:r>
-            <a:r>
-              <a:rPr lang="en-US" altLang="ja-JP" sz="2400"/>
-              <a:t>f </a:t>
-            </a:r>
-            <a:r>
-              <a:rPr lang="ja-JP" altLang="en-US" sz="2400"/>
-              <a:t>を探す（最尤推定）</a:t>
-            </a:r>
-          </a:p>
-          <a:p>
-            <a:endParaRPr sz="2600"/>
-          </a:p>
-          <a:p>
-            <a:r>
-              <a:rPr sz="2600"/>
-              <a:t>MCMC：良い係数 9 個を探す方法</a:t>
-            </a:r>
-          </a:p>
-          <a:p>
-            <a:r>
-              <a:rPr sz="2600"/>
-              <a:t>最良値：見つかった一番良い係数 9 個</a:t>
-            </a:r>
-          </a:p>
-          <a:p>
-            <a:r>
-              <a:rPr sz="2600"/>
-              <a:t>誤差：その係数が「どこまでずれても十分良いか」</a:t>
-            </a:r>
+              <a:rPr lang="en-US" sz="1400" b="1"/>
+              <a:t>Reference:</a:t>
+            </a:r>
+            <a:r>
+              <a:rPr lang="en-US" sz="1400"/>
+              <a:t> D. Foreman-Mackey et al. (2013), PASP 125, 306</a:t>
+            </a:r>
+            <a:endParaRPr lang="en-US"/>
           </a:p>
         </p:txBody>
       </p:sp>
@@ -8699,8 +8346,8 @@
           <a:lstStyle/>
           <a:p>
             <a:r>
-              <a:rPr sz="3400"/>
-              <a:t>尤度と MCMC の役割分担</a:t>
+              <a:rPr sz="3000"/>
+              <a:t>② 一歩の進み方（メトロポリス法）</a:t>
             </a:r>
           </a:p>
         </p:txBody>
@@ -8717,8 +8364,8 @@
         </p:nvSpPr>
         <p:spPr>
           <a:xfrm>
-            <a:off x="841248" y="1463040"/>
-            <a:ext cx="10515600" cy="4114800"/>
+            <a:off x="548640" y="1371600"/>
+            <a:ext cx="5669280" cy="4297680"/>
           </a:xfrm>
         </p:spPr>
         <p:txBody>
@@ -8726,55 +8373,65 @@
           <a:lstStyle/>
           <a:p>
             <a:r>
-              <a:rPr sz="2400"/>
-              <a:t>尤度 ＝ 点数をつける係（たとえ：高度計）</a:t>
+              <a:rPr sz="1800"/>
+              <a:t>1. 今いる場所 θ から、少しずれた場所 θ′ に足を出す</a:t>
             </a:r>
           </a:p>
           <a:p>
             <a:pPr lvl="1"/>
             <a:r>
-              <a:rPr sz="2000"/>
-              <a:t>倍率の組（f_gas, f_ics, …, f_halo）を入れると、予測と観測の合い具合 ln L を返す</a:t>
-            </a:r>
-          </a:p>
-          <a:p>
-            <a:r>
-              <a:rPr sz="2400"/>
-              <a:t>MCMC ＝ 倍率を探す係（たとえ：霧の山を歩く人）</a:t>
+              <a:rPr sz="1500"/>
+              <a:t>どれだけずらすかは乱数で決める</a:t>
+            </a:r>
+          </a:p>
+          <a:p>
+            <a:r>
+              <a:rPr sz="1800"/>
+              <a:t>2. 高度計で両方を読み、比 r = 高さ(θ′) ÷ 高さ(θ)</a:t>
+            </a:r>
+          </a:p>
+          <a:p>
+            <a:r>
+              <a:rPr sz="1800"/>
+              <a:t>3. r ≥ 1（上り）なら、必ず θ′ に移る</a:t>
+            </a:r>
+          </a:p>
+          <a:p>
+            <a:r>
+              <a:rPr sz="1800"/>
+              <a:t>4. r &lt; 1（下り）なら、確率 r で移る</a:t>
             </a:r>
           </a:p>
           <a:p>
             <a:pPr lvl="1"/>
             <a:r>
-              <a:rPr sz="2000"/>
-              <a:t>倍率の組を少しずつ変えながら歩き、そのたびに尤度で点数をつける</a:t>
+              <a:rPr sz="1500"/>
+              <a:t>0〜1 の乱数を引き、r より小さければ移る</a:t>
+            </a:r>
+          </a:p>
+          <a:p>
+            <a:r>
+              <a:rPr sz="1800"/>
+              <a:t>5. 移っても移らなくても、今いる場所を足あとに記録</a:t>
+            </a:r>
+          </a:p>
+          <a:p>
+            <a:r>
+              <a:rPr sz="1800"/>
+              <a:t>6. 1〜5 を何千回もくり返す</a:t>
+            </a:r>
+          </a:p>
+          <a:p>
+            <a:r>
+              <a:rPr sz="1800"/>
+              <a:t>なぜ下りにも進む？</a:t>
             </a:r>
           </a:p>
           <a:p>
             <a:pPr lvl="1"/>
             <a:r>
-              <a:rPr sz="2000"/>
-              <a:t>点数が上がる方へは必ず進み、下がる方へもたまに進む</a:t>
-            </a:r>
-          </a:p>
-          <a:p>
-            <a:r>
-              <a:rPr sz="2400"/>
-              <a:t>歩き終わったら</a:t>
-            </a:r>
-          </a:p>
-          <a:p>
-            <a:pPr lvl="1"/>
-            <a:r>
-              <a:rPr sz="2000"/>
-              <a:t>歩いた中で点数が一番高かった組 → 最良の倍率（Totani と同じ）</a:t>
-            </a:r>
-          </a:p>
-          <a:p>
-            <a:pPr lvl="1"/>
-            <a:r>
-              <a:rPr sz="2000"/>
-              <a:t>歩いた範囲の広さ → 倍率の誤差</a:t>
+              <a:rPr sz="1500"/>
+              <a:t>上りだけだと頂上で止まり、山の広がり（誤差）が分からないから</a:t>
             </a:r>
           </a:p>
         </p:txBody>
@@ -8813,7 +8470,7 @@
             </a:r>
             <a:r>
               <a:rPr lang="en-US" sz="1400"/>
-              <a:t> T. Totani (2025), arXiv:2507.07209 §2.2</a:t>
+              <a:t> N. Metropolis et al. (1953), J. Chem. Phys. 21, 1087</a:t>
             </a:r>
             <a:endParaRPr lang="en-US"/>
           </a:p>
@@ -8860,86 +8517,46 @@
           <a:lstStyle/>
           <a:p>
             <a:r>
-              <a:rPr sz="3400"/>
-              <a:t>手法③：有意度 σ の出し方</a:t>
-            </a:r>
-          </a:p>
-        </p:txBody>
-      </p:sp>
-      <p:sp>
-        <p:nvSpPr>
-          <p:cNvPr id="3" name="Content Placeholder 2"/>
-          <p:cNvSpPr>
-            <a:spLocks noGrp="1"/>
-          </p:cNvSpPr>
-          <p:nvPr>
-            <p:ph idx="1"/>
-          </p:nvPr>
-        </p:nvSpPr>
+              <a:rPr sz="3000"/>
+              <a:t>③ 足あとはこうなる（説明用の例）</a:t>
+            </a:r>
+          </a:p>
+        </p:txBody>
+      </p:sp>
+      <p:pic>
+        <p:nvPicPr>
+          <p:cNvPr id="3" name="Picture 2" descr="image.png"/>
+          <p:cNvPicPr>
+            <a:picLocks noChangeAspect="1"/>
+          </p:cNvPicPr>
+          <p:nvPr/>
+        </p:nvPicPr>
+        <p:blipFill>
+          <a:blip r:embed="rId3"/>
+          <a:stretch>
+            <a:fillRect/>
+          </a:stretch>
+        </p:blipFill>
         <p:spPr>
           <a:xfrm>
-            <a:off x="841248" y="1463040"/>
-            <a:ext cx="10515600" cy="4114800"/>
+            <a:off x="731520" y="1280160"/>
+            <a:ext cx="10698480" cy="4279392"/>
           </a:xfrm>
+          <a:prstGeom prst="rect">
+            <a:avLst/>
+          </a:prstGeom>
         </p:spPr>
-        <p:txBody>
-          <a:bodyPr/>
-          <a:lstStyle/>
-          <a:p>
-            <a:r>
-              <a:rPr sz="2400"/>
-              <a:t>ハロー「あり」と「なし」の 2 通りで当てはめる</a:t>
-            </a:r>
-          </a:p>
-          <a:p>
-            <a:r>
-              <a:rPr sz="2400"/>
-              <a:t>差 Δln L = ln L(あり) − ln L(なし)</a:t>
-            </a:r>
-          </a:p>
-          <a:p>
-            <a:r>
-              <a:rPr sz="2400"/>
-              <a:t>有意度 σ = √( 2 Δln L )</a:t>
-            </a:r>
-          </a:p>
-          <a:p>
-            <a:r>
-              <a:rPr sz="2400"/>
-              <a:t>根拠：Wilks の定理（ガンマ線天文学の標準の換算。Totani の 13–19σ も同じ）</a:t>
-            </a:r>
-          </a:p>
-          <a:p>
-            <a:pPr lvl="1"/>
-            <a:r>
-              <a:rPr sz="2000"/>
-              <a:t>データが十分多いと、2Δln L は自由度 1 の χ² 分布に従う</a:t>
-            </a:r>
-          </a:p>
-          <a:p>
-            <a:r>
-              <a:rPr sz="2400"/>
-              <a:t>→ この定理が本当に成り立つかが、後で問題になる</a:t>
-            </a:r>
-          </a:p>
-        </p:txBody>
-      </p:sp>
-      <p:sp>
-        <p:nvSpPr>
-          <p:cNvPr id="8" name="TextBox 7">
-            <a:extLst>
-              <a:ext uri="{FF2B5EF4-FFF2-40B4-BE49-F238E27FC236}">
-                <a16:creationId xmlns:a16="http://schemas.microsoft.com/office/drawing/2014/main" id="{F85CD606-E3CE-F314-B3EE-F3D7028115CB}"/>
-              </a:ext>
-            </a:extLst>
-          </p:cNvPr>
+      </p:pic>
+      <p:sp>
+        <p:nvSpPr>
+          <p:cNvPr id="4" name="TextBox 3"/>
           <p:cNvSpPr txBox="1"/>
           <p:nvPr/>
         </p:nvSpPr>
         <p:spPr>
           <a:xfrm>
-            <a:off x="5837182" y="5663239"/>
-            <a:ext cx="6093372" cy="923330"/>
+            <a:off x="548640" y="5669280"/>
+            <a:ext cx="11155680" cy="822960"/>
           </a:xfrm>
           <a:prstGeom prst="rect">
             <a:avLst/>
@@ -8953,14 +8570,9 @@
           <a:lstStyle/>
           <a:p>
             <a:r>
-              <a:rPr lang="en-US" sz="1400" b="1"/>
-              <a:t>Reference:</a:t>
-            </a:r>
-            <a:r>
-              <a:rPr lang="en-US" sz="1400"/>
-              <a:t> S. S. Wilks (1938), Ann. Math. Stat. 9, 60</a:t>
-            </a:r>
-            <a:endParaRPr lang="en-US"/>
+              <a:rPr sz="1800"/>
+              <a:t>左：足あと（縦＝倍率、横＝歩数）。最初の 200 歩は山にたどり着く途中なので捨てる。右：足あとのヒストグラム ＝ 山の形</a:t>
+            </a:r>
           </a:p>
         </p:txBody>
       </p:sp>
@@ -9005,8 +8617,8 @@
           <a:lstStyle/>
           <a:p>
             <a:r>
-              <a:rPr sz="3400"/>
-              <a:t>手法④：MCMC（最良値と誤差）</a:t>
+              <a:rPr sz="3000"/>
+              <a:t>MCMC の歩き方はいろいろある</a:t>
             </a:r>
           </a:p>
         </p:txBody>
@@ -9023,8 +8635,8 @@
         </p:nvSpPr>
         <p:spPr>
           <a:xfrm>
-            <a:off x="841248" y="1463040"/>
-            <a:ext cx="10515600" cy="4114800"/>
+            <a:off x="548640" y="1371600"/>
+            <a:ext cx="10789920" cy="4297680"/>
           </a:xfrm>
         </p:spPr>
         <p:txBody>
@@ -9032,40 +8644,59 @@
           <a:lstStyle/>
           <a:p>
             <a:r>
-              <a:rPr sz="2400"/>
-              <a:t>MCMC で、最良の倍率 f と、その誤差の両方を求める（Totani と同じ）</a:t>
-            </a:r>
-          </a:p>
-          <a:p>
-            <a:r>
-              <a:rPr sz="2400"/>
-              <a:t>MCMC：尤度に比例する確率で、パラメータの空間を歩き回る</a:t>
+              <a:rPr sz="2000"/>
+              <a:t>メトロポリス法（1953）：一番基本。少しずらして、比 r で移るか決める（②）</a:t>
+            </a:r>
+          </a:p>
+          <a:p>
+            <a:r>
+              <a:rPr sz="2000"/>
+              <a:t>ギブス法：倍率を 1 個ずつ順番に動かす</a:t>
+            </a:r>
+          </a:p>
+          <a:p>
+            <a:r>
+              <a:rPr sz="2000"/>
+              <a:t>ハミルトニアン MC：坂の傾きを使って、ボールを転がすように大きく動く</a:t>
+            </a:r>
+          </a:p>
+          <a:p>
+            <a:r>
+              <a:rPr sz="2000"/>
+              <a:t>アンサンブル法（2010）：何人も同時に歩き、仲間の位置で一歩を決める（④）</a:t>
             </a:r>
           </a:p>
           <a:p>
             <a:pPr lvl="1"/>
             <a:r>
+              <a:rPr sz="1600"/>
+              <a:t>Python の道具 emcee がこれ。本研究はこれを使った</a:t>
+            </a:r>
+          </a:p>
+          <a:p>
+            <a:r>
               <a:rPr sz="2000"/>
-              <a:t>歩いた中で尤度が最大の点 = 最良値、歩いた跡の分布 → 誤差棒</a:t>
-            </a:r>
-          </a:p>
-          <a:p>
-            <a:r>
-              <a:rPr sz="2400"/>
-              <a:t>emcee を使用：32 本の歩行者 × 6000 歩</a:t>
+              <a:t>似ているが別物：焼きなまし法</a:t>
             </a:r>
           </a:p>
           <a:p>
             <a:pPr lvl="1"/>
             <a:r>
+              <a:rPr sz="1600"/>
+              <a:t>下りに進む確率をだんだん小さくして、頂上だけを探す。誤差は出ない</a:t>
+            </a:r>
+          </a:p>
+          <a:p>
+            <a:r>
               <a:rPr sz="2000"/>
-              <a:t>出発点は Totani と同じ初期値（点源・GALPROP = 1、他 = 0 など）</a:t>
-            </a:r>
-          </a:p>
-          <a:p>
-            <a:r>
-              <a:rPr sz="2400"/>
-              <a:t>有意度 σ も、ハローあり・なしそれぞれの MCMC で見つけた最大 ln L の差から出す</a:t>
+              <a:t>Totani は「MCMC」とだけ書いていて、どの歩き方かは書いていない</a:t>
+            </a:r>
+          </a:p>
+          <a:p>
+            <a:pPr lvl="1"/>
+            <a:r>
+              <a:rPr sz="1600"/>
+              <a:t>本研究は、天文学で広く使われ、細長い山（ガスと ICS の縮退）に強い emcee を選んだ</a:t>
             </a:r>
           </a:p>
         </p:txBody>
@@ -9152,7 +8783,7 @@
           <a:p>
             <a:r>
               <a:rPr sz="3000"/>
-              <a:t>MCMC をたとえで見る：霧の山を歩く</a:t>
+              <a:t>④ 32 人で歩く（emcee）</a:t>
             </a:r>
           </a:p>
         </p:txBody>
@@ -9178,65 +8809,107 @@
           <a:lstStyle/>
           <a:p>
             <a:r>
-              <a:rPr sz="1800"/>
-              <a:t>山の上の「場所」 → 倍率の組 θ</a:t>
+              <a:rPr sz="1600"/>
+              <a:t>1 人だと、細長い山で迷いやすい</a:t>
             </a:r>
           </a:p>
           <a:p>
             <a:pPr lvl="1"/>
             <a:r>
-              <a:rPr sz="1500"/>
-              <a:t>θ = (f_iso, f_gas, f_ics, …, f_halo)。9 個あるので 9 次元の山</a:t>
-            </a:r>
-          </a:p>
-          <a:p>
-            <a:r>
-              <a:rPr sz="1800"/>
-              <a:t>その場所の「高さ」 → 点数（事後分布）</a:t>
-            </a:r>
-          </a:p>
-          <a:p>
-            <a:r>
-              <a:rPr sz="1800"/>
-              <a:t>「高度計」 → 尤度の計算（手法② の ln L）</a:t>
-            </a:r>
-          </a:p>
-          <a:p>
-            <a:r>
-              <a:rPr sz="1800"/>
-              <a:t>「立ち入り禁止の場所」 → 事前分布</a:t>
+              <a:rPr sz="1400"/>
+              <a:t>例：ガスと ICS の縮退。片方を上げて片方を下げても高さがほぼ同じ</a:t>
+            </a:r>
+          </a:p>
+          <a:p>
+            <a:r>
+              <a:rPr sz="1600"/>
+              <a:t>そこで 32 人が同時に歩き、仲間の位置を見て一歩を決める</a:t>
+            </a:r>
+          </a:p>
+          <a:p>
+            <a:r>
+              <a:rPr sz="1600"/>
+              <a:t>一歩の出し方（ストレッチ移動）</a:t>
             </a:r>
           </a:p>
           <a:p>
             <a:pPr lvl="1"/>
             <a:r>
-              <a:rPr sz="1500"/>
-              <a:t>例：ガスや ICS の倍率は負にならない</a:t>
-            </a:r>
-          </a:p>
-          <a:p>
-            <a:r>
-              <a:rPr sz="1800"/>
-              <a:t>「歩く人」 → 歩行者（walker）。今回は 32 人</a:t>
-            </a:r>
-          </a:p>
-          <a:p>
-            <a:r>
-              <a:rPr sz="1800"/>
-              <a:t>「足あとの記録」 → チェーン（サンプル）</a:t>
-            </a:r>
-          </a:p>
-          <a:p>
-            <a:r>
-              <a:rPr sz="1800"/>
-              <a:t>「一番高い足あと」 → 最良値</a:t>
-            </a:r>
-          </a:p>
-          <a:p>
-            <a:r>
-              <a:rPr sz="1800"/>
-              <a:t>「足あとの広がり」 → 誤差</a:t>
-            </a:r>
+              <a:rPr sz="1400"/>
+              <a:t>自分 X_k から、ランダムに選んだ仲間 X_j への線を引く</a:t>
+            </a:r>
+          </a:p>
+          <a:p>
+            <a:pPr lvl="1"/>
+            <a:r>
+              <a:rPr sz="1400"/>
+              <a:t>その線の上で、Z 倍（1/2〜2 の乱数）伸ばした点に足を出す</a:t>
+            </a:r>
+          </a:p>
+          <a:p>
+            <a:pPr lvl="1"/>
+            <a:r>
+              <a:rPr sz="1400"/>
+              <a:t>Y = X_j + Z (X_k − X_j)</a:t>
+            </a:r>
+          </a:p>
+          <a:p>
+            <a:r>
+              <a:rPr sz="1600"/>
+              <a:t>移るかどうかは ② と同じ考え（Z⁸ を掛けて補正）</a:t>
+            </a:r>
+          </a:p>
+          <a:p>
+            <a:r>
+              <a:rPr sz="1600"/>
+              <a:t>出発点：全員、Totani と同じ初期値の近く。6000 歩</a:t>
+            </a:r>
+          </a:p>
+          <a:p>
+            <a:r>
+              <a:rPr sz="1600"/>
+              <a:t>emcee はこの歩き方の Python の道具の名前。32 人・6000 歩は本研究の設定</a:t>
+            </a:r>
+          </a:p>
+        </p:txBody>
+      </p:sp>
+      <p:sp>
+        <p:nvSpPr>
+          <p:cNvPr id="8" name="TextBox 7">
+            <a:extLst>
+              <a:ext uri="{FF2B5EF4-FFF2-40B4-BE49-F238E27FC236}">
+                <a16:creationId xmlns:a16="http://schemas.microsoft.com/office/drawing/2014/main" id="{F85CD606-E3CE-F314-B3EE-F3D7028115CB}"/>
+              </a:ext>
+            </a:extLst>
+          </p:cNvPr>
+          <p:cNvSpPr txBox="1"/>
+          <p:nvPr/>
+        </p:nvSpPr>
+        <p:spPr>
+          <a:xfrm>
+            <a:off x="5837182" y="5663239"/>
+            <a:ext cx="6093372" cy="923330"/>
+          </a:xfrm>
+          <a:prstGeom prst="rect">
+            <a:avLst/>
+          </a:prstGeom>
+          <a:noFill/>
+        </p:spPr>
+        <p:txBody>
+          <a:bodyPr wrap="square">
+            <a:spAutoFit/>
+          </a:bodyPr>
+          <a:lstStyle/>
+          <a:p>
+            <a:r>
+              <a:rPr lang="en-US" sz="1400" b="1"/>
+              <a:t>Reference:</a:t>
+            </a:r>
+            <a:r>
+              <a:rPr lang="en-US" sz="1400"/>
+              <a:t> J. Goodman &amp; J. Weare (2010), Comm. App. Math. Comp. Sci. 5, 65</a:t>
+            </a:r>
+            <a:endParaRPr lang="en-US"/>
           </a:p>
         </p:txBody>
       </p:sp>
@@ -9282,7 +8955,7 @@
           <a:p>
             <a:r>
               <a:rPr sz="3000"/>
-              <a:t>① 高さ＝点数の決め方（ベイズの定理）</a:t>
+              <a:t>⑤ 歩き終わったら：最良値と誤差</a:t>
             </a:r>
           </a:p>
         </p:txBody>
@@ -9309,65 +8982,67 @@
           <a:p>
             <a:r>
               <a:rPr sz="1800"/>
-              <a:t>P(θ | D) = L(D | θ) × π(θ) ÷ P(D)</a:t>
+              <a:t>一番高い足あと → 最良の倍率（Totani と同じ）</a:t>
+            </a:r>
+          </a:p>
+          <a:p>
+            <a:pPr lvl="1"/>
+            <a:r>
+              <a:rPr sz="1500"/>
+              <a:t>20.8 GeV：ハローの倍率 1.48</a:t>
             </a:r>
           </a:p>
           <a:p>
             <a:r>
               <a:rPr sz="1800"/>
-              <a:t>P(θ | D)：場所 θ の「高さ」（＝点数）</a:t>
+              <a:t>足あとの広がり → 誤差</a:t>
             </a:r>
           </a:p>
           <a:p>
             <a:pPr lvl="1"/>
             <a:r>
               <a:rPr sz="1500"/>
-              <a:t>データ D を見た後で、θ がどれくらいもっともらしいか</a:t>
+              <a:t>最初の 2000 歩（ふもとから登っている途中）は捨て、残りの下から 16%〜84%</a:t>
+            </a:r>
+          </a:p>
+          <a:p>
+            <a:pPr lvl="1"/>
+            <a:r>
+              <a:rPr sz="1500"/>
+              <a:t>20.8 GeV：1.40〜1.56</a:t>
             </a:r>
           </a:p>
           <a:p>
             <a:r>
               <a:rPr sz="1800"/>
-              <a:t>L(D | θ)：「高度計」の読み（尤度）</a:t>
+              <a:t>有意度：ハローあり・なしの山を別々に歩く</a:t>
             </a:r>
           </a:p>
           <a:p>
             <a:pPr lvl="1"/>
             <a:r>
               <a:rPr sz="1500"/>
-              <a:t>倍率が θ のとき、観測した光子の地図 D がどれくらい出やすいか</a:t>
+              <a:t>それぞれの一番高い足あとの高さの差 Δln L → σ = √(2Δln L)</a:t>
+            </a:r>
+          </a:p>
+          <a:p>
+            <a:pPr lvl="1"/>
+            <a:r>
+              <a:rPr sz="1500"/>
+              <a:t>20.8 GeV：19.0σ</a:t>
             </a:r>
           </a:p>
           <a:p>
             <a:r>
               <a:rPr sz="1800"/>
-              <a:t>π(θ)：入ってよい場所か（事前分布）</a:t>
+              <a:t>注意：山の端まで歩き回るには、もっと長く歩くのが理想</a:t>
             </a:r>
           </a:p>
           <a:p>
             <a:pPr lvl="1"/>
             <a:r>
               <a:rPr sz="1500"/>
-              <a:t>入れる場所は全部同じ値、立ち入り禁止なら 0</a:t>
-            </a:r>
-          </a:p>
-          <a:p>
-            <a:r>
-              <a:rPr sz="1800"/>
-              <a:t>P(D)：海抜の基準。どの場所でも同じ数</a:t>
-            </a:r>
-          </a:p>
-          <a:p>
-            <a:pPr lvl="1"/>
-            <a:r>
-              <a:rPr sz="1500"/>
-              <a:t>「どちらが高いか」を比べるだけなら消える → 計算しなくてよい</a:t>
-            </a:r>
-          </a:p>
-          <a:p>
-            <a:r>
-              <a:rPr sz="1800"/>
-              <a:t>計算では対数で：ln(高さ) = ln L + ln π</a:t>
+              <a:t>誤差は目安。一番高い足あとは頂上に届いている</a:t>
             </a:r>
           </a:p>
         </p:txBody>
@@ -9406,7 +9081,7 @@
             </a:r>
             <a:r>
               <a:rPr lang="en-US" sz="1400"/>
-              <a:t> D. Foreman-Mackey et al. (2013), PASP 125, 306</a:t>
+              <a:t> T. Totani (2025), arXiv:2507.07209 §2.2</a:t>
             </a:r>
             <a:endParaRPr lang="en-US"/>
           </a:p>
@@ -9453,92 +9128,61 @@
           <a:lstStyle/>
           <a:p>
             <a:r>
-              <a:rPr sz="3000"/>
-              <a:t>② 一歩の進み方（メトロポリス法）</a:t>
-            </a:r>
-          </a:p>
-        </p:txBody>
-      </p:sp>
-      <p:sp>
-        <p:nvSpPr>
-          <p:cNvPr id="3" name="Content Placeholder 2"/>
-          <p:cNvSpPr>
-            <a:spLocks noGrp="1"/>
-          </p:cNvSpPr>
-          <p:nvPr>
-            <p:ph idx="1"/>
-          </p:nvPr>
-        </p:nvSpPr>
+              <a:rPr sz="3400"/>
+              <a:t>結果：Totani の超過を再現</a:t>
+            </a:r>
+          </a:p>
+        </p:txBody>
+      </p:sp>
+      <p:pic>
+        <p:nvPicPr>
+          <p:cNvPr id="10" name="Picture 9" descr="fig_significance_calib.png"/>
+          <p:cNvPicPr>
+            <a:picLocks noChangeAspect="1"/>
+          </p:cNvPicPr>
+          <p:nvPr/>
+        </p:nvPicPr>
+        <p:blipFill>
+          <a:blip r:embed="rId4"/>
+          <a:stretch>
+            <a:fillRect/>
+          </a:stretch>
+        </p:blipFill>
         <p:spPr>
           <a:xfrm>
-            <a:off x="548640" y="1371600"/>
-            <a:ext cx="5669280" cy="4297680"/>
+            <a:off x="2148840" y="1188720"/>
+            <a:ext cx="6105832" cy="4206240"/>
           </a:xfrm>
+          <a:prstGeom prst="rect">
+            <a:avLst/>
+          </a:prstGeom>
         </p:spPr>
-        <p:txBody>
-          <a:bodyPr/>
-          <a:lstStyle/>
-          <a:p>
-            <a:r>
-              <a:rPr sz="1800"/>
-              <a:t>1. 今いる場所 θ から、少しずれた場所 θ′ に足を出す</a:t>
-            </a:r>
-          </a:p>
-          <a:p>
-            <a:pPr lvl="1"/>
-            <a:r>
-              <a:rPr sz="1500"/>
-              <a:t>どれだけずらすかは乱数で決める</a:t>
-            </a:r>
-          </a:p>
-          <a:p>
-            <a:r>
-              <a:rPr sz="1800"/>
-              <a:t>2. 高度計で両方を読み、比 r = 高さ(θ′) ÷ 高さ(θ)</a:t>
-            </a:r>
-          </a:p>
-          <a:p>
-            <a:r>
-              <a:rPr sz="1800"/>
-              <a:t>3. r ≥ 1（上り）なら、必ず θ′ に移る</a:t>
-            </a:r>
-          </a:p>
-          <a:p>
-            <a:r>
-              <a:rPr sz="1800"/>
-              <a:t>4. r &lt; 1（下り）なら、確率 r で移る</a:t>
-            </a:r>
-          </a:p>
-          <a:p>
-            <a:pPr lvl="1"/>
-            <a:r>
-              <a:rPr sz="1500"/>
-              <a:t>0〜1 の乱数を引き、r より小さければ移る</a:t>
-            </a:r>
-          </a:p>
-          <a:p>
-            <a:r>
-              <a:rPr sz="1800"/>
-              <a:t>5. 移っても移らなくても、今いる場所を足あとに記録</a:t>
-            </a:r>
-          </a:p>
-          <a:p>
-            <a:r>
-              <a:rPr sz="1800"/>
-              <a:t>6. 1〜5 を何千回もくり返す</a:t>
-            </a:r>
-          </a:p>
-          <a:p>
-            <a:r>
-              <a:rPr sz="1800"/>
-              <a:t>なぜ下りにも進む？</a:t>
-            </a:r>
-          </a:p>
-          <a:p>
-            <a:pPr lvl="1"/>
-            <a:r>
-              <a:rPr sz="1500"/>
-              <a:t>上りだけだと頂上で止まり、山の広がり（誤差）が分からないから</a:t>
+      </p:pic>
+      <p:sp>
+        <p:nvSpPr>
+          <p:cNvPr id="4" name="TextBox 3"/>
+          <p:cNvSpPr txBox="1"/>
+          <p:nvPr/>
+        </p:nvSpPr>
+        <p:spPr>
+          <a:xfrm>
+            <a:off x="457200" y="5486400"/>
+            <a:ext cx="11247120" cy="457200"/>
+          </a:xfrm>
+          <a:prstGeom prst="rect">
+            <a:avLst/>
+          </a:prstGeom>
+          <a:noFill/>
+        </p:spPr>
+        <p:txBody>
+          <a:bodyPr wrap="square">
+            <a:spAutoFit/>
+          </a:bodyPr>
+          <a:lstStyle/>
+          <a:p>
+            <a:r>
+              <a:rPr sz="2000"/>
+              <a:t>20.8 GeV で 19.0σ（Totani は 13–19σ）。山の位置も一致。何も無い空で較正すると約 15σ（緑）</a:t>
             </a:r>
           </a:p>
         </p:txBody>
@@ -9557,7 +9201,7 @@
         </p:nvSpPr>
         <p:spPr>
           <a:xfrm>
-            <a:off x="5837182" y="5663239"/>
+            <a:off x="5837182" y="6035040"/>
             <a:ext cx="6093372" cy="923330"/>
           </a:xfrm>
           <a:prstGeom prst="rect">
@@ -9577,7 +9221,7 @@
             </a:r>
             <a:r>
               <a:rPr lang="en-US" sz="1400"/>
-              <a:t> N. Metropolis et al. (1953), J. Chem. Phys. 21, 1087</a:t>
+              <a:t> T. Totani (2025), arXiv:2507.07209 Fig. 9</a:t>
             </a:r>
             <a:endParaRPr lang="en-US"/>
           </a:p>
@@ -9624,65 +9268,95 @@
           <a:lstStyle/>
           <a:p>
             <a:r>
-              <a:rPr sz="3000"/>
-              <a:t>③ 足あとはこうなる（説明用の例）</a:t>
+              <a:rPr sz="3400"/>
+              <a:t>問題：ハローと ICS が見分けにくい（縮退）</a:t>
+            </a:r>
+          </a:p>
+        </p:txBody>
+      </p:sp>
+      <p:sp>
+        <p:nvSpPr>
+          <p:cNvPr id="3" name="Content Placeholder 2"/>
+          <p:cNvSpPr>
+            <a:spLocks noGrp="1"/>
+          </p:cNvSpPr>
+          <p:nvPr>
+            <p:ph idx="1"/>
+          </p:nvPr>
+        </p:nvSpPr>
+        <p:spPr>
+          <a:xfrm>
+            <a:off x="841248" y="1463040"/>
+            <a:ext cx="5669280" cy="4937760"/>
+          </a:xfrm>
+        </p:spPr>
+        <p:txBody>
+          <a:bodyPr/>
+          <a:lstStyle/>
+          <a:p>
+            <a:r>
+              <a:rPr sz="2200"/>
+              <a:t>ICS とハローは、空の上での形がよく似ている</a:t>
+            </a:r>
+          </a:p>
+          <a:p>
+            <a:pPr lvl="1"/>
+            <a:r>
+              <a:rPr sz="1800"/>
+              <a:t>緯度 25° → 55° で暗くなる割合：ハロー 2.70 倍、ICS 2.60 倍（右の図）</a:t>
+            </a:r>
+          </a:p>
+          <a:p>
+            <a:r>
+              <a:rPr sz="2200"/>
+              <a:t>違いは「銀河中心の方向に集まっているか」だけ</a:t>
+            </a:r>
+          </a:p>
+          <a:p>
+            <a:r>
+              <a:rPr sz="2200"/>
+              <a:t>ハローを入れると、その分 ICS が暗くなる</a:t>
+            </a:r>
+          </a:p>
+          <a:p>
+            <a:pPr lvl="1"/>
+            <a:r>
+              <a:rPr sz="1800"/>
+              <a:t>ICS の倍率 1.39 → 0.48（20.8 GeV）</a:t>
+            </a:r>
+          </a:p>
+          <a:p>
+            <a:r>
+              <a:rPr sz="1800"/>
+              <a:t>たとえ：部屋の電球（ICS）と探している光（ハロー）が、写真ではほぼ同じ形 → 余った明るさがどちらのものか決めにくい</a:t>
             </a:r>
           </a:p>
         </p:txBody>
       </p:sp>
       <p:pic>
         <p:nvPicPr>
-          <p:cNvPr id="3" name="Picture 2" descr="image.png"/>
+          <p:cNvPr id="6" name="Picture 5" descr="fig_lat_profile.png"/>
           <p:cNvPicPr>
             <a:picLocks noChangeAspect="1"/>
           </p:cNvPicPr>
           <p:nvPr/>
         </p:nvPicPr>
         <p:blipFill>
-          <a:blip r:embed="rId3"/>
+          <a:blip r:embed="rId4"/>
           <a:stretch>
             <a:fillRect/>
           </a:stretch>
         </p:blipFill>
         <p:spPr>
           <a:xfrm>
-            <a:off x="731520" y="1280160"/>
-            <a:ext cx="10698480" cy="4279392"/>
+            <a:off x="6400800" y="1600200"/>
+            <a:ext cx="5394960" cy="4046220"/>
           </a:xfrm>
           <a:prstGeom prst="rect">
             <a:avLst/>
           </a:prstGeom>
         </p:spPr>
       </p:pic>
-      <p:sp>
-        <p:nvSpPr>
-          <p:cNvPr id="4" name="TextBox 3"/>
-          <p:cNvSpPr txBox="1"/>
-          <p:nvPr/>
-        </p:nvSpPr>
-        <p:spPr>
-          <a:xfrm>
-            <a:off x="548640" y="5669280"/>
-            <a:ext cx="11155680" cy="822960"/>
-          </a:xfrm>
-          <a:prstGeom prst="rect">
-            <a:avLst/>
-          </a:prstGeom>
-          <a:noFill/>
-        </p:spPr>
-        <p:txBody>
-          <a:bodyPr wrap="square">
-            <a:spAutoFit/>
-          </a:bodyPr>
-          <a:lstStyle/>
-          <a:p>
-            <a:r>
-              <a:rPr sz="1800"/>
-              <a:t>左：足あと（縦＝倍率、横＝歩数）。最初の 200 歩は山にたどり着く途中なので捨てる。右：足あとのヒストグラム ＝ 山の形</a:t>
-            </a:r>
-          </a:p>
-        </p:txBody>
-      </p:sp>
     </p:spTree>
   </p:cSld>
   <p:clrMapOvr>
@@ -9869,789 +9543,6 @@
 </file>
 
 <file path=ppt/slides/slide20.xml><?xml version="1.0" encoding="utf-8"?>
-<p:sld xmlns:a="http://schemas.openxmlformats.org/drawingml/2006/main" xmlns:r="http://schemas.openxmlformats.org/officeDocument/2006/relationships" xmlns:p="http://schemas.openxmlformats.org/presentationml/2006/main">
-  <p:cSld>
-    <p:spTree>
-      <p:nvGrpSpPr>
-        <p:cNvPr id="1" name=""/>
-        <p:cNvGrpSpPr/>
-        <p:nvPr/>
-      </p:nvGrpSpPr>
-      <p:grpSpPr>
-        <a:xfrm>
-          <a:off x="0" y="0"/>
-          <a:ext cx="0" cy="0"/>
-          <a:chOff x="0" y="0"/>
-          <a:chExt cx="0" cy="0"/>
-        </a:xfrm>
-      </p:grpSpPr>
-      <p:sp>
-        <p:nvSpPr>
-          <p:cNvPr id="2" name="Title 1"/>
-          <p:cNvSpPr>
-            <a:spLocks noGrp="1"/>
-          </p:cNvSpPr>
-          <p:nvPr>
-            <p:ph type="title"/>
-          </p:nvPr>
-        </p:nvSpPr>
-        <p:spPr/>
-        <p:txBody>
-          <a:bodyPr/>
-          <a:lstStyle/>
-          <a:p>
-            <a:r>
-              <a:rPr sz="3000"/>
-              <a:t>MCMC の歩き方はいろいろある</a:t>
-            </a:r>
-          </a:p>
-        </p:txBody>
-      </p:sp>
-      <p:sp>
-        <p:nvSpPr>
-          <p:cNvPr id="3" name="Content Placeholder 2"/>
-          <p:cNvSpPr>
-            <a:spLocks noGrp="1"/>
-          </p:cNvSpPr>
-          <p:nvPr>
-            <p:ph idx="1"/>
-          </p:nvPr>
-        </p:nvSpPr>
-        <p:spPr>
-          <a:xfrm>
-            <a:off x="548640" y="1371600"/>
-            <a:ext cx="10789920" cy="4297680"/>
-          </a:xfrm>
-        </p:spPr>
-        <p:txBody>
-          <a:bodyPr/>
-          <a:lstStyle/>
-          <a:p>
-            <a:r>
-              <a:rPr sz="2000"/>
-              <a:t>メトロポリス法（1953）：一番基本。少しずらして、比 r で移るか決める（②）</a:t>
-            </a:r>
-          </a:p>
-          <a:p>
-            <a:r>
-              <a:rPr sz="2000"/>
-              <a:t>ギブス法：倍率を 1 個ずつ順番に動かす</a:t>
-            </a:r>
-          </a:p>
-          <a:p>
-            <a:r>
-              <a:rPr sz="2000"/>
-              <a:t>ハミルトニアン MC：坂の傾きを使って、ボールを転がすように大きく動く</a:t>
-            </a:r>
-          </a:p>
-          <a:p>
-            <a:r>
-              <a:rPr sz="2000"/>
-              <a:t>アンサンブル法（2010）：何人も同時に歩き、仲間の位置で一歩を決める（④）</a:t>
-            </a:r>
-          </a:p>
-          <a:p>
-            <a:pPr lvl="1"/>
-            <a:r>
-              <a:rPr sz="1600"/>
-              <a:t>Python の道具 emcee がこれ。本研究はこれを使った</a:t>
-            </a:r>
-          </a:p>
-          <a:p>
-            <a:r>
-              <a:rPr sz="2000"/>
-              <a:t>似ているが別物：焼きなまし法</a:t>
-            </a:r>
-          </a:p>
-          <a:p>
-            <a:pPr lvl="1"/>
-            <a:r>
-              <a:rPr sz="1600"/>
-              <a:t>下りに進む確率をだんだん小さくして、頂上だけを探す。誤差は出ない</a:t>
-            </a:r>
-          </a:p>
-          <a:p>
-            <a:r>
-              <a:rPr sz="2000"/>
-              <a:t>Totani は「MCMC」とだけ書いていて、どの歩き方かは書いていない</a:t>
-            </a:r>
-          </a:p>
-          <a:p>
-            <a:pPr lvl="1"/>
-            <a:r>
-              <a:rPr sz="1600"/>
-              <a:t>本研究は、天文学で広く使われ、細長い山（ガスと ICS の縮退）に強い emcee を選んだ</a:t>
-            </a:r>
-          </a:p>
-        </p:txBody>
-      </p:sp>
-      <p:sp>
-        <p:nvSpPr>
-          <p:cNvPr id="8" name="TextBox 7">
-            <a:extLst>
-              <a:ext uri="{FF2B5EF4-FFF2-40B4-BE49-F238E27FC236}">
-                <a16:creationId xmlns:a16="http://schemas.microsoft.com/office/drawing/2014/main" id="{F85CD606-E3CE-F314-B3EE-F3D7028115CB}"/>
-              </a:ext>
-            </a:extLst>
-          </p:cNvPr>
-          <p:cNvSpPr txBox="1"/>
-          <p:nvPr/>
-        </p:nvSpPr>
-        <p:spPr>
-          <a:xfrm>
-            <a:off x="5837182" y="5663239"/>
-            <a:ext cx="6093372" cy="923330"/>
-          </a:xfrm>
-          <a:prstGeom prst="rect">
-            <a:avLst/>
-          </a:prstGeom>
-          <a:noFill/>
-        </p:spPr>
-        <p:txBody>
-          <a:bodyPr wrap="square">
-            <a:spAutoFit/>
-          </a:bodyPr>
-          <a:lstStyle/>
-          <a:p>
-            <a:r>
-              <a:rPr lang="en-US" sz="1400" b="1"/>
-              <a:t>Reference:</a:t>
-            </a:r>
-            <a:r>
-              <a:rPr lang="en-US" sz="1400"/>
-              <a:t> D. Foreman-Mackey et al. (2013), PASP 125, 306</a:t>
-            </a:r>
-            <a:endParaRPr lang="en-US"/>
-          </a:p>
-        </p:txBody>
-      </p:sp>
-    </p:spTree>
-  </p:cSld>
-  <p:clrMapOvr>
-    <a:masterClrMapping/>
-  </p:clrMapOvr>
-</p:sld>
-</file>
-
-<file path=ppt/slides/slide21.xml><?xml version="1.0" encoding="utf-8"?>
-<p:sld xmlns:a="http://schemas.openxmlformats.org/drawingml/2006/main" xmlns:r="http://schemas.openxmlformats.org/officeDocument/2006/relationships" xmlns:p="http://schemas.openxmlformats.org/presentationml/2006/main">
-  <p:cSld>
-    <p:spTree>
-      <p:nvGrpSpPr>
-        <p:cNvPr id="1" name=""/>
-        <p:cNvGrpSpPr/>
-        <p:nvPr/>
-      </p:nvGrpSpPr>
-      <p:grpSpPr>
-        <a:xfrm>
-          <a:off x="0" y="0"/>
-          <a:ext cx="0" cy="0"/>
-          <a:chOff x="0" y="0"/>
-          <a:chExt cx="0" cy="0"/>
-        </a:xfrm>
-      </p:grpSpPr>
-      <p:sp>
-        <p:nvSpPr>
-          <p:cNvPr id="2" name="Title 1"/>
-          <p:cNvSpPr>
-            <a:spLocks noGrp="1"/>
-          </p:cNvSpPr>
-          <p:nvPr>
-            <p:ph type="title"/>
-          </p:nvPr>
-        </p:nvSpPr>
-        <p:spPr/>
-        <p:txBody>
-          <a:bodyPr/>
-          <a:lstStyle/>
-          <a:p>
-            <a:r>
-              <a:rPr sz="3000"/>
-              <a:t>④ 32 人で歩く（emcee）</a:t>
-            </a:r>
-          </a:p>
-        </p:txBody>
-      </p:sp>
-      <p:sp>
-        <p:nvSpPr>
-          <p:cNvPr id="3" name="Content Placeholder 2"/>
-          <p:cNvSpPr>
-            <a:spLocks noGrp="1"/>
-          </p:cNvSpPr>
-          <p:nvPr>
-            <p:ph idx="1"/>
-          </p:nvPr>
-        </p:nvSpPr>
-        <p:spPr>
-          <a:xfrm>
-            <a:off x="548640" y="1371600"/>
-            <a:ext cx="5669280" cy="4297680"/>
-          </a:xfrm>
-        </p:spPr>
-        <p:txBody>
-          <a:bodyPr/>
-          <a:lstStyle/>
-          <a:p>
-            <a:r>
-              <a:rPr sz="1600"/>
-              <a:t>1 人だと、細長い山で迷いやすい</a:t>
-            </a:r>
-          </a:p>
-          <a:p>
-            <a:pPr lvl="1"/>
-            <a:r>
-              <a:rPr sz="1400"/>
-              <a:t>例：ガスと ICS の縮退。片方を上げて片方を下げても高さがほぼ同じ</a:t>
-            </a:r>
-          </a:p>
-          <a:p>
-            <a:r>
-              <a:rPr sz="1600"/>
-              <a:t>そこで 32 人が同時に歩き、仲間の位置を見て一歩を決める</a:t>
-            </a:r>
-          </a:p>
-          <a:p>
-            <a:r>
-              <a:rPr sz="1600"/>
-              <a:t>一歩の出し方（ストレッチ移動）</a:t>
-            </a:r>
-          </a:p>
-          <a:p>
-            <a:pPr lvl="1"/>
-            <a:r>
-              <a:rPr sz="1400"/>
-              <a:t>自分 X_k から、ランダムに選んだ仲間 X_j への線を引く</a:t>
-            </a:r>
-          </a:p>
-          <a:p>
-            <a:pPr lvl="1"/>
-            <a:r>
-              <a:rPr sz="1400"/>
-              <a:t>その線の上で、Z 倍（1/2〜2 の乱数）伸ばした点に足を出す</a:t>
-            </a:r>
-          </a:p>
-          <a:p>
-            <a:pPr lvl="1"/>
-            <a:r>
-              <a:rPr sz="1400"/>
-              <a:t>Y = X_j + Z (X_k − X_j)</a:t>
-            </a:r>
-          </a:p>
-          <a:p>
-            <a:r>
-              <a:rPr sz="1600"/>
-              <a:t>移るかどうかは ② と同じ考え（Z⁸ を掛けて補正）</a:t>
-            </a:r>
-          </a:p>
-          <a:p>
-            <a:r>
-              <a:rPr sz="1600"/>
-              <a:t>出発点：全員、Totani と同じ初期値の近く。6000 歩</a:t>
-            </a:r>
-          </a:p>
-          <a:p>
-            <a:r>
-              <a:rPr sz="1600"/>
-              <a:t>emcee はこの歩き方の Python の道具の名前。32 人・6000 歩は本研究の設定</a:t>
-            </a:r>
-          </a:p>
-        </p:txBody>
-      </p:sp>
-      <p:sp>
-        <p:nvSpPr>
-          <p:cNvPr id="8" name="TextBox 7">
-            <a:extLst>
-              <a:ext uri="{FF2B5EF4-FFF2-40B4-BE49-F238E27FC236}">
-                <a16:creationId xmlns:a16="http://schemas.microsoft.com/office/drawing/2014/main" id="{F85CD606-E3CE-F314-B3EE-F3D7028115CB}"/>
-              </a:ext>
-            </a:extLst>
-          </p:cNvPr>
-          <p:cNvSpPr txBox="1"/>
-          <p:nvPr/>
-        </p:nvSpPr>
-        <p:spPr>
-          <a:xfrm>
-            <a:off x="5837182" y="5663239"/>
-            <a:ext cx="6093372" cy="923330"/>
-          </a:xfrm>
-          <a:prstGeom prst="rect">
-            <a:avLst/>
-          </a:prstGeom>
-          <a:noFill/>
-        </p:spPr>
-        <p:txBody>
-          <a:bodyPr wrap="square">
-            <a:spAutoFit/>
-          </a:bodyPr>
-          <a:lstStyle/>
-          <a:p>
-            <a:r>
-              <a:rPr lang="en-US" sz="1400" b="1"/>
-              <a:t>Reference:</a:t>
-            </a:r>
-            <a:r>
-              <a:rPr lang="en-US" sz="1400"/>
-              <a:t> J. Goodman &amp; J. Weare (2010), Comm. App. Math. Comp. Sci. 5, 65</a:t>
-            </a:r>
-            <a:endParaRPr lang="en-US"/>
-          </a:p>
-        </p:txBody>
-      </p:sp>
-    </p:spTree>
-  </p:cSld>
-  <p:clrMapOvr>
-    <a:masterClrMapping/>
-  </p:clrMapOvr>
-</p:sld>
-</file>
-
-<file path=ppt/slides/slide22.xml><?xml version="1.0" encoding="utf-8"?>
-<p:sld xmlns:a="http://schemas.openxmlformats.org/drawingml/2006/main" xmlns:r="http://schemas.openxmlformats.org/officeDocument/2006/relationships" xmlns:p="http://schemas.openxmlformats.org/presentationml/2006/main">
-  <p:cSld>
-    <p:spTree>
-      <p:nvGrpSpPr>
-        <p:cNvPr id="1" name=""/>
-        <p:cNvGrpSpPr/>
-        <p:nvPr/>
-      </p:nvGrpSpPr>
-      <p:grpSpPr>
-        <a:xfrm>
-          <a:off x="0" y="0"/>
-          <a:ext cx="0" cy="0"/>
-          <a:chOff x="0" y="0"/>
-          <a:chExt cx="0" cy="0"/>
-        </a:xfrm>
-      </p:grpSpPr>
-      <p:sp>
-        <p:nvSpPr>
-          <p:cNvPr id="2" name="Title 1"/>
-          <p:cNvSpPr>
-            <a:spLocks noGrp="1"/>
-          </p:cNvSpPr>
-          <p:nvPr>
-            <p:ph type="title"/>
-          </p:nvPr>
-        </p:nvSpPr>
-        <p:spPr/>
-        <p:txBody>
-          <a:bodyPr/>
-          <a:lstStyle/>
-          <a:p>
-            <a:r>
-              <a:rPr sz="3000"/>
-              <a:t>⑤ 歩き終わったら：最良値と誤差</a:t>
-            </a:r>
-          </a:p>
-        </p:txBody>
-      </p:sp>
-      <p:sp>
-        <p:nvSpPr>
-          <p:cNvPr id="3" name="Content Placeholder 2"/>
-          <p:cNvSpPr>
-            <a:spLocks noGrp="1"/>
-          </p:cNvSpPr>
-          <p:nvPr>
-            <p:ph idx="1"/>
-          </p:nvPr>
-        </p:nvSpPr>
-        <p:spPr>
-          <a:xfrm>
-            <a:off x="548640" y="1371600"/>
-            <a:ext cx="5669280" cy="4297680"/>
-          </a:xfrm>
-        </p:spPr>
-        <p:txBody>
-          <a:bodyPr/>
-          <a:lstStyle/>
-          <a:p>
-            <a:r>
-              <a:rPr sz="1800"/>
-              <a:t>一番高い足あと → 最良の倍率（Totani と同じ）</a:t>
-            </a:r>
-          </a:p>
-          <a:p>
-            <a:pPr lvl="1"/>
-            <a:r>
-              <a:rPr sz="1500"/>
-              <a:t>20.8 GeV：ハローの倍率 1.51</a:t>
-            </a:r>
-          </a:p>
-          <a:p>
-            <a:r>
-              <a:rPr sz="1800"/>
-              <a:t>足あとの広がり → 誤差</a:t>
-            </a:r>
-          </a:p>
-          <a:p>
-            <a:pPr lvl="1"/>
-            <a:r>
-              <a:rPr sz="1500"/>
-              <a:t>最初の 2000 歩（ふもとから登っている途中）は捨て、残りの下から 16%〜84%</a:t>
-            </a:r>
-          </a:p>
-          <a:p>
-            <a:pPr lvl="1"/>
-            <a:r>
-              <a:rPr sz="1500"/>
-              <a:t>20.8 GeV：1.42〜1.58</a:t>
-            </a:r>
-          </a:p>
-          <a:p>
-            <a:r>
-              <a:rPr sz="1800"/>
-              <a:t>有意度：ハローあり・なしの山を別々に歩く</a:t>
-            </a:r>
-          </a:p>
-          <a:p>
-            <a:pPr lvl="1"/>
-            <a:r>
-              <a:rPr sz="1500"/>
-              <a:t>それぞれの一番高い足あとの高さの差 Δln L → σ = √(2Δln L)</a:t>
-            </a:r>
-          </a:p>
-          <a:p>
-            <a:pPr lvl="1"/>
-            <a:r>
-              <a:rPr sz="1500"/>
-              <a:t>20.8 GeV：19.5σ</a:t>
-            </a:r>
-          </a:p>
-          <a:p>
-            <a:r>
-              <a:rPr sz="1800"/>
-              <a:t>注意：山の端まで歩き回るには、もっと長く歩くのが理想</a:t>
-            </a:r>
-          </a:p>
-          <a:p>
-            <a:pPr lvl="1"/>
-            <a:r>
-              <a:rPr sz="1500"/>
-              <a:t>誤差は目安。一番高い足あとは頂上に届いている</a:t>
-            </a:r>
-          </a:p>
-        </p:txBody>
-      </p:sp>
-      <p:sp>
-        <p:nvSpPr>
-          <p:cNvPr id="8" name="TextBox 7">
-            <a:extLst>
-              <a:ext uri="{FF2B5EF4-FFF2-40B4-BE49-F238E27FC236}">
-                <a16:creationId xmlns:a16="http://schemas.microsoft.com/office/drawing/2014/main" id="{F85CD606-E3CE-F314-B3EE-F3D7028115CB}"/>
-              </a:ext>
-            </a:extLst>
-          </p:cNvPr>
-          <p:cNvSpPr txBox="1"/>
-          <p:nvPr/>
-        </p:nvSpPr>
-        <p:spPr>
-          <a:xfrm>
-            <a:off x="5837182" y="5663239"/>
-            <a:ext cx="6093372" cy="923330"/>
-          </a:xfrm>
-          <a:prstGeom prst="rect">
-            <a:avLst/>
-          </a:prstGeom>
-          <a:noFill/>
-        </p:spPr>
-        <p:txBody>
-          <a:bodyPr wrap="square">
-            <a:spAutoFit/>
-          </a:bodyPr>
-          <a:lstStyle/>
-          <a:p>
-            <a:r>
-              <a:rPr lang="en-US" sz="1400" b="1"/>
-              <a:t>Reference:</a:t>
-            </a:r>
-            <a:r>
-              <a:rPr lang="en-US" sz="1400"/>
-              <a:t> T. Totani (2025), arXiv:2507.07209 §2.2</a:t>
-            </a:r>
-            <a:endParaRPr lang="en-US"/>
-          </a:p>
-        </p:txBody>
-      </p:sp>
-    </p:spTree>
-  </p:cSld>
-  <p:clrMapOvr>
-    <a:masterClrMapping/>
-  </p:clrMapOvr>
-</p:sld>
-</file>
-
-<file path=ppt/slides/slide23.xml><?xml version="1.0" encoding="utf-8"?>
-<p:sld xmlns:a="http://schemas.openxmlformats.org/drawingml/2006/main" xmlns:r="http://schemas.openxmlformats.org/officeDocument/2006/relationships" xmlns:p="http://schemas.openxmlformats.org/presentationml/2006/main">
-  <p:cSld>
-    <p:spTree>
-      <p:nvGrpSpPr>
-        <p:cNvPr id="1" name=""/>
-        <p:cNvGrpSpPr/>
-        <p:nvPr/>
-      </p:nvGrpSpPr>
-      <p:grpSpPr>
-        <a:xfrm>
-          <a:off x="0" y="0"/>
-          <a:ext cx="0" cy="0"/>
-          <a:chOff x="0" y="0"/>
-          <a:chExt cx="0" cy="0"/>
-        </a:xfrm>
-      </p:grpSpPr>
-      <p:sp>
-        <p:nvSpPr>
-          <p:cNvPr id="2" name="Title 1"/>
-          <p:cNvSpPr>
-            <a:spLocks noGrp="1"/>
-          </p:cNvSpPr>
-          <p:nvPr>
-            <p:ph type="title"/>
-          </p:nvPr>
-        </p:nvSpPr>
-        <p:spPr/>
-        <p:txBody>
-          <a:bodyPr/>
-          <a:lstStyle/>
-          <a:p>
-            <a:r>
-              <a:rPr sz="3400"/>
-              <a:t>結果：Totani の超過を再現</a:t>
-            </a:r>
-          </a:p>
-        </p:txBody>
-      </p:sp>
-      <p:pic>
-        <p:nvPicPr>
-          <p:cNvPr id="9" name="Picture 8" descr="significance_spectrum.png"/>
-          <p:cNvPicPr>
-            <a:picLocks noChangeAspect="1"/>
-          </p:cNvPicPr>
-          <p:nvPr/>
-        </p:nvPicPr>
-        <p:blipFill>
-          <a:blip r:embed="rId3"/>
-          <a:srcRect/>
-          <a:stretch>
-            <a:fillRect/>
-          </a:stretch>
-        </p:blipFill>
-        <p:spPr>
-          <a:xfrm>
-            <a:off x="2377440" y="1234440"/>
-            <a:ext cx="5334000" cy="4160520"/>
-          </a:xfrm>
-          <a:prstGeom prst="rect">
-            <a:avLst/>
-          </a:prstGeom>
-        </p:spPr>
-      </p:pic>
-      <p:sp>
-        <p:nvSpPr>
-          <p:cNvPr id="4" name="TextBox 3"/>
-          <p:cNvSpPr txBox="1"/>
-          <p:nvPr/>
-        </p:nvSpPr>
-        <p:spPr>
-          <a:xfrm>
-            <a:off x="457200" y="5486400"/>
-            <a:ext cx="11247120" cy="457200"/>
-          </a:xfrm>
-          <a:prstGeom prst="rect">
-            <a:avLst/>
-          </a:prstGeom>
-          <a:noFill/>
-        </p:spPr>
-        <p:txBody>
-          <a:bodyPr wrap="square">
-            <a:spAutoFit/>
-          </a:bodyPr>
-          <a:lstStyle/>
-          <a:p>
-            <a:r>
-              <a:rPr sz="2000"/>
-              <a:t>20.8 GeV で 19.5σ（Totani は 13–19σ）。山の位置も一致</a:t>
-            </a:r>
-          </a:p>
-        </p:txBody>
-      </p:sp>
-      <p:sp>
-        <p:nvSpPr>
-          <p:cNvPr id="8" name="TextBox 7">
-            <a:extLst>
-              <a:ext uri="{FF2B5EF4-FFF2-40B4-BE49-F238E27FC236}">
-                <a16:creationId xmlns:a16="http://schemas.microsoft.com/office/drawing/2014/main" id="{F85CD606-E3CE-F314-B3EE-F3D7028115CB}"/>
-              </a:ext>
-            </a:extLst>
-          </p:cNvPr>
-          <p:cNvSpPr txBox="1"/>
-          <p:nvPr/>
-        </p:nvSpPr>
-        <p:spPr>
-          <a:xfrm>
-            <a:off x="5837182" y="6035040"/>
-            <a:ext cx="6093372" cy="923330"/>
-          </a:xfrm>
-          <a:prstGeom prst="rect">
-            <a:avLst/>
-          </a:prstGeom>
-          <a:noFill/>
-        </p:spPr>
-        <p:txBody>
-          <a:bodyPr wrap="square">
-            <a:spAutoFit/>
-          </a:bodyPr>
-          <a:lstStyle/>
-          <a:p>
-            <a:r>
-              <a:rPr lang="en-US" sz="1400" b="1"/>
-              <a:t>Reference:</a:t>
-            </a:r>
-            <a:r>
-              <a:rPr lang="en-US" sz="1400"/>
-              <a:t> T. Totani (2025), arXiv:2507.07209 Fig. 9</a:t>
-            </a:r>
-            <a:endParaRPr lang="en-US"/>
-          </a:p>
-        </p:txBody>
-      </p:sp>
-    </p:spTree>
-  </p:cSld>
-  <p:clrMapOvr>
-    <a:masterClrMapping/>
-  </p:clrMapOvr>
-</p:sld>
-</file>
-
-<file path=ppt/slides/slide24.xml><?xml version="1.0" encoding="utf-8"?>
-<p:sld xmlns:a="http://schemas.openxmlformats.org/drawingml/2006/main" xmlns:r="http://schemas.openxmlformats.org/officeDocument/2006/relationships" xmlns:p="http://schemas.openxmlformats.org/presentationml/2006/main">
-  <p:cSld>
-    <p:spTree>
-      <p:nvGrpSpPr>
-        <p:cNvPr id="1" name=""/>
-        <p:cNvGrpSpPr/>
-        <p:nvPr/>
-      </p:nvGrpSpPr>
-      <p:grpSpPr>
-        <a:xfrm>
-          <a:off x="0" y="0"/>
-          <a:ext cx="0" cy="0"/>
-          <a:chOff x="0" y="0"/>
-          <a:chExt cx="0" cy="0"/>
-        </a:xfrm>
-      </p:grpSpPr>
-      <p:sp>
-        <p:nvSpPr>
-          <p:cNvPr id="2" name="Title 1"/>
-          <p:cNvSpPr>
-            <a:spLocks noGrp="1"/>
-          </p:cNvSpPr>
-          <p:nvPr>
-            <p:ph type="title"/>
-          </p:nvPr>
-        </p:nvSpPr>
-        <p:spPr/>
-        <p:txBody>
-          <a:bodyPr/>
-          <a:lstStyle/>
-          <a:p>
-            <a:r>
-              <a:rPr sz="3400"/>
-              <a:t>問題：ハローと ICS が見分けにくい（縮退）</a:t>
-            </a:r>
-          </a:p>
-        </p:txBody>
-      </p:sp>
-      <p:sp>
-        <p:nvSpPr>
-          <p:cNvPr id="3" name="Content Placeholder 2"/>
-          <p:cNvSpPr>
-            <a:spLocks noGrp="1"/>
-          </p:cNvSpPr>
-          <p:nvPr>
-            <p:ph idx="1"/>
-          </p:nvPr>
-        </p:nvSpPr>
-        <p:spPr>
-          <a:xfrm>
-            <a:off x="841248" y="1463040"/>
-            <a:ext cx="5669280" cy="4937760"/>
-          </a:xfrm>
-        </p:spPr>
-        <p:txBody>
-          <a:bodyPr/>
-          <a:lstStyle/>
-          <a:p>
-            <a:r>
-              <a:rPr sz="2200"/>
-              <a:t>ICS とハローは、空の上での形がよく似ている</a:t>
-            </a:r>
-          </a:p>
-          <a:p>
-            <a:pPr lvl="1"/>
-            <a:r>
-              <a:rPr sz="1800"/>
-              <a:t>緯度 25° → 55° で暗くなる割合：ハロー 2.74 倍、ICS 2.75 倍</a:t>
-            </a:r>
-          </a:p>
-          <a:p>
-            <a:r>
-              <a:rPr sz="2200"/>
-              <a:t>違いは「銀河中心の方向に集まっているか」だけ</a:t>
-            </a:r>
-          </a:p>
-          <a:p>
-            <a:r>
-              <a:rPr sz="2200"/>
-              <a:t>ハローを入れると、その分 ICS が暗くなる</a:t>
-            </a:r>
-          </a:p>
-          <a:p>
-            <a:pPr lvl="1"/>
-            <a:r>
-              <a:rPr sz="1800"/>
-              <a:t>ICS の倍率 1.39 → 0.48（20.8 GeV）</a:t>
-            </a:r>
-          </a:p>
-          <a:p>
-            <a:r>
-              <a:rPr sz="1800"/>
-              <a:t>たとえ：部屋の電球（ICS）と探している光（ハロー）が、写真ではほぼ同じ形 → 余った明るさがどちらのものか決めにくい</a:t>
-            </a:r>
-          </a:p>
-        </p:txBody>
-      </p:sp>
-      <p:pic>
-        <p:nvPicPr>
-          <p:cNvPr id="5" name="Picture 4" descr="fig_ics_norm_totani.png"/>
-          <p:cNvPicPr>
-            <a:picLocks noChangeAspect="1"/>
-          </p:cNvPicPr>
-          <p:nvPr/>
-        </p:nvPicPr>
-        <p:blipFill>
-          <a:blip r:embed="rId3"/>
-          <a:srcRect/>
-          <a:stretch>
-            <a:fillRect/>
-          </a:stretch>
-        </p:blipFill>
-        <p:spPr>
-          <a:xfrm>
-            <a:off x="6309360" y="1737360"/>
-            <a:ext cx="5669280" cy="3897630"/>
-          </a:xfrm>
-          <a:prstGeom prst="rect">
-            <a:avLst/>
-          </a:prstGeom>
-        </p:spPr>
-      </p:pic>
-    </p:spTree>
-  </p:cSld>
-  <p:clrMapOvr>
-    <a:masterClrMapping/>
-  </p:clrMapOvr>
-</p:sld>
-</file>
-
-<file path=ppt/slides/slide25.xml><?xml version="1.0" encoding="utf-8"?>
 <p:sld xmlns:a="http://schemas.openxmlformats.org/drawingml/2006/main" xmlns:r="http://schemas.openxmlformats.org/officeDocument/2006/relationships" xmlns:p="http://schemas.openxmlformats.org/presentationml/2006/main">
   <p:cSld>
     <p:spTree>
@@ -10761,7 +9652,7 @@
 </p:sld>
 </file>
 
-<file path=ppt/slides/slide26.xml><?xml version="1.0" encoding="utf-8"?>
+<file path=ppt/slides/slide21.xml><?xml version="1.0" encoding="utf-8"?>
 <p:sld xmlns:a="http://schemas.openxmlformats.org/drawingml/2006/main" xmlns:r="http://schemas.openxmlformats.org/officeDocument/2006/relationships" xmlns:p="http://schemas.openxmlformats.org/presentationml/2006/main">
   <p:cSld>
     <p:spTree>
@@ -10912,6 +9803,623 @@
 </p:sld>
 </file>
 
+<file path=ppt/slides/slide22.xml><?xml version="1.0" encoding="utf-8"?>
+<p:sld xmlns:a="http://schemas.openxmlformats.org/drawingml/2006/main" xmlns:r="http://schemas.openxmlformats.org/officeDocument/2006/relationships" xmlns:p="http://schemas.openxmlformats.org/presentationml/2006/main">
+  <p:cSld>
+    <p:spTree>
+      <p:nvGrpSpPr>
+        <p:cNvPr id="1" name=""/>
+        <p:cNvGrpSpPr/>
+        <p:nvPr/>
+      </p:nvGrpSpPr>
+      <p:grpSpPr>
+        <a:xfrm>
+          <a:off x="0" y="0"/>
+          <a:ext cx="0" cy="0"/>
+          <a:chOff x="0" y="0"/>
+          <a:chExt cx="0" cy="0"/>
+        </a:xfrm>
+      </p:grpSpPr>
+      <p:sp>
+        <p:nvSpPr>
+          <p:cNvPr id="2" name="Title 1"/>
+          <p:cNvSpPr>
+            <a:spLocks noGrp="1"/>
+          </p:cNvSpPr>
+          <p:nvPr>
+            <p:ph type="title"/>
+          </p:nvPr>
+        </p:nvSpPr>
+        <p:spPr/>
+        <p:txBody>
+          <a:bodyPr/>
+          <a:lstStyle/>
+          <a:p>
+            <a:r>
+              <a:rPr sz="3000"/>
+              <a:t>縮退が引き起こした 2 つの疑問</a:t>
+            </a:r>
+          </a:p>
+        </p:txBody>
+      </p:sp>
+      <p:sp>
+        <p:nvSpPr>
+          <p:cNvPr id="3" name="Content Placeholder 2"/>
+          <p:cNvSpPr>
+            <a:spLocks noGrp="1"/>
+          </p:cNvSpPr>
+          <p:nvPr>
+            <p:ph idx="1"/>
+          </p:nvPr>
+        </p:nvSpPr>
+        <p:spPr>
+          <a:xfrm>
+            <a:off x="841248" y="1463040"/>
+            <a:ext cx="10515600" cy="4937760"/>
+          </a:xfrm>
+        </p:spPr>
+        <p:txBody>
+          <a:bodyPr/>
+          <a:lstStyle/>
+          <a:p>
+            <a:r>
+              <a:rPr sz="2400"/>
+              <a:t>① バブル領域を外すと 19.0σ → 5.0σ に落ちる</a:t>
+            </a:r>
+          </a:p>
+          <a:p>
+            <a:pPr lvl="1"/>
+            <a:r>
+              <a:rPr sz="2000"/>
+              <a:t>ハローは、本当は ICS やバブルの間違いでは？</a:t>
+            </a:r>
+          </a:p>
+          <a:p>
+            <a:r>
+              <a:rPr sz="2400"/>
+              <a:t>② 何も無い空でも、最大 4.5σ が出る</a:t>
+            </a:r>
+          </a:p>
+          <a:p>
+            <a:pPr lvl="1"/>
+            <a:r>
+              <a:rPr sz="2000"/>
+              <a:t>σ をそのまま信じてよいのか？</a:t>
+            </a:r>
+          </a:p>
+          <a:p>
+            <a:r>
+              <a:rPr sz="2400"/>
+              <a:t>→ 次から、1 つずつ調べた結果</a:t>
+            </a:r>
+          </a:p>
+        </p:txBody>
+      </p:sp>
+    </p:spTree>
+  </p:cSld>
+  <p:clrMapOvr>
+    <a:masterClrMapping/>
+  </p:clrMapOvr>
+</p:sld>
+</file>
+
+<file path=ppt/slides/slide23.xml><?xml version="1.0" encoding="utf-8"?>
+<p:sld xmlns:a="http://schemas.openxmlformats.org/drawingml/2006/main" xmlns:r="http://schemas.openxmlformats.org/officeDocument/2006/relationships" xmlns:p="http://schemas.openxmlformats.org/presentationml/2006/main">
+  <p:cSld>
+    <p:spTree>
+      <p:nvGrpSpPr>
+        <p:cNvPr id="1" name=""/>
+        <p:cNvGrpSpPr/>
+        <p:nvPr/>
+      </p:nvGrpSpPr>
+      <p:grpSpPr>
+        <a:xfrm>
+          <a:off x="0" y="0"/>
+          <a:ext cx="0" cy="0"/>
+          <a:chOff x="0" y="0"/>
+          <a:chExt cx="0" cy="0"/>
+        </a:xfrm>
+      </p:grpSpPr>
+      <p:sp>
+        <p:nvSpPr>
+          <p:cNvPr id="2" name="Title 1"/>
+          <p:cNvSpPr>
+            <a:spLocks noGrp="1"/>
+          </p:cNvSpPr>
+          <p:nvPr>
+            <p:ph type="title"/>
+          </p:nvPr>
+        </p:nvSpPr>
+        <p:spPr/>
+        <p:txBody>
+          <a:bodyPr/>
+          <a:lstStyle/>
+          <a:p>
+            <a:r>
+              <a:rPr sz="3400"/>
+              <a:t>① を調べる：手がかりはどこにあるか</a:t>
+            </a:r>
+          </a:p>
+        </p:txBody>
+      </p:sp>
+      <p:sp>
+        <p:nvSpPr>
+          <p:cNvPr id="3" name="Content Placeholder 2"/>
+          <p:cNvSpPr>
+            <a:spLocks noGrp="1"/>
+          </p:cNvSpPr>
+          <p:nvPr>
+            <p:ph idx="1"/>
+          </p:nvPr>
+        </p:nvSpPr>
+        <p:spPr>
+          <a:xfrm>
+            <a:off x="841248" y="1463040"/>
+            <a:ext cx="10515600" cy="4937760"/>
+          </a:xfrm>
+        </p:spPr>
+        <p:txBody>
+          <a:bodyPr/>
+          <a:lstStyle/>
+          <a:p>
+            <a:r>
+              <a:rPr sz="2200"/>
+              <a:t>フィッシャー情報：データがパラメータをどれだけ決められるか</a:t>
+            </a:r>
+          </a:p>
+          <a:p>
+            <a:r>
+              <a:rPr sz="2200"/>
+              <a:t>ICS など他の成分では説明できない「ハローだけの手がかり」を、空の場所ごとに計算</a:t>
+            </a:r>
+          </a:p>
+          <a:p>
+            <a:pPr lvl="1"/>
+            <a:r>
+              <a:rPr sz="1800"/>
+              <a:t>その 54% がバブル領域（面積は 34%）に集中</a:t>
+            </a:r>
+          </a:p>
+          <a:p>
+            <a:r>
+              <a:rPr sz="2200"/>
+              <a:t>手がかりの減り方だけで予測すると 6.4σ、実測 5.0σ</a:t>
+            </a:r>
+          </a:p>
+          <a:p>
+            <a:r>
+              <a:rPr sz="2200"/>
+              <a:t>同じ形の領域を横にずらして外すと 15〜16σ</a:t>
+            </a:r>
+          </a:p>
+          <a:p>
+            <a:r>
+              <a:rPr sz="2200"/>
+              <a:t>→ 19 → 5σ は「手がかりを捨てた」から。汚染の証拠ではない</a:t>
+            </a:r>
+          </a:p>
+          <a:p>
+            <a:r>
+              <a:rPr sz="2000"/>
+              <a:t>たとえ：写真の真ん中を隠すと、2 つの光を見分けるヒントが減って自信が下がる</a:t>
+            </a:r>
+          </a:p>
+        </p:txBody>
+      </p:sp>
+    </p:spTree>
+  </p:cSld>
+  <p:clrMapOvr>
+    <a:masterClrMapping/>
+  </p:clrMapOvr>
+</p:sld>
+</file>
+
+<file path=ppt/slides/slide24.xml><?xml version="1.0" encoding="utf-8"?>
+<p:sld xmlns:a="http://schemas.openxmlformats.org/drawingml/2006/main" xmlns:r="http://schemas.openxmlformats.org/officeDocument/2006/relationships" xmlns:p="http://schemas.openxmlformats.org/presentationml/2006/main">
+  <p:cSld>
+    <p:spTree>
+      <p:nvGrpSpPr>
+        <p:cNvPr id="1" name=""/>
+        <p:cNvGrpSpPr/>
+        <p:nvPr/>
+      </p:nvGrpSpPr>
+      <p:grpSpPr>
+        <a:xfrm>
+          <a:off x="0" y="0"/>
+          <a:ext cx="0" cy="0"/>
+          <a:chOff x="0" y="0"/>
+          <a:chExt cx="0" cy="0"/>
+        </a:xfrm>
+      </p:grpSpPr>
+      <p:sp>
+        <p:nvSpPr>
+          <p:cNvPr id="2" name="Title 1"/>
+          <p:cNvSpPr>
+            <a:spLocks noGrp="1"/>
+          </p:cNvSpPr>
+          <p:nvPr>
+            <p:ph type="title"/>
+          </p:nvPr>
+        </p:nvSpPr>
+        <p:spPr/>
+        <p:txBody>
+          <a:bodyPr/>
+          <a:lstStyle/>
+          <a:p>
+            <a:r>
+              <a:rPr sz="3400"/>
+              <a:t>① を調べる：ICS が犯人なら</a:t>
+            </a:r>
+          </a:p>
+        </p:txBody>
+      </p:sp>
+      <p:sp>
+        <p:nvSpPr>
+          <p:cNvPr id="3" name="Content Placeholder 2"/>
+          <p:cNvSpPr>
+            <a:spLocks noGrp="1"/>
+          </p:cNvSpPr>
+          <p:nvPr>
+            <p:ph idx="1"/>
+          </p:nvPr>
+        </p:nvSpPr>
+        <p:spPr>
+          <a:xfrm>
+            <a:off x="841248" y="1463040"/>
+            <a:ext cx="10515600" cy="4114800"/>
+          </a:xfrm>
+        </p:spPr>
+        <p:txBody>
+          <a:bodyPr/>
+          <a:lstStyle/>
+          <a:p>
+            <a:r>
+              <a:rPr sz="2200"/>
+              <a:t>ICS をバブルの内と外で別々の明るさにして当てはめた</a:t>
+            </a:r>
+          </a:p>
+          <a:p>
+            <a:pPr lvl="1"/>
+            <a:r>
+              <a:rPr sz="1800"/>
+              <a:t>内側が約 2.3 倍明るければ、ハローの改善の 92% を ICS が説明</a:t>
+            </a:r>
+          </a:p>
+          <a:p>
+            <a:r>
+              <a:rPr sz="2200"/>
+              <a:t>ICS の計算の近似（等方近似）を直しても 1.1〜1.3 倍</a:t>
+            </a:r>
+          </a:p>
+          <a:p>
+            <a:pPr lvl="1"/>
+            <a:r>
+              <a:rPr sz="1800"/>
+              <a:t>しかも外側のほうが大きくなる → 2.3 倍には届かない</a:t>
+            </a:r>
+          </a:p>
+          <a:p>
+            <a:r>
+              <a:rPr sz="2200"/>
+              <a:t>ICS を 3 種類に分けて、それぞれ自由に動かしても</a:t>
+            </a:r>
+          </a:p>
+          <a:p>
+            <a:pPr lvl="1"/>
+            <a:r>
+              <a:rPr sz="1800"/>
+              <a:t>19.0σ → 17.8σ（約 1σ しか下がらない）</a:t>
+            </a:r>
+          </a:p>
+          <a:p>
+            <a:r>
+              <a:rPr sz="2200"/>
+              <a:t>→ ICS の「明るさ」の間違いでは、ハローを説明できない</a:t>
+            </a:r>
+          </a:p>
+        </p:txBody>
+      </p:sp>
+      <p:sp>
+        <p:nvSpPr>
+          <p:cNvPr id="8" name="TextBox 7">
+            <a:extLst>
+              <a:ext uri="{FF2B5EF4-FFF2-40B4-BE49-F238E27FC236}">
+                <a16:creationId xmlns:a16="http://schemas.microsoft.com/office/drawing/2014/main" id="{F85CD606-E3CE-F314-B3EE-F3D7028115CB}"/>
+              </a:ext>
+            </a:extLst>
+          </p:cNvPr>
+          <p:cNvSpPr txBox="1"/>
+          <p:nvPr/>
+        </p:nvSpPr>
+        <p:spPr>
+          <a:xfrm>
+            <a:off x="5837182" y="5663239"/>
+            <a:ext cx="6093372" cy="923330"/>
+          </a:xfrm>
+          <a:prstGeom prst="rect">
+            <a:avLst/>
+          </a:prstGeom>
+          <a:noFill/>
+        </p:spPr>
+        <p:txBody>
+          <a:bodyPr wrap="square">
+            <a:spAutoFit/>
+          </a:bodyPr>
+          <a:lstStyle/>
+          <a:p>
+            <a:r>
+              <a:rPr lang="en-US" sz="1400" b="1"/>
+              <a:t>Reference:</a:t>
+            </a:r>
+            <a:r>
+              <a:rPr lang="en-US" sz="1400"/>
+              <a:t> I. V. Moskalenko &amp; A. W. Strong (2000), ApJ 528, 357</a:t>
+            </a:r>
+            <a:endParaRPr lang="en-US"/>
+          </a:p>
+        </p:txBody>
+      </p:sp>
+    </p:spTree>
+  </p:cSld>
+  <p:clrMapOvr>
+    <a:masterClrMapping/>
+  </p:clrMapOvr>
+</p:sld>
+</file>
+
+<file path=ppt/slides/slide25.xml><?xml version="1.0" encoding="utf-8"?>
+<p:sld xmlns:a="http://schemas.openxmlformats.org/drawingml/2006/main" xmlns:r="http://schemas.openxmlformats.org/officeDocument/2006/relationships" xmlns:p="http://schemas.openxmlformats.org/presentationml/2006/main">
+  <p:cSld>
+    <p:spTree>
+      <p:nvGrpSpPr>
+        <p:cNvPr id="1" name=""/>
+        <p:cNvGrpSpPr/>
+        <p:nvPr/>
+      </p:nvGrpSpPr>
+      <p:grpSpPr>
+        <a:xfrm>
+          <a:off x="0" y="0"/>
+          <a:ext cx="0" cy="0"/>
+          <a:chOff x="0" y="0"/>
+          <a:chExt cx="0" cy="0"/>
+        </a:xfrm>
+      </p:grpSpPr>
+      <p:sp>
+        <p:nvSpPr>
+          <p:cNvPr id="2" name="Title 1"/>
+          <p:cNvSpPr>
+            <a:spLocks noGrp="1"/>
+          </p:cNvSpPr>
+          <p:nvPr>
+            <p:ph type="title"/>
+          </p:nvPr>
+        </p:nvSpPr>
+        <p:spPr/>
+        <p:txBody>
+          <a:bodyPr/>
+          <a:lstStyle/>
+          <a:p>
+            <a:r>
+              <a:rPr sz="3400"/>
+              <a:t>② を調べる：σ を信じてよいか</a:t>
+            </a:r>
+          </a:p>
+        </p:txBody>
+      </p:sp>
+      <p:sp>
+        <p:nvSpPr>
+          <p:cNvPr id="3" name="Content Placeholder 2"/>
+          <p:cNvSpPr>
+            <a:spLocks noGrp="1"/>
+          </p:cNvSpPr>
+          <p:nvPr>
+            <p:ph idx="1"/>
+          </p:nvPr>
+        </p:nvSpPr>
+        <p:spPr>
+          <a:xfrm>
+            <a:off x="841248" y="1463040"/>
+            <a:ext cx="10515600" cy="4114800"/>
+          </a:xfrm>
+        </p:spPr>
+        <p:txBody>
+          <a:bodyPr/>
+          <a:lstStyle/>
+          <a:p>
+            <a:r>
+              <a:rPr sz="2200"/>
+              <a:t>何も無い空 23 か所で、天の川と同じ解析をした</a:t>
+            </a:r>
+          </a:p>
+          <a:p>
+            <a:pPr lvl="1"/>
+            <a:r>
+              <a:rPr sz="1700"/>
+              <a:t>たとえ：真っ暗な所を写したのに「明かりがある」と出てしまう（誤検出）が、どれくらい起きるか</a:t>
+            </a:r>
+          </a:p>
+          <a:p>
+            <a:r>
+              <a:rPr sz="2200"/>
+              <a:t>本物の信号が無ければ、σ は「平均 0、ばらつき 1」になるはず</a:t>
+            </a:r>
+          </a:p>
+          <a:p>
+            <a:pPr lvl="1"/>
+            <a:r>
+              <a:rPr sz="1800"/>
+              <a:t>Wilks の定理が成り立っていれば</a:t>
+            </a:r>
+          </a:p>
+          <a:p>
+            <a:r>
+              <a:rPr sz="2200"/>
+              <a:t>実際のばらつき：1.26（95% 区間 1.14–1.39）</a:t>
+            </a:r>
+          </a:p>
+          <a:p>
+            <a:pPr lvl="1"/>
+            <a:r>
+              <a:rPr sz="1800"/>
+              <a:t>σ は 1.26 倍大きく出ている</a:t>
+            </a:r>
+          </a:p>
+          <a:p>
+            <a:r>
+              <a:rPr sz="2200"/>
+              <a:t>19.0σ を較正すると 19.0 ÷ 1.26 ≈ 15σ（13.7–16.7σ）</a:t>
+            </a:r>
+          </a:p>
+        </p:txBody>
+      </p:sp>
+      <p:sp>
+        <p:nvSpPr>
+          <p:cNvPr id="8" name="TextBox 7">
+            <a:extLst>
+              <a:ext uri="{FF2B5EF4-FFF2-40B4-BE49-F238E27FC236}">
+                <a16:creationId xmlns:a16="http://schemas.microsoft.com/office/drawing/2014/main" id="{F85CD606-E3CE-F314-B3EE-F3D7028115CB}"/>
+              </a:ext>
+            </a:extLst>
+          </p:cNvPr>
+          <p:cNvSpPr txBox="1"/>
+          <p:nvPr/>
+        </p:nvSpPr>
+        <p:spPr>
+          <a:xfrm>
+            <a:off x="5837182" y="5663239"/>
+            <a:ext cx="6093372" cy="923330"/>
+          </a:xfrm>
+          <a:prstGeom prst="rect">
+            <a:avLst/>
+          </a:prstGeom>
+          <a:noFill/>
+        </p:spPr>
+        <p:txBody>
+          <a:bodyPr wrap="square">
+            <a:spAutoFit/>
+          </a:bodyPr>
+          <a:lstStyle/>
+          <a:p>
+            <a:r>
+              <a:rPr lang="en-US" sz="1400" b="1"/>
+              <a:t>Reference:</a:t>
+            </a:r>
+            <a:r>
+              <a:rPr lang="en-US" sz="1400"/>
+              <a:t> B. Efron &amp; R. J. Tibshirani (1993), An Introduction to the Bootstrap</a:t>
+            </a:r>
+            <a:endParaRPr lang="en-US"/>
+          </a:p>
+        </p:txBody>
+      </p:sp>
+    </p:spTree>
+  </p:cSld>
+  <p:clrMapOvr>
+    <a:masterClrMapping/>
+  </p:clrMapOvr>
+</p:sld>
+</file>
+
+<file path=ppt/slides/slide26.xml><?xml version="1.0" encoding="utf-8"?>
+<p:sld xmlns:a="http://schemas.openxmlformats.org/drawingml/2006/main" xmlns:r="http://schemas.openxmlformats.org/officeDocument/2006/relationships" xmlns:p="http://schemas.openxmlformats.org/presentationml/2006/main">
+  <p:cSld>
+    <p:spTree>
+      <p:nvGrpSpPr>
+        <p:cNvPr id="1" name=""/>
+        <p:cNvGrpSpPr/>
+        <p:nvPr/>
+      </p:nvGrpSpPr>
+      <p:grpSpPr>
+        <a:xfrm>
+          <a:off x="0" y="0"/>
+          <a:ext cx="0" cy="0"/>
+          <a:chOff x="0" y="0"/>
+          <a:chExt cx="0" cy="0"/>
+        </a:xfrm>
+      </p:grpSpPr>
+      <p:sp>
+        <p:nvSpPr>
+          <p:cNvPr id="2" name="Title 1"/>
+          <p:cNvSpPr>
+            <a:spLocks noGrp="1"/>
+          </p:cNvSpPr>
+          <p:nvPr>
+            <p:ph type="title"/>
+          </p:nvPr>
+        </p:nvSpPr>
+        <p:spPr/>
+        <p:txBody>
+          <a:bodyPr/>
+          <a:lstStyle/>
+          <a:p>
+            <a:r>
+              <a:rPr sz="3400"/>
+              <a:t>② の結果：エネルギーごとのばらつき</a:t>
+            </a:r>
+          </a:p>
+        </p:txBody>
+      </p:sp>
+      <p:pic>
+        <p:nvPicPr>
+          <p:cNvPr id="3" name="Picture 2" descr="fig_null_variance.png"/>
+          <p:cNvPicPr>
+            <a:picLocks noChangeAspect="1"/>
+          </p:cNvPicPr>
+          <p:nvPr/>
+        </p:nvPicPr>
+        <p:blipFill>
+          <a:blip r:embed="rId3"/>
+          <a:stretch>
+            <a:fillRect/>
+          </a:stretch>
+        </p:blipFill>
+        <p:spPr>
+          <a:xfrm>
+            <a:off x="2103120" y="1234440"/>
+            <a:ext cx="7156174" cy="4114800"/>
+          </a:xfrm>
+          <a:prstGeom prst="rect">
+            <a:avLst/>
+          </a:prstGeom>
+        </p:spPr>
+      </p:pic>
+      <p:sp>
+        <p:nvSpPr>
+          <p:cNvPr id="4" name="TextBox 3"/>
+          <p:cNvSpPr txBox="1"/>
+          <p:nvPr/>
+        </p:nvSpPr>
+        <p:spPr>
+          <a:xfrm>
+            <a:off x="457200" y="5486400"/>
+            <a:ext cx="11247120" cy="457200"/>
+          </a:xfrm>
+          <a:prstGeom prst="rect">
+            <a:avLst/>
+          </a:prstGeom>
+          <a:noFill/>
+        </p:spPr>
+        <p:txBody>
+          <a:bodyPr wrap="square">
+            <a:spAutoFit/>
+          </a:bodyPr>
+          <a:lstStyle/>
+          <a:p>
+            <a:r>
+              <a:rPr sz="2000"/>
+              <a:t>どのエネルギーでもばらつきは 1 より大きい（光子が十分ある範囲）</a:t>
+            </a:r>
+          </a:p>
+        </p:txBody>
+      </p:sp>
+    </p:spTree>
+  </p:cSld>
+  <p:clrMapOvr>
+    <a:masterClrMapping/>
+  </p:clrMapOvr>
+</p:sld>
+</file>
+
 <file path=ppt/slides/slide27.xml><?xml version="1.0" encoding="utf-8"?>
 <p:sld xmlns:a="http://schemas.openxmlformats.org/drawingml/2006/main" xmlns:r="http://schemas.openxmlformats.org/officeDocument/2006/relationships" xmlns:p="http://schemas.openxmlformats.org/presentationml/2006/main">
   <p:cSld>
@@ -10945,8 +10453,8 @@
           <a:lstStyle/>
           <a:p>
             <a:r>
-              <a:rPr sz="3000"/>
-              <a:t>縮退が引き起こした 2 つの疑問</a:t>
+              <a:rPr sz="3400"/>
+              <a:t>ここまでのまとめ</a:t>
             </a:r>
           </a:p>
         </p:txBody>
@@ -10973,33 +10481,32 @@
           <a:p>
             <a:r>
               <a:rPr sz="2400"/>
-              <a:t>① バブル領域を外すと 19.5σ → 5.0σ に落ちる</a:t>
+              <a:t>ICS の明るさ・バブル・計算の近似の間違いでは、超過を説明できない</a:t>
+            </a:r>
+          </a:p>
+          <a:p>
+            <a:r>
+              <a:rPr sz="2400"/>
+              <a:t>σ は 1.26 倍の過大評価 → 較正すると約 15σ</a:t>
+            </a:r>
+          </a:p>
+          <a:p>
+            <a:r>
+              <a:rPr sz="2400"/>
+              <a:t>ただし、暗黒物質の証拠ではない</a:t>
             </a:r>
           </a:p>
           <a:p>
             <a:pPr lvl="1"/>
             <a:r>
               <a:rPr sz="2000"/>
-              <a:t>ハローは、本当は ICS やバブルの間違いでは？</a:t>
+              <a:t>ICS の「空間の形」の間違いは否定できていない</a:t>
             </a:r>
           </a:p>
           <a:p>
             <a:r>
               <a:rPr sz="2400"/>
-              <a:t>② 何も無い空でも、最大 4.5σ が出る</a:t>
-            </a:r>
-          </a:p>
-          <a:p>
-            <a:pPr lvl="1"/>
-            <a:r>
-              <a:rPr sz="2000"/>
-              <a:t>σ をそのまま信じてよいのか？</a:t>
-            </a:r>
-          </a:p>
-          <a:p>
-            <a:r>
-              <a:rPr sz="2400"/>
-              <a:t>→ 次から、1 つずつ調べた結果</a:t>
+              <a:t>→ 独立な確認として、矮小銀河を見る</a:t>
             </a:r>
           </a:p>
         </p:txBody>
@@ -11046,7 +10553,7 @@
           <a:p>
             <a:r>
               <a:rPr sz="3400"/>
-              <a:t>① を調べる：手がかりはどこにあるか</a:t>
+              <a:t>矮小銀河で確かめる</a:t>
             </a:r>
           </a:p>
         </p:txBody>
@@ -11064,7 +10571,7 @@
         <p:spPr>
           <a:xfrm>
             <a:off x="841248" y="1463040"/>
-            <a:ext cx="10515600" cy="4937760"/>
+            <a:ext cx="10515600" cy="4114800"/>
           </a:xfrm>
         </p:spPr>
         <p:txBody>
@@ -11072,46 +10579,81 @@
           <a:lstStyle/>
           <a:p>
             <a:r>
-              <a:rPr sz="2200"/>
-              <a:t>フィッシャー情報：データがパラメータをどれだけ決められるか</a:t>
-            </a:r>
-          </a:p>
-          <a:p>
-            <a:r>
-              <a:rPr sz="2200"/>
-              <a:t>ICS など他の成分では説明できない「ハローだけの手がかり」を、空の場所ごとに計算</a:t>
+              <a:rPr sz="2400"/>
+              <a:t>矮小銀河：天の川のまわりの小さな銀河</a:t>
             </a:r>
           </a:p>
           <a:p>
             <a:pPr lvl="1"/>
             <a:r>
-              <a:rPr sz="1800"/>
-              <a:t>その 54% がバブル領域（面積は 34%）に集中</a:t>
-            </a:r>
-          </a:p>
-          <a:p>
-            <a:r>
-              <a:rPr sz="2200"/>
-              <a:t>手がかりの減り方だけで予測すると 6.6σ、実測 5.0σ</a:t>
-            </a:r>
-          </a:p>
-          <a:p>
-            <a:r>
-              <a:rPr sz="2200"/>
-              <a:t>同じ形の領域を横にずらして外すと 15〜16σ</a:t>
-            </a:r>
-          </a:p>
-          <a:p>
-            <a:r>
-              <a:rPr sz="2200"/>
-              <a:t>→ 19 → 5σ は「手がかりを捨てた」から。汚染の証拠ではない</a:t>
-            </a:r>
-          </a:p>
-          <a:p>
-            <a:r>
               <a:rPr sz="2000"/>
-              <a:t>たとえ：写真の真ん中を隠すと、2 つの光を見分けるヒントが減って自信が下がる</a:t>
-            </a:r>
+              <a:t>暗黒物質が多く、ガスや星形成が少ない（雑音が少ない）</a:t>
+            </a:r>
+          </a:p>
+          <a:p>
+            <a:r>
+              <a:rPr sz="2400"/>
+              <a:t>暗黒物質なら、矮小銀河からも同じ 20 GeV の光が来るはず</a:t>
+            </a:r>
+          </a:p>
+          <a:p>
+            <a:r>
+              <a:rPr sz="2400"/>
+              <a:t>同じ手法を、各天体のまわり半径 10° に使った</a:t>
+            </a:r>
+          </a:p>
+          <a:p>
+            <a:pPr lvl="1"/>
+            <a:r>
+              <a:rPr sz="2000"/>
+              <a:t>矮小銀河 54 ＋ M31・M33 ＋ 何も無い空 23 か所</a:t>
+            </a:r>
+          </a:p>
+          <a:p>
+            <a:r>
+              <a:rPr sz="2400"/>
+              <a:t>矮小銀河は小さい（0.2〜0.4°）ので、広がった ICS とは縮退しない</a:t>
+            </a:r>
+          </a:p>
+        </p:txBody>
+      </p:sp>
+      <p:sp>
+        <p:nvSpPr>
+          <p:cNvPr id="8" name="TextBox 7">
+            <a:extLst>
+              <a:ext uri="{FF2B5EF4-FFF2-40B4-BE49-F238E27FC236}">
+                <a16:creationId xmlns:a16="http://schemas.microsoft.com/office/drawing/2014/main" id="{F85CD606-E3CE-F314-B3EE-F3D7028115CB}"/>
+              </a:ext>
+            </a:extLst>
+          </p:cNvPr>
+          <p:cNvSpPr txBox="1"/>
+          <p:nvPr/>
+        </p:nvSpPr>
+        <p:spPr>
+          <a:xfrm>
+            <a:off x="5837182" y="5663239"/>
+            <a:ext cx="6093372" cy="923330"/>
+          </a:xfrm>
+          <a:prstGeom prst="rect">
+            <a:avLst/>
+          </a:prstGeom>
+          <a:noFill/>
+        </p:spPr>
+        <p:txBody>
+          <a:bodyPr wrap="square">
+            <a:spAutoFit/>
+          </a:bodyPr>
+          <a:lstStyle/>
+          <a:p>
+            <a:r>
+              <a:rPr lang="en-US" sz="1400" b="1"/>
+              <a:t>Reference:</a:t>
+            </a:r>
+            <a:r>
+              <a:rPr lang="en-US" sz="1400"/>
+              <a:t> A. B. Pace (2025), Open J. Astrophys. 8, 142</a:t>
+            </a:r>
+            <a:endParaRPr lang="en-US"/>
           </a:p>
         </p:txBody>
       </p:sp>
@@ -11157,7 +10699,7 @@
           <a:p>
             <a:r>
               <a:rPr sz="3400"/>
-              <a:t>① を調べる：ICS が犯人なら</a:t>
+              <a:t>予測の立て方：J ファクター</a:t>
             </a:r>
           </a:p>
         </p:txBody>
@@ -11183,47 +10725,39 @@
           <a:lstStyle/>
           <a:p>
             <a:r>
-              <a:rPr sz="2200"/>
-              <a:t>ICS をバブルの内と外で別々の明るさにして当てはめた</a:t>
+              <a:rPr sz="2400"/>
+              <a:t>対消滅の明るさ：F = ⟨σv⟩ / (8π m²) × dN/dE × J</a:t>
+            </a:r>
+          </a:p>
+          <a:p>
+            <a:r>
+              <a:rPr sz="2400"/>
+              <a:t>J ファクター = 暗黒物質の密度の 2 乗を、視線方向に足し合わせた量</a:t>
+            </a:r>
+          </a:p>
+          <a:p>
+            <a:r>
+              <a:rPr sz="2400"/>
+              <a:t>天の川と矮小銀河で粒子は同じ → 比をとると J の比だけが残る</a:t>
             </a:r>
           </a:p>
           <a:p>
             <a:pPr lvl="1"/>
             <a:r>
-              <a:rPr sz="1800"/>
-              <a:t>内側が約 2.3 倍明るければ、ハローの改善の 92% を ICS が説明</a:t>
-            </a:r>
-          </a:p>
-          <a:p>
-            <a:r>
-              <a:rPr sz="2200"/>
-              <a:t>ICS の計算の近似（等方近似）を直しても 1.1〜1.3 倍</a:t>
-            </a:r>
-          </a:p>
-          <a:p>
-            <a:pPr lvl="1"/>
-            <a:r>
-              <a:rPr sz="1800"/>
-              <a:t>しかも外側のほうが大きくなる → 2.3 倍には届かない</a:t>
-            </a:r>
-          </a:p>
-          <a:p>
-            <a:r>
-              <a:rPr sz="2200"/>
-              <a:t>ICS を 3 種類に分けて、それぞれ自由に動かしても</a:t>
-            </a:r>
-          </a:p>
-          <a:p>
-            <a:pPr lvl="1"/>
-            <a:r>
-              <a:rPr sz="1800"/>
-              <a:t>19.5σ → 18.4σ（約 1σ しか下がらない）</a:t>
-            </a:r>
-          </a:p>
-          <a:p>
-            <a:r>
-              <a:rPr sz="2200"/>
-              <a:t>→ ICS の「明るさ」の間違いでは、ハローを説明できない</a:t>
+              <a:rPr sz="2000"/>
+              <a:t>F_矮小 = F_天の川 × J_矮小 / J_天の川</a:t>
+            </a:r>
+          </a:p>
+          <a:p>
+            <a:r>
+              <a:rPr sz="2400"/>
+              <a:t>粒子の質量などを仮定せずに「何σ見えるはずか」が出る</a:t>
+            </a:r>
+          </a:p>
+          <a:p>
+            <a:r>
+              <a:rPr sz="2400"/>
+              <a:t>矮小銀河の J は、星の動きから推定する</a:t>
             </a:r>
           </a:p>
         </p:txBody>
@@ -11262,7 +10796,7 @@
             </a:r>
             <a:r>
               <a:rPr lang="en-US" sz="1400"/>
-              <a:t> I. V. Moskalenko &amp; A. W. Strong (2000), ApJ 528, 357</a:t>
+              <a:t> A. B. Pace &amp; L. E. Strigari (2019), MNRAS 482, 3480</a:t>
             </a:r>
             <a:endParaRPr lang="en-US"/>
           </a:p>
@@ -11546,93 +11080,45 @@
           <a:p>
             <a:r>
               <a:rPr sz="3400"/>
-              <a:t>② を調べる：σ を信じてよいか</a:t>
-            </a:r>
-          </a:p>
-        </p:txBody>
-      </p:sp>
-      <p:sp>
-        <p:nvSpPr>
-          <p:cNvPr id="3" name="Content Placeholder 2"/>
-          <p:cNvSpPr>
-            <a:spLocks noGrp="1"/>
-          </p:cNvSpPr>
-          <p:nvPr>
-            <p:ph idx="1"/>
-          </p:nvPr>
-        </p:nvSpPr>
+              <a:t>結果：どこにも信号は見えなかった</a:t>
+            </a:r>
+          </a:p>
+        </p:txBody>
+      </p:sp>
+      <p:pic>
+        <p:nvPicPr>
+          <p:cNvPr id="3" name="Picture 2" descr="fig_dwarf_results.png"/>
+          <p:cNvPicPr>
+            <a:picLocks noChangeAspect="1"/>
+          </p:cNvPicPr>
+          <p:nvPr/>
+        </p:nvPicPr>
+        <p:blipFill>
+          <a:blip r:embed="rId3"/>
+          <a:stretch>
+            <a:fillRect/>
+          </a:stretch>
+        </p:blipFill>
         <p:spPr>
           <a:xfrm>
-            <a:off x="841248" y="1463040"/>
-            <a:ext cx="10515600" cy="4114800"/>
+            <a:off x="2194560" y="1234440"/>
+            <a:ext cx="7156174" cy="4114800"/>
           </a:xfrm>
+          <a:prstGeom prst="rect">
+            <a:avLst/>
+          </a:prstGeom>
         </p:spPr>
-        <p:txBody>
-          <a:bodyPr/>
-          <a:lstStyle/>
-          <a:p>
-            <a:r>
-              <a:rPr sz="2200"/>
-              <a:t>何も無い空 23 か所で、天の川と同じ解析をした</a:t>
-            </a:r>
-          </a:p>
-          <a:p>
-            <a:pPr lvl="1"/>
-            <a:r>
-              <a:rPr sz="1700"/>
-              <a:t>たとえ：真っ暗な所を写したのに「明かりがある」と出てしまう（誤検出）が、どれくらい起きるか</a:t>
-            </a:r>
-          </a:p>
-          <a:p>
-            <a:r>
-              <a:rPr sz="2200"/>
-              <a:t>本物の信号が無ければ、σ は「平均 0、ばらつき 1」になるはず</a:t>
-            </a:r>
-          </a:p>
-          <a:p>
-            <a:pPr lvl="1"/>
-            <a:r>
-              <a:rPr sz="1800"/>
-              <a:t>Wilks の定理が成り立っていれば</a:t>
-            </a:r>
-          </a:p>
-          <a:p>
-            <a:r>
-              <a:rPr sz="2200"/>
-              <a:t>実際のばらつき：1.26（95% 区間 1.14–1.39）</a:t>
-            </a:r>
-          </a:p>
-          <a:p>
-            <a:pPr lvl="1"/>
-            <a:r>
-              <a:rPr sz="1800"/>
-              <a:t>σ は 1.26 倍大きく出ている</a:t>
-            </a:r>
-          </a:p>
-          <a:p>
-            <a:r>
-              <a:rPr sz="2200"/>
-              <a:t>19.5σ を較正すると 19.5 ÷ 1.26 ≈ 15σ（14.0–17.0σ）</a:t>
-            </a:r>
-          </a:p>
-        </p:txBody>
-      </p:sp>
-      <p:sp>
-        <p:nvSpPr>
-          <p:cNvPr id="8" name="TextBox 7">
-            <a:extLst>
-              <a:ext uri="{FF2B5EF4-FFF2-40B4-BE49-F238E27FC236}">
-                <a16:creationId xmlns:a16="http://schemas.microsoft.com/office/drawing/2014/main" id="{F85CD606-E3CE-F314-B3EE-F3D7028115CB}"/>
-              </a:ext>
-            </a:extLst>
-          </p:cNvPr>
+      </p:pic>
+      <p:sp>
+        <p:nvSpPr>
+          <p:cNvPr id="4" name="TextBox 3"/>
           <p:cNvSpPr txBox="1"/>
           <p:nvPr/>
         </p:nvSpPr>
         <p:spPr>
           <a:xfrm>
-            <a:off x="5837182" y="5663239"/>
-            <a:ext cx="6093372" cy="923330"/>
+            <a:off x="457200" y="5486400"/>
+            <a:ext cx="11247120" cy="457200"/>
           </a:xfrm>
           <a:prstGeom prst="rect">
             <a:avLst/>
@@ -11646,14 +11132,9 @@
           <a:lstStyle/>
           <a:p>
             <a:r>
-              <a:rPr lang="en-US" sz="1400" b="1"/>
-              <a:t>Reference:</a:t>
-            </a:r>
-            <a:r>
-              <a:rPr lang="en-US" sz="1400"/>
-              <a:t> B. Efron &amp; R. J. Tibshirani (1993), An Introduction to the Bootstrap</a:t>
-            </a:r>
-            <a:endParaRPr lang="en-US"/>
+              <a:rPr sz="2000"/>
+              <a:t>どの天体・どのエネルギーでも最大 +3.46σ（何も無い空でも 4.50σ）</a:t>
+            </a:r>
           </a:p>
         </p:txBody>
       </p:sp>
@@ -11699,60 +11180,71 @@
           <a:p>
             <a:r>
               <a:rPr sz="3400"/>
-              <a:t>② の結果：エネルギーごとのばらつき</a:t>
-            </a:r>
-          </a:p>
-        </p:txBody>
-      </p:sp>
-      <p:pic>
-        <p:nvPicPr>
-          <p:cNvPr id="3" name="Picture 2" descr="fig_null_variance.png"/>
-          <p:cNvPicPr>
-            <a:picLocks noChangeAspect="1"/>
-          </p:cNvPicPr>
-          <p:nvPr/>
-        </p:nvPicPr>
-        <p:blipFill>
-          <a:blip r:embed="rId3"/>
-          <a:stretch>
-            <a:fillRect/>
-          </a:stretch>
-        </p:blipFill>
+              <a:t>天体をまとめて比べる</a:t>
+            </a:r>
+          </a:p>
+        </p:txBody>
+      </p:sp>
+      <p:sp>
+        <p:nvSpPr>
+          <p:cNvPr id="3" name="Content Placeholder 2"/>
+          <p:cNvSpPr>
+            <a:spLocks noGrp="1"/>
+          </p:cNvSpPr>
+          <p:nvPr>
+            <p:ph idx="1"/>
+          </p:nvPr>
+        </p:nvSpPr>
         <p:spPr>
           <a:xfrm>
-            <a:off x="2103120" y="1234440"/>
-            <a:ext cx="7156174" cy="4114800"/>
+            <a:off x="841248" y="1463040"/>
+            <a:ext cx="10515600" cy="4937760"/>
           </a:xfrm>
-          <a:prstGeom prst="rect">
-            <a:avLst/>
-          </a:prstGeom>
         </p:spPr>
-      </p:pic>
-      <p:sp>
-        <p:nvSpPr>
-          <p:cNvPr id="4" name="TextBox 3"/>
-          <p:cNvSpPr txBox="1"/>
-          <p:nvPr/>
-        </p:nvSpPr>
-        <p:spPr>
-          <a:xfrm>
-            <a:off x="457200" y="5486400"/>
-            <a:ext cx="11247120" cy="457200"/>
-          </a:xfrm>
-          <a:prstGeom prst="rect">
-            <a:avLst/>
-          </a:prstGeom>
-          <a:noFill/>
-        </p:spPr>
-        <p:txBody>
-          <a:bodyPr wrap="square">
-            <a:spAutoFit/>
-          </a:bodyPr>
-          <a:lstStyle/>
-          <a:p>
+        <p:txBody>
+          <a:bodyPr/>
+          <a:lstStyle/>
+          <a:p>
+            <a:r>
+              <a:rPr sz="2400"/>
+              <a:t>1 個ずつでは弱いので、J が求まる 43 天体をまとめる</a:t>
+            </a:r>
+          </a:p>
+          <a:p>
+            <a:r>
+              <a:rPr sz="2400"/>
+              <a:t>T = Σ w_i z_i / √( Σ w_i² )、重み w_i = 天体 i の予測 σ</a:t>
+            </a:r>
+          </a:p>
+          <a:p>
+            <a:pPr lvl="1"/>
             <a:r>
               <a:rPr sz="2000"/>
-              <a:t>どのエネルギーでもばらつきは 1 より大きい（光子が十分ある範囲）</a:t>
+              <a:t>z_i：天体 i の実測の σ（20 GeV）</a:t>
+            </a:r>
+          </a:p>
+          <a:p>
+            <a:r>
+              <a:rPr sz="2400"/>
+              <a:t>暗黒物質が無ければ：T は平均 0、ばらつき 1</a:t>
+            </a:r>
+          </a:p>
+          <a:p>
+            <a:r>
+              <a:rPr sz="2400"/>
+              <a:t>暗黒物質があれば：T の平均 = √( Σ pred_i² ) = 1.77</a:t>
+            </a:r>
+          </a:p>
+          <a:p>
+            <a:r>
+              <a:rPr sz="2400"/>
+              <a:t>実測 T = 0.39 → ずれ 1.4σ</a:t>
+            </a:r>
+          </a:p>
+          <a:p>
+            <a:r>
+              <a:rPr sz="2400"/>
+              <a:t>ただし、ここでは J に誤差は無いとしていた</a:t>
             </a:r>
           </a:p>
         </p:txBody>
@@ -11799,7 +11291,7 @@
           <a:p>
             <a:r>
               <a:rPr sz="3400"/>
-              <a:t>ここまでのまとめ</a:t>
+              <a:t>ここで論文：J の誤差は小さく見積もられている</a:t>
             </a:r>
           </a:p>
         </p:txBody>
@@ -11817,7 +11309,7 @@
         <p:spPr>
           <a:xfrm>
             <a:off x="841248" y="1463040"/>
-            <a:ext cx="10515600" cy="4937760"/>
+            <a:ext cx="10515600" cy="4114800"/>
           </a:xfrm>
         </p:spPr>
         <p:txBody>
@@ -11826,33 +11318,81 @@
           <a:p>
             <a:r>
               <a:rPr sz="2400"/>
-              <a:t>ICS の明るさ・バブル・計算の近似の間違いでは、超過を説明できない</a:t>
+              <a:t>文献ごとの J の値は、書かれた誤差よりも大きくばらつく</a:t>
             </a:r>
           </a:p>
           <a:p>
             <a:r>
               <a:rPr sz="2400"/>
-              <a:t>σ は 1.26 倍の過大評価 → 較正すると約 15σ</a:t>
+              <a:t>見落とされがちな誤差の原因（8 つ）</a:t>
+            </a:r>
+          </a:p>
+          <a:p>
+            <a:pPr lvl="1"/>
+            <a:r>
+              <a:rPr sz="2000"/>
+              <a:t>点として扱う・ハローの形・星の分布の形の仮定</a:t>
+            </a:r>
+          </a:p>
+          <a:p>
+            <a:pPr lvl="1"/>
+            <a:r>
+              <a:rPr sz="2000"/>
+              <a:t>非球対称（最大 0.4 dex）・非平衡（〜0.1）・連星（Ret II で〜0.3）</a:t>
+            </a:r>
+          </a:p>
+          <a:p>
+            <a:pPr lvl="1"/>
+            <a:r>
+              <a:rPr sz="2000"/>
+              <a:t>前景の星の混入・誤差の分布が正規分布でない</a:t>
             </a:r>
           </a:p>
           <a:p>
             <a:r>
               <a:rPr sz="2400"/>
-              <a:t>ただし、暗黒物質の証拠ではない</a:t>
-            </a:r>
-          </a:p>
-          <a:p>
-            <a:pPr lvl="1"/>
-            <a:r>
-              <a:rPr sz="2000"/>
-              <a:t>ICS の「空間の形」の間違いは否定できていない</a:t>
-            </a:r>
-          </a:p>
-          <a:p>
-            <a:r>
-              <a:rPr sz="2400"/>
-              <a:t>→ 独立な確認として、矮小銀河を見る</a:t>
-            </a:r>
+              <a:t>Δlog₁₀J ≈ 0.5（約 3 倍）以上の誤差を見込むべき</a:t>
+            </a:r>
+          </a:p>
+        </p:txBody>
+      </p:sp>
+      <p:sp>
+        <p:nvSpPr>
+          <p:cNvPr id="8" name="TextBox 7">
+            <a:extLst>
+              <a:ext uri="{FF2B5EF4-FFF2-40B4-BE49-F238E27FC236}">
+                <a16:creationId xmlns:a16="http://schemas.microsoft.com/office/drawing/2014/main" id="{F85CD606-E3CE-F314-B3EE-F3D7028115CB}"/>
+              </a:ext>
+            </a:extLst>
+          </p:cNvPr>
+          <p:cNvSpPr txBox="1"/>
+          <p:nvPr/>
+        </p:nvSpPr>
+        <p:spPr>
+          <a:xfrm>
+            <a:off x="5837182" y="5663239"/>
+            <a:ext cx="6093372" cy="923330"/>
+          </a:xfrm>
+          <a:prstGeom prst="rect">
+            <a:avLst/>
+          </a:prstGeom>
+          <a:noFill/>
+        </p:spPr>
+        <p:txBody>
+          <a:bodyPr wrap="square">
+            <a:spAutoFit/>
+          </a:bodyPr>
+          <a:lstStyle/>
+          <a:p>
+            <a:r>
+              <a:rPr lang="en-US" sz="1400" b="1"/>
+              <a:t>Reference:</a:t>
+            </a:r>
+            <a:r>
+              <a:rPr lang="en-US" sz="1400"/>
+              <a:t> Bertólez-Martínez, Hooper &amp; Khatee Zathul (2026), arXiv:2609.20944 §II</a:t>
+            </a:r>
+            <a:endParaRPr lang="en-US"/>
           </a:p>
         </p:txBody>
       </p:sp>
@@ -11898,7 +11438,7 @@
           <a:p>
             <a:r>
               <a:rPr sz="3400"/>
-              <a:t>矮小銀河で確かめる</a:t>
+              <a:t>詳細なmethodについて①：仮想データの作り方</a:t>
             </a:r>
           </a:p>
         </p:txBody>
@@ -11924,40 +11464,47 @@
           <a:lstStyle/>
           <a:p>
             <a:r>
-              <a:rPr sz="2400"/>
-              <a:t>矮小銀河：天の川のまわりの小さな銀河</a:t>
+              <a:rPr sz="2200"/>
+              <a:t>Fermi-LAT の観測を計算機の中で作る（FermiTools、fermipy）</a:t>
             </a:r>
           </a:p>
           <a:p>
             <a:pPr lvl="1"/>
             <a:r>
-              <a:rPr sz="2000"/>
-              <a:t>暗黒物質が多く、ガスや星形成が少ない（雑音が少ない）</a:t>
-            </a:r>
-          </a:p>
-          <a:p>
-            <a:r>
-              <a:rPr sz="2400"/>
-              <a:t>暗黒物質なら、矮小銀河からも同じ 20 GeV の光が来るはず</a:t>
-            </a:r>
-          </a:p>
-          <a:p>
-            <a:r>
-              <a:rPr sz="2400"/>
-              <a:t>同じ手法を、各天体のまわり半径 10° に使った</a:t>
+              <a:rPr sz="1800"/>
+              <a:t>17.4 年分、0.5 GeV〜1 TeV、10° × 10° の領域、0.08° の画素</a:t>
+            </a:r>
+          </a:p>
+          <a:p>
+            <a:r>
+              <a:rPr sz="2200"/>
+              <a:t>背景：銀河の拡散光＋等方の光から、ポアソン乱数で光子を作る</a:t>
+            </a:r>
+          </a:p>
+          <a:p>
+            <a:r>
+              <a:rPr sz="2200"/>
+              <a:t>暗黒物質の信号を入れる</a:t>
             </a:r>
           </a:p>
           <a:p>
             <a:pPr lvl="1"/>
             <a:r>
-              <a:rPr sz="2000"/>
-              <a:t>矮小銀河 54 ＋ M31・M33 ＋ 何も無い空 23 か所</a:t>
-            </a:r>
-          </a:p>
-          <a:p>
-            <a:r>
-              <a:rPr sz="2400"/>
-              <a:t>矮小銀河は小さい（0.2〜0.4°）ので、広がった ICS とは縮退しない</a:t>
+              <a:rPr sz="1800"/>
+              <a:t>質量 42 GeV、b クォーク対、⟨σv⟩ = 1.4 × 10⁻²⁶ cm³/s</a:t>
+            </a:r>
+          </a:p>
+          <a:p>
+            <a:pPr lvl="1"/>
+            <a:r>
+              <a:rPr sz="1800"/>
+              <a:t>銀河中心 GeV 超過（GCE）に合う値</a:t>
+            </a:r>
+          </a:p>
+          <a:p>
+            <a:r>
+              <a:rPr sz="2200"/>
+              <a:t>対象：Ursa Minor 1 個と、27 個の矮小銀河</a:t>
             </a:r>
           </a:p>
         </p:txBody>
@@ -11996,7 +11543,7 @@
             </a:r>
             <a:r>
               <a:rPr lang="en-US" sz="1400"/>
-              <a:t> A. B. Pace (2025), Open J. Astrophys. 8, 142</a:t>
+              <a:t> Bertólez-Martínez, Hooper &amp; Khatee Zathul (2026), arXiv:2609.20944 §III</a:t>
             </a:r>
             <a:endParaRPr lang="en-US"/>
           </a:p>
@@ -12044,7 +11591,7 @@
           <a:p>
             <a:r>
               <a:rPr sz="3400"/>
-              <a:t>予測の立て方：J ファクター</a:t>
+              <a:t>詳細なmethodについて②：尤度と 2 つの誤差</a:t>
             </a:r>
           </a:p>
         </p:txBody>
@@ -12070,39 +11617,47 @@
           <a:lstStyle/>
           <a:p>
             <a:r>
-              <a:rPr sz="2400"/>
-              <a:t>対消滅の明るさ：F = ⟨σv⟩ / (8π m²) × dN/dE × J</a:t>
-            </a:r>
-          </a:p>
-          <a:p>
-            <a:r>
-              <a:rPr sz="2400"/>
-              <a:t>J ファクター = 暗黒物質の密度の 2 乗を、視線方向に足し合わせた量</a:t>
-            </a:r>
-          </a:p>
-          <a:p>
-            <a:r>
-              <a:rPr sz="2400"/>
-              <a:t>天の川と矮小銀河で粒子は同じ → 比をとると J の比だけが残る</a:t>
+              <a:rPr sz="2200"/>
+              <a:t>各天体の尤度 = 光子のポアソン尤度 × J の尤度</a:t>
             </a:r>
           </a:p>
           <a:p>
             <a:pPr lvl="1"/>
             <a:r>
-              <a:rPr sz="2000"/>
-              <a:t>F_矮小 = F_天の川 × J_矮小 / J_天の川</a:t>
-            </a:r>
-          </a:p>
-          <a:p>
-            <a:r>
-              <a:rPr sz="2400"/>
-              <a:t>粒子の質量などを仮定せずに「何σ見えるはずか」が出る</a:t>
-            </a:r>
-          </a:p>
-          <a:p>
-            <a:r>
-              <a:rPr sz="2400"/>
-              <a:t>矮小銀河の J は、星の動きから推定する</a:t>
+              <a:rPr sz="1800"/>
+              <a:t>L_J ∝ exp[ −(log₁₀J − log₁₀J_obs)² / 2σ_L² ]</a:t>
+            </a:r>
+          </a:p>
+          <a:p>
+            <a:r>
+              <a:rPr sz="2200"/>
+              <a:t>27 個は尤度の積でまとめる（⟨σv⟩ は共通、J は天体ごと）</a:t>
+            </a:r>
+          </a:p>
+          <a:p>
+            <a:r>
+              <a:rPr sz="2200"/>
+              <a:t>2 つの誤差を分けて動かす</a:t>
+            </a:r>
+          </a:p>
+          <a:p>
+            <a:pPr lvl="1"/>
+            <a:r>
+              <a:rPr sz="1800"/>
+              <a:t>σ：J の本当のばらつき（J_obs を J_true のまわりに σ でばらつかせる）</a:t>
+            </a:r>
+          </a:p>
+          <a:p>
+            <a:pPr lvl="1"/>
+            <a:r>
+              <a:rPr sz="1800"/>
+              <a:t>σ_L：解析で仮定する幅</a:t>
+            </a:r>
+          </a:p>
+          <a:p>
+            <a:r>
+              <a:rPr sz="2200"/>
+              <a:t>95% 上限：TS が最大値から 2.71 下がる点（Wilks の定理を仮定）</a:t>
             </a:r>
           </a:p>
         </p:txBody>
@@ -12141,7 +11696,7 @@
             </a:r>
             <a:r>
               <a:rPr lang="en-US" sz="1400"/>
-              <a:t> A. B. Pace &amp; L. E. Strigari (2019), MNRAS 482, 3480</a:t>
+              <a:t> Bertólez-Martínez, Hooper &amp; Khatee Zathul (2026), arXiv:2609.20944 式 (6)–(10)</a:t>
             </a:r>
             <a:endParaRPr lang="en-US"/>
           </a:p>
@@ -12189,45 +11744,86 @@
           <a:p>
             <a:r>
               <a:rPr sz="3400"/>
-              <a:t>結果：どこにも信号は見えなかった</a:t>
-            </a:r>
-          </a:p>
-        </p:txBody>
-      </p:sp>
-      <p:pic>
-        <p:nvPicPr>
-          <p:cNvPr id="3" name="Picture 2" descr="fig_dwarf_results.png"/>
-          <p:cNvPicPr>
-            <a:picLocks noChangeAspect="1"/>
-          </p:cNvPicPr>
-          <p:nvPr/>
-        </p:nvPicPr>
-        <p:blipFill>
-          <a:blip r:embed="rId3"/>
-          <a:stretch>
-            <a:fillRect/>
-          </a:stretch>
-        </p:blipFill>
+              <a:t>詳細なmethodについて③：何を数えたか</a:t>
+            </a:r>
+          </a:p>
+        </p:txBody>
+      </p:sp>
+      <p:sp>
+        <p:nvSpPr>
+          <p:cNvPr id="3" name="Content Placeholder 2"/>
+          <p:cNvSpPr>
+            <a:spLocks noGrp="1"/>
+          </p:cNvSpPr>
+          <p:nvPr>
+            <p:ph idx="1"/>
+          </p:nvPr>
+        </p:nvSpPr>
         <p:spPr>
           <a:xfrm>
-            <a:off x="2194560" y="1234440"/>
-            <a:ext cx="7156174" cy="4114800"/>
+            <a:off x="841248" y="1463040"/>
+            <a:ext cx="10515600" cy="4114800"/>
           </a:xfrm>
-          <a:prstGeom prst="rect">
-            <a:avLst/>
-          </a:prstGeom>
         </p:spPr>
-      </p:pic>
-      <p:sp>
-        <p:nvSpPr>
-          <p:cNvPr id="4" name="TextBox 3"/>
+        <p:txBody>
+          <a:bodyPr/>
+          <a:lstStyle/>
+          <a:p>
+            <a:r>
+              <a:rPr sz="2400"/>
+              <a:t>本物の信号を入れた仮想データを何度も作る</a:t>
+            </a:r>
+          </a:p>
+          <a:p>
+            <a:pPr lvl="1"/>
+            <a:r>
+              <a:rPr sz="2000"/>
+              <a:t>Ursa Minor で 1000 回（基準の設定では 1 万回）</a:t>
+            </a:r>
+          </a:p>
+          <a:p>
+            <a:r>
+              <a:rPr sz="2400"/>
+              <a:t>それぞれで 95% 上限を出す</a:t>
+            </a:r>
+          </a:p>
+          <a:p>
+            <a:r>
+              <a:rPr sz="2400"/>
+              <a:t>上限が本物の ⟨σv⟩ より下 =「本物を無いと間違えた」</a:t>
+            </a:r>
+          </a:p>
+          <a:p>
+            <a:r>
+              <a:rPr sz="2400"/>
+              <a:t>95% 上限なら、間違いは 5% 以下のはず</a:t>
+            </a:r>
+          </a:p>
+          <a:p>
+            <a:pPr lvl="1"/>
+            <a:r>
+              <a:rPr sz="2000"/>
+              <a:t>これが守られているか（カバレッジ）を調べる</a:t>
+            </a:r>
+          </a:p>
+        </p:txBody>
+      </p:sp>
+      <p:sp>
+        <p:nvSpPr>
+          <p:cNvPr id="8" name="TextBox 7">
+            <a:extLst>
+              <a:ext uri="{FF2B5EF4-FFF2-40B4-BE49-F238E27FC236}">
+                <a16:creationId xmlns:a16="http://schemas.microsoft.com/office/drawing/2014/main" id="{F85CD606-E3CE-F314-B3EE-F3D7028115CB}"/>
+              </a:ext>
+            </a:extLst>
+          </p:cNvPr>
           <p:cNvSpPr txBox="1"/>
           <p:nvPr/>
         </p:nvSpPr>
         <p:spPr>
           <a:xfrm>
-            <a:off x="457200" y="5486400"/>
-            <a:ext cx="11247120" cy="457200"/>
+            <a:off x="5837182" y="5663239"/>
+            <a:ext cx="6093372" cy="923330"/>
           </a:xfrm>
           <a:prstGeom prst="rect">
             <a:avLst/>
@@ -12241,9 +11837,14 @@
           <a:lstStyle/>
           <a:p>
             <a:r>
-              <a:rPr sz="2000"/>
-              <a:t>どの天体・どのエネルギーでも最大 +3.46σ（何も無い空でも 4.50σ）</a:t>
-            </a:r>
+              <a:rPr lang="en-US" sz="1400" b="1"/>
+              <a:t>Reference:</a:t>
+            </a:r>
+            <a:r>
+              <a:rPr lang="en-US" sz="1400"/>
+              <a:t> Bertólez-Martínez, Hooper &amp; Khatee Zathul (2026), arXiv:2609.20944 §IV</a:t>
+            </a:r>
+            <a:endParaRPr lang="en-US"/>
           </a:p>
         </p:txBody>
       </p:sp>
@@ -12289,7 +11890,7 @@
           <a:p>
             <a:r>
               <a:rPr sz="3400"/>
-              <a:t>天体をまとめて比べる</a:t>
+              <a:t>論文の結果①：Ursa Minor 1 個</a:t>
             </a:r>
           </a:p>
         </p:txBody>
@@ -12307,7 +11908,7 @@
         <p:spPr>
           <a:xfrm>
             <a:off x="841248" y="1463040"/>
-            <a:ext cx="10515600" cy="4937760"/>
+            <a:ext cx="10515600" cy="4114800"/>
           </a:xfrm>
         </p:spPr>
         <p:txBody>
@@ -12316,45 +11917,88 @@
           <a:p>
             <a:r>
               <a:rPr sz="2400"/>
-              <a:t>1 個ずつでは弱いので、J が求まる 43 天体をまとめる</a:t>
+              <a:t>σ_L を 0.3 / 0.5 / 1.0 だけ大きくすると</a:t>
+            </a:r>
+          </a:p>
+          <a:p>
+            <a:pPr lvl="1"/>
+            <a:r>
+              <a:rPr sz="2000"/>
+              <a:t>上限が 1.5 / 2.5 / 11 倍ゆるくなる</a:t>
             </a:r>
           </a:p>
           <a:p>
             <a:r>
               <a:rPr sz="2400"/>
-              <a:t>T = Σ w_i z_i / √( Σ w_i² )、重み w_i = 天体 i の予測 σ</a:t>
+              <a:t>本当の誤差 σ だけ大きく、σ_L は小さいままだと</a:t>
             </a:r>
           </a:p>
           <a:p>
             <a:pPr lvl="1"/>
             <a:r>
               <a:rPr sz="2000"/>
-              <a:t>z_i：天体 i の実測の σ（20 GeV）</a:t>
+              <a:t>本物を除外する割合 1.7% / 8.0% / 22%</a:t>
+            </a:r>
+          </a:p>
+          <a:p>
+            <a:pPr lvl="1"/>
+            <a:r>
+              <a:rPr sz="2000"/>
+              <a:t>σ_L を σ に合わせれば 5% 以下に戻る</a:t>
             </a:r>
           </a:p>
           <a:p>
             <a:r>
               <a:rPr sz="2400"/>
-              <a:t>暗黒物質が無ければ：T は平均 0、ばらつき 1</a:t>
-            </a:r>
-          </a:p>
-          <a:p>
-            <a:r>
-              <a:rPr sz="2400"/>
-              <a:t>暗黒物質があれば：T の平均 = √( Σ pred_i² ) = 1.77</a:t>
-            </a:r>
-          </a:p>
-          <a:p>
-            <a:r>
-              <a:rPr sz="2400"/>
-              <a:t>実測 T = 0.39 → ずれ 1.4σ</a:t>
-            </a:r>
-          </a:p>
-          <a:p>
-            <a:r>
-              <a:rPr sz="2400"/>
-              <a:t>ただし、ここでは J に誤差は無いとしていた</a:t>
-            </a:r>
+              <a:t>形の間違い：球対称 NFW で解析 → 上限 2.4 倍厳しく</a:t>
+            </a:r>
+          </a:p>
+          <a:p>
+            <a:pPr lvl="1"/>
+            <a:r>
+              <a:rPr sz="2000"/>
+              <a:t>点として扱う → 1.4 倍厳しく</a:t>
+            </a:r>
+          </a:p>
+        </p:txBody>
+      </p:sp>
+      <p:sp>
+        <p:nvSpPr>
+          <p:cNvPr id="8" name="TextBox 7">
+            <a:extLst>
+              <a:ext uri="{FF2B5EF4-FFF2-40B4-BE49-F238E27FC236}">
+                <a16:creationId xmlns:a16="http://schemas.microsoft.com/office/drawing/2014/main" id="{F85CD606-E3CE-F314-B3EE-F3D7028115CB}"/>
+              </a:ext>
+            </a:extLst>
+          </p:cNvPr>
+          <p:cNvSpPr txBox="1"/>
+          <p:nvPr/>
+        </p:nvSpPr>
+        <p:spPr>
+          <a:xfrm>
+            <a:off x="5837182" y="5663239"/>
+            <a:ext cx="6093372" cy="923330"/>
+          </a:xfrm>
+          <a:prstGeom prst="rect">
+            <a:avLst/>
+          </a:prstGeom>
+          <a:noFill/>
+        </p:spPr>
+        <p:txBody>
+          <a:bodyPr wrap="square">
+            <a:spAutoFit/>
+          </a:bodyPr>
+          <a:lstStyle/>
+          <a:p>
+            <a:r>
+              <a:rPr lang="en-US" sz="1400" b="1"/>
+              <a:t>Reference:</a:t>
+            </a:r>
+            <a:r>
+              <a:rPr lang="en-US" sz="1400"/>
+              <a:t> Bertólez-Martínez, Hooper &amp; Khatee Zathul (2026), arXiv:2609.20944 §IV, Fig. 2–4</a:t>
+            </a:r>
+            <a:endParaRPr lang="en-US"/>
           </a:p>
         </p:txBody>
       </p:sp>
@@ -12400,7 +12044,7 @@
           <a:p>
             <a:r>
               <a:rPr sz="3400"/>
-              <a:t>ここで論文：J の誤差は小さく見積もられている</a:t>
+              <a:t>論文の結果②：27 個をまとめると</a:t>
             </a:r>
           </a:p>
         </p:txBody>
@@ -12426,41 +12070,46 @@
           <a:lstStyle/>
           <a:p>
             <a:r>
-              <a:rPr sz="2400"/>
-              <a:t>文献ごとの J の値は、書かれた誤差よりも大きくばらつく</a:t>
-            </a:r>
-          </a:p>
-          <a:p>
-            <a:r>
-              <a:rPr sz="2400"/>
-              <a:t>見落とされがちな誤差の原因（8 つ）</a:t>
+              <a:rPr sz="2200"/>
+              <a:t>σ_L を 0.3 / 0.5 / 1.0 → 上限 1.14 / 1.44 / 3.23 倍ゆるく</a:t>
+            </a:r>
+          </a:p>
+          <a:p>
+            <a:r>
+              <a:rPr sz="2200"/>
+              <a:t>誤差を正しく入れても、本物を除外する割合 21%（5% のはず）</a:t>
             </a:r>
           </a:p>
           <a:p>
             <a:pPr lvl="1"/>
             <a:r>
-              <a:rPr sz="2000"/>
-              <a:t>点として扱う・ハローの形・星の分布の形の仮定</a:t>
+              <a:rPr sz="1800"/>
+              <a:t>J の数が天体の数と一緒に増え、Wilks の定理の前提が崩れる</a:t>
+            </a:r>
+          </a:p>
+          <a:p>
+            <a:r>
+              <a:rPr sz="2200"/>
+              <a:t>本当の誤差を 0.3 / 0.5 / 1.0 大きくすると 31% / 49% / 88%</a:t>
             </a:r>
           </a:p>
           <a:p>
             <a:pPr lvl="1"/>
             <a:r>
-              <a:rPr sz="2000"/>
-              <a:t>非球対称（最大 0.4 dex）・非平衡（〜0.1）・連星（Ret II で〜0.3）</a:t>
-            </a:r>
-          </a:p>
-          <a:p>
-            <a:pPr lvl="1"/>
-            <a:r>
-              <a:rPr sz="2000"/>
-              <a:t>前景の星の混入・誤差の分布が正規分布でない</a:t>
-            </a:r>
-          </a:p>
-          <a:p>
-            <a:r>
-              <a:rPr sz="2400"/>
-              <a:t>Δlog₁₀J ≈ 0.5（約 3 倍）以上の誤差を見込むべき</a:t>
+              <a:rPr sz="1800"/>
+              <a:t>σ_L を合わせても 23% / 28% / 38%</a:t>
+            </a:r>
+          </a:p>
+          <a:p>
+            <a:r>
+              <a:rPr sz="2200"/>
+              <a:t>原因：J が上に振れた天体が、上限を決めてしまう</a:t>
+            </a:r>
+          </a:p>
+          <a:p>
+            <a:r>
+              <a:rPr sz="2200"/>
+              <a:t>対策の一つ：何も無い領域で較正する</a:t>
             </a:r>
           </a:p>
         </p:txBody>
@@ -12499,7 +12148,7 @@
             </a:r>
             <a:r>
               <a:rPr lang="en-US" sz="1400"/>
-              <a:t> Bertólez-Martínez, Hooper &amp; Khatee Zathul (2026), arXiv:2609.20944 §II</a:t>
+              <a:t> Bertólez-Martínez, Hooper &amp; Khatee Zathul (2026), arXiv:2609.20944 §V, Fig. 5–7</a:t>
             </a:r>
             <a:endParaRPr lang="en-US"/>
           </a:p>
@@ -12547,7 +12196,7 @@
           <a:p>
             <a:r>
               <a:rPr sz="3400"/>
-              <a:t>詳細なmethodについて①：仮想データの作り方</a:t>
+              <a:t>論文のまとめ</a:t>
             </a:r>
           </a:p>
         </p:txBody>
@@ -12573,47 +12222,20 @@
           <a:lstStyle/>
           <a:p>
             <a:r>
-              <a:rPr sz="2200"/>
-              <a:t>Fermi-LAT の観測を計算機の中で作る（FermiTools、fermipy）</a:t>
-            </a:r>
-          </a:p>
-          <a:p>
-            <a:pPr lvl="1"/>
-            <a:r>
-              <a:rPr sz="1800"/>
-              <a:t>17.4 年分、0.5 GeV〜1 TeV、10° × 10° の領域、0.08° の画素</a:t>
-            </a:r>
-          </a:p>
-          <a:p>
-            <a:r>
-              <a:rPr sz="2200"/>
-              <a:t>背景：銀河の拡散光＋等方の光から、ポアソン乱数で光子を作る</a:t>
-            </a:r>
-          </a:p>
-          <a:p>
-            <a:r>
-              <a:rPr sz="2200"/>
-              <a:t>暗黒物質の信号を入れる</a:t>
-            </a:r>
-          </a:p>
-          <a:p>
-            <a:pPr lvl="1"/>
-            <a:r>
-              <a:rPr sz="1800"/>
-              <a:t>質量 42 GeV、b クォーク対、⟨σv⟩ = 1.4 × 10⁻²⁶ cm³/s</a:t>
-            </a:r>
-          </a:p>
-          <a:p>
-            <a:pPr lvl="1"/>
-            <a:r>
-              <a:rPr sz="1800"/>
-              <a:t>銀河中心 GeV 超過（GCE）に合う値</a:t>
-            </a:r>
-          </a:p>
-          <a:p>
-            <a:r>
-              <a:rPr sz="2200"/>
-              <a:t>対象：Ursa Minor 1 個と、27 個の矮小銀河</a:t>
+              <a:rPr sz="2400"/>
+              <a:t>J の誤差や形を雑に扱うと、上限は厳しく出すぎ、本物の信号を除外しやすい</a:t>
+            </a:r>
+          </a:p>
+          <a:p>
+            <a:r>
+              <a:rPr sz="2400"/>
+              <a:t>「銀河中心と矮小銀河が矛盾する」とは、まだ言えない</a:t>
+            </a:r>
+          </a:p>
+          <a:p>
+            <a:r>
+              <a:rPr sz="2400"/>
+              <a:t>Δlog₁₀J ≈ 0.5 程度の誤差を見込むべき</a:t>
             </a:r>
           </a:p>
         </p:txBody>
@@ -12652,7 +12274,7 @@
             </a:r>
             <a:r>
               <a:rPr lang="en-US" sz="1400"/>
-              <a:t> Bertólez-Martínez, Hooper &amp; Khatee Zathul (2026), arXiv:2609.20944 §III</a:t>
+              <a:t> Bertólez-Martínez, Hooper &amp; Khatee Zathul (2026), arXiv:2609.20944 §VI</a:t>
             </a:r>
             <a:endParaRPr lang="en-US"/>
           </a:p>
@@ -12700,7 +12322,7 @@
           <a:p>
             <a:r>
               <a:rPr sz="3400"/>
-              <a:t>詳細なmethodについて②：尤度と 2 つの誤差</a:t>
+              <a:t>論文の考え方を、僕の結果に当てはめる</a:t>
             </a:r>
           </a:p>
         </p:txBody>
@@ -12726,47 +12348,40 @@
           <a:lstStyle/>
           <a:p>
             <a:r>
-              <a:rPr sz="2200"/>
-              <a:t>各天体の尤度 = 光子のポアソン尤度 × J の尤度</a:t>
+              <a:rPr sz="2400"/>
+              <a:t>これまで：J の誤差 = 0（J は推定値そのまま）</a:t>
+            </a:r>
+          </a:p>
+          <a:p>
+            <a:r>
+              <a:rPr sz="2400"/>
+              <a:t>今回：各天体の本当の J = 推定値 × 10^δ_i</a:t>
             </a:r>
           </a:p>
           <a:p>
             <a:pPr lvl="1"/>
             <a:r>
-              <a:rPr sz="1800"/>
-              <a:t>L_J ∝ exp[ −(log₁₀J − log₁₀J_obs)² / 2σ_L² ]</a:t>
-            </a:r>
-          </a:p>
-          <a:p>
-            <a:r>
-              <a:rPr sz="2200"/>
-              <a:t>27 個は尤度の積でまとめる（⟨σv⟩ は共通、J は天体ごと）</a:t>
-            </a:r>
-          </a:p>
-          <a:p>
-            <a:r>
-              <a:rPr sz="2200"/>
-              <a:t>2 つの誤差を分けて動かす</a:t>
+              <a:rPr sz="2000"/>
+              <a:t>δ_i は平均 0、幅 0.5 の正規分布（天体ごとに独立）</a:t>
             </a:r>
           </a:p>
           <a:p>
             <a:pPr lvl="1"/>
             <a:r>
-              <a:rPr sz="1800"/>
-              <a:t>σ：J の本当のばらつき（J_obs を J_true のまわりに σ でばらつかせる）</a:t>
-            </a:r>
-          </a:p>
-          <a:p>
-            <a:pPr lvl="1"/>
-            <a:r>
-              <a:rPr sz="1800"/>
-              <a:t>σ_L：解析で仮定する幅</a:t>
-            </a:r>
-          </a:p>
-          <a:p>
-            <a:r>
-              <a:rPr sz="2200"/>
-              <a:t>95% 上限：TS が最大値から 2.71 下がる点（Wilks の定理を仮定）</a:t>
+              <a:rPr sz="2000"/>
+              <a:t>→ J がおよそ 1/3 倍〜3 倍の範囲でずれる</a:t>
+            </a:r>
+          </a:p>
+          <a:p>
+            <a:r>
+              <a:rPr sz="2400"/>
+              <a:t>予測 σ は J に比例 → pred_i × 10^δ_i</a:t>
+            </a:r>
+          </a:p>
+          <a:p>
+            <a:r>
+              <a:rPr sz="2400"/>
+              <a:t>論文と同じく「J をずらした世界」をたくさん作る（20 万回）</a:t>
             </a:r>
           </a:p>
         </p:txBody>
@@ -12805,7 +12420,7 @@
             </a:r>
             <a:r>
               <a:rPr lang="en-US" sz="1400"/>
-              <a:t> Bertólez-Martínez, Hooper &amp; Khatee Zathul (2026), arXiv:2609.20944 式 (6)–(10)</a:t>
+              <a:t> Bertólez-Martínez, Hooper &amp; Khatee Zathul (2026), arXiv:2609.20944 §IV</a:t>
             </a:r>
             <a:endParaRPr lang="en-US"/>
           </a:p>
@@ -13019,7 +12634,7 @@
           <a:p>
             <a:r>
               <a:rPr sz="3400"/>
-              <a:t>詳細なmethodについて③：何を数えたか</a:t>
+              <a:t>有意度の計算式のどこに誤差が入るか</a:t>
             </a:r>
           </a:p>
         </p:txBody>
@@ -13037,7 +12652,7 @@
         <p:spPr>
           <a:xfrm>
             <a:off x="841248" y="1463040"/>
-            <a:ext cx="10515600" cy="4114800"/>
+            <a:ext cx="10515600" cy="4937760"/>
           </a:xfrm>
         </p:spPr>
         <p:txBody>
@@ -13046,80 +12661,47 @@
           <a:p>
             <a:r>
               <a:rPr sz="2400"/>
-              <a:t>本物の信号を入れた仮想データを何度も作る</a:t>
+              <a:t>暗黒物質ありで期待される T</a:t>
             </a:r>
           </a:p>
           <a:p>
             <a:pPr lvl="1"/>
             <a:r>
               <a:rPr sz="2000"/>
-              <a:t>Ursa Minor で 1000 回（基準の設定では 1 万回）</a:t>
+              <a:t>誤差なし：E[T] = Σ w_i pred_i / √Σ w_i² = 1.77</a:t>
+            </a:r>
+          </a:p>
+          <a:p>
+            <a:pPr lvl="1"/>
+            <a:r>
+              <a:rPr sz="2000"/>
+              <a:t>誤差あり：E[T] = Σ w_i pred_i 10^δ_i / √Σ w_i²  ← δ でばらつく</a:t>
             </a:r>
           </a:p>
           <a:p>
             <a:r>
               <a:rPr sz="2400"/>
-              <a:t>それぞれで 95% 上限を出す</a:t>
+              <a:t>実測 T にも測定の揺れ s がある（s = 1、または空で測った 1.26）</a:t>
             </a:r>
           </a:p>
           <a:p>
             <a:r>
               <a:rPr sz="2400"/>
-              <a:t>上限が本物の ⟨σv⟩ より下 =「本物を無いと間違えた」</a:t>
+              <a:t>暗黒物質ありで、実測 0.39 以下になる確率</a:t>
+            </a:r>
+          </a:p>
+          <a:p>
+            <a:pPr lvl="1"/>
+            <a:r>
+              <a:rPr sz="2000"/>
+              <a:t>p = （δ について平均）Φ( (0.39 − E[T]) / s )</a:t>
             </a:r>
           </a:p>
           <a:p>
             <a:r>
               <a:rPr sz="2400"/>
-              <a:t>95% 上限なら、間違いは 5% 以下のはず</a:t>
-            </a:r>
-          </a:p>
-          <a:p>
-            <a:pPr lvl="1"/>
-            <a:r>
-              <a:rPr sz="2000"/>
-              <a:t>これが守られているか（カバレッジ）を調べる</a:t>
-            </a:r>
-          </a:p>
-        </p:txBody>
-      </p:sp>
-      <p:sp>
-        <p:nvSpPr>
-          <p:cNvPr id="8" name="TextBox 7">
-            <a:extLst>
-              <a:ext uri="{FF2B5EF4-FFF2-40B4-BE49-F238E27FC236}">
-                <a16:creationId xmlns:a16="http://schemas.microsoft.com/office/drawing/2014/main" id="{F85CD606-E3CE-F314-B3EE-F3D7028115CB}"/>
-              </a:ext>
-            </a:extLst>
-          </p:cNvPr>
-          <p:cNvSpPr txBox="1"/>
-          <p:nvPr/>
-        </p:nvSpPr>
-        <p:spPr>
-          <a:xfrm>
-            <a:off x="5837182" y="5663239"/>
-            <a:ext cx="6093372" cy="923330"/>
-          </a:xfrm>
-          <a:prstGeom prst="rect">
-            <a:avLst/>
-          </a:prstGeom>
-          <a:noFill/>
-        </p:spPr>
-        <p:txBody>
-          <a:bodyPr wrap="square">
-            <a:spAutoFit/>
-          </a:bodyPr>
-          <a:lstStyle/>
-          <a:p>
-            <a:r>
-              <a:rPr lang="en-US" sz="1400" b="1"/>
-              <a:t>Reference:</a:t>
-            </a:r>
-            <a:r>
-              <a:rPr lang="en-US" sz="1400"/>
-              <a:t> Bertólez-Martínez, Hooper &amp; Khatee Zathul (2026), arXiv:2609.20944 §IV</a:t>
-            </a:r>
-            <a:endParaRPr lang="en-US"/>
+              <a:t>p を σ に直したもの =「ずれ」</a:t>
+            </a:r>
           </a:p>
         </p:txBody>
       </p:sp>
@@ -13165,94 +12747,46 @@
           <a:p>
             <a:r>
               <a:rPr sz="3400"/>
-              <a:t>論文の結果①：Ursa Minor 1 個</a:t>
-            </a:r>
-          </a:p>
-        </p:txBody>
-      </p:sp>
-      <p:sp>
-        <p:nvSpPr>
-          <p:cNvPr id="3" name="Content Placeholder 2"/>
-          <p:cNvSpPr>
-            <a:spLocks noGrp="1"/>
-          </p:cNvSpPr>
-          <p:nvPr>
-            <p:ph idx="1"/>
-          </p:nvPr>
-        </p:nvSpPr>
+              <a:t>結果：予測の幅と実測</a:t>
+            </a:r>
+          </a:p>
+        </p:txBody>
+      </p:sp>
+      <p:pic>
+        <p:nvPicPr>
+          <p:cNvPr id="5" name="Picture 4" descr="fig_dwarf_J_uncertainty_totani.png"/>
+          <p:cNvPicPr>
+            <a:picLocks noChangeAspect="1"/>
+          </p:cNvPicPr>
+          <p:nvPr/>
+        </p:nvPicPr>
+        <p:blipFill>
+          <a:blip r:embed="rId3"/>
+          <a:srcRect/>
+          <a:stretch>
+            <a:fillRect/>
+          </a:stretch>
+        </p:blipFill>
         <p:spPr>
           <a:xfrm>
-            <a:off x="841248" y="1463040"/>
-            <a:ext cx="10515600" cy="4114800"/>
+            <a:off x="2194560" y="1234440"/>
+            <a:ext cx="6858000" cy="4114800"/>
           </a:xfrm>
+          <a:prstGeom prst="rect">
+            <a:avLst/>
+          </a:prstGeom>
         </p:spPr>
-        <p:txBody>
-          <a:bodyPr/>
-          <a:lstStyle/>
-          <a:p>
-            <a:r>
-              <a:rPr sz="2400"/>
-              <a:t>σ_L を 0.3 / 0.5 / 1.0 だけ大きくすると</a:t>
-            </a:r>
-          </a:p>
-          <a:p>
-            <a:pPr lvl="1"/>
-            <a:r>
-              <a:rPr sz="2000"/>
-              <a:t>上限が 1.5 / 2.5 / 11 倍ゆるくなる</a:t>
-            </a:r>
-          </a:p>
-          <a:p>
-            <a:r>
-              <a:rPr sz="2400"/>
-              <a:t>本当の誤差 σ だけ大きく、σ_L は小さいままだと</a:t>
-            </a:r>
-          </a:p>
-          <a:p>
-            <a:pPr lvl="1"/>
-            <a:r>
-              <a:rPr sz="2000"/>
-              <a:t>本物を除外する割合 1.7% / 8.0% / 22%</a:t>
-            </a:r>
-          </a:p>
-          <a:p>
-            <a:pPr lvl="1"/>
-            <a:r>
-              <a:rPr sz="2000"/>
-              <a:t>σ_L を σ に合わせれば 5% 以下に戻る</a:t>
-            </a:r>
-          </a:p>
-          <a:p>
-            <a:r>
-              <a:rPr sz="2400"/>
-              <a:t>形の間違い：球対称 NFW で解析 → 上限 2.4 倍厳しく</a:t>
-            </a:r>
-          </a:p>
-          <a:p>
-            <a:pPr lvl="1"/>
-            <a:r>
-              <a:rPr sz="2000"/>
-              <a:t>点として扱う → 1.4 倍厳しく</a:t>
-            </a:r>
-          </a:p>
-        </p:txBody>
-      </p:sp>
-      <p:sp>
-        <p:nvSpPr>
-          <p:cNvPr id="8" name="TextBox 7">
-            <a:extLst>
-              <a:ext uri="{FF2B5EF4-FFF2-40B4-BE49-F238E27FC236}">
-                <a16:creationId xmlns:a16="http://schemas.microsoft.com/office/drawing/2014/main" id="{F85CD606-E3CE-F314-B3EE-F3D7028115CB}"/>
-              </a:ext>
-            </a:extLst>
-          </p:cNvPr>
+      </p:pic>
+      <p:sp>
+        <p:nvSpPr>
+          <p:cNvPr id="4" name="TextBox 3"/>
           <p:cNvSpPr txBox="1"/>
           <p:nvPr/>
         </p:nvSpPr>
         <p:spPr>
           <a:xfrm>
-            <a:off x="5837182" y="5663239"/>
-            <a:ext cx="6093372" cy="923330"/>
+            <a:off x="457200" y="5486400"/>
+            <a:ext cx="11247120" cy="457200"/>
           </a:xfrm>
           <a:prstGeom prst="rect">
             <a:avLst/>
@@ -13266,14 +12800,9 @@
           <a:lstStyle/>
           <a:p>
             <a:r>
-              <a:rPr lang="en-US" sz="1400" b="1"/>
-              <a:t>Reference:</a:t>
-            </a:r>
-            <a:r>
-              <a:rPr lang="en-US" sz="1400"/>
-              <a:t> Bertólez-Martínez, Hooper &amp; Khatee Zathul (2026), arXiv:2609.20944 §IV, Fig. 2–4</a:t>
-            </a:r>
-            <a:endParaRPr lang="en-US"/>
+              <a:rPr sz="2000"/>
+              <a:t>期待 1.8σ → J の誤差で 1.4〜5.1σ に広がる。実測 0.4σ ± 1.26。ずれ 1.3σ</a:t>
+            </a:r>
           </a:p>
         </p:txBody>
       </p:sp>
@@ -13319,7 +12848,7 @@
           <a:p>
             <a:r>
               <a:rPr sz="3400"/>
-              <a:t>論文の結果②：27 個をまとめると</a:t>
+              <a:t>結果の数字</a:t>
             </a:r>
           </a:p>
         </p:txBody>
@@ -13337,7 +12866,7 @@
         <p:spPr>
           <a:xfrm>
             <a:off x="841248" y="1463040"/>
-            <a:ext cx="10515600" cy="4114800"/>
+            <a:ext cx="10515600" cy="4937760"/>
           </a:xfrm>
         </p:spPr>
         <p:txBody>
@@ -13345,87 +12874,42 @@
           <a:lstStyle/>
           <a:p>
             <a:r>
-              <a:rPr sz="2200"/>
-              <a:t>σ_L を 0.3 / 0.5 / 1.0 → 上限 1.14 / 1.44 / 3.23 倍ゆるく</a:t>
-            </a:r>
-          </a:p>
-          <a:p>
-            <a:r>
-              <a:rPr sz="2200"/>
-              <a:t>誤差を正しく入れても、本物を除外する割合 21%（5% のはず）</a:t>
+              <a:rPr sz="2400"/>
+              <a:t>局所密度 0.42 GeV/cm³ の場合（43 天体、20 GeV）</a:t>
             </a:r>
           </a:p>
           <a:p>
             <a:pPr lvl="1"/>
             <a:r>
-              <a:rPr sz="1800"/>
-              <a:t>J の数が天体の数と一緒に増え、Wilks の定理の前提が崩れる</a:t>
-            </a:r>
-          </a:p>
-          <a:p>
-            <a:r>
-              <a:rPr sz="2200"/>
-              <a:t>本当の誤差を 0.3 / 0.5 / 1.0 大きくすると 31% / 49% / 88%</a:t>
+              <a:rPr sz="2000"/>
+              <a:t>J の誤差なし：期待 1.77、ずれ 1.4σ（s = 1.26 なら 1.1σ）</a:t>
             </a:r>
           </a:p>
           <a:p>
             <a:pPr lvl="1"/>
             <a:r>
-              <a:rPr sz="1800"/>
-              <a:t>σ_L を合わせても 23% / 28% / 38%</a:t>
-            </a:r>
-          </a:p>
-          <a:p>
-            <a:r>
-              <a:rPr sz="2200"/>
-              <a:t>原因：J が上に振れた天体が、上限を決めてしまう</a:t>
-            </a:r>
-          </a:p>
-          <a:p>
-            <a:r>
-              <a:rPr sz="2200"/>
-              <a:t>対策の一つ：何も無い領域で較正する</a:t>
-            </a:r>
-          </a:p>
-        </p:txBody>
-      </p:sp>
-      <p:sp>
-        <p:nvSpPr>
-          <p:cNvPr id="8" name="TextBox 7">
-            <a:extLst>
-              <a:ext uri="{FF2B5EF4-FFF2-40B4-BE49-F238E27FC236}">
-                <a16:creationId xmlns:a16="http://schemas.microsoft.com/office/drawing/2014/main" id="{F85CD606-E3CE-F314-B3EE-F3D7028115CB}"/>
-              </a:ext>
-            </a:extLst>
-          </p:cNvPr>
-          <p:cNvSpPr txBox="1"/>
-          <p:nvPr/>
-        </p:nvSpPr>
-        <p:spPr>
-          <a:xfrm>
-            <a:off x="5837182" y="5663239"/>
-            <a:ext cx="6093372" cy="923330"/>
-          </a:xfrm>
-          <a:prstGeom prst="rect">
-            <a:avLst/>
-          </a:prstGeom>
-          <a:noFill/>
-        </p:spPr>
-        <p:txBody>
-          <a:bodyPr wrap="square">
-            <a:spAutoFit/>
-          </a:bodyPr>
-          <a:lstStyle/>
-          <a:p>
-            <a:r>
-              <a:rPr lang="en-US" sz="1400" b="1"/>
-              <a:t>Reference:</a:t>
-            </a:r>
-            <a:r>
-              <a:rPr lang="en-US" sz="1400"/>
-              <a:t> Bertólez-Martínez, Hooper &amp; Khatee Zathul (2026), arXiv:2609.20944 §V, Fig. 5–7</a:t>
-            </a:r>
-            <a:endParaRPr lang="en-US"/>
+              <a:rPr sz="2000"/>
+              <a:t>J の誤差あり：期待 2.5（68% で 1.4–5.1）、ずれ 1.5σ（1.3σ）</a:t>
+            </a:r>
+          </a:p>
+          <a:p>
+            <a:r>
+              <a:rPr sz="2400"/>
+              <a:t>天の川側の局所密度を 0.3〜0.6 GeV/cm³ で動かしても</a:t>
+            </a:r>
+          </a:p>
+          <a:p>
+            <a:pPr lvl="1"/>
+            <a:r>
+              <a:rPr sz="2000"/>
+              <a:t>ずれは較正後 2.4σ 以下</a:t>
+            </a:r>
+          </a:p>
+          <a:p>
+            <a:r>
+              <a:rPr sz="2400"/>
+              <a:t>→ 暗黒物質と矛盾はしないが、確認もできない（判定できない）</a:t>
+            </a:r>
           </a:p>
         </p:txBody>
       </p:sp>
@@ -13471,7 +12955,7 @@
           <a:p>
             <a:r>
               <a:rPr sz="3400"/>
-              <a:t>論文のまとめ</a:t>
+              <a:t>2 つの数字の違い：15σ と 1.3σ</a:t>
             </a:r>
           </a:p>
         </p:txBody>
@@ -13489,7 +12973,7 @@
         <p:spPr>
           <a:xfrm>
             <a:off x="841248" y="1463040"/>
-            <a:ext cx="10515600" cy="4114800"/>
+            <a:ext cx="10515600" cy="4937760"/>
           </a:xfrm>
         </p:spPr>
         <p:txBody>
@@ -13498,60 +12982,41 @@
           <a:p>
             <a:r>
               <a:rPr sz="2400"/>
-              <a:t>J の誤差や形を雑に扱うと、上限は厳しく出すぎ、本物の信号を除外しやすい</a:t>
+              <a:t>約 15σ：天の川のハロー超過の強さ</a:t>
+            </a:r>
+          </a:p>
+          <a:p>
+            <a:pPr lvl="1"/>
+            <a:r>
+              <a:rPr sz="2000"/>
+              <a:t>19.0σ を、何も無い空でのばらつき 1.26 で割ったもの</a:t>
+            </a:r>
+          </a:p>
+          <a:p>
+            <a:pPr lvl="1"/>
+            <a:r>
+              <a:rPr sz="2000"/>
+              <a:t>「天の川に、背景では説明しにくい何かがある」</a:t>
             </a:r>
           </a:p>
           <a:p>
             <a:r>
               <a:rPr sz="2400"/>
-              <a:t>「銀河中心と矮小銀河が矛盾する」とは、まだ言えない</a:t>
+              <a:t>1.3σ：矮小銀河での「予測と実測のずれ」</a:t>
+            </a:r>
+          </a:p>
+          <a:p>
+            <a:pPr lvl="1"/>
+            <a:r>
+              <a:rPr sz="2000"/>
+              <a:t>「天の川の超過が暗黒物質だとしても、矮小銀河の結果と矛盾しない」</a:t>
             </a:r>
           </a:p>
           <a:p>
             <a:r>
               <a:rPr sz="2400"/>
-              <a:t>Δlog₁₀J ≈ 0.5 程度の誤差を見込むべき</a:t>
-            </a:r>
-          </a:p>
-        </p:txBody>
-      </p:sp>
-      <p:sp>
-        <p:nvSpPr>
-          <p:cNvPr id="8" name="TextBox 7">
-            <a:extLst>
-              <a:ext uri="{FF2B5EF4-FFF2-40B4-BE49-F238E27FC236}">
-                <a16:creationId xmlns:a16="http://schemas.microsoft.com/office/drawing/2014/main" id="{F85CD606-E3CE-F314-B3EE-F3D7028115CB}"/>
-              </a:ext>
-            </a:extLst>
-          </p:cNvPr>
-          <p:cNvSpPr txBox="1"/>
-          <p:nvPr/>
-        </p:nvSpPr>
-        <p:spPr>
-          <a:xfrm>
-            <a:off x="5837182" y="5663239"/>
-            <a:ext cx="6093372" cy="923330"/>
-          </a:xfrm>
-          <a:prstGeom prst="rect">
-            <a:avLst/>
-          </a:prstGeom>
-          <a:noFill/>
-        </p:spPr>
-        <p:txBody>
-          <a:bodyPr wrap="square">
-            <a:spAutoFit/>
-          </a:bodyPr>
-          <a:lstStyle/>
-          <a:p>
-            <a:r>
-              <a:rPr lang="en-US" sz="1400" b="1"/>
-              <a:t>Reference:</a:t>
-            </a:r>
-            <a:r>
-              <a:rPr lang="en-US" sz="1400"/>
-              <a:t> Bertólez-Martínez, Hooper &amp; Khatee Zathul (2026), arXiv:2609.20944 §VI</a:t>
-            </a:r>
-            <a:endParaRPr lang="en-US"/>
+              <a:t>別のものを測った、別の数字</a:t>
+            </a:r>
           </a:p>
         </p:txBody>
       </p:sp>
@@ -13597,7 +13062,7 @@
           <a:p>
             <a:r>
               <a:rPr sz="3400"/>
-              <a:t>論文の考え方を、僕の結果に当てはめる</a:t>
+              <a:t>結論</a:t>
             </a:r>
           </a:p>
         </p:txBody>
@@ -13615,7 +13080,7 @@
         <p:spPr>
           <a:xfrm>
             <a:off x="841248" y="1463040"/>
-            <a:ext cx="10515600" cy="4114800"/>
+            <a:ext cx="10515600" cy="4937760"/>
           </a:xfrm>
         </p:spPr>
         <p:txBody>
@@ -13624,80 +13089,34 @@
           <a:p>
             <a:r>
               <a:rPr sz="2400"/>
-              <a:t>これまで：J の誤差 = 0（J は推定値そのまま）</a:t>
+              <a:t>Totani の超過を再現（名目 19.0σ、較正後 約 15σ）</a:t>
             </a:r>
           </a:p>
           <a:p>
             <a:r>
               <a:rPr sz="2400"/>
-              <a:t>今回：各天体の本当の J = 推定値 × 10^δ_i</a:t>
+              <a:t>ICS の明るさ・バブル・計算の近似の間違いでは説明できない</a:t>
             </a:r>
           </a:p>
           <a:p>
             <a:pPr lvl="1"/>
             <a:r>
               <a:rPr sz="2000"/>
-              <a:t>δ_i は平均 0、幅 0.5 の正規分布（天体ごとに独立）</a:t>
+              <a:t>暗黒物質の証拠ではない（ICS の空間の形は未確認）</a:t>
+            </a:r>
+          </a:p>
+          <a:p>
+            <a:r>
+              <a:rPr sz="2400"/>
+              <a:t>矮小銀河では非検出</a:t>
             </a:r>
           </a:p>
           <a:p>
             <a:pPr lvl="1"/>
             <a:r>
               <a:rPr sz="2000"/>
-              <a:t>→ J がおよそ 1/3 倍〜3 倍の範囲でずれる</a:t>
-            </a:r>
-          </a:p>
-          <a:p>
-            <a:r>
-              <a:rPr sz="2400"/>
-              <a:t>予測 σ は J に比例 → pred_i × 10^δ_i</a:t>
-            </a:r>
-          </a:p>
-          <a:p>
-            <a:r>
-              <a:rPr sz="2400"/>
-              <a:t>論文と同じく「J をずらした世界」をたくさん作る（20 万回）</a:t>
-            </a:r>
-          </a:p>
-        </p:txBody>
-      </p:sp>
-      <p:sp>
-        <p:nvSpPr>
-          <p:cNvPr id="8" name="TextBox 7">
-            <a:extLst>
-              <a:ext uri="{FF2B5EF4-FFF2-40B4-BE49-F238E27FC236}">
-                <a16:creationId xmlns:a16="http://schemas.microsoft.com/office/drawing/2014/main" id="{F85CD606-E3CE-F314-B3EE-F3D7028115CB}"/>
-              </a:ext>
-            </a:extLst>
-          </p:cNvPr>
-          <p:cNvSpPr txBox="1"/>
-          <p:nvPr/>
-        </p:nvSpPr>
-        <p:spPr>
-          <a:xfrm>
-            <a:off x="5837182" y="5663239"/>
-            <a:ext cx="6093372" cy="923330"/>
-          </a:xfrm>
-          <a:prstGeom prst="rect">
-            <a:avLst/>
-          </a:prstGeom>
-          <a:noFill/>
-        </p:spPr>
-        <p:txBody>
-          <a:bodyPr wrap="square">
-            <a:spAutoFit/>
-          </a:bodyPr>
-          <a:lstStyle/>
-          <a:p>
-            <a:r>
-              <a:rPr lang="en-US" sz="1400" b="1"/>
-              <a:t>Reference:</a:t>
-            </a:r>
-            <a:r>
-              <a:rPr lang="en-US" sz="1400"/>
-              <a:t> Bertólez-Martínez, Hooper &amp; Khatee Zathul (2026), arXiv:2609.20944 §IV</a:t>
-            </a:r>
-            <a:endParaRPr lang="en-US"/>
+              <a:t>J の誤差（約 3 倍）を入れると、予測とのずれは 1.3σ → 判定できない</a:t>
+            </a:r>
           </a:p>
         </p:txBody>
       </p:sp>
@@ -13743,7 +13162,7 @@
           <a:p>
             <a:r>
               <a:rPr sz="3400"/>
-              <a:t>有意度の計算式のどこに誤差が入るか</a:t>
+              <a:t>統計の視点から：この研究に足りなかったもの</a:t>
             </a:r>
           </a:p>
         </p:txBody>
@@ -13761,7 +13180,7 @@
         <p:spPr>
           <a:xfrm>
             <a:off x="841248" y="1463040"/>
-            <a:ext cx="10515600" cy="4937760"/>
+            <a:ext cx="10515600" cy="4114800"/>
           </a:xfrm>
         </p:spPr>
         <p:txBody>
@@ -13770,47 +13189,81 @@
           <a:p>
             <a:r>
               <a:rPr sz="2400"/>
-              <a:t>暗黒物質ありで期待される T</a:t>
+              <a:t>σ が 1.26 倍に膨らんだ原因</a:t>
             </a:r>
           </a:p>
           <a:p>
             <a:pPr lvl="1"/>
             <a:r>
               <a:rPr sz="2000"/>
-              <a:t>誤差なし：E[T] = Σ w_i pred_i / √Σ w_i² = 1.77</a:t>
+              <a:t>尤度は「型紙（GALPROP）は完璧、誤差は光子の数のばらつきだけ」と仮定</a:t>
             </a:r>
           </a:p>
           <a:p>
             <a:pPr lvl="1"/>
             <a:r>
               <a:rPr sz="2000"/>
-              <a:t>誤差あり：E[T] = Σ w_i pred_i 10^δ_i / √Σ w_i²  ← δ でばらつく</a:t>
+              <a:t>型紙そのものの誤差が、統計モデルに入っていない</a:t>
             </a:r>
           </a:p>
           <a:p>
             <a:r>
               <a:rPr sz="2400"/>
-              <a:t>実測 T にも測定の揺れ s がある（s = 1、または空で測った 1.26）</a:t>
+              <a:t>データ同化：シミュレーションの誤差と観測の誤差を分けて、統計モデルに入れる枠組み</a:t>
             </a:r>
           </a:p>
           <a:p>
             <a:r>
               <a:rPr sz="2400"/>
-              <a:t>暗黒物質ありで、実測 0.39 以下になる確率</a:t>
+              <a:t>J をずらして何度も計算したのも、分布をたくさんのサンプルで表すという同じ発想</a:t>
             </a:r>
           </a:p>
           <a:p>
             <a:pPr lvl="1"/>
             <a:r>
               <a:rPr sz="2000"/>
-              <a:t>p = （δ について平均）Φ( (0.39 − E[T]) / s )</a:t>
-            </a:r>
-          </a:p>
-          <a:p>
-            <a:r>
-              <a:rPr sz="2400"/>
-              <a:t>p を σ に直したもの =「ずれ」</a:t>
-            </a:r>
+              <a:t>（アンサンブル・粒子フィルタ）</a:t>
+            </a:r>
+          </a:p>
+        </p:txBody>
+      </p:sp>
+      <p:sp>
+        <p:nvSpPr>
+          <p:cNvPr id="8" name="TextBox 7">
+            <a:extLst>
+              <a:ext uri="{FF2B5EF4-FFF2-40B4-BE49-F238E27FC236}">
+                <a16:creationId xmlns:a16="http://schemas.microsoft.com/office/drawing/2014/main" id="{F85CD606-E3CE-F314-B3EE-F3D7028115CB}"/>
+              </a:ext>
+            </a:extLst>
+          </p:cNvPr>
+          <p:cNvSpPr txBox="1"/>
+          <p:nvPr/>
+        </p:nvSpPr>
+        <p:spPr>
+          <a:xfrm>
+            <a:off x="5837182" y="5663239"/>
+            <a:ext cx="6093372" cy="923330"/>
+          </a:xfrm>
+          <a:prstGeom prst="rect">
+            <a:avLst/>
+          </a:prstGeom>
+          <a:noFill/>
+        </p:spPr>
+        <p:txBody>
+          <a:bodyPr wrap="square">
+            <a:spAutoFit/>
+          </a:bodyPr>
+          <a:lstStyle/>
+          <a:p>
+            <a:r>
+              <a:rPr lang="en-US" sz="1400" b="1"/>
+              <a:t>Reference:</a:t>
+            </a:r>
+            <a:r>
+              <a:rPr lang="en-US" sz="1400"/>
+              <a:t> 中村和幸 (2017), 数理解析研究所講究録 2057, 59–66</a:t>
+            </a:r>
+            <a:endParaRPr lang="en-US"/>
           </a:p>
         </p:txBody>
       </p:sp>
@@ -13856,108 +13309,7 @@
           <a:p>
             <a:r>
               <a:rPr sz="3400"/>
-              <a:t>結果：予測の幅と実測</a:t>
-            </a:r>
-          </a:p>
-        </p:txBody>
-      </p:sp>
-      <p:pic>
-        <p:nvPicPr>
-          <p:cNvPr id="5" name="Picture 4" descr="fig_dwarf_J_uncertainty_totani.png"/>
-          <p:cNvPicPr>
-            <a:picLocks noChangeAspect="1"/>
-          </p:cNvPicPr>
-          <p:nvPr/>
-        </p:nvPicPr>
-        <p:blipFill>
-          <a:blip r:embed="rId3"/>
-          <a:srcRect/>
-          <a:stretch>
-            <a:fillRect/>
-          </a:stretch>
-        </p:blipFill>
-        <p:spPr>
-          <a:xfrm>
-            <a:off x="2194560" y="1234440"/>
-            <a:ext cx="6858000" cy="4114800"/>
-          </a:xfrm>
-          <a:prstGeom prst="rect">
-            <a:avLst/>
-          </a:prstGeom>
-        </p:spPr>
-      </p:pic>
-      <p:sp>
-        <p:nvSpPr>
-          <p:cNvPr id="4" name="TextBox 3"/>
-          <p:cNvSpPr txBox="1"/>
-          <p:nvPr/>
-        </p:nvSpPr>
-        <p:spPr>
-          <a:xfrm>
-            <a:off x="457200" y="5486400"/>
-            <a:ext cx="11247120" cy="457200"/>
-          </a:xfrm>
-          <a:prstGeom prst="rect">
-            <a:avLst/>
-          </a:prstGeom>
-          <a:noFill/>
-        </p:spPr>
-        <p:txBody>
-          <a:bodyPr wrap="square">
-            <a:spAutoFit/>
-          </a:bodyPr>
-          <a:lstStyle/>
-          <a:p>
-            <a:r>
-              <a:rPr sz="2000"/>
-              <a:t>期待 1.8σ → J の誤差で 1.4〜5.1σ に広がる。実測 0.4σ ± 1.26。ずれ 1.3σ</a:t>
-            </a:r>
-          </a:p>
-        </p:txBody>
-      </p:sp>
-    </p:spTree>
-  </p:cSld>
-  <p:clrMapOvr>
-    <a:masterClrMapping/>
-  </p:clrMapOvr>
-</p:sld>
-</file>
-
-<file path=ppt/slides/slide47.xml><?xml version="1.0" encoding="utf-8"?>
-<p:sld xmlns:a="http://schemas.openxmlformats.org/drawingml/2006/main" xmlns:r="http://schemas.openxmlformats.org/officeDocument/2006/relationships" xmlns:p="http://schemas.openxmlformats.org/presentationml/2006/main">
-  <p:cSld>
-    <p:spTree>
-      <p:nvGrpSpPr>
-        <p:cNvPr id="1" name=""/>
-        <p:cNvGrpSpPr/>
-        <p:nvPr/>
-      </p:nvGrpSpPr>
-      <p:grpSpPr>
-        <a:xfrm>
-          <a:off x="0" y="0"/>
-          <a:ext cx="0" cy="0"/>
-          <a:chOff x="0" y="0"/>
-          <a:chExt cx="0" cy="0"/>
-        </a:xfrm>
-      </p:grpSpPr>
-      <p:sp>
-        <p:nvSpPr>
-          <p:cNvPr id="2" name="Title 1"/>
-          <p:cNvSpPr>
-            <a:spLocks noGrp="1"/>
-          </p:cNvSpPr>
-          <p:nvPr>
-            <p:ph type="title"/>
-          </p:nvPr>
-        </p:nvSpPr>
-        <p:spPr/>
-        <p:txBody>
-          <a:bodyPr/>
-          <a:lstStyle/>
-          <a:p>
-            <a:r>
-              <a:rPr sz="3400"/>
-              <a:t>結果の数字</a:t>
+              <a:t>参考文献</a:t>
             </a:r>
           </a:p>
         </p:txBody>
@@ -13983,248 +13335,56 @@
           <a:lstStyle/>
           <a:p>
             <a:r>
-              <a:rPr sz="2400"/>
-              <a:t>局所密度 0.42 GeV/cm³ の場合（43 天体、20 GeV）</a:t>
-            </a:r>
-          </a:p>
-          <a:p>
-            <a:pPr lvl="1"/>
-            <a:r>
-              <a:rPr sz="2000"/>
-              <a:t>J の誤差なし：期待 1.77、ずれ 1.4σ（s = 1.26 なら 1.1σ）</a:t>
-            </a:r>
-          </a:p>
-          <a:p>
-            <a:pPr lvl="1"/>
-            <a:r>
-              <a:rPr sz="2000"/>
-              <a:t>J の誤差あり：期待 2.5（68% で 1.4–5.1）、ずれ 1.5σ（1.3σ）</a:t>
-            </a:r>
-          </a:p>
-          <a:p>
-            <a:r>
-              <a:rPr sz="2400"/>
-              <a:t>天の川側の局所密度を 0.3〜0.6 GeV/cm³ で動かしても</a:t>
-            </a:r>
-          </a:p>
-          <a:p>
-            <a:pPr lvl="1"/>
-            <a:r>
-              <a:rPr sz="2000"/>
-              <a:t>ずれは較正後 2.4σ 以下</a:t>
-            </a:r>
-          </a:p>
-          <a:p>
-            <a:r>
-              <a:rPr sz="2400"/>
-              <a:t>→ 暗黒物質と矛盾はしないが、確認もできない（判定できない）</a:t>
-            </a:r>
-          </a:p>
-        </p:txBody>
-      </p:sp>
-    </p:spTree>
-  </p:cSld>
-  <p:clrMapOvr>
-    <a:masterClrMapping/>
-  </p:clrMapOvr>
-</p:sld>
-</file>
-
-<file path=ppt/slides/slide48.xml><?xml version="1.0" encoding="utf-8"?>
-<p:sld xmlns:a="http://schemas.openxmlformats.org/drawingml/2006/main" xmlns:r="http://schemas.openxmlformats.org/officeDocument/2006/relationships" xmlns:p="http://schemas.openxmlformats.org/presentationml/2006/main">
-  <p:cSld>
-    <p:spTree>
-      <p:nvGrpSpPr>
-        <p:cNvPr id="1" name=""/>
-        <p:cNvGrpSpPr/>
-        <p:nvPr/>
-      </p:nvGrpSpPr>
-      <p:grpSpPr>
-        <a:xfrm>
-          <a:off x="0" y="0"/>
-          <a:ext cx="0" cy="0"/>
-          <a:chOff x="0" y="0"/>
-          <a:chExt cx="0" cy="0"/>
-        </a:xfrm>
-      </p:grpSpPr>
-      <p:sp>
-        <p:nvSpPr>
-          <p:cNvPr id="2" name="Title 1"/>
-          <p:cNvSpPr>
-            <a:spLocks noGrp="1"/>
-          </p:cNvSpPr>
-          <p:nvPr>
-            <p:ph type="title"/>
-          </p:nvPr>
-        </p:nvSpPr>
-        <p:spPr/>
-        <p:txBody>
-          <a:bodyPr/>
-          <a:lstStyle/>
-          <a:p>
-            <a:r>
-              <a:rPr sz="3400"/>
-              <a:t>2 つの数字の違い：15σ と 1.3σ</a:t>
-            </a:r>
-          </a:p>
-        </p:txBody>
-      </p:sp>
-      <p:sp>
-        <p:nvSpPr>
-          <p:cNvPr id="3" name="Content Placeholder 2"/>
-          <p:cNvSpPr>
-            <a:spLocks noGrp="1"/>
-          </p:cNvSpPr>
-          <p:nvPr>
-            <p:ph idx="1"/>
-          </p:nvPr>
-        </p:nvSpPr>
-        <p:spPr>
-          <a:xfrm>
-            <a:off x="841248" y="1463040"/>
-            <a:ext cx="10515600" cy="4937760"/>
-          </a:xfrm>
-        </p:spPr>
-        <p:txBody>
-          <a:bodyPr/>
-          <a:lstStyle/>
-          <a:p>
-            <a:r>
-              <a:rPr sz="2400"/>
-              <a:t>約 15σ：天の川のハロー超過の強さ</a:t>
-            </a:r>
-          </a:p>
-          <a:p>
-            <a:pPr lvl="1"/>
-            <a:r>
-              <a:rPr sz="2000"/>
-              <a:t>19.5σ を、何も無い空でのばらつき 1.26 で割ったもの</a:t>
-            </a:r>
-          </a:p>
-          <a:p>
-            <a:pPr lvl="1"/>
-            <a:r>
-              <a:rPr sz="2000"/>
-              <a:t>「天の川に、背景では説明しにくい何かがある」</a:t>
-            </a:r>
-          </a:p>
-          <a:p>
-            <a:r>
-              <a:rPr sz="2400"/>
-              <a:t>1.3σ：矮小銀河での「予測と実測のずれ」</a:t>
-            </a:r>
-          </a:p>
-          <a:p>
-            <a:pPr lvl="1"/>
-            <a:r>
-              <a:rPr sz="2000"/>
-              <a:t>「天の川の超過が暗黒物質だとしても、矮小銀河の結果と矛盾しない」</a:t>
-            </a:r>
-          </a:p>
-          <a:p>
-            <a:r>
-              <a:rPr sz="2400"/>
-              <a:t>別のものを測った、別の数字</a:t>
-            </a:r>
-          </a:p>
-        </p:txBody>
-      </p:sp>
-    </p:spTree>
-  </p:cSld>
-  <p:clrMapOvr>
-    <a:masterClrMapping/>
-  </p:clrMapOvr>
-</p:sld>
-</file>
-
-<file path=ppt/slides/slide49.xml><?xml version="1.0" encoding="utf-8"?>
-<p:sld xmlns:a="http://schemas.openxmlformats.org/drawingml/2006/main" xmlns:r="http://schemas.openxmlformats.org/officeDocument/2006/relationships" xmlns:p="http://schemas.openxmlformats.org/presentationml/2006/main">
-  <p:cSld>
-    <p:spTree>
-      <p:nvGrpSpPr>
-        <p:cNvPr id="1" name=""/>
-        <p:cNvGrpSpPr/>
-        <p:nvPr/>
-      </p:nvGrpSpPr>
-      <p:grpSpPr>
-        <a:xfrm>
-          <a:off x="0" y="0"/>
-          <a:ext cx="0" cy="0"/>
-          <a:chOff x="0" y="0"/>
-          <a:chExt cx="0" cy="0"/>
-        </a:xfrm>
-      </p:grpSpPr>
-      <p:sp>
-        <p:nvSpPr>
-          <p:cNvPr id="2" name="Title 1"/>
-          <p:cNvSpPr>
-            <a:spLocks noGrp="1"/>
-          </p:cNvSpPr>
-          <p:nvPr>
-            <p:ph type="title"/>
-          </p:nvPr>
-        </p:nvSpPr>
-        <p:spPr/>
-        <p:txBody>
-          <a:bodyPr/>
-          <a:lstStyle/>
-          <a:p>
-            <a:r>
-              <a:rPr sz="3400"/>
-              <a:t>結論</a:t>
-            </a:r>
-          </a:p>
-        </p:txBody>
-      </p:sp>
-      <p:sp>
-        <p:nvSpPr>
-          <p:cNvPr id="3" name="Content Placeholder 2"/>
-          <p:cNvSpPr>
-            <a:spLocks noGrp="1"/>
-          </p:cNvSpPr>
-          <p:nvPr>
-            <p:ph idx="1"/>
-          </p:nvPr>
-        </p:nvSpPr>
-        <p:spPr>
-          <a:xfrm>
-            <a:off x="841248" y="1463040"/>
-            <a:ext cx="10515600" cy="4937760"/>
-          </a:xfrm>
-        </p:spPr>
-        <p:txBody>
-          <a:bodyPr/>
-          <a:lstStyle/>
-          <a:p>
-            <a:r>
-              <a:rPr sz="2400"/>
-              <a:t>Totani の超過を再現（名目 19.5σ、較正後 約 15σ）</a:t>
-            </a:r>
-          </a:p>
-          <a:p>
-            <a:r>
-              <a:rPr sz="2400"/>
-              <a:t>ICS の明るさ・バブル・計算の近似の間違いでは説明できない</a:t>
-            </a:r>
-          </a:p>
-          <a:p>
-            <a:pPr lvl="1"/>
-            <a:r>
-              <a:rPr sz="2000"/>
-              <a:t>暗黒物質の証拠ではない（ICS の空間の形は未確認）</a:t>
-            </a:r>
-          </a:p>
-          <a:p>
-            <a:r>
-              <a:rPr sz="2400"/>
-              <a:t>矮小銀河では非検出</a:t>
-            </a:r>
-          </a:p>
-          <a:p>
-            <a:pPr lvl="1"/>
-            <a:r>
-              <a:rPr sz="2000"/>
-              <a:t>J の誤差（約 3 倍）を入れると、予測とのずれは 1.3σ → 判定できない</a:t>
+              <a:rPr sz="1800"/>
+              <a:t>T. Totani (2025), arXiv:2507.07209</a:t>
+            </a:r>
+          </a:p>
+          <a:p>
+            <a:r>
+              <a:rPr sz="1800"/>
+              <a:t>Bertólez-Martínez, Hooper &amp; Khatee Zathul (2026), arXiv:2609.20944</a:t>
+            </a:r>
+          </a:p>
+          <a:p>
+            <a:r>
+              <a:rPr sz="1800"/>
+              <a:t>S. S. Wilks (1938), Ann. Math. Stat. 9, 60</a:t>
+            </a:r>
+          </a:p>
+          <a:p>
+            <a:r>
+              <a:rPr sz="1800"/>
+              <a:t>D. Foreman-Mackey et al. (2013), PASP 125, 306</a:t>
+            </a:r>
+          </a:p>
+          <a:p>
+            <a:r>
+              <a:rPr sz="1800"/>
+              <a:t>I. V. Moskalenko &amp; A. W. Strong (2000), ApJ 528, 357</a:t>
+            </a:r>
+          </a:p>
+          <a:p>
+            <a:r>
+              <a:rPr sz="1800"/>
+              <a:t>B. Efron &amp; R. J. Tibshirani (1993), An Introduction to the Bootstrap</a:t>
+            </a:r>
+          </a:p>
+          <a:p>
+            <a:r>
+              <a:rPr sz="1800"/>
+              <a:t>A. B. Pace (2025), Open J. Astrophys. 8, 142</a:t>
+            </a:r>
+          </a:p>
+          <a:p>
+            <a:r>
+              <a:rPr sz="1800"/>
+              <a:t>A. B. Pace &amp; L. E. Strigari (2019), MNRAS 482, 3480</a:t>
+            </a:r>
+          </a:p>
+          <a:p>
+            <a:r>
+              <a:rPr sz="1800"/>
+              <a:t>中村和幸 (2017), 数理解析研究所講究録 2057, 59–66</a:t>
             </a:r>
           </a:p>
         </p:txBody>
@@ -14238,7 +13398,7 @@
 </file>
 
 <file path=ppt/slides/slide5.xml><?xml version="1.0" encoding="utf-8"?>
-<p:sld xmlns:a="http://schemas.openxmlformats.org/drawingml/2006/main" xmlns:r="http://schemas.openxmlformats.org/officeDocument/2006/relationships" xmlns:p="http://schemas.openxmlformats.org/presentationml/2006/main">
+<p:sld xmlns:a="http://schemas.openxmlformats.org/drawingml/2006/main" xmlns:p="http://schemas.openxmlformats.org/presentationml/2006/main" xmlns:r="http://schemas.openxmlformats.org/officeDocument/2006/relationships">
   <p:cSld>
     <p:spTree>
       <p:nvGrpSpPr>
@@ -14246,14 +13406,7 @@
         <p:cNvGrpSpPr/>
         <p:nvPr/>
       </p:nvGrpSpPr>
-      <p:grpSpPr>
-        <a:xfrm>
-          <a:off x="0" y="0"/>
-          <a:ext cx="0" cy="0"/>
-          <a:chOff x="0" y="0"/>
-          <a:chExt cx="0" cy="0"/>
-        </a:xfrm>
-      </p:grpSpPr>
+      <p:grpSpPr/>
       <p:sp>
         <p:nvSpPr>
           <p:cNvPr id="2" name="Title 1"/>
@@ -14270,80 +13423,74 @@
           <a:lstStyle/>
           <a:p>
             <a:r>
-              <a:rPr sz="3000"/>
-              <a:t>成分①：等方背景</a:t>
-            </a:r>
-          </a:p>
-        </p:txBody>
-      </p:sp>
-      <p:sp>
-        <p:nvSpPr>
-          <p:cNvPr id="3" name="Content Placeholder 2"/>
-          <p:cNvSpPr>
-            <a:spLocks noGrp="1"/>
-          </p:cNvSpPr>
-          <p:nvPr>
-            <p:ph idx="1"/>
-          </p:nvPr>
-        </p:nvSpPr>
+              <a:rPr sz="2800"/>
+              <a:t>背景の成分①〜⑥：何が、どうやってガンマ線を出すか</a:t>
+            </a:r>
+          </a:p>
+        </p:txBody>
+      </p:sp>
+      <p:pic>
+        <p:nvPicPr>
+          <p:cNvPr id="3" name="Picture 2" descr="image.png"/>
+          <p:cNvPicPr>
+            <a:picLocks noChangeAspect="1"/>
+          </p:cNvPicPr>
+          <p:nvPr/>
+        </p:nvPicPr>
+        <p:blipFill>
+          <a:blip r:embed="rId2"/>
+          <a:stretch>
+            <a:fillRect/>
+          </a:stretch>
+        </p:blipFill>
         <p:spPr>
           <a:xfrm>
-            <a:off x="548640" y="1371600"/>
-            <a:ext cx="6400800" cy="4297680"/>
+            <a:off x="411480" y="1417320"/>
+            <a:ext cx="1717040" cy="1783080"/>
           </a:xfrm>
+          <a:prstGeom prst="rect">
+            <a:avLst/>
+          </a:prstGeom>
         </p:spPr>
-        <p:txBody>
-          <a:bodyPr/>
-          <a:lstStyle/>
-          <a:p>
-            <a:r>
-              <a:rPr sz="1800"/>
-              <a:t>空のどの方向からも、同じ明るさで来るガンマ線</a:t>
-            </a:r>
-          </a:p>
-          <a:p>
-            <a:r>
-              <a:rPr sz="1800"/>
-              <a:t>出どころ：天の川の外の遠い銀河（ブレーザーなど）</a:t>
-            </a:r>
-          </a:p>
-          <a:p>
-            <a:pPr lvl="1"/>
-            <a:r>
-              <a:rPr sz="1500"/>
-              <a:t>一つ一つは見分けられないほど暗い光が、たくさん重なったもの</a:t>
-            </a:r>
-          </a:p>
-          <a:p>
-            <a:r>
-              <a:rPr sz="1800"/>
-              <a:t>型紙：空全体で一様（どこも同じ明るさ）</a:t>
-            </a:r>
-          </a:p>
-          <a:p>
-            <a:r>
-              <a:rPr sz="1800"/>
-              <a:t>倍率：0 以上</a:t>
-            </a:r>
-          </a:p>
-          <a:p>
-            <a:pPr lvl="1"/>
-            <a:r>
-              <a:rPr sz="1500"/>
-              <a:t>最初の値は E²dN/dE = 10⁻⁴ MeV cm⁻² s⁻¹ sr⁻¹ 相当</a:t>
-            </a:r>
-          </a:p>
-          <a:p>
-            <a:r>
-              <a:rPr sz="1800"/>
-              <a:t>注意：Loop I の殻 1 と形がほぼ同じで、区別しにくい</a:t>
+      </p:pic>
+      <p:sp>
+        <p:nvSpPr>
+          <p:cNvPr id="4" name="TextBox 3"/>
+          <p:cNvSpPr txBox="1"/>
+          <p:nvPr/>
+        </p:nvSpPr>
+        <p:spPr>
+          <a:xfrm>
+            <a:off x="2286000" y="1463040"/>
+            <a:ext cx="1965960" cy="1783080"/>
+          </a:xfrm>
+          <a:prstGeom prst="rect">
+            <a:avLst/>
+          </a:prstGeom>
+          <a:noFill/>
+        </p:spPr>
+        <p:txBody>
+          <a:bodyPr wrap="square">
+            <a:spAutoFit/>
+          </a:bodyPr>
+          <a:lstStyle/>
+          <a:p>
+            <a:r>
+              <a:rPr sz="1700" b="1"/>
+              <a:t>① 等方背景</a:t>
+            </a:r>
+          </a:p>
+          <a:p>
+            <a:r>
+              <a:rPr sz="1300"/>
+              <a:t>天の川の外の遠い銀河の光が重なったもの。どこを見ても同じ明るさ</a:t>
             </a:r>
           </a:p>
         </p:txBody>
       </p:sp>
       <p:pic>
         <p:nvPicPr>
-          <p:cNvPr id="4" name="Picture 3" descr="template_iso_counts.png"/>
+          <p:cNvPr id="5" name="Picture 4" descr="image.png"/>
           <p:cNvPicPr>
             <a:picLocks noChangeAspect="1"/>
           </p:cNvPicPr>
@@ -14357,8 +13504,8 @@
         </p:blipFill>
         <p:spPr>
           <a:xfrm>
-            <a:off x="7223760" y="1188720"/>
-            <a:ext cx="4314613" cy="4480560"/>
+            <a:off x="4343400" y="1417320"/>
+            <a:ext cx="1717040" cy="1783080"/>
           </a:xfrm>
           <a:prstGeom prst="rect">
             <a:avLst/>
@@ -14367,20 +13514,14 @@
       </p:pic>
       <p:sp>
         <p:nvSpPr>
-          <p:cNvPr id="8" name="TextBox 7">
-            <a:extLst>
-              <a:ext uri="{FF2B5EF4-FFF2-40B4-BE49-F238E27FC236}">
-                <a16:creationId xmlns:a16="http://schemas.microsoft.com/office/drawing/2014/main" id="{F85CD606-E3CE-F314-B3EE-F3D7028115CB}"/>
-              </a:ext>
-            </a:extLst>
-          </p:cNvPr>
+          <p:cNvPr id="6" name="TextBox 5"/>
           <p:cNvSpPr txBox="1"/>
           <p:nvPr/>
         </p:nvSpPr>
         <p:spPr>
           <a:xfrm>
-            <a:off x="5837182" y="5663239"/>
-            <a:ext cx="6093372" cy="923330"/>
+            <a:off x="6217920" y="1463040"/>
+            <a:ext cx="1965960" cy="1783080"/>
           </a:xfrm>
           <a:prstGeom prst="rect">
             <a:avLst/>
@@ -14394,140 +13535,52 @@
           <a:lstStyle/>
           <a:p>
             <a:r>
-              <a:rPr lang="en-US" sz="1400" b="1"/>
-              <a:t>Reference:</a:t>
-            </a:r>
-            <a:r>
-              <a:rPr lang="en-US" sz="1400"/>
-              <a:t> T. Totani (2025), arXiv:2507.07209 §2.3</a:t>
-            </a:r>
-            <a:endParaRPr lang="en-US"/>
-          </a:p>
-        </p:txBody>
-      </p:sp>
-    </p:spTree>
-  </p:cSld>
-  <p:clrMapOvr>
-    <a:masterClrMapping/>
-  </p:clrMapOvr>
-</p:sld>
-</file>
-
-<file path=ppt/slides/slide50.xml><?xml version="1.0" encoding="utf-8"?>
-<p:sld xmlns:a="http://schemas.openxmlformats.org/drawingml/2006/main" xmlns:r="http://schemas.openxmlformats.org/officeDocument/2006/relationships" xmlns:p="http://schemas.openxmlformats.org/presentationml/2006/main">
-  <p:cSld>
-    <p:spTree>
-      <p:nvGrpSpPr>
-        <p:cNvPr id="1" name=""/>
-        <p:cNvGrpSpPr/>
-        <p:nvPr/>
-      </p:nvGrpSpPr>
-      <p:grpSpPr>
-        <a:xfrm>
-          <a:off x="0" y="0"/>
-          <a:ext cx="0" cy="0"/>
-          <a:chOff x="0" y="0"/>
-          <a:chExt cx="0" cy="0"/>
-        </a:xfrm>
-      </p:grpSpPr>
-      <p:sp>
-        <p:nvSpPr>
-          <p:cNvPr id="2" name="Title 1"/>
-          <p:cNvSpPr>
-            <a:spLocks noGrp="1"/>
-          </p:cNvSpPr>
-          <p:nvPr>
-            <p:ph type="title"/>
-          </p:nvPr>
-        </p:nvSpPr>
-        <p:spPr/>
-        <p:txBody>
-          <a:bodyPr/>
-          <a:lstStyle/>
-          <a:p>
-            <a:r>
-              <a:rPr sz="3400"/>
-              <a:t>統計の視点から：この研究に足りなかったもの</a:t>
-            </a:r>
-          </a:p>
-        </p:txBody>
-      </p:sp>
-      <p:sp>
-        <p:nvSpPr>
-          <p:cNvPr id="3" name="Content Placeholder 2"/>
-          <p:cNvSpPr>
-            <a:spLocks noGrp="1"/>
-          </p:cNvSpPr>
-          <p:nvPr>
-            <p:ph idx="1"/>
-          </p:nvPr>
-        </p:nvSpPr>
+              <a:rPr sz="1700" b="1"/>
+              <a:t>② ガス</a:t>
+            </a:r>
+          </a:p>
+          <a:p>
+            <a:r>
+              <a:rPr sz="1300"/>
+              <a:t>宇宙線がガス（水素）にぶつかる → π⁰ が壊れて光る、電子がブレーキで光る</a:t>
+            </a:r>
+          </a:p>
+        </p:txBody>
+      </p:sp>
+      <p:pic>
+        <p:nvPicPr>
+          <p:cNvPr id="7" name="Picture 6" descr="image.png"/>
+          <p:cNvPicPr>
+            <a:picLocks noChangeAspect="1"/>
+          </p:cNvPicPr>
+          <p:nvPr/>
+        </p:nvPicPr>
+        <p:blipFill>
+          <a:blip r:embed="rId4"/>
+          <a:stretch>
+            <a:fillRect/>
+          </a:stretch>
+        </p:blipFill>
         <p:spPr>
           <a:xfrm>
-            <a:off x="841248" y="1463040"/>
-            <a:ext cx="10515600" cy="4114800"/>
+            <a:off x="8275320" y="1417320"/>
+            <a:ext cx="1717040" cy="1783080"/>
           </a:xfrm>
+          <a:prstGeom prst="rect">
+            <a:avLst/>
+          </a:prstGeom>
         </p:spPr>
-        <p:txBody>
-          <a:bodyPr/>
-          <a:lstStyle/>
-          <a:p>
-            <a:r>
-              <a:rPr sz="2400"/>
-              <a:t>σ が 1.26 倍に膨らんだ原因</a:t>
-            </a:r>
-          </a:p>
-          <a:p>
-            <a:pPr lvl="1"/>
-            <a:r>
-              <a:rPr sz="2000"/>
-              <a:t>尤度は「型紙（GALPROP）は完璧、誤差は光子の数のばらつきだけ」と仮定</a:t>
-            </a:r>
-          </a:p>
-          <a:p>
-            <a:pPr lvl="1"/>
-            <a:r>
-              <a:rPr sz="2000"/>
-              <a:t>型紙そのものの誤差が、統計モデルに入っていない</a:t>
-            </a:r>
-          </a:p>
-          <a:p>
-            <a:r>
-              <a:rPr sz="2400"/>
-              <a:t>データ同化：シミュレーションの誤差と観測の誤差を分けて、統計モデルに入れる枠組み</a:t>
-            </a:r>
-          </a:p>
-          <a:p>
-            <a:r>
-              <a:rPr sz="2400"/>
-              <a:t>J をずらして何度も計算したのも、分布をたくさんのサンプルで表すという同じ発想</a:t>
-            </a:r>
-          </a:p>
-          <a:p>
-            <a:pPr lvl="1"/>
-            <a:r>
-              <a:rPr sz="2000"/>
-              <a:t>（アンサンブル・粒子フィルタ）</a:t>
-            </a:r>
-          </a:p>
-        </p:txBody>
-      </p:sp>
-      <p:sp>
-        <p:nvSpPr>
-          <p:cNvPr id="8" name="TextBox 7">
-            <a:extLst>
-              <a:ext uri="{FF2B5EF4-FFF2-40B4-BE49-F238E27FC236}">
-                <a16:creationId xmlns:a16="http://schemas.microsoft.com/office/drawing/2014/main" id="{F85CD606-E3CE-F314-B3EE-F3D7028115CB}"/>
-              </a:ext>
-            </a:extLst>
-          </p:cNvPr>
+      </p:pic>
+      <p:sp>
+        <p:nvSpPr>
+          <p:cNvPr id="8" name="TextBox 7"/>
           <p:cNvSpPr txBox="1"/>
           <p:nvPr/>
         </p:nvSpPr>
         <p:spPr>
           <a:xfrm>
-            <a:off x="5837182" y="5663239"/>
-            <a:ext cx="6093372" cy="923330"/>
+            <a:off x="10149840" y="1463040"/>
+            <a:ext cx="1965960" cy="1783080"/>
           </a:xfrm>
           <a:prstGeom prst="rect">
             <a:avLst/>
@@ -14541,135 +13594,254 @@
           <a:lstStyle/>
           <a:p>
             <a:r>
-              <a:rPr lang="en-US" sz="1400" b="1"/>
-              <a:t>Reference:</a:t>
-            </a:r>
-            <a:r>
-              <a:rPr lang="en-US" sz="1400"/>
-              <a:t> 中村和幸 (2017), 数理解析研究所講究録 2057, 59–66</a:t>
-            </a:r>
-            <a:endParaRPr lang="en-US"/>
-          </a:p>
-        </p:txBody>
-      </p:sp>
-    </p:spTree>
-  </p:cSld>
-  <p:clrMapOvr>
-    <a:masterClrMapping/>
-  </p:clrMapOvr>
-</p:sld>
-</file>
-
-<file path=ppt/slides/slide51.xml><?xml version="1.0" encoding="utf-8"?>
-<p:sld xmlns:a="http://schemas.openxmlformats.org/drawingml/2006/main" xmlns:r="http://schemas.openxmlformats.org/officeDocument/2006/relationships" xmlns:p="http://schemas.openxmlformats.org/presentationml/2006/main">
-  <p:cSld>
-    <p:spTree>
-      <p:nvGrpSpPr>
-        <p:cNvPr id="1" name=""/>
-        <p:cNvGrpSpPr/>
-        <p:nvPr/>
-      </p:nvGrpSpPr>
-      <p:grpSpPr>
-        <a:xfrm>
-          <a:off x="0" y="0"/>
-          <a:ext cx="0" cy="0"/>
-          <a:chOff x="0" y="0"/>
-          <a:chExt cx="0" cy="0"/>
-        </a:xfrm>
-      </p:grpSpPr>
-      <p:sp>
-        <p:nvSpPr>
-          <p:cNvPr id="2" name="Title 1"/>
-          <p:cNvSpPr>
-            <a:spLocks noGrp="1"/>
-          </p:cNvSpPr>
-          <p:nvPr>
-            <p:ph type="title"/>
-          </p:nvPr>
-        </p:nvSpPr>
-        <p:spPr/>
-        <p:txBody>
-          <a:bodyPr/>
-          <a:lstStyle/>
-          <a:p>
-            <a:r>
-              <a:rPr sz="3400"/>
-              <a:t>参考文献</a:t>
-            </a:r>
-          </a:p>
-        </p:txBody>
-      </p:sp>
-      <p:sp>
-        <p:nvSpPr>
-          <p:cNvPr id="3" name="Content Placeholder 2"/>
-          <p:cNvSpPr>
-            <a:spLocks noGrp="1"/>
-          </p:cNvSpPr>
-          <p:nvPr>
-            <p:ph idx="1"/>
-          </p:nvPr>
-        </p:nvSpPr>
+              <a:rPr sz="1700" b="1"/>
+              <a:t>③ ICS</a:t>
+            </a:r>
+          </a:p>
+          <a:p>
+            <a:r>
+              <a:rPr sz="1300"/>
+              <a:t>宇宙線の電子が、星の光などをはね飛ばしてガンマ線にする</a:t>
+            </a:r>
+          </a:p>
+        </p:txBody>
+      </p:sp>
+      <p:pic>
+        <p:nvPicPr>
+          <p:cNvPr id="9" name="Picture 8" descr="image.png"/>
+          <p:cNvPicPr>
+            <a:picLocks noChangeAspect="1"/>
+          </p:cNvPicPr>
+          <p:nvPr/>
+        </p:nvPicPr>
+        <p:blipFill>
+          <a:blip r:embed="rId5"/>
+          <a:stretch>
+            <a:fillRect/>
+          </a:stretch>
+        </p:blipFill>
         <p:spPr>
           <a:xfrm>
-            <a:off x="841248" y="1463040"/>
-            <a:ext cx="10515600" cy="4937760"/>
+            <a:off x="411480" y="3977639"/>
+            <a:ext cx="1717040" cy="1783080"/>
           </a:xfrm>
+          <a:prstGeom prst="rect">
+            <a:avLst/>
+          </a:prstGeom>
         </p:spPr>
-        <p:txBody>
-          <a:bodyPr/>
-          <a:lstStyle/>
-          <a:p>
-            <a:r>
-              <a:rPr sz="1800"/>
-              <a:t>T. Totani (2025), arXiv:2507.07209</a:t>
-            </a:r>
-          </a:p>
-          <a:p>
-            <a:r>
-              <a:rPr sz="1800"/>
-              <a:t>Bertólez-Martínez, Hooper &amp; Khatee Zathul (2026), arXiv:2609.20944</a:t>
-            </a:r>
-          </a:p>
-          <a:p>
-            <a:r>
-              <a:rPr sz="1800"/>
-              <a:t>S. S. Wilks (1938), Ann. Math. Stat. 9, 60</a:t>
-            </a:r>
-          </a:p>
-          <a:p>
-            <a:r>
-              <a:rPr sz="1800"/>
-              <a:t>D. Foreman-Mackey et al. (2013), PASP 125, 306</a:t>
-            </a:r>
-          </a:p>
-          <a:p>
-            <a:r>
-              <a:rPr sz="1800"/>
-              <a:t>I. V. Moskalenko &amp; A. W. Strong (2000), ApJ 528, 357</a:t>
-            </a:r>
-          </a:p>
-          <a:p>
-            <a:r>
-              <a:rPr sz="1800"/>
-              <a:t>B. Efron &amp; R. J. Tibshirani (1993), An Introduction to the Bootstrap</a:t>
-            </a:r>
-          </a:p>
-          <a:p>
-            <a:r>
-              <a:rPr sz="1800"/>
-              <a:t>A. B. Pace (2025), Open J. Astrophys. 8, 142</a:t>
-            </a:r>
-          </a:p>
-          <a:p>
-            <a:r>
-              <a:rPr sz="1800"/>
-              <a:t>A. B. Pace &amp; L. E. Strigari (2019), MNRAS 482, 3480</a:t>
-            </a:r>
-          </a:p>
-          <a:p>
-            <a:r>
-              <a:rPr sz="1800"/>
-              <a:t>中村和幸 (2017), 数理解析研究所講究録 2057, 59–66</a:t>
+      </p:pic>
+      <p:sp>
+        <p:nvSpPr>
+          <p:cNvPr id="10" name="TextBox 9"/>
+          <p:cNvSpPr txBox="1"/>
+          <p:nvPr/>
+        </p:nvSpPr>
+        <p:spPr>
+          <a:xfrm>
+            <a:off x="2286000" y="4023359"/>
+            <a:ext cx="1965960" cy="1783080"/>
+          </a:xfrm>
+          <a:prstGeom prst="rect">
+            <a:avLst/>
+          </a:prstGeom>
+          <a:noFill/>
+        </p:spPr>
+        <p:txBody>
+          <a:bodyPr wrap="square">
+            <a:spAutoFit/>
+          </a:bodyPr>
+          <a:lstStyle/>
+          <a:p>
+            <a:r>
+              <a:rPr sz="1700" b="1"/>
+              <a:t>④ 点源</a:t>
+            </a:r>
+          </a:p>
+          <a:p>
+            <a:r>
+              <a:rPr sz="1300"/>
+              <a:t>パルサーや遠い銀河の中心など、位置が分かっている天体 1 つ 1 つ</a:t>
+            </a:r>
+          </a:p>
+        </p:txBody>
+      </p:sp>
+      <p:pic>
+        <p:nvPicPr>
+          <p:cNvPr id="11" name="Picture 10" descr="image.png"/>
+          <p:cNvPicPr>
+            <a:picLocks noChangeAspect="1"/>
+          </p:cNvPicPr>
+          <p:nvPr/>
+        </p:nvPicPr>
+        <p:blipFill>
+          <a:blip r:embed="rId6"/>
+          <a:stretch>
+            <a:fillRect/>
+          </a:stretch>
+        </p:blipFill>
+        <p:spPr>
+          <a:xfrm>
+            <a:off x="4343400" y="3977639"/>
+            <a:ext cx="1717040" cy="1783080"/>
+          </a:xfrm>
+          <a:prstGeom prst="rect">
+            <a:avLst/>
+          </a:prstGeom>
+        </p:spPr>
+      </p:pic>
+      <p:sp>
+        <p:nvSpPr>
+          <p:cNvPr id="12" name="TextBox 11"/>
+          <p:cNvSpPr txBox="1"/>
+          <p:nvPr/>
+        </p:nvSpPr>
+        <p:spPr>
+          <a:xfrm>
+            <a:off x="6217920" y="4023359"/>
+            <a:ext cx="1965960" cy="1783080"/>
+          </a:xfrm>
+          <a:prstGeom prst="rect">
+            <a:avLst/>
+          </a:prstGeom>
+          <a:noFill/>
+        </p:spPr>
+        <p:txBody>
+          <a:bodyPr wrap="square">
+            <a:spAutoFit/>
+          </a:bodyPr>
+          <a:lstStyle/>
+          <a:p>
+            <a:r>
+              <a:rPr sz="1700" b="1"/>
+              <a:t>⑤ Loop I</a:t>
+            </a:r>
+          </a:p>
+          <a:p>
+            <a:r>
+              <a:rPr sz="1300"/>
+              <a:t>近くの超新星の残骸の殻。殻の中の宇宙線が光ると考えられている</a:t>
+            </a:r>
+          </a:p>
+        </p:txBody>
+      </p:sp>
+      <p:pic>
+        <p:nvPicPr>
+          <p:cNvPr id="13" name="Picture 12" descr="image.png"/>
+          <p:cNvPicPr>
+            <a:picLocks noChangeAspect="1"/>
+          </p:cNvPicPr>
+          <p:nvPr/>
+        </p:nvPicPr>
+        <p:blipFill>
+          <a:blip r:embed="rId7"/>
+          <a:stretch>
+            <a:fillRect/>
+          </a:stretch>
+        </p:blipFill>
+        <p:spPr>
+          <a:xfrm>
+            <a:off x="8275320" y="3977639"/>
+            <a:ext cx="1717040" cy="1783080"/>
+          </a:xfrm>
+          <a:prstGeom prst="rect">
+            <a:avLst/>
+          </a:prstGeom>
+        </p:spPr>
+      </p:pic>
+      <p:sp>
+        <p:nvSpPr>
+          <p:cNvPr id="14" name="TextBox 13"/>
+          <p:cNvSpPr txBox="1"/>
+          <p:nvPr/>
+        </p:nvSpPr>
+        <p:spPr>
+          <a:xfrm>
+            <a:off x="10149840" y="4023359"/>
+            <a:ext cx="1965960" cy="1783080"/>
+          </a:xfrm>
+          <a:prstGeom prst="rect">
+            <a:avLst/>
+          </a:prstGeom>
+          <a:noFill/>
+        </p:spPr>
+        <p:txBody>
+          <a:bodyPr wrap="square">
+            <a:spAutoFit/>
+          </a:bodyPr>
+          <a:lstStyle/>
+          <a:p>
+            <a:r>
+              <a:rPr sz="1700" b="1"/>
+              <a:t>⑥ フェルミバブル</a:t>
+            </a:r>
+          </a:p>
+          <a:p>
+            <a:r>
+              <a:rPr sz="1300"/>
+              <a:t>銀河中心から吹き出した泡。中の宇宙線が光る（くわしい仕組みは研究中）</a:t>
+            </a:r>
+          </a:p>
+        </p:txBody>
+      </p:sp>
+      <p:sp>
+        <p:nvSpPr>
+          <p:cNvPr id="15" name="TextBox 14"/>
+          <p:cNvSpPr txBox="1"/>
+          <p:nvPr/>
+        </p:nvSpPr>
+        <p:spPr>
+          <a:xfrm>
+            <a:off x="5833872" y="5989320"/>
+            <a:ext cx="6089904" cy="457200"/>
+          </a:xfrm>
+          <a:prstGeom prst="rect">
+            <a:avLst/>
+          </a:prstGeom>
+          <a:noFill/>
+        </p:spPr>
+        <p:txBody>
+          <a:bodyPr wrap="none">
+            <a:spAutoFit/>
+          </a:bodyPr>
+          <a:lstStyle/>
+          <a:p>
+            <a:r>
+              <a:rPr sz="1200"/>
+              <a:t>Reference: T. Totani (2025), arXiv:2507.07209 §2.3, §3.1; GALPROP v54</a:t>
+            </a:r>
+          </a:p>
+        </p:txBody>
+      </p:sp>
+      <p:sp>
+        <p:nvSpPr>
+          <p:cNvPr id="16" name="TextBox 15"/>
+          <p:cNvSpPr txBox="1"/>
+          <p:nvPr/>
+        </p:nvSpPr>
+        <p:spPr>
+          <a:xfrm>
+            <a:off x="8778240" y="109728"/>
+            <a:ext cx="3246120" cy="411480"/>
+          </a:xfrm>
+          <a:prstGeom prst="rect">
+            <a:avLst/>
+          </a:prstGeom>
+          <a:noFill/>
+        </p:spPr>
+        <p:txBody>
+          <a:bodyPr wrap="none">
+            <a:spAutoFit/>
+          </a:bodyPr>
+          <a:lstStyle/>
+          <a:p>
+            <a:pPr algn="r"/>
+            <a:r>
+              <a:rPr sz="1600">
+                <a:solidFill>
+                  <a:srgbClr val="595959"/>
+                </a:solidFill>
+              </a:rPr>
+              <a:t>手法①…成分について</a:t>
             </a:r>
           </a:p>
         </p:txBody>
@@ -14716,7 +13888,7 @@
           <a:p>
             <a:r>
               <a:rPr sz="3000"/>
-              <a:t>成分②：ガス（π⁰ 崩壊＋制動放射）</a:t>
+              <a:t>成分⑦：ハロー（探しているもの）</a:t>
             </a:r>
           </a:p>
         </p:txBody>
@@ -14743,59 +13915,59 @@
           <a:p>
             <a:r>
               <a:rPr sz="1800"/>
-              <a:t>宇宙線が、星と星の間のガス（主に水素）にぶつかって出すガンマ線</a:t>
+              <a:t>暗黒物質の粒子どうしがぶつかって消え（対消滅）、ガンマ線を出す</a:t>
             </a:r>
           </a:p>
           <a:p>
             <a:r>
               <a:rPr sz="1800"/>
-              <a:t>π⁰ 崩壊</a:t>
+              <a:t>明るさ ∝ 密度の 2 乗（粒子が 2 つ要るため）</a:t>
             </a:r>
           </a:p>
           <a:p>
             <a:pPr lvl="1"/>
             <a:r>
               <a:rPr sz="1500"/>
-              <a:t>宇宙線の陽子が水素の原子核にぶつかる → π⁰ という粒子ができる → すぐ光子 2 個に壊れる</a:t>
+              <a:t>それを視線方向に足し合わせたもの = J ファクター</a:t>
             </a:r>
           </a:p>
           <a:p>
             <a:r>
               <a:rPr sz="1800"/>
-              <a:t>制動放射</a:t>
+              <a:t>密度の形：NFW（Via Lactea II のシミュレーション）</a:t>
             </a:r>
           </a:p>
           <a:p>
             <a:pPr lvl="1"/>
             <a:r>
               <a:rPr sz="1500"/>
-              <a:t>宇宙線の電子がガスのそばを通るときに曲げられ、ブレーキがかかって光を出す</a:t>
+              <a:t>rs = 21 kpc、太陽の位置で 0.42 GeV/cm³</a:t>
             </a:r>
           </a:p>
           <a:p>
             <a:r>
               <a:rPr sz="1800"/>
-              <a:t>型紙：GALPROP で計算。2 つの比は GALPROP の値に固定して 1 枚</a:t>
+              <a:t>形：銀河中心に向かって明るく、なめらかに広がる</a:t>
+            </a:r>
+          </a:p>
+          <a:p>
+            <a:r>
+              <a:rPr sz="1800"/>
+              <a:t>倍率：符号自由（負も許す）、最初は 0</a:t>
             </a:r>
           </a:p>
           <a:p>
             <a:pPr lvl="1"/>
             <a:r>
               <a:rPr sz="1500"/>
-              <a:t>ガスの多い銀河面の近くと、ガス雲の模様が明るい</a:t>
-            </a:r>
-          </a:p>
-          <a:p>
-            <a:r>
-              <a:rPr sz="1800"/>
-              <a:t>倍率：0 以上、最初は 1</a:t>
+              <a:t>あるか分からないものを探すので、偏りを作らないため</a:t>
             </a:r>
           </a:p>
         </p:txBody>
       </p:sp>
       <p:pic>
         <p:nvPicPr>
-          <p:cNvPr id="4" name="Picture 3" descr="template_gas.png"/>
+          <p:cNvPr id="4" name="Picture 3" descr="template_halo.png"/>
           <p:cNvPicPr>
             <a:picLocks noChangeAspect="1"/>
           </p:cNvPicPr>
@@ -14851,9 +14023,43 @@
             </a:r>
             <a:r>
               <a:rPr lang="en-US" sz="1400"/>
-              <a:t> T. Totani (2025), arXiv:2507.07209 §2.3; GALPROP v54</a:t>
+              <a:t> T. Totani (2025), arXiv:2507.07209 §2.3</a:t>
             </a:r>
             <a:endParaRPr lang="en-US"/>
+          </a:p>
+        </p:txBody>
+      </p:sp>
+      <p:sp>
+        <p:nvSpPr>
+          <p:cNvPr id="9" name="TextBox 8"/>
+          <p:cNvSpPr txBox="1"/>
+          <p:nvPr/>
+        </p:nvSpPr>
+        <p:spPr>
+          <a:xfrm>
+            <a:off x="8778240" y="109728"/>
+            <a:ext cx="3246120" cy="411480"/>
+          </a:xfrm>
+          <a:prstGeom prst="rect">
+            <a:avLst/>
+          </a:prstGeom>
+          <a:noFill/>
+        </p:spPr>
+        <p:txBody>
+          <a:bodyPr wrap="none">
+            <a:spAutoFit/>
+          </a:bodyPr>
+          <a:lstStyle/>
+          <a:p>
+            <a:pPr algn="r"/>
+            <a:r>
+              <a:rPr sz="1600">
+                <a:solidFill>
+                  <a:srgbClr val="595959"/>
+                </a:solidFill>
+              </a:rPr>
+              <a:t>手法①…成分について</a:t>
+            </a:r>
           </a:p>
         </p:txBody>
       </p:sp>
@@ -14899,7 +14105,7 @@
           <a:p>
             <a:r>
               <a:rPr sz="3000"/>
-              <a:t>成分③：ICS（逆コンプトン散乱）</a:t>
+              <a:t>ここからやること：係数 9 個を決めるだけ</a:t>
             </a:r>
           </a:p>
         </p:txBody>
@@ -14917,132 +14123,116 @@
         <p:spPr>
           <a:xfrm>
             <a:off x="548640" y="1371600"/>
-            <a:ext cx="6400800" cy="4297680"/>
+            <a:ext cx="10789920" cy="4297680"/>
           </a:xfrm>
         </p:spPr>
         <p:txBody>
-          <a:bodyPr/>
-          <a:lstStyle/>
-          <a:p>
-            <a:r>
-              <a:rPr sz="1800"/>
-              <a:t>宇宙線の電子が、まわりの光にぶつかってガンマ線に変える</a:t>
+          <a:bodyPr>
+            <a:normAutofit fontScale="92500" lnSpcReduction="10000"/>
+          </a:bodyPr>
+          <a:lstStyle/>
+          <a:p>
+            <a:r>
+              <a:rPr sz="2600"/>
+              <a:t>予測 ＝ f₁ × 型紙₁ ＋ f₂ × 型紙₂ ＋ … ＋ f₉ × 型紙₉</a:t>
             </a:r>
           </a:p>
           <a:p>
             <a:pPr lvl="1"/>
             <a:r>
-              <a:rPr sz="1500"/>
-              <a:t>ぶつかる光：星の光、ちりが出す赤外線、宇宙背景放射</a:t>
-            </a:r>
-          </a:p>
-          <a:p>
-            <a:r>
-              <a:rPr sz="1800"/>
-              <a:t>たとえ：速いボール（電子）が軽いピンポン玉（光）をはね飛ばす</a:t>
+              <a:rPr sz="2200"/>
+              <a:t>型紙は固定。動かすのは係数（倍率）9 個だけ</a:t>
+            </a:r>
+          </a:p>
+          <a:p>
+            <a:r>
+              <a:rPr sz="2600"/>
+              <a:t>尤度：その係数 9 個が「どれだけ良いか」の点数</a:t>
+            </a:r>
+            <a:endParaRPr lang="en-US" sz="2600"/>
+          </a:p>
+          <a:p>
+            <a:r>
+              <a:rPr lang="en-US" altLang="ja-JP" sz="2400"/>
+              <a:t>ln L = Σ_i [ C_obs,i ln C_exp,i − C_exp,i ]</a:t>
             </a:r>
           </a:p>
           <a:p>
             <a:pPr lvl="1"/>
             <a:r>
-              <a:rPr sz="1500"/>
-              <a:t>はね飛ばされたピンポン玉がガンマ線になる</a:t>
-            </a:r>
-          </a:p>
-          <a:p>
-            <a:r>
-              <a:rPr sz="1800"/>
-              <a:t>星の光は銀河の中心ほど多い</a:t>
+              <a:rPr lang="en-US" altLang="ja-JP" sz="2000"/>
+              <a:t>C_obs</a:t>
+            </a:r>
+            <a:r>
+              <a:rPr lang="ja-JP" altLang="en-US" sz="2000"/>
+              <a:t>：観測した光子数、</a:t>
+            </a:r>
+            <a:r>
+              <a:rPr lang="en-US" altLang="ja-JP" sz="2000"/>
+              <a:t>C_exp</a:t>
+            </a:r>
+            <a:r>
+              <a:rPr lang="ja-JP" altLang="en-US" sz="2000"/>
+              <a:t>：予測した光子数</a:t>
             </a:r>
           </a:p>
           <a:p>
             <a:pPr lvl="1"/>
             <a:r>
-              <a:rPr sz="1500"/>
-              <a:t>→ 形は、銀河面と中心付近が明るく、なめらかに広がる</a:t>
-            </a:r>
-          </a:p>
-          <a:p>
-            <a:r>
-              <a:rPr sz="1800"/>
-              <a:t>型紙：GALPROP で計算</a:t>
-            </a:r>
-          </a:p>
-          <a:p>
-            <a:r>
-              <a:rPr sz="1800"/>
-              <a:t>倍率：0 以上、最初は 1</a:t>
-            </a:r>
-          </a:p>
-          <a:p>
-            <a:r>
-              <a:rPr sz="1800"/>
-              <a:t>ハローと形が似ている（縮退の原因）</a:t>
-            </a:r>
-          </a:p>
-        </p:txBody>
-      </p:sp>
-      <p:pic>
-        <p:nvPicPr>
-          <p:cNvPr id="4" name="Picture 3" descr="template_ics.png"/>
-          <p:cNvPicPr>
-            <a:picLocks noChangeAspect="1"/>
-          </p:cNvPicPr>
-          <p:nvPr/>
-        </p:nvPicPr>
-        <p:blipFill>
-          <a:blip r:embed="rId3"/>
-          <a:stretch>
-            <a:fillRect/>
-          </a:stretch>
-        </p:blipFill>
-        <p:spPr>
-          <a:xfrm>
-            <a:off x="7223760" y="1188720"/>
-            <a:ext cx="4314613" cy="4480560"/>
-          </a:xfrm>
-          <a:prstGeom prst="rect">
-            <a:avLst/>
-          </a:prstGeom>
-        </p:spPr>
-      </p:pic>
-      <p:sp>
-        <p:nvSpPr>
-          <p:cNvPr id="8" name="TextBox 7">
-            <a:extLst>
-              <a:ext uri="{FF2B5EF4-FFF2-40B4-BE49-F238E27FC236}">
-                <a16:creationId xmlns:a16="http://schemas.microsoft.com/office/drawing/2014/main" id="{F85CD606-E3CE-F314-B3EE-F3D7028115CB}"/>
-              </a:ext>
-            </a:extLst>
-          </p:cNvPr>
-          <p:cNvSpPr txBox="1"/>
-          <p:nvPr/>
-        </p:nvSpPr>
-        <p:spPr>
-          <a:xfrm>
-            <a:off x="5837182" y="5663239"/>
-            <a:ext cx="6093372" cy="923330"/>
-          </a:xfrm>
-          <a:prstGeom prst="rect">
-            <a:avLst/>
-          </a:prstGeom>
-          <a:noFill/>
-        </p:spPr>
-        <p:txBody>
-          <a:bodyPr wrap="square">
-            <a:spAutoFit/>
-          </a:bodyPr>
-          <a:lstStyle/>
-          <a:p>
-            <a:r>
-              <a:rPr lang="en-US" sz="1400" b="1"/>
-              <a:t>Reference:</a:t>
-            </a:r>
-            <a:r>
-              <a:rPr lang="en-US" sz="1400"/>
-              <a:t> T. Totani (2025), arXiv:2507.07209 §2.3; GALPROP v54</a:t>
-            </a:r>
-            <a:endParaRPr lang="en-US"/>
+              <a:rPr lang="en-US" altLang="ja-JP" sz="2000"/>
+              <a:t>i</a:t>
+            </a:r>
+            <a:r>
+              <a:rPr lang="ja-JP" altLang="en-US" sz="2000"/>
+              <a:t>：</a:t>
+            </a:r>
+            <a:r>
+              <a:rPr lang="en-US" altLang="ja-JP" sz="2000"/>
+              <a:t>10° × 10° </a:t>
+            </a:r>
+            <a:r>
+              <a:rPr lang="ja-JP" altLang="en-US" sz="2000"/>
+              <a:t>のセル（空をマス目に分ける）</a:t>
+            </a:r>
+          </a:p>
+          <a:p>
+            <a:r>
+              <a:rPr lang="en-US" altLang="ja-JP" sz="2400"/>
+              <a:t>ln L </a:t>
+            </a:r>
+            <a:r>
+              <a:rPr lang="ja-JP" altLang="en-US" sz="2400"/>
+              <a:t>が最大になる倍率 </a:t>
+            </a:r>
+            <a:r>
+              <a:rPr lang="en-US" altLang="ja-JP" sz="2400"/>
+              <a:t>f </a:t>
+            </a:r>
+            <a:r>
+              <a:rPr lang="ja-JP" altLang="en-US" sz="2400"/>
+              <a:t>を探す（最尤推定）</a:t>
+            </a:r>
+          </a:p>
+          <a:p>
+            <a:endParaRPr sz="2600"/>
+          </a:p>
+          <a:p>
+            <a:r>
+              <a:rPr sz="2600"/>
+              <a:t>MCMC：良い係数 9 個を探す方法</a:t>
+            </a:r>
+          </a:p>
+          <a:p>
+            <a:r>
+              <a:rPr sz="2600"/>
+              <a:t>最良値：見つかった一番良い係数 9 個</a:t>
+            </a:r>
+          </a:p>
+          <a:p>
+            <a:r>
+              <a:rPr sz="2600"/>
+              <a:t>誤差：その係数が「どこまでずれても十分良いか」</a:t>
+            </a:r>
           </a:p>
         </p:txBody>
       </p:sp>
@@ -15087,8 +14277,8 @@
           <a:lstStyle/>
           <a:p>
             <a:r>
-              <a:rPr sz="3000"/>
-              <a:t>成分④：点源</a:t>
+              <a:rPr sz="3400"/>
+              <a:t>尤度と MCMC の役割分担</a:t>
             </a:r>
           </a:p>
         </p:txBody>
@@ -15105,8 +14295,8 @@
         </p:nvSpPr>
         <p:spPr>
           <a:xfrm>
-            <a:off x="548640" y="1371600"/>
-            <a:ext cx="6400800" cy="4297680"/>
+            <a:off x="841248" y="1463040"/>
+            <a:ext cx="10515600" cy="4114800"/>
           </a:xfrm>
         </p:spPr>
         <p:txBody>
@@ -15114,88 +14304,59 @@
           <a:lstStyle/>
           <a:p>
             <a:r>
-              <a:rPr sz="1800"/>
-              <a:t>一つ一つ位置が分かっている天体</a:t>
+              <a:rPr sz="2400"/>
+              <a:t>尤度 ＝ 点数をつける係（たとえ：高度計）</a:t>
             </a:r>
           </a:p>
           <a:p>
             <a:pPr lvl="1"/>
             <a:r>
-              <a:rPr sz="1500"/>
-              <a:t>パルサー（回転する中性子星）、ブレーザー（遠い銀河の中心）など</a:t>
-            </a:r>
-          </a:p>
-          <a:p>
-            <a:r>
-              <a:rPr sz="1800"/>
-              <a:t>型紙：Fermi-LAT の天体カタログ（4FGL-DR4）から作る</a:t>
+              <a:rPr sz="2000"/>
+              <a:t>倍率の組（f_gas, f_ics, …, f_halo）を入れると、予測と観測の合い具合 ln L を返す</a:t>
+            </a:r>
+          </a:p>
+          <a:p>
+            <a:r>
+              <a:rPr sz="2400"/>
+              <a:t>MCMC ＝ 倍率を探す係（たとえ：霧の山を歩く人）</a:t>
             </a:r>
           </a:p>
           <a:p>
             <a:pPr lvl="1"/>
             <a:r>
-              <a:rPr sz="1500"/>
-              <a:t>位置と、カタログに書かれた明るさのエネルギー変化</a:t>
+              <a:rPr sz="2000"/>
+              <a:t>倍率の組を少しずつ変えながら歩き、そのたびに尤度で点数をつける</a:t>
             </a:r>
           </a:p>
           <a:p>
             <a:pPr lvl="1"/>
             <a:r>
-              <a:rPr sz="1500"/>
-              <a:t>望遠鏡のぼやけ（PSF）で点を広げる。ぼやけはエネルギーで変わる</a:t>
-            </a:r>
-          </a:p>
-          <a:p>
-            <a:r>
-              <a:rPr sz="1800"/>
-              <a:t>全部の点源をまとめて 1 枚、倍率 1 個</a:t>
-            </a:r>
-          </a:p>
-          <a:p>
-            <a:r>
-              <a:rPr sz="1800"/>
-              <a:t>倍率：0 以上、最初は 1</a:t>
-            </a:r>
-          </a:p>
-          <a:p>
-            <a:r>
-              <a:rPr sz="1800"/>
-              <a:t>大きく広がった天体（拡張源）は解析から外す</a:t>
+              <a:rPr sz="2000"/>
+              <a:t>点数が上がる方へは必ず進み、下がる方へもたまに進む</a:t>
+            </a:r>
+          </a:p>
+          <a:p>
+            <a:r>
+              <a:rPr sz="2400"/>
+              <a:t>歩き終わったら</a:t>
             </a:r>
           </a:p>
           <a:p>
             <a:pPr lvl="1"/>
             <a:r>
-              <a:rPr sz="1500"/>
-              <a:t>長半径の 2 倍の円（地図の白い丸）</a:t>
-            </a:r>
-          </a:p>
-        </p:txBody>
-      </p:sp>
-      <p:pic>
-        <p:nvPicPr>
-          <p:cNvPr id="4" name="Picture 3" descr="template_ps.png"/>
-          <p:cNvPicPr>
-            <a:picLocks noChangeAspect="1"/>
-          </p:cNvPicPr>
-          <p:nvPr/>
-        </p:nvPicPr>
-        <p:blipFill>
-          <a:blip r:embed="rId3"/>
-          <a:stretch>
-            <a:fillRect/>
-          </a:stretch>
-        </p:blipFill>
-        <p:spPr>
-          <a:xfrm>
-            <a:off x="7223760" y="1188720"/>
-            <a:ext cx="4314613" cy="4480560"/>
-          </a:xfrm>
-          <a:prstGeom prst="rect">
-            <a:avLst/>
-          </a:prstGeom>
-        </p:spPr>
-      </p:pic>
+              <a:rPr sz="2000"/>
+              <a:t>歩いた中で点数が一番高かった組 → 最良の倍率（Totani と同じ）</a:t>
+            </a:r>
+          </a:p>
+          <a:p>
+            <a:pPr lvl="1"/>
+            <a:r>
+              <a:rPr sz="2000"/>
+              <a:t>歩いた範囲の広さ → 倍率の誤差</a:t>
+            </a:r>
+          </a:p>
+        </p:txBody>
+      </p:sp>
       <p:sp>
         <p:nvSpPr>
           <p:cNvPr id="8" name="TextBox 7">
@@ -15230,7 +14391,7 @@
             </a:r>
             <a:r>
               <a:rPr lang="en-US" sz="1400"/>
-              <a:t> T. Totani (2025), arXiv:2507.07209 §2.3</a:t>
+              <a:t> T. Totani (2025), arXiv:2507.07209 §2.2</a:t>
             </a:r>
             <a:endParaRPr lang="en-US"/>
           </a:p>
@@ -15277,8 +14438,8 @@
           <a:lstStyle/>
           <a:p>
             <a:r>
-              <a:rPr sz="3000"/>
-              <a:t>成分⑤：Loop I</a:t>
+              <a:rPr sz="3400"/>
+              <a:t>手法③：有意度 σ の出し方</a:t>
             </a:r>
           </a:p>
         </p:txBody>
@@ -15295,8 +14456,8 @@
         </p:nvSpPr>
         <p:spPr>
           <a:xfrm>
-            <a:off x="548640" y="1371600"/>
-            <a:ext cx="6400800" cy="4297680"/>
+            <a:off x="841248" y="1463040"/>
+            <a:ext cx="10515600" cy="4114800"/>
           </a:xfrm>
         </p:spPr>
         <p:txBody>
@@ -15304,106 +14465,43 @@
           <a:lstStyle/>
           <a:p>
             <a:r>
-              <a:rPr sz="1800"/>
-              <a:t>電波で見える、空の 100° 以上に広がる巨大な輪っか</a:t>
+              <a:rPr sz="2400"/>
+              <a:t>ハロー「あり」と「なし」の 2 通りで当てはめる</a:t>
+            </a:r>
+          </a:p>
+          <a:p>
+            <a:r>
+              <a:rPr sz="2400"/>
+              <a:t>差 Δln L = ln L(あり) − ln L(なし)</a:t>
+            </a:r>
+          </a:p>
+          <a:p>
+            <a:r>
+              <a:rPr sz="2400"/>
+              <a:t>有意度 σ = √( 2 Δln L )</a:t>
+            </a:r>
+          </a:p>
+          <a:p>
+            <a:r>
+              <a:rPr sz="2400"/>
+              <a:t>根拠：Wilks の定理（ガンマ線天文学の標準の換算。Totani の 13–19σ も同じ）</a:t>
             </a:r>
           </a:p>
           <a:p>
             <a:pPr lvl="1"/>
             <a:r>
-              <a:rPr sz="1500"/>
-              <a:t>ガンマ線でも見えている</a:t>
-            </a:r>
-          </a:p>
-          <a:p>
-            <a:r>
-              <a:rPr sz="1800"/>
-              <a:t>正体は未確定</a:t>
-            </a:r>
-          </a:p>
-          <a:p>
-            <a:pPr lvl="1"/>
-            <a:r>
-              <a:rPr sz="1500"/>
-              <a:t>近くの超新星の残骸か、銀河中心から吹き出したものか</a:t>
-            </a:r>
-          </a:p>
-          <a:p>
-            <a:r>
-              <a:rPr sz="1800"/>
-              <a:t>型紙：近くの超新星の残骸とみなした形</a:t>
-            </a:r>
-          </a:p>
-          <a:p>
-            <a:pPr lvl="1"/>
-            <a:r>
-              <a:rPr sz="1500"/>
-              <a:t>半径 50〜100 pc の殻 2 つが、一様に光る</a:t>
-            </a:r>
-          </a:p>
-          <a:p>
-            <a:pPr lvl="1"/>
-            <a:r>
-              <a:rPr sz="1500"/>
-              <a:t>殻の位置と大きさは Fermi-LAT チームの値</a:t>
-            </a:r>
-          </a:p>
-          <a:p>
-            <a:r>
-              <a:rPr sz="1800"/>
-              <a:t>2 つの殻に、別々の倍率（0 以上、最初は 0）</a:t>
-            </a:r>
-          </a:p>
-        </p:txBody>
-      </p:sp>
-      <p:pic>
-        <p:nvPicPr>
-          <p:cNvPr id="4" name="Picture 3" descr="template_loopI_a.png"/>
-          <p:cNvPicPr>
-            <a:picLocks noChangeAspect="1"/>
-          </p:cNvPicPr>
-          <p:nvPr/>
-        </p:nvPicPr>
-        <p:blipFill>
-          <a:blip r:embed="rId3"/>
-          <a:stretch>
-            <a:fillRect/>
-          </a:stretch>
-        </p:blipFill>
-        <p:spPr>
-          <a:xfrm>
-            <a:off x="7086600" y="1828800"/>
-            <a:ext cx="2468880" cy="2563837"/>
-          </a:xfrm>
-          <a:prstGeom prst="rect">
-            <a:avLst/>
-          </a:prstGeom>
-        </p:spPr>
-      </p:pic>
-      <p:pic>
-        <p:nvPicPr>
-          <p:cNvPr id="5" name="Picture 4" descr="template_loopI_b.png"/>
-          <p:cNvPicPr>
-            <a:picLocks noChangeAspect="1"/>
-          </p:cNvPicPr>
-          <p:nvPr/>
-        </p:nvPicPr>
-        <p:blipFill>
-          <a:blip r:embed="rId4"/>
-          <a:stretch>
-            <a:fillRect/>
-          </a:stretch>
-        </p:blipFill>
-        <p:spPr>
-          <a:xfrm>
-            <a:off x="9601200" y="1828800"/>
-            <a:ext cx="2468880" cy="2563837"/>
-          </a:xfrm>
-          <a:prstGeom prst="rect">
-            <a:avLst/>
-          </a:prstGeom>
-        </p:spPr>
-      </p:pic>
+              <a:rPr sz="2000"/>
+              <a:t>データが十分多いと、2Δln L は自由度 1 の χ² 分布に従う</a:t>
+            </a:r>
+          </a:p>
+          <a:p>
+            <a:r>
+              <a:rPr sz="2400"/>
+              <a:t>→ この定理が本当に成り立つかが、後で問題になる</a:t>
+            </a:r>
+          </a:p>
+        </p:txBody>
+      </p:sp>
       <p:sp>
         <p:nvSpPr>
           <p:cNvPr id="8" name="TextBox 7">
@@ -15438,7 +14536,7 @@
             </a:r>
             <a:r>
               <a:rPr lang="en-US" sz="1400"/>
-              <a:t> T. Totani (2025), arXiv:2507.07209 §2.3 (殻の値は Fermi-LAT チームの論文)</a:t>
+              <a:t> S. S. Wilks (1938), Ann. Math. Stat. 9, 60</a:t>
             </a:r>
             <a:endParaRPr lang="en-US"/>
           </a:p>

--- a/slides/2026-10-03_研究進捗報告_claude.pptx
+++ b/slides/2026-10-03_研究進捗報告_claude.pptx
@@ -5,55 +5,55 @@
     <p:sldMasterId id="2147483648" r:id="rId1"/>
   </p:sldMasterIdLst>
   <p:notesMasterIdLst>
-    <p:notesMasterId r:id="rId53"/>
+    <p:notesMasterId r:id="rId48"/>
   </p:notesMasterIdLst>
   <p:sldIdLst>
     <p:sldId id="256" r:id="rId2"/>
     <p:sldId id="257" r:id="rId3"/>
     <p:sldId id="258" r:id="rId4"/>
     <p:sldId id="259" r:id="rId5"/>
-    <p:sldId id="312" r:id="rId60"/>
-    <p:sldId id="307" r:id="rId12"/>
-    <p:sldId id="308" r:id="rId13"/>
-    <p:sldId id="294" r:id="rId14"/>
-    <p:sldId id="261" r:id="rId15"/>
-    <p:sldId id="262" r:id="rId16"/>
-    <p:sldId id="295" r:id="rId17"/>
-    <p:sldId id="296" r:id="rId18"/>
-    <p:sldId id="297" r:id="rId19"/>
-    <p:sldId id="298" r:id="rId20"/>
-    <p:sldId id="309" r:id="rId21"/>
-    <p:sldId id="299" r:id="rId22"/>
-    <p:sldId id="300" r:id="rId23"/>
-    <p:sldId id="263" r:id="rId24"/>
-    <p:sldId id="264" r:id="rId25"/>
-    <p:sldId id="310" r:id="rId26"/>
-    <p:sldId id="311" r:id="rId27"/>
-    <p:sldId id="265" r:id="rId28"/>
-    <p:sldId id="266" r:id="rId29"/>
-    <p:sldId id="267" r:id="rId30"/>
-    <p:sldId id="268" r:id="rId31"/>
-    <p:sldId id="269" r:id="rId32"/>
-    <p:sldId id="271" r:id="rId33"/>
-    <p:sldId id="272" r:id="rId34"/>
-    <p:sldId id="273" r:id="rId35"/>
-    <p:sldId id="274" r:id="rId36"/>
-    <p:sldId id="275" r:id="rId37"/>
-    <p:sldId id="276" r:id="rId38"/>
-    <p:sldId id="277" r:id="rId39"/>
-    <p:sldId id="278" r:id="rId40"/>
-    <p:sldId id="279" r:id="rId41"/>
-    <p:sldId id="280" r:id="rId42"/>
-    <p:sldId id="281" r:id="rId43"/>
-    <p:sldId id="282" r:id="rId44"/>
-    <p:sldId id="283" r:id="rId45"/>
-    <p:sldId id="284" r:id="rId46"/>
-    <p:sldId id="285" r:id="rId47"/>
-    <p:sldId id="286" r:id="rId48"/>
-    <p:sldId id="287" r:id="rId49"/>
-    <p:sldId id="288" r:id="rId50"/>
-    <p:sldId id="289" r:id="rId51"/>
-    <p:sldId id="290" r:id="rId52"/>
+    <p:sldId id="312" r:id="rId6"/>
+    <p:sldId id="307" r:id="rId7"/>
+    <p:sldId id="308" r:id="rId8"/>
+    <p:sldId id="294" r:id="rId9"/>
+    <p:sldId id="261" r:id="rId10"/>
+    <p:sldId id="262" r:id="rId11"/>
+    <p:sldId id="295" r:id="rId12"/>
+    <p:sldId id="296" r:id="rId13"/>
+    <p:sldId id="297" r:id="rId14"/>
+    <p:sldId id="298" r:id="rId15"/>
+    <p:sldId id="309" r:id="rId16"/>
+    <p:sldId id="299" r:id="rId17"/>
+    <p:sldId id="300" r:id="rId18"/>
+    <p:sldId id="263" r:id="rId19"/>
+    <p:sldId id="264" r:id="rId20"/>
+    <p:sldId id="310" r:id="rId21"/>
+    <p:sldId id="311" r:id="rId22"/>
+    <p:sldId id="265" r:id="rId23"/>
+    <p:sldId id="266" r:id="rId24"/>
+    <p:sldId id="267" r:id="rId25"/>
+    <p:sldId id="268" r:id="rId26"/>
+    <p:sldId id="269" r:id="rId27"/>
+    <p:sldId id="271" r:id="rId28"/>
+    <p:sldId id="272" r:id="rId29"/>
+    <p:sldId id="273" r:id="rId30"/>
+    <p:sldId id="274" r:id="rId31"/>
+    <p:sldId id="275" r:id="rId32"/>
+    <p:sldId id="276" r:id="rId33"/>
+    <p:sldId id="277" r:id="rId34"/>
+    <p:sldId id="278" r:id="rId35"/>
+    <p:sldId id="279" r:id="rId36"/>
+    <p:sldId id="280" r:id="rId37"/>
+    <p:sldId id="281" r:id="rId38"/>
+    <p:sldId id="282" r:id="rId39"/>
+    <p:sldId id="283" r:id="rId40"/>
+    <p:sldId id="284" r:id="rId41"/>
+    <p:sldId id="285" r:id="rId42"/>
+    <p:sldId id="286" r:id="rId43"/>
+    <p:sldId id="287" r:id="rId44"/>
+    <p:sldId id="288" r:id="rId45"/>
+    <p:sldId id="289" r:id="rId46"/>
+    <p:sldId id="290" r:id="rId47"/>
   </p:sldIdLst>
   <p:sldSz cx="12192000" cy="6858000"/>
   <p:notesSz cx="6858000" cy="9144000"/>
@@ -184,7 +184,7 @@
   <pc:docChgLst>
     <pc:chgData name="202304239" userId="ab1adf7a-b8eb-4038-b404-de23e20d8a3a" providerId="ADAL" clId="{6C0E59ED-D716-49AF-B2FA-B94E7B8E5A8C}"/>
     <pc:docChg chg="custSel delSld modSld">
-      <pc:chgData name="202304239" userId="ab1adf7a-b8eb-4038-b404-de23e20d8a3a" providerId="ADAL" clId="{6C0E59ED-D716-49AF-B2FA-B94E7B8E5A8C}" dt="2026-10-03T03:37:35.283" v="54" actId="47"/>
+      <pc:chgData name="202304239" userId="ab1adf7a-b8eb-4038-b404-de23e20d8a3a" providerId="ADAL" clId="{6C0E59ED-D716-49AF-B2FA-B94E7B8E5A8C}" dt="2026-10-03T04:13:39.011" v="59" actId="27614"/>
       <pc:docMkLst>
         <pc:docMk/>
       </pc:docMkLst>
@@ -245,6 +245,21 @@
             <pc:docMk/>
             <pc:sldMk cId="0" sldId="260"/>
             <ac:picMk id="6" creationId="{00000000-0000-0000-0000-000000000000}"/>
+          </ac:picMkLst>
+        </pc:picChg>
+      </pc:sldChg>
+      <pc:sldChg chg="addSp modSp mod">
+        <pc:chgData name="202304239" userId="ab1adf7a-b8eb-4038-b404-de23e20d8a3a" providerId="ADAL" clId="{6C0E59ED-D716-49AF-B2FA-B94E7B8E5A8C}" dt="2026-10-03T04:13:39.011" v="59" actId="27614"/>
+        <pc:sldMkLst>
+          <pc:docMk/>
+          <pc:sldMk cId="0" sldId="295"/>
+        </pc:sldMkLst>
+        <pc:picChg chg="add mod">
+          <ac:chgData name="202304239" userId="ab1adf7a-b8eb-4038-b404-de23e20d8a3a" providerId="ADAL" clId="{6C0E59ED-D716-49AF-B2FA-B94E7B8E5A8C}" dt="2026-10-03T04:13:39.011" v="59" actId="27614"/>
+          <ac:picMkLst>
+            <pc:docMk/>
+            <pc:sldMk cId="0" sldId="295"/>
+            <ac:picMk id="5" creationId="{960CE5B3-4BC1-0B00-D670-CAC2F1397BD5}"/>
           </ac:picMkLst>
         </pc:picChg>
       </pc:sldChg>
@@ -661,19 +676,7 @@
           <a:bodyPr/>
           <a:lstStyle/>
           <a:p>
-            <a:r>
-              <a:t>対消滅: 暗黒物質の粒子 2 個がぶつかって消え、そのエネルギーがガンマ線などになる。粒子が 2 個要るので、明るさは密度の 2 乗に比例する。</a:t>
-            </a:r>
-          </a:p>
-          <a:p>
-            <a:r>
-              <a:t>Totani (2025) の信号は、WIMP なら質量 0.5–0.8 TeV に相当する。銀河中心 GeV 超過 (GCE、35–65 GeV の WIMP) とは別の信号。</a:t>
-            </a:r>
-          </a:p>
-          <a:p>
-            <a:r>
-              <a:t>σ (シグマ) は「偶然ではこれくらい起きにくい」という目安。5σ で約 350 万分の 1。</a:t>
-            </a:r>
+            <a:endParaRPr/>
           </a:p>
         </p:txBody>
       </p:sp>
@@ -742,22 +745,22 @@
           <a:lstStyle/>
           <a:p>
             <a:r>
-              <a:t>NFW: シミュレーションで得られる暗黒物質ハローの典型的な密度の形。中心付近では距離に反比例、外側では距離の 3 乗に反比例して薄くなる。</a:t>
-            </a:r>
-          </a:p>
-          <a:p>
-            <a:r>
-              <a:t>形はエネルギーで変わらない (どのエネルギーでも同じ地図)。明るさ (倍率) だけを各エネルギーで決める。だから「どのエネルギーでハローが必要か」が有意度のスペクトルになる。</a:t>
-            </a:r>
-          </a:p>
-          <a:p>
-            <a:r>
-              <a:t>ICS と同じく、なめらかで中心に向かって明るい。違いは、ハローのほうが中心に強く集まっていること。</a:t>
-            </a:r>
-          </a:p>
-          <a:p>
-            <a:r>
-              <a:t>右の地図: 20.8 GeV の型紙 (倍率は掛けていない。形だけを見る図)。cloud_reports/2026-10-02_plot_templates.py で作成。</a:t>
+              <a:t>MCMC (マルコフ連鎖モンテカルロ): 「今いる点の近くに一歩動いてみて、尤度が上がれば進む、下がっても確率的に進む」を繰り返す。長く歩くと、歩いた場所の分布が事後分布になる。</a:t>
+            </a:r>
+          </a:p>
+          <a:p>
+            <a:r>
+              <a:t>事前分布は一様 (倍率の符号の制約と、広い範囲の制限だけ)。</a:t>
+            </a:r>
+          </a:p>
+          <a:p>
+            <a:r>
+              <a:t>emcee は、複数の歩行者が互いの位置を使って次の一歩を決める方式 (affine-invariant ensemble sampler)。</a:t>
+            </a:r>
+          </a:p>
+          <a:p>
+            <a:r>
+              <a:t>自己相関時間 τ: 何歩離れたら前の位置を「忘れる」か。50τ 以上の長さは emcee の推奨。</a:t>
             </a:r>
           </a:p>
         </p:txBody>
@@ -827,12 +830,17 @@
           <a:lstStyle/>
           <a:p>
             <a:r>
-              <a:t>この後の尤度・有意度・MCMC のスライドは、全部「係数 9 個の決め方」の説明。難しい言葉が出てきたら、このスライドに戻って「今どの行の話か」を確認する。</a:t>
-            </a:r>
-          </a:p>
-          <a:p>
-            <a:r>
-              <a:t>型紙 = 前の 7 枚で見た地図。係数 = その地図を何倍して足すか。</a:t>
+              <a:t>このスライドが「対応表」。この後のスライドは全部この言葉で説明する。</a:t>
+            </a:r>
+          </a:p>
+          <a:p>
+            <a:r>
+              <a:t>9 次元の山は紙に描けない。だから地図全体を調べるのではなく、歩いて足あとを残し、足あとから山の形を知る。</a:t>
+            </a:r>
+          </a:p>
+          <a:p>
+            <a:r>
+              <a:t>スクショ候補: 点数 (高さ) を計算する関数 log_probability (658〜663 行)。コードは code/mcmc_fit_all_bins.py (10/3 にローカルで修正を当てた今のファイルの行番号。コミット 880fbdb)。</a:t>
             </a:r>
           </a:p>
         </p:txBody>
@@ -902,27 +910,27 @@
           <a:lstStyle/>
           <a:p>
             <a:r>
-              <a:t>たとえ: 霧で何も見えない山の上で、一番高い場所を探したい。手元には高度計 (尤度) しかない。</a:t>
-            </a:r>
-          </a:p>
-          <a:p>
-            <a:r>
-              <a:t>歩く人 (MCMC) は、一歩ずつ足を出して高度計を見る。上りなら必ずその方向へ進み、下りでもたまに進む。下りにも進むのは、山頂で止まらずに山の広がり (どこまでが十分高いか) も知るため。</a:t>
-            </a:r>
-          </a:p>
-          <a:p>
-            <a:r>
-              <a:t>歩き終わったら、記録の中で一番高かった地点が最良の倍率、よく歩き回った範囲の幅が誤差になる。</a:t>
-            </a:r>
-          </a:p>
-          <a:p>
-            <a:r>
-              <a:t>ここでの「山」は 9 次元 (倍率が 9 個)。紙に描けないので、歩いて調べるしかない。</a:t>
-            </a:r>
-          </a:p>
-          <a:p>
-            <a:r>
-              <a:t>Totani (2025) §2.2: 最良値と統計誤差を、尤度を MCMC で最大化して求める。本研究も同じ (10/2 に揃えた)。</a:t>
+              <a:t>ベイズの定理の読み方: 「データを見る前の考え (π: どこに入ってよいか)」に「データの当てはまり (L: 高度計)」を掛けると「データを見た後の考え (高さ)」になる。</a:t>
+            </a:r>
+          </a:p>
+          <a:p>
+            <a:r>
+              <a:t>今回の π は一様: 入ってよい範囲 (ガス・ICS などは 0 以上、全部 |f| ≤ 10⁶) なら同じ値、外なら 0。だから高さの形は高度計の読み (尤度) と同じになる。</a:t>
+            </a:r>
+          </a:p>
+          <a:p>
+            <a:r>
+              <a:t>P(D) は「海抜何メートルから測るか」の基準のようなもの。2 地点の高さを比べるときは、どちらにも同じ基準が入っているので割り算で消える。MCMC は比べることしかしないので、P(D) を計算しなくてよい。</a:t>
+            </a:r>
+          </a:p>
+          <a:p>
+            <a:r>
+              <a:t>対数にするのは、数が大きすぎたり小さすぎたりしてコンピュータで扱えなくなるのを防ぐため。</a:t>
+            </a:r>
+          </a:p>
+          <a:p>
+            <a:r>
+              <a:t>スクショ候補: log_prior (635〜649 行、立ち入り禁止のチェック)、log_likelihood (652〜655 行、高度計)、log_probability (658〜663 行、両方を足す)。コードは code/mcmc_fit_all_bins.py (10/3 にローカルで修正を当てた今のファイルの行番号。コミット 880fbdb)。</a:t>
             </a:r>
           </a:p>
         </p:txBody>
@@ -992,22 +1000,22 @@
           <a:lstStyle/>
           <a:p>
             <a:r>
-              <a:t>「なし」は「あり」の特別な場合 (ハローの倍率 = 0) なので、入れ子のモデル。入れ子なら Δln L ≥ 0。</a:t>
-            </a:r>
-          </a:p>
-          <a:p>
-            <a:r>
-              <a:t>Wilks の定理: 帰無仮説 (ハローなし) が正しいとき、2Δln L は自由度 1 の χ² 分布。だから √(2Δln L) が「標準正規分布で何σ」に対応する。</a:t>
-            </a:r>
-          </a:p>
-          <a:p>
-            <a:r>
-              <a:t>定理の前提: データが多い (漸近的)、モデルが正しい、など。モデル (型紙) が間違っていると成り立たない。</a:t>
-            </a:r>
-          </a:p>
-          <a:p>
-            <a:r>
-              <a:t>Totani との関係: Totani (2025) Fig. 9 はハローあり・なしの ln L の差 (Δln L) を示しており、本文の 13–19σ はそれを σ = √(2Δln L) で σ に直した値。Totani は「Wilks の定理」という言葉は書いていないが、この換算はガンマ線天文学で標準 (2Δln L は TS = test statistic と呼ばれ、EGRET の解析 Mattox et al. 1996, ApJ 461, 396 から使われている)。本研究は Totani と同じ換算を使っている。</a:t>
+              <a:t>例: 今いる場所の高さが 100、足を出した先の高さが 80 なら r = 0.8。0〜1 の乱数を引いて 0.8 より小さければ (80% の確率で) 移る。高さが 10 なら r = 0.1 で、10% しか移らない。だから、低い場所にはめったに行かず、高い場所に長くいる。</a:t>
+            </a:r>
+          </a:p>
+          <a:p>
+            <a:r>
+              <a:t>長く歩くと「各場所にいた時間の割合」が「その場所の高さ」に比例するようになる (詳細つり合い)。だから足あとのヒストグラムが山の形 (事後分布) になる。</a:t>
+            </a:r>
+          </a:p>
+          <a:p>
+            <a:r>
+              <a:t>移らなかったときも今の場所をもう一度記録するのが大事。そうしないと、高い場所にとどまった回数が数えられない。</a:t>
+            </a:r>
+          </a:p>
+          <a:p>
+            <a:r>
+              <a:t>スクショ候補: 歩かせる部分 sampler.run_mcmc (882〜883 行)。メトロポリスの判定そのものは emcee の中にある。コードは code/mcmc_fit_all_bins.py (10/3 にローカルで修正を当てた今のファイルの行番号。コミット 880fbdb)。</a:t>
             </a:r>
           </a:p>
         </p:txBody>
@@ -1077,22 +1085,22 @@
           <a:lstStyle/>
           <a:p>
             <a:r>
-              <a:t>MCMC (マルコフ連鎖モンテカルロ): 「今いる点の近くに一歩動いてみて、尤度が上がれば進む、下がっても確率的に進む」を繰り返す。長く歩くと、歩いた場所の分布が事後分布になる。</a:t>
-            </a:r>
-          </a:p>
-          <a:p>
-            <a:r>
-              <a:t>事前分布は一様 (倍率の符号の制約と、広い範囲の制限だけ)。</a:t>
-            </a:r>
-          </a:p>
-          <a:p>
-            <a:r>
-              <a:t>emcee は、複数の歩行者が互いの位置を使って次の一歩を決める方式 (affine-invariant ensemble sampler)。</a:t>
-            </a:r>
-          </a:p>
-          <a:p>
-            <a:r>
-              <a:t>自己相関時間 τ: 何歩離れたら前の位置を「忘れる」か。50τ 以上の長さは emcee の推奨。</a:t>
+              <a:t>実データではない、説明用のおもちゃの例。倍率が 1 個だけの山 (1 次元) を、平均 1.48・幅 0.075 の形だと仮定して 3000 歩歩かせた。</a:t>
+            </a:r>
+          </a:p>
+          <a:p>
+            <a:r>
+              <a:t>わざと山から離れた 1.2 から出発させたので、最初はふもとから登っていく。この登っている途中 (最初の 200 歩) は山の形と関係ないので捨てる (バーンイン)。</a:t>
+            </a:r>
+          </a:p>
+          <a:p>
+            <a:r>
+              <a:t>そのあとは山の上を行ったり来たりしている。足あとのヒストグラム (右の灰色) が、本当の山の形 (点線) と重なっている = 足あとから山の形が分かる。</a:t>
+            </a:r>
+          </a:p>
+          <a:p>
+            <a:r>
+              <a:t>図は slides/figs/plot_mcmc_toy.py で作った (コメント付き)。</a:t>
             </a:r>
           </a:p>
         </p:txBody>
@@ -1162,17 +1170,32 @@
           <a:lstStyle/>
           <a:p>
             <a:r>
-              <a:t>このスライドが「対応表」。この後のスライドは全部この言葉で説明する。</a:t>
-            </a:r>
-          </a:p>
-          <a:p>
-            <a:r>
-              <a:t>9 次元の山は紙に描けない。だから地図全体を調べるのではなく、歩いて足あとを残し、足あとから山の形を知る。</a:t>
-            </a:r>
-          </a:p>
-          <a:p>
-            <a:r>
-              <a:t>スクショ候補: 点数 (高さ) を計算する関数 log_probability (658〜663 行)。コードは code/mcmc_fit_all_bins.py (10/3 にローカルで修正を当てた今のファイルの行番号。コミット 880fbdb)。</a:t>
+              <a:t>どの歩き方でも、正しく長く歩けば足あとの分布は同じ山の形 (事後分布) になる。違うのは、歩く速さ (効率) と、どんな山が得意か。</a:t>
+            </a:r>
+          </a:p>
+          <a:p>
+            <a:r>
+              <a:t>ギブス法: 9 個の倍率のうち 1 個だけを動かし、残り 8 個は止めておく。これを順番にくり返す。</a:t>
+            </a:r>
+          </a:p>
+          <a:p>
+            <a:r>
+              <a:t>ハミルトニアン MC (HMC): 山の傾き (尤度の微分) を使って、遠くまで一気に動く。パラメータが多いときに強い。</a:t>
+            </a:r>
+          </a:p>
+          <a:p>
+            <a:r>
+              <a:t>焼きなまし法: 金属をゆっくり冷やす「焼きなまし」が名前の由来。最初は下りにもよく進み、だんだん進みにくくして、最後は頂上で止まる。最良値を探す道具で、誤差は出ない。</a:t>
+            </a:r>
+          </a:p>
+          <a:p>
+            <a:r>
+              <a:t>歩けているかの確認 (歩き方の種類ではない): 受理率 (足を出したうち、実際に移った割合。emcee では 0.2〜0.5 くらいが目安。今回の 20.8 GeV は 0.42)、自己相関時間 τ (何歩で前の場所を忘れるか)。</a:t>
+            </a:r>
+          </a:p>
+          <a:p>
+            <a:r>
+              <a:t>emcee: Foreman-Mackey et al. (2013) の Python ライブラリ。中身は Goodman &amp; Weare (2010) のアンサンブル法 (ストレッチ移動)。歩く人数・歩数・捨てる歩数は Totani の論文に書かれていないので、本研究で決めた (32 人・6000 歩・最初の 2000 歩を捨てる)。</a:t>
             </a:r>
           </a:p>
         </p:txBody>
@@ -1242,27 +1265,22 @@
           <a:lstStyle/>
           <a:p>
             <a:r>
-              <a:t>ベイズの定理の読み方: 「データを見る前の考え (π: どこに入ってよいか)」に「データの当てはまり (L: 高度計)」を掛けると「データを見た後の考え (高さ)」になる。</a:t>
-            </a:r>
-          </a:p>
-          <a:p>
-            <a:r>
-              <a:t>今回の π は一様: 入ってよい範囲 (ガス・ICS などは 0 以上、全部 |f| ≤ 10⁶) なら同じ値、外なら 0。だから高さの形は高度計の読み (尤度) と同じになる。</a:t>
-            </a:r>
-          </a:p>
-          <a:p>
-            <a:r>
-              <a:t>P(D) は「海抜何メートルから測るか」の基準のようなもの。2 地点の高さを比べるときは、どちらにも同じ基準が入っているので割り算で消える。MCMC は比べることしかしないので、P(D) を計算しなくてよい。</a:t>
-            </a:r>
-          </a:p>
-          <a:p>
-            <a:r>
-              <a:t>対数にするのは、数が大きすぎたり小さすぎたりしてコンピュータで扱えなくなるのを防ぐため。</a:t>
-            </a:r>
-          </a:p>
-          <a:p>
-            <a:r>
-              <a:t>スクショ候補: log_prior (635〜649 行、立ち入り禁止のチェック)、log_likelihood (652〜655 行、高度計)、log_probability (658〜663 行、両方を足す)。コードは code/mcmc_fit_all_bins.py (10/3 にローカルで修正を当てた今のファイルの行番号。コミット 880fbdb)。</a:t>
+              <a:t>細長い山: 仲間たちの散らばり方自体が「山が細長い方向」を表している。仲間のいる方向に沿って一歩を出すので、細長い山でも効率よく歩ける。</a:t>
+            </a:r>
+          </a:p>
+          <a:p>
+            <a:r>
+              <a:t>Z⁸ の 8 は「倍率の数 9 − 1」。線の上で伸び縮みさせた分、足を出せる場所の広さが変わるので、それを補正する。Z の範囲 1/2〜2 は emcee の決まった値 (a = 2)。</a:t>
+            </a:r>
+          </a:p>
+          <a:p>
+            <a:r>
+              <a:t>Totani と同じ初期値: 点源・GALPROP (ガス・ICS) = 1 倍、等方 = E²dN/dE 1e-4 相当、Loop I・バブル・ハロー = 0 (Totani §2.3)。</a:t>
+            </a:r>
+          </a:p>
+          <a:p>
+            <a:r>
+              <a:t>スクショ候補: 出発点を決める行 (871〜875 行)、32 人で歩かせる emcee.EnsembleSampler (882 行)。コードは code/mcmc_fit_all_bins.py (10/3 にローカルで修正を当てた今のファイルの行番号。コミット 880fbdb)。</a:t>
             </a:r>
           </a:p>
         </p:txBody>
@@ -1332,22 +1350,37 @@
           <a:lstStyle/>
           <a:p>
             <a:r>
-              <a:t>例: 今いる場所の高さが 100、足を出した先の高さが 80 なら r = 0.8。0〜1 の乱数を引いて 0.8 より小さければ (80% の確率で) 移る。高さが 10 なら r = 0.1 で、10% しか移らない。だから、低い場所にはめったに行かず、高い場所に長くいる。</a:t>
-            </a:r>
-          </a:p>
-          <a:p>
-            <a:r>
-              <a:t>長く歩くと「各場所にいた時間の割合」が「その場所の高さ」に比例するようになる (詳細つり合い)。だから足あとのヒストグラムが山の形 (事後分布) になる。</a:t>
-            </a:r>
-          </a:p>
-          <a:p>
-            <a:r>
-              <a:t>移らなかったときも今の場所をもう一度記録するのが大事。そうしないと、高い場所にとどまった回数が数えられない。</a:t>
-            </a:r>
-          </a:p>
-          <a:p>
-            <a:r>
-              <a:t>スクショ候補: 歩かせる部分 sampler.run_mcmc (882〜883 行)。メトロポリスの判定そのものは emcee の中にある。コードは code/mcmc_fit_all_bins.py (10/3 にローカルで修正を当てた今のファイルの行番号。コミット 880fbdb)。</a:t>
+              <a:t>ハローなしの山: ハローの倍率を 0 に固定した 8 次元の山。ハローありの山 (9 次元) より低いか同じ。2 つの頂上の高さの差が Δln L。</a:t>
+            </a:r>
+          </a:p>
+          <a:p>
+            <a:r>
+              <a:t>頂上に届いているかの確認: 坂を登る方法 (勾配法) で頂上を求めて、一番高い足あととの差を調べた。13 ビンすべてで ln L の差 0.6 以下、有意度の差 0.28σ 以下。確認のためだけで、結果には使っていない。</a:t>
+            </a:r>
+          </a:p>
+          <a:p>
+            <a:r>
+              <a:t>長さの目安: 自己相関時間 τ (何歩離れたら前の場所を忘れるか) の 50 倍以上が推奨。20.8 GeV で τ ≈ 650 歩なので 3 万歩以上が理想だが、6000 歩。</a:t>
+            </a:r>
+          </a:p>
+          <a:p>
+            <a:r>
+              <a:t>数字は本人 PC で、Totani と同じやり方で出した値 (10/3、results/mcmc_allbins_gasICS_v20t/)。</a:t>
+            </a:r>
+          </a:p>
+          <a:p>
+            <a:r>
+              <a:t>スクショ候補: 一番高い足あとを探す行 (884〜886 行)、有意度 (924〜925 行)、誤差の 16〜84% (941 行)。コードは code/mcmc_fit_all_bins.py (10/3 にローカルで修正を当てた今のファイルの行番号。コミット 880fbdb)。</a:t>
+            </a:r>
+          </a:p>
+          <a:p>
+            <a:r>
+              <a:t>なぜ最初を捨てるか: 出発点は Totani と同じ初期値で、山のふもとにある。最初のうちは頂上へ登っている途中なので、その足あとは「山の形」を表していない。だから誤差の計算からは外す (バーンイン)。一番高い足あと (最良値) は、捨てた分も含めて全部の中から探している。</a:t>
+            </a:r>
+          </a:p>
+          <a:p>
+            <a:r>
+              <a:t>捨てる歩数は本研究で決めた値 (Totani の論文には書かれていない)。最初は 400 歩だったが、歩く人数 (20/32/64)・乱数の種 (3 通り)・歩数 (6000/20000) を変えて確かめたところ、400 歩では誤差の上端が乱数の種によって 1.59〜1.89 とぶれたので、2000 歩に変えた (2000 歩ではどれも 1.56〜1.57。この確認は型紙の作り方が少し違う確認用の計算で、本番の 2000 歩の誤差は 1.40〜1.56)。最良値 1.48 と有意度 19.0σ (本人 PC) は捨てる歩数によらず同じ。</a:t>
             </a:r>
           </a:p>
         </p:txBody>
@@ -1417,22 +1450,22 @@
           <a:lstStyle/>
           <a:p>
             <a:r>
-              <a:t>実データではない、説明用のおもちゃの例。倍率が 1 個だけの山 (1 次元) を、平均 1.48・幅 0.075 の形だと仮定して 3000 歩歩かせた。</a:t>
-            </a:r>
-          </a:p>
-          <a:p>
-            <a:r>
-              <a:t>わざと山から離れた 1.2 から出発させたので、最初はふもとから登っていく。この登っている途中 (最初の 200 歩) は山の形と関係ないので捨てる (バーンイン)。</a:t>
-            </a:r>
-          </a:p>
-          <a:p>
-            <a:r>
-              <a:t>そのあとは山の上を行ったり来たりしている。足あとのヒストグラム (右の灰色) が、本当の山の形 (点線) と重なっている = 足あとから山の形が分かる。</a:t>
-            </a:r>
-          </a:p>
-          <a:p>
-            <a:r>
-              <a:t>図は slides/figs/plot_mcmc_toy.py で作った (コメント付き)。</a:t>
+              <a:t>青が本研究 (10/3、本人 PC で Totani と同じやり方 = MCMC で最良値。results/mcmc_allbins_gasICS_v20t/)、赤が Totani Fig. 9。</a:t>
+            </a:r>
+          </a:p>
+          <a:p>
+            <a:r>
+              <a:t>緑は青を 1.26 で割ったもの。1.26 = 何も無い空 23 か所で同じ解析をしたときの σ のばらつき (本当は 1 になるはず)。薄い緑の帯は 1.26 の 95% 区間 (1.14–1.39) で割った範囲。20.8 GeV で 15.1σ (13.7–16.7σ)。</a:t>
+            </a:r>
+          </a:p>
+          <a:p>
+            <a:r>
+              <a:t>注意: 赤 (Totani) は較正していない名目の値。緑と赤が近いのは、定義の違う値どうしの比較なので、「Totani の値が正しく較正されている」という意味ではない。同じ定義で比べるのは青と赤。</a:t>
+            </a:r>
+          </a:p>
+          <a:p>
+            <a:r>
+              <a:t>較正の仮定: 19σ のような大きな値でも同じ 1.26 倍かは確かめていない。</a:t>
             </a:r>
           </a:p>
         </p:txBody>
@@ -1502,32 +1535,18 @@
           <a:lstStyle/>
           <a:p>
             <a:r>
-              <a:t>どの歩き方でも、正しく長く歩けば足あとの分布は同じ山の形 (事後分布) になる。違うのは、歩く速さ (効率) と、どんな山が得意か。</a:t>
-            </a:r>
-          </a:p>
-          <a:p>
-            <a:r>
-              <a:t>ギブス法: 9 個の倍率のうち 1 個だけを動かし、残り 8 個は止めておく。これを順番にくり返す。</a:t>
-            </a:r>
-          </a:p>
-          <a:p>
-            <a:r>
-              <a:t>ハミルトニアン MC (HMC): 山の傾き (尤度の微分) を使って、遠くまで一気に動く。パラメータが多いときに強い。</a:t>
-            </a:r>
-          </a:p>
-          <a:p>
-            <a:r>
-              <a:t>焼きなまし法: 金属をゆっくり冷やす「焼きなまし」が名前の由来。最初は下りにもよく進み、だんだん進みにくくして、最後は頂上で止まる。最良値を探す道具で、誤差は出ない。</a:t>
-            </a:r>
-          </a:p>
-          <a:p>
-            <a:r>
-              <a:t>歩けているかの確認 (歩き方の種類ではない): 受理率 (足を出したうち、実際に移った割合。emcee では 0.2〜0.5 くらいが目安。今回の 20.8 GeV は 0.42)、自己相関時間 τ (何歩で前の場所を忘れるか)。</a:t>
-            </a:r>
-          </a:p>
-          <a:p>
-            <a:r>
-              <a:t>emcee: Foreman-Mackey et al. (2013) の Python ライブラリ。中身は Goodman &amp; Weare (2010) のアンサンブル法 (ストレッチ移動)。歩く人数・歩数・捨てる歩数は Totani の論文に書かれていないので、本研究で決めた (32 人・6000 歩・最初の 2000 歩を捨てる)。</a:t>
+              <a:t>縮退: 2 つの成分の形が似ていて、どちらに光を割り振っても同じくらい合ってしまう状態。</a:t>
+            </a:r>
+          </a:p>
+          <a:p>
+            <a:r>
+              <a:t>たとえ: 部屋に電球 (ICS) がついていて、もう 1 つの光 (ハロー) を探している。写真では 2 つの光の形がほとんど同じなので、余った明るさが本当にもう 1 つの光なのか、電球が少し明るいだけなのか見分けにくい。</a:t>
+            </a:r>
+          </a:p>
+          <a:p>
+            <a:r>
+              <a:t>図: 20.8 GeV の型紙そのもの (倍率は掛けていない)。横軸は銀河面からの角度、縦軸は明るさ (|b| = 25° を 1 にそろえた。経度は ROI 全体で平均)。2 本の線がほぼ重なる = 緯度方向の暗くなり方が同じ。作図 /home/arsei/slidework/make_lat_profile.py。
+(前の図: ICS の倍率。ハローなしでは全エネルギーで約 1.4〜1.6 倍でほぼ平ら。ハローを入れると、ハローが効くビンでだけへこむ。slides/figs/fig_ics_norm_totani.png)</a:t>
             </a:r>
           </a:p>
         </p:txBody>
@@ -1597,17 +1616,17 @@
           <a:lstStyle/>
           <a:p>
             <a:r>
-              <a:t>Totani (2025) §2.1 と同じ選び方。画素は 0.125°。</a:t>
-            </a:r>
-          </a:p>
-          <a:p>
-            <a:r>
-              <a:t>本研究のデータは 780 週のうち 778 週 (2 週分が欠けている)。</a:t>
-            </a:r>
-          </a:p>
-          <a:p>
-            <a:r>
-              <a:t>銀河面を除くのは、ガスや点源が多すぎて背景の誤差が大きいため。</a:t>
+              <a:t>対消滅: 暗黒物質の粒子 2 個がぶつかって消え、そのエネルギーがガンマ線などになる。粒子が 2 個要るので、明るさは密度の 2 乗に比例する。</a:t>
+            </a:r>
+          </a:p>
+          <a:p>
+            <a:r>
+              <a:t>Totani (2025) の信号は、WIMP なら質量 0.5–0.8 TeV に相当する。銀河中心 GeV 超過 (GCE、35–65 GeV の WIMP) とは別の信号。</a:t>
+            </a:r>
+          </a:p>
+          <a:p>
+            <a:r>
+              <a:t>σ (シグマ) は「偶然ではこれくらい起きにくい」という目安。5σ で約 350 万分の 1。</a:t>
             </a:r>
           </a:p>
         </p:txBody>
@@ -1677,22 +1696,32 @@
           <a:lstStyle/>
           <a:p>
             <a:r>
-              <a:t>細長い山: 仲間たちの散らばり方自体が「山が細長い方向」を表している。仲間のいる方向に沿って一歩を出すので、細長い山でも効率よく歩ける。</a:t>
-            </a:r>
-          </a:p>
-          <a:p>
-            <a:r>
-              <a:t>Z⁸ の 8 は「倍率の数 9 − 1」。線の上で伸び縮みさせた分、足を出せる場所の広さが変わるので、それを補正する。Z の範囲 1/2〜2 は emcee の決まった値 (a = 2)。</a:t>
-            </a:r>
-          </a:p>
-          <a:p>
-            <a:r>
-              <a:t>Totani と同じ初期値: 点源・GALPROP (ガス・ICS) = 1 倍、等方 = E²dN/dE 1e-4 相当、Loop I・バブル・ハロー = 0 (Totani §2.3)。</a:t>
-            </a:r>
-          </a:p>
-          <a:p>
-            <a:r>
-              <a:t>スクショ候補: 出発点を決める行 (871〜875 行)、32 人で歩かせる emcee.EnsembleSampler (882 行)。コードは code/mcmc_fit_all_bins.py (10/3 にローカルで修正を当てた今のファイルの行番号。コミット 880fbdb)。</a:t>
+              <a:t>図は 20.8 GeV の型紙そのもの (倍率は掛けていない)。ICS は GALPROP (galdef SLZ6R30T150C2)、ハローは NFW (Via Lactea II)。</a:t>
+            </a:r>
+          </a:p>
+          <a:p>
+            <a:r>
+              <a:t>縦方向 (経度を全部平均、|b| 25°→55°): ハロー 2.70 倍、ICS 2.60 倍暗くなる → ほぼ同じ。</a:t>
+            </a:r>
+          </a:p>
+          <a:p>
+            <a:r>
+              <a:t>横方向 (|b| = 20〜40° の帯、|l| 0°→40°): ハロー 2.67 倍、ICS 1.18 倍 → ここが違う。</a:t>
+            </a:r>
+          </a:p>
+          <a:p>
+            <a:r>
+              <a:t>ICS が横に広いのは、星の光と電子が銀河の円盤 (横に広い) に沿って多いため。ハローは丸い玉なので、どの向きにも同じように中心へ集まる。</a:t>
+            </a:r>
+          </a:p>
+          <a:p>
+            <a:r>
+              <a:t>太陽は銀河中心から 8 kpc 離れているので、どちらも空いっぱいに広がったぼんやりした光に見える。</a:t>
+            </a:r>
+          </a:p>
+          <a:p>
+            <a:r>
+              <a:t>作図: /home/arsei/slidework/make_profiles.py (2026-10-03、ローカル)</a:t>
             </a:r>
           </a:p>
         </p:txBody>
@@ -1762,37 +1791,32 @@
           <a:lstStyle/>
           <a:p>
             <a:r>
-              <a:t>ハローなしの山: ハローの倍率を 0 に固定した 8 次元の山。ハローありの山 (9 次元) より低いか同じ。2 つの頂上の高さの差が Δln L。</a:t>
-            </a:r>
-          </a:p>
-          <a:p>
-            <a:r>
-              <a:t>頂上に届いているかの確認: 坂を登る方法 (勾配法) で頂上を求めて、一番高い足あととの差を調べた。13 ビンすべてで ln L の差 0.6 以下、有意度の差 0.28σ 以下。確認のためだけで、結果には使っていない。</a:t>
-            </a:r>
-          </a:p>
-          <a:p>
-            <a:r>
-              <a:t>長さの目安: 自己相関時間 τ (何歩離れたら前の場所を忘れるか) の 50 倍以上が推奨。20.8 GeV で τ ≈ 650 歩なので 3 万歩以上が理想だが、6000 歩。</a:t>
-            </a:r>
-          </a:p>
-          <a:p>
-            <a:r>
-              <a:t>数字は本人 PC で、Totani と同じやり方で出した値 (10/3、results/mcmc_allbins_gasICS_v20t/)。</a:t>
-            </a:r>
-          </a:p>
-          <a:p>
-            <a:r>
-              <a:t>スクショ候補: 一番高い足あとを探す行 (884〜886 行)、有意度 (924〜925 行)、誤差の 16〜84% (941 行)。コードは code/mcmc_fit_all_bins.py (10/3 にローカルで修正を当てた今のファイルの行番号。コミット 880fbdb)。</a:t>
-            </a:r>
-          </a:p>
-          <a:p>
-            <a:r>
-              <a:t>なぜ最初を捨てるか: 出発点は Totani と同じ初期値で、山のふもとにある。最初のうちは頂上へ登っている途中なので、その足あとは「山の形」を表していない。だから誤差の計算からは外す (バーンイン)。一番高い足あと (最良値) は、捨てた分も含めて全部の中から探している。</a:t>
-            </a:r>
-          </a:p>
-          <a:p>
-            <a:r>
-              <a:t>捨てる歩数は本研究で決めた値 (Totani の論文には書かれていない)。最初は 400 歩だったが、歩く人数 (20/32/64)・乱数の種 (3 通り)・歩数 (6000/20000) を変えて確かめたところ、400 歩では誤差の上端が乱数の種によって 1.59〜1.89 とぶれたので、2000 歩に変えた (2000 歩ではどれも 1.56〜1.57。この確認は型紙の作り方が少し違う確認用の計算で、本番の 2000 歩の誤差は 1.40〜1.56)。最良値 1.48 と有意度 19.0σ (本人 PC) は捨てる歩数によらず同じ。</a:t>
+              <a:t>等方背景の倍率 (本研究 / Totani): 20 GeV 付近で約 0.4 倍、一番低いエネルギー (1.5 GeV) では v20 で約 1/200。</a:t>
+            </a:r>
+          </a:p>
+          <a:p>
+            <a:r>
+              <a:t>Loop I の近い殻: 太陽が殻の壁の中 (半径 62〜81 pc、太陽から中心まで 78 pc) にいるので、ROI 全体を覆い、等方背景と数学的に区別できない (.dev/TOTANI_SPEC.md 3.7a)。</a:t>
+            </a:r>
+          </a:p>
+          <a:p>
+            <a:r>
+              <a:t>空の上の方だけで計算 (|b| ≥ 30°, 40°): 1.5 GeV の等方背景の倍率が 19 倍、55 倍に戻る。Totani 比 0.005 → 0.27 (2026-07-31、MCMC_BMIN)。</a:t>
+            </a:r>
+          </a:p>
+          <a:p>
+            <a:r>
+              <a:t>低いエネルギーでは、GALPROP の出力のスペクトルが Totani と違う (1.5 GeV で 0.56 倍) ことも効いている。</a:t>
+            </a:r>
+          </a:p>
+          <a:p>
+            <a:r>
+              <a:t>全成分の合計の明るさは Totani とほぼ同じ (0.96 倍)、ハロー単独も 1.16 倍。</a:t>
+            </a:r>
+          </a:p>
+          <a:p>
+            <a:r>
+              <a:t>図: 20.8 GeV の型紙、|b| = 20〜40° の帯での横方向の明るさ。作図 /home/arsei/slidework/make_profiles.py</a:t>
             </a:r>
           </a:p>
         </p:txBody>
@@ -1862,22 +1886,12 @@
           <a:lstStyle/>
           <a:p>
             <a:r>
-              <a:t>青が本研究 (10/3、本人 PC で Totani と同じやり方 = MCMC で最良値。results/mcmc_allbins_gasICS_v20t/)、赤が Totani Fig. 9。</a:t>
-            </a:r>
-          </a:p>
-          <a:p>
-            <a:r>
-              <a:t>緑は青を 1.26 で割ったもの。1.26 = 何も無い空 23 か所で同じ解析をしたときの σ のばらつき (本当は 1 になるはず)。薄い緑の帯は 1.26 の 95% 区間 (1.14–1.39) で割った範囲。20.8 GeV で 15.1σ (13.7–16.7σ)。</a:t>
-            </a:r>
-          </a:p>
-          <a:p>
-            <a:r>
-              <a:t>注意: 赤 (Totani) は較正していない名目の値。緑と赤が近いのは、定義の違う値どうしの比較なので、「Totani の値が正しく較正されている」という意味ではない。同じ定義で比べるのは青と赤。</a:t>
-            </a:r>
-          </a:p>
-          <a:p>
-            <a:r>
-              <a:t>較正の仮定: 19σ のような大きな値でも同じ 1.26 倍かは確かめていない。</a:t>
+              <a:t>① フェルミバブル = 銀河中心の上下に広がる、ガンマ線で明るい泡状の構造。その矩形 |l| &lt; 22°, 10° &lt; |b| &lt; 55° を当てはめから外した。</a:t>
+            </a:r>
+          </a:p>
+          <a:p>
+            <a:r>
+              <a:t>② 何も無い空 23 か所で同じ解析をした (2026-07-31)。</a:t>
             </a:r>
           </a:p>
         </p:txBody>
@@ -1947,18 +1961,27 @@
           <a:lstStyle/>
           <a:p>
             <a:r>
-              <a:t>縮退: 2 つの成分の形が似ていて、どちらに光を割り振っても同じくらい合ってしまう状態。</a:t>
-            </a:r>
-          </a:p>
-          <a:p>
-            <a:r>
-              <a:t>たとえ: 部屋に電球 (ICS) がついていて、もう 1 つの光 (ハロー) を探している。写真では 2 つの光の形がほとんど同じなので、余った明るさが本当にもう 1 つの光なのか、電球が少し明るいだけなのか見分けにくい。</a:t>
-            </a:r>
-          </a:p>
-          <a:p>
-            <a:r>
-              <a:t>図: 20.8 GeV の型紙そのもの (倍率は掛けていない)。横軸は銀河面からの角度、縦軸は明るさ (|b| = 25° を 1 にそろえた。経度は ROI 全体で平均)。2 本の線がほぼ重なる = 緯度方向の暗くなり方が同じ。作図 /home/arsei/slidework/make_lat_profile.py。
-(前の図: ICS の倍率。ハローなしでは全エネルギーで約 1.4〜1.6 倍でほぼ平ら。ハローを入れると、ハローが効くビンでだけへこむ。slides/figs/fig_ics_norm_totani.png)</a:t>
+              <a:t>フィッシャー情報: 尤度の山の鋭さ (2 階微分)。山が鋭いほどパラメータがよく決まる。</a:t>
+            </a:r>
+          </a:p>
+          <a:p>
+            <a:r>
+              <a:t>「ハローだけの手がかり」= 他の成分と区別できる部分の情報 (フィッシャー行列のシューア補行列)。有意度は、おおよそ「倍率の推定値 ÷ その誤差」で、誤差は情報の平方根に反比例する。</a:t>
+            </a:r>
+          </a:p>
+          <a:p>
+            <a:r>
+              <a:t>予測 6.4σ と実測 5.0σ の残りの差は、バブル外でハローの倍率が 0.77 倍と低いことで説明できる (予測 6.4σ は 10/1 の v20r で計算したフィッシャー情報から。実測と倍率は 10/3 本人 PC、Totani 方式)。この内外の差は約 1.5σ で、意味のある差ではない。</a:t>
+            </a:r>
+          </a:p>
+          <a:p>
+            <a:r>
+              <a:t>対照: 同じ形の矩形を経度方向に ±20°, ±30°, ±38° ずらして外すと 14.6〜16.4σ (Totani と同じやり方)。</a:t>
+            </a:r>
+          </a:p>
+          <a:p>
+            <a:r>
+              <a:t>たとえ: 写真の真ん中を隠すと自信が下がるが、それは見分けるヒントが真ん中に集まっていたから。</a:t>
             </a:r>
           </a:p>
         </p:txBody>
@@ -2028,32 +2051,22 @@
           <a:lstStyle/>
           <a:p>
             <a:r>
-              <a:t>図は 20.8 GeV の型紙そのもの (倍率は掛けていない)。ICS は GALPROP (galdef SLZ6R30T150C2)、ハローは NFW (Via Lactea II)。</a:t>
-            </a:r>
-          </a:p>
-          <a:p>
-            <a:r>
-              <a:t>縦方向 (経度を全部平均、|b| 25°→55°): ハロー 2.70 倍、ICS 2.60 倍暗くなる → ほぼ同じ。</a:t>
-            </a:r>
-          </a:p>
-          <a:p>
-            <a:r>
-              <a:t>横方向 (|b| = 20〜40° の帯、|l| 0°→40°): ハロー 2.67 倍、ICS 1.18 倍 → ここが違う。</a:t>
-            </a:r>
-          </a:p>
-          <a:p>
-            <a:r>
-              <a:t>ICS が横に広いのは、星の光と電子が銀河の円盤 (横に広い) に沿って多いため。ハローは丸い玉なので、どの向きにも同じように中心へ集まる。</a:t>
-            </a:r>
-          </a:p>
-          <a:p>
-            <a:r>
-              <a:t>太陽は銀河中心から 8 kpc 離れているので、どちらも空いっぱいに広がったぼんやりした光に見える。</a:t>
-            </a:r>
-          </a:p>
-          <a:p>
-            <a:r>
-              <a:t>作図: /home/arsei/slidework/make_profiles.py (2026-10-03、ローカル)</a:t>
+              <a:t>全体の明るさのずれ (ICS が GALPROP の 1.6 倍、など) は倍率が吸収するのでハローにはならない。ハローに化けるには「銀河中心寄りだけ明るい」という形のずれが必要。</a:t>
+            </a:r>
+          </a:p>
+          <a:p>
+            <a:r>
+              <a:t>等方近似: GALPROP の設定が IC_anisotropic = 0。Moskalenko &amp; Strong (2000) Fig. 6 では、非等方にすると 10 GeV 付近で 1.1〜1.3 倍、銀河中心の上より外側のほうが大きい。</a:t>
+            </a:r>
+          </a:p>
+          <a:p>
+            <a:r>
+              <a:t>3 分割 = 星の光・ちり・宇宙背景の光、の 3 種類の光を電子がはね上げたもの。19.0σ と 17.8σ は本人 PC で、Totani と同じやり方で出した値 (10/3、results/mcmc_allbins_gasICS_v20t_icssplit/)。Totani §3.4.4 の同種の確認とも同じ結論。</a:t>
+            </a:r>
+          </a:p>
+          <a:p>
+            <a:r>
+              <a:t>残る可能性: GALPROP の ICS の「空間の形」が、銀河中心寄りで 2.3 倍ずれている場合。今の道具では確かめられない。</a:t>
             </a:r>
           </a:p>
         </p:txBody>
@@ -2123,32 +2136,22 @@
           <a:lstStyle/>
           <a:p>
             <a:r>
-              <a:t>等方背景の倍率 (本研究 / Totani): 20 GeV 付近で約 0.4 倍、一番低いエネルギー (1.5 GeV) では v20 で約 1/200。</a:t>
-            </a:r>
-          </a:p>
-          <a:p>
-            <a:r>
-              <a:t>Loop I の近い殻: 太陽が殻の壁の中 (半径 62〜81 pc、太陽から中心まで 78 pc) にいるので、ROI 全体を覆い、等方背景と数学的に区別できない (.dev/TOTANI_SPEC.md 3.7a)。</a:t>
-            </a:r>
-          </a:p>
-          <a:p>
-            <a:r>
-              <a:t>空の上の方だけで計算 (|b| ≥ 30°, 40°): 1.5 GeV の等方背景の倍率が 19 倍、55 倍に戻る。Totani 比 0.005 → 0.27 (2026-07-31、MCMC_BMIN)。</a:t>
-            </a:r>
-          </a:p>
-          <a:p>
-            <a:r>
-              <a:t>低いエネルギーでは、GALPROP の出力のスペクトルが Totani と違う (1.5 GeV で 0.56 倍) ことも効いている。</a:t>
-            </a:r>
-          </a:p>
-          <a:p>
-            <a:r>
-              <a:t>全成分の合計の明るさは Totani とほぼ同じ (0.96 倍)、ハロー単独も 1.16 倍。</a:t>
-            </a:r>
-          </a:p>
-          <a:p>
-            <a:r>
-              <a:t>図: 20.8 GeV の型紙、|b| = 20〜40° の帯での横方向の明るさ。作図 /home/arsei/slidework/make_profiles.py</a:t>
+              <a:t>ばらつき = 0 からのずれの 2 乗平均の平方根。光子が十分あるビン 2–10 (2.6–169 GeV) の 207 個から計算。</a:t>
+            </a:r>
+          </a:p>
+          <a:p>
+            <a:r>
+              <a:t>95% 区間はブートストラップ (データを復元抽出し直して何度も計算) で付けた。同じ場所のビン同士は相関する (隣どうし +0.31) ので、場所ごとにまとめて引き直した。</a:t>
+            </a:r>
+          </a:p>
+          <a:p>
+            <a:r>
+              <a:t>較正の仮定: 背景モデル (型紙) の誤りで、σ の分散が一様に 1.26² 倍に膨らむ (統計でいう過分散)。19σ のような大きな値でも同じ倍率かは確かめていない。天の川は背景がもっと複雑なので、本当の倍率はもっと大きいかもしれない (15σ は楽観寄り)。</a:t>
+            </a:r>
+          </a:p>
+          <a:p>
+            <a:r>
+              <a:t>記録の「1.362 (250 個)」は今の結果ファイルからは再現できなかった。最大 4.50σ は最低エネルギー (1.5 GeV) のビン。</a:t>
             </a:r>
           </a:p>
         </p:txBody>
@@ -2218,12 +2221,17 @@
           <a:lstStyle/>
           <a:p>
             <a:r>
-              <a:t>① フェルミバブル = 銀河中心の上下に広がる、ガンマ線で明るい泡状の構造。その矩形 |l| &lt; 22°, 10° &lt; |b| &lt; 55° を当てはめから外した。</a:t>
-            </a:r>
-          </a:p>
-          <a:p>
-            <a:r>
-              <a:t>② 何も無い空 23 か所で同じ解析をした (2026-07-31)。</a:t>
+              <a:t>黒の点: 各エネルギービンで 23 か所から測ったばらつきと 95% 区間。灰色の帯: ビン 2–10 をまとめた値 1.26 とその 95% 区間。</a:t>
+            </a:r>
+          </a:p>
+          <a:p>
+            <a:r>
+              <a:t>灰色の点: 1.5 GeV はばらつき 2.2 の外れ (望遠鏡のぼやけが大きく、背景モデルの誤りが効きやすい)。285 GeV 以上は光子が数個〜数十個で、Wilks の定理の前提 (データが多い) が崩れる。</a:t>
+            </a:r>
+          </a:p>
+          <a:p>
+            <a:r>
+              <a:t>図は slides/figs/plot_null_variance.py で作った。</a:t>
             </a:r>
           </a:p>
         </p:txBody>
@@ -2293,27 +2301,7 @@
           <a:lstStyle/>
           <a:p>
             <a:r>
-              <a:t>フィッシャー情報: 尤度の山の鋭さ (2 階微分)。山が鋭いほどパラメータがよく決まる。</a:t>
-            </a:r>
-          </a:p>
-          <a:p>
-            <a:r>
-              <a:t>「ハローだけの手がかり」= 他の成分と区別できる部分の情報 (フィッシャー行列のシューア補行列)。有意度は、おおよそ「倍率の推定値 ÷ その誤差」で、誤差は情報の平方根に反比例する。</a:t>
-            </a:r>
-          </a:p>
-          <a:p>
-            <a:r>
-              <a:t>予測 6.4σ と実測 5.0σ の残りの差は、バブル外でハローの倍率が 0.77 倍と低いことで説明できる (予測 6.4σ は 10/1 の v20r で計算したフィッシャー情報から。実測と倍率は 10/3 本人 PC、Totani 方式)。この内外の差は約 1.5σ で、意味のある差ではない。</a:t>
-            </a:r>
-          </a:p>
-          <a:p>
-            <a:r>
-              <a:t>対照: 同じ形の矩形を経度方向に ±20°, ±30°, ±38° ずらして外すと 14.6〜16.4σ (Totani と同じやり方)。</a:t>
-            </a:r>
-          </a:p>
-          <a:p>
-            <a:r>
-              <a:t>たとえ: 写真の真ん中を隠すと自信が下がるが、それは見分けるヒントが真ん中に集まっていたから。</a:t>
+              <a:t>言えるのは「既知の背景では説明しにくい超過がある」まで。それが暗黒物質かどうかは別の主張。</a:t>
             </a:r>
           </a:p>
         </p:txBody>
@@ -2383,22 +2371,17 @@
           <a:lstStyle/>
           <a:p>
             <a:r>
-              <a:t>全体の明るさのずれ (ICS が GALPROP の 1.6 倍、など) は倍率が吸収するのでハローにはならない。ハローに化けるには「銀河中心寄りだけ明るい」という形のずれが必要。</a:t>
-            </a:r>
-          </a:p>
-          <a:p>
-            <a:r>
-              <a:t>等方近似: GALPROP の設定が IC_anisotropic = 0。Moskalenko &amp; Strong (2000) Fig. 6 では、非等方にすると 10 GeV 付近で 1.1〜1.3 倍、銀河中心の上より外側のほうが大きい。</a:t>
-            </a:r>
-          </a:p>
-          <a:p>
-            <a:r>
-              <a:t>3 分割 = 星の光・ちり・宇宙背景の光、の 3 種類の光を電子がはね上げたもの。19.0σ と 17.8σ は本人 PC で、Totani と同じやり方で出した値 (10/3、results/mcmc_allbins_gasICS_v20t_icssplit/)。Totani §3.4.4 の同種の確認とも同じ結論。</a:t>
-            </a:r>
-          </a:p>
-          <a:p>
-            <a:r>
-              <a:t>残る可能性: GALPROP の ICS の「空間の形」が、銀河中心寄りで 2.3 倍ずれている場合。今の道具では確かめられない。</a:t>
+              <a:t>矮小銀河 54 個は Local Volume Database (Pace 2025) の確認済みの銀河。何も無い空は |b| &gt; 20° で互いに 20° 以上離した場所。</a:t>
+            </a:r>
+          </a:p>
+          <a:p>
+            <a:r>
+              <a:t>成分は等方・ガス・ICS・点源・ハロー。バブルと Loop I は銀河中心の構造なので入れない。</a:t>
+            </a:r>
+          </a:p>
+          <a:p>
+            <a:r>
+              <a:t>たとえ: 天の川のハローは部屋全体を照らす光なので電球と見分けにくかった。矮小銀河は遠くの豆電球なので、半径 10° の中では電球 (ICS) は平らな背景にしか見えない。</a:t>
             </a:r>
           </a:p>
         </p:txBody>
@@ -2468,22 +2451,17 @@
           <a:lstStyle/>
           <a:p>
             <a:r>
-              <a:t>ばらつき = 0 からのずれの 2 乗平均の平方根。光子が十分あるビン 2–10 (2.6–169 GeV) の 207 個から計算。</a:t>
-            </a:r>
-          </a:p>
-          <a:p>
-            <a:r>
-              <a:t>95% 区間はブートストラップ (データを復元抽出し直して何度も計算) で付けた。同じ場所のビン同士は相関する (隣どうし +0.31) ので、場所ごとにまとめて引き直した。</a:t>
-            </a:r>
-          </a:p>
-          <a:p>
-            <a:r>
-              <a:t>較正の仮定: 背景モデル (型紙) の誤りで、σ の分散が一様に 1.26² 倍に膨らむ (統計でいう過分散)。19σ のような大きな値でも同じ倍率かは確かめていない。天の川は背景がもっと複雑なので、本当の倍率はもっと大きいかもしれない (15σ は楽観寄り)。</a:t>
-            </a:r>
-          </a:p>
-          <a:p>
-            <a:r>
-              <a:t>記録の「1.362 (250 個)」は今の結果ファイルからは再現できなかった。最大 4.50σ は最低エネルギー (1.5 GeV) のビン。</a:t>
+              <a:t>⟨σv⟩: 対消滅の起きやすさ、m: 粒子の質量、dN/dE: 1 回の対消滅で出る光のスペクトル。天の川と矮小銀河で同じエネルギービンを見るので、これらは全部共通。</a:t>
+            </a:r>
+          </a:p>
+          <a:p>
+            <a:r>
+              <a:t>矮小銀河の J は Pace &amp; Strigari (2019) の式: J(0.5°) = 10^17.72 (σ_los / 5 km/s)⁴ (d / 100 kpc)⁻² (r_1/2 / 100 pc)⁻¹ GeV² cm⁻⁵。σ_los は星の速度のばらつき。</a:t>
+            </a:r>
+          </a:p>
+          <a:p>
+            <a:r>
+              <a:t>「何σ見えるはずか」= 予測フラックス ÷ 各天体の測定誤差。</a:t>
             </a:r>
           </a:p>
         </p:txBody>
@@ -2553,27 +2531,17 @@
           <a:lstStyle/>
           <a:p>
             <a:r>
-              <a:t>型紙 (テンプレート) = その光源だけがあったら、空のどこがどれくらい明るいかの地図。</a:t>
-            </a:r>
-          </a:p>
-          <a:p>
-            <a:r>
-              <a:t>ICS (逆コンプトン散乱) = 宇宙線の電子が、星の光などをはね上げてガンマ線にしたもの。</a:t>
-            </a:r>
-          </a:p>
-          <a:p>
-            <a:r>
-              <a:t>GALPROP は ver.54、設定 SLZ6R30T150C2 (Totani と同じ)。</a:t>
-            </a:r>
-          </a:p>
-          <a:p>
-            <a:r>
-              <a:t>ハローは NFW 型 (Via Lactea II: rs = 21 kpc) の密度の 2 乗の視線積分。</a:t>
-            </a:r>
-          </a:p>
-          <a:p>
-            <a:r>
-              <a:t>ハローの倍率を負にも許すのは、「無いもの」を探すときに偏りを作らないため。</a:t>
+              <a:t>Totani (2025) §2.1 と同じ選び方。画素は 0.125°。</a:t>
+            </a:r>
+          </a:p>
+          <a:p>
+            <a:r>
+              <a:t>本研究のデータは 780 週のうち 778 週 (2 週分が欠けている)。</a:t>
+            </a:r>
+          </a:p>
+          <a:p>
+            <a:r>
+              <a:t>銀河面を除くのは、ガスや点源が多すぎて背景の誤差が大きいため。</a:t>
             </a:r>
           </a:p>
         </p:txBody>
@@ -2643,17 +2611,22 @@
           <a:lstStyle/>
           <a:p>
             <a:r>
-              <a:t>黒の点: 各エネルギービンで 23 か所から測ったばらつきと 95% 区間。灰色の帯: ビン 2–10 をまとめた値 1.26 とその 95% 区間。</a:t>
-            </a:r>
-          </a:p>
-          <a:p>
-            <a:r>
-              <a:t>灰色の点: 1.5 GeV はばらつき 2.2 の外れ (望遠鏡のぼやけが大きく、背景モデルの誤りが効きやすい)。285 GeV 以上は光子が数個〜数十個で、Wilks の定理の前提 (データが多い) が崩れる。</a:t>
-            </a:r>
-          </a:p>
-          <a:p>
-            <a:r>
-              <a:t>図は slides/figs/plot_null_variance.py で作った。</a:t>
+              <a:t>黒: 矮小銀河 52 + M31・M33 の全 13 ビンの有意度 (702 個)。灰色: 何も無い空 23 か所 (299 個)。点線: 理論の分布。</a:t>
+            </a:r>
+          </a:p>
+          <a:p>
+            <a:r>
+              <a:t>2 つの分布はほぼ同じ形 = 矮小銀河は「何も無い空」と区別できない。0 付近が高いのは、光子が数個しか無い高エネルギーのビンで σ がほぼ 0 になるため。</a:t>
+            </a:r>
+          </a:p>
+          <a:p>
+            <a:r>
+              <a:t>SMC・LMC はそれ自体が広がったガンマ線源で、解析で中心がマスクされるため使えない (54 − 2 = 52)。</a:t>
+            </a:r>
+          </a:p>
+          <a:p>
+            <a:r>
+              <a:t>図は slides/figs/plot_dwarf_results.py で作った。</a:t>
             </a:r>
           </a:p>
         </p:txBody>
@@ -2723,7 +2696,22 @@
           <a:lstStyle/>
           <a:p>
             <a:r>
-              <a:t>言えるのは「既知の背景では説明しにくい超過がある」まで。それが暗黒物質かどうかは別の主張。</a:t>
+              <a:t>予測が大きい天体ほど重く数える重み付き和。予測のパターンが分かっているときに、いちばん検出しやすいまとめ方。</a:t>
+            </a:r>
+          </a:p>
+          <a:p>
+            <a:r>
+              <a:t>43 天体 = 星の速度のばらつき σ_los が測られていて J が出せる矮小銀河 (SMC・LMC は除く)。</a:t>
+            </a:r>
+          </a:p>
+          <a:p>
+            <a:r>
+              <a:t>ずれ = (1.77 − 0.39) ÷ 1 = 1.4σ。天の川のハローの明るさは Totani と同じやり方の最良値。天の川側の局所密度 0.42 GeV/cm³ の場合。</a:t>
+            </a:r>
+          </a:p>
+          <a:p>
+            <a:r>
+              <a:t>注意: 9/28 の計算は SMC・LMC を誤って含めていた (予測 2.69σ のうち 2.06σ が SMC 1 天体)。</a:t>
             </a:r>
           </a:p>
         </p:txBody>
@@ -2793,17 +2781,27 @@
           <a:lstStyle/>
           <a:p>
             <a:r>
-              <a:t>矮小銀河 54 個は Local Volume Database (Pace 2025) の確認済みの銀河。何も無い空は |b| &gt; 20° で互いに 20° 以上離した場所。</a:t>
-            </a:r>
-          </a:p>
-          <a:p>
-            <a:r>
-              <a:t>成分は等方・ガス・ICS・点源・ハロー。バブルと Loop I は銀河中心の構造なので入れない。</a:t>
-            </a:r>
-          </a:p>
-          <a:p>
-            <a:r>
-              <a:t>たとえ: 天の川のハローは部屋全体を照らす光なので電球と見分けにくかった。矮小銀河は遠くの豆電球なので、半径 10° の中では電球 (ICS) は平らな背景にしか見えない。</a:t>
+              <a:t>Section II と Fig. 1 の内容。</a:t>
+            </a:r>
+          </a:p>
+          <a:p>
+            <a:r>
+              <a:t>dex = 対数で 1 桁。0.4 dex は約 2.5 倍、0.1 は約 1.26 倍、0.3 は約 2 倍。</a:t>
+            </a:r>
+          </a:p>
+          <a:p>
+            <a:r>
+              <a:t>非球対称: 楕円体の矮小銀河を球対称の NFW で解析すると、log10 J が最大 0.4 ずれる。</a:t>
+            </a:r>
+          </a:p>
+          <a:p>
+            <a:r>
+              <a:t>連星: 見分けられていない連星があると星の速度のばらつきが大きく見え、J を大きく見積もる (Reticulum II で約 0.3)。</a:t>
+            </a:r>
+          </a:p>
+          <a:p>
+            <a:r>
+              <a:t>誤差の分布: 多くの解析は log J の誤差を正規分布と仮定するが、本当の分布はすそが重い。</a:t>
             </a:r>
           </a:p>
         </p:txBody>
@@ -2873,17 +2871,22 @@
           <a:lstStyle/>
           <a:p>
             <a:r>
-              <a:t>⟨σv⟩: 対消滅の起きやすさ、m: 粒子の質量、dN/dE: 1 回の対消滅で出る光のスペクトル。天の川と矮小銀河で同じエネルギービンを見るので、これらは全部共通。</a:t>
-            </a:r>
-          </a:p>
-          <a:p>
-            <a:r>
-              <a:t>矮小銀河の J は Pace &amp; Strigari (2019) の式: J(0.5°) = 10^17.72 (σ_los / 5 km/s)⁴ (d / 100 kpc)⁻² (r_1/2 / 100 pc)⁻¹ GeV² cm⁻⁵。σ_los は星の速度のばらつき。</a:t>
-            </a:r>
-          </a:p>
-          <a:p>
-            <a:r>
-              <a:t>「何σ見えるはずか」= 予測フラックス ÷ 各天体の測定誤差。</a:t>
+              <a:t>Section III。FermiTools v2.5.1、fermipy v1.4.0。事象は P8R3 SOURCE V3、4 つの PSF クラス、エネルギーは 1 桁あたり 8 ビン。</a:t>
+            </a:r>
+          </a:p>
+          <a:p>
+            <a:r>
+              <a:t>背景の型紙: gll_iem_v07 (銀河拡散) と等方。点源カタログ (4FGL) の天体は簡単のため入れていない。</a:t>
+            </a:r>
+          </a:p>
+          <a:p>
+            <a:r>
+              <a:t>信号の空間の形: 古典的な矮小銀河は芯のある NFW (cNFW)、超微光の矮小銀河は切断した NFW。</a:t>
+            </a:r>
+          </a:p>
+          <a:p>
+            <a:r>
+              <a:t>本当の J (J_true) は Table I の中心値。</a:t>
             </a:r>
           </a:p>
         </p:txBody>
@@ -2953,22 +2956,22 @@
           <a:lstStyle/>
           <a:p>
             <a:r>
-              <a:t>黒: 矮小銀河 52 + M31・M33 の全 13 ビンの有意度 (702 個)。灰色: 何も無い空 23 か所 (299 個)。点線: 理論の分布。</a:t>
-            </a:r>
-          </a:p>
-          <a:p>
-            <a:r>
-              <a:t>2 つの分布はほぼ同じ形 = 矮小銀河は「何も無い空」と区別できない。0 付近が高いのは、光子が数個しか無い高エネルギーのビンで σ がほぼ 0 になるため。</a:t>
-            </a:r>
-          </a:p>
-          <a:p>
-            <a:r>
-              <a:t>SMC・LMC はそれ自体が広がったガンマ線源で、解析で中心がマスクされるため使えない (54 − 2 = 52)。</a:t>
-            </a:r>
-          </a:p>
-          <a:p>
-            <a:r>
-              <a:t>図は slides/figs/plot_dwarf_results.py で作った。</a:t>
+              <a:t>式 (6)〜(10)。J_obs = 星の動きの解析で出た値 (観測値)、J_true = 本当の値。</a:t>
+            </a:r>
+          </a:p>
+          <a:p>
+            <a:r>
+              <a:t>σ_L が小さい = 解析ソフトが「J はほぼ分かっている」と自信を持ちすぎている状態。</a:t>
+            </a:r>
+          </a:p>
+          <a:p>
+            <a:r>
+              <a:t>J は「局外パラメータ」(知りたいのは ⟨σv⟩ だが、決めないといけない他のパラメータ) で、尤度を最大にする値に置き換えて (プロファイル) から ⟨σv⟩ を調べる。</a:t>
+            </a:r>
+          </a:p>
+          <a:p>
+            <a:r>
+              <a:t>TS = 2 ln [ L(⟨σv⟩) / L(0) ]。</a:t>
             </a:r>
           </a:p>
         </p:txBody>
@@ -3038,22 +3041,12 @@
           <a:lstStyle/>
           <a:p>
             <a:r>
-              <a:t>予測が大きい天体ほど重く数える重み付き和。予測のパターンが分かっているときに、いちばん検出しやすいまとめ方。</a:t>
-            </a:r>
-          </a:p>
-          <a:p>
-            <a:r>
-              <a:t>43 天体 = 星の速度のばらつき σ_los が測られていて J が出せる矮小銀河 (SMC・LMC は除く)。</a:t>
-            </a:r>
-          </a:p>
-          <a:p>
-            <a:r>
-              <a:t>ずれ = (1.77 − 0.39) ÷ 1 = 1.4σ。天の川のハローの明るさは Totani と同じやり方の最良値。天の川側の局所密度 0.42 GeV/cm³ の場合。</a:t>
-            </a:r>
-          </a:p>
-          <a:p>
-            <a:r>
-              <a:t>注意: 9/28 の計算は SMC・LMC を誤って含めていた (予測 2.69σ のうち 2.06σ が SMC 1 天体)。</a:t>
+              <a:t>答えが分かっている仮想の宇宙で、解析が正しく答えを出せるかを試している。</a:t>
+            </a:r>
+          </a:p>
+          <a:p>
+            <a:r>
+              <a:t>カバレッジが足りない (アンダーカバレッジ) = 95% と言いながら、本物を 5% より多く除外してしまう。</a:t>
             </a:r>
           </a:p>
         </p:txBody>
@@ -3123,27 +3116,22 @@
           <a:lstStyle/>
           <a:p>
             <a:r>
-              <a:t>Section II と Fig. 1 の内容。</a:t>
-            </a:r>
-          </a:p>
-          <a:p>
-            <a:r>
-              <a:t>dex = 対数で 1 桁。0.4 dex は約 2.5 倍、0.1 は約 1.26 倍、0.3 は約 2 倍。</a:t>
-            </a:r>
-          </a:p>
-          <a:p>
-            <a:r>
-              <a:t>非球対称: 楕円体の矮小銀河を球対称の NFW で解析すると、log10 J が最大 0.4 ずれる。</a:t>
-            </a:r>
-          </a:p>
-          <a:p>
-            <a:r>
-              <a:t>連星: 見分けられていない連星があると星の速度のばらつきが大きく見え、J を大きく見積もる (Reticulum II で約 0.3)。</a:t>
-            </a:r>
-          </a:p>
-          <a:p>
-            <a:r>
-              <a:t>誤差の分布: 多くの解析は log J の誤差を正規分布と仮定するが、本当の分布はすそが重い。</a:t>
+              <a:t>誤差を「大きくする」は 2 乗和で足す: σ_L² = σ_cat² + 0.3² など。σ_cat はカタログに書かれた誤差。</a:t>
+            </a:r>
+          </a:p>
+          <a:p>
+            <a:r>
+              <a:t>Ursa Minor: 距離 76 kpc、log10 J_tot = 18.55 ± 0.05、見かけの広がり 0.59° (望遠鏡のぼやけより大きい)。</a:t>
+            </a:r>
+          </a:p>
+          <a:p>
+            <a:r>
+              <a:t>基準 (σ = σ_cat) では 1 万回中 0 回しか本物を除外しない (過大なカバレッジ)。J と ⟨σv⟩ の縮退で Wilks の定理が成り立たないため。</a:t>
+            </a:r>
+          </a:p>
+          <a:p>
+            <a:r>
+              <a:t>形: 本当は楕円の cNFW。楕円かどうかはあまり効かず、中心の尖り方と広がりが効く。</a:t>
             </a:r>
           </a:p>
         </p:txBody>
@@ -3213,22 +3201,27 @@
           <a:lstStyle/>
           <a:p>
             <a:r>
-              <a:t>Section III。FermiTools v2.5.1、fermipy v1.4.0。事象は P8R3 SOURCE V3、4 つの PSF クラス、エネルギーは 1 桁あたり 8 ビン。</a:t>
-            </a:r>
-          </a:p>
-          <a:p>
-            <a:r>
-              <a:t>背景の型紙: gll_iem_v07 (銀河拡散) と等方。点源カタログ (4FGL) の天体は簡単のため入れていない。</a:t>
-            </a:r>
-          </a:p>
-          <a:p>
-            <a:r>
-              <a:t>信号の空間の形: 古典的な矮小銀河は芯のある NFW (cNFW)、超微光の矮小銀河は切断した NFW。</a:t>
-            </a:r>
-          </a:p>
-          <a:p>
-            <a:r>
-              <a:t>本当の J (J_true) は Table I の中心値。</a:t>
+              <a:t>Section V。上限が 1 個のときよりゆるくなりにくいのは、J が大きい天体ほどカタログの誤差が大きいので、同じ量を足しても割合が小さいため。</a:t>
+            </a:r>
+          </a:p>
+          <a:p>
+            <a:r>
+              <a:t>Wilks の定理は「局外パラメータの数が少ない」ことを前提にする。27 個まとめると J が 27 個あり、前提が崩れる。</a:t>
+            </a:r>
+          </a:p>
+          <a:p>
+            <a:r>
+              <a:t>J_obs は対数で正規分布 → J そのものでは上に長いすそ。上に振れた天体が上限を強く引っ張り、下に振れた天体では打ち消せない。27 個のうち 1 個以上が 1.5σ 以上上に振れる確率は約 0.85。</a:t>
+            </a:r>
+          </a:p>
+          <a:p>
+            <a:r>
+              <a:t>全部を点として扱うと 37%。</a:t>
+            </a:r>
+          </a:p>
+          <a:p>
+            <a:r>
+              <a:t>何も無い領域 (blank field) での較正は Ref. [76] の方法。</a:t>
             </a:r>
           </a:p>
         </p:txBody>
@@ -3298,22 +3291,7 @@
           <a:lstStyle/>
           <a:p>
             <a:r>
-              <a:t>式 (6)〜(10)。J_obs = 星の動きの解析で出た値 (観測値)、J_true = 本当の値。</a:t>
-            </a:r>
-          </a:p>
-          <a:p>
-            <a:r>
-              <a:t>σ_L が小さい = 解析ソフトが「J はほぼ分かっている」と自信を持ちすぎている状態。</a:t>
-            </a:r>
-          </a:p>
-          <a:p>
-            <a:r>
-              <a:t>J は「局外パラメータ」(知りたいのは ⟨σv⟩ だが、決めないといけない他のパラメータ) で、尤度を最大にする値に置き換えて (プロファイル) から ⟨σv⟩ を調べる。</a:t>
-            </a:r>
-          </a:p>
-          <a:p>
-            <a:r>
-              <a:t>TS = 2 ln [ L(⟨σv⟩) / L(0) ]。</a:t>
+              <a:t>Section VI。「矮小銀河で信号が無くて当然」とまでは言っていない。「無いから暗黒物質ではない」と判断するのが早すぎるかもしれない、という主張。</a:t>
             </a:r>
           </a:p>
         </p:txBody>
@@ -3383,12 +3361,107 @@
           <a:lstStyle/>
           <a:p>
             <a:r>
-              <a:t>答えが分かっている仮想の宇宙で、解析が正しく答えを出せるかを試している。</a:t>
-            </a:r>
-          </a:p>
-          <a:p>
-            <a:r>
-              <a:t>カバレッジが足りない (アンダーカバレッジ) = 95% と言いながら、本物を 5% より多く除外してしまう。</a:t>
+              <a:t>論文の Section IV で J_obs を J_true のまわりに対数正規でばらつかせたのと同じ考え方。幅 0.5 は論文の推奨値 (abstract)。</a:t>
+            </a:r>
+          </a:p>
+          <a:p>
+            <a:r>
+              <a:t>言い方: J がどれくらいずれているか分からないので、サイコロを振って J をずらして予測を出す、を 20 万回繰り返した。そうすると「予測はだいたいこの範囲」という幅が分かる。</a:t>
+            </a:r>
+          </a:p>
+          <a:p>
+            <a:r>
+              <a:t>スクリプト: cloud_reports/2026-10-02_dwarf_J_uncertainty.py。</a:t>
+            </a:r>
+          </a:p>
+        </p:txBody>
+      </p:sp>
+      <p:sp>
+        <p:nvSpPr>
+          <p:cNvPr id="4" name="Slide Number Placeholder 3"/>
+          <p:cNvSpPr>
+            <a:spLocks noGrp="1"/>
+          </p:cNvSpPr>
+          <p:nvPr>
+            <p:ph type="sldNum" sz="quarter" idx="5"/>
+          </p:nvPr>
+        </p:nvSpPr>
+        <p:spPr/>
+      </p:sp>
+    </p:spTree>
+  </p:cSld>
+  <p:clrMapOvr>
+    <a:masterClrMapping/>
+  </p:clrMapOvr>
+</p:notes>
+</file>
+
+<file path=ppt/notesSlides/notesSlide4.xml><?xml version="1.0" encoding="utf-8"?>
+<p:notes xmlns:a="http://schemas.openxmlformats.org/drawingml/2006/main" xmlns:r="http://schemas.openxmlformats.org/officeDocument/2006/relationships" xmlns:p="http://schemas.openxmlformats.org/presentationml/2006/main">
+  <p:cSld>
+    <p:spTree>
+      <p:nvGrpSpPr>
+        <p:cNvPr id="1" name=""/>
+        <p:cNvGrpSpPr/>
+        <p:nvPr/>
+      </p:nvGrpSpPr>
+      <p:grpSpPr>
+        <a:xfrm>
+          <a:off x="0" y="0"/>
+          <a:ext cx="0" cy="0"/>
+          <a:chOff x="0" y="0"/>
+          <a:chExt cx="0" cy="0"/>
+        </a:xfrm>
+      </p:grpSpPr>
+      <p:sp>
+        <p:nvSpPr>
+          <p:cNvPr id="2" name="Slide Image Placeholder 1"/>
+          <p:cNvSpPr>
+            <a:spLocks noGrp="1" noRot="1" noChangeAspect="1"/>
+          </p:cNvSpPr>
+          <p:nvPr>
+            <p:ph type="sldImg" idx="2"/>
+          </p:nvPr>
+        </p:nvSpPr>
+        <p:spPr/>
+      </p:sp>
+      <p:sp>
+        <p:nvSpPr>
+          <p:cNvPr id="3" name="Notes Placeholder 2"/>
+          <p:cNvSpPr>
+            <a:spLocks noGrp="1"/>
+          </p:cNvSpPr>
+          <p:nvPr>
+            <p:ph type="body" sz="quarter" idx="3"/>
+          </p:nvPr>
+        </p:nvSpPr>
+        <p:spPr/>
+        <p:txBody>
+          <a:bodyPr/>
+          <a:lstStyle/>
+          <a:p>
+            <a:r>
+              <a:t>型紙 (テンプレート) = その光源だけがあったら、空のどこがどれくらい明るいかの地図。</a:t>
+            </a:r>
+          </a:p>
+          <a:p>
+            <a:r>
+              <a:t>ICS (逆コンプトン散乱) = 宇宙線の電子が、星の光などをはね上げてガンマ線にしたもの。</a:t>
+            </a:r>
+          </a:p>
+          <a:p>
+            <a:r>
+              <a:t>GALPROP は ver.54、設定 SLZ6R30T150C2 (Totani と同じ)。</a:t>
+            </a:r>
+          </a:p>
+          <a:p>
+            <a:r>
+              <a:t>ハローは NFW 型 (Via Lactea II: rs = 21 kpc) の密度の 2 乗の視線積分。</a:t>
+            </a:r>
+          </a:p>
+          <a:p>
+            <a:r>
+              <a:t>ハローの倍率を負にも許すのは、「無いもの」を探すときに偏りを作らないため。</a:t>
             </a:r>
           </a:p>
         </p:txBody>
@@ -3458,22 +3531,17 @@
           <a:lstStyle/>
           <a:p>
             <a:r>
-              <a:t>誤差を「大きくする」は 2 乗和で足す: σ_L² = σ_cat² + 0.3² など。σ_cat はカタログに書かれた誤差。</a:t>
-            </a:r>
-          </a:p>
-          <a:p>
-            <a:r>
-              <a:t>Ursa Minor: 距離 76 kpc、log10 J_tot = 18.55 ± 0.05、見かけの広がり 0.59° (望遠鏡のぼやけより大きい)。</a:t>
-            </a:r>
-          </a:p>
-          <a:p>
-            <a:r>
-              <a:t>基準 (σ = σ_cat) では 1 万回中 0 回しか本物を除外しない (過大なカバレッジ)。J と ⟨σv⟩ の縮退で Wilks の定理が成り立たないため。</a:t>
-            </a:r>
-          </a:p>
-          <a:p>
-            <a:r>
-              <a:t>形: 本当は楕円の cNFW。楕円かどうかはあまり効かず、中心の尖り方と広がりが効く。</a:t>
+              <a:t>重み w_i は今まで通り J の推定値から出した予測 pred_i のまま (解析する人は本当の J を知らないため)。</a:t>
+            </a:r>
+          </a:p>
+          <a:p>
+            <a:r>
+              <a:t>Φ = 標準正規分布の累積分布関数。p は片側。ずれ = 標準正規で p に対応する σ。</a:t>
+            </a:r>
+          </a:p>
+          <a:p>
+            <a:r>
+              <a:t>J の誤差は「期待の中央値」を少し上げる。対数正規は上に長いすそを持つので、合計が上に引っ張られる (論文 Section V と同じ現象)。</a:t>
             </a:r>
           </a:p>
         </p:txBody>
@@ -3543,27 +3611,17 @@
           <a:lstStyle/>
           <a:p>
             <a:r>
-              <a:t>Section V。上限が 1 個のときよりゆるくなりにくいのは、J が大きい天体ほどカタログの誤差が大きいので、同じ量を足しても割合が小さいため。</a:t>
-            </a:r>
-          </a:p>
-          <a:p>
-            <a:r>
-              <a:t>Wilks の定理は「局外パラメータの数が少ない」ことを前提にする。27 個まとめると J が 27 個あり、前提が崩れる。</a:t>
-            </a:r>
-          </a:p>
-          <a:p>
-            <a:r>
-              <a:t>J_obs は対数で正規分布 → J そのものでは上に長いすそ。上に振れた天体が上限を強く引っ張り、下に振れた天体では打ち消せない。27 個のうち 1 個以上が 1.5σ 以上上に振れる確率は約 0.85。</a:t>
-            </a:r>
-          </a:p>
-          <a:p>
-            <a:r>
-              <a:t>全部を点として扱うと 37%。</a:t>
-            </a:r>
-          </a:p>
-          <a:p>
-            <a:r>
-              <a:t>何も無い領域 (blank field) での較正は Ref. [76] の方法。</a:t>
+              <a:t>灰色の山: J の誤差を入れたときの予測の分布 (20 万回)。点線: J の誤差なしの予測 1.77。黒い点: 実測 0.39、横棒は測定の揺れ ±1.26。</a:t>
+            </a:r>
+          </a:p>
+          <a:p>
+            <a:r>
+              <a:t>点は山の左にあるが、横棒が山に届いているので、ずれは約 1.3σ で「たまたま」で起きる範囲。</a:t>
+            </a:r>
+          </a:p>
+          <a:p>
+            <a:r>
+              <a:t>図は slides/figs/plot_dwarf_J.py で作った。</a:t>
             </a:r>
           </a:p>
         </p:txBody>
@@ -3633,7 +3691,22 @@
           <a:lstStyle/>
           <a:p>
             <a:r>
-              <a:t>Section VI。「矮小銀河で信号が無くて当然」とまでは言っていない。「無いから暗黒物質ではない」と判断するのが早すぎるかもしれない、という主張。</a:t>
+              <a:t>予測は天の川側の局所密度 ρ☉ の −2 乗に比例する (天の川の J が密度の 2 乗に比例し、天の川の実測の明るさは固定のため)。</a:t>
+            </a:r>
+          </a:p>
+          <a:p>
+            <a:r>
+              <a:t>ρ☉ = 0.3: 期待 3.46 (誤差なし) / 4.86 (誤差あり、68% 2.64–9.95)、ずれ 2.4σ / 2.1σ (s = 1.26)。</a:t>
+            </a:r>
+          </a:p>
+          <a:p>
+            <a:r>
+              <a:t>ρ☉ = 0.6: 期待 0.87 / 1.21 (0.66–2.49)、ずれ 0.4σ / 0.7σ。</a:t>
+            </a:r>
+          </a:p>
+          <a:p>
+            <a:r>
+              <a:t>J の誤差を入れると、期待の幅が大きく広がり、「判定できない」がより強くなる。</a:t>
             </a:r>
           </a:p>
         </p:txBody>
@@ -3703,17 +3776,12 @@
           <a:lstStyle/>
           <a:p>
             <a:r>
-              <a:t>論文の Section IV で J_obs を J_true のまわりに対数正規でばらつかせたのと同じ考え方。幅 0.5 は論文の推奨値 (abstract)。</a:t>
-            </a:r>
-          </a:p>
-          <a:p>
-            <a:r>
-              <a:t>言い方: J がどれくらいずれているか分からないので、サイコロを振って J をずらして予測を出す、を 20 万回繰り返した。そうすると「予測はだいたいこの範囲」という幅が分かる。</a:t>
-            </a:r>
-          </a:p>
-          <a:p>
-            <a:r>
-              <a:t>スクリプト: cloud_reports/2026-10-02_dwarf_J_uncertainty.py。</a:t>
+              <a:t>15σ は「ハローがあるか」の強さ、1.3σ は「天の川と矮小銀河が食い違うか」の強さ。</a:t>
+            </a:r>
+          </a:p>
+          <a:p>
+            <a:r>
+              <a:t>どちらも Wilks の定理だけに頼らず、何も無い空で較正した値 (1.26) を使っている。</a:t>
             </a:r>
           </a:p>
         </p:txBody>
@@ -3783,17 +3851,7 @@
           <a:lstStyle/>
           <a:p>
             <a:r>
-              <a:t>重み w_i は今まで通り J の推定値から出した予測 pred_i のまま (解析する人は本当の J を知らないため)。</a:t>
-            </a:r>
-          </a:p>
-          <a:p>
-            <a:r>
-              <a:t>Φ = 標準正規分布の累積分布関数。p は片側。ずれ = 標準正規で p に対応する σ。</a:t>
-            </a:r>
-          </a:p>
-          <a:p>
-            <a:r>
-              <a:t>J の誤差は「期待の中央値」を少し上げる。対数正規は上に長いすそを持つので、合計が上に引っ張られる (論文 Section V と同じ現象)。</a:t>
+              <a:t>流れ: 再現 → 縮退による 3 つの疑問 → 背景の間違い説を否定・σ を較正・記録を整備 → 矮小銀河は非検出 → 論文の J の誤差を入れて「判定できない」を定量化。</a:t>
             </a:r>
           </a:p>
         </p:txBody>
@@ -3863,17 +3921,22 @@
           <a:lstStyle/>
           <a:p>
             <a:r>
-              <a:t>灰色の山: J の誤差を入れたときの予測の分布 (20 万回)。点線: J の誤差なしの予測 1.77。黒い点: 実測 0.39、横棒は測定の揺れ ±1.26。</a:t>
-            </a:r>
-          </a:p>
-          <a:p>
-            <a:r>
-              <a:t>点は山の左にあるが、横棒が山に届いているので、ずれは約 1.3σ で「たまたま」で起きる範囲。</a:t>
-            </a:r>
-          </a:p>
-          <a:p>
-            <a:r>
-              <a:t>図は slides/figs/plot_dwarf_J.py で作った。</a:t>
+              <a:t>中村 (2017) 講究録 §2: 状態空間モデル。システムノイズ (シミュレーションの誤差) と観測ノイズ (観測の誤差) を分けて書く。</a:t>
+            </a:r>
+          </a:p>
+          <a:p>
+            <a:r>
+              <a:t>§2.3.3–2.3.4: アンサンブルカルマンフィルタ・粒子フィルタは、確率分布をたくさんのサンプル (アンサンブル) で近似する (式 11)。</a:t>
+            </a:r>
+          </a:p>
+          <a:p>
+            <a:r>
+              <a:t>§3.3: モデル化誤差と数値計算の誤差を、システムノイズとして統一的に扱えることがデータ同化の利点。</a:t>
+            </a:r>
+          </a:p>
+          <a:p>
+            <a:r>
+              <a:t>正直な位置づけ: この解析は講究録を読む前に行った。後から読んで、同じ発想だと分かった。データ同化の中心は時間とともに変わる現象で、1 枚の空の地図にそのまま使える手法ではない。</a:t>
             </a:r>
           </a:p>
         </p:txBody>
@@ -3942,24 +4005,7 @@
           <a:bodyPr/>
           <a:lstStyle/>
           <a:p>
-            <a:r>
-              <a:t>予測は天の川側の局所密度 ρ☉ の −2 乗に比例する (天の川の J が密度の 2 乗に比例し、天の川の実測の明るさは固定のため)。</a:t>
-            </a:r>
-          </a:p>
-          <a:p>
-            <a:r>
-              <a:t>ρ☉ = 0.3: 期待 3.46 (誤差なし) / 4.86 (誤差あり、68% 2.64–9.95)、ずれ 2.4σ / 2.1σ (s = 1.26)。</a:t>
-            </a:r>
-          </a:p>
-          <a:p>
-            <a:r>
-              <a:t>ρ☉ = 0.6: 期待 0.87 / 1.21 (0.66–2.49)、ずれ 0.4σ / 0.7σ。</a:t>
-            </a:r>
-          </a:p>
-          <a:p>
-            <a:r>
-              <a:t>J の誤差を入れると、期待の幅が大きく広がり、「判定できない」がより強くなる。</a:t>
-            </a:r>
+            <a:endParaRPr/>
           </a:p>
         </p:txBody>
       </p:sp>
@@ -3983,7 +4029,7 @@
 </p:notes>
 </file>
 
-<file path=ppt/notesSlides/notesSlide47.xml><?xml version="1.0" encoding="utf-8"?>
+<file path=ppt/notesSlides/notesSlide5.xml><?xml version="1.0" encoding="utf-8"?>
 <p:notes xmlns:a="http://schemas.openxmlformats.org/drawingml/2006/main" xmlns:r="http://schemas.openxmlformats.org/officeDocument/2006/relationships" xmlns:p="http://schemas.openxmlformats.org/presentationml/2006/main">
   <p:cSld>
     <p:spTree>
@@ -4028,12 +4074,137 @@
           <a:lstStyle/>
           <a:p>
             <a:r>
-              <a:t>15σ は「ハローがあるか」の強さ、1.3σ は「天の川と矮小銀河が食い違うか」の強さ。</a:t>
-            </a:r>
-          </a:p>
-          <a:p>
-            <a:r>
-              <a:t>どちらも Wilks の定理だけに頼らず、何も無い空で較正した値 (1.26) を使っている。</a:t>
+              <a:t>地図はどれも 20.8 GeV の型紙 (倍率は掛けていない。形だけを見る図)。Loop I は殻 1、バブルは正の型紙。</a:t>
+            </a:r>
+          </a:p>
+          <a:p>
+            <a:r>
+              <a:t>以下は、まとめる前の 6 枚のノート (詳しい説明)。</a:t>
+            </a:r>
+          </a:p>
+          <a:p>
+            <a:r>
+              <a:t>【① 等方背景】たとえ: 部屋の壁全体がぼんやり同じ明るさで光っている、その「底上げ」の明るさ。</a:t>
+            </a:r>
+          </a:p>
+          <a:p>
+            <a:r>
+              <a:t>最初の値 10⁻⁴ は、これまでに測られた「銀河の外から来るガンマ線の背景」の典型的な明るさ (Totani §2.3)。</a:t>
+            </a:r>
+          </a:p>
+          <a:p>
+            <a:r>
+              <a:t>Loop I との区別: 殻 1 は太陽が殻の壁の中にあるため空のほぼ全体を覆い、明るさの変化が等方背景と同じくらい平ら。データからは 2 つの分け方が決まらず、合計だけが決まる (.dev/TOTANI_SPEC.md 3.7a)。</a:t>
+            </a:r>
+          </a:p>
+          <a:p>
+            <a:r>
+              <a:t>右の地図: 20.8 GeV の型紙 (倍率は掛けていない。形だけを見る図)。cloud_reports/2026-10-02_plot_templates.py で作成。</a:t>
+            </a:r>
+          </a:p>
+          <a:p>
+            <a:r>
+              <a:t>【② ガス】GALPROP: 宇宙線が銀河の中でどう生まれ、どう広がるかを計算し、そこから出るガンマ線の地図を作るシミュレーション (ver. 54、設定 SLZ6R30T150C2。Fermi-LAT チームの銀河拡散モデルでも使われている設定)。</a:t>
+            </a:r>
+          </a:p>
+          <a:p>
+            <a:r>
+              <a:t>π⁰ は電気を持たない中間子で、できるとすぐ (10⁻¹⁶ 秒ほど) 光子 2 個に壊れる。</a:t>
+            </a:r>
+          </a:p>
+          <a:p>
+            <a:r>
+              <a:t>ガス雲の模様は、電波 (水素の 21 cm 線) や、ちりによる星の光の赤み (E(B−V)) から作ったガスの地図に由来する。</a:t>
+            </a:r>
+          </a:p>
+          <a:p>
+            <a:r>
+              <a:t>右の地図: 20.8 GeV の型紙 (倍率は掛けていない。形だけを見る図)。cloud_reports/2026-10-02_plot_templates.py で作成。</a:t>
+            </a:r>
+          </a:p>
+          <a:p>
+            <a:r>
+              <a:t>【③ ICS】逆コンプトン散乱: 普通のコンプトン散乱は光が電子をはね飛ばす。ここでは逆で、とても速い電子が、低いエネルギーの光にエネルギーを渡して、ガンマ線にする。</a:t>
+            </a:r>
+          </a:p>
+          <a:p>
+            <a:r>
+              <a:t>ガスの型紙と違って雲の模様が無く、なめらか。ハローもなめらかで中心に向かって明るいので、2 つの形が似ている (問題のスライドで説明する縮退)。</a:t>
+            </a:r>
+          </a:p>
+          <a:p>
+            <a:r>
+              <a:t>GALPROP の設定は IC_anisotropic = 0 (等方近似)。</a:t>
+            </a:r>
+          </a:p>
+          <a:p>
+            <a:r>
+              <a:t>右の地図: 20.8 GeV の型紙 (倍率は掛けていない。形だけを見る図)。cloud_reports/2026-10-02_plot_templates.py で作成。</a:t>
+            </a:r>
+          </a:p>
+          <a:p>
+            <a:r>
+              <a:t>【④ 点源】4FGL-DR4: Fermi-LAT の 14 年分のデータで見つかった天体のカタログ (gll_psc_v35.fit)。</a:t>
+            </a:r>
+          </a:p>
+          <a:p>
+            <a:r>
+              <a:t>PSF (点広がり関数): 望遠鏡で点を撮っても少しぼやけて写る、そのぼやけ方。エネルギーが低いほど大きくぼやける (1 GeV で約 0.85°、10 GeV で約 0.16°)。</a:t>
+            </a:r>
+          </a:p>
+          <a:p>
+            <a:r>
+              <a:t>拡張源: 大マゼラン雲や Cen A のローブのように、点ではなく広がって見える天体。Totani §2.3 と同じく、長半径の 2 倍の円を外す。</a:t>
+            </a:r>
+          </a:p>
+          <a:p>
+            <a:r>
+              <a:t>右の地図: 20.8 GeV の型紙 (倍率は掛けていない。形だけを見る図)。cloud_reports/2026-10-02_plot_templates.py で作成。</a:t>
+            </a:r>
+          </a:p>
+          <a:p>
+            <a:r>
+              <a:t>【⑤ Loop I】pc (パーセク) は距離の単位で、1 pc ≈ 3.26 光年。太陽から殻の中心までは 78 pc と 95 pc。</a:t>
+            </a:r>
+          </a:p>
+          <a:p>
+            <a:r>
+              <a:t>殻 1 は太陽が殻の壁の中にあるので、空のほぼ全体を覆う (左の地図)。そのため等方背景と区別しにくい。</a:t>
+            </a:r>
+          </a:p>
+          <a:p>
+            <a:r>
+              <a:t>超新星の残骸: 星が爆発したときに吹き飛んだガスが、泡のように広がったもの。</a:t>
+            </a:r>
+          </a:p>
+          <a:p>
+            <a:r>
+              <a:t>右の地図: 20.8 GeV の型紙 (倍率は掛けていない。形だけを見る図)。cloud_reports/2026-10-02_plot_templates.py で作成。</a:t>
+            </a:r>
+          </a:p>
+          <a:p>
+            <a:r>
+              <a:t>【⑥ フェルミバブル】なぜデータから作るか: バブルの正確な形を予言する理論が無いため。Totani は Fermi-LAT チームのやり方にならい、当てはめの残りから形を作った。</a:t>
+            </a:r>
+          </a:p>
+          <a:p>
+            <a:r>
+              <a:t>4.3 GeV の地図を使うのは、バブルがはっきり見えるため (Totani §3.1)。形はエネルギーで変えず、明るさ (倍率) だけを各エネルギーで決める。</a:t>
+            </a:r>
+          </a:p>
+          <a:p>
+            <a:r>
+              <a:t>負の型紙: 当てはめで光が余らなかった (予測が多すぎた) 場所。主に GALPROP の予測とデータのずれ。符号自由の倍率を掛けて補正に使う。</a:t>
+            </a:r>
+          </a:p>
+          <a:p>
+            <a:r>
+              <a:t>左の地図が正、右が負 (負の残差の大きさ)。</a:t>
+            </a:r>
+          </a:p>
+          <a:p>
+            <a:r>
+              <a:t>右の地図: 20.8 GeV の型紙 (倍率は掛けていない。形だけを見る図)。cloud_reports/2026-10-02_plot_templates.py で作成。</a:t>
             </a:r>
           </a:p>
         </p:txBody>
@@ -4058,7 +4229,7 @@
 </p:notes>
 </file>
 
-<file path=ppt/notesSlides/notesSlide48.xml><?xml version="1.0" encoding="utf-8"?>
+<file path=ppt/notesSlides/notesSlide6.xml><?xml version="1.0" encoding="utf-8"?>
 <p:notes xmlns:a="http://schemas.openxmlformats.org/drawingml/2006/main" xmlns:r="http://schemas.openxmlformats.org/officeDocument/2006/relationships" xmlns:p="http://schemas.openxmlformats.org/presentationml/2006/main">
   <p:cSld>
     <p:spTree>
@@ -4103,7 +4274,22 @@
           <a:lstStyle/>
           <a:p>
             <a:r>
-              <a:t>流れ: 再現 → 縮退による 3 つの疑問 → 背景の間違い説を否定・σ を較正・記録を整備 → 矮小銀河は非検出 → 論文の J の誤差を入れて「判定できない」を定量化。</a:t>
+              <a:t>NFW: シミュレーションで得られる暗黒物質ハローの典型的な密度の形。中心付近では距離に反比例、外側では距離の 3 乗に反比例して薄くなる。</a:t>
+            </a:r>
+          </a:p>
+          <a:p>
+            <a:r>
+              <a:t>形はエネルギーで変わらない (どのエネルギーでも同じ地図)。明るさ (倍率) だけを各エネルギーで決める。だから「どのエネルギーでハローが必要か」が有意度のスペクトルになる。</a:t>
+            </a:r>
+          </a:p>
+          <a:p>
+            <a:r>
+              <a:t>ICS と同じく、なめらかで中心に向かって明るい。違いは、ハローのほうが中心に強く集まっていること。</a:t>
+            </a:r>
+          </a:p>
+          <a:p>
+            <a:r>
+              <a:t>右の地図: 20.8 GeV の型紙 (倍率は掛けていない。形だけを見る図)。cloud_reports/2026-10-02_plot_templates.py で作成。</a:t>
             </a:r>
           </a:p>
         </p:txBody>
@@ -4128,7 +4314,7 @@
 </p:notes>
 </file>
 
-<file path=ppt/notesSlides/notesSlide49.xml><?xml version="1.0" encoding="utf-8"?>
+<file path=ppt/notesSlides/notesSlide7.xml><?xml version="1.0" encoding="utf-8"?>
 <p:notes xmlns:a="http://schemas.openxmlformats.org/drawingml/2006/main" xmlns:r="http://schemas.openxmlformats.org/officeDocument/2006/relationships" xmlns:p="http://schemas.openxmlformats.org/presentationml/2006/main">
   <p:cSld>
     <p:spTree>
@@ -4173,22 +4359,12 @@
           <a:lstStyle/>
           <a:p>
             <a:r>
-              <a:t>中村 (2017) 講究録 §2: 状態空間モデル。システムノイズ (シミュレーションの誤差) と観測ノイズ (観測の誤差) を分けて書く。</a:t>
-            </a:r>
-          </a:p>
-          <a:p>
-            <a:r>
-              <a:t>§2.3.3–2.3.4: アンサンブルカルマンフィルタ・粒子フィルタは、確率分布をたくさんのサンプル (アンサンブル) で近似する (式 11)。</a:t>
-            </a:r>
-          </a:p>
-          <a:p>
-            <a:r>
-              <a:t>§3.3: モデル化誤差と数値計算の誤差を、システムノイズとして統一的に扱えることがデータ同化の利点。</a:t>
-            </a:r>
-          </a:p>
-          <a:p>
-            <a:r>
-              <a:t>正直な位置づけ: この解析は講究録を読む前に行った。後から読んで、同じ発想だと分かった。データ同化の中心は時間とともに変わる現象で、1 枚の空の地図にそのまま使える手法ではない。</a:t>
+              <a:t>この後の尤度・有意度・MCMC のスライドは、全部「係数 9 個の決め方」の説明。難しい言葉が出てきたら、このスライドに戻って「今どの行の話か」を確認する。</a:t>
+            </a:r>
+          </a:p>
+          <a:p>
+            <a:r>
+              <a:t>型紙 = 前の 7 枚で見た地図。係数 = その地図を何倍して足すか。</a:t>
             </a:r>
           </a:p>
         </p:txBody>
@@ -4213,7 +4389,7 @@
 </p:notes>
 </file>
 
-<file path=ppt/notesSlides/notesSlide50.xml><?xml version="1.0" encoding="utf-8"?>
+<file path=ppt/notesSlides/notesSlide8.xml><?xml version="1.0" encoding="utf-8"?>
 <p:notes xmlns:a="http://schemas.openxmlformats.org/drawingml/2006/main" xmlns:r="http://schemas.openxmlformats.org/officeDocument/2006/relationships" xmlns:p="http://schemas.openxmlformats.org/presentationml/2006/main">
   <p:cSld>
     <p:spTree>
@@ -4257,7 +4433,29 @@
           <a:bodyPr/>
           <a:lstStyle/>
           <a:p>
-            <a:endParaRPr/>
+            <a:r>
+              <a:t>たとえ: 霧で何も見えない山の上で、一番高い場所を探したい。手元には高度計 (尤度) しかない。</a:t>
+            </a:r>
+          </a:p>
+          <a:p>
+            <a:r>
+              <a:t>歩く人 (MCMC) は、一歩ずつ足を出して高度計を見る。上りなら必ずその方向へ進み、下りでもたまに進む。下りにも進むのは、山頂で止まらずに山の広がり (どこまでが十分高いか) も知るため。</a:t>
+            </a:r>
+          </a:p>
+          <a:p>
+            <a:r>
+              <a:t>歩き終わったら、記録の中で一番高かった地点が最良の倍率、よく歩き回った範囲の幅が誤差になる。</a:t>
+            </a:r>
+          </a:p>
+          <a:p>
+            <a:r>
+              <a:t>ここでの「山」は 9 次元 (倍率が 9 個)。紙に描けないので、歩いて調べるしかない。</a:t>
+            </a:r>
+          </a:p>
+          <a:p>
+            <a:r>
+              <a:t>Totani (2025) §2.2: 最良値と統計誤差を、尤度を MCMC で最大化して求める。本研究も同じ (10/2 に揃えた)。</a:t>
+            </a:r>
           </a:p>
         </p:txBody>
       </p:sp>
@@ -4281,8 +4479,8 @@
 </p:notes>
 </file>
 
-<file path=ppt/notesSlides/notesSlide51.xml><?xml version="1.0" encoding="utf-8"?>
-<p:notes xmlns:a="http://schemas.openxmlformats.org/drawingml/2006/main" xmlns:p="http://schemas.openxmlformats.org/presentationml/2006/main" xmlns:r="http://schemas.openxmlformats.org/officeDocument/2006/relationships">
+<file path=ppt/notesSlides/notesSlide9.xml><?xml version="1.0" encoding="utf-8"?>
+<p:notes xmlns:a="http://schemas.openxmlformats.org/drawingml/2006/main" xmlns:r="http://schemas.openxmlformats.org/officeDocument/2006/relationships" xmlns:p="http://schemas.openxmlformats.org/presentationml/2006/main">
   <p:cSld>
     <p:spTree>
       <p:nvGrpSpPr>
@@ -4302,7 +4500,7 @@
         <p:nvSpPr>
           <p:cNvPr id="2" name="Slide Image Placeholder 1"/>
           <p:cNvSpPr>
-            <a:spLocks noGrp="1"/>
+            <a:spLocks noGrp="1" noRot="1" noChangeAspect="1"/>
           </p:cNvSpPr>
           <p:nvPr>
             <p:ph type="sldImg" idx="2"/>
@@ -4317,146 +4515,31 @@
             <a:spLocks noGrp="1"/>
           </p:cNvSpPr>
           <p:nvPr>
-            <p:ph type="body" idx="3" sz="quarter"/>
-          </p:nvPr>
-        </p:nvSpPr>
-        <p:spPr/>
-        <p:txBody>
-          <a:bodyPr/>
-          <a:lstStyle/>
-          <a:p>
-            <a:r>
-              <a:t>地図はどれも 20.8 GeV の型紙 (倍率は掛けていない。形だけを見る図)。Loop I は殻 1、バブルは正の型紙。</a:t>
-            </a:r>
-          </a:p>
-          <a:p>
-            <a:r>
-              <a:t>以下は、まとめる前の 6 枚のノート (詳しい説明)。</a:t>
-            </a:r>
-          </a:p>
-          <a:p>
-            <a:r>
-              <a:t>【① 等方背景】たとえ: 部屋の壁全体がぼんやり同じ明るさで光っている、その「底上げ」の明るさ。</a:t>
-            </a:r>
-          </a:p>
-          <a:p>
-            <a:r>
-              <a:t>最初の値 10⁻⁴ は、これまでに測られた「銀河の外から来るガンマ線の背景」の典型的な明るさ (Totani §2.3)。</a:t>
-            </a:r>
-          </a:p>
-          <a:p>
-            <a:r>
-              <a:t>Loop I との区別: 殻 1 は太陽が殻の壁の中にあるため空のほぼ全体を覆い、明るさの変化が等方背景と同じくらい平ら。データからは 2 つの分け方が決まらず、合計だけが決まる (.dev/TOTANI_SPEC.md 3.7a)。</a:t>
-            </a:r>
-          </a:p>
-          <a:p>
-            <a:r>
-              <a:t>右の地図: 20.8 GeV の型紙 (倍率は掛けていない。形だけを見る図)。cloud_reports/2026-10-02_plot_templates.py で作成。</a:t>
-            </a:r>
-          </a:p>
-          <a:p>
-            <a:r>
-              <a:t>【② ガス】GALPROP: 宇宙線が銀河の中でどう生まれ、どう広がるかを計算し、そこから出るガンマ線の地図を作るシミュレーション (ver. 54、設定 SLZ6R30T150C2。Fermi-LAT チームの銀河拡散モデルでも使われている設定)。</a:t>
-            </a:r>
-          </a:p>
-          <a:p>
-            <a:r>
-              <a:t>π⁰ は電気を持たない中間子で、できるとすぐ (10⁻¹⁶ 秒ほど) 光子 2 個に壊れる。</a:t>
-            </a:r>
-          </a:p>
-          <a:p>
-            <a:r>
-              <a:t>ガス雲の模様は、電波 (水素の 21 cm 線) や、ちりによる星の光の赤み (E(B−V)) から作ったガスの地図に由来する。</a:t>
-            </a:r>
-          </a:p>
-          <a:p>
-            <a:r>
-              <a:t>右の地図: 20.8 GeV の型紙 (倍率は掛けていない。形だけを見る図)。cloud_reports/2026-10-02_plot_templates.py で作成。</a:t>
-            </a:r>
-          </a:p>
-          <a:p>
-            <a:r>
-              <a:t>【③ ICS】逆コンプトン散乱: 普通のコンプトン散乱は光が電子をはね飛ばす。ここでは逆で、とても速い電子が、低いエネルギーの光にエネルギーを渡して、ガンマ線にする。</a:t>
-            </a:r>
-          </a:p>
-          <a:p>
-            <a:r>
-              <a:t>ガスの型紙と違って雲の模様が無く、なめらか。ハローもなめらかで中心に向かって明るいので、2 つの形が似ている (問題のスライドで説明する縮退)。</a:t>
-            </a:r>
-          </a:p>
-          <a:p>
-            <a:r>
-              <a:t>GALPROP の設定は IC_anisotropic = 0 (等方近似)。</a:t>
-            </a:r>
-          </a:p>
-          <a:p>
-            <a:r>
-              <a:t>右の地図: 20.8 GeV の型紙 (倍率は掛けていない。形だけを見る図)。cloud_reports/2026-10-02_plot_templates.py で作成。</a:t>
-            </a:r>
-          </a:p>
-          <a:p>
-            <a:r>
-              <a:t>【④ 点源】4FGL-DR4: Fermi-LAT の 14 年分のデータで見つかった天体のカタログ (gll_psc_v35.fit)。</a:t>
-            </a:r>
-          </a:p>
-          <a:p>
-            <a:r>
-              <a:t>PSF (点広がり関数): 望遠鏡で点を撮っても少しぼやけて写る、そのぼやけ方。エネルギーが低いほど大きくぼやける (1 GeV で約 0.85°、10 GeV で約 0.16°)。</a:t>
-            </a:r>
-          </a:p>
-          <a:p>
-            <a:r>
-              <a:t>拡張源: 大マゼラン雲や Cen A のローブのように、点ではなく広がって見える天体。Totani §2.3 と同じく、長半径の 2 倍の円を外す。</a:t>
-            </a:r>
-          </a:p>
-          <a:p>
-            <a:r>
-              <a:t>右の地図: 20.8 GeV の型紙 (倍率は掛けていない。形だけを見る図)。cloud_reports/2026-10-02_plot_templates.py で作成。</a:t>
-            </a:r>
-          </a:p>
-          <a:p>
-            <a:r>
-              <a:t>【⑤ Loop I】pc (パーセク) は距離の単位で、1 pc ≈ 3.26 光年。太陽から殻の中心までは 78 pc と 95 pc。</a:t>
-            </a:r>
-          </a:p>
-          <a:p>
-            <a:r>
-              <a:t>殻 1 は太陽が殻の壁の中にあるので、空のほぼ全体を覆う (左の地図)。そのため等方背景と区別しにくい。</a:t>
-            </a:r>
-          </a:p>
-          <a:p>
-            <a:r>
-              <a:t>超新星の残骸: 星が爆発したときに吹き飛んだガスが、泡のように広がったもの。</a:t>
-            </a:r>
-          </a:p>
-          <a:p>
-            <a:r>
-              <a:t>右の地図: 20.8 GeV の型紙 (倍率は掛けていない。形だけを見る図)。cloud_reports/2026-10-02_plot_templates.py で作成。</a:t>
-            </a:r>
-          </a:p>
-          <a:p>
-            <a:r>
-              <a:t>【⑥ フェルミバブル】なぜデータから作るか: バブルの正確な形を予言する理論が無いため。Totani は Fermi-LAT チームのやり方にならい、当てはめの残りから形を作った。</a:t>
-            </a:r>
-          </a:p>
-          <a:p>
-            <a:r>
-              <a:t>4.3 GeV の地図を使うのは、バブルがはっきり見えるため (Totani §3.1)。形はエネルギーで変えず、明るさ (倍率) だけを各エネルギーで決める。</a:t>
-            </a:r>
-          </a:p>
-          <a:p>
-            <a:r>
-              <a:t>負の型紙: 当てはめで光が余らなかった (予測が多すぎた) 場所。主に GALPROP の予測とデータのずれ。符号自由の倍率を掛けて補正に使う。</a:t>
-            </a:r>
-          </a:p>
-          <a:p>
-            <a:r>
-              <a:t>左の地図が正、右が負 (負の残差の大きさ)。</a:t>
-            </a:r>
-          </a:p>
-          <a:p>
-            <a:r>
-              <a:t>右の地図: 20.8 GeV の型紙 (倍率は掛けていない。形だけを見る図)。cloud_reports/2026-10-02_plot_templates.py で作成。</a:t>
+            <p:ph type="body" sz="quarter" idx="3"/>
+          </p:nvPr>
+        </p:nvSpPr>
+        <p:spPr/>
+        <p:txBody>
+          <a:bodyPr/>
+          <a:lstStyle/>
+          <a:p>
+            <a:r>
+              <a:t>「なし」は「あり」の特別な場合 (ハローの倍率 = 0) なので、入れ子のモデル。入れ子なら Δln L ≥ 0。</a:t>
+            </a:r>
+          </a:p>
+          <a:p>
+            <a:r>
+              <a:t>Wilks の定理: 帰無仮説 (ハローなし) が正しいとき、2Δln L は自由度 1 の χ² 分布。だから √(2Δln L) が「標準正規分布で何σ」に対応する。</a:t>
+            </a:r>
+          </a:p>
+          <a:p>
+            <a:r>
+              <a:t>定理の前提: データが多い (漸近的)、モデルが正しい、など。モデル (型紙) が間違っていると成り立たない。</a:t>
+            </a:r>
+          </a:p>
+          <a:p>
+            <a:r>
+              <a:t>Totani との関係: Totani (2025) Fig. 9 はハローあり・なしの ln L の差 (Δln L) を示しており、本文の 13–19σ はそれを σ = √(2Δln L) で σ に直した値。Totani は「Wilks の定理」という言葉は書いていないが、この換算はガンマ線天文学で標準 (2Δln L は TS = test statistic と呼ばれ、EGRET の解析 Mattox et al. 1996, ApJ 461, 396 から使われている)。本研究は Totani と同じ換算を使っている。</a:t>
             </a:r>
           </a:p>
         </p:txBody>
@@ -4468,73 +4551,7 @@
             <a:spLocks noGrp="1"/>
           </p:cNvSpPr>
           <p:nvPr>
-            <p:ph type="sldNum" idx="5" sz="quarter"/>
-          </p:nvPr>
-        </p:nvSpPr>
-        <p:spPr/>
-      </p:sp>
-    </p:spTree>
-  </p:cSld>
-  <p:clrMapOvr>
-    <a:masterClrMapping/>
-  </p:clrMapOvr>
-</p:notes>
-</file>
-
-<file path=ppt/notesSlides/notesSlide9.xml><?xml version="1.0" encoding="utf-8"?>
-<p:notes xmlns:a="http://schemas.openxmlformats.org/drawingml/2006/main" xmlns:p="http://schemas.openxmlformats.org/presentationml/2006/main" xmlns:r="http://schemas.openxmlformats.org/officeDocument/2006/relationships">
-  <p:cSld>
-    <p:spTree>
-      <p:nvGrpSpPr>
-        <p:cNvPr id="1" name=""/>
-        <p:cNvGrpSpPr/>
-        <p:nvPr/>
-      </p:nvGrpSpPr>
-      <p:grpSpPr>
-        <a:xfrm>
-          <a:off x="0" y="0"/>
-          <a:ext cx="0" cy="0"/>
-          <a:chOff x="0" y="0"/>
-          <a:chExt cx="0" cy="0"/>
-        </a:xfrm>
-      </p:grpSpPr>
-      <p:sp>
-        <p:nvSpPr>
-          <p:cNvPr id="2" name="Slide Image Placeholder 1"/>
-          <p:cNvSpPr>
-            <a:spLocks noGrp="1"/>
-          </p:cNvSpPr>
-          <p:nvPr>
-            <p:ph type="sldImg" idx="2"/>
-          </p:nvPr>
-        </p:nvSpPr>
-        <p:spPr/>
-      </p:sp>
-      <p:sp>
-        <p:nvSpPr>
-          <p:cNvPr id="3" name="Notes Placeholder 2"/>
-          <p:cNvSpPr>
-            <a:spLocks noGrp="1"/>
-          </p:cNvSpPr>
-          <p:nvPr>
-            <p:ph type="body" idx="3" sz="quarter"/>
-          </p:nvPr>
-        </p:nvSpPr>
-        <p:spPr/>
-        <p:txBody>
-          <a:bodyPr/>
-          <a:lstStyle/>
-          <a:p/>
-        </p:txBody>
-      </p:sp>
-      <p:sp>
-        <p:nvSpPr>
-          <p:cNvPr id="4" name="Slide Number Placeholder 3"/>
-          <p:cNvSpPr>
-            <a:spLocks noGrp="1"/>
-          </p:cNvSpPr>
-          <p:nvPr>
-            <p:ph type="sldNum" idx="5" sz="quarter"/>
+            <p:ph type="sldNum" sz="quarter" idx="5"/>
           </p:nvPr>
         </p:nvSpPr>
         <p:spPr/>
@@ -8133,6 +8150,36 @@
           </a:p>
         </p:txBody>
       </p:sp>
+      <p:pic>
+        <p:nvPicPr>
+          <p:cNvPr id="5" name="Picture 4" descr="The image displays a snippet of a Python function that calculates the log probability of a sequence of parameters given counts and a template dictionary, handling non-finite values by returning negative infinity.&#10;&#10;AI-generated content may be incorrect.">
+            <a:extLst>
+              <a:ext uri="{FF2B5EF4-FFF2-40B4-BE49-F238E27FC236}">
+                <a16:creationId xmlns:a16="http://schemas.microsoft.com/office/drawing/2014/main" id="{960CE5B3-4BC1-0B00-D670-CAC2F1397BD5}"/>
+              </a:ext>
+            </a:extLst>
+          </p:cNvPr>
+          <p:cNvPicPr>
+            <a:picLocks noChangeAspect="1"/>
+          </p:cNvPicPr>
+          <p:nvPr/>
+        </p:nvPicPr>
+        <p:blipFill>
+          <a:blip r:embed="rId3"/>
+          <a:stretch>
+            <a:fillRect/>
+          </a:stretch>
+        </p:blipFill>
+        <p:spPr>
+          <a:xfrm>
+            <a:off x="440692" y="5116782"/>
+            <a:ext cx="11310616" cy="1558973"/>
+          </a:xfrm>
+          <a:prstGeom prst="rect">
+            <a:avLst/>
+          </a:prstGeom>
+        </p:spPr>
+      </p:pic>
     </p:spTree>
   </p:cSld>
   <p:clrMapOvr>
@@ -9143,7 +9190,7 @@
           <p:nvPr/>
         </p:nvPicPr>
         <p:blipFill>
-          <a:blip r:embed="rId4"/>
+          <a:blip r:embed="rId3"/>
           <a:stretch>
             <a:fillRect/>
           </a:stretch>
@@ -9342,7 +9389,7 @@
           <p:nvPr/>
         </p:nvPicPr>
         <p:blipFill>
-          <a:blip r:embed="rId4"/>
+          <a:blip r:embed="rId3"/>
           <a:stretch>
             <a:fillRect/>
           </a:stretch>
@@ -13398,7 +13445,7 @@
 </file>
 
 <file path=ppt/slides/slide5.xml><?xml version="1.0" encoding="utf-8"?>
-<p:sld xmlns:a="http://schemas.openxmlformats.org/drawingml/2006/main" xmlns:p="http://schemas.openxmlformats.org/presentationml/2006/main" xmlns:r="http://schemas.openxmlformats.org/officeDocument/2006/relationships">
+<p:sld xmlns:a="http://schemas.openxmlformats.org/drawingml/2006/main" xmlns:r="http://schemas.openxmlformats.org/officeDocument/2006/relationships" xmlns:p="http://schemas.openxmlformats.org/presentationml/2006/main">
   <p:cSld>
     <p:spTree>
       <p:nvGrpSpPr>
@@ -13406,7 +13453,14 @@
         <p:cNvGrpSpPr/>
         <p:nvPr/>
       </p:nvGrpSpPr>
-      <p:grpSpPr/>
+      <p:grpSpPr>
+        <a:xfrm>
+          <a:off x="0" y="0"/>
+          <a:ext cx="0" cy="0"/>
+          <a:chOff x="0" y="0"/>
+          <a:chExt cx="0" cy="0"/>
+        </a:xfrm>
+      </p:grpSpPr>
       <p:sp>
         <p:nvSpPr>
           <p:cNvPr id="2" name="Title 1"/>
@@ -13438,7 +13492,7 @@
           <p:nvPr/>
         </p:nvPicPr>
         <p:blipFill>
-          <a:blip r:embed="rId2"/>
+          <a:blip r:embed="rId3"/>
           <a:stretch>
             <a:fillRect/>
           </a:stretch>
@@ -13497,7 +13551,7 @@
           <p:nvPr/>
         </p:nvPicPr>
         <p:blipFill>
-          <a:blip r:embed="rId3"/>
+          <a:blip r:embed="rId4"/>
           <a:stretch>
             <a:fillRect/>
           </a:stretch>
@@ -13556,7 +13610,7 @@
           <p:nvPr/>
         </p:nvPicPr>
         <p:blipFill>
-          <a:blip r:embed="rId4"/>
+          <a:blip r:embed="rId5"/>
           <a:stretch>
             <a:fillRect/>
           </a:stretch>
@@ -13615,7 +13669,7 @@
           <p:nvPr/>
         </p:nvPicPr>
         <p:blipFill>
-          <a:blip r:embed="rId5"/>
+          <a:blip r:embed="rId6"/>
           <a:stretch>
             <a:fillRect/>
           </a:stretch>
@@ -13674,7 +13728,7 @@
           <p:nvPr/>
         </p:nvPicPr>
         <p:blipFill>
-          <a:blip r:embed="rId6"/>
+          <a:blip r:embed="rId7"/>
           <a:stretch>
             <a:fillRect/>
           </a:stretch>
@@ -13733,7 +13787,7 @@
           <p:nvPr/>
         </p:nvPicPr>
         <p:blipFill>
-          <a:blip r:embed="rId7"/>
+          <a:blip r:embed="rId8"/>
           <a:stretch>
             <a:fillRect/>
           </a:stretch>

--- a/slides/2026-10-03_研究進捗報告_claude.pptx
+++ b/slides/2026-10-03_研究進捗報告_claude.pptx
@@ -184,7 +184,7 @@
   <pc:docChgLst>
     <pc:chgData name="202304239" userId="ab1adf7a-b8eb-4038-b404-de23e20d8a3a" providerId="ADAL" clId="{6C0E59ED-D716-49AF-B2FA-B94E7B8E5A8C}"/>
     <pc:docChg chg="custSel delSld modSld">
-      <pc:chgData name="202304239" userId="ab1adf7a-b8eb-4038-b404-de23e20d8a3a" providerId="ADAL" clId="{6C0E59ED-D716-49AF-B2FA-B94E7B8E5A8C}" dt="2026-10-03T04:13:39.011" v="59" actId="27614"/>
+      <pc:chgData name="202304239" userId="ab1adf7a-b8eb-4038-b404-de23e20d8a3a" providerId="ADAL" clId="{6C0E59ED-D716-49AF-B2FA-B94E7B8E5A8C}" dt="2026-10-03T04:15:36.651" v="66" actId="478"/>
       <pc:docMkLst>
         <pc:docMk/>
       </pc:docMkLst>
@@ -260,6 +260,37 @@
             <pc:docMk/>
             <pc:sldMk cId="0" sldId="295"/>
             <ac:picMk id="5" creationId="{960CE5B3-4BC1-0B00-D670-CAC2F1397BD5}"/>
+          </ac:picMkLst>
+        </pc:picChg>
+      </pc:sldChg>
+      <pc:sldChg chg="addSp delSp modSp mod">
+        <pc:chgData name="202304239" userId="ab1adf7a-b8eb-4038-b404-de23e20d8a3a" providerId="ADAL" clId="{6C0E59ED-D716-49AF-B2FA-B94E7B8E5A8C}" dt="2026-10-03T04:15:36.651" v="66" actId="478"/>
+        <pc:sldMkLst>
+          <pc:docMk/>
+          <pc:sldMk cId="0" sldId="296"/>
+        </pc:sldMkLst>
+        <pc:spChg chg="mod">
+          <ac:chgData name="202304239" userId="ab1adf7a-b8eb-4038-b404-de23e20d8a3a" providerId="ADAL" clId="{6C0E59ED-D716-49AF-B2FA-B94E7B8E5A8C}" dt="2026-10-03T04:15:29.193" v="64" actId="1076"/>
+          <ac:spMkLst>
+            <pc:docMk/>
+            <pc:sldMk cId="0" sldId="296"/>
+            <ac:spMk id="3" creationId="{00000000-0000-0000-0000-000000000000}"/>
+          </ac:spMkLst>
+        </pc:spChg>
+        <pc:spChg chg="del">
+          <ac:chgData name="202304239" userId="ab1adf7a-b8eb-4038-b404-de23e20d8a3a" providerId="ADAL" clId="{6C0E59ED-D716-49AF-B2FA-B94E7B8E5A8C}" dt="2026-10-03T04:15:36.651" v="66" actId="478"/>
+          <ac:spMkLst>
+            <pc:docMk/>
+            <pc:sldMk cId="0" sldId="296"/>
+            <ac:spMk id="8" creationId="{F85CD606-E3CE-F314-B3EE-F3D7028115CB}"/>
+          </ac:spMkLst>
+        </pc:spChg>
+        <pc:picChg chg="add mod">
+          <ac:chgData name="202304239" userId="ab1adf7a-b8eb-4038-b404-de23e20d8a3a" providerId="ADAL" clId="{6C0E59ED-D716-49AF-B2FA-B94E7B8E5A8C}" dt="2026-10-03T04:15:31.788" v="65" actId="1076"/>
+          <ac:picMkLst>
+            <pc:docMk/>
+            <pc:sldMk cId="0" sldId="296"/>
+            <ac:picMk id="5" creationId="{9F1A482B-9BF6-EF3C-C1F0-DE13BF60C225}"/>
           </ac:picMkLst>
         </pc:picChg>
       </pc:sldChg>
@@ -8239,7 +8270,7 @@
         </p:nvSpPr>
         <p:spPr>
           <a:xfrm>
-            <a:off x="548640" y="1371600"/>
+            <a:off x="0" y="1298772"/>
             <a:ext cx="5669280" cy="4297680"/>
           </a:xfrm>
         </p:spPr>
@@ -8312,46 +8343,36 @@
           </a:p>
         </p:txBody>
       </p:sp>
-      <p:sp>
-        <p:nvSpPr>
-          <p:cNvPr id="8" name="TextBox 7">
+      <p:pic>
+        <p:nvPicPr>
+          <p:cNvPr id="5" name="Picture 4" descr="The image contains a complex code snippet with comments detailing issues in a computational physics model, including negative values and unphysical results in a parameter space.&#10;&#10;AI-generated content may be incorrect.">
             <a:extLst>
               <a:ext uri="{FF2B5EF4-FFF2-40B4-BE49-F238E27FC236}">
-                <a16:creationId xmlns:a16="http://schemas.microsoft.com/office/drawing/2014/main" id="{F85CD606-E3CE-F314-B3EE-F3D7028115CB}"/>
+                <a16:creationId xmlns:a16="http://schemas.microsoft.com/office/drawing/2014/main" id="{9F1A482B-9BF6-EF3C-C1F0-DE13BF60C225}"/>
               </a:ext>
             </a:extLst>
           </p:cNvPr>
-          <p:cNvSpPr txBox="1"/>
+          <p:cNvPicPr>
+            <a:picLocks noChangeAspect="1"/>
+          </p:cNvPicPr>
           <p:nvPr/>
-        </p:nvSpPr>
+        </p:nvPicPr>
+        <p:blipFill>
+          <a:blip r:embed="rId3"/>
+          <a:stretch>
+            <a:fillRect/>
+          </a:stretch>
+        </p:blipFill>
         <p:spPr>
           <a:xfrm>
-            <a:off x="5837182" y="5663239"/>
-            <a:ext cx="6093372" cy="923330"/>
+            <a:off x="5775158" y="1210540"/>
+            <a:ext cx="6477561" cy="2796782"/>
           </a:xfrm>
           <a:prstGeom prst="rect">
             <a:avLst/>
           </a:prstGeom>
-          <a:noFill/>
         </p:spPr>
-        <p:txBody>
-          <a:bodyPr wrap="square">
-            <a:spAutoFit/>
-          </a:bodyPr>
-          <a:lstStyle/>
-          <a:p>
-            <a:r>
-              <a:rPr lang="en-US" sz="1400" b="1"/>
-              <a:t>Reference:</a:t>
-            </a:r>
-            <a:r>
-              <a:rPr lang="en-US" sz="1400"/>
-              <a:t> D. Foreman-Mackey et al. (2013), PASP 125, 306</a:t>
-            </a:r>
-            <a:endParaRPr lang="en-US"/>
-          </a:p>
-        </p:txBody>
-      </p:sp>
+      </p:pic>
     </p:spTree>
   </p:cSld>
   <p:clrMapOvr>

--- a/slides/2026-10-03_研究進捗報告_claude.pptx
+++ b/slides/2026-10-03_研究進捗報告_claude.pptx
@@ -184,7 +184,7 @@
   <pc:docChgLst>
     <pc:chgData name="202304239" userId="ab1adf7a-b8eb-4038-b404-de23e20d8a3a" providerId="ADAL" clId="{6C0E59ED-D716-49AF-B2FA-B94E7B8E5A8C}"/>
     <pc:docChg chg="custSel delSld modSld">
-      <pc:chgData name="202304239" userId="ab1adf7a-b8eb-4038-b404-de23e20d8a3a" providerId="ADAL" clId="{6C0E59ED-D716-49AF-B2FA-B94E7B8E5A8C}" dt="2026-10-03T04:15:36.651" v="66" actId="478"/>
+      <pc:chgData name="202304239" userId="ab1adf7a-b8eb-4038-b404-de23e20d8a3a" providerId="ADAL" clId="{6C0E59ED-D716-49AF-B2FA-B94E7B8E5A8C}" dt="2026-10-03T04:16:37.708" v="74" actId="14100"/>
       <pc:docMkLst>
         <pc:docMk/>
       </pc:docMkLst>
@@ -264,13 +264,13 @@
         </pc:picChg>
       </pc:sldChg>
       <pc:sldChg chg="addSp delSp modSp mod">
-        <pc:chgData name="202304239" userId="ab1adf7a-b8eb-4038-b404-de23e20d8a3a" providerId="ADAL" clId="{6C0E59ED-D716-49AF-B2FA-B94E7B8E5A8C}" dt="2026-10-03T04:15:36.651" v="66" actId="478"/>
+        <pc:chgData name="202304239" userId="ab1adf7a-b8eb-4038-b404-de23e20d8a3a" providerId="ADAL" clId="{6C0E59ED-D716-49AF-B2FA-B94E7B8E5A8C}" dt="2026-10-03T04:16:37.708" v="74" actId="14100"/>
         <pc:sldMkLst>
           <pc:docMk/>
           <pc:sldMk cId="0" sldId="296"/>
         </pc:sldMkLst>
         <pc:spChg chg="mod">
-          <ac:chgData name="202304239" userId="ab1adf7a-b8eb-4038-b404-de23e20d8a3a" providerId="ADAL" clId="{6C0E59ED-D716-49AF-B2FA-B94E7B8E5A8C}" dt="2026-10-03T04:15:29.193" v="64" actId="1076"/>
+          <ac:chgData name="202304239" userId="ab1adf7a-b8eb-4038-b404-de23e20d8a3a" providerId="ADAL" clId="{6C0E59ED-D716-49AF-B2FA-B94E7B8E5A8C}" dt="2026-10-03T04:16:37.708" v="74" actId="14100"/>
           <ac:spMkLst>
             <pc:docMk/>
             <pc:sldMk cId="0" sldId="296"/>
@@ -285,12 +285,20 @@
             <ac:spMk id="8" creationId="{F85CD606-E3CE-F314-B3EE-F3D7028115CB}"/>
           </ac:spMkLst>
         </pc:spChg>
-        <pc:picChg chg="add mod">
-          <ac:chgData name="202304239" userId="ab1adf7a-b8eb-4038-b404-de23e20d8a3a" providerId="ADAL" clId="{6C0E59ED-D716-49AF-B2FA-B94E7B8E5A8C}" dt="2026-10-03T04:15:31.788" v="65" actId="1076"/>
+        <pc:picChg chg="add del mod">
+          <ac:chgData name="202304239" userId="ab1adf7a-b8eb-4038-b404-de23e20d8a3a" providerId="ADAL" clId="{6C0E59ED-D716-49AF-B2FA-B94E7B8E5A8C}" dt="2026-10-03T04:16:25.221" v="69" actId="478"/>
           <ac:picMkLst>
             <pc:docMk/>
             <pc:sldMk cId="0" sldId="296"/>
             <ac:picMk id="5" creationId="{9F1A482B-9BF6-EF3C-C1F0-DE13BF60C225}"/>
+          </ac:picMkLst>
+        </pc:picChg>
+        <pc:picChg chg="add mod">
+          <ac:chgData name="202304239" userId="ab1adf7a-b8eb-4038-b404-de23e20d8a3a" providerId="ADAL" clId="{6C0E59ED-D716-49AF-B2FA-B94E7B8E5A8C}" dt="2026-10-03T04:16:30.783" v="72" actId="1076"/>
+          <ac:picMkLst>
+            <pc:docMk/>
+            <pc:sldMk cId="0" sldId="296"/>
+            <ac:picMk id="7" creationId="{DBE7D927-8B33-8CDB-1BC3-DBD46AE4DF3A}"/>
           </ac:picMkLst>
         </pc:picChg>
       </pc:sldChg>
@@ -8270,8 +8278,8 @@
         </p:nvSpPr>
         <p:spPr>
           <a:xfrm>
-            <a:off x="0" y="1298772"/>
-            <a:ext cx="5669280" cy="4297680"/>
+            <a:off x="0" y="1298771"/>
+            <a:ext cx="4652211" cy="4572639"/>
           </a:xfrm>
         </p:spPr>
         <p:txBody>
@@ -8345,10 +8353,10 @@
       </p:sp>
       <p:pic>
         <p:nvPicPr>
-          <p:cNvPr id="5" name="Picture 4" descr="The image contains a complex code snippet with comments detailing issues in a computational physics model, including negative values and unphysical results in a parameter space.&#10;&#10;AI-generated content may be incorrect.">
+          <p:cNvPr id="7" name="Picture 6" descr="The image depicts a segment of Python code, including function definitions and a conditional statement, related to data analysis or scientific computation.&#10;&#10;AI-generated content may be incorrect.">
             <a:extLst>
               <a:ext uri="{FF2B5EF4-FFF2-40B4-BE49-F238E27FC236}">
-                <a16:creationId xmlns:a16="http://schemas.microsoft.com/office/drawing/2014/main" id="{9F1A482B-9BF6-EF3C-C1F0-DE13BF60C225}"/>
+                <a16:creationId xmlns:a16="http://schemas.microsoft.com/office/drawing/2014/main" id="{DBE7D927-8B33-8CDB-1BC3-DBD46AE4DF3A}"/>
               </a:ext>
             </a:extLst>
           </p:cNvPr>
@@ -8365,8 +8373,8 @@
         </p:blipFill>
         <p:spPr>
           <a:xfrm>
-            <a:off x="5775158" y="1210540"/>
-            <a:ext cx="6477561" cy="2796782"/>
+            <a:off x="4830442" y="1298772"/>
+            <a:ext cx="7361558" cy="3848433"/>
           </a:xfrm>
           <a:prstGeom prst="rect">
             <a:avLst/>

--- a/slides/2026-10-03_研究進捗報告_claude.pptx
+++ b/slides/2026-10-03_研究進捗報告_claude.pptx
@@ -1489,6 +1489,16 @@
           <a:lstStyle/>
           <a:p>
             <a:r>
+              <a:t>【Totani の 13〜19σ とは】論文 §3.2 の「13–19σ」は、ハローの形を 3 通り (NFW-ρ^2.5・ρ²・ρ¹) で当てはめたときの幅。誤差の幅でも、何も無い空での較正でもない (論文にその確認は無い)。</a:t>
+            </a:r>
+          </a:p>
+          <a:p>
+            <a:r>
+              <a:t>同じ定義 (ln L の差 → σ) で Fig. 9 から読むと、21 GeV で ρ² が約 14.3σ、ρ^2.5 が約 13.6σ、ρ¹ が約 12.1σ。赤の線は ρ² の値。13–19σ の 19 がどう計算されたかは論文に書かれていない。</a:t>
+            </a:r>
+          </a:p>
+          <a:p>
+            <a:r>
               <a:t>青が本研究 (10/3、本人 PC で Totani と同じやり方 = MCMC で最良値。results/mcmc_allbins_gasICS_v20t/)、赤が Totani Fig. 9。</a:t>
             </a:r>
           </a:p>
@@ -2175,6 +2185,21 @@
           <a:lstStyle/>
           <a:p>
             <a:r>
+              <a:t>【電球のたとえ】電球が 1 個も無い真っ暗な部屋 (何も無い空) を 23 部屋用意して、天の川と同じ明るさ計 (解析) で「豆電球ある？」と測る。本当に何も無ければ、針は 0 のまわりで ±1 くらい揺れるはず (理論)。実際には ±1.26 くらい揺れた。→ この明るさ計は、揺れを 1.26 倍大きく見せるクセがある。だから天の川の 19.0 も 1.26 で割って、約 15 と読み直す。</a:t>
+            </a:r>
+          </a:p>
+          <a:p>
+            <a:r>
+              <a:t>【本当に何も無い所？】既知の天体 (矮小銀河など) から離して、|b| &gt; 20° で選んだ。ただし、見えないほど暗い天体や、背景の型紙の小さな誤りは残る。それも含めて「何も無いはずの所でもこれだけ揺れる」を測るのが目的。</a:t>
+            </a:r>
+          </a:p>
+          <a:p>
+            <a:r>
+              <a:t>【1.26 の出し方】23 か所 × ビン 2〜10 (9 本) = 207 個の σ を、それぞれ 2 乗して平均し、平方根をとった値 (RMS)。中央値ではない。理論どおりなら 1。</a:t>
+            </a:r>
+          </a:p>
+          <a:p>
+            <a:r>
               <a:t>ばらつき = 0 からのずれの 2 乗平均の平方根。光子が十分あるビン 2–10 (2.6–169 GeV) の 207 個から計算。</a:t>
             </a:r>
           </a:p>
@@ -2260,6 +2285,11 @@
           <a:lstStyle/>
           <a:p>
             <a:r>
+              <a:t>【図の読み方】横 = エネルギー、縦 = 23 部屋で測った針の揺れの大きさ。黒い点 1 つ = そのエネルギーだけで、23 個の σ から出した揺れ。点線 1 = 理論どおりの揺れ。黒い点はどれも 1 より上 (1.1〜1.4)。灰色の帯 = 黒い点のエネルギー (ビン 2〜10) の 207 個をまとめて出した 1.26 (中央値ではなく、全部まとめた RMS)。灰色の点 (一番低いエネルギーと 285 GeV 以上) は、ぼやけが大きい・光子が少ないので、まとめる計算から外した。</a:t>
+            </a:r>
+          </a:p>
+          <a:p>
+            <a:r>
               <a:t>黒の点: 各エネルギービンで 23 か所から測ったばらつきと 95% 区間。灰色の帯: ビン 2–10 をまとめた値 1.26 とその 95% 区間。</a:t>
             </a:r>
           </a:p>
@@ -2490,6 +2520,21 @@
           <a:lstStyle/>
           <a:p>
             <a:r>
+              <a:t>【電球のたとえ】暗黒物質のハロー = 電球。J ファクター = 「その方向に、電球がどれだけ明るく見えるはずか」の目安。対消滅は粒子 2 つがぶつかって起きるので、暗黒物質が 2 倍濃いと 4 倍明るい (密度の 2 乗)。それを視線に沿って全部足したのが J。</a:t>
+            </a:r>
+          </a:p>
+          <a:p>
+            <a:r>
+              <a:t>天の川の電球の明るさは、もう測れている (19σ の超過)。電球の種類 (粒子) は同じなので、「J が天の川の何倍か」さえ分かれば、矮小銀河の電球がどれだけ明るく見えるはずかが計算できる。たとえ: 同じ種類の電球なら、自分の部屋の電球の明るさから、遠くの家の窓の明るさを、電球の数と距離の比だけで予想できる。</a:t>
+            </a:r>
+          </a:p>
+          <a:p>
+            <a:r>
+              <a:t>矮小銀河の J は星の動きから推定する。星が速く動き回っている銀河ほど重い (暗黒物質が多い)。だから J は星の速度のばらつき σ_los の 4 乗に比例する。</a:t>
+            </a:r>
+          </a:p>
+          <a:p>
+            <a:r>
               <a:t>⟨σv⟩: 対消滅の起きやすさ、m: 粒子の質量、dN/dE: 1 回の対消滅で出る光のスペクトル。天の川と矮小銀河で同じエネルギービンを見るので、これらは全部共通。</a:t>
             </a:r>
           </a:p>
@@ -2650,6 +2695,21 @@
           <a:lstStyle/>
           <a:p>
             <a:r>
+              <a:t>【何をしているか】1 個の話ではない。矮小銀河 52 個と M31・M33 を、1 個ずつ天の川と同じ解析にかけ、出てきた σ (54 天体 × 13 ビン = 702 個) をヒストグラムにした。灰色は何も無い空 23 か所。</a:t>
+            </a:r>
+          </a:p>
+          <a:p>
+            <a:r>
+              <a:t>【電球のたとえ】遠くの家 54 軒の窓を 1 軒ずつ明るさ計で測り、「真っ暗な部屋で測った針の揺れ」と並べた。2 つの形がほぼ同じ → どの窓も、真っ暗な部屋と区別がつかない。</a:t>
+            </a:r>
+          </a:p>
+          <a:p>
+            <a:r>
+              <a:t>ただし「暗黒物質は無い」とは言えない。そもそも 1 軒ずつでは暗すぎて、あっても見えない明るさだから (次のスライド)。</a:t>
+            </a:r>
+          </a:p>
+          <a:p>
+            <a:r>
               <a:t>黒: 矮小銀河 52 + M31・M33 の全 13 ビンの有意度 (702 個)。灰色: 何も無い空 23 か所 (299 個)。点線: 理論の分布。</a:t>
             </a:r>
           </a:p>
@@ -2733,6 +2793,16 @@
         <p:txBody>
           <a:bodyPr/>
           <a:lstStyle/>
+          <a:p>
+            <a:r>
+              <a:t>【電球のたとえ】1 軒ずつでは暗すぎるので、43 軒の結果を足し合わせて 1 つの数 T にする。明るく見えるはずの家 (J が大きい) ほど重く数える。z_i = 家 i で測った針の値、w_i = 家 i に期待される明るさ。</a:t>
+            </a:r>
+          </a:p>
+          <a:p>
+            <a:r>
+              <a:t>暗黒物質があれば T は平均 1.77 くらい。無ければ 0 のまわり ±1。実測は 0.39。期待の 1.77 から 1.4σ 下にずれている → 「無い」寄りだが、決めつけるほど離れていない。</a:t>
+            </a:r>
+          </a:p>
           <a:p>
             <a:r>
               <a:t>予測が大きい天体ほど重く数える重み付き和。予測のパターンが分かっているときに、いちばん検出しやすいまとめ方。</a:t>

--- a/slides/2026-10-03_研究進捗報告_claude.pptx
+++ b/slides/2026-10-03_研究進捗報告_claude.pptx
@@ -184,7 +184,7 @@
   <pc:docChgLst>
     <pc:chgData name="202304239" userId="ab1adf7a-b8eb-4038-b404-de23e20d8a3a" providerId="ADAL" clId="{6C0E59ED-D716-49AF-B2FA-B94E7B8E5A8C}"/>
     <pc:docChg chg="custSel delSld modSld">
-      <pc:chgData name="202304239" userId="ab1adf7a-b8eb-4038-b404-de23e20d8a3a" providerId="ADAL" clId="{6C0E59ED-D716-49AF-B2FA-B94E7B8E5A8C}" dt="2026-10-03T04:16:37.708" v="74" actId="14100"/>
+      <pc:chgData name="202304239" userId="ab1adf7a-b8eb-4038-b404-de23e20d8a3a" providerId="ADAL" clId="{6C0E59ED-D716-49AF-B2FA-B94E7B8E5A8C}" dt="2026-10-03T06:08:02.273" v="75" actId="22"/>
       <pc:docMkLst>
         <pc:docMk/>
       </pc:docMkLst>
@@ -299,6 +299,21 @@
             <pc:docMk/>
             <pc:sldMk cId="0" sldId="296"/>
             <ac:picMk id="7" creationId="{DBE7D927-8B33-8CDB-1BC3-DBD46AE4DF3A}"/>
+          </ac:picMkLst>
+        </pc:picChg>
+      </pc:sldChg>
+      <pc:sldChg chg="addSp mod">
+        <pc:chgData name="202304239" userId="ab1adf7a-b8eb-4038-b404-de23e20d8a3a" providerId="ADAL" clId="{6C0E59ED-D716-49AF-B2FA-B94E7B8E5A8C}" dt="2026-10-03T06:08:02.273" v="75" actId="22"/>
+        <pc:sldMkLst>
+          <pc:docMk/>
+          <pc:sldMk cId="0" sldId="297"/>
+        </pc:sldMkLst>
+        <pc:picChg chg="add">
+          <ac:chgData name="202304239" userId="ab1adf7a-b8eb-4038-b404-de23e20d8a3a" providerId="ADAL" clId="{6C0E59ED-D716-49AF-B2FA-B94E7B8E5A8C}" dt="2026-10-03T06:08:02.273" v="75" actId="22"/>
+          <ac:picMkLst>
+            <pc:docMk/>
+            <pc:sldMk cId="0" sldId="297"/>
+            <ac:picMk id="5" creationId="{A90FDE7D-1E04-5388-2EF9-2BF6180BCFE4}"/>
           </ac:picMkLst>
         </pc:picChg>
       </pc:sldChg>
@@ -8622,6 +8637,36 @@
           </a:p>
         </p:txBody>
       </p:sp>
+      <p:pic>
+        <p:nvPicPr>
+          <p:cNvPr id="5" name="Picture 4">
+            <a:extLst>
+              <a:ext uri="{FF2B5EF4-FFF2-40B4-BE49-F238E27FC236}">
+                <a16:creationId xmlns:a16="http://schemas.microsoft.com/office/drawing/2014/main" id="{A90FDE7D-1E04-5388-2EF9-2BF6180BCFE4}"/>
+              </a:ext>
+            </a:extLst>
+          </p:cNvPr>
+          <p:cNvPicPr>
+            <a:picLocks noChangeAspect="1"/>
+          </p:cNvPicPr>
+          <p:nvPr/>
+        </p:nvPicPr>
+        <p:blipFill>
+          <a:blip r:embed="rId3"/>
+          <a:stretch>
+            <a:fillRect/>
+          </a:stretch>
+        </p:blipFill>
+        <p:spPr>
+          <a:xfrm>
+            <a:off x="3988887" y="2724089"/>
+            <a:ext cx="4214225" cy="1409822"/>
+          </a:xfrm>
+          <a:prstGeom prst="rect">
+            <a:avLst/>
+          </a:prstGeom>
+        </p:spPr>
+      </p:pic>
     </p:spTree>
   </p:cSld>
   <p:clrMapOvr>

--- a/slides/2026-10-03_研究進捗報告_claude.pptx
+++ b/slides/2026-10-03_研究進捗報告_claude.pptx
@@ -184,7 +184,7 @@
   <pc:docChgLst>
     <pc:chgData name="202304239" userId="ab1adf7a-b8eb-4038-b404-de23e20d8a3a" providerId="ADAL" clId="{6C0E59ED-D716-49AF-B2FA-B94E7B8E5A8C}"/>
     <pc:docChg chg="custSel delSld modSld">
-      <pc:chgData name="202304239" userId="ab1adf7a-b8eb-4038-b404-de23e20d8a3a" providerId="ADAL" clId="{6C0E59ED-D716-49AF-B2FA-B94E7B8E5A8C}" dt="2026-10-03T06:08:02.273" v="75" actId="22"/>
+      <pc:chgData name="202304239" userId="ab1adf7a-b8eb-4038-b404-de23e20d8a3a" providerId="ADAL" clId="{6C0E59ED-D716-49AF-B2FA-B94E7B8E5A8C}" dt="2026-10-03T06:10:09.262" v="81" actId="478"/>
       <pc:docMkLst>
         <pc:docMk/>
       </pc:docMkLst>
@@ -314,6 +314,36 @@
             <pc:docMk/>
             <pc:sldMk cId="0" sldId="297"/>
             <ac:picMk id="5" creationId="{A90FDE7D-1E04-5388-2EF9-2BF6180BCFE4}"/>
+          </ac:picMkLst>
+        </pc:picChg>
+      </pc:sldChg>
+      <pc:sldChg chg="addSp modSp mod">
+        <pc:chgData name="202304239" userId="ab1adf7a-b8eb-4038-b404-de23e20d8a3a" providerId="ADAL" clId="{6C0E59ED-D716-49AF-B2FA-B94E7B8E5A8C}" dt="2026-10-03T06:10:08.014" v="80" actId="27614"/>
+        <pc:sldMkLst>
+          <pc:docMk/>
+          <pc:sldMk cId="0" sldId="299"/>
+        </pc:sldMkLst>
+        <pc:picChg chg="add mod">
+          <ac:chgData name="202304239" userId="ab1adf7a-b8eb-4038-b404-de23e20d8a3a" providerId="ADAL" clId="{6C0E59ED-D716-49AF-B2FA-B94E7B8E5A8C}" dt="2026-10-03T06:10:08.014" v="80" actId="27614"/>
+          <ac:picMkLst>
+            <pc:docMk/>
+            <pc:sldMk cId="0" sldId="299"/>
+            <ac:picMk id="5" creationId="{4380DBC0-9AA7-8727-D6C3-C05AE0BF39C9}"/>
+          </ac:picMkLst>
+        </pc:picChg>
+      </pc:sldChg>
+      <pc:sldChg chg="addSp delSp modSp mod">
+        <pc:chgData name="202304239" userId="ab1adf7a-b8eb-4038-b404-de23e20d8a3a" providerId="ADAL" clId="{6C0E59ED-D716-49AF-B2FA-B94E7B8E5A8C}" dt="2026-10-03T06:10:09.262" v="81" actId="478"/>
+        <pc:sldMkLst>
+          <pc:docMk/>
+          <pc:sldMk cId="0" sldId="300"/>
+        </pc:sldMkLst>
+        <pc:picChg chg="add del mod">
+          <ac:chgData name="202304239" userId="ab1adf7a-b8eb-4038-b404-de23e20d8a3a" providerId="ADAL" clId="{6C0E59ED-D716-49AF-B2FA-B94E7B8E5A8C}" dt="2026-10-03T06:10:09.262" v="81" actId="478"/>
+          <ac:picMkLst>
+            <pc:docMk/>
+            <pc:sldMk cId="0" sldId="300"/>
+            <ac:picMk id="5" creationId="{4206F3F6-6980-B027-0044-AE735E407525}"/>
           </ac:picMkLst>
         </pc:picChg>
       </pc:sldChg>
@@ -9104,6 +9134,36 @@
           </a:p>
         </p:txBody>
       </p:sp>
+      <p:pic>
+        <p:nvPicPr>
+          <p:cNvPr id="5" name="Picture 4" descr="The image shows a segment of Python code with numpy array operations, initializing a position array for a simulation or optimization process, adjusting the position values with small random perturbations, and selectively modifying the sign of certain elements.&#10;&#10;AI-generated content may be incorrect.">
+            <a:extLst>
+              <a:ext uri="{FF2B5EF4-FFF2-40B4-BE49-F238E27FC236}">
+                <a16:creationId xmlns:a16="http://schemas.microsoft.com/office/drawing/2014/main" id="{4380DBC0-9AA7-8727-D6C3-C05AE0BF39C9}"/>
+              </a:ext>
+            </a:extLst>
+          </p:cNvPr>
+          <p:cNvPicPr>
+            <a:picLocks noChangeAspect="1"/>
+          </p:cNvPicPr>
+          <p:nvPr/>
+        </p:nvPicPr>
+        <p:blipFill>
+          <a:blip r:embed="rId3"/>
+          <a:stretch>
+            <a:fillRect/>
+          </a:stretch>
+        </p:blipFill>
+        <p:spPr>
+          <a:xfrm>
+            <a:off x="5120027" y="454311"/>
+            <a:ext cx="7071973" cy="1005927"/>
+          </a:xfrm>
+          <a:prstGeom prst="rect">
+            <a:avLst/>
+          </a:prstGeom>
+        </p:spPr>
+      </p:pic>
     </p:spTree>
   </p:cSld>
   <p:clrMapOvr>
